--- a/UNIUBE-LP/Teoria_LP.pptx
+++ b/UNIUBE-LP/Teoria_LP.pptx
@@ -19542,8 +19542,8 @@
           </a:p>
         </p:txBody>
       </p:sp>
-      <mc:AlternateContent xmlns:mc="http://schemas.openxmlformats.org/markup-compatibility/2006">
-        <mc:Choice xmlns:a14="http://schemas.microsoft.com/office/drawing/2010/main" Requires="a14">
+      <mc:AlternateContent xmlns:mc="http://schemas.openxmlformats.org/markup-compatibility/2006" xmlns:a14="http://schemas.microsoft.com/office/drawing/2010/main">
+        <mc:Choice Requires="a14">
           <p:sp>
             <p:nvSpPr>
               <p:cNvPr id="6" name="Espaço Reservado para Conteúdo 5">
@@ -19744,7 +19744,7 @@
             </p:txBody>
           </p:sp>
         </mc:Choice>
-        <mc:Fallback>
+        <mc:Fallback xmlns="">
           <p:sp>
             <p:nvSpPr>
               <p:cNvPr id="6" name="Espaço Reservado para Conteúdo 5">

--- a/UNIUBE-LP/Teoria_LP.pptx
+++ b/UNIUBE-LP/Teoria_LP.pptx
@@ -6,7 +6,7 @@
     <p:sldMasterId id="2147483684" r:id="rId2"/>
   </p:sldMasterIdLst>
   <p:notesMasterIdLst>
-    <p:notesMasterId r:id="rId31"/>
+    <p:notesMasterId r:id="rId46"/>
   </p:notesMasterIdLst>
   <p:sldIdLst>
     <p:sldId id="276" r:id="rId3"/>
@@ -37,6 +37,21 @@
     <p:sldId id="288" r:id="rId28"/>
     <p:sldId id="289" r:id="rId29"/>
     <p:sldId id="290" r:id="rId30"/>
+    <p:sldId id="294" r:id="rId31"/>
+    <p:sldId id="292" r:id="rId32"/>
+    <p:sldId id="293" r:id="rId33"/>
+    <p:sldId id="291" r:id="rId34"/>
+    <p:sldId id="298" r:id="rId35"/>
+    <p:sldId id="296" r:id="rId36"/>
+    <p:sldId id="295" r:id="rId37"/>
+    <p:sldId id="299" r:id="rId38"/>
+    <p:sldId id="300" r:id="rId39"/>
+    <p:sldId id="301" r:id="rId40"/>
+    <p:sldId id="302" r:id="rId41"/>
+    <p:sldId id="303" r:id="rId42"/>
+    <p:sldId id="304" r:id="rId43"/>
+    <p:sldId id="305" r:id="rId44"/>
+    <p:sldId id="306" r:id="rId45"/>
   </p:sldIdLst>
   <p:sldSz cx="12192000" cy="6858000"/>
   <p:notesSz cx="6858000" cy="9144000"/>
@@ -225,7 +240,7 @@
           <a:p>
             <a:fld id="{6ED03497-8374-466E-85FA-95E1138D8F6E}" type="datetimeFigureOut">
               <a:rPr lang="pt-BR" smtClean="0"/>
-              <a:t>04/08/2026</a:t>
+              <a:t>05/08/2026</a:t>
             </a:fld>
             <a:endParaRPr lang="pt-BR"/>
           </a:p>
@@ -6812,6 +6827,323 @@
 </p:notes>
 </file>
 
+<file path=ppt/notesSlides/notesSlide28.xml><?xml version="1.0" encoding="utf-8"?>
+<p:notes xmlns:a="http://schemas.openxmlformats.org/drawingml/2006/main" xmlns:r="http://schemas.openxmlformats.org/officeDocument/2006/relationships" xmlns:p="http://schemas.openxmlformats.org/presentationml/2006/main">
+  <p:cSld>
+    <p:spTree>
+      <p:nvGrpSpPr>
+        <p:cNvPr id="1" name="">
+          <a:extLst>
+            <a:ext uri="{FF2B5EF4-FFF2-40B4-BE49-F238E27FC236}">
+              <a16:creationId xmlns:a16="http://schemas.microsoft.com/office/drawing/2014/main" id="{2E92C6F1-CAF6-BC25-B510-9CC2118E1F7E}"/>
+            </a:ext>
+          </a:extLst>
+        </p:cNvPr>
+        <p:cNvGrpSpPr/>
+        <p:nvPr/>
+      </p:nvGrpSpPr>
+      <p:grpSpPr>
+        <a:xfrm>
+          <a:off x="0" y="0"/>
+          <a:ext cx="0" cy="0"/>
+          <a:chOff x="0" y="0"/>
+          <a:chExt cx="0" cy="0"/>
+        </a:xfrm>
+      </p:grpSpPr>
+      <p:sp>
+        <p:nvSpPr>
+          <p:cNvPr id="2" name="Espaço Reservado para Imagem de Slide 1">
+            <a:extLst>
+              <a:ext uri="{FF2B5EF4-FFF2-40B4-BE49-F238E27FC236}">
+                <a16:creationId xmlns:a16="http://schemas.microsoft.com/office/drawing/2014/main" id="{166BA548-668B-12DF-C146-C62146B3C627}"/>
+              </a:ext>
+            </a:extLst>
+          </p:cNvPr>
+          <p:cNvSpPr>
+            <a:spLocks noGrp="1" noRot="1" noChangeAspect="1"/>
+          </p:cNvSpPr>
+          <p:nvPr>
+            <p:ph type="sldImg"/>
+          </p:nvPr>
+        </p:nvSpPr>
+        <p:spPr/>
+      </p:sp>
+      <p:sp>
+        <p:nvSpPr>
+          <p:cNvPr id="3" name="Espaço Reservado para Anotações 2">
+            <a:extLst>
+              <a:ext uri="{FF2B5EF4-FFF2-40B4-BE49-F238E27FC236}">
+                <a16:creationId xmlns:a16="http://schemas.microsoft.com/office/drawing/2014/main" id="{956D6CB5-2E32-07C7-3791-C5071EAC57CB}"/>
+              </a:ext>
+            </a:extLst>
+          </p:cNvPr>
+          <p:cNvSpPr>
+            <a:spLocks noGrp="1"/>
+          </p:cNvSpPr>
+          <p:nvPr>
+            <p:ph type="body" idx="1"/>
+          </p:nvPr>
+        </p:nvSpPr>
+        <p:spPr/>
+        <p:txBody>
+          <a:bodyPr/>
+          <a:lstStyle/>
+          <a:p>
+            <a:pPr marL="171450" indent="-171450">
+              <a:buFont typeface="Arial" panose="020B0604020202020204" pitchFamily="34" charset="0"/>
+              <a:buChar char="•"/>
+            </a:pPr>
+            <a:r>
+              <a:rPr lang="pt-BR" dirty="0"/>
+              <a:t>Tecnicamente, alguns compiladores aceitam void </a:t>
+            </a:r>
+            <a:r>
+              <a:rPr lang="pt-BR" dirty="0" err="1"/>
+              <a:t>main</a:t>
+            </a:r>
+            <a:r>
+              <a:rPr lang="pt-BR" dirty="0"/>
+              <a:t>() {...} Mas isso </a:t>
+            </a:r>
+            <a:r>
+              <a:rPr lang="pt-BR" b="1" dirty="0"/>
+              <a:t>não está de acordo com o padrão da linguagem C</a:t>
+            </a:r>
+            <a:r>
+              <a:rPr lang="pt-BR" dirty="0"/>
+              <a:t>. .</a:t>
+            </a:r>
+          </a:p>
+          <a:p>
+            <a:pPr marL="171450" indent="-171450">
+              <a:buFont typeface="Arial" panose="020B0604020202020204" pitchFamily="34" charset="0"/>
+              <a:buChar char="•"/>
+            </a:pPr>
+            <a:endParaRPr lang="pt-BR" dirty="0"/>
+          </a:p>
+          <a:p>
+            <a:pPr marL="171450" indent="-171450">
+              <a:buFont typeface="Arial" panose="020B0604020202020204" pitchFamily="34" charset="0"/>
+              <a:buChar char="•"/>
+            </a:pPr>
+            <a:r>
+              <a:rPr lang="pt-BR" dirty="0"/>
+              <a:t>0 → sucesso </a:t>
+            </a:r>
+          </a:p>
+          <a:p>
+            <a:pPr marL="171450" indent="-171450">
+              <a:buFont typeface="Arial" panose="020B0604020202020204" pitchFamily="34" charset="0"/>
+              <a:buChar char="•"/>
+            </a:pPr>
+            <a:r>
+              <a:rPr lang="pt-BR" dirty="0"/>
+              <a:t>1 → erro genérico </a:t>
+            </a:r>
+          </a:p>
+          <a:p>
+            <a:pPr marL="171450" indent="-171450">
+              <a:buFont typeface="Arial" panose="020B0604020202020204" pitchFamily="34" charset="0"/>
+              <a:buChar char="•"/>
+            </a:pPr>
+            <a:r>
+              <a:rPr lang="pt-BR" dirty="0"/>
+              <a:t>2 → arquivo não encontrado </a:t>
+            </a:r>
+          </a:p>
+          <a:p>
+            <a:pPr marL="171450" indent="-171450">
+              <a:buFont typeface="Arial" panose="020B0604020202020204" pitchFamily="34" charset="0"/>
+              <a:buChar char="•"/>
+            </a:pPr>
+            <a:r>
+              <a:rPr lang="pt-BR" dirty="0"/>
+              <a:t>3 → acesso negado </a:t>
+            </a:r>
+          </a:p>
+          <a:p>
+            <a:pPr marL="171450" indent="-171450">
+              <a:buFont typeface="Arial" panose="020B0604020202020204" pitchFamily="34" charset="0"/>
+              <a:buChar char="•"/>
+            </a:pPr>
+            <a:r>
+              <a:rPr lang="pt-BR" dirty="0"/>
+              <a:t>4 → parâmetro inválido</a:t>
+            </a:r>
+            <a:endParaRPr lang="pt-BR" sz="1200" b="0" kern="1200" dirty="0">
+              <a:solidFill>
+                <a:schemeClr val="tx1"/>
+              </a:solidFill>
+              <a:effectLst/>
+              <a:latin typeface="+mn-lt"/>
+              <a:ea typeface="+mn-ea"/>
+              <a:cs typeface="+mn-cs"/>
+            </a:endParaRPr>
+          </a:p>
+        </p:txBody>
+      </p:sp>
+      <p:sp>
+        <p:nvSpPr>
+          <p:cNvPr id="4" name="Espaço Reservado para Número de Slide 3">
+            <a:extLst>
+              <a:ext uri="{FF2B5EF4-FFF2-40B4-BE49-F238E27FC236}">
+                <a16:creationId xmlns:a16="http://schemas.microsoft.com/office/drawing/2014/main" id="{AAAA837C-3A1D-9FCD-5441-A2EBE6517710}"/>
+              </a:ext>
+            </a:extLst>
+          </p:cNvPr>
+          <p:cNvSpPr>
+            <a:spLocks noGrp="1"/>
+          </p:cNvSpPr>
+          <p:nvPr>
+            <p:ph type="sldNum" sz="quarter" idx="5"/>
+          </p:nvPr>
+        </p:nvSpPr>
+        <p:spPr/>
+        <p:txBody>
+          <a:bodyPr/>
+          <a:lstStyle/>
+          <a:p>
+            <a:fld id="{80F36A49-A1DD-40F8-B8AD-E6F5365256CB}" type="slidenum">
+              <a:rPr lang="pt-BR" smtClean="0"/>
+              <a:t>29</a:t>
+            </a:fld>
+            <a:endParaRPr lang="pt-BR"/>
+          </a:p>
+        </p:txBody>
+      </p:sp>
+    </p:spTree>
+    <p:extLst>
+      <p:ext uri="{BB962C8B-B14F-4D97-AF65-F5344CB8AC3E}">
+        <p14:creationId xmlns:p14="http://schemas.microsoft.com/office/powerpoint/2010/main" val="773946806"/>
+      </p:ext>
+    </p:extLst>
+  </p:cSld>
+  <p:clrMapOvr>
+    <a:masterClrMapping/>
+  </p:clrMapOvr>
+</p:notes>
+</file>
+
+<file path=ppt/notesSlides/notesSlide29.xml><?xml version="1.0" encoding="utf-8"?>
+<p:notes xmlns:a="http://schemas.openxmlformats.org/drawingml/2006/main" xmlns:r="http://schemas.openxmlformats.org/officeDocument/2006/relationships" xmlns:p="http://schemas.openxmlformats.org/presentationml/2006/main">
+  <p:cSld>
+    <p:spTree>
+      <p:nvGrpSpPr>
+        <p:cNvPr id="1" name="">
+          <a:extLst>
+            <a:ext uri="{FF2B5EF4-FFF2-40B4-BE49-F238E27FC236}">
+              <a16:creationId xmlns:a16="http://schemas.microsoft.com/office/drawing/2014/main" id="{07D7CB19-366C-C2F9-42FB-8DE172F1DC21}"/>
+            </a:ext>
+          </a:extLst>
+        </p:cNvPr>
+        <p:cNvGrpSpPr/>
+        <p:nvPr/>
+      </p:nvGrpSpPr>
+      <p:grpSpPr>
+        <a:xfrm>
+          <a:off x="0" y="0"/>
+          <a:ext cx="0" cy="0"/>
+          <a:chOff x="0" y="0"/>
+          <a:chExt cx="0" cy="0"/>
+        </a:xfrm>
+      </p:grpSpPr>
+      <p:sp>
+        <p:nvSpPr>
+          <p:cNvPr id="2" name="Espaço Reservado para Imagem de Slide 1">
+            <a:extLst>
+              <a:ext uri="{FF2B5EF4-FFF2-40B4-BE49-F238E27FC236}">
+                <a16:creationId xmlns:a16="http://schemas.microsoft.com/office/drawing/2014/main" id="{1C87C84D-FCB4-1B22-0B4A-6CC9E7B8A1CE}"/>
+              </a:ext>
+            </a:extLst>
+          </p:cNvPr>
+          <p:cNvSpPr>
+            <a:spLocks noGrp="1" noRot="1" noChangeAspect="1"/>
+          </p:cNvSpPr>
+          <p:nvPr>
+            <p:ph type="sldImg"/>
+          </p:nvPr>
+        </p:nvSpPr>
+        <p:spPr/>
+      </p:sp>
+      <p:sp>
+        <p:nvSpPr>
+          <p:cNvPr id="3" name="Espaço Reservado para Anotações 2">
+            <a:extLst>
+              <a:ext uri="{FF2B5EF4-FFF2-40B4-BE49-F238E27FC236}">
+                <a16:creationId xmlns:a16="http://schemas.microsoft.com/office/drawing/2014/main" id="{9999CFD9-237E-404F-B40D-D55B8D2EBE5F}"/>
+              </a:ext>
+            </a:extLst>
+          </p:cNvPr>
+          <p:cNvSpPr>
+            <a:spLocks noGrp="1"/>
+          </p:cNvSpPr>
+          <p:nvPr>
+            <p:ph type="body" idx="1"/>
+          </p:nvPr>
+        </p:nvSpPr>
+        <p:spPr/>
+        <p:txBody>
+          <a:bodyPr/>
+          <a:lstStyle/>
+          <a:p>
+            <a:pPr marL="171450" indent="-171450">
+              <a:buFont typeface="Arial" panose="020B0604020202020204" pitchFamily="34" charset="0"/>
+              <a:buChar char="•"/>
+            </a:pPr>
+            <a:endParaRPr lang="pt-BR" sz="1200" b="0" kern="1200" dirty="0">
+              <a:solidFill>
+                <a:schemeClr val="tx1"/>
+              </a:solidFill>
+              <a:effectLst/>
+              <a:latin typeface="+mn-lt"/>
+              <a:ea typeface="+mn-ea"/>
+              <a:cs typeface="+mn-cs"/>
+            </a:endParaRPr>
+          </a:p>
+        </p:txBody>
+      </p:sp>
+      <p:sp>
+        <p:nvSpPr>
+          <p:cNvPr id="4" name="Espaço Reservado para Número de Slide 3">
+            <a:extLst>
+              <a:ext uri="{FF2B5EF4-FFF2-40B4-BE49-F238E27FC236}">
+                <a16:creationId xmlns:a16="http://schemas.microsoft.com/office/drawing/2014/main" id="{A56F7382-9A20-2174-84F6-08F582704743}"/>
+              </a:ext>
+            </a:extLst>
+          </p:cNvPr>
+          <p:cNvSpPr>
+            <a:spLocks noGrp="1"/>
+          </p:cNvSpPr>
+          <p:nvPr>
+            <p:ph type="sldNum" sz="quarter" idx="5"/>
+          </p:nvPr>
+        </p:nvSpPr>
+        <p:spPr/>
+        <p:txBody>
+          <a:bodyPr/>
+          <a:lstStyle/>
+          <a:p>
+            <a:fld id="{80F36A49-A1DD-40F8-B8AD-E6F5365256CB}" type="slidenum">
+              <a:rPr lang="pt-BR" smtClean="0"/>
+              <a:t>30</a:t>
+            </a:fld>
+            <a:endParaRPr lang="pt-BR"/>
+          </a:p>
+        </p:txBody>
+      </p:sp>
+    </p:spTree>
+    <p:extLst>
+      <p:ext uri="{BB962C8B-B14F-4D97-AF65-F5344CB8AC3E}">
+        <p14:creationId xmlns:p14="http://schemas.microsoft.com/office/powerpoint/2010/main" val="3714767485"/>
+      </p:ext>
+    </p:extLst>
+  </p:cSld>
+  <p:clrMapOvr>
+    <a:masterClrMapping/>
+  </p:clrMapOvr>
+</p:notes>
+</file>
+
 <file path=ppt/notesSlides/notesSlide3.xml><?xml version="1.0" encoding="utf-8"?>
 <p:notes xmlns:a="http://schemas.openxmlformats.org/drawingml/2006/main" xmlns:r="http://schemas.openxmlformats.org/officeDocument/2006/relationships" xmlns:p="http://schemas.openxmlformats.org/presentationml/2006/main">
   <p:cSld>
@@ -6911,6 +7243,1341 @@
     <p:extLst>
       <p:ext uri="{BB962C8B-B14F-4D97-AF65-F5344CB8AC3E}">
         <p14:creationId xmlns:p14="http://schemas.microsoft.com/office/powerpoint/2010/main" val="3172261313"/>
+      </p:ext>
+    </p:extLst>
+  </p:cSld>
+  <p:clrMapOvr>
+    <a:masterClrMapping/>
+  </p:clrMapOvr>
+</p:notes>
+</file>
+
+<file path=ppt/notesSlides/notesSlide30.xml><?xml version="1.0" encoding="utf-8"?>
+<p:notes xmlns:a="http://schemas.openxmlformats.org/drawingml/2006/main" xmlns:r="http://schemas.openxmlformats.org/officeDocument/2006/relationships" xmlns:p="http://schemas.openxmlformats.org/presentationml/2006/main">
+  <p:cSld>
+    <p:spTree>
+      <p:nvGrpSpPr>
+        <p:cNvPr id="1" name="">
+          <a:extLst>
+            <a:ext uri="{FF2B5EF4-FFF2-40B4-BE49-F238E27FC236}">
+              <a16:creationId xmlns:a16="http://schemas.microsoft.com/office/drawing/2014/main" id="{265C8082-8D0C-BAC1-1261-B9B5294705BD}"/>
+            </a:ext>
+          </a:extLst>
+        </p:cNvPr>
+        <p:cNvGrpSpPr/>
+        <p:nvPr/>
+      </p:nvGrpSpPr>
+      <p:grpSpPr>
+        <a:xfrm>
+          <a:off x="0" y="0"/>
+          <a:ext cx="0" cy="0"/>
+          <a:chOff x="0" y="0"/>
+          <a:chExt cx="0" cy="0"/>
+        </a:xfrm>
+      </p:grpSpPr>
+      <p:sp>
+        <p:nvSpPr>
+          <p:cNvPr id="2" name="Espaço Reservado para Imagem de Slide 1">
+            <a:extLst>
+              <a:ext uri="{FF2B5EF4-FFF2-40B4-BE49-F238E27FC236}">
+                <a16:creationId xmlns:a16="http://schemas.microsoft.com/office/drawing/2014/main" id="{89FFCFAC-0B65-614E-D3F0-625E467C1A7D}"/>
+              </a:ext>
+            </a:extLst>
+          </p:cNvPr>
+          <p:cNvSpPr>
+            <a:spLocks noGrp="1" noRot="1" noChangeAspect="1"/>
+          </p:cNvSpPr>
+          <p:nvPr>
+            <p:ph type="sldImg"/>
+          </p:nvPr>
+        </p:nvSpPr>
+        <p:spPr/>
+      </p:sp>
+      <p:sp>
+        <p:nvSpPr>
+          <p:cNvPr id="3" name="Espaço Reservado para Anotações 2">
+            <a:extLst>
+              <a:ext uri="{FF2B5EF4-FFF2-40B4-BE49-F238E27FC236}">
+                <a16:creationId xmlns:a16="http://schemas.microsoft.com/office/drawing/2014/main" id="{7F0049B0-15DA-6048-F6A6-82B40E15E600}"/>
+              </a:ext>
+            </a:extLst>
+          </p:cNvPr>
+          <p:cNvSpPr>
+            <a:spLocks noGrp="1"/>
+          </p:cNvSpPr>
+          <p:nvPr>
+            <p:ph type="body" idx="1"/>
+          </p:nvPr>
+        </p:nvSpPr>
+        <p:spPr/>
+        <p:txBody>
+          <a:bodyPr/>
+          <a:lstStyle/>
+          <a:p>
+            <a:pPr marL="171450" indent="-171450">
+              <a:buFont typeface="Arial" panose="020B0604020202020204" pitchFamily="34" charset="0"/>
+              <a:buChar char="•"/>
+            </a:pPr>
+            <a:endParaRPr lang="pt-BR" sz="1200" b="0" kern="1200" dirty="0">
+              <a:solidFill>
+                <a:schemeClr val="tx1"/>
+              </a:solidFill>
+              <a:effectLst/>
+              <a:latin typeface="+mn-lt"/>
+              <a:ea typeface="+mn-ea"/>
+              <a:cs typeface="+mn-cs"/>
+            </a:endParaRPr>
+          </a:p>
+        </p:txBody>
+      </p:sp>
+      <p:sp>
+        <p:nvSpPr>
+          <p:cNvPr id="4" name="Espaço Reservado para Número de Slide 3">
+            <a:extLst>
+              <a:ext uri="{FF2B5EF4-FFF2-40B4-BE49-F238E27FC236}">
+                <a16:creationId xmlns:a16="http://schemas.microsoft.com/office/drawing/2014/main" id="{608EFFEB-2038-F2F7-7B84-1FB4CE6BEC78}"/>
+              </a:ext>
+            </a:extLst>
+          </p:cNvPr>
+          <p:cNvSpPr>
+            <a:spLocks noGrp="1"/>
+          </p:cNvSpPr>
+          <p:nvPr>
+            <p:ph type="sldNum" sz="quarter" idx="5"/>
+          </p:nvPr>
+        </p:nvSpPr>
+        <p:spPr/>
+        <p:txBody>
+          <a:bodyPr/>
+          <a:lstStyle/>
+          <a:p>
+            <a:fld id="{80F36A49-A1DD-40F8-B8AD-E6F5365256CB}" type="slidenum">
+              <a:rPr lang="pt-BR" smtClean="0"/>
+              <a:t>31</a:t>
+            </a:fld>
+            <a:endParaRPr lang="pt-BR"/>
+          </a:p>
+        </p:txBody>
+      </p:sp>
+    </p:spTree>
+    <p:extLst>
+      <p:ext uri="{BB962C8B-B14F-4D97-AF65-F5344CB8AC3E}">
+        <p14:creationId xmlns:p14="http://schemas.microsoft.com/office/powerpoint/2010/main" val="2419771495"/>
+      </p:ext>
+    </p:extLst>
+  </p:cSld>
+  <p:clrMapOvr>
+    <a:masterClrMapping/>
+  </p:clrMapOvr>
+</p:notes>
+</file>
+
+<file path=ppt/notesSlides/notesSlide31.xml><?xml version="1.0" encoding="utf-8"?>
+<p:notes xmlns:a="http://schemas.openxmlformats.org/drawingml/2006/main" xmlns:r="http://schemas.openxmlformats.org/officeDocument/2006/relationships" xmlns:p="http://schemas.openxmlformats.org/presentationml/2006/main">
+  <p:cSld>
+    <p:spTree>
+      <p:nvGrpSpPr>
+        <p:cNvPr id="1" name="">
+          <a:extLst>
+            <a:ext uri="{FF2B5EF4-FFF2-40B4-BE49-F238E27FC236}">
+              <a16:creationId xmlns:a16="http://schemas.microsoft.com/office/drawing/2014/main" id="{9D5A6C64-E4C9-7C6D-E8C4-B61CCE066513}"/>
+            </a:ext>
+          </a:extLst>
+        </p:cNvPr>
+        <p:cNvGrpSpPr/>
+        <p:nvPr/>
+      </p:nvGrpSpPr>
+      <p:grpSpPr>
+        <a:xfrm>
+          <a:off x="0" y="0"/>
+          <a:ext cx="0" cy="0"/>
+          <a:chOff x="0" y="0"/>
+          <a:chExt cx="0" cy="0"/>
+        </a:xfrm>
+      </p:grpSpPr>
+      <p:sp>
+        <p:nvSpPr>
+          <p:cNvPr id="2" name="Espaço Reservado para Imagem de Slide 1">
+            <a:extLst>
+              <a:ext uri="{FF2B5EF4-FFF2-40B4-BE49-F238E27FC236}">
+                <a16:creationId xmlns:a16="http://schemas.microsoft.com/office/drawing/2014/main" id="{41493C10-113D-A3F1-3EC7-F0A01EBFED0F}"/>
+              </a:ext>
+            </a:extLst>
+          </p:cNvPr>
+          <p:cNvSpPr>
+            <a:spLocks noGrp="1" noRot="1" noChangeAspect="1"/>
+          </p:cNvSpPr>
+          <p:nvPr>
+            <p:ph type="sldImg"/>
+          </p:nvPr>
+        </p:nvSpPr>
+        <p:spPr/>
+      </p:sp>
+      <p:sp>
+        <p:nvSpPr>
+          <p:cNvPr id="3" name="Espaço Reservado para Anotações 2">
+            <a:extLst>
+              <a:ext uri="{FF2B5EF4-FFF2-40B4-BE49-F238E27FC236}">
+                <a16:creationId xmlns:a16="http://schemas.microsoft.com/office/drawing/2014/main" id="{37AC869A-2086-77AC-02DC-5FEB3B8B728B}"/>
+              </a:ext>
+            </a:extLst>
+          </p:cNvPr>
+          <p:cNvSpPr>
+            <a:spLocks noGrp="1"/>
+          </p:cNvSpPr>
+          <p:nvPr>
+            <p:ph type="body" idx="1"/>
+          </p:nvPr>
+        </p:nvSpPr>
+        <p:spPr/>
+        <p:txBody>
+          <a:bodyPr/>
+          <a:lstStyle/>
+          <a:p>
+            <a:pPr marL="171450" indent="-171450">
+              <a:buFont typeface="Arial" panose="020B0604020202020204" pitchFamily="34" charset="0"/>
+              <a:buChar char="•"/>
+            </a:pPr>
+            <a:endParaRPr lang="pt-BR" sz="1200" b="0" kern="1200" dirty="0">
+              <a:solidFill>
+                <a:schemeClr val="tx1"/>
+              </a:solidFill>
+              <a:effectLst/>
+              <a:latin typeface="+mn-lt"/>
+              <a:ea typeface="+mn-ea"/>
+              <a:cs typeface="+mn-cs"/>
+            </a:endParaRPr>
+          </a:p>
+        </p:txBody>
+      </p:sp>
+      <p:sp>
+        <p:nvSpPr>
+          <p:cNvPr id="4" name="Espaço Reservado para Número de Slide 3">
+            <a:extLst>
+              <a:ext uri="{FF2B5EF4-FFF2-40B4-BE49-F238E27FC236}">
+                <a16:creationId xmlns:a16="http://schemas.microsoft.com/office/drawing/2014/main" id="{ECB20590-96E8-331A-DB6C-AB67473F5529}"/>
+              </a:ext>
+            </a:extLst>
+          </p:cNvPr>
+          <p:cNvSpPr>
+            <a:spLocks noGrp="1"/>
+          </p:cNvSpPr>
+          <p:nvPr>
+            <p:ph type="sldNum" sz="quarter" idx="5"/>
+          </p:nvPr>
+        </p:nvSpPr>
+        <p:spPr/>
+        <p:txBody>
+          <a:bodyPr/>
+          <a:lstStyle/>
+          <a:p>
+            <a:fld id="{80F36A49-A1DD-40F8-B8AD-E6F5365256CB}" type="slidenum">
+              <a:rPr lang="pt-BR" smtClean="0"/>
+              <a:t>32</a:t>
+            </a:fld>
+            <a:endParaRPr lang="pt-BR"/>
+          </a:p>
+        </p:txBody>
+      </p:sp>
+    </p:spTree>
+    <p:extLst>
+      <p:ext uri="{BB962C8B-B14F-4D97-AF65-F5344CB8AC3E}">
+        <p14:creationId xmlns:p14="http://schemas.microsoft.com/office/powerpoint/2010/main" val="2938796205"/>
+      </p:ext>
+    </p:extLst>
+  </p:cSld>
+  <p:clrMapOvr>
+    <a:masterClrMapping/>
+  </p:clrMapOvr>
+</p:notes>
+</file>
+
+<file path=ppt/notesSlides/notesSlide32.xml><?xml version="1.0" encoding="utf-8"?>
+<p:notes xmlns:a="http://schemas.openxmlformats.org/drawingml/2006/main" xmlns:r="http://schemas.openxmlformats.org/officeDocument/2006/relationships" xmlns:p="http://schemas.openxmlformats.org/presentationml/2006/main">
+  <p:cSld>
+    <p:spTree>
+      <p:nvGrpSpPr>
+        <p:cNvPr id="1" name="">
+          <a:extLst>
+            <a:ext uri="{FF2B5EF4-FFF2-40B4-BE49-F238E27FC236}">
+              <a16:creationId xmlns:a16="http://schemas.microsoft.com/office/drawing/2014/main" id="{F7321956-1F83-B933-D38B-FA178F7C6673}"/>
+            </a:ext>
+          </a:extLst>
+        </p:cNvPr>
+        <p:cNvGrpSpPr/>
+        <p:nvPr/>
+      </p:nvGrpSpPr>
+      <p:grpSpPr>
+        <a:xfrm>
+          <a:off x="0" y="0"/>
+          <a:ext cx="0" cy="0"/>
+          <a:chOff x="0" y="0"/>
+          <a:chExt cx="0" cy="0"/>
+        </a:xfrm>
+      </p:grpSpPr>
+      <p:sp>
+        <p:nvSpPr>
+          <p:cNvPr id="2" name="Espaço Reservado para Imagem de Slide 1">
+            <a:extLst>
+              <a:ext uri="{FF2B5EF4-FFF2-40B4-BE49-F238E27FC236}">
+                <a16:creationId xmlns:a16="http://schemas.microsoft.com/office/drawing/2014/main" id="{32C1A5B2-020A-06F2-82C3-9D7DD8C98071}"/>
+              </a:ext>
+            </a:extLst>
+          </p:cNvPr>
+          <p:cNvSpPr>
+            <a:spLocks noGrp="1" noRot="1" noChangeAspect="1"/>
+          </p:cNvSpPr>
+          <p:nvPr>
+            <p:ph type="sldImg"/>
+          </p:nvPr>
+        </p:nvSpPr>
+        <p:spPr/>
+      </p:sp>
+      <p:sp>
+        <p:nvSpPr>
+          <p:cNvPr id="3" name="Espaço Reservado para Anotações 2">
+            <a:extLst>
+              <a:ext uri="{FF2B5EF4-FFF2-40B4-BE49-F238E27FC236}">
+                <a16:creationId xmlns:a16="http://schemas.microsoft.com/office/drawing/2014/main" id="{56030C79-DDBA-4923-770E-FFBB8CDDB2D9}"/>
+              </a:ext>
+            </a:extLst>
+          </p:cNvPr>
+          <p:cNvSpPr>
+            <a:spLocks noGrp="1"/>
+          </p:cNvSpPr>
+          <p:nvPr>
+            <p:ph type="body" idx="1"/>
+          </p:nvPr>
+        </p:nvSpPr>
+        <p:spPr/>
+        <p:txBody>
+          <a:bodyPr/>
+          <a:lstStyle/>
+          <a:p>
+            <a:pPr marL="171450" indent="-171450">
+              <a:buFont typeface="Arial" panose="020B0604020202020204" pitchFamily="34" charset="0"/>
+              <a:buChar char="•"/>
+            </a:pPr>
+            <a:endParaRPr lang="pt-BR" sz="1200" b="0" kern="1200" dirty="0">
+              <a:solidFill>
+                <a:schemeClr val="tx1"/>
+              </a:solidFill>
+              <a:effectLst/>
+              <a:latin typeface="+mn-lt"/>
+              <a:ea typeface="+mn-ea"/>
+              <a:cs typeface="+mn-cs"/>
+            </a:endParaRPr>
+          </a:p>
+        </p:txBody>
+      </p:sp>
+      <p:sp>
+        <p:nvSpPr>
+          <p:cNvPr id="4" name="Espaço Reservado para Número de Slide 3">
+            <a:extLst>
+              <a:ext uri="{FF2B5EF4-FFF2-40B4-BE49-F238E27FC236}">
+                <a16:creationId xmlns:a16="http://schemas.microsoft.com/office/drawing/2014/main" id="{085588B7-D4CC-3C65-C878-57F9ADC8FFC8}"/>
+              </a:ext>
+            </a:extLst>
+          </p:cNvPr>
+          <p:cNvSpPr>
+            <a:spLocks noGrp="1"/>
+          </p:cNvSpPr>
+          <p:nvPr>
+            <p:ph type="sldNum" sz="quarter" idx="5"/>
+          </p:nvPr>
+        </p:nvSpPr>
+        <p:spPr/>
+        <p:txBody>
+          <a:bodyPr/>
+          <a:lstStyle/>
+          <a:p>
+            <a:fld id="{80F36A49-A1DD-40F8-B8AD-E6F5365256CB}" type="slidenum">
+              <a:rPr lang="pt-BR" smtClean="0"/>
+              <a:t>33</a:t>
+            </a:fld>
+            <a:endParaRPr lang="pt-BR"/>
+          </a:p>
+        </p:txBody>
+      </p:sp>
+    </p:spTree>
+    <p:extLst>
+      <p:ext uri="{BB962C8B-B14F-4D97-AF65-F5344CB8AC3E}">
+        <p14:creationId xmlns:p14="http://schemas.microsoft.com/office/powerpoint/2010/main" val="741673413"/>
+      </p:ext>
+    </p:extLst>
+  </p:cSld>
+  <p:clrMapOvr>
+    <a:masterClrMapping/>
+  </p:clrMapOvr>
+</p:notes>
+</file>
+
+<file path=ppt/notesSlides/notesSlide33.xml><?xml version="1.0" encoding="utf-8"?>
+<p:notes xmlns:a="http://schemas.openxmlformats.org/drawingml/2006/main" xmlns:r="http://schemas.openxmlformats.org/officeDocument/2006/relationships" xmlns:p="http://schemas.openxmlformats.org/presentationml/2006/main">
+  <p:cSld>
+    <p:spTree>
+      <p:nvGrpSpPr>
+        <p:cNvPr id="1" name="">
+          <a:extLst>
+            <a:ext uri="{FF2B5EF4-FFF2-40B4-BE49-F238E27FC236}">
+              <a16:creationId xmlns:a16="http://schemas.microsoft.com/office/drawing/2014/main" id="{2C1A93E1-ED2C-075C-7580-0F69FEAC64A4}"/>
+            </a:ext>
+          </a:extLst>
+        </p:cNvPr>
+        <p:cNvGrpSpPr/>
+        <p:nvPr/>
+      </p:nvGrpSpPr>
+      <p:grpSpPr>
+        <a:xfrm>
+          <a:off x="0" y="0"/>
+          <a:ext cx="0" cy="0"/>
+          <a:chOff x="0" y="0"/>
+          <a:chExt cx="0" cy="0"/>
+        </a:xfrm>
+      </p:grpSpPr>
+      <p:sp>
+        <p:nvSpPr>
+          <p:cNvPr id="2" name="Espaço Reservado para Imagem de Slide 1">
+            <a:extLst>
+              <a:ext uri="{FF2B5EF4-FFF2-40B4-BE49-F238E27FC236}">
+                <a16:creationId xmlns:a16="http://schemas.microsoft.com/office/drawing/2014/main" id="{B58999D1-E6BD-5F75-1873-EA30E5F47EEE}"/>
+              </a:ext>
+            </a:extLst>
+          </p:cNvPr>
+          <p:cNvSpPr>
+            <a:spLocks noGrp="1" noRot="1" noChangeAspect="1"/>
+          </p:cNvSpPr>
+          <p:nvPr>
+            <p:ph type="sldImg"/>
+          </p:nvPr>
+        </p:nvSpPr>
+        <p:spPr/>
+      </p:sp>
+      <p:sp>
+        <p:nvSpPr>
+          <p:cNvPr id="3" name="Espaço Reservado para Anotações 2">
+            <a:extLst>
+              <a:ext uri="{FF2B5EF4-FFF2-40B4-BE49-F238E27FC236}">
+                <a16:creationId xmlns:a16="http://schemas.microsoft.com/office/drawing/2014/main" id="{D1066D26-94BF-2DBA-9E7C-4FD31F676B78}"/>
+              </a:ext>
+            </a:extLst>
+          </p:cNvPr>
+          <p:cNvSpPr>
+            <a:spLocks noGrp="1"/>
+          </p:cNvSpPr>
+          <p:nvPr>
+            <p:ph type="body" idx="1"/>
+          </p:nvPr>
+        </p:nvSpPr>
+        <p:spPr/>
+        <p:txBody>
+          <a:bodyPr/>
+          <a:lstStyle/>
+          <a:p>
+            <a:pPr marL="171450" indent="-171450">
+              <a:buFont typeface="Arial" panose="020B0604020202020204" pitchFamily="34" charset="0"/>
+              <a:buChar char="•"/>
+            </a:pPr>
+            <a:endParaRPr lang="pt-BR" sz="1200" b="0" kern="1200" dirty="0">
+              <a:solidFill>
+                <a:schemeClr val="tx1"/>
+              </a:solidFill>
+              <a:effectLst/>
+              <a:latin typeface="+mn-lt"/>
+              <a:ea typeface="+mn-ea"/>
+              <a:cs typeface="+mn-cs"/>
+            </a:endParaRPr>
+          </a:p>
+        </p:txBody>
+      </p:sp>
+      <p:sp>
+        <p:nvSpPr>
+          <p:cNvPr id="4" name="Espaço Reservado para Número de Slide 3">
+            <a:extLst>
+              <a:ext uri="{FF2B5EF4-FFF2-40B4-BE49-F238E27FC236}">
+                <a16:creationId xmlns:a16="http://schemas.microsoft.com/office/drawing/2014/main" id="{2219EED2-7E88-6703-72A2-2790FE66C8F4}"/>
+              </a:ext>
+            </a:extLst>
+          </p:cNvPr>
+          <p:cNvSpPr>
+            <a:spLocks noGrp="1"/>
+          </p:cNvSpPr>
+          <p:nvPr>
+            <p:ph type="sldNum" sz="quarter" idx="5"/>
+          </p:nvPr>
+        </p:nvSpPr>
+        <p:spPr/>
+        <p:txBody>
+          <a:bodyPr/>
+          <a:lstStyle/>
+          <a:p>
+            <a:fld id="{80F36A49-A1DD-40F8-B8AD-E6F5365256CB}" type="slidenum">
+              <a:rPr lang="pt-BR" smtClean="0"/>
+              <a:t>34</a:t>
+            </a:fld>
+            <a:endParaRPr lang="pt-BR"/>
+          </a:p>
+        </p:txBody>
+      </p:sp>
+    </p:spTree>
+    <p:extLst>
+      <p:ext uri="{BB962C8B-B14F-4D97-AF65-F5344CB8AC3E}">
+        <p14:creationId xmlns:p14="http://schemas.microsoft.com/office/powerpoint/2010/main" val="1196224968"/>
+      </p:ext>
+    </p:extLst>
+  </p:cSld>
+  <p:clrMapOvr>
+    <a:masterClrMapping/>
+  </p:clrMapOvr>
+</p:notes>
+</file>
+
+<file path=ppt/notesSlides/notesSlide34.xml><?xml version="1.0" encoding="utf-8"?>
+<p:notes xmlns:a="http://schemas.openxmlformats.org/drawingml/2006/main" xmlns:r="http://schemas.openxmlformats.org/officeDocument/2006/relationships" xmlns:p="http://schemas.openxmlformats.org/presentationml/2006/main">
+  <p:cSld>
+    <p:spTree>
+      <p:nvGrpSpPr>
+        <p:cNvPr id="1" name="">
+          <a:extLst>
+            <a:ext uri="{FF2B5EF4-FFF2-40B4-BE49-F238E27FC236}">
+              <a16:creationId xmlns:a16="http://schemas.microsoft.com/office/drawing/2014/main" id="{FC52A26A-E1EC-7BA8-F11E-D68176410568}"/>
+            </a:ext>
+          </a:extLst>
+        </p:cNvPr>
+        <p:cNvGrpSpPr/>
+        <p:nvPr/>
+      </p:nvGrpSpPr>
+      <p:grpSpPr>
+        <a:xfrm>
+          <a:off x="0" y="0"/>
+          <a:ext cx="0" cy="0"/>
+          <a:chOff x="0" y="0"/>
+          <a:chExt cx="0" cy="0"/>
+        </a:xfrm>
+      </p:grpSpPr>
+      <p:sp>
+        <p:nvSpPr>
+          <p:cNvPr id="2" name="Espaço Reservado para Imagem de Slide 1">
+            <a:extLst>
+              <a:ext uri="{FF2B5EF4-FFF2-40B4-BE49-F238E27FC236}">
+                <a16:creationId xmlns:a16="http://schemas.microsoft.com/office/drawing/2014/main" id="{56DAD396-78B8-C19E-2771-99AF124525DB}"/>
+              </a:ext>
+            </a:extLst>
+          </p:cNvPr>
+          <p:cNvSpPr>
+            <a:spLocks noGrp="1" noRot="1" noChangeAspect="1"/>
+          </p:cNvSpPr>
+          <p:nvPr>
+            <p:ph type="sldImg"/>
+          </p:nvPr>
+        </p:nvSpPr>
+        <p:spPr/>
+      </p:sp>
+      <p:sp>
+        <p:nvSpPr>
+          <p:cNvPr id="3" name="Espaço Reservado para Anotações 2">
+            <a:extLst>
+              <a:ext uri="{FF2B5EF4-FFF2-40B4-BE49-F238E27FC236}">
+                <a16:creationId xmlns:a16="http://schemas.microsoft.com/office/drawing/2014/main" id="{5A7D803B-134A-A29D-C37A-66A520EDB6F7}"/>
+              </a:ext>
+            </a:extLst>
+          </p:cNvPr>
+          <p:cNvSpPr>
+            <a:spLocks noGrp="1"/>
+          </p:cNvSpPr>
+          <p:nvPr>
+            <p:ph type="body" idx="1"/>
+          </p:nvPr>
+        </p:nvSpPr>
+        <p:spPr/>
+        <p:txBody>
+          <a:bodyPr/>
+          <a:lstStyle/>
+          <a:p>
+            <a:pPr marL="171450" indent="-171450">
+              <a:buFont typeface="Arial" panose="020B0604020202020204" pitchFamily="34" charset="0"/>
+              <a:buChar char="•"/>
+            </a:pPr>
+            <a:endParaRPr lang="pt-BR" sz="1200" b="0" kern="1200" dirty="0">
+              <a:solidFill>
+                <a:schemeClr val="tx1"/>
+              </a:solidFill>
+              <a:effectLst/>
+              <a:latin typeface="+mn-lt"/>
+              <a:ea typeface="+mn-ea"/>
+              <a:cs typeface="+mn-cs"/>
+            </a:endParaRPr>
+          </a:p>
+        </p:txBody>
+      </p:sp>
+      <p:sp>
+        <p:nvSpPr>
+          <p:cNvPr id="4" name="Espaço Reservado para Número de Slide 3">
+            <a:extLst>
+              <a:ext uri="{FF2B5EF4-FFF2-40B4-BE49-F238E27FC236}">
+                <a16:creationId xmlns:a16="http://schemas.microsoft.com/office/drawing/2014/main" id="{9C93B4FF-3702-514A-C6FB-8D4BCBC8B7ED}"/>
+              </a:ext>
+            </a:extLst>
+          </p:cNvPr>
+          <p:cNvSpPr>
+            <a:spLocks noGrp="1"/>
+          </p:cNvSpPr>
+          <p:nvPr>
+            <p:ph type="sldNum" sz="quarter" idx="5"/>
+          </p:nvPr>
+        </p:nvSpPr>
+        <p:spPr/>
+        <p:txBody>
+          <a:bodyPr/>
+          <a:lstStyle/>
+          <a:p>
+            <a:fld id="{80F36A49-A1DD-40F8-B8AD-E6F5365256CB}" type="slidenum">
+              <a:rPr lang="pt-BR" smtClean="0"/>
+              <a:t>35</a:t>
+            </a:fld>
+            <a:endParaRPr lang="pt-BR"/>
+          </a:p>
+        </p:txBody>
+      </p:sp>
+    </p:spTree>
+    <p:extLst>
+      <p:ext uri="{BB962C8B-B14F-4D97-AF65-F5344CB8AC3E}">
+        <p14:creationId xmlns:p14="http://schemas.microsoft.com/office/powerpoint/2010/main" val="255532502"/>
+      </p:ext>
+    </p:extLst>
+  </p:cSld>
+  <p:clrMapOvr>
+    <a:masterClrMapping/>
+  </p:clrMapOvr>
+</p:notes>
+</file>
+
+<file path=ppt/notesSlides/notesSlide35.xml><?xml version="1.0" encoding="utf-8"?>
+<p:notes xmlns:a="http://schemas.openxmlformats.org/drawingml/2006/main" xmlns:r="http://schemas.openxmlformats.org/officeDocument/2006/relationships" xmlns:p="http://schemas.openxmlformats.org/presentationml/2006/main">
+  <p:cSld>
+    <p:spTree>
+      <p:nvGrpSpPr>
+        <p:cNvPr id="1" name="">
+          <a:extLst>
+            <a:ext uri="{FF2B5EF4-FFF2-40B4-BE49-F238E27FC236}">
+              <a16:creationId xmlns:a16="http://schemas.microsoft.com/office/drawing/2014/main" id="{838256BA-C5A3-1799-D720-EBC4F5A5907D}"/>
+            </a:ext>
+          </a:extLst>
+        </p:cNvPr>
+        <p:cNvGrpSpPr/>
+        <p:nvPr/>
+      </p:nvGrpSpPr>
+      <p:grpSpPr>
+        <a:xfrm>
+          <a:off x="0" y="0"/>
+          <a:ext cx="0" cy="0"/>
+          <a:chOff x="0" y="0"/>
+          <a:chExt cx="0" cy="0"/>
+        </a:xfrm>
+      </p:grpSpPr>
+      <p:sp>
+        <p:nvSpPr>
+          <p:cNvPr id="2" name="Espaço Reservado para Imagem de Slide 1">
+            <a:extLst>
+              <a:ext uri="{FF2B5EF4-FFF2-40B4-BE49-F238E27FC236}">
+                <a16:creationId xmlns:a16="http://schemas.microsoft.com/office/drawing/2014/main" id="{ABBA047B-578A-A874-8237-A143BBEE64C4}"/>
+              </a:ext>
+            </a:extLst>
+          </p:cNvPr>
+          <p:cNvSpPr>
+            <a:spLocks noGrp="1" noRot="1" noChangeAspect="1"/>
+          </p:cNvSpPr>
+          <p:nvPr>
+            <p:ph type="sldImg"/>
+          </p:nvPr>
+        </p:nvSpPr>
+        <p:spPr/>
+      </p:sp>
+      <p:sp>
+        <p:nvSpPr>
+          <p:cNvPr id="3" name="Espaço Reservado para Anotações 2">
+            <a:extLst>
+              <a:ext uri="{FF2B5EF4-FFF2-40B4-BE49-F238E27FC236}">
+                <a16:creationId xmlns:a16="http://schemas.microsoft.com/office/drawing/2014/main" id="{830F5932-7B0F-7D26-8B85-FCE4F0AAF166}"/>
+              </a:ext>
+            </a:extLst>
+          </p:cNvPr>
+          <p:cNvSpPr>
+            <a:spLocks noGrp="1"/>
+          </p:cNvSpPr>
+          <p:nvPr>
+            <p:ph type="body" idx="1"/>
+          </p:nvPr>
+        </p:nvSpPr>
+        <p:spPr/>
+        <p:txBody>
+          <a:bodyPr/>
+          <a:lstStyle/>
+          <a:p>
+            <a:pPr marL="171450" indent="-171450">
+              <a:buFont typeface="Arial" panose="020B0604020202020204" pitchFamily="34" charset="0"/>
+              <a:buChar char="•"/>
+            </a:pPr>
+            <a:r>
+              <a:rPr lang="pt-BR" sz="1200" b="0" kern="1200" dirty="0">
+                <a:solidFill>
+                  <a:schemeClr val="tx1"/>
+                </a:solidFill>
+                <a:effectLst/>
+                <a:latin typeface="+mn-lt"/>
+                <a:ea typeface="+mn-ea"/>
+                <a:cs typeface="+mn-cs"/>
+              </a:rPr>
+              <a:t>Observação:  </a:t>
+            </a:r>
+            <a:r>
+              <a:rPr lang="pt-BR" sz="1200" dirty="0"/>
+              <a:t>5 % 2=1</a:t>
+            </a:r>
+            <a:r>
+              <a:rPr lang="pt-BR" sz="1200" dirty="0">
+                <a:latin typeface="Calibri" panose="020F0502020204030204" pitchFamily="34" charset="0"/>
+                <a:ea typeface="Calibri" panose="020F0502020204030204" pitchFamily="34" charset="0"/>
+                <a:cs typeface="Calibri" panose="020F0502020204030204" pitchFamily="34" charset="0"/>
+              </a:rPr>
+              <a:t>  porque 2*2=4 (sobrando 1)</a:t>
+            </a:r>
+            <a:r>
+              <a:rPr lang="pt-BR" sz="1200" b="0" kern="1200" dirty="0">
+                <a:solidFill>
+                  <a:schemeClr val="tx1"/>
+                </a:solidFill>
+                <a:effectLst/>
+                <a:latin typeface="+mn-lt"/>
+                <a:ea typeface="+mn-ea"/>
+                <a:cs typeface="+mn-cs"/>
+              </a:rPr>
+              <a:t> </a:t>
+            </a:r>
+          </a:p>
+        </p:txBody>
+      </p:sp>
+      <p:sp>
+        <p:nvSpPr>
+          <p:cNvPr id="4" name="Espaço Reservado para Número de Slide 3">
+            <a:extLst>
+              <a:ext uri="{FF2B5EF4-FFF2-40B4-BE49-F238E27FC236}">
+                <a16:creationId xmlns:a16="http://schemas.microsoft.com/office/drawing/2014/main" id="{ADC23C5B-674E-1C19-8365-8AFF71652D58}"/>
+              </a:ext>
+            </a:extLst>
+          </p:cNvPr>
+          <p:cNvSpPr>
+            <a:spLocks noGrp="1"/>
+          </p:cNvSpPr>
+          <p:nvPr>
+            <p:ph type="sldNum" sz="quarter" idx="5"/>
+          </p:nvPr>
+        </p:nvSpPr>
+        <p:spPr/>
+        <p:txBody>
+          <a:bodyPr/>
+          <a:lstStyle/>
+          <a:p>
+            <a:fld id="{80F36A49-A1DD-40F8-B8AD-E6F5365256CB}" type="slidenum">
+              <a:rPr lang="pt-BR" smtClean="0"/>
+              <a:t>36</a:t>
+            </a:fld>
+            <a:endParaRPr lang="pt-BR"/>
+          </a:p>
+        </p:txBody>
+      </p:sp>
+    </p:spTree>
+    <p:extLst>
+      <p:ext uri="{BB962C8B-B14F-4D97-AF65-F5344CB8AC3E}">
+        <p14:creationId xmlns:p14="http://schemas.microsoft.com/office/powerpoint/2010/main" val="593285263"/>
+      </p:ext>
+    </p:extLst>
+  </p:cSld>
+  <p:clrMapOvr>
+    <a:masterClrMapping/>
+  </p:clrMapOvr>
+</p:notes>
+</file>
+
+<file path=ppt/notesSlides/notesSlide36.xml><?xml version="1.0" encoding="utf-8"?>
+<p:notes xmlns:a="http://schemas.openxmlformats.org/drawingml/2006/main" xmlns:r="http://schemas.openxmlformats.org/officeDocument/2006/relationships" xmlns:p="http://schemas.openxmlformats.org/presentationml/2006/main">
+  <p:cSld>
+    <p:spTree>
+      <p:nvGrpSpPr>
+        <p:cNvPr id="1" name="">
+          <a:extLst>
+            <a:ext uri="{FF2B5EF4-FFF2-40B4-BE49-F238E27FC236}">
+              <a16:creationId xmlns:a16="http://schemas.microsoft.com/office/drawing/2014/main" id="{F52C02BE-D910-B8A8-A058-5A66E2AE44A5}"/>
+            </a:ext>
+          </a:extLst>
+        </p:cNvPr>
+        <p:cNvGrpSpPr/>
+        <p:nvPr/>
+      </p:nvGrpSpPr>
+      <p:grpSpPr>
+        <a:xfrm>
+          <a:off x="0" y="0"/>
+          <a:ext cx="0" cy="0"/>
+          <a:chOff x="0" y="0"/>
+          <a:chExt cx="0" cy="0"/>
+        </a:xfrm>
+      </p:grpSpPr>
+      <p:sp>
+        <p:nvSpPr>
+          <p:cNvPr id="2" name="Espaço Reservado para Imagem de Slide 1">
+            <a:extLst>
+              <a:ext uri="{FF2B5EF4-FFF2-40B4-BE49-F238E27FC236}">
+                <a16:creationId xmlns:a16="http://schemas.microsoft.com/office/drawing/2014/main" id="{5BC3467B-310C-B537-222C-4C9E39EF231E}"/>
+              </a:ext>
+            </a:extLst>
+          </p:cNvPr>
+          <p:cNvSpPr>
+            <a:spLocks noGrp="1" noRot="1" noChangeAspect="1"/>
+          </p:cNvSpPr>
+          <p:nvPr>
+            <p:ph type="sldImg"/>
+          </p:nvPr>
+        </p:nvSpPr>
+        <p:spPr/>
+      </p:sp>
+      <p:sp>
+        <p:nvSpPr>
+          <p:cNvPr id="3" name="Espaço Reservado para Anotações 2">
+            <a:extLst>
+              <a:ext uri="{FF2B5EF4-FFF2-40B4-BE49-F238E27FC236}">
+                <a16:creationId xmlns:a16="http://schemas.microsoft.com/office/drawing/2014/main" id="{87478E45-E72A-749F-7CB8-B5F1434D14AE}"/>
+              </a:ext>
+            </a:extLst>
+          </p:cNvPr>
+          <p:cNvSpPr>
+            <a:spLocks noGrp="1"/>
+          </p:cNvSpPr>
+          <p:nvPr>
+            <p:ph type="body" idx="1"/>
+          </p:nvPr>
+        </p:nvSpPr>
+        <p:spPr/>
+        <p:txBody>
+          <a:bodyPr/>
+          <a:lstStyle/>
+          <a:p>
+            <a:pPr marL="171450" indent="-171450">
+              <a:buFont typeface="Arial" panose="020B0604020202020204" pitchFamily="34" charset="0"/>
+              <a:buChar char="•"/>
+            </a:pPr>
+            <a:r>
+              <a:rPr lang="pt-BR" sz="1200" b="0" kern="1200" dirty="0">
+                <a:solidFill>
+                  <a:schemeClr val="tx1"/>
+                </a:solidFill>
+                <a:effectLst/>
+                <a:latin typeface="+mn-lt"/>
+                <a:ea typeface="+mn-ea"/>
+                <a:cs typeface="+mn-cs"/>
+              </a:rPr>
+              <a:t>Observação:  </a:t>
+            </a:r>
+            <a:r>
+              <a:rPr lang="pt-BR" sz="1200" dirty="0"/>
+              <a:t>5 % 2=1</a:t>
+            </a:r>
+            <a:r>
+              <a:rPr lang="pt-BR" sz="1200" dirty="0">
+                <a:latin typeface="Calibri" panose="020F0502020204030204" pitchFamily="34" charset="0"/>
+                <a:ea typeface="Calibri" panose="020F0502020204030204" pitchFamily="34" charset="0"/>
+                <a:cs typeface="Calibri" panose="020F0502020204030204" pitchFamily="34" charset="0"/>
+              </a:rPr>
+              <a:t>  porque 2*2=4 (sobrando 1)</a:t>
+            </a:r>
+            <a:r>
+              <a:rPr lang="pt-BR" sz="1200" b="0" kern="1200" dirty="0">
+                <a:solidFill>
+                  <a:schemeClr val="tx1"/>
+                </a:solidFill>
+                <a:effectLst/>
+                <a:latin typeface="+mn-lt"/>
+                <a:ea typeface="+mn-ea"/>
+                <a:cs typeface="+mn-cs"/>
+              </a:rPr>
+              <a:t> </a:t>
+            </a:r>
+          </a:p>
+        </p:txBody>
+      </p:sp>
+      <p:sp>
+        <p:nvSpPr>
+          <p:cNvPr id="4" name="Espaço Reservado para Número de Slide 3">
+            <a:extLst>
+              <a:ext uri="{FF2B5EF4-FFF2-40B4-BE49-F238E27FC236}">
+                <a16:creationId xmlns:a16="http://schemas.microsoft.com/office/drawing/2014/main" id="{D8F66280-2125-5BA7-EA97-29678F739DD6}"/>
+              </a:ext>
+            </a:extLst>
+          </p:cNvPr>
+          <p:cNvSpPr>
+            <a:spLocks noGrp="1"/>
+          </p:cNvSpPr>
+          <p:nvPr>
+            <p:ph type="sldNum" sz="quarter" idx="5"/>
+          </p:nvPr>
+        </p:nvSpPr>
+        <p:spPr/>
+        <p:txBody>
+          <a:bodyPr/>
+          <a:lstStyle/>
+          <a:p>
+            <a:fld id="{80F36A49-A1DD-40F8-B8AD-E6F5365256CB}" type="slidenum">
+              <a:rPr lang="pt-BR" smtClean="0"/>
+              <a:t>37</a:t>
+            </a:fld>
+            <a:endParaRPr lang="pt-BR"/>
+          </a:p>
+        </p:txBody>
+      </p:sp>
+    </p:spTree>
+    <p:extLst>
+      <p:ext uri="{BB962C8B-B14F-4D97-AF65-F5344CB8AC3E}">
+        <p14:creationId xmlns:p14="http://schemas.microsoft.com/office/powerpoint/2010/main" val="1663837591"/>
+      </p:ext>
+    </p:extLst>
+  </p:cSld>
+  <p:clrMapOvr>
+    <a:masterClrMapping/>
+  </p:clrMapOvr>
+</p:notes>
+</file>
+
+<file path=ppt/notesSlides/notesSlide37.xml><?xml version="1.0" encoding="utf-8"?>
+<p:notes xmlns:a="http://schemas.openxmlformats.org/drawingml/2006/main" xmlns:r="http://schemas.openxmlformats.org/officeDocument/2006/relationships" xmlns:p="http://schemas.openxmlformats.org/presentationml/2006/main">
+  <p:cSld>
+    <p:spTree>
+      <p:nvGrpSpPr>
+        <p:cNvPr id="1" name="">
+          <a:extLst>
+            <a:ext uri="{FF2B5EF4-FFF2-40B4-BE49-F238E27FC236}">
+              <a16:creationId xmlns:a16="http://schemas.microsoft.com/office/drawing/2014/main" id="{6A706AFB-5D4D-7CD3-90A8-7AC2BEED16C8}"/>
+            </a:ext>
+          </a:extLst>
+        </p:cNvPr>
+        <p:cNvGrpSpPr/>
+        <p:nvPr/>
+      </p:nvGrpSpPr>
+      <p:grpSpPr>
+        <a:xfrm>
+          <a:off x="0" y="0"/>
+          <a:ext cx="0" cy="0"/>
+          <a:chOff x="0" y="0"/>
+          <a:chExt cx="0" cy="0"/>
+        </a:xfrm>
+      </p:grpSpPr>
+      <p:sp>
+        <p:nvSpPr>
+          <p:cNvPr id="2" name="Espaço Reservado para Imagem de Slide 1">
+            <a:extLst>
+              <a:ext uri="{FF2B5EF4-FFF2-40B4-BE49-F238E27FC236}">
+                <a16:creationId xmlns:a16="http://schemas.microsoft.com/office/drawing/2014/main" id="{20794325-E27A-B527-E4B9-3991D965F82C}"/>
+              </a:ext>
+            </a:extLst>
+          </p:cNvPr>
+          <p:cNvSpPr>
+            <a:spLocks noGrp="1" noRot="1" noChangeAspect="1"/>
+          </p:cNvSpPr>
+          <p:nvPr>
+            <p:ph type="sldImg"/>
+          </p:nvPr>
+        </p:nvSpPr>
+        <p:spPr/>
+      </p:sp>
+      <p:sp>
+        <p:nvSpPr>
+          <p:cNvPr id="3" name="Espaço Reservado para Anotações 2">
+            <a:extLst>
+              <a:ext uri="{FF2B5EF4-FFF2-40B4-BE49-F238E27FC236}">
+                <a16:creationId xmlns:a16="http://schemas.microsoft.com/office/drawing/2014/main" id="{02F990B5-69F1-5DAD-88A0-9A536B906395}"/>
+              </a:ext>
+            </a:extLst>
+          </p:cNvPr>
+          <p:cNvSpPr>
+            <a:spLocks noGrp="1"/>
+          </p:cNvSpPr>
+          <p:nvPr>
+            <p:ph type="body" idx="1"/>
+          </p:nvPr>
+        </p:nvSpPr>
+        <p:spPr/>
+        <p:txBody>
+          <a:bodyPr/>
+          <a:lstStyle/>
+          <a:p>
+            <a:pPr marL="171450" indent="-171450">
+              <a:buFont typeface="Arial" panose="020B0604020202020204" pitchFamily="34" charset="0"/>
+              <a:buChar char="•"/>
+            </a:pPr>
+            <a:r>
+              <a:rPr lang="pt-BR" sz="1200" b="0" kern="1200" dirty="0">
+                <a:solidFill>
+                  <a:schemeClr val="tx1"/>
+                </a:solidFill>
+                <a:effectLst/>
+                <a:latin typeface="+mn-lt"/>
+                <a:ea typeface="+mn-ea"/>
+                <a:cs typeface="+mn-cs"/>
+              </a:rPr>
+              <a:t>Observação:  </a:t>
+            </a:r>
+            <a:r>
+              <a:rPr lang="pt-BR" sz="1200" dirty="0"/>
+              <a:t>5 % 2=1</a:t>
+            </a:r>
+            <a:r>
+              <a:rPr lang="pt-BR" sz="1200" dirty="0">
+                <a:latin typeface="Calibri" panose="020F0502020204030204" pitchFamily="34" charset="0"/>
+                <a:ea typeface="Calibri" panose="020F0502020204030204" pitchFamily="34" charset="0"/>
+                <a:cs typeface="Calibri" panose="020F0502020204030204" pitchFamily="34" charset="0"/>
+              </a:rPr>
+              <a:t>  porque 2*2=4 (sobrando 1)</a:t>
+            </a:r>
+            <a:r>
+              <a:rPr lang="pt-BR" sz="1200" b="0" kern="1200" dirty="0">
+                <a:solidFill>
+                  <a:schemeClr val="tx1"/>
+                </a:solidFill>
+                <a:effectLst/>
+                <a:latin typeface="+mn-lt"/>
+                <a:ea typeface="+mn-ea"/>
+                <a:cs typeface="+mn-cs"/>
+              </a:rPr>
+              <a:t> </a:t>
+            </a:r>
+          </a:p>
+        </p:txBody>
+      </p:sp>
+      <p:sp>
+        <p:nvSpPr>
+          <p:cNvPr id="4" name="Espaço Reservado para Número de Slide 3">
+            <a:extLst>
+              <a:ext uri="{FF2B5EF4-FFF2-40B4-BE49-F238E27FC236}">
+                <a16:creationId xmlns:a16="http://schemas.microsoft.com/office/drawing/2014/main" id="{42E1438F-3131-4B35-D5E4-C9F5402006A9}"/>
+              </a:ext>
+            </a:extLst>
+          </p:cNvPr>
+          <p:cNvSpPr>
+            <a:spLocks noGrp="1"/>
+          </p:cNvSpPr>
+          <p:nvPr>
+            <p:ph type="sldNum" sz="quarter" idx="5"/>
+          </p:nvPr>
+        </p:nvSpPr>
+        <p:spPr/>
+        <p:txBody>
+          <a:bodyPr/>
+          <a:lstStyle/>
+          <a:p>
+            <a:fld id="{80F36A49-A1DD-40F8-B8AD-E6F5365256CB}" type="slidenum">
+              <a:rPr lang="pt-BR" smtClean="0"/>
+              <a:t>38</a:t>
+            </a:fld>
+            <a:endParaRPr lang="pt-BR"/>
+          </a:p>
+        </p:txBody>
+      </p:sp>
+    </p:spTree>
+    <p:extLst>
+      <p:ext uri="{BB962C8B-B14F-4D97-AF65-F5344CB8AC3E}">
+        <p14:creationId xmlns:p14="http://schemas.microsoft.com/office/powerpoint/2010/main" val="3487158939"/>
+      </p:ext>
+    </p:extLst>
+  </p:cSld>
+  <p:clrMapOvr>
+    <a:masterClrMapping/>
+  </p:clrMapOvr>
+</p:notes>
+</file>
+
+<file path=ppt/notesSlides/notesSlide38.xml><?xml version="1.0" encoding="utf-8"?>
+<p:notes xmlns:a="http://schemas.openxmlformats.org/drawingml/2006/main" xmlns:r="http://schemas.openxmlformats.org/officeDocument/2006/relationships" xmlns:p="http://schemas.openxmlformats.org/presentationml/2006/main">
+  <p:cSld>
+    <p:spTree>
+      <p:nvGrpSpPr>
+        <p:cNvPr id="1" name="">
+          <a:extLst>
+            <a:ext uri="{FF2B5EF4-FFF2-40B4-BE49-F238E27FC236}">
+              <a16:creationId xmlns:a16="http://schemas.microsoft.com/office/drawing/2014/main" id="{A9881513-B6A9-22DA-4BA6-BF4BB0E80C52}"/>
+            </a:ext>
+          </a:extLst>
+        </p:cNvPr>
+        <p:cNvGrpSpPr/>
+        <p:nvPr/>
+      </p:nvGrpSpPr>
+      <p:grpSpPr>
+        <a:xfrm>
+          <a:off x="0" y="0"/>
+          <a:ext cx="0" cy="0"/>
+          <a:chOff x="0" y="0"/>
+          <a:chExt cx="0" cy="0"/>
+        </a:xfrm>
+      </p:grpSpPr>
+      <p:sp>
+        <p:nvSpPr>
+          <p:cNvPr id="2" name="Espaço Reservado para Imagem de Slide 1">
+            <a:extLst>
+              <a:ext uri="{FF2B5EF4-FFF2-40B4-BE49-F238E27FC236}">
+                <a16:creationId xmlns:a16="http://schemas.microsoft.com/office/drawing/2014/main" id="{DCC0801F-FA1D-1BCE-6BB9-DE0879B83E02}"/>
+              </a:ext>
+            </a:extLst>
+          </p:cNvPr>
+          <p:cNvSpPr>
+            <a:spLocks noGrp="1" noRot="1" noChangeAspect="1"/>
+          </p:cNvSpPr>
+          <p:nvPr>
+            <p:ph type="sldImg"/>
+          </p:nvPr>
+        </p:nvSpPr>
+        <p:spPr/>
+      </p:sp>
+      <p:sp>
+        <p:nvSpPr>
+          <p:cNvPr id="3" name="Espaço Reservado para Anotações 2">
+            <a:extLst>
+              <a:ext uri="{FF2B5EF4-FFF2-40B4-BE49-F238E27FC236}">
+                <a16:creationId xmlns:a16="http://schemas.microsoft.com/office/drawing/2014/main" id="{7E95E809-61CA-FB1C-293D-0320EE1C6450}"/>
+              </a:ext>
+            </a:extLst>
+          </p:cNvPr>
+          <p:cNvSpPr>
+            <a:spLocks noGrp="1"/>
+          </p:cNvSpPr>
+          <p:nvPr>
+            <p:ph type="body" idx="1"/>
+          </p:nvPr>
+        </p:nvSpPr>
+        <p:spPr/>
+        <p:txBody>
+          <a:bodyPr/>
+          <a:lstStyle/>
+          <a:p>
+            <a:pPr marL="171450" indent="-171450">
+              <a:buFont typeface="Arial" panose="020B0604020202020204" pitchFamily="34" charset="0"/>
+              <a:buChar char="•"/>
+            </a:pPr>
+            <a:r>
+              <a:rPr lang="pt-BR" sz="1200" b="0" kern="1200" dirty="0">
+                <a:solidFill>
+                  <a:schemeClr val="tx1"/>
+                </a:solidFill>
+                <a:effectLst/>
+                <a:latin typeface="+mn-lt"/>
+                <a:ea typeface="+mn-ea"/>
+                <a:cs typeface="+mn-cs"/>
+              </a:rPr>
+              <a:t>Observação:  </a:t>
+            </a:r>
+            <a:r>
+              <a:rPr lang="pt-BR" sz="1200" dirty="0"/>
+              <a:t>5 % 2=1</a:t>
+            </a:r>
+            <a:r>
+              <a:rPr lang="pt-BR" sz="1200" dirty="0">
+                <a:latin typeface="Calibri" panose="020F0502020204030204" pitchFamily="34" charset="0"/>
+                <a:ea typeface="Calibri" panose="020F0502020204030204" pitchFamily="34" charset="0"/>
+                <a:cs typeface="Calibri" panose="020F0502020204030204" pitchFamily="34" charset="0"/>
+              </a:rPr>
+              <a:t>  porque 2*2=4 (sobrando 1)</a:t>
+            </a:r>
+            <a:r>
+              <a:rPr lang="pt-BR" sz="1200" b="0" kern="1200" dirty="0">
+                <a:solidFill>
+                  <a:schemeClr val="tx1"/>
+                </a:solidFill>
+                <a:effectLst/>
+                <a:latin typeface="+mn-lt"/>
+                <a:ea typeface="+mn-ea"/>
+                <a:cs typeface="+mn-cs"/>
+              </a:rPr>
+              <a:t> </a:t>
+            </a:r>
+          </a:p>
+        </p:txBody>
+      </p:sp>
+      <p:sp>
+        <p:nvSpPr>
+          <p:cNvPr id="4" name="Espaço Reservado para Número de Slide 3">
+            <a:extLst>
+              <a:ext uri="{FF2B5EF4-FFF2-40B4-BE49-F238E27FC236}">
+                <a16:creationId xmlns:a16="http://schemas.microsoft.com/office/drawing/2014/main" id="{C3E03FE0-AE59-2D35-0D89-D7DFADF1DF78}"/>
+              </a:ext>
+            </a:extLst>
+          </p:cNvPr>
+          <p:cNvSpPr>
+            <a:spLocks noGrp="1"/>
+          </p:cNvSpPr>
+          <p:nvPr>
+            <p:ph type="sldNum" sz="quarter" idx="5"/>
+          </p:nvPr>
+        </p:nvSpPr>
+        <p:spPr/>
+        <p:txBody>
+          <a:bodyPr/>
+          <a:lstStyle/>
+          <a:p>
+            <a:fld id="{80F36A49-A1DD-40F8-B8AD-E6F5365256CB}" type="slidenum">
+              <a:rPr lang="pt-BR" smtClean="0"/>
+              <a:t>39</a:t>
+            </a:fld>
+            <a:endParaRPr lang="pt-BR"/>
+          </a:p>
+        </p:txBody>
+      </p:sp>
+    </p:spTree>
+    <p:extLst>
+      <p:ext uri="{BB962C8B-B14F-4D97-AF65-F5344CB8AC3E}">
+        <p14:creationId xmlns:p14="http://schemas.microsoft.com/office/powerpoint/2010/main" val="440680569"/>
+      </p:ext>
+    </p:extLst>
+  </p:cSld>
+  <p:clrMapOvr>
+    <a:masterClrMapping/>
+  </p:clrMapOvr>
+</p:notes>
+</file>
+
+<file path=ppt/notesSlides/notesSlide39.xml><?xml version="1.0" encoding="utf-8"?>
+<p:notes xmlns:a="http://schemas.openxmlformats.org/drawingml/2006/main" xmlns:r="http://schemas.openxmlformats.org/officeDocument/2006/relationships" xmlns:p="http://schemas.openxmlformats.org/presentationml/2006/main">
+  <p:cSld>
+    <p:spTree>
+      <p:nvGrpSpPr>
+        <p:cNvPr id="1" name="">
+          <a:extLst>
+            <a:ext uri="{FF2B5EF4-FFF2-40B4-BE49-F238E27FC236}">
+              <a16:creationId xmlns:a16="http://schemas.microsoft.com/office/drawing/2014/main" id="{C3D4546F-84EC-BA81-343F-A0D65A059F97}"/>
+            </a:ext>
+          </a:extLst>
+        </p:cNvPr>
+        <p:cNvGrpSpPr/>
+        <p:nvPr/>
+      </p:nvGrpSpPr>
+      <p:grpSpPr>
+        <a:xfrm>
+          <a:off x="0" y="0"/>
+          <a:ext cx="0" cy="0"/>
+          <a:chOff x="0" y="0"/>
+          <a:chExt cx="0" cy="0"/>
+        </a:xfrm>
+      </p:grpSpPr>
+      <p:sp>
+        <p:nvSpPr>
+          <p:cNvPr id="2" name="Espaço Reservado para Imagem de Slide 1">
+            <a:extLst>
+              <a:ext uri="{FF2B5EF4-FFF2-40B4-BE49-F238E27FC236}">
+                <a16:creationId xmlns:a16="http://schemas.microsoft.com/office/drawing/2014/main" id="{4685F275-0715-9607-4057-ACFED84B077E}"/>
+              </a:ext>
+            </a:extLst>
+          </p:cNvPr>
+          <p:cNvSpPr>
+            <a:spLocks noGrp="1" noRot="1" noChangeAspect="1"/>
+          </p:cNvSpPr>
+          <p:nvPr>
+            <p:ph type="sldImg"/>
+          </p:nvPr>
+        </p:nvSpPr>
+        <p:spPr/>
+      </p:sp>
+      <p:sp>
+        <p:nvSpPr>
+          <p:cNvPr id="3" name="Espaço Reservado para Anotações 2">
+            <a:extLst>
+              <a:ext uri="{FF2B5EF4-FFF2-40B4-BE49-F238E27FC236}">
+                <a16:creationId xmlns:a16="http://schemas.microsoft.com/office/drawing/2014/main" id="{F0E086BD-6607-E317-185A-733A5466DA63}"/>
+              </a:ext>
+            </a:extLst>
+          </p:cNvPr>
+          <p:cNvSpPr>
+            <a:spLocks noGrp="1"/>
+          </p:cNvSpPr>
+          <p:nvPr>
+            <p:ph type="body" idx="1"/>
+          </p:nvPr>
+        </p:nvSpPr>
+        <p:spPr/>
+        <p:txBody>
+          <a:bodyPr/>
+          <a:lstStyle/>
+          <a:p>
+            <a:pPr marL="171450" indent="-171450">
+              <a:buFont typeface="Arial" panose="020B0604020202020204" pitchFamily="34" charset="0"/>
+              <a:buChar char="•"/>
+            </a:pPr>
+            <a:r>
+              <a:rPr lang="pt-BR" sz="1200" b="0" kern="1200" dirty="0">
+                <a:solidFill>
+                  <a:schemeClr val="tx1"/>
+                </a:solidFill>
+                <a:effectLst/>
+                <a:latin typeface="+mn-lt"/>
+                <a:ea typeface="+mn-ea"/>
+                <a:cs typeface="+mn-cs"/>
+              </a:rPr>
+              <a:t>Observação:  </a:t>
+            </a:r>
+            <a:r>
+              <a:rPr lang="pt-BR" sz="1200" dirty="0"/>
+              <a:t>5 % 2=1</a:t>
+            </a:r>
+            <a:r>
+              <a:rPr lang="pt-BR" sz="1200" dirty="0">
+                <a:latin typeface="Calibri" panose="020F0502020204030204" pitchFamily="34" charset="0"/>
+                <a:ea typeface="Calibri" panose="020F0502020204030204" pitchFamily="34" charset="0"/>
+                <a:cs typeface="Calibri" panose="020F0502020204030204" pitchFamily="34" charset="0"/>
+              </a:rPr>
+              <a:t>  porque 2*2=4 (sobrando 1)</a:t>
+            </a:r>
+            <a:r>
+              <a:rPr lang="pt-BR" sz="1200" b="0" kern="1200" dirty="0">
+                <a:solidFill>
+                  <a:schemeClr val="tx1"/>
+                </a:solidFill>
+                <a:effectLst/>
+                <a:latin typeface="+mn-lt"/>
+                <a:ea typeface="+mn-ea"/>
+                <a:cs typeface="+mn-cs"/>
+              </a:rPr>
+              <a:t> </a:t>
+            </a:r>
+          </a:p>
+        </p:txBody>
+      </p:sp>
+      <p:sp>
+        <p:nvSpPr>
+          <p:cNvPr id="4" name="Espaço Reservado para Número de Slide 3">
+            <a:extLst>
+              <a:ext uri="{FF2B5EF4-FFF2-40B4-BE49-F238E27FC236}">
+                <a16:creationId xmlns:a16="http://schemas.microsoft.com/office/drawing/2014/main" id="{154D1206-9D76-2A3F-EE3D-FAA5C2B2F3A6}"/>
+              </a:ext>
+            </a:extLst>
+          </p:cNvPr>
+          <p:cNvSpPr>
+            <a:spLocks noGrp="1"/>
+          </p:cNvSpPr>
+          <p:nvPr>
+            <p:ph type="sldNum" sz="quarter" idx="5"/>
+          </p:nvPr>
+        </p:nvSpPr>
+        <p:spPr/>
+        <p:txBody>
+          <a:bodyPr/>
+          <a:lstStyle/>
+          <a:p>
+            <a:fld id="{80F36A49-A1DD-40F8-B8AD-E6F5365256CB}" type="slidenum">
+              <a:rPr lang="pt-BR" smtClean="0"/>
+              <a:t>40</a:t>
+            </a:fld>
+            <a:endParaRPr lang="pt-BR"/>
+          </a:p>
+        </p:txBody>
+      </p:sp>
+    </p:spTree>
+    <p:extLst>
+      <p:ext uri="{BB962C8B-B14F-4D97-AF65-F5344CB8AC3E}">
+        <p14:creationId xmlns:p14="http://schemas.microsoft.com/office/powerpoint/2010/main" val="162434053"/>
       </p:ext>
     </p:extLst>
   </p:cSld>
@@ -7019,6 +8686,447 @@
     <p:extLst>
       <p:ext uri="{BB962C8B-B14F-4D97-AF65-F5344CB8AC3E}">
         <p14:creationId xmlns:p14="http://schemas.microsoft.com/office/powerpoint/2010/main" val="370703049"/>
+      </p:ext>
+    </p:extLst>
+  </p:cSld>
+  <p:clrMapOvr>
+    <a:masterClrMapping/>
+  </p:clrMapOvr>
+</p:notes>
+</file>
+
+<file path=ppt/notesSlides/notesSlide40.xml><?xml version="1.0" encoding="utf-8"?>
+<p:notes xmlns:a="http://schemas.openxmlformats.org/drawingml/2006/main" xmlns:r="http://schemas.openxmlformats.org/officeDocument/2006/relationships" xmlns:p="http://schemas.openxmlformats.org/presentationml/2006/main">
+  <p:cSld>
+    <p:spTree>
+      <p:nvGrpSpPr>
+        <p:cNvPr id="1" name="">
+          <a:extLst>
+            <a:ext uri="{FF2B5EF4-FFF2-40B4-BE49-F238E27FC236}">
+              <a16:creationId xmlns:a16="http://schemas.microsoft.com/office/drawing/2014/main" id="{A61F6D5B-C604-48CE-EAF6-E8B1F8977F1F}"/>
+            </a:ext>
+          </a:extLst>
+        </p:cNvPr>
+        <p:cNvGrpSpPr/>
+        <p:nvPr/>
+      </p:nvGrpSpPr>
+      <p:grpSpPr>
+        <a:xfrm>
+          <a:off x="0" y="0"/>
+          <a:ext cx="0" cy="0"/>
+          <a:chOff x="0" y="0"/>
+          <a:chExt cx="0" cy="0"/>
+        </a:xfrm>
+      </p:grpSpPr>
+      <p:sp>
+        <p:nvSpPr>
+          <p:cNvPr id="2" name="Espaço Reservado para Imagem de Slide 1">
+            <a:extLst>
+              <a:ext uri="{FF2B5EF4-FFF2-40B4-BE49-F238E27FC236}">
+                <a16:creationId xmlns:a16="http://schemas.microsoft.com/office/drawing/2014/main" id="{492E5A7A-58BF-81C0-DD45-031FD4AE04A6}"/>
+              </a:ext>
+            </a:extLst>
+          </p:cNvPr>
+          <p:cNvSpPr>
+            <a:spLocks noGrp="1" noRot="1" noChangeAspect="1"/>
+          </p:cNvSpPr>
+          <p:nvPr>
+            <p:ph type="sldImg"/>
+          </p:nvPr>
+        </p:nvSpPr>
+        <p:spPr/>
+      </p:sp>
+      <p:sp>
+        <p:nvSpPr>
+          <p:cNvPr id="3" name="Espaço Reservado para Anotações 2">
+            <a:extLst>
+              <a:ext uri="{FF2B5EF4-FFF2-40B4-BE49-F238E27FC236}">
+                <a16:creationId xmlns:a16="http://schemas.microsoft.com/office/drawing/2014/main" id="{A4889764-EA45-E98B-5463-43138806AE3F}"/>
+              </a:ext>
+            </a:extLst>
+          </p:cNvPr>
+          <p:cNvSpPr>
+            <a:spLocks noGrp="1"/>
+          </p:cNvSpPr>
+          <p:nvPr>
+            <p:ph type="body" idx="1"/>
+          </p:nvPr>
+        </p:nvSpPr>
+        <p:spPr/>
+        <p:txBody>
+          <a:bodyPr/>
+          <a:lstStyle/>
+          <a:p>
+            <a:pPr marL="171450" indent="-171450">
+              <a:buFont typeface="Arial" panose="020B0604020202020204" pitchFamily="34" charset="0"/>
+              <a:buChar char="•"/>
+            </a:pPr>
+            <a:r>
+              <a:rPr lang="pt-BR" sz="1200" b="0" kern="1200" dirty="0">
+                <a:solidFill>
+                  <a:schemeClr val="tx1"/>
+                </a:solidFill>
+                <a:effectLst/>
+                <a:latin typeface="+mn-lt"/>
+                <a:ea typeface="+mn-ea"/>
+                <a:cs typeface="+mn-cs"/>
+              </a:rPr>
+              <a:t>Observação:  </a:t>
+            </a:r>
+            <a:r>
+              <a:rPr lang="pt-BR" sz="1200" dirty="0"/>
+              <a:t>5 % 2=1</a:t>
+            </a:r>
+            <a:r>
+              <a:rPr lang="pt-BR" sz="1200" dirty="0">
+                <a:latin typeface="Calibri" panose="020F0502020204030204" pitchFamily="34" charset="0"/>
+                <a:ea typeface="Calibri" panose="020F0502020204030204" pitchFamily="34" charset="0"/>
+                <a:cs typeface="Calibri" panose="020F0502020204030204" pitchFamily="34" charset="0"/>
+              </a:rPr>
+              <a:t>  porque 2*2=4 (sobrando 1)</a:t>
+            </a:r>
+            <a:r>
+              <a:rPr lang="pt-BR" sz="1200" b="0" kern="1200" dirty="0">
+                <a:solidFill>
+                  <a:schemeClr val="tx1"/>
+                </a:solidFill>
+                <a:effectLst/>
+                <a:latin typeface="+mn-lt"/>
+                <a:ea typeface="+mn-ea"/>
+                <a:cs typeface="+mn-cs"/>
+              </a:rPr>
+              <a:t> </a:t>
+            </a:r>
+          </a:p>
+        </p:txBody>
+      </p:sp>
+      <p:sp>
+        <p:nvSpPr>
+          <p:cNvPr id="4" name="Espaço Reservado para Número de Slide 3">
+            <a:extLst>
+              <a:ext uri="{FF2B5EF4-FFF2-40B4-BE49-F238E27FC236}">
+                <a16:creationId xmlns:a16="http://schemas.microsoft.com/office/drawing/2014/main" id="{6F63CE1F-C1A0-B097-B8DB-4DE1B92FDEC7}"/>
+              </a:ext>
+            </a:extLst>
+          </p:cNvPr>
+          <p:cNvSpPr>
+            <a:spLocks noGrp="1"/>
+          </p:cNvSpPr>
+          <p:nvPr>
+            <p:ph type="sldNum" sz="quarter" idx="5"/>
+          </p:nvPr>
+        </p:nvSpPr>
+        <p:spPr/>
+        <p:txBody>
+          <a:bodyPr/>
+          <a:lstStyle/>
+          <a:p>
+            <a:fld id="{80F36A49-A1DD-40F8-B8AD-E6F5365256CB}" type="slidenum">
+              <a:rPr lang="pt-BR" smtClean="0"/>
+              <a:t>41</a:t>
+            </a:fld>
+            <a:endParaRPr lang="pt-BR"/>
+          </a:p>
+        </p:txBody>
+      </p:sp>
+    </p:spTree>
+    <p:extLst>
+      <p:ext uri="{BB962C8B-B14F-4D97-AF65-F5344CB8AC3E}">
+        <p14:creationId xmlns:p14="http://schemas.microsoft.com/office/powerpoint/2010/main" val="433218474"/>
+      </p:ext>
+    </p:extLst>
+  </p:cSld>
+  <p:clrMapOvr>
+    <a:masterClrMapping/>
+  </p:clrMapOvr>
+</p:notes>
+</file>
+
+<file path=ppt/notesSlides/notesSlide41.xml><?xml version="1.0" encoding="utf-8"?>
+<p:notes xmlns:a="http://schemas.openxmlformats.org/drawingml/2006/main" xmlns:r="http://schemas.openxmlformats.org/officeDocument/2006/relationships" xmlns:p="http://schemas.openxmlformats.org/presentationml/2006/main">
+  <p:cSld>
+    <p:spTree>
+      <p:nvGrpSpPr>
+        <p:cNvPr id="1" name="">
+          <a:extLst>
+            <a:ext uri="{FF2B5EF4-FFF2-40B4-BE49-F238E27FC236}">
+              <a16:creationId xmlns:a16="http://schemas.microsoft.com/office/drawing/2014/main" id="{EBD55423-0113-8D5E-C00E-8C7F7D62EB52}"/>
+            </a:ext>
+          </a:extLst>
+        </p:cNvPr>
+        <p:cNvGrpSpPr/>
+        <p:nvPr/>
+      </p:nvGrpSpPr>
+      <p:grpSpPr>
+        <a:xfrm>
+          <a:off x="0" y="0"/>
+          <a:ext cx="0" cy="0"/>
+          <a:chOff x="0" y="0"/>
+          <a:chExt cx="0" cy="0"/>
+        </a:xfrm>
+      </p:grpSpPr>
+      <p:sp>
+        <p:nvSpPr>
+          <p:cNvPr id="2" name="Espaço Reservado para Imagem de Slide 1">
+            <a:extLst>
+              <a:ext uri="{FF2B5EF4-FFF2-40B4-BE49-F238E27FC236}">
+                <a16:creationId xmlns:a16="http://schemas.microsoft.com/office/drawing/2014/main" id="{0DAB3E46-6C04-BCE2-2A96-A0CFFE2E1F16}"/>
+              </a:ext>
+            </a:extLst>
+          </p:cNvPr>
+          <p:cNvSpPr>
+            <a:spLocks noGrp="1" noRot="1" noChangeAspect="1"/>
+          </p:cNvSpPr>
+          <p:nvPr>
+            <p:ph type="sldImg"/>
+          </p:nvPr>
+        </p:nvSpPr>
+        <p:spPr/>
+      </p:sp>
+      <p:sp>
+        <p:nvSpPr>
+          <p:cNvPr id="3" name="Espaço Reservado para Anotações 2">
+            <a:extLst>
+              <a:ext uri="{FF2B5EF4-FFF2-40B4-BE49-F238E27FC236}">
+                <a16:creationId xmlns:a16="http://schemas.microsoft.com/office/drawing/2014/main" id="{48B24443-DF7D-F8E3-21F6-85F1CD5ED18A}"/>
+              </a:ext>
+            </a:extLst>
+          </p:cNvPr>
+          <p:cNvSpPr>
+            <a:spLocks noGrp="1"/>
+          </p:cNvSpPr>
+          <p:nvPr>
+            <p:ph type="body" idx="1"/>
+          </p:nvPr>
+        </p:nvSpPr>
+        <p:spPr/>
+        <p:txBody>
+          <a:bodyPr/>
+          <a:lstStyle/>
+          <a:p>
+            <a:pPr marL="171450" indent="-171450">
+              <a:buFont typeface="Arial" panose="020B0604020202020204" pitchFamily="34" charset="0"/>
+              <a:buChar char="•"/>
+            </a:pPr>
+            <a:r>
+              <a:rPr lang="pt-BR" sz="1200" b="0" kern="1200" dirty="0">
+                <a:solidFill>
+                  <a:schemeClr val="tx1"/>
+                </a:solidFill>
+                <a:effectLst/>
+                <a:latin typeface="+mn-lt"/>
+                <a:ea typeface="+mn-ea"/>
+                <a:cs typeface="+mn-cs"/>
+              </a:rPr>
+              <a:t>Observação:  </a:t>
+            </a:r>
+            <a:r>
+              <a:rPr lang="pt-BR" sz="1200" dirty="0"/>
+              <a:t>5 % 2=1</a:t>
+            </a:r>
+            <a:r>
+              <a:rPr lang="pt-BR" sz="1200" dirty="0">
+                <a:latin typeface="Calibri" panose="020F0502020204030204" pitchFamily="34" charset="0"/>
+                <a:ea typeface="Calibri" panose="020F0502020204030204" pitchFamily="34" charset="0"/>
+                <a:cs typeface="Calibri" panose="020F0502020204030204" pitchFamily="34" charset="0"/>
+              </a:rPr>
+              <a:t>  porque 2*2=4 (sobrando 1)</a:t>
+            </a:r>
+            <a:r>
+              <a:rPr lang="pt-BR" sz="1200" b="0" kern="1200" dirty="0">
+                <a:solidFill>
+                  <a:schemeClr val="tx1"/>
+                </a:solidFill>
+                <a:effectLst/>
+                <a:latin typeface="+mn-lt"/>
+                <a:ea typeface="+mn-ea"/>
+                <a:cs typeface="+mn-cs"/>
+              </a:rPr>
+              <a:t> </a:t>
+            </a:r>
+          </a:p>
+        </p:txBody>
+      </p:sp>
+      <p:sp>
+        <p:nvSpPr>
+          <p:cNvPr id="4" name="Espaço Reservado para Número de Slide 3">
+            <a:extLst>
+              <a:ext uri="{FF2B5EF4-FFF2-40B4-BE49-F238E27FC236}">
+                <a16:creationId xmlns:a16="http://schemas.microsoft.com/office/drawing/2014/main" id="{D9B642EE-78AC-00A2-A2AE-E06C149660D8}"/>
+              </a:ext>
+            </a:extLst>
+          </p:cNvPr>
+          <p:cNvSpPr>
+            <a:spLocks noGrp="1"/>
+          </p:cNvSpPr>
+          <p:nvPr>
+            <p:ph type="sldNum" sz="quarter" idx="5"/>
+          </p:nvPr>
+        </p:nvSpPr>
+        <p:spPr/>
+        <p:txBody>
+          <a:bodyPr/>
+          <a:lstStyle/>
+          <a:p>
+            <a:fld id="{80F36A49-A1DD-40F8-B8AD-E6F5365256CB}" type="slidenum">
+              <a:rPr lang="pt-BR" smtClean="0"/>
+              <a:t>42</a:t>
+            </a:fld>
+            <a:endParaRPr lang="pt-BR"/>
+          </a:p>
+        </p:txBody>
+      </p:sp>
+    </p:spTree>
+    <p:extLst>
+      <p:ext uri="{BB962C8B-B14F-4D97-AF65-F5344CB8AC3E}">
+        <p14:creationId xmlns:p14="http://schemas.microsoft.com/office/powerpoint/2010/main" val="1464401119"/>
+      </p:ext>
+    </p:extLst>
+  </p:cSld>
+  <p:clrMapOvr>
+    <a:masterClrMapping/>
+  </p:clrMapOvr>
+</p:notes>
+</file>
+
+<file path=ppt/notesSlides/notesSlide42.xml><?xml version="1.0" encoding="utf-8"?>
+<p:notes xmlns:a="http://schemas.openxmlformats.org/drawingml/2006/main" xmlns:r="http://schemas.openxmlformats.org/officeDocument/2006/relationships" xmlns:p="http://schemas.openxmlformats.org/presentationml/2006/main">
+  <p:cSld>
+    <p:spTree>
+      <p:nvGrpSpPr>
+        <p:cNvPr id="1" name="">
+          <a:extLst>
+            <a:ext uri="{FF2B5EF4-FFF2-40B4-BE49-F238E27FC236}">
+              <a16:creationId xmlns:a16="http://schemas.microsoft.com/office/drawing/2014/main" id="{77871822-E6F3-CB98-20B3-46D7E2C9922C}"/>
+            </a:ext>
+          </a:extLst>
+        </p:cNvPr>
+        <p:cNvGrpSpPr/>
+        <p:nvPr/>
+      </p:nvGrpSpPr>
+      <p:grpSpPr>
+        <a:xfrm>
+          <a:off x="0" y="0"/>
+          <a:ext cx="0" cy="0"/>
+          <a:chOff x="0" y="0"/>
+          <a:chExt cx="0" cy="0"/>
+        </a:xfrm>
+      </p:grpSpPr>
+      <p:sp>
+        <p:nvSpPr>
+          <p:cNvPr id="2" name="Espaço Reservado para Imagem de Slide 1">
+            <a:extLst>
+              <a:ext uri="{FF2B5EF4-FFF2-40B4-BE49-F238E27FC236}">
+                <a16:creationId xmlns:a16="http://schemas.microsoft.com/office/drawing/2014/main" id="{4B76AA77-D69E-FEDA-D42C-EAEF5310C927}"/>
+              </a:ext>
+            </a:extLst>
+          </p:cNvPr>
+          <p:cNvSpPr>
+            <a:spLocks noGrp="1" noRot="1" noChangeAspect="1"/>
+          </p:cNvSpPr>
+          <p:nvPr>
+            <p:ph type="sldImg"/>
+          </p:nvPr>
+        </p:nvSpPr>
+        <p:spPr/>
+      </p:sp>
+      <p:sp>
+        <p:nvSpPr>
+          <p:cNvPr id="3" name="Espaço Reservado para Anotações 2">
+            <a:extLst>
+              <a:ext uri="{FF2B5EF4-FFF2-40B4-BE49-F238E27FC236}">
+                <a16:creationId xmlns:a16="http://schemas.microsoft.com/office/drawing/2014/main" id="{B249F503-7E4F-783E-7286-EC109F5FC228}"/>
+              </a:ext>
+            </a:extLst>
+          </p:cNvPr>
+          <p:cNvSpPr>
+            <a:spLocks noGrp="1"/>
+          </p:cNvSpPr>
+          <p:nvPr>
+            <p:ph type="body" idx="1"/>
+          </p:nvPr>
+        </p:nvSpPr>
+        <p:spPr/>
+        <p:txBody>
+          <a:bodyPr/>
+          <a:lstStyle/>
+          <a:p>
+            <a:pPr marL="171450" indent="-171450">
+              <a:buFont typeface="Arial" panose="020B0604020202020204" pitchFamily="34" charset="0"/>
+              <a:buChar char="•"/>
+            </a:pPr>
+            <a:r>
+              <a:rPr lang="pt-BR" sz="1200" b="0" kern="1200" dirty="0">
+                <a:solidFill>
+                  <a:schemeClr val="tx1"/>
+                </a:solidFill>
+                <a:effectLst/>
+                <a:latin typeface="+mn-lt"/>
+                <a:ea typeface="+mn-ea"/>
+                <a:cs typeface="+mn-cs"/>
+              </a:rPr>
+              <a:t>Observação:  </a:t>
+            </a:r>
+            <a:r>
+              <a:rPr lang="pt-BR" sz="1200" dirty="0"/>
+              <a:t>5 % 2=1</a:t>
+            </a:r>
+            <a:r>
+              <a:rPr lang="pt-BR" sz="1200" dirty="0">
+                <a:latin typeface="Calibri" panose="020F0502020204030204" pitchFamily="34" charset="0"/>
+                <a:ea typeface="Calibri" panose="020F0502020204030204" pitchFamily="34" charset="0"/>
+                <a:cs typeface="Calibri" panose="020F0502020204030204" pitchFamily="34" charset="0"/>
+              </a:rPr>
+              <a:t>  porque 2*2=4 (sobrando 1)</a:t>
+            </a:r>
+            <a:r>
+              <a:rPr lang="pt-BR" sz="1200" b="0" kern="1200" dirty="0">
+                <a:solidFill>
+                  <a:schemeClr val="tx1"/>
+                </a:solidFill>
+                <a:effectLst/>
+                <a:latin typeface="+mn-lt"/>
+                <a:ea typeface="+mn-ea"/>
+                <a:cs typeface="+mn-cs"/>
+              </a:rPr>
+              <a:t> </a:t>
+            </a:r>
+          </a:p>
+        </p:txBody>
+      </p:sp>
+      <p:sp>
+        <p:nvSpPr>
+          <p:cNvPr id="4" name="Espaço Reservado para Número de Slide 3">
+            <a:extLst>
+              <a:ext uri="{FF2B5EF4-FFF2-40B4-BE49-F238E27FC236}">
+                <a16:creationId xmlns:a16="http://schemas.microsoft.com/office/drawing/2014/main" id="{86DEEFA7-F13B-C573-F06E-6C7828847CB1}"/>
+              </a:ext>
+            </a:extLst>
+          </p:cNvPr>
+          <p:cNvSpPr>
+            <a:spLocks noGrp="1"/>
+          </p:cNvSpPr>
+          <p:nvPr>
+            <p:ph type="sldNum" sz="quarter" idx="5"/>
+          </p:nvPr>
+        </p:nvSpPr>
+        <p:spPr/>
+        <p:txBody>
+          <a:bodyPr/>
+          <a:lstStyle/>
+          <a:p>
+            <a:fld id="{80F36A49-A1DD-40F8-B8AD-E6F5365256CB}" type="slidenum">
+              <a:rPr lang="pt-BR" smtClean="0"/>
+              <a:t>43</a:t>
+            </a:fld>
+            <a:endParaRPr lang="pt-BR"/>
+          </a:p>
+        </p:txBody>
+      </p:sp>
+    </p:spTree>
+    <p:extLst>
+      <p:ext uri="{BB962C8B-B14F-4D97-AF65-F5344CB8AC3E}">
+        <p14:creationId xmlns:p14="http://schemas.microsoft.com/office/powerpoint/2010/main" val="3275557699"/>
       </p:ext>
     </p:extLst>
   </p:cSld>
@@ -7667,7 +9775,7 @@
           <a:p>
             <a:fld id="{A87E3B6E-8316-4A1C-BADA-DB7F3456EEF1}" type="datetimeFigureOut">
               <a:rPr lang="pt-BR" smtClean="0"/>
-              <a:t>04/08/2026</a:t>
+              <a:t>05/08/2026</a:t>
             </a:fld>
             <a:endParaRPr lang="pt-BR"/>
           </a:p>
@@ -7865,7 +9973,7 @@
           <a:p>
             <a:fld id="{A87E3B6E-8316-4A1C-BADA-DB7F3456EEF1}" type="datetimeFigureOut">
               <a:rPr lang="pt-BR" smtClean="0"/>
-              <a:t>04/08/2026</a:t>
+              <a:t>05/08/2026</a:t>
             </a:fld>
             <a:endParaRPr lang="pt-BR"/>
           </a:p>
@@ -8073,7 +10181,7 @@
           <a:p>
             <a:fld id="{A87E3B6E-8316-4A1C-BADA-DB7F3456EEF1}" type="datetimeFigureOut">
               <a:rPr lang="pt-BR" smtClean="0"/>
-              <a:t>04/08/2026</a:t>
+              <a:t>05/08/2026</a:t>
             </a:fld>
             <a:endParaRPr lang="pt-BR"/>
           </a:p>
@@ -8309,7 +10417,7 @@
           <a:p>
             <a:fld id="{A87E3B6E-8316-4A1C-BADA-DB7F3456EEF1}" type="datetimeFigureOut">
               <a:rPr lang="pt-BR" smtClean="0"/>
-              <a:t>04/08/2026</a:t>
+              <a:t>05/08/2026</a:t>
             </a:fld>
             <a:endParaRPr lang="pt-BR"/>
           </a:p>
@@ -8479,7 +10587,7 @@
           <a:p>
             <a:fld id="{A87E3B6E-8316-4A1C-BADA-DB7F3456EEF1}" type="datetimeFigureOut">
               <a:rPr lang="pt-BR" smtClean="0"/>
-              <a:t>04/08/2026</a:t>
+              <a:t>05/08/2026</a:t>
             </a:fld>
             <a:endParaRPr lang="pt-BR"/>
           </a:p>
@@ -8747,7 +10855,7 @@
           <a:p>
             <a:fld id="{A87E3B6E-8316-4A1C-BADA-DB7F3456EEF1}" type="datetimeFigureOut">
               <a:rPr lang="pt-BR" smtClean="0"/>
-              <a:t>04/08/2026</a:t>
+              <a:t>05/08/2026</a:t>
             </a:fld>
             <a:endParaRPr lang="pt-BR"/>
           </a:p>
@@ -8979,7 +11087,7 @@
           <a:p>
             <a:fld id="{A87E3B6E-8316-4A1C-BADA-DB7F3456EEF1}" type="datetimeFigureOut">
               <a:rPr lang="pt-BR" smtClean="0"/>
-              <a:t>04/08/2026</a:t>
+              <a:t>05/08/2026</a:t>
             </a:fld>
             <a:endParaRPr lang="pt-BR"/>
           </a:p>
@@ -9334,7 +11442,7 @@
           <a:p>
             <a:fld id="{A87E3B6E-8316-4A1C-BADA-DB7F3456EEF1}" type="datetimeFigureOut">
               <a:rPr lang="pt-BR" smtClean="0"/>
-              <a:t>04/08/2026</a:t>
+              <a:t>05/08/2026</a:t>
             </a:fld>
             <a:endParaRPr lang="pt-BR"/>
           </a:p>
@@ -9475,7 +11583,7 @@
           <a:p>
             <a:fld id="{A87E3B6E-8316-4A1C-BADA-DB7F3456EEF1}" type="datetimeFigureOut">
               <a:rPr lang="pt-BR" smtClean="0"/>
-              <a:t>04/08/2026</a:t>
+              <a:t>05/08/2026</a:t>
             </a:fld>
             <a:endParaRPr lang="pt-BR"/>
           </a:p>
@@ -9570,7 +11678,7 @@
           <a:p>
             <a:fld id="{A87E3B6E-8316-4A1C-BADA-DB7F3456EEF1}" type="datetimeFigureOut">
               <a:rPr lang="pt-BR" smtClean="0"/>
-              <a:t>04/08/2026</a:t>
+              <a:t>05/08/2026</a:t>
             </a:fld>
             <a:endParaRPr lang="pt-BR"/>
           </a:p>
@@ -9927,7 +12035,7 @@
           <a:p>
             <a:fld id="{A87E3B6E-8316-4A1C-BADA-DB7F3456EEF1}" type="datetimeFigureOut">
               <a:rPr lang="pt-BR" smtClean="0"/>
-              <a:t>04/08/2026</a:t>
+              <a:t>05/08/2026</a:t>
             </a:fld>
             <a:endParaRPr lang="pt-BR"/>
           </a:p>
@@ -10128,7 +12236,7 @@
           <a:p>
             <a:fld id="{A87E3B6E-8316-4A1C-BADA-DB7F3456EEF1}" type="datetimeFigureOut">
               <a:rPr lang="pt-BR" smtClean="0"/>
-              <a:t>04/08/2026</a:t>
+              <a:t>05/08/2026</a:t>
             </a:fld>
             <a:endParaRPr lang="pt-BR"/>
           </a:p>
@@ -10481,7 +12589,7 @@
           <a:p>
             <a:fld id="{A87E3B6E-8316-4A1C-BADA-DB7F3456EEF1}" type="datetimeFigureOut">
               <a:rPr lang="pt-BR" smtClean="0"/>
-              <a:t>04/08/2026</a:t>
+              <a:t>05/08/2026</a:t>
             </a:fld>
             <a:endParaRPr lang="pt-BR"/>
           </a:p>
@@ -10666,7 +12774,7 @@
           <a:p>
             <a:fld id="{A87E3B6E-8316-4A1C-BADA-DB7F3456EEF1}" type="datetimeFigureOut">
               <a:rPr lang="pt-BR" smtClean="0"/>
-              <a:t>04/08/2026</a:t>
+              <a:t>05/08/2026</a:t>
             </a:fld>
             <a:endParaRPr lang="pt-BR"/>
           </a:p>
@@ -10846,7 +12954,7 @@
           <a:p>
             <a:fld id="{A87E3B6E-8316-4A1C-BADA-DB7F3456EEF1}" type="datetimeFigureOut">
               <a:rPr lang="pt-BR" smtClean="0"/>
-              <a:t>04/08/2026</a:t>
+              <a:t>05/08/2026</a:t>
             </a:fld>
             <a:endParaRPr lang="pt-BR"/>
           </a:p>
@@ -11109,7 +13217,7 @@
           <a:p>
             <a:fld id="{A87E3B6E-8316-4A1C-BADA-DB7F3456EEF1}" type="datetimeFigureOut">
               <a:rPr lang="pt-BR" smtClean="0"/>
-              <a:t>04/08/2026</a:t>
+              <a:t>05/08/2026</a:t>
             </a:fld>
             <a:endParaRPr lang="pt-BR"/>
           </a:p>
@@ -11374,7 +13482,7 @@
           <a:p>
             <a:fld id="{A87E3B6E-8316-4A1C-BADA-DB7F3456EEF1}" type="datetimeFigureOut">
               <a:rPr lang="pt-BR" smtClean="0"/>
-              <a:t>04/08/2026</a:t>
+              <a:t>05/08/2026</a:t>
             </a:fld>
             <a:endParaRPr lang="pt-BR"/>
           </a:p>
@@ -11786,7 +13894,7 @@
           <a:p>
             <a:fld id="{A87E3B6E-8316-4A1C-BADA-DB7F3456EEF1}" type="datetimeFigureOut">
               <a:rPr lang="pt-BR" smtClean="0"/>
-              <a:t>04/08/2026</a:t>
+              <a:t>05/08/2026</a:t>
             </a:fld>
             <a:endParaRPr lang="pt-BR"/>
           </a:p>
@@ -11927,7 +14035,7 @@
           <a:p>
             <a:fld id="{A87E3B6E-8316-4A1C-BADA-DB7F3456EEF1}" type="datetimeFigureOut">
               <a:rPr lang="pt-BR" smtClean="0"/>
-              <a:t>04/08/2026</a:t>
+              <a:t>05/08/2026</a:t>
             </a:fld>
             <a:endParaRPr lang="pt-BR"/>
           </a:p>
@@ -12040,7 +14148,7 @@
           <a:p>
             <a:fld id="{A87E3B6E-8316-4A1C-BADA-DB7F3456EEF1}" type="datetimeFigureOut">
               <a:rPr lang="pt-BR" smtClean="0"/>
-              <a:t>04/08/2026</a:t>
+              <a:t>05/08/2026</a:t>
             </a:fld>
             <a:endParaRPr lang="pt-BR"/>
           </a:p>
@@ -12351,7 +14459,7 @@
           <a:p>
             <a:fld id="{A87E3B6E-8316-4A1C-BADA-DB7F3456EEF1}" type="datetimeFigureOut">
               <a:rPr lang="pt-BR" smtClean="0"/>
-              <a:t>04/08/2026</a:t>
+              <a:t>05/08/2026</a:t>
             </a:fld>
             <a:endParaRPr lang="pt-BR"/>
           </a:p>
@@ -12639,7 +14747,7 @@
           <a:p>
             <a:fld id="{A87E3B6E-8316-4A1C-BADA-DB7F3456EEF1}" type="datetimeFigureOut">
               <a:rPr lang="pt-BR" smtClean="0"/>
-              <a:t>04/08/2026</a:t>
+              <a:t>05/08/2026</a:t>
             </a:fld>
             <a:endParaRPr lang="pt-BR"/>
           </a:p>
@@ -12880,7 +14988,7 @@
           <a:p>
             <a:fld id="{A87E3B6E-8316-4A1C-BADA-DB7F3456EEF1}" type="datetimeFigureOut">
               <a:rPr lang="pt-BR" smtClean="0"/>
-              <a:t>04/08/2026</a:t>
+              <a:t>05/08/2026</a:t>
             </a:fld>
             <a:endParaRPr lang="pt-BR"/>
           </a:p>
@@ -13444,7 +15552,7 @@
           <a:p>
             <a:fld id="{A87E3B6E-8316-4A1C-BADA-DB7F3456EEF1}" type="datetimeFigureOut">
               <a:rPr lang="pt-BR" smtClean="0"/>
-              <a:t>04/08/2026</a:t>
+              <a:t>05/08/2026</a:t>
             </a:fld>
             <a:endParaRPr lang="pt-BR"/>
           </a:p>
@@ -21293,7 +23401,7 @@
 </p:sld>
 </file>
 
-<file path=ppt/slides/slide3.xml><?xml version="1.0" encoding="utf-8"?>
+<file path=ppt/slides/slide29.xml><?xml version="1.0" encoding="utf-8"?>
 <p:sld xmlns:a="http://schemas.openxmlformats.org/drawingml/2006/main" xmlns:r="http://schemas.openxmlformats.org/officeDocument/2006/relationships" xmlns:p="http://schemas.openxmlformats.org/presentationml/2006/main">
   <p:cSld>
     <p:spTree>
@@ -21301,7 +23409,7 @@
         <p:cNvPr id="1" name="">
           <a:extLst>
             <a:ext uri="{FF2B5EF4-FFF2-40B4-BE49-F238E27FC236}">
-              <a16:creationId xmlns:a16="http://schemas.microsoft.com/office/drawing/2014/main" id="{75DC6F12-CB60-EC12-334D-A843F4105EF9}"/>
+              <a16:creationId xmlns:a16="http://schemas.microsoft.com/office/drawing/2014/main" id="{9AD9A104-DC23-2A54-0824-013B41F66CF5}"/>
             </a:ext>
           </a:extLst>
         </p:cNvPr>
@@ -21321,7 +23429,7 @@
           <p:cNvPr id="5" name="Retângulo 4">
             <a:extLst>
               <a:ext uri="{FF2B5EF4-FFF2-40B4-BE49-F238E27FC236}">
-                <a16:creationId xmlns:a16="http://schemas.microsoft.com/office/drawing/2014/main" id="{3522B2D8-67D3-186B-9646-B4F2E93DCAD4}"/>
+                <a16:creationId xmlns:a16="http://schemas.microsoft.com/office/drawing/2014/main" id="{4F040378-7861-DDD1-8B6B-71ABCAE46196}"/>
               </a:ext>
             </a:extLst>
           </p:cNvPr>
@@ -21375,7 +23483,7 @@
           <p:cNvPr id="2" name="Título 1">
             <a:extLst>
               <a:ext uri="{FF2B5EF4-FFF2-40B4-BE49-F238E27FC236}">
-                <a16:creationId xmlns:a16="http://schemas.microsoft.com/office/drawing/2014/main" id="{F627AF45-4965-F2EA-4785-9BD925E69BCA}"/>
+                <a16:creationId xmlns:a16="http://schemas.microsoft.com/office/drawing/2014/main" id="{862153CB-A444-24C9-5CC9-1A61EF951AE1}"/>
               </a:ext>
             </a:extLst>
           </p:cNvPr>
@@ -21403,7 +23511,7 @@
                   <a:schemeClr val="bg1"/>
                 </a:solidFill>
               </a:rPr>
-              <a:t>Distribuição de Notas</a:t>
+              <a:t>Palavras reservadas</a:t>
             </a:r>
           </a:p>
         </p:txBody>
@@ -21413,7 +23521,7 @@
           <p:cNvPr id="12" name="AutoShape 6" descr="Lógica Proposicional x Lógica de Argumento ⋆ Colaborae">
             <a:extLst>
               <a:ext uri="{FF2B5EF4-FFF2-40B4-BE49-F238E27FC236}">
-                <a16:creationId xmlns:a16="http://schemas.microsoft.com/office/drawing/2014/main" id="{F1C6C694-907B-4090-64BD-AEE83CCF19C5}"/>
+                <a16:creationId xmlns:a16="http://schemas.microsoft.com/office/drawing/2014/main" id="{A2C4259A-9F2D-B996-873C-33EAF93216FA}"/>
               </a:ext>
             </a:extLst>
           </p:cNvPr>
@@ -21458,7 +23566,7 @@
           <p:cNvPr id="6" name="Espaço Reservado para Conteúdo 5">
             <a:extLst>
               <a:ext uri="{FF2B5EF4-FFF2-40B4-BE49-F238E27FC236}">
-                <a16:creationId xmlns:a16="http://schemas.microsoft.com/office/drawing/2014/main" id="{7EBA44CF-0249-2FC7-5D35-8CE4AAB5D1FE}"/>
+                <a16:creationId xmlns:a16="http://schemas.microsoft.com/office/drawing/2014/main" id="{C44D37B3-F763-AE46-E407-49AE69531535}"/>
               </a:ext>
             </a:extLst>
           </p:cNvPr>
@@ -21471,51 +23579,54 @@
         </p:nvSpPr>
         <p:spPr>
           <a:xfrm>
-            <a:off x="1486540" y="1804575"/>
-            <a:ext cx="8670280" cy="4746632"/>
+            <a:off x="2476581" y="1621425"/>
+            <a:ext cx="7238835" cy="4927600"/>
           </a:xfrm>
         </p:spPr>
         <p:txBody>
-          <a:bodyPr/>
+          <a:bodyPr>
+            <a:normAutofit/>
+          </a:bodyPr>
           <a:lstStyle/>
           <a:p>
             <a:r>
               <a:rPr lang="pt-BR" sz="2400" dirty="0"/>
-              <a:t>Atividades Complementares 1 – </a:t>
-            </a:r>
-            <a:r>
-              <a:rPr lang="pt-BR" sz="2400" b="1" dirty="0"/>
-              <a:t>5pts</a:t>
-            </a:r>
-          </a:p>
-          <a:p>
-            <a:r>
-              <a:rPr lang="pt-BR" sz="2400" dirty="0" err="1"/>
-              <a:t>Uniube</a:t>
+              <a:t>São termos com funções fixas na linguagem, como </a:t>
+            </a:r>
+            <a:r>
+              <a:rPr lang="pt-BR" sz="2400" b="1" dirty="0" err="1"/>
+              <a:t>int</a:t>
             </a:r>
             <a:r>
               <a:rPr lang="pt-BR" sz="2400" dirty="0"/>
-              <a:t>+ – </a:t>
-            </a:r>
-            <a:r>
-              <a:rPr lang="pt-BR" sz="2400" b="1" dirty="0"/>
-              <a:t>5pts</a:t>
-            </a:r>
+              <a:t>, </a:t>
+            </a:r>
+            <a:r>
+              <a:rPr lang="pt-BR" sz="2400" b="1" dirty="0" err="1"/>
+              <a:t>if</a:t>
+            </a:r>
+            <a:r>
+              <a:rPr lang="pt-BR" sz="2400" dirty="0"/>
+              <a:t> e </a:t>
+            </a:r>
+            <a:r>
+              <a:rPr lang="pt-BR" sz="2400" b="1" dirty="0" err="1"/>
+              <a:t>return</a:t>
+            </a:r>
+            <a:r>
+              <a:rPr lang="pt-BR" sz="2400" dirty="0"/>
+              <a:t>. </a:t>
+            </a:r>
+          </a:p>
+          <a:p>
             <a:endParaRPr lang="pt-BR" sz="2400" dirty="0"/>
           </a:p>
           <a:p>
             <a:r>
               <a:rPr lang="pt-BR" sz="2400" dirty="0"/>
-              <a:t>Avaliação 1 – </a:t>
-            </a:r>
-            <a:r>
-              <a:rPr lang="pt-BR" sz="2400" b="1" dirty="0"/>
-              <a:t>25pts</a:t>
-            </a:r>
-            <a:r>
-              <a:rPr lang="pt-BR" sz="2400" dirty="0"/>
-              <a:t> – Data prevista: </a:t>
-            </a:r>
+              <a:t>Elas somam 32 no padrão original e não podem ser usadas para dar nomes a variáveis ou funções.</a:t>
+            </a:r>
+            <a:endParaRPr lang="en-US" sz="2400" dirty="0"/>
           </a:p>
           <a:p>
             <a:pPr marL="0" indent="0">
@@ -21524,134 +23635,44 @@
             <a:endParaRPr lang="pt-BR" sz="2400" dirty="0"/>
           </a:p>
           <a:p>
-            <a:r>
-              <a:rPr lang="pt-BR" sz="2400" dirty="0"/>
-              <a:t>Atividades Complementares 2 – </a:t>
-            </a:r>
-            <a:r>
-              <a:rPr lang="pt-BR" sz="2400" b="1" dirty="0"/>
-              <a:t>10pts</a:t>
-            </a:r>
-          </a:p>
-          <a:p>
-            <a:r>
-              <a:rPr lang="pt-BR" sz="2400" dirty="0" err="1"/>
-              <a:t>Uniube</a:t>
-            </a:r>
-            <a:r>
-              <a:rPr lang="pt-BR" sz="2400" dirty="0"/>
-              <a:t>+ – </a:t>
-            </a:r>
-            <a:r>
-              <a:rPr lang="pt-BR" sz="2400" b="1" dirty="0"/>
-              <a:t>10pts</a:t>
-            </a:r>
             <a:endParaRPr lang="pt-BR" sz="2400" dirty="0"/>
-          </a:p>
-          <a:p>
-            <a:r>
-              <a:rPr lang="pt-BR" sz="2400" dirty="0"/>
-              <a:t>Avaliação 2 – </a:t>
-            </a:r>
-            <a:r>
-              <a:rPr lang="pt-BR" sz="2400" b="1" dirty="0"/>
-              <a:t>30pts</a:t>
-            </a:r>
-            <a:r>
-              <a:rPr lang="pt-BR" sz="2400" dirty="0"/>
-              <a:t> – Data prevista: </a:t>
-            </a:r>
-          </a:p>
-          <a:p>
-            <a:endParaRPr lang="pt-BR" sz="2400" dirty="0"/>
-          </a:p>
-          <a:p>
-            <a:r>
-              <a:rPr lang="pt-BR" sz="2400" dirty="0"/>
-              <a:t>Avaliação Institucional – </a:t>
-            </a:r>
-            <a:r>
-              <a:rPr lang="pt-BR" sz="2400" b="1" dirty="0"/>
-              <a:t>15pts</a:t>
-            </a:r>
-            <a:endParaRPr lang="pt-BR" sz="2400" dirty="0"/>
-          </a:p>
-          <a:p>
-            <a:r>
-              <a:rPr lang="pt-BR" sz="2400" dirty="0"/>
-              <a:t>Soma total de pontos: </a:t>
-            </a:r>
-            <a:r>
-              <a:rPr lang="pt-BR" sz="2400" b="1" dirty="0"/>
-              <a:t>100pts</a:t>
-            </a:r>
-            <a:endParaRPr lang="pt-BR" sz="2400" dirty="0"/>
-          </a:p>
-          <a:p>
-            <a:endParaRPr lang="pt-BR" sz="2400" dirty="0"/>
-          </a:p>
-          <a:p>
-            <a:endParaRPr lang="pt-BR" sz="2400" dirty="0"/>
-          </a:p>
-          <a:p>
-            <a:endParaRPr lang="pt-BR" sz="2400" dirty="0"/>
-          </a:p>
-          <a:p>
-            <a:endParaRPr lang="pt-BR" dirty="0"/>
           </a:p>
         </p:txBody>
       </p:sp>
       <p:pic>
         <p:nvPicPr>
-          <p:cNvPr id="1026" name="Picture 2" descr="Teste - ícones de educação grátis">
-            <a:extLst>
-              <a:ext uri="{FF2B5EF4-FFF2-40B4-BE49-F238E27FC236}">
-                <a16:creationId xmlns:a16="http://schemas.microsoft.com/office/drawing/2014/main" id="{5C4BB763-0221-5AB3-8665-67367B488F54}"/>
+          <p:cNvPr id="3" name="Imagem 2">
+            <a:extLst>
+              <a:ext uri="{FF2B5EF4-FFF2-40B4-BE49-F238E27FC236}">
+                <a16:creationId xmlns:a16="http://schemas.microsoft.com/office/drawing/2014/main" id="{5CCD40E8-653A-1363-8677-7FBD84510734}"/>
               </a:ext>
             </a:extLst>
           </p:cNvPr>
           <p:cNvPicPr>
-            <a:picLocks noChangeAspect="1" noChangeArrowheads="1"/>
+            <a:picLocks noChangeAspect="1"/>
           </p:cNvPicPr>
           <p:nvPr/>
         </p:nvPicPr>
         <p:blipFill>
-          <a:blip r:embed="rId3">
-            <a:extLst>
-              <a:ext uri="{28A0092B-C50C-407E-A947-70E740481C1C}">
-                <a14:useLocalDpi xmlns:a14="http://schemas.microsoft.com/office/drawing/2010/main" val="0"/>
-              </a:ext>
-            </a:extLst>
-          </a:blip>
-          <a:srcRect/>
+          <a:blip r:embed="rId3"/>
           <a:stretch>
             <a:fillRect/>
           </a:stretch>
         </p:blipFill>
-        <p:spPr bwMode="auto">
+        <p:spPr>
           <a:xfrm>
-            <a:off x="7985126" y="2518544"/>
-            <a:ext cx="3150736" cy="3150736"/>
+            <a:off x="2752044" y="3890374"/>
+            <a:ext cx="6687911" cy="2658651"/>
           </a:xfrm>
           <a:prstGeom prst="rect">
             <a:avLst/>
           </a:prstGeom>
-          <a:noFill/>
-          <a:extLst>
-            <a:ext uri="{909E8E84-426E-40DD-AFC4-6F175D3DCCD1}">
-              <a14:hiddenFill xmlns:a14="http://schemas.microsoft.com/office/drawing/2010/main">
-                <a:solidFill>
-                  <a:srgbClr val="FFFFFF"/>
-                </a:solidFill>
-              </a14:hiddenFill>
-            </a:ext>
-          </a:extLst>
         </p:spPr>
       </p:pic>
     </p:spTree>
     <p:extLst>
       <p:ext uri="{BB962C8B-B14F-4D97-AF65-F5344CB8AC3E}">
-        <p14:creationId xmlns:p14="http://schemas.microsoft.com/office/powerpoint/2010/main" val="2230451584"/>
+        <p14:creationId xmlns:p14="http://schemas.microsoft.com/office/powerpoint/2010/main" val="1487358391"/>
       </p:ext>
     </p:extLst>
   </p:cSld>
@@ -21661,7 +23682,7 @@
 </p:sld>
 </file>
 
-<file path=ppt/slides/slide4.xml><?xml version="1.0" encoding="utf-8"?>
+<file path=ppt/slides/slide3.xml><?xml version="1.0" encoding="utf-8"?>
 <p:sld xmlns:a="http://schemas.openxmlformats.org/drawingml/2006/main" xmlns:r="http://schemas.openxmlformats.org/officeDocument/2006/relationships" xmlns:p="http://schemas.openxmlformats.org/presentationml/2006/main">
   <p:cSld>
     <p:spTree>
@@ -21669,7 +23690,7 @@
         <p:cNvPr id="1" name="">
           <a:extLst>
             <a:ext uri="{FF2B5EF4-FFF2-40B4-BE49-F238E27FC236}">
-              <a16:creationId xmlns:a16="http://schemas.microsoft.com/office/drawing/2014/main" id="{3E98EFC3-284D-D3E8-E50A-9E8782F149E5}"/>
+              <a16:creationId xmlns:a16="http://schemas.microsoft.com/office/drawing/2014/main" id="{75DC6F12-CB60-EC12-334D-A843F4105EF9}"/>
             </a:ext>
           </a:extLst>
         </p:cNvPr>
@@ -21689,7 +23710,7 @@
           <p:cNvPr id="5" name="Retângulo 4">
             <a:extLst>
               <a:ext uri="{FF2B5EF4-FFF2-40B4-BE49-F238E27FC236}">
-                <a16:creationId xmlns:a16="http://schemas.microsoft.com/office/drawing/2014/main" id="{B1CC91A5-617B-F614-3886-EF59D2171B4E}"/>
+                <a16:creationId xmlns:a16="http://schemas.microsoft.com/office/drawing/2014/main" id="{3522B2D8-67D3-186B-9646-B4F2E93DCAD4}"/>
               </a:ext>
             </a:extLst>
           </p:cNvPr>
@@ -21743,7 +23764,7 @@
           <p:cNvPr id="2" name="Título 1">
             <a:extLst>
               <a:ext uri="{FF2B5EF4-FFF2-40B4-BE49-F238E27FC236}">
-                <a16:creationId xmlns:a16="http://schemas.microsoft.com/office/drawing/2014/main" id="{D778D71A-5EF8-AADA-8ACC-9C2D89EE5258}"/>
+                <a16:creationId xmlns:a16="http://schemas.microsoft.com/office/drawing/2014/main" id="{F627AF45-4965-F2EA-4785-9BD925E69BCA}"/>
               </a:ext>
             </a:extLst>
           </p:cNvPr>
@@ -21771,7 +23792,7 @@
                   <a:schemeClr val="bg1"/>
                 </a:solidFill>
               </a:rPr>
-              <a:t>Bibliografia</a:t>
+              <a:t>Distribuição de Notas</a:t>
             </a:r>
           </a:p>
         </p:txBody>
@@ -21781,7 +23802,7 @@
           <p:cNvPr id="12" name="AutoShape 6" descr="Lógica Proposicional x Lógica de Argumento ⋆ Colaborae">
             <a:extLst>
               <a:ext uri="{FF2B5EF4-FFF2-40B4-BE49-F238E27FC236}">
-                <a16:creationId xmlns:a16="http://schemas.microsoft.com/office/drawing/2014/main" id="{ED9276FC-2835-8FCA-9E06-6FEFA248BD66}"/>
+                <a16:creationId xmlns:a16="http://schemas.microsoft.com/office/drawing/2014/main" id="{F1C6C694-907B-4090-64BD-AEE83CCF19C5}"/>
               </a:ext>
             </a:extLst>
           </p:cNvPr>
@@ -21826,7 +23847,7 @@
           <p:cNvPr id="6" name="Espaço Reservado para Conteúdo 5">
             <a:extLst>
               <a:ext uri="{FF2B5EF4-FFF2-40B4-BE49-F238E27FC236}">
-                <a16:creationId xmlns:a16="http://schemas.microsoft.com/office/drawing/2014/main" id="{E0EE607F-D9F4-7951-D428-ABA18E81EE79}"/>
+                <a16:creationId xmlns:a16="http://schemas.microsoft.com/office/drawing/2014/main" id="{7EBA44CF-0249-2FC7-5D35-8CE4AAB5D1FE}"/>
               </a:ext>
             </a:extLst>
           </p:cNvPr>
@@ -21848,6 +23869,3760 @@
           <a:lstStyle/>
           <a:p>
             <a:r>
+              <a:rPr lang="pt-BR" sz="2400" dirty="0"/>
+              <a:t>Atividades Complementares 1 – </a:t>
+            </a:r>
+            <a:r>
+              <a:rPr lang="pt-BR" sz="2400" b="1" dirty="0"/>
+              <a:t>5pts</a:t>
+            </a:r>
+          </a:p>
+          <a:p>
+            <a:r>
+              <a:rPr lang="pt-BR" sz="2400" dirty="0" err="1"/>
+              <a:t>Uniube</a:t>
+            </a:r>
+            <a:r>
+              <a:rPr lang="pt-BR" sz="2400" dirty="0"/>
+              <a:t>+ – </a:t>
+            </a:r>
+            <a:r>
+              <a:rPr lang="pt-BR" sz="2400" b="1" dirty="0"/>
+              <a:t>5pts</a:t>
+            </a:r>
+            <a:endParaRPr lang="pt-BR" sz="2400" dirty="0"/>
+          </a:p>
+          <a:p>
+            <a:r>
+              <a:rPr lang="pt-BR" sz="2400" dirty="0"/>
+              <a:t>Avaliação 1 – </a:t>
+            </a:r>
+            <a:r>
+              <a:rPr lang="pt-BR" sz="2400" b="1" dirty="0"/>
+              <a:t>25pts</a:t>
+            </a:r>
+            <a:r>
+              <a:rPr lang="pt-BR" sz="2400" dirty="0"/>
+              <a:t> – Data prevista: </a:t>
+            </a:r>
+          </a:p>
+          <a:p>
+            <a:pPr marL="0" indent="0">
+              <a:buNone/>
+            </a:pPr>
+            <a:endParaRPr lang="pt-BR" sz="2400" dirty="0"/>
+          </a:p>
+          <a:p>
+            <a:r>
+              <a:rPr lang="pt-BR" sz="2400" dirty="0"/>
+              <a:t>Atividades Complementares 2 – </a:t>
+            </a:r>
+            <a:r>
+              <a:rPr lang="pt-BR" sz="2400" b="1" dirty="0"/>
+              <a:t>10pts</a:t>
+            </a:r>
+          </a:p>
+          <a:p>
+            <a:r>
+              <a:rPr lang="pt-BR" sz="2400" dirty="0" err="1"/>
+              <a:t>Uniube</a:t>
+            </a:r>
+            <a:r>
+              <a:rPr lang="pt-BR" sz="2400" dirty="0"/>
+              <a:t>+ – </a:t>
+            </a:r>
+            <a:r>
+              <a:rPr lang="pt-BR" sz="2400" b="1" dirty="0"/>
+              <a:t>10pts</a:t>
+            </a:r>
+            <a:endParaRPr lang="pt-BR" sz="2400" dirty="0"/>
+          </a:p>
+          <a:p>
+            <a:r>
+              <a:rPr lang="pt-BR" sz="2400" dirty="0"/>
+              <a:t>Avaliação 2 – </a:t>
+            </a:r>
+            <a:r>
+              <a:rPr lang="pt-BR" sz="2400" b="1" dirty="0"/>
+              <a:t>30pts</a:t>
+            </a:r>
+            <a:r>
+              <a:rPr lang="pt-BR" sz="2400" dirty="0"/>
+              <a:t> – Data prevista: </a:t>
+            </a:r>
+          </a:p>
+          <a:p>
+            <a:endParaRPr lang="pt-BR" sz="2400" dirty="0"/>
+          </a:p>
+          <a:p>
+            <a:r>
+              <a:rPr lang="pt-BR" sz="2400" dirty="0"/>
+              <a:t>Avaliação Institucional – </a:t>
+            </a:r>
+            <a:r>
+              <a:rPr lang="pt-BR" sz="2400" b="1" dirty="0"/>
+              <a:t>15pts</a:t>
+            </a:r>
+            <a:endParaRPr lang="pt-BR" sz="2400" dirty="0"/>
+          </a:p>
+          <a:p>
+            <a:r>
+              <a:rPr lang="pt-BR" sz="2400" dirty="0"/>
+              <a:t>Soma total de pontos: </a:t>
+            </a:r>
+            <a:r>
+              <a:rPr lang="pt-BR" sz="2400" b="1" dirty="0"/>
+              <a:t>100pts</a:t>
+            </a:r>
+            <a:endParaRPr lang="pt-BR" sz="2400" dirty="0"/>
+          </a:p>
+          <a:p>
+            <a:endParaRPr lang="pt-BR" sz="2400" dirty="0"/>
+          </a:p>
+          <a:p>
+            <a:endParaRPr lang="pt-BR" sz="2400" dirty="0"/>
+          </a:p>
+          <a:p>
+            <a:endParaRPr lang="pt-BR" sz="2400" dirty="0"/>
+          </a:p>
+          <a:p>
+            <a:endParaRPr lang="pt-BR" dirty="0"/>
+          </a:p>
+        </p:txBody>
+      </p:sp>
+      <p:pic>
+        <p:nvPicPr>
+          <p:cNvPr id="1026" name="Picture 2" descr="Teste - ícones de educação grátis">
+            <a:extLst>
+              <a:ext uri="{FF2B5EF4-FFF2-40B4-BE49-F238E27FC236}">
+                <a16:creationId xmlns:a16="http://schemas.microsoft.com/office/drawing/2014/main" id="{5C4BB763-0221-5AB3-8665-67367B488F54}"/>
+              </a:ext>
+            </a:extLst>
+          </p:cNvPr>
+          <p:cNvPicPr>
+            <a:picLocks noChangeAspect="1" noChangeArrowheads="1"/>
+          </p:cNvPicPr>
+          <p:nvPr/>
+        </p:nvPicPr>
+        <p:blipFill>
+          <a:blip r:embed="rId3">
+            <a:extLst>
+              <a:ext uri="{28A0092B-C50C-407E-A947-70E740481C1C}">
+                <a14:useLocalDpi xmlns:a14="http://schemas.microsoft.com/office/drawing/2010/main" val="0"/>
+              </a:ext>
+            </a:extLst>
+          </a:blip>
+          <a:srcRect/>
+          <a:stretch>
+            <a:fillRect/>
+          </a:stretch>
+        </p:blipFill>
+        <p:spPr bwMode="auto">
+          <a:xfrm>
+            <a:off x="7985126" y="2518544"/>
+            <a:ext cx="3150736" cy="3150736"/>
+          </a:xfrm>
+          <a:prstGeom prst="rect">
+            <a:avLst/>
+          </a:prstGeom>
+          <a:noFill/>
+          <a:extLst>
+            <a:ext uri="{909E8E84-426E-40DD-AFC4-6F175D3DCCD1}">
+              <a14:hiddenFill xmlns:a14="http://schemas.microsoft.com/office/drawing/2010/main">
+                <a:solidFill>
+                  <a:srgbClr val="FFFFFF"/>
+                </a:solidFill>
+              </a14:hiddenFill>
+            </a:ext>
+          </a:extLst>
+        </p:spPr>
+      </p:pic>
+    </p:spTree>
+    <p:extLst>
+      <p:ext uri="{BB962C8B-B14F-4D97-AF65-F5344CB8AC3E}">
+        <p14:creationId xmlns:p14="http://schemas.microsoft.com/office/powerpoint/2010/main" val="2230451584"/>
+      </p:ext>
+    </p:extLst>
+  </p:cSld>
+  <p:clrMapOvr>
+    <a:masterClrMapping/>
+  </p:clrMapOvr>
+</p:sld>
+</file>
+
+<file path=ppt/slides/slide30.xml><?xml version="1.0" encoding="utf-8"?>
+<p:sld xmlns:a="http://schemas.openxmlformats.org/drawingml/2006/main" xmlns:r="http://schemas.openxmlformats.org/officeDocument/2006/relationships" xmlns:p="http://schemas.openxmlformats.org/presentationml/2006/main">
+  <p:cSld>
+    <p:spTree>
+      <p:nvGrpSpPr>
+        <p:cNvPr id="1" name="">
+          <a:extLst>
+            <a:ext uri="{FF2B5EF4-FFF2-40B4-BE49-F238E27FC236}">
+              <a16:creationId xmlns:a16="http://schemas.microsoft.com/office/drawing/2014/main" id="{A1F8E862-BC4A-1C62-D8CC-0579B7FDF6A1}"/>
+            </a:ext>
+          </a:extLst>
+        </p:cNvPr>
+        <p:cNvGrpSpPr/>
+        <p:nvPr/>
+      </p:nvGrpSpPr>
+      <p:grpSpPr>
+        <a:xfrm>
+          <a:off x="0" y="0"/>
+          <a:ext cx="0" cy="0"/>
+          <a:chOff x="0" y="0"/>
+          <a:chExt cx="0" cy="0"/>
+        </a:xfrm>
+      </p:grpSpPr>
+      <p:sp>
+        <p:nvSpPr>
+          <p:cNvPr id="5" name="Retângulo 4">
+            <a:extLst>
+              <a:ext uri="{FF2B5EF4-FFF2-40B4-BE49-F238E27FC236}">
+                <a16:creationId xmlns:a16="http://schemas.microsoft.com/office/drawing/2014/main" id="{C252457F-9AF5-0F64-D569-F29176AEC7E5}"/>
+              </a:ext>
+            </a:extLst>
+          </p:cNvPr>
+          <p:cNvSpPr/>
+          <p:nvPr/>
+        </p:nvSpPr>
+        <p:spPr>
+          <a:xfrm>
+            <a:off x="0" y="-2"/>
+            <a:ext cx="12192000" cy="1325563"/>
+          </a:xfrm>
+          <a:prstGeom prst="rect">
+            <a:avLst/>
+          </a:prstGeom>
+          <a:solidFill>
+            <a:srgbClr val="418AB3"/>
+          </a:solidFill>
+          <a:ln>
+            <a:solidFill>
+              <a:srgbClr val="418AB3"/>
+            </a:solidFill>
+          </a:ln>
+        </p:spPr>
+        <p:style>
+          <a:lnRef idx="2">
+            <a:schemeClr val="accent1">
+              <a:shade val="15000"/>
+            </a:schemeClr>
+          </a:lnRef>
+          <a:fillRef idx="1">
+            <a:schemeClr val="accent1"/>
+          </a:fillRef>
+          <a:effectRef idx="0">
+            <a:schemeClr val="accent1"/>
+          </a:effectRef>
+          <a:fontRef idx="minor">
+            <a:schemeClr val="lt1"/>
+          </a:fontRef>
+        </p:style>
+        <p:txBody>
+          <a:bodyPr rtlCol="0" anchor="ctr"/>
+          <a:lstStyle/>
+          <a:p>
+            <a:pPr algn="ctr"/>
+            <a:endParaRPr lang="pt-BR" dirty="0"/>
+          </a:p>
+        </p:txBody>
+      </p:sp>
+      <p:sp>
+        <p:nvSpPr>
+          <p:cNvPr id="2" name="Título 1">
+            <a:extLst>
+              <a:ext uri="{FF2B5EF4-FFF2-40B4-BE49-F238E27FC236}">
+                <a16:creationId xmlns:a16="http://schemas.microsoft.com/office/drawing/2014/main" id="{D2A38A48-38C3-F7A4-EEF1-9F838AEB8E2F}"/>
+              </a:ext>
+            </a:extLst>
+          </p:cNvPr>
+          <p:cNvSpPr>
+            <a:spLocks noGrp="1"/>
+          </p:cNvSpPr>
+          <p:nvPr>
+            <p:ph type="title"/>
+          </p:nvPr>
+        </p:nvSpPr>
+        <p:spPr>
+          <a:xfrm>
+            <a:off x="0" y="-1"/>
+            <a:ext cx="12192000" cy="1325563"/>
+          </a:xfrm>
+        </p:spPr>
+        <p:txBody>
+          <a:bodyPr/>
+          <a:lstStyle/>
+          <a:p>
+            <a:pPr algn="ctr"/>
+            <a:r>
+              <a:rPr lang="pt-BR" dirty="0">
+                <a:solidFill>
+                  <a:schemeClr val="bg1"/>
+                </a:solidFill>
+              </a:rPr>
+              <a:t>Constantes e Variáveis</a:t>
+            </a:r>
+          </a:p>
+        </p:txBody>
+      </p:sp>
+      <p:sp>
+        <p:nvSpPr>
+          <p:cNvPr id="12" name="AutoShape 6" descr="Lógica Proposicional x Lógica de Argumento ⋆ Colaborae">
+            <a:extLst>
+              <a:ext uri="{FF2B5EF4-FFF2-40B4-BE49-F238E27FC236}">
+                <a16:creationId xmlns:a16="http://schemas.microsoft.com/office/drawing/2014/main" id="{14AA535C-5A76-4565-1E59-39DB71A80D2C}"/>
+              </a:ext>
+            </a:extLst>
+          </p:cNvPr>
+          <p:cNvSpPr>
+            <a:spLocks noChangeAspect="1" noChangeArrowheads="1"/>
+          </p:cNvSpPr>
+          <p:nvPr/>
+        </p:nvSpPr>
+        <p:spPr bwMode="auto">
+          <a:xfrm>
+            <a:off x="5943600" y="-1707776"/>
+            <a:ext cx="5289176" cy="5289176"/>
+          </a:xfrm>
+          <a:prstGeom prst="rect">
+            <a:avLst/>
+          </a:prstGeom>
+          <a:noFill/>
+          <a:extLst>
+            <a:ext uri="{909E8E84-426E-40DD-AFC4-6F175D3DCCD1}">
+              <a14:hiddenFill xmlns:a14="http://schemas.microsoft.com/office/drawing/2010/main">
+                <a:solidFill>
+                  <a:srgbClr val="FFFFFF"/>
+                </a:solidFill>
+              </a14:hiddenFill>
+            </a:ext>
+          </a:extLst>
+        </p:spPr>
+        <p:txBody>
+          <a:bodyPr vert="horz" wrap="square" lIns="91440" tIns="45720" rIns="91440" bIns="45720" numCol="1" anchor="t" anchorCtr="0" compatLnSpc="1">
+            <a:prstTxWarp prst="textNoShape">
+              <a:avLst/>
+            </a:prstTxWarp>
+          </a:bodyPr>
+          <a:lstStyle/>
+          <a:p>
+            <a:endParaRPr lang="pt-BR"/>
+          </a:p>
+        </p:txBody>
+      </p:sp>
+      <p:sp>
+        <p:nvSpPr>
+          <p:cNvPr id="6" name="Espaço Reservado para Conteúdo 5">
+            <a:extLst>
+              <a:ext uri="{FF2B5EF4-FFF2-40B4-BE49-F238E27FC236}">
+                <a16:creationId xmlns:a16="http://schemas.microsoft.com/office/drawing/2014/main" id="{40EE1C5E-D427-6659-18DC-A460DF4B34A9}"/>
+              </a:ext>
+            </a:extLst>
+          </p:cNvPr>
+          <p:cNvSpPr>
+            <a:spLocks noGrp="1"/>
+          </p:cNvSpPr>
+          <p:nvPr>
+            <p:ph idx="1"/>
+          </p:nvPr>
+        </p:nvSpPr>
+        <p:spPr>
+          <a:xfrm>
+            <a:off x="704384" y="1325560"/>
+            <a:ext cx="6490500" cy="5532439"/>
+          </a:xfrm>
+        </p:spPr>
+        <p:txBody>
+          <a:bodyPr>
+            <a:normAutofit/>
+          </a:bodyPr>
+          <a:lstStyle/>
+          <a:p>
+            <a:pPr marL="0" indent="0">
+              <a:buNone/>
+            </a:pPr>
+            <a:endParaRPr lang="pt-BR" sz="2400" dirty="0"/>
+          </a:p>
+          <a:p>
+            <a:r>
+              <a:rPr lang="pt-BR" sz="2400" b="1" dirty="0"/>
+              <a:t>Variáveis</a:t>
+            </a:r>
+            <a:r>
+              <a:rPr lang="pt-BR" sz="2400" dirty="0"/>
+              <a:t> são espaços na memória usados para o armazenamento de dados.</a:t>
+            </a:r>
+          </a:p>
+          <a:p>
+            <a:pPr lvl="1"/>
+            <a:endParaRPr lang="pt-BR" sz="2200" dirty="0"/>
+          </a:p>
+          <a:p>
+            <a:pPr lvl="1"/>
+            <a:r>
+              <a:rPr lang="pt-BR" sz="2200" dirty="0"/>
+              <a:t>Durante a execução, as variáveis podem ter seu valor alterado</a:t>
+            </a:r>
+          </a:p>
+          <a:p>
+            <a:pPr lvl="1"/>
+            <a:endParaRPr lang="pt-BR" sz="2200" dirty="0"/>
+          </a:p>
+          <a:p>
+            <a:pPr lvl="1"/>
+            <a:r>
+              <a:rPr lang="pt-BR" sz="2200" dirty="0"/>
+              <a:t>É necessário declarar o tipo da variável em C</a:t>
+            </a:r>
+          </a:p>
+          <a:p>
+            <a:pPr lvl="1"/>
+            <a:endParaRPr lang="pt-BR" sz="2200" dirty="0"/>
+          </a:p>
+          <a:p>
+            <a:pPr lvl="1"/>
+            <a:r>
+              <a:rPr lang="pt-BR" sz="2200" dirty="0"/>
+              <a:t>O </a:t>
+            </a:r>
+            <a:r>
+              <a:rPr lang="pt-BR" sz="2200" b="1" dirty="0"/>
+              <a:t>tipo</a:t>
+            </a:r>
+            <a:r>
+              <a:rPr lang="pt-BR" sz="2200" dirty="0"/>
+              <a:t> da variável define o tamanho e o formato dos dados armazenados. </a:t>
+            </a:r>
+          </a:p>
+          <a:p>
+            <a:pPr lvl="1"/>
+            <a:endParaRPr lang="pt-BR" sz="2200" dirty="0"/>
+          </a:p>
+          <a:p>
+            <a:pPr lvl="1"/>
+            <a:r>
+              <a:rPr lang="pt-BR" sz="2200" dirty="0"/>
+              <a:t>Os tipos também indicam ao programa como ler e escrever os valores armazenados.</a:t>
+            </a:r>
+          </a:p>
+        </p:txBody>
+      </p:sp>
+      <p:pic>
+        <p:nvPicPr>
+          <p:cNvPr id="3" name="Imagem 2">
+            <a:extLst>
+              <a:ext uri="{FF2B5EF4-FFF2-40B4-BE49-F238E27FC236}">
+                <a16:creationId xmlns:a16="http://schemas.microsoft.com/office/drawing/2014/main" id="{ECCDADD6-A99F-9F56-169F-ABEF71CE26D2}"/>
+              </a:ext>
+            </a:extLst>
+          </p:cNvPr>
+          <p:cNvPicPr>
+            <a:picLocks noChangeAspect="1"/>
+          </p:cNvPicPr>
+          <p:nvPr/>
+        </p:nvPicPr>
+        <p:blipFill>
+          <a:blip r:embed="rId3"/>
+          <a:srcRect r="50000"/>
+          <a:stretch>
+            <a:fillRect/>
+          </a:stretch>
+        </p:blipFill>
+        <p:spPr>
+          <a:xfrm>
+            <a:off x="7899268" y="4091779"/>
+            <a:ext cx="3810000" cy="2371725"/>
+          </a:xfrm>
+          <a:prstGeom prst="rect">
+            <a:avLst/>
+          </a:prstGeom>
+        </p:spPr>
+      </p:pic>
+      <p:pic>
+        <p:nvPicPr>
+          <p:cNvPr id="4" name="Imagem 3">
+            <a:extLst>
+              <a:ext uri="{FF2B5EF4-FFF2-40B4-BE49-F238E27FC236}">
+                <a16:creationId xmlns:a16="http://schemas.microsoft.com/office/drawing/2014/main" id="{B179B713-D6A1-8D20-4DD6-CA1DF15B0C87}"/>
+              </a:ext>
+            </a:extLst>
+          </p:cNvPr>
+          <p:cNvPicPr>
+            <a:picLocks noChangeAspect="1"/>
+          </p:cNvPicPr>
+          <p:nvPr/>
+        </p:nvPicPr>
+        <p:blipFill>
+          <a:blip r:embed="rId3"/>
+          <a:srcRect l="50000"/>
+          <a:stretch>
+            <a:fillRect/>
+          </a:stretch>
+        </p:blipFill>
+        <p:spPr>
+          <a:xfrm>
+            <a:off x="7899268" y="1464865"/>
+            <a:ext cx="3810000" cy="2371725"/>
+          </a:xfrm>
+          <a:prstGeom prst="rect">
+            <a:avLst/>
+          </a:prstGeom>
+        </p:spPr>
+      </p:pic>
+    </p:spTree>
+    <p:extLst>
+      <p:ext uri="{BB962C8B-B14F-4D97-AF65-F5344CB8AC3E}">
+        <p14:creationId xmlns:p14="http://schemas.microsoft.com/office/powerpoint/2010/main" val="3684799893"/>
+      </p:ext>
+    </p:extLst>
+  </p:cSld>
+  <p:clrMapOvr>
+    <a:masterClrMapping/>
+  </p:clrMapOvr>
+</p:sld>
+</file>
+
+<file path=ppt/slides/slide31.xml><?xml version="1.0" encoding="utf-8"?>
+<p:sld xmlns:a="http://schemas.openxmlformats.org/drawingml/2006/main" xmlns:r="http://schemas.openxmlformats.org/officeDocument/2006/relationships" xmlns:p="http://schemas.openxmlformats.org/presentationml/2006/main">
+  <p:cSld>
+    <p:spTree>
+      <p:nvGrpSpPr>
+        <p:cNvPr id="1" name="">
+          <a:extLst>
+            <a:ext uri="{FF2B5EF4-FFF2-40B4-BE49-F238E27FC236}">
+              <a16:creationId xmlns:a16="http://schemas.microsoft.com/office/drawing/2014/main" id="{05EF44E7-B7FC-4147-F562-9FD89C06C426}"/>
+            </a:ext>
+          </a:extLst>
+        </p:cNvPr>
+        <p:cNvGrpSpPr/>
+        <p:nvPr/>
+      </p:nvGrpSpPr>
+      <p:grpSpPr>
+        <a:xfrm>
+          <a:off x="0" y="0"/>
+          <a:ext cx="0" cy="0"/>
+          <a:chOff x="0" y="0"/>
+          <a:chExt cx="0" cy="0"/>
+        </a:xfrm>
+      </p:grpSpPr>
+      <p:sp>
+        <p:nvSpPr>
+          <p:cNvPr id="5" name="Retângulo 4">
+            <a:extLst>
+              <a:ext uri="{FF2B5EF4-FFF2-40B4-BE49-F238E27FC236}">
+                <a16:creationId xmlns:a16="http://schemas.microsoft.com/office/drawing/2014/main" id="{D1262F2A-2B21-4B0A-7338-765F907E0C6A}"/>
+              </a:ext>
+            </a:extLst>
+          </p:cNvPr>
+          <p:cNvSpPr/>
+          <p:nvPr/>
+        </p:nvSpPr>
+        <p:spPr>
+          <a:xfrm>
+            <a:off x="0" y="-2"/>
+            <a:ext cx="12192000" cy="1325563"/>
+          </a:xfrm>
+          <a:prstGeom prst="rect">
+            <a:avLst/>
+          </a:prstGeom>
+          <a:solidFill>
+            <a:srgbClr val="418AB3"/>
+          </a:solidFill>
+          <a:ln>
+            <a:solidFill>
+              <a:srgbClr val="418AB3"/>
+            </a:solidFill>
+          </a:ln>
+        </p:spPr>
+        <p:style>
+          <a:lnRef idx="2">
+            <a:schemeClr val="accent1">
+              <a:shade val="15000"/>
+            </a:schemeClr>
+          </a:lnRef>
+          <a:fillRef idx="1">
+            <a:schemeClr val="accent1"/>
+          </a:fillRef>
+          <a:effectRef idx="0">
+            <a:schemeClr val="accent1"/>
+          </a:effectRef>
+          <a:fontRef idx="minor">
+            <a:schemeClr val="lt1"/>
+          </a:fontRef>
+        </p:style>
+        <p:txBody>
+          <a:bodyPr rtlCol="0" anchor="ctr"/>
+          <a:lstStyle/>
+          <a:p>
+            <a:pPr algn="ctr"/>
+            <a:endParaRPr lang="pt-BR" dirty="0"/>
+          </a:p>
+        </p:txBody>
+      </p:sp>
+      <p:sp>
+        <p:nvSpPr>
+          <p:cNvPr id="2" name="Título 1">
+            <a:extLst>
+              <a:ext uri="{FF2B5EF4-FFF2-40B4-BE49-F238E27FC236}">
+                <a16:creationId xmlns:a16="http://schemas.microsoft.com/office/drawing/2014/main" id="{8F94A0AD-AA48-945A-FF85-7F6A2B97DC10}"/>
+              </a:ext>
+            </a:extLst>
+          </p:cNvPr>
+          <p:cNvSpPr>
+            <a:spLocks noGrp="1"/>
+          </p:cNvSpPr>
+          <p:nvPr>
+            <p:ph type="title"/>
+          </p:nvPr>
+        </p:nvSpPr>
+        <p:spPr>
+          <a:xfrm>
+            <a:off x="0" y="-1"/>
+            <a:ext cx="12192000" cy="1325563"/>
+          </a:xfrm>
+        </p:spPr>
+        <p:txBody>
+          <a:bodyPr/>
+          <a:lstStyle/>
+          <a:p>
+            <a:pPr algn="ctr"/>
+            <a:r>
+              <a:rPr lang="pt-BR" dirty="0">
+                <a:solidFill>
+                  <a:schemeClr val="bg1"/>
+                </a:solidFill>
+              </a:rPr>
+              <a:t>Constantes e Variáveis</a:t>
+            </a:r>
+          </a:p>
+        </p:txBody>
+      </p:sp>
+      <p:sp>
+        <p:nvSpPr>
+          <p:cNvPr id="12" name="AutoShape 6" descr="Lógica Proposicional x Lógica de Argumento ⋆ Colaborae">
+            <a:extLst>
+              <a:ext uri="{FF2B5EF4-FFF2-40B4-BE49-F238E27FC236}">
+                <a16:creationId xmlns:a16="http://schemas.microsoft.com/office/drawing/2014/main" id="{AD678FC8-2BCB-D09B-D2E2-7AB8D89783DF}"/>
+              </a:ext>
+            </a:extLst>
+          </p:cNvPr>
+          <p:cNvSpPr>
+            <a:spLocks noChangeAspect="1" noChangeArrowheads="1"/>
+          </p:cNvSpPr>
+          <p:nvPr/>
+        </p:nvSpPr>
+        <p:spPr bwMode="auto">
+          <a:xfrm>
+            <a:off x="5943600" y="-1707776"/>
+            <a:ext cx="5289176" cy="5289176"/>
+          </a:xfrm>
+          <a:prstGeom prst="rect">
+            <a:avLst/>
+          </a:prstGeom>
+          <a:noFill/>
+          <a:extLst>
+            <a:ext uri="{909E8E84-426E-40DD-AFC4-6F175D3DCCD1}">
+              <a14:hiddenFill xmlns:a14="http://schemas.microsoft.com/office/drawing/2010/main">
+                <a:solidFill>
+                  <a:srgbClr val="FFFFFF"/>
+                </a:solidFill>
+              </a14:hiddenFill>
+            </a:ext>
+          </a:extLst>
+        </p:spPr>
+        <p:txBody>
+          <a:bodyPr vert="horz" wrap="square" lIns="91440" tIns="45720" rIns="91440" bIns="45720" numCol="1" anchor="t" anchorCtr="0" compatLnSpc="1">
+            <a:prstTxWarp prst="textNoShape">
+              <a:avLst/>
+            </a:prstTxWarp>
+          </a:bodyPr>
+          <a:lstStyle/>
+          <a:p>
+            <a:endParaRPr lang="pt-BR"/>
+          </a:p>
+        </p:txBody>
+      </p:sp>
+      <p:sp>
+        <p:nvSpPr>
+          <p:cNvPr id="6" name="Espaço Reservado para Conteúdo 5">
+            <a:extLst>
+              <a:ext uri="{FF2B5EF4-FFF2-40B4-BE49-F238E27FC236}">
+                <a16:creationId xmlns:a16="http://schemas.microsoft.com/office/drawing/2014/main" id="{51CB1CE9-7FFC-AE7B-EE15-3267CB61A4C3}"/>
+              </a:ext>
+            </a:extLst>
+          </p:cNvPr>
+          <p:cNvSpPr>
+            <a:spLocks noGrp="1"/>
+          </p:cNvSpPr>
+          <p:nvPr>
+            <p:ph idx="1"/>
+          </p:nvPr>
+        </p:nvSpPr>
+        <p:spPr>
+          <a:xfrm>
+            <a:off x="355468" y="1568824"/>
+            <a:ext cx="7236458" cy="5289176"/>
+          </a:xfrm>
+        </p:spPr>
+        <p:txBody>
+          <a:bodyPr>
+            <a:normAutofit/>
+          </a:bodyPr>
+          <a:lstStyle/>
+          <a:p>
+            <a:pPr marL="0" indent="0">
+              <a:buNone/>
+            </a:pPr>
+            <a:endParaRPr lang="pt-BR" sz="2400" dirty="0"/>
+          </a:p>
+          <a:p>
+            <a:r>
+              <a:rPr lang="pt-BR" sz="2400" b="1" dirty="0"/>
+              <a:t>Constantes</a:t>
+            </a:r>
+            <a:r>
+              <a:rPr lang="pt-BR" sz="2400" dirty="0"/>
+              <a:t> guardam valores fixos que não podem ser alterados após a definição.</a:t>
+            </a:r>
+          </a:p>
+          <a:p>
+            <a:pPr lvl="1"/>
+            <a:endParaRPr lang="pt-BR" sz="2200" dirty="0"/>
+          </a:p>
+          <a:p>
+            <a:pPr lvl="1"/>
+            <a:r>
+              <a:rPr lang="pt-BR" sz="2200" dirty="0"/>
+              <a:t>Tentar alterar uma constante leva a um erro pelo compilador</a:t>
+            </a:r>
+          </a:p>
+          <a:p>
+            <a:pPr lvl="1"/>
+            <a:endParaRPr lang="pt-BR" sz="2200" dirty="0"/>
+          </a:p>
+          <a:p>
+            <a:pPr lvl="1"/>
+            <a:r>
+              <a:rPr lang="pt-BR" sz="2200" dirty="0"/>
+              <a:t>É uma boa prática escrever o nome das constantes com letras maiúsculas para diferenciá-las das variáveis</a:t>
+            </a:r>
+          </a:p>
+          <a:p>
+            <a:pPr lvl="1"/>
+            <a:endParaRPr lang="pt-BR" sz="2200" dirty="0"/>
+          </a:p>
+          <a:p>
+            <a:pPr lvl="1"/>
+            <a:r>
+              <a:rPr lang="pt-BR" sz="2200" dirty="0"/>
+              <a:t>Podem ser criadas pela diretiva </a:t>
+            </a:r>
+            <a:r>
+              <a:rPr lang="pt-BR" sz="2200" i="1" dirty="0"/>
+              <a:t>#define </a:t>
+            </a:r>
+            <a:r>
+              <a:rPr lang="pt-BR" sz="2200" dirty="0"/>
+              <a:t>ou</a:t>
+            </a:r>
+            <a:r>
+              <a:rPr lang="pt-BR" sz="2200" i="1" dirty="0"/>
+              <a:t> </a:t>
+            </a:r>
+            <a:r>
+              <a:rPr lang="pt-BR" sz="2200" dirty="0"/>
+              <a:t>pela palavra chave </a:t>
+            </a:r>
+            <a:r>
+              <a:rPr lang="pt-BR" sz="2200" i="1" u="sng" dirty="0" err="1"/>
+              <a:t>const</a:t>
+            </a:r>
+            <a:r>
+              <a:rPr lang="pt-BR" sz="2200" dirty="0"/>
+              <a:t>  antes da definição do tipo</a:t>
+            </a:r>
+          </a:p>
+        </p:txBody>
+      </p:sp>
+      <p:pic>
+        <p:nvPicPr>
+          <p:cNvPr id="7" name="Imagem 6">
+            <a:extLst>
+              <a:ext uri="{FF2B5EF4-FFF2-40B4-BE49-F238E27FC236}">
+                <a16:creationId xmlns:a16="http://schemas.microsoft.com/office/drawing/2014/main" id="{FAB64FB5-AF6B-C1A5-1A3A-08A759AAE71C}"/>
+              </a:ext>
+            </a:extLst>
+          </p:cNvPr>
+          <p:cNvPicPr>
+            <a:picLocks noChangeAspect="1"/>
+          </p:cNvPicPr>
+          <p:nvPr/>
+        </p:nvPicPr>
+        <p:blipFill>
+          <a:blip r:embed="rId3"/>
+          <a:stretch>
+            <a:fillRect/>
+          </a:stretch>
+        </p:blipFill>
+        <p:spPr>
+          <a:xfrm>
+            <a:off x="8173452" y="2490537"/>
+            <a:ext cx="3441031" cy="3441031"/>
+          </a:xfrm>
+          <a:prstGeom prst="rect">
+            <a:avLst/>
+          </a:prstGeom>
+        </p:spPr>
+      </p:pic>
+    </p:spTree>
+    <p:extLst>
+      <p:ext uri="{BB962C8B-B14F-4D97-AF65-F5344CB8AC3E}">
+        <p14:creationId xmlns:p14="http://schemas.microsoft.com/office/powerpoint/2010/main" val="2642518417"/>
+      </p:ext>
+    </p:extLst>
+  </p:cSld>
+  <p:clrMapOvr>
+    <a:masterClrMapping/>
+  </p:clrMapOvr>
+</p:sld>
+</file>
+
+<file path=ppt/slides/slide32.xml><?xml version="1.0" encoding="utf-8"?>
+<p:sld xmlns:a="http://schemas.openxmlformats.org/drawingml/2006/main" xmlns:r="http://schemas.openxmlformats.org/officeDocument/2006/relationships" xmlns:p="http://schemas.openxmlformats.org/presentationml/2006/main">
+  <p:cSld>
+    <p:spTree>
+      <p:nvGrpSpPr>
+        <p:cNvPr id="1" name="">
+          <a:extLst>
+            <a:ext uri="{FF2B5EF4-FFF2-40B4-BE49-F238E27FC236}">
+              <a16:creationId xmlns:a16="http://schemas.microsoft.com/office/drawing/2014/main" id="{FB4AAF02-56FE-5315-3653-51A857C79EE1}"/>
+            </a:ext>
+          </a:extLst>
+        </p:cNvPr>
+        <p:cNvGrpSpPr/>
+        <p:nvPr/>
+      </p:nvGrpSpPr>
+      <p:grpSpPr>
+        <a:xfrm>
+          <a:off x="0" y="0"/>
+          <a:ext cx="0" cy="0"/>
+          <a:chOff x="0" y="0"/>
+          <a:chExt cx="0" cy="0"/>
+        </a:xfrm>
+      </p:grpSpPr>
+      <p:sp>
+        <p:nvSpPr>
+          <p:cNvPr id="5" name="Retângulo 4">
+            <a:extLst>
+              <a:ext uri="{FF2B5EF4-FFF2-40B4-BE49-F238E27FC236}">
+                <a16:creationId xmlns:a16="http://schemas.microsoft.com/office/drawing/2014/main" id="{574B052A-A3F6-B26A-8FF9-BC5082879840}"/>
+              </a:ext>
+            </a:extLst>
+          </p:cNvPr>
+          <p:cNvSpPr/>
+          <p:nvPr/>
+        </p:nvSpPr>
+        <p:spPr>
+          <a:xfrm>
+            <a:off x="0" y="-2"/>
+            <a:ext cx="12192000" cy="1325563"/>
+          </a:xfrm>
+          <a:prstGeom prst="rect">
+            <a:avLst/>
+          </a:prstGeom>
+          <a:solidFill>
+            <a:srgbClr val="418AB3"/>
+          </a:solidFill>
+          <a:ln>
+            <a:solidFill>
+              <a:srgbClr val="418AB3"/>
+            </a:solidFill>
+          </a:ln>
+        </p:spPr>
+        <p:style>
+          <a:lnRef idx="2">
+            <a:schemeClr val="accent1">
+              <a:shade val="15000"/>
+            </a:schemeClr>
+          </a:lnRef>
+          <a:fillRef idx="1">
+            <a:schemeClr val="accent1"/>
+          </a:fillRef>
+          <a:effectRef idx="0">
+            <a:schemeClr val="accent1"/>
+          </a:effectRef>
+          <a:fontRef idx="minor">
+            <a:schemeClr val="lt1"/>
+          </a:fontRef>
+        </p:style>
+        <p:txBody>
+          <a:bodyPr rtlCol="0" anchor="ctr"/>
+          <a:lstStyle/>
+          <a:p>
+            <a:pPr algn="ctr"/>
+            <a:endParaRPr lang="pt-BR" dirty="0"/>
+          </a:p>
+        </p:txBody>
+      </p:sp>
+      <p:sp>
+        <p:nvSpPr>
+          <p:cNvPr id="2" name="Título 1">
+            <a:extLst>
+              <a:ext uri="{FF2B5EF4-FFF2-40B4-BE49-F238E27FC236}">
+                <a16:creationId xmlns:a16="http://schemas.microsoft.com/office/drawing/2014/main" id="{CA29414F-13C8-01BB-E045-EE12BC6055FC}"/>
+              </a:ext>
+            </a:extLst>
+          </p:cNvPr>
+          <p:cNvSpPr>
+            <a:spLocks noGrp="1"/>
+          </p:cNvSpPr>
+          <p:nvPr>
+            <p:ph type="title"/>
+          </p:nvPr>
+        </p:nvSpPr>
+        <p:spPr>
+          <a:xfrm>
+            <a:off x="0" y="-1"/>
+            <a:ext cx="12192000" cy="1325563"/>
+          </a:xfrm>
+        </p:spPr>
+        <p:txBody>
+          <a:bodyPr/>
+          <a:lstStyle/>
+          <a:p>
+            <a:pPr algn="ctr"/>
+            <a:r>
+              <a:rPr lang="pt-BR" dirty="0">
+                <a:solidFill>
+                  <a:schemeClr val="bg1"/>
+                </a:solidFill>
+              </a:rPr>
+              <a:t>Tipos Primitivos</a:t>
+            </a:r>
+          </a:p>
+        </p:txBody>
+      </p:sp>
+      <p:sp>
+        <p:nvSpPr>
+          <p:cNvPr id="12" name="AutoShape 6" descr="Lógica Proposicional x Lógica de Argumento ⋆ Colaborae">
+            <a:extLst>
+              <a:ext uri="{FF2B5EF4-FFF2-40B4-BE49-F238E27FC236}">
+                <a16:creationId xmlns:a16="http://schemas.microsoft.com/office/drawing/2014/main" id="{CC0923BD-52A5-AEC7-A367-A2EDB7DACF15}"/>
+              </a:ext>
+            </a:extLst>
+          </p:cNvPr>
+          <p:cNvSpPr>
+            <a:spLocks noChangeAspect="1" noChangeArrowheads="1"/>
+          </p:cNvSpPr>
+          <p:nvPr/>
+        </p:nvSpPr>
+        <p:spPr bwMode="auto">
+          <a:xfrm>
+            <a:off x="5943600" y="-1707776"/>
+            <a:ext cx="5289176" cy="5289176"/>
+          </a:xfrm>
+          <a:prstGeom prst="rect">
+            <a:avLst/>
+          </a:prstGeom>
+          <a:noFill/>
+          <a:extLst>
+            <a:ext uri="{909E8E84-426E-40DD-AFC4-6F175D3DCCD1}">
+              <a14:hiddenFill xmlns:a14="http://schemas.microsoft.com/office/drawing/2010/main">
+                <a:solidFill>
+                  <a:srgbClr val="FFFFFF"/>
+                </a:solidFill>
+              </a14:hiddenFill>
+            </a:ext>
+          </a:extLst>
+        </p:spPr>
+        <p:txBody>
+          <a:bodyPr vert="horz" wrap="square" lIns="91440" tIns="45720" rIns="91440" bIns="45720" numCol="1" anchor="t" anchorCtr="0" compatLnSpc="1">
+            <a:prstTxWarp prst="textNoShape">
+              <a:avLst/>
+            </a:prstTxWarp>
+          </a:bodyPr>
+          <a:lstStyle/>
+          <a:p>
+            <a:endParaRPr lang="pt-BR"/>
+          </a:p>
+        </p:txBody>
+      </p:sp>
+      <p:sp>
+        <p:nvSpPr>
+          <p:cNvPr id="6" name="Espaço Reservado para Conteúdo 5">
+            <a:extLst>
+              <a:ext uri="{FF2B5EF4-FFF2-40B4-BE49-F238E27FC236}">
+                <a16:creationId xmlns:a16="http://schemas.microsoft.com/office/drawing/2014/main" id="{AE57D41A-0914-7021-BB8D-413FF15181E2}"/>
+              </a:ext>
+            </a:extLst>
+          </p:cNvPr>
+          <p:cNvSpPr>
+            <a:spLocks noGrp="1"/>
+          </p:cNvSpPr>
+          <p:nvPr>
+            <p:ph idx="1"/>
+          </p:nvPr>
+        </p:nvSpPr>
+        <p:spPr>
+          <a:xfrm>
+            <a:off x="438418" y="1626351"/>
+            <a:ext cx="11315163" cy="5231649"/>
+          </a:xfrm>
+        </p:spPr>
+        <p:txBody>
+          <a:bodyPr>
+            <a:normAutofit/>
+          </a:bodyPr>
+          <a:lstStyle/>
+          <a:p>
+            <a:r>
+              <a:rPr lang="pt-BR" sz="2600" dirty="0"/>
+              <a:t>São as formas mais básicas de informação que a linguagem de programação consegue entender. Em C temos:</a:t>
+            </a:r>
+          </a:p>
+          <a:p>
+            <a:endParaRPr lang="pt-BR" sz="2400" dirty="0"/>
+          </a:p>
+          <a:p>
+            <a:pPr lvl="1"/>
+            <a:r>
+              <a:rPr lang="pt-BR" sz="2200" b="1" i="1" u="sng" dirty="0" err="1"/>
+              <a:t>int</a:t>
+            </a:r>
+            <a:r>
+              <a:rPr lang="pt-BR" sz="2200" dirty="0"/>
+              <a:t>: Armazena números inteiros (positivos e negativos)</a:t>
+            </a:r>
+          </a:p>
+          <a:p>
+            <a:pPr marL="457200" lvl="1" indent="0">
+              <a:buNone/>
+            </a:pPr>
+            <a:endParaRPr lang="pt-BR" sz="2200" dirty="0"/>
+          </a:p>
+          <a:p>
+            <a:pPr lvl="1"/>
+            <a:r>
+              <a:rPr lang="pt-BR" sz="2200" b="1" i="1" u="sng" dirty="0" err="1"/>
+              <a:t>float</a:t>
+            </a:r>
+            <a:r>
+              <a:rPr lang="pt-BR" sz="2200" dirty="0"/>
+              <a:t>: Armazena números reais com casas decimais de precisão simples</a:t>
+            </a:r>
+          </a:p>
+          <a:p>
+            <a:pPr marL="457200" lvl="1" indent="0">
+              <a:buNone/>
+            </a:pPr>
+            <a:endParaRPr lang="pt-BR" sz="2200" dirty="0"/>
+          </a:p>
+          <a:p>
+            <a:pPr lvl="1"/>
+            <a:r>
+              <a:rPr lang="pt-BR" sz="2200" b="1" i="1" u="sng" dirty="0" err="1"/>
+              <a:t>double</a:t>
+            </a:r>
+            <a:r>
+              <a:rPr lang="pt-BR" sz="2200" dirty="0"/>
+              <a:t>: Armazena números reais com maior precisão e capacidade que o </a:t>
+            </a:r>
+            <a:r>
+              <a:rPr lang="pt-BR" sz="2200" b="1" i="1" dirty="0" err="1"/>
+              <a:t>float</a:t>
+            </a:r>
+            <a:endParaRPr lang="pt-BR" sz="2200" b="1" i="1" dirty="0"/>
+          </a:p>
+          <a:p>
+            <a:pPr lvl="1"/>
+            <a:endParaRPr lang="pt-BR" sz="2200" dirty="0"/>
+          </a:p>
+          <a:p>
+            <a:pPr lvl="1"/>
+            <a:r>
+              <a:rPr lang="pt-BR" sz="2200" b="1" i="1" u="sng" dirty="0"/>
+              <a:t>char</a:t>
+            </a:r>
+            <a:r>
+              <a:rPr lang="pt-BR" sz="2200" dirty="0"/>
+              <a:t>: Armazena um único caractere, como 'a' ou 'Z', representado internamente por um valor numérico inteiro (de acordo com a tabela ASCII), mas não é restrito à caracteres.</a:t>
+            </a:r>
+          </a:p>
+          <a:p>
+            <a:pPr lvl="1"/>
+            <a:endParaRPr lang="pt-BR" sz="2200" dirty="0"/>
+          </a:p>
+          <a:p>
+            <a:pPr lvl="1"/>
+            <a:r>
+              <a:rPr lang="pt-BR" sz="2200" b="1" i="1" u="sng" dirty="0"/>
+              <a:t>void</a:t>
+            </a:r>
+            <a:r>
+              <a:rPr lang="pt-BR" sz="2200" dirty="0"/>
+              <a:t>: Indica vazio ou ausência de tipo, muito usado em funções que não retornam valor.</a:t>
+            </a:r>
+          </a:p>
+        </p:txBody>
+      </p:sp>
+    </p:spTree>
+    <p:extLst>
+      <p:ext uri="{BB962C8B-B14F-4D97-AF65-F5344CB8AC3E}">
+        <p14:creationId xmlns:p14="http://schemas.microsoft.com/office/powerpoint/2010/main" val="755640539"/>
+      </p:ext>
+    </p:extLst>
+  </p:cSld>
+  <p:clrMapOvr>
+    <a:masterClrMapping/>
+  </p:clrMapOvr>
+</p:sld>
+</file>
+
+<file path=ppt/slides/slide33.xml><?xml version="1.0" encoding="utf-8"?>
+<p:sld xmlns:a="http://schemas.openxmlformats.org/drawingml/2006/main" xmlns:r="http://schemas.openxmlformats.org/officeDocument/2006/relationships" xmlns:p="http://schemas.openxmlformats.org/presentationml/2006/main">
+  <p:cSld>
+    <p:spTree>
+      <p:nvGrpSpPr>
+        <p:cNvPr id="1" name="">
+          <a:extLst>
+            <a:ext uri="{FF2B5EF4-FFF2-40B4-BE49-F238E27FC236}">
+              <a16:creationId xmlns:a16="http://schemas.microsoft.com/office/drawing/2014/main" id="{9A2AD397-2F65-DE74-9419-D57C75CCBE99}"/>
+            </a:ext>
+          </a:extLst>
+        </p:cNvPr>
+        <p:cNvGrpSpPr/>
+        <p:nvPr/>
+      </p:nvGrpSpPr>
+      <p:grpSpPr>
+        <a:xfrm>
+          <a:off x="0" y="0"/>
+          <a:ext cx="0" cy="0"/>
+          <a:chOff x="0" y="0"/>
+          <a:chExt cx="0" cy="0"/>
+        </a:xfrm>
+      </p:grpSpPr>
+      <p:sp>
+        <p:nvSpPr>
+          <p:cNvPr id="5" name="Retângulo 4">
+            <a:extLst>
+              <a:ext uri="{FF2B5EF4-FFF2-40B4-BE49-F238E27FC236}">
+                <a16:creationId xmlns:a16="http://schemas.microsoft.com/office/drawing/2014/main" id="{392359FF-8E24-92A3-8D7F-90485676ABF2}"/>
+              </a:ext>
+            </a:extLst>
+          </p:cNvPr>
+          <p:cNvSpPr/>
+          <p:nvPr/>
+        </p:nvSpPr>
+        <p:spPr>
+          <a:xfrm>
+            <a:off x="0" y="-2"/>
+            <a:ext cx="12192000" cy="1325563"/>
+          </a:xfrm>
+          <a:prstGeom prst="rect">
+            <a:avLst/>
+          </a:prstGeom>
+          <a:solidFill>
+            <a:srgbClr val="418AB3"/>
+          </a:solidFill>
+          <a:ln>
+            <a:solidFill>
+              <a:srgbClr val="418AB3"/>
+            </a:solidFill>
+          </a:ln>
+        </p:spPr>
+        <p:style>
+          <a:lnRef idx="2">
+            <a:schemeClr val="accent1">
+              <a:shade val="15000"/>
+            </a:schemeClr>
+          </a:lnRef>
+          <a:fillRef idx="1">
+            <a:schemeClr val="accent1"/>
+          </a:fillRef>
+          <a:effectRef idx="0">
+            <a:schemeClr val="accent1"/>
+          </a:effectRef>
+          <a:fontRef idx="minor">
+            <a:schemeClr val="lt1"/>
+          </a:fontRef>
+        </p:style>
+        <p:txBody>
+          <a:bodyPr rtlCol="0" anchor="ctr"/>
+          <a:lstStyle/>
+          <a:p>
+            <a:pPr algn="ctr"/>
+            <a:endParaRPr lang="pt-BR" dirty="0"/>
+          </a:p>
+        </p:txBody>
+      </p:sp>
+      <p:sp>
+        <p:nvSpPr>
+          <p:cNvPr id="2" name="Título 1">
+            <a:extLst>
+              <a:ext uri="{FF2B5EF4-FFF2-40B4-BE49-F238E27FC236}">
+                <a16:creationId xmlns:a16="http://schemas.microsoft.com/office/drawing/2014/main" id="{BA483743-DFC8-B5F7-1988-608CE8CFC7A6}"/>
+              </a:ext>
+            </a:extLst>
+          </p:cNvPr>
+          <p:cNvSpPr>
+            <a:spLocks noGrp="1"/>
+          </p:cNvSpPr>
+          <p:nvPr>
+            <p:ph type="title"/>
+          </p:nvPr>
+        </p:nvSpPr>
+        <p:spPr>
+          <a:xfrm>
+            <a:off x="0" y="-1"/>
+            <a:ext cx="12192000" cy="1325563"/>
+          </a:xfrm>
+        </p:spPr>
+        <p:txBody>
+          <a:bodyPr/>
+          <a:lstStyle/>
+          <a:p>
+            <a:pPr algn="ctr"/>
+            <a:r>
+              <a:rPr lang="pt-BR" dirty="0">
+                <a:solidFill>
+                  <a:schemeClr val="bg1"/>
+                </a:solidFill>
+              </a:rPr>
+              <a:t>Modificadores de tipos</a:t>
+            </a:r>
+          </a:p>
+        </p:txBody>
+      </p:sp>
+      <p:sp>
+        <p:nvSpPr>
+          <p:cNvPr id="12" name="AutoShape 6" descr="Lógica Proposicional x Lógica de Argumento ⋆ Colaborae">
+            <a:extLst>
+              <a:ext uri="{FF2B5EF4-FFF2-40B4-BE49-F238E27FC236}">
+                <a16:creationId xmlns:a16="http://schemas.microsoft.com/office/drawing/2014/main" id="{FB1F31EF-2CDE-350B-EACD-98A9EFA4EF2A}"/>
+              </a:ext>
+            </a:extLst>
+          </p:cNvPr>
+          <p:cNvSpPr>
+            <a:spLocks noChangeAspect="1" noChangeArrowheads="1"/>
+          </p:cNvSpPr>
+          <p:nvPr/>
+        </p:nvSpPr>
+        <p:spPr bwMode="auto">
+          <a:xfrm>
+            <a:off x="5943600" y="-1707776"/>
+            <a:ext cx="5289176" cy="5289176"/>
+          </a:xfrm>
+          <a:prstGeom prst="rect">
+            <a:avLst/>
+          </a:prstGeom>
+          <a:noFill/>
+          <a:extLst>
+            <a:ext uri="{909E8E84-426E-40DD-AFC4-6F175D3DCCD1}">
+              <a14:hiddenFill xmlns:a14="http://schemas.microsoft.com/office/drawing/2010/main">
+                <a:solidFill>
+                  <a:srgbClr val="FFFFFF"/>
+                </a:solidFill>
+              </a14:hiddenFill>
+            </a:ext>
+          </a:extLst>
+        </p:spPr>
+        <p:txBody>
+          <a:bodyPr vert="horz" wrap="square" lIns="91440" tIns="45720" rIns="91440" bIns="45720" numCol="1" anchor="t" anchorCtr="0" compatLnSpc="1">
+            <a:prstTxWarp prst="textNoShape">
+              <a:avLst/>
+            </a:prstTxWarp>
+          </a:bodyPr>
+          <a:lstStyle/>
+          <a:p>
+            <a:endParaRPr lang="pt-BR"/>
+          </a:p>
+        </p:txBody>
+      </p:sp>
+      <p:sp>
+        <p:nvSpPr>
+          <p:cNvPr id="6" name="Espaço Reservado para Conteúdo 5">
+            <a:extLst>
+              <a:ext uri="{FF2B5EF4-FFF2-40B4-BE49-F238E27FC236}">
+                <a16:creationId xmlns:a16="http://schemas.microsoft.com/office/drawing/2014/main" id="{FC1B619E-85F9-6CF1-AFB1-546F401CD0B9}"/>
+              </a:ext>
+            </a:extLst>
+          </p:cNvPr>
+          <p:cNvSpPr>
+            <a:spLocks noGrp="1"/>
+          </p:cNvSpPr>
+          <p:nvPr>
+            <p:ph idx="1"/>
+          </p:nvPr>
+        </p:nvSpPr>
+        <p:spPr>
+          <a:xfrm>
+            <a:off x="438418" y="1626351"/>
+            <a:ext cx="9764361" cy="5231649"/>
+          </a:xfrm>
+        </p:spPr>
+        <p:txBody>
+          <a:bodyPr>
+            <a:normAutofit/>
+          </a:bodyPr>
+          <a:lstStyle/>
+          <a:p>
+            <a:r>
+              <a:rPr lang="pt-BR" sz="2600" dirty="0"/>
+              <a:t>Permite alterações </a:t>
+            </a:r>
+            <a:r>
+              <a:rPr lang="pt-BR" sz="2400" dirty="0"/>
+              <a:t>no tamanho ou na capacidade de armazenamento dos tipos inteiros e de ponto flutuante:</a:t>
+            </a:r>
+            <a:endParaRPr lang="pt-BR" sz="2600" dirty="0"/>
+          </a:p>
+          <a:p>
+            <a:endParaRPr lang="pt-BR" sz="2400" dirty="0"/>
+          </a:p>
+          <a:p>
+            <a:pPr lvl="1"/>
+            <a:r>
+              <a:rPr lang="pt-BR" sz="2200" b="1" i="1" u="sng" dirty="0" err="1"/>
+              <a:t>signed</a:t>
+            </a:r>
+            <a:r>
+              <a:rPr lang="pt-BR" sz="2200" dirty="0"/>
+              <a:t>: Permite valores positivos e negativos (padrão para </a:t>
+            </a:r>
+            <a:r>
+              <a:rPr lang="pt-BR" sz="2200" dirty="0" err="1"/>
+              <a:t>int</a:t>
+            </a:r>
+            <a:r>
+              <a:rPr lang="pt-BR" sz="2200" dirty="0"/>
+              <a:t>).</a:t>
+            </a:r>
+          </a:p>
+          <a:p>
+            <a:pPr lvl="1"/>
+            <a:endParaRPr lang="pt-BR" sz="2200" dirty="0"/>
+          </a:p>
+          <a:p>
+            <a:pPr lvl="1"/>
+            <a:r>
+              <a:rPr lang="pt-BR" sz="2200" b="1" i="1" u="sng" dirty="0" err="1"/>
+              <a:t>unsigned</a:t>
+            </a:r>
+            <a:r>
+              <a:rPr lang="pt-BR" sz="2200" dirty="0"/>
+              <a:t>: Apenas valores positivos, dobrando o limite máximo positivo da faixa de armazenamento</a:t>
+            </a:r>
+          </a:p>
+          <a:p>
+            <a:pPr lvl="1"/>
+            <a:endParaRPr lang="pt-BR" sz="2200" b="1" i="1" u="sng" dirty="0"/>
+          </a:p>
+          <a:p>
+            <a:pPr lvl="1"/>
+            <a:r>
+              <a:rPr lang="pt-BR" sz="2200" b="1" i="1" u="sng" dirty="0"/>
+              <a:t>short</a:t>
+            </a:r>
+            <a:r>
+              <a:rPr lang="pt-BR" sz="2200" dirty="0"/>
+              <a:t>: Reduz o espaço de armazenamento para números inteiros menores</a:t>
+            </a:r>
+          </a:p>
+          <a:p>
+            <a:pPr lvl="1"/>
+            <a:endParaRPr lang="pt-BR" sz="2200" b="1" i="1" u="sng" dirty="0"/>
+          </a:p>
+          <a:p>
+            <a:pPr lvl="1"/>
+            <a:r>
+              <a:rPr lang="pt-BR" sz="2200" b="1" i="1" u="sng" dirty="0" err="1"/>
+              <a:t>long</a:t>
+            </a:r>
+            <a:r>
+              <a:rPr lang="pt-BR" sz="2200" dirty="0"/>
+              <a:t>: Aumenta o espaço de armazenamento para números inteiros ou reais maiores (</a:t>
+            </a:r>
+            <a:r>
+              <a:rPr lang="pt-BR" sz="2200" dirty="0" err="1"/>
+              <a:t>long</a:t>
+            </a:r>
+            <a:r>
+              <a:rPr lang="pt-BR" sz="2200" dirty="0"/>
+              <a:t> </a:t>
+            </a:r>
+            <a:r>
+              <a:rPr lang="pt-BR" sz="2200" dirty="0" err="1"/>
+              <a:t>double</a:t>
+            </a:r>
+            <a:r>
+              <a:rPr lang="pt-BR" sz="2200" dirty="0"/>
+              <a:t>)</a:t>
+            </a:r>
+          </a:p>
+        </p:txBody>
+      </p:sp>
+    </p:spTree>
+    <p:extLst>
+      <p:ext uri="{BB962C8B-B14F-4D97-AF65-F5344CB8AC3E}">
+        <p14:creationId xmlns:p14="http://schemas.microsoft.com/office/powerpoint/2010/main" val="4100828766"/>
+      </p:ext>
+    </p:extLst>
+  </p:cSld>
+  <p:clrMapOvr>
+    <a:masterClrMapping/>
+  </p:clrMapOvr>
+</p:sld>
+</file>
+
+<file path=ppt/slides/slide34.xml><?xml version="1.0" encoding="utf-8"?>
+<p:sld xmlns:a="http://schemas.openxmlformats.org/drawingml/2006/main" xmlns:r="http://schemas.openxmlformats.org/officeDocument/2006/relationships" xmlns:p="http://schemas.openxmlformats.org/presentationml/2006/main">
+  <p:cSld>
+    <p:spTree>
+      <p:nvGrpSpPr>
+        <p:cNvPr id="1" name="">
+          <a:extLst>
+            <a:ext uri="{FF2B5EF4-FFF2-40B4-BE49-F238E27FC236}">
+              <a16:creationId xmlns:a16="http://schemas.microsoft.com/office/drawing/2014/main" id="{DCCA690B-E8BF-5851-00C0-854E731E36EB}"/>
+            </a:ext>
+          </a:extLst>
+        </p:cNvPr>
+        <p:cNvGrpSpPr/>
+        <p:nvPr/>
+      </p:nvGrpSpPr>
+      <p:grpSpPr>
+        <a:xfrm>
+          <a:off x="0" y="0"/>
+          <a:ext cx="0" cy="0"/>
+          <a:chOff x="0" y="0"/>
+          <a:chExt cx="0" cy="0"/>
+        </a:xfrm>
+      </p:grpSpPr>
+      <p:sp>
+        <p:nvSpPr>
+          <p:cNvPr id="5" name="Retângulo 4">
+            <a:extLst>
+              <a:ext uri="{FF2B5EF4-FFF2-40B4-BE49-F238E27FC236}">
+                <a16:creationId xmlns:a16="http://schemas.microsoft.com/office/drawing/2014/main" id="{9F6B7979-ECDF-D961-EBC5-9C2A63EF3715}"/>
+              </a:ext>
+            </a:extLst>
+          </p:cNvPr>
+          <p:cNvSpPr/>
+          <p:nvPr/>
+        </p:nvSpPr>
+        <p:spPr>
+          <a:xfrm>
+            <a:off x="0" y="-2"/>
+            <a:ext cx="12192000" cy="1325563"/>
+          </a:xfrm>
+          <a:prstGeom prst="rect">
+            <a:avLst/>
+          </a:prstGeom>
+          <a:solidFill>
+            <a:srgbClr val="418AB3"/>
+          </a:solidFill>
+          <a:ln>
+            <a:solidFill>
+              <a:srgbClr val="418AB3"/>
+            </a:solidFill>
+          </a:ln>
+        </p:spPr>
+        <p:style>
+          <a:lnRef idx="2">
+            <a:schemeClr val="accent1">
+              <a:shade val="15000"/>
+            </a:schemeClr>
+          </a:lnRef>
+          <a:fillRef idx="1">
+            <a:schemeClr val="accent1"/>
+          </a:fillRef>
+          <a:effectRef idx="0">
+            <a:schemeClr val="accent1"/>
+          </a:effectRef>
+          <a:fontRef idx="minor">
+            <a:schemeClr val="lt1"/>
+          </a:fontRef>
+        </p:style>
+        <p:txBody>
+          <a:bodyPr rtlCol="0" anchor="ctr"/>
+          <a:lstStyle/>
+          <a:p>
+            <a:pPr algn="ctr"/>
+            <a:endParaRPr lang="pt-BR" dirty="0"/>
+          </a:p>
+        </p:txBody>
+      </p:sp>
+      <p:sp>
+        <p:nvSpPr>
+          <p:cNvPr id="2" name="Título 1">
+            <a:extLst>
+              <a:ext uri="{FF2B5EF4-FFF2-40B4-BE49-F238E27FC236}">
+                <a16:creationId xmlns:a16="http://schemas.microsoft.com/office/drawing/2014/main" id="{29435752-6267-61E4-4139-D813C4633ACC}"/>
+              </a:ext>
+            </a:extLst>
+          </p:cNvPr>
+          <p:cNvSpPr>
+            <a:spLocks noGrp="1"/>
+          </p:cNvSpPr>
+          <p:nvPr>
+            <p:ph type="title"/>
+          </p:nvPr>
+        </p:nvSpPr>
+        <p:spPr>
+          <a:xfrm>
+            <a:off x="0" y="-1"/>
+            <a:ext cx="12192000" cy="1325563"/>
+          </a:xfrm>
+        </p:spPr>
+        <p:txBody>
+          <a:bodyPr/>
+          <a:lstStyle/>
+          <a:p>
+            <a:pPr algn="ctr"/>
+            <a:r>
+              <a:rPr lang="pt-BR" dirty="0">
+                <a:solidFill>
+                  <a:schemeClr val="bg1"/>
+                </a:solidFill>
+              </a:rPr>
+              <a:t>Faixa de valores para os tipos de dados</a:t>
+            </a:r>
+          </a:p>
+        </p:txBody>
+      </p:sp>
+      <p:sp>
+        <p:nvSpPr>
+          <p:cNvPr id="12" name="AutoShape 6" descr="Lógica Proposicional x Lógica de Argumento ⋆ Colaborae">
+            <a:extLst>
+              <a:ext uri="{FF2B5EF4-FFF2-40B4-BE49-F238E27FC236}">
+                <a16:creationId xmlns:a16="http://schemas.microsoft.com/office/drawing/2014/main" id="{42F2AB88-1306-9195-2B9F-2707AEE066FF}"/>
+              </a:ext>
+            </a:extLst>
+          </p:cNvPr>
+          <p:cNvSpPr>
+            <a:spLocks noChangeAspect="1" noChangeArrowheads="1"/>
+          </p:cNvSpPr>
+          <p:nvPr/>
+        </p:nvSpPr>
+        <p:spPr bwMode="auto">
+          <a:xfrm>
+            <a:off x="5943600" y="-1707776"/>
+            <a:ext cx="5289176" cy="5289176"/>
+          </a:xfrm>
+          <a:prstGeom prst="rect">
+            <a:avLst/>
+          </a:prstGeom>
+          <a:noFill/>
+          <a:extLst>
+            <a:ext uri="{909E8E84-426E-40DD-AFC4-6F175D3DCCD1}">
+              <a14:hiddenFill xmlns:a14="http://schemas.microsoft.com/office/drawing/2010/main">
+                <a:solidFill>
+                  <a:srgbClr val="FFFFFF"/>
+                </a:solidFill>
+              </a14:hiddenFill>
+            </a:ext>
+          </a:extLst>
+        </p:spPr>
+        <p:txBody>
+          <a:bodyPr vert="horz" wrap="square" lIns="91440" tIns="45720" rIns="91440" bIns="45720" numCol="1" anchor="t" anchorCtr="0" compatLnSpc="1">
+            <a:prstTxWarp prst="textNoShape">
+              <a:avLst/>
+            </a:prstTxWarp>
+          </a:bodyPr>
+          <a:lstStyle/>
+          <a:p>
+            <a:endParaRPr lang="pt-BR"/>
+          </a:p>
+        </p:txBody>
+      </p:sp>
+      <p:pic>
+        <p:nvPicPr>
+          <p:cNvPr id="3074" name="Picture 2" descr="Tipo de Dados de C :: Linguagens C e C++">
+            <a:extLst>
+              <a:ext uri="{FF2B5EF4-FFF2-40B4-BE49-F238E27FC236}">
+                <a16:creationId xmlns:a16="http://schemas.microsoft.com/office/drawing/2014/main" id="{435FCCD6-3657-B92C-FF6E-F5CC7BBAE9CF}"/>
+              </a:ext>
+            </a:extLst>
+          </p:cNvPr>
+          <p:cNvPicPr>
+            <a:picLocks noGrp="1" noChangeAspect="1" noChangeArrowheads="1"/>
+          </p:cNvPicPr>
+          <p:nvPr>
+            <p:ph idx="1"/>
+          </p:nvPr>
+        </p:nvPicPr>
+        <p:blipFill>
+          <a:blip r:embed="rId3">
+            <a:extLst>
+              <a:ext uri="{28A0092B-C50C-407E-A947-70E740481C1C}">
+                <a14:useLocalDpi xmlns:a14="http://schemas.microsoft.com/office/drawing/2010/main" val="0"/>
+              </a:ext>
+            </a:extLst>
+          </a:blip>
+          <a:srcRect/>
+          <a:stretch>
+            <a:fillRect/>
+          </a:stretch>
+        </p:blipFill>
+        <p:spPr bwMode="auto">
+          <a:xfrm>
+            <a:off x="2614829" y="1410039"/>
+            <a:ext cx="6657541" cy="5351242"/>
+          </a:xfrm>
+          <a:prstGeom prst="rect">
+            <a:avLst/>
+          </a:prstGeom>
+          <a:noFill/>
+          <a:extLst>
+            <a:ext uri="{909E8E84-426E-40DD-AFC4-6F175D3DCCD1}">
+              <a14:hiddenFill xmlns:a14="http://schemas.microsoft.com/office/drawing/2010/main">
+                <a:solidFill>
+                  <a:srgbClr val="FFFFFF"/>
+                </a:solidFill>
+              </a14:hiddenFill>
+            </a:ext>
+          </a:extLst>
+        </p:spPr>
+      </p:pic>
+    </p:spTree>
+    <p:extLst>
+      <p:ext uri="{BB962C8B-B14F-4D97-AF65-F5344CB8AC3E}">
+        <p14:creationId xmlns:p14="http://schemas.microsoft.com/office/powerpoint/2010/main" val="2026795101"/>
+      </p:ext>
+    </p:extLst>
+  </p:cSld>
+  <p:clrMapOvr>
+    <a:masterClrMapping/>
+  </p:clrMapOvr>
+</p:sld>
+</file>
+
+<file path=ppt/slides/slide35.xml><?xml version="1.0" encoding="utf-8"?>
+<p:sld xmlns:a="http://schemas.openxmlformats.org/drawingml/2006/main" xmlns:r="http://schemas.openxmlformats.org/officeDocument/2006/relationships" xmlns:p="http://schemas.openxmlformats.org/presentationml/2006/main">
+  <p:cSld>
+    <p:spTree>
+      <p:nvGrpSpPr>
+        <p:cNvPr id="1" name="">
+          <a:extLst>
+            <a:ext uri="{FF2B5EF4-FFF2-40B4-BE49-F238E27FC236}">
+              <a16:creationId xmlns:a16="http://schemas.microsoft.com/office/drawing/2014/main" id="{29EFA6E3-041D-B09A-01FD-D67190F3C62C}"/>
+            </a:ext>
+          </a:extLst>
+        </p:cNvPr>
+        <p:cNvGrpSpPr/>
+        <p:nvPr/>
+      </p:nvGrpSpPr>
+      <p:grpSpPr>
+        <a:xfrm>
+          <a:off x="0" y="0"/>
+          <a:ext cx="0" cy="0"/>
+          <a:chOff x="0" y="0"/>
+          <a:chExt cx="0" cy="0"/>
+        </a:xfrm>
+      </p:grpSpPr>
+      <p:sp>
+        <p:nvSpPr>
+          <p:cNvPr id="5" name="Retângulo 4">
+            <a:extLst>
+              <a:ext uri="{FF2B5EF4-FFF2-40B4-BE49-F238E27FC236}">
+                <a16:creationId xmlns:a16="http://schemas.microsoft.com/office/drawing/2014/main" id="{BAB1AB49-13C9-DA56-AAD1-AE5EC7C6BCF7}"/>
+              </a:ext>
+            </a:extLst>
+          </p:cNvPr>
+          <p:cNvSpPr/>
+          <p:nvPr/>
+        </p:nvSpPr>
+        <p:spPr>
+          <a:xfrm>
+            <a:off x="0" y="-2"/>
+            <a:ext cx="12192000" cy="1325563"/>
+          </a:xfrm>
+          <a:prstGeom prst="rect">
+            <a:avLst/>
+          </a:prstGeom>
+          <a:solidFill>
+            <a:srgbClr val="418AB3"/>
+          </a:solidFill>
+          <a:ln>
+            <a:solidFill>
+              <a:srgbClr val="418AB3"/>
+            </a:solidFill>
+          </a:ln>
+        </p:spPr>
+        <p:style>
+          <a:lnRef idx="2">
+            <a:schemeClr val="accent1">
+              <a:shade val="15000"/>
+            </a:schemeClr>
+          </a:lnRef>
+          <a:fillRef idx="1">
+            <a:schemeClr val="accent1"/>
+          </a:fillRef>
+          <a:effectRef idx="0">
+            <a:schemeClr val="accent1"/>
+          </a:effectRef>
+          <a:fontRef idx="minor">
+            <a:schemeClr val="lt1"/>
+          </a:fontRef>
+        </p:style>
+        <p:txBody>
+          <a:bodyPr rtlCol="0" anchor="ctr"/>
+          <a:lstStyle/>
+          <a:p>
+            <a:pPr algn="ctr"/>
+            <a:endParaRPr lang="pt-BR" dirty="0"/>
+          </a:p>
+        </p:txBody>
+      </p:sp>
+      <p:sp>
+        <p:nvSpPr>
+          <p:cNvPr id="2" name="Título 1">
+            <a:extLst>
+              <a:ext uri="{FF2B5EF4-FFF2-40B4-BE49-F238E27FC236}">
+                <a16:creationId xmlns:a16="http://schemas.microsoft.com/office/drawing/2014/main" id="{89151EAB-5A01-EB06-CDE7-EEEFC3FE0586}"/>
+              </a:ext>
+            </a:extLst>
+          </p:cNvPr>
+          <p:cNvSpPr>
+            <a:spLocks noGrp="1"/>
+          </p:cNvSpPr>
+          <p:nvPr>
+            <p:ph type="title"/>
+          </p:nvPr>
+        </p:nvSpPr>
+        <p:spPr>
+          <a:xfrm>
+            <a:off x="0" y="-1"/>
+            <a:ext cx="12192000" cy="1325563"/>
+          </a:xfrm>
+        </p:spPr>
+        <p:txBody>
+          <a:bodyPr/>
+          <a:lstStyle/>
+          <a:p>
+            <a:pPr algn="ctr"/>
+            <a:r>
+              <a:rPr lang="pt-BR" dirty="0">
+                <a:solidFill>
+                  <a:schemeClr val="bg1"/>
+                </a:solidFill>
+              </a:rPr>
+              <a:t>Observação</a:t>
+            </a:r>
+          </a:p>
+        </p:txBody>
+      </p:sp>
+      <p:sp>
+        <p:nvSpPr>
+          <p:cNvPr id="12" name="AutoShape 6" descr="Lógica Proposicional x Lógica de Argumento ⋆ Colaborae">
+            <a:extLst>
+              <a:ext uri="{FF2B5EF4-FFF2-40B4-BE49-F238E27FC236}">
+                <a16:creationId xmlns:a16="http://schemas.microsoft.com/office/drawing/2014/main" id="{14A9A68E-905C-184C-B292-B176EA5D3414}"/>
+              </a:ext>
+            </a:extLst>
+          </p:cNvPr>
+          <p:cNvSpPr>
+            <a:spLocks noChangeAspect="1" noChangeArrowheads="1"/>
+          </p:cNvSpPr>
+          <p:nvPr/>
+        </p:nvSpPr>
+        <p:spPr bwMode="auto">
+          <a:xfrm>
+            <a:off x="5943600" y="-1707776"/>
+            <a:ext cx="5289176" cy="5289176"/>
+          </a:xfrm>
+          <a:prstGeom prst="rect">
+            <a:avLst/>
+          </a:prstGeom>
+          <a:noFill/>
+          <a:extLst>
+            <a:ext uri="{909E8E84-426E-40DD-AFC4-6F175D3DCCD1}">
+              <a14:hiddenFill xmlns:a14="http://schemas.microsoft.com/office/drawing/2010/main">
+                <a:solidFill>
+                  <a:srgbClr val="FFFFFF"/>
+                </a:solidFill>
+              </a14:hiddenFill>
+            </a:ext>
+          </a:extLst>
+        </p:spPr>
+        <p:txBody>
+          <a:bodyPr vert="horz" wrap="square" lIns="91440" tIns="45720" rIns="91440" bIns="45720" numCol="1" anchor="t" anchorCtr="0" compatLnSpc="1">
+            <a:prstTxWarp prst="textNoShape">
+              <a:avLst/>
+            </a:prstTxWarp>
+          </a:bodyPr>
+          <a:lstStyle/>
+          <a:p>
+            <a:endParaRPr lang="pt-BR"/>
+          </a:p>
+        </p:txBody>
+      </p:sp>
+      <p:sp>
+        <p:nvSpPr>
+          <p:cNvPr id="6" name="Espaço Reservado para Conteúdo 5">
+            <a:extLst>
+              <a:ext uri="{FF2B5EF4-FFF2-40B4-BE49-F238E27FC236}">
+                <a16:creationId xmlns:a16="http://schemas.microsoft.com/office/drawing/2014/main" id="{393C7723-2E79-DDD7-FEE4-809DBC65B271}"/>
+              </a:ext>
+            </a:extLst>
+          </p:cNvPr>
+          <p:cNvSpPr>
+            <a:spLocks noGrp="1"/>
+          </p:cNvSpPr>
+          <p:nvPr>
+            <p:ph idx="1"/>
+          </p:nvPr>
+        </p:nvSpPr>
+        <p:spPr>
+          <a:xfrm>
+            <a:off x="438418" y="1626351"/>
+            <a:ext cx="11315163" cy="5231649"/>
+          </a:xfrm>
+        </p:spPr>
+        <p:txBody>
+          <a:bodyPr>
+            <a:normAutofit/>
+          </a:bodyPr>
+          <a:lstStyle/>
+          <a:p>
+            <a:r>
+              <a:rPr lang="pt-BR" sz="2600" b="1" i="1" dirty="0"/>
+              <a:t>Precisão simples: </a:t>
+            </a:r>
+          </a:p>
+          <a:p>
+            <a:pPr lvl="1"/>
+            <a:endParaRPr lang="pt-BR" sz="2200" dirty="0"/>
+          </a:p>
+          <a:p>
+            <a:pPr lvl="1"/>
+            <a:r>
+              <a:rPr lang="pt-BR" sz="2200" dirty="0"/>
+              <a:t>Ocupa 4 bytes (32 bits). Oferece cerca de 6 a 7 dígitos decimais de precisão</a:t>
+            </a:r>
+          </a:p>
+          <a:p>
+            <a:pPr lvl="1"/>
+            <a:r>
+              <a:rPr lang="pt-BR" sz="2200" dirty="0"/>
+              <a:t>Comumente utilizado para economizar memória em grandes vetores ou matrizes, ou quando a perda de precisão nas casas decimais não afeta o resultado da operação.</a:t>
+            </a:r>
+          </a:p>
+          <a:p>
+            <a:pPr lvl="1"/>
+            <a:endParaRPr lang="pt-BR" sz="2200" dirty="0"/>
+          </a:p>
+          <a:p>
+            <a:r>
+              <a:rPr lang="pt-BR" sz="2600" b="1" i="1" dirty="0"/>
+              <a:t>Precisão dupla:</a:t>
+            </a:r>
+          </a:p>
+          <a:p>
+            <a:endParaRPr lang="pt-BR" sz="2600" dirty="0"/>
+          </a:p>
+          <a:p>
+            <a:pPr lvl="1"/>
+            <a:r>
+              <a:rPr lang="pt-BR" sz="2200" dirty="0"/>
+              <a:t>Ocupa 8 bytes (64 bits). Oferece cerca de 15 a 17 dígitos decimais de precisão</a:t>
+            </a:r>
+          </a:p>
+          <a:p>
+            <a:pPr lvl="1"/>
+            <a:r>
+              <a:rPr lang="pt-BR" sz="2200" dirty="0"/>
+              <a:t>Comumente utilizado  como padrão para cálculos científicos, financeiros ou gerais em C, pois ele evita erros cumulativos de arredondamento</a:t>
+            </a:r>
+          </a:p>
+        </p:txBody>
+      </p:sp>
+    </p:spTree>
+    <p:extLst>
+      <p:ext uri="{BB962C8B-B14F-4D97-AF65-F5344CB8AC3E}">
+        <p14:creationId xmlns:p14="http://schemas.microsoft.com/office/powerpoint/2010/main" val="239477512"/>
+      </p:ext>
+    </p:extLst>
+  </p:cSld>
+  <p:clrMapOvr>
+    <a:masterClrMapping/>
+  </p:clrMapOvr>
+</p:sld>
+</file>
+
+<file path=ppt/slides/slide36.xml><?xml version="1.0" encoding="utf-8"?>
+<p:sld xmlns:a="http://schemas.openxmlformats.org/drawingml/2006/main" xmlns:r="http://schemas.openxmlformats.org/officeDocument/2006/relationships" xmlns:p="http://schemas.openxmlformats.org/presentationml/2006/main">
+  <p:cSld>
+    <p:spTree>
+      <p:nvGrpSpPr>
+        <p:cNvPr id="1" name="">
+          <a:extLst>
+            <a:ext uri="{FF2B5EF4-FFF2-40B4-BE49-F238E27FC236}">
+              <a16:creationId xmlns:a16="http://schemas.microsoft.com/office/drawing/2014/main" id="{835186C5-19A3-B4B4-3F02-0CCBBA201708}"/>
+            </a:ext>
+          </a:extLst>
+        </p:cNvPr>
+        <p:cNvGrpSpPr/>
+        <p:nvPr/>
+      </p:nvGrpSpPr>
+      <p:grpSpPr>
+        <a:xfrm>
+          <a:off x="0" y="0"/>
+          <a:ext cx="0" cy="0"/>
+          <a:chOff x="0" y="0"/>
+          <a:chExt cx="0" cy="0"/>
+        </a:xfrm>
+      </p:grpSpPr>
+      <p:sp>
+        <p:nvSpPr>
+          <p:cNvPr id="5" name="Retângulo 4">
+            <a:extLst>
+              <a:ext uri="{FF2B5EF4-FFF2-40B4-BE49-F238E27FC236}">
+                <a16:creationId xmlns:a16="http://schemas.microsoft.com/office/drawing/2014/main" id="{715A7E53-E396-0432-4EE1-A55B616E8343}"/>
+              </a:ext>
+            </a:extLst>
+          </p:cNvPr>
+          <p:cNvSpPr/>
+          <p:nvPr/>
+        </p:nvSpPr>
+        <p:spPr>
+          <a:xfrm>
+            <a:off x="0" y="-2"/>
+            <a:ext cx="12192000" cy="1325563"/>
+          </a:xfrm>
+          <a:prstGeom prst="rect">
+            <a:avLst/>
+          </a:prstGeom>
+          <a:solidFill>
+            <a:srgbClr val="418AB3"/>
+          </a:solidFill>
+          <a:ln>
+            <a:solidFill>
+              <a:srgbClr val="418AB3"/>
+            </a:solidFill>
+          </a:ln>
+        </p:spPr>
+        <p:style>
+          <a:lnRef idx="2">
+            <a:schemeClr val="accent1">
+              <a:shade val="15000"/>
+            </a:schemeClr>
+          </a:lnRef>
+          <a:fillRef idx="1">
+            <a:schemeClr val="accent1"/>
+          </a:fillRef>
+          <a:effectRef idx="0">
+            <a:schemeClr val="accent1"/>
+          </a:effectRef>
+          <a:fontRef idx="minor">
+            <a:schemeClr val="lt1"/>
+          </a:fontRef>
+        </p:style>
+        <p:txBody>
+          <a:bodyPr rtlCol="0" anchor="ctr"/>
+          <a:lstStyle/>
+          <a:p>
+            <a:pPr algn="ctr"/>
+            <a:endParaRPr lang="pt-BR" dirty="0"/>
+          </a:p>
+        </p:txBody>
+      </p:sp>
+      <p:sp>
+        <p:nvSpPr>
+          <p:cNvPr id="2" name="Título 1">
+            <a:extLst>
+              <a:ext uri="{FF2B5EF4-FFF2-40B4-BE49-F238E27FC236}">
+                <a16:creationId xmlns:a16="http://schemas.microsoft.com/office/drawing/2014/main" id="{91A1F473-F486-49AB-2551-9EADA4AA8AA8}"/>
+              </a:ext>
+            </a:extLst>
+          </p:cNvPr>
+          <p:cNvSpPr>
+            <a:spLocks noGrp="1"/>
+          </p:cNvSpPr>
+          <p:nvPr>
+            <p:ph type="title"/>
+          </p:nvPr>
+        </p:nvSpPr>
+        <p:spPr>
+          <a:xfrm>
+            <a:off x="0" y="-1"/>
+            <a:ext cx="12192000" cy="1325563"/>
+          </a:xfrm>
+        </p:spPr>
+        <p:txBody>
+          <a:bodyPr/>
+          <a:lstStyle/>
+          <a:p>
+            <a:pPr algn="ctr"/>
+            <a:r>
+              <a:rPr lang="pt-BR" dirty="0">
+                <a:solidFill>
+                  <a:schemeClr val="bg1"/>
+                </a:solidFill>
+              </a:rPr>
+              <a:t>Operadores Aritméticos</a:t>
+            </a:r>
+          </a:p>
+        </p:txBody>
+      </p:sp>
+      <p:sp>
+        <p:nvSpPr>
+          <p:cNvPr id="12" name="AutoShape 6" descr="Lógica Proposicional x Lógica de Argumento ⋆ Colaborae">
+            <a:extLst>
+              <a:ext uri="{FF2B5EF4-FFF2-40B4-BE49-F238E27FC236}">
+                <a16:creationId xmlns:a16="http://schemas.microsoft.com/office/drawing/2014/main" id="{6C1D408E-D98C-614D-D7C8-5E11D58CCBA0}"/>
+              </a:ext>
+            </a:extLst>
+          </p:cNvPr>
+          <p:cNvSpPr>
+            <a:spLocks noChangeAspect="1" noChangeArrowheads="1"/>
+          </p:cNvSpPr>
+          <p:nvPr/>
+        </p:nvSpPr>
+        <p:spPr bwMode="auto">
+          <a:xfrm>
+            <a:off x="5943600" y="-1707776"/>
+            <a:ext cx="5289176" cy="5289176"/>
+          </a:xfrm>
+          <a:prstGeom prst="rect">
+            <a:avLst/>
+          </a:prstGeom>
+          <a:noFill/>
+          <a:extLst>
+            <a:ext uri="{909E8E84-426E-40DD-AFC4-6F175D3DCCD1}">
+              <a14:hiddenFill xmlns:a14="http://schemas.microsoft.com/office/drawing/2010/main">
+                <a:solidFill>
+                  <a:srgbClr val="FFFFFF"/>
+                </a:solidFill>
+              </a14:hiddenFill>
+            </a:ext>
+          </a:extLst>
+        </p:spPr>
+        <p:txBody>
+          <a:bodyPr vert="horz" wrap="square" lIns="91440" tIns="45720" rIns="91440" bIns="45720" numCol="1" anchor="t" anchorCtr="0" compatLnSpc="1">
+            <a:prstTxWarp prst="textNoShape">
+              <a:avLst/>
+            </a:prstTxWarp>
+          </a:bodyPr>
+          <a:lstStyle/>
+          <a:p>
+            <a:endParaRPr lang="pt-BR"/>
+          </a:p>
+        </p:txBody>
+      </p:sp>
+      <p:sp>
+        <p:nvSpPr>
+          <p:cNvPr id="6" name="Espaço Reservado para Conteúdo 5">
+            <a:extLst>
+              <a:ext uri="{FF2B5EF4-FFF2-40B4-BE49-F238E27FC236}">
+                <a16:creationId xmlns:a16="http://schemas.microsoft.com/office/drawing/2014/main" id="{7EE6B605-1839-78FD-6BDE-FC60D016306A}"/>
+              </a:ext>
+            </a:extLst>
+          </p:cNvPr>
+          <p:cNvSpPr>
+            <a:spLocks noGrp="1"/>
+          </p:cNvSpPr>
+          <p:nvPr>
+            <p:ph idx="1"/>
+          </p:nvPr>
+        </p:nvSpPr>
+        <p:spPr>
+          <a:xfrm>
+            <a:off x="438418" y="1494004"/>
+            <a:ext cx="11315163" cy="5231649"/>
+          </a:xfrm>
+        </p:spPr>
+        <p:txBody>
+          <a:bodyPr>
+            <a:normAutofit lnSpcReduction="10000"/>
+          </a:bodyPr>
+          <a:lstStyle/>
+          <a:p>
+            <a:r>
+              <a:rPr lang="pt-BR" sz="2400" b="1" dirty="0"/>
+              <a:t>Servem para fazer cálculos básicos com valores numéricos:</a:t>
+            </a:r>
+          </a:p>
+          <a:p>
+            <a:endParaRPr lang="pt-BR" sz="2400" b="1" dirty="0"/>
+          </a:p>
+          <a:p>
+            <a:pPr lvl="1"/>
+            <a:r>
+              <a:rPr lang="pt-BR" sz="2200" dirty="0"/>
+              <a:t> Soma (+) </a:t>
+            </a:r>
+            <a:r>
+              <a:rPr lang="pt-BR" sz="2200" dirty="0">
+                <a:latin typeface="Calibri" panose="020F0502020204030204" pitchFamily="34" charset="0"/>
+                <a:ea typeface="Calibri" panose="020F0502020204030204" pitchFamily="34" charset="0"/>
+                <a:cs typeface="Calibri" panose="020F0502020204030204" pitchFamily="34" charset="0"/>
+              </a:rPr>
+              <a:t>→ 6 + 6=12</a:t>
+            </a:r>
+          </a:p>
+          <a:p>
+            <a:pPr lvl="1"/>
+            <a:endParaRPr lang="pt-BR" sz="2200" dirty="0"/>
+          </a:p>
+          <a:p>
+            <a:pPr lvl="1"/>
+            <a:r>
+              <a:rPr lang="pt-BR" sz="2200" dirty="0"/>
+              <a:t>Subtração (-) </a:t>
+            </a:r>
+            <a:r>
+              <a:rPr lang="pt-BR" sz="2200" dirty="0">
+                <a:latin typeface="Calibri" panose="020F0502020204030204" pitchFamily="34" charset="0"/>
+                <a:ea typeface="Calibri" panose="020F0502020204030204" pitchFamily="34" charset="0"/>
+                <a:cs typeface="Calibri" panose="020F0502020204030204" pitchFamily="34" charset="0"/>
+              </a:rPr>
+              <a:t>→ 5 - 12 = -7 (Se o valor não for </a:t>
+            </a:r>
+            <a:r>
+              <a:rPr lang="pt-BR" sz="2200" dirty="0" err="1">
+                <a:latin typeface="Calibri" panose="020F0502020204030204" pitchFamily="34" charset="0"/>
+                <a:ea typeface="Calibri" panose="020F0502020204030204" pitchFamily="34" charset="0"/>
+                <a:cs typeface="Calibri" panose="020F0502020204030204" pitchFamily="34" charset="0"/>
+              </a:rPr>
+              <a:t>unsigned</a:t>
+            </a:r>
+            <a:r>
+              <a:rPr lang="pt-BR" sz="2200" dirty="0">
+                <a:latin typeface="Calibri" panose="020F0502020204030204" pitchFamily="34" charset="0"/>
+                <a:ea typeface="Calibri" panose="020F0502020204030204" pitchFamily="34" charset="0"/>
+                <a:cs typeface="Calibri" panose="020F0502020204030204" pitchFamily="34" charset="0"/>
+              </a:rPr>
+              <a:t>) </a:t>
+            </a:r>
+          </a:p>
+          <a:p>
+            <a:pPr lvl="1"/>
+            <a:endParaRPr lang="pt-BR" sz="2200" dirty="0"/>
+          </a:p>
+          <a:p>
+            <a:pPr lvl="1"/>
+            <a:r>
+              <a:rPr lang="pt-BR" sz="2200" dirty="0"/>
+              <a:t>Multiplicação (*) </a:t>
+            </a:r>
+            <a:r>
+              <a:rPr lang="pt-BR" sz="2200" dirty="0">
+                <a:latin typeface="Calibri" panose="020F0502020204030204" pitchFamily="34" charset="0"/>
+                <a:ea typeface="Calibri" panose="020F0502020204030204" pitchFamily="34" charset="0"/>
+                <a:cs typeface="Calibri" panose="020F0502020204030204" pitchFamily="34" charset="0"/>
+              </a:rPr>
+              <a:t>→ 4 * 5 = 20</a:t>
+            </a:r>
+          </a:p>
+          <a:p>
+            <a:pPr lvl="1"/>
+            <a:endParaRPr lang="pt-BR" sz="2200" dirty="0"/>
+          </a:p>
+          <a:p>
+            <a:pPr lvl="1"/>
+            <a:r>
+              <a:rPr lang="pt-BR" sz="2200" dirty="0"/>
+              <a:t>Divisão (/) </a:t>
+            </a:r>
+            <a:r>
+              <a:rPr lang="pt-BR" sz="2200" dirty="0">
+                <a:latin typeface="Calibri" panose="020F0502020204030204" pitchFamily="34" charset="0"/>
+                <a:ea typeface="Calibri" panose="020F0502020204030204" pitchFamily="34" charset="0"/>
+                <a:cs typeface="Calibri" panose="020F0502020204030204" pitchFamily="34" charset="0"/>
+              </a:rPr>
+              <a:t>→ </a:t>
+            </a:r>
+            <a:r>
+              <a:rPr lang="pt-BR" dirty="0"/>
+              <a:t>5  /  2</a:t>
+            </a:r>
+            <a:r>
+              <a:rPr lang="pt-BR" sz="2000" dirty="0"/>
+              <a:t> = </a:t>
+            </a:r>
+            <a:r>
+              <a:rPr lang="pt-BR" dirty="0"/>
+              <a:t>2 (Se a variável for inteira)</a:t>
+            </a:r>
+            <a:endParaRPr lang="pt-BR" sz="2200" dirty="0">
+              <a:latin typeface="Calibri" panose="020F0502020204030204" pitchFamily="34" charset="0"/>
+              <a:ea typeface="Calibri" panose="020F0502020204030204" pitchFamily="34" charset="0"/>
+              <a:cs typeface="Calibri" panose="020F0502020204030204" pitchFamily="34" charset="0"/>
+            </a:endParaRPr>
+          </a:p>
+          <a:p>
+            <a:pPr lvl="1"/>
+            <a:endParaRPr lang="pt-BR" sz="2200" dirty="0"/>
+          </a:p>
+          <a:p>
+            <a:pPr lvl="1"/>
+            <a:r>
+              <a:rPr lang="pt-BR" sz="2200" dirty="0"/>
+              <a:t>Resto da divisão inteira (%) </a:t>
+            </a:r>
+            <a:r>
+              <a:rPr lang="pt-BR" sz="2200" dirty="0">
+                <a:latin typeface="Calibri" panose="020F0502020204030204" pitchFamily="34" charset="0"/>
+                <a:ea typeface="Calibri" panose="020F0502020204030204" pitchFamily="34" charset="0"/>
+                <a:cs typeface="Calibri" panose="020F0502020204030204" pitchFamily="34" charset="0"/>
+              </a:rPr>
+              <a:t>→ </a:t>
+            </a:r>
+            <a:r>
+              <a:rPr lang="pt-BR" sz="2200" dirty="0"/>
+              <a:t>5  %  2 = 1</a:t>
+            </a:r>
+            <a:r>
+              <a:rPr lang="pt-BR" sz="2200" dirty="0">
+                <a:latin typeface="Calibri" panose="020F0502020204030204" pitchFamily="34" charset="0"/>
+                <a:ea typeface="Calibri" panose="020F0502020204030204" pitchFamily="34" charset="0"/>
+                <a:cs typeface="Calibri" panose="020F0502020204030204" pitchFamily="34" charset="0"/>
+              </a:rPr>
+              <a:t> </a:t>
+            </a:r>
+          </a:p>
+          <a:p>
+            <a:pPr lvl="1"/>
+            <a:endParaRPr lang="pt-BR" sz="2200" dirty="0"/>
+          </a:p>
+          <a:p>
+            <a:pPr lvl="1"/>
+            <a:r>
+              <a:rPr lang="pt-BR" sz="2200" dirty="0"/>
+              <a:t>Incremento (++) </a:t>
+            </a:r>
+            <a:r>
+              <a:rPr lang="pt-BR" sz="2200" dirty="0">
+                <a:latin typeface="Calibri" panose="020F0502020204030204" pitchFamily="34" charset="0"/>
+                <a:ea typeface="Calibri" panose="020F0502020204030204" pitchFamily="34" charset="0"/>
+                <a:cs typeface="Calibri" panose="020F0502020204030204" pitchFamily="34" charset="0"/>
+              </a:rPr>
+              <a:t>→ Análogo à x = x+1</a:t>
+            </a:r>
+          </a:p>
+          <a:p>
+            <a:pPr lvl="1"/>
+            <a:endParaRPr lang="pt-BR" sz="2200" dirty="0"/>
+          </a:p>
+          <a:p>
+            <a:pPr lvl="1"/>
+            <a:r>
+              <a:rPr lang="pt-BR" sz="2200" dirty="0"/>
+              <a:t>Decremento (--) </a:t>
+            </a:r>
+            <a:r>
+              <a:rPr lang="pt-BR" sz="2200" dirty="0">
+                <a:latin typeface="Calibri" panose="020F0502020204030204" pitchFamily="34" charset="0"/>
+                <a:ea typeface="Calibri" panose="020F0502020204030204" pitchFamily="34" charset="0"/>
+                <a:cs typeface="Calibri" panose="020F0502020204030204" pitchFamily="34" charset="0"/>
+              </a:rPr>
+              <a:t>→ Análogo à x = x-1</a:t>
+            </a:r>
+          </a:p>
+          <a:p>
+            <a:pPr lvl="1"/>
+            <a:endParaRPr lang="pt-BR" sz="2200" dirty="0"/>
+          </a:p>
+          <a:p>
+            <a:pPr lvl="1"/>
+            <a:endParaRPr lang="pt-BR" sz="2200" dirty="0"/>
+          </a:p>
+        </p:txBody>
+      </p:sp>
+      <p:pic>
+        <p:nvPicPr>
+          <p:cNvPr id="8" name="Imagem 7">
+            <a:extLst>
+              <a:ext uri="{FF2B5EF4-FFF2-40B4-BE49-F238E27FC236}">
+                <a16:creationId xmlns:a16="http://schemas.microsoft.com/office/drawing/2014/main" id="{A54C368E-7C37-4892-1F45-ECFB214032F5}"/>
+              </a:ext>
+            </a:extLst>
+          </p:cNvPr>
+          <p:cNvPicPr>
+            <a:picLocks noChangeAspect="1"/>
+          </p:cNvPicPr>
+          <p:nvPr/>
+        </p:nvPicPr>
+        <p:blipFill>
+          <a:blip r:embed="rId3"/>
+          <a:stretch>
+            <a:fillRect/>
+          </a:stretch>
+        </p:blipFill>
+        <p:spPr>
+          <a:xfrm>
+            <a:off x="8283253" y="2504865"/>
+            <a:ext cx="3209925" cy="3209925"/>
+          </a:xfrm>
+          <a:prstGeom prst="rect">
+            <a:avLst/>
+          </a:prstGeom>
+        </p:spPr>
+      </p:pic>
+    </p:spTree>
+    <p:extLst>
+      <p:ext uri="{BB962C8B-B14F-4D97-AF65-F5344CB8AC3E}">
+        <p14:creationId xmlns:p14="http://schemas.microsoft.com/office/powerpoint/2010/main" val="3688540456"/>
+      </p:ext>
+    </p:extLst>
+  </p:cSld>
+  <p:clrMapOvr>
+    <a:masterClrMapping/>
+  </p:clrMapOvr>
+</p:sld>
+</file>
+
+<file path=ppt/slides/slide37.xml><?xml version="1.0" encoding="utf-8"?>
+<p:sld xmlns:a="http://schemas.openxmlformats.org/drawingml/2006/main" xmlns:r="http://schemas.openxmlformats.org/officeDocument/2006/relationships" xmlns:p="http://schemas.openxmlformats.org/presentationml/2006/main">
+  <p:cSld>
+    <p:spTree>
+      <p:nvGrpSpPr>
+        <p:cNvPr id="1" name="">
+          <a:extLst>
+            <a:ext uri="{FF2B5EF4-FFF2-40B4-BE49-F238E27FC236}">
+              <a16:creationId xmlns:a16="http://schemas.microsoft.com/office/drawing/2014/main" id="{60BA8C59-0198-8BF0-50FB-B17CCA580CFC}"/>
+            </a:ext>
+          </a:extLst>
+        </p:cNvPr>
+        <p:cNvGrpSpPr/>
+        <p:nvPr/>
+      </p:nvGrpSpPr>
+      <p:grpSpPr>
+        <a:xfrm>
+          <a:off x="0" y="0"/>
+          <a:ext cx="0" cy="0"/>
+          <a:chOff x="0" y="0"/>
+          <a:chExt cx="0" cy="0"/>
+        </a:xfrm>
+      </p:grpSpPr>
+      <p:sp>
+        <p:nvSpPr>
+          <p:cNvPr id="5" name="Retângulo 4">
+            <a:extLst>
+              <a:ext uri="{FF2B5EF4-FFF2-40B4-BE49-F238E27FC236}">
+                <a16:creationId xmlns:a16="http://schemas.microsoft.com/office/drawing/2014/main" id="{CEB874EA-4A89-D2E8-D8CC-2A9A93E64379}"/>
+              </a:ext>
+            </a:extLst>
+          </p:cNvPr>
+          <p:cNvSpPr/>
+          <p:nvPr/>
+        </p:nvSpPr>
+        <p:spPr>
+          <a:xfrm>
+            <a:off x="0" y="-2"/>
+            <a:ext cx="12192000" cy="1325563"/>
+          </a:xfrm>
+          <a:prstGeom prst="rect">
+            <a:avLst/>
+          </a:prstGeom>
+          <a:solidFill>
+            <a:srgbClr val="418AB3"/>
+          </a:solidFill>
+          <a:ln>
+            <a:solidFill>
+              <a:srgbClr val="418AB3"/>
+            </a:solidFill>
+          </a:ln>
+        </p:spPr>
+        <p:style>
+          <a:lnRef idx="2">
+            <a:schemeClr val="accent1">
+              <a:shade val="15000"/>
+            </a:schemeClr>
+          </a:lnRef>
+          <a:fillRef idx="1">
+            <a:schemeClr val="accent1"/>
+          </a:fillRef>
+          <a:effectRef idx="0">
+            <a:schemeClr val="accent1"/>
+          </a:effectRef>
+          <a:fontRef idx="minor">
+            <a:schemeClr val="lt1"/>
+          </a:fontRef>
+        </p:style>
+        <p:txBody>
+          <a:bodyPr rtlCol="0" anchor="ctr"/>
+          <a:lstStyle/>
+          <a:p>
+            <a:pPr algn="ctr"/>
+            <a:endParaRPr lang="pt-BR" dirty="0"/>
+          </a:p>
+        </p:txBody>
+      </p:sp>
+      <p:sp>
+        <p:nvSpPr>
+          <p:cNvPr id="2" name="Título 1">
+            <a:extLst>
+              <a:ext uri="{FF2B5EF4-FFF2-40B4-BE49-F238E27FC236}">
+                <a16:creationId xmlns:a16="http://schemas.microsoft.com/office/drawing/2014/main" id="{8A7AB5FE-CC42-9B7C-3046-31F7430F02F5}"/>
+              </a:ext>
+            </a:extLst>
+          </p:cNvPr>
+          <p:cNvSpPr>
+            <a:spLocks noGrp="1"/>
+          </p:cNvSpPr>
+          <p:nvPr>
+            <p:ph type="title"/>
+          </p:nvPr>
+        </p:nvSpPr>
+        <p:spPr>
+          <a:xfrm>
+            <a:off x="0" y="-1"/>
+            <a:ext cx="12192000" cy="1325563"/>
+          </a:xfrm>
+        </p:spPr>
+        <p:txBody>
+          <a:bodyPr/>
+          <a:lstStyle/>
+          <a:p>
+            <a:pPr algn="ctr"/>
+            <a:r>
+              <a:rPr lang="pt-BR" dirty="0">
+                <a:solidFill>
+                  <a:schemeClr val="bg1"/>
+                </a:solidFill>
+              </a:rPr>
+              <a:t>Operadores Lógicos</a:t>
+            </a:r>
+          </a:p>
+        </p:txBody>
+      </p:sp>
+      <p:sp>
+        <p:nvSpPr>
+          <p:cNvPr id="12" name="AutoShape 6" descr="Lógica Proposicional x Lógica de Argumento ⋆ Colaborae">
+            <a:extLst>
+              <a:ext uri="{FF2B5EF4-FFF2-40B4-BE49-F238E27FC236}">
+                <a16:creationId xmlns:a16="http://schemas.microsoft.com/office/drawing/2014/main" id="{F8E333AB-946A-F09A-1FB8-E1E63FC5240A}"/>
+              </a:ext>
+            </a:extLst>
+          </p:cNvPr>
+          <p:cNvSpPr>
+            <a:spLocks noChangeAspect="1" noChangeArrowheads="1"/>
+          </p:cNvSpPr>
+          <p:nvPr/>
+        </p:nvSpPr>
+        <p:spPr bwMode="auto">
+          <a:xfrm>
+            <a:off x="5943600" y="-1707776"/>
+            <a:ext cx="5289176" cy="5289176"/>
+          </a:xfrm>
+          <a:prstGeom prst="rect">
+            <a:avLst/>
+          </a:prstGeom>
+          <a:noFill/>
+          <a:extLst>
+            <a:ext uri="{909E8E84-426E-40DD-AFC4-6F175D3DCCD1}">
+              <a14:hiddenFill xmlns:a14="http://schemas.microsoft.com/office/drawing/2010/main">
+                <a:solidFill>
+                  <a:srgbClr val="FFFFFF"/>
+                </a:solidFill>
+              </a14:hiddenFill>
+            </a:ext>
+          </a:extLst>
+        </p:spPr>
+        <p:txBody>
+          <a:bodyPr vert="horz" wrap="square" lIns="91440" tIns="45720" rIns="91440" bIns="45720" numCol="1" anchor="t" anchorCtr="0" compatLnSpc="1">
+            <a:prstTxWarp prst="textNoShape">
+              <a:avLst/>
+            </a:prstTxWarp>
+          </a:bodyPr>
+          <a:lstStyle/>
+          <a:p>
+            <a:endParaRPr lang="pt-BR"/>
+          </a:p>
+        </p:txBody>
+      </p:sp>
+      <p:sp>
+        <p:nvSpPr>
+          <p:cNvPr id="6" name="Espaço Reservado para Conteúdo 5">
+            <a:extLst>
+              <a:ext uri="{FF2B5EF4-FFF2-40B4-BE49-F238E27FC236}">
+                <a16:creationId xmlns:a16="http://schemas.microsoft.com/office/drawing/2014/main" id="{C48AD6AF-025A-058F-230B-C12496B15056}"/>
+              </a:ext>
+            </a:extLst>
+          </p:cNvPr>
+          <p:cNvSpPr>
+            <a:spLocks noGrp="1"/>
+          </p:cNvSpPr>
+          <p:nvPr>
+            <p:ph idx="1"/>
+          </p:nvPr>
+        </p:nvSpPr>
+        <p:spPr>
+          <a:xfrm>
+            <a:off x="0" y="1825707"/>
+            <a:ext cx="6985066" cy="4353344"/>
+          </a:xfrm>
+        </p:spPr>
+        <p:txBody>
+          <a:bodyPr>
+            <a:normAutofit/>
+          </a:bodyPr>
+          <a:lstStyle/>
+          <a:p>
+            <a:r>
+              <a:rPr lang="pt-BR" sz="2400" b="1" dirty="0"/>
+              <a:t>Servem unir proposições (de acordo com a lógica proposicional)</a:t>
+            </a:r>
+          </a:p>
+          <a:p>
+            <a:endParaRPr lang="pt-BR" sz="2400" b="1" dirty="0"/>
+          </a:p>
+          <a:p>
+            <a:pPr lvl="1"/>
+            <a:r>
+              <a:rPr lang="pt-BR" sz="2200" b="1" dirty="0"/>
+              <a:t>E / AND (&amp;&amp;): </a:t>
+            </a:r>
+            <a:r>
+              <a:rPr lang="pt-BR" sz="2200" dirty="0"/>
+              <a:t>Retorna verdadeiro apenas se os dois lados forem verdadeiros</a:t>
+            </a:r>
+          </a:p>
+          <a:p>
+            <a:pPr lvl="1"/>
+            <a:endParaRPr lang="pt-BR" sz="2200" dirty="0"/>
+          </a:p>
+          <a:p>
+            <a:pPr lvl="1"/>
+            <a:r>
+              <a:rPr lang="pt-BR" sz="2200" b="1" dirty="0"/>
+              <a:t>OU / OR (||): </a:t>
+            </a:r>
+            <a:r>
+              <a:rPr lang="pt-BR" sz="2200" dirty="0"/>
+              <a:t>Retorna verdadeiro se pelo menos um dos lados for verdadeiro</a:t>
+            </a:r>
+          </a:p>
+          <a:p>
+            <a:pPr lvl="1"/>
+            <a:endParaRPr lang="pt-BR" sz="2200" dirty="0"/>
+          </a:p>
+          <a:p>
+            <a:pPr lvl="1"/>
+            <a:r>
+              <a:rPr lang="pt-BR" sz="2200" b="1" dirty="0"/>
+              <a:t>NÃO / NOT (!):</a:t>
+            </a:r>
+            <a:r>
+              <a:rPr lang="pt-BR" sz="2200" dirty="0"/>
+              <a:t> Inverte o valor do teste (o que é verdadeiro vira falso, e vice-versa)</a:t>
+            </a:r>
+          </a:p>
+          <a:p>
+            <a:pPr lvl="1"/>
+            <a:endParaRPr lang="pt-BR" sz="2200" dirty="0"/>
+          </a:p>
+        </p:txBody>
+      </p:sp>
+      <p:pic>
+        <p:nvPicPr>
+          <p:cNvPr id="7" name="Imagem 6">
+            <a:extLst>
+              <a:ext uri="{FF2B5EF4-FFF2-40B4-BE49-F238E27FC236}">
+                <a16:creationId xmlns:a16="http://schemas.microsoft.com/office/drawing/2014/main" id="{3808EA45-498D-67F8-8023-C9D16160F8FD}"/>
+              </a:ext>
+            </a:extLst>
+          </p:cNvPr>
+          <p:cNvPicPr>
+            <a:picLocks noChangeAspect="1"/>
+          </p:cNvPicPr>
+          <p:nvPr/>
+        </p:nvPicPr>
+        <p:blipFill>
+          <a:blip r:embed="rId3"/>
+          <a:srcRect l="60362" b="8359"/>
+          <a:stretch>
+            <a:fillRect/>
+          </a:stretch>
+        </p:blipFill>
+        <p:spPr>
+          <a:xfrm>
+            <a:off x="8588188" y="2709497"/>
+            <a:ext cx="3461084" cy="3083322"/>
+          </a:xfrm>
+          <a:prstGeom prst="rect">
+            <a:avLst/>
+          </a:prstGeom>
+        </p:spPr>
+      </p:pic>
+      <p:pic>
+        <p:nvPicPr>
+          <p:cNvPr id="8" name="Imagem 7">
+            <a:extLst>
+              <a:ext uri="{FF2B5EF4-FFF2-40B4-BE49-F238E27FC236}">
+                <a16:creationId xmlns:a16="http://schemas.microsoft.com/office/drawing/2014/main" id="{C7791FD3-B489-7C89-2959-747A6D449177}"/>
+              </a:ext>
+            </a:extLst>
+          </p:cNvPr>
+          <p:cNvPicPr>
+            <a:picLocks noChangeAspect="1"/>
+          </p:cNvPicPr>
+          <p:nvPr/>
+        </p:nvPicPr>
+        <p:blipFill>
+          <a:blip r:embed="rId3"/>
+          <a:srcRect r="83618" b="25670"/>
+          <a:stretch>
+            <a:fillRect/>
+          </a:stretch>
+        </p:blipFill>
+        <p:spPr>
+          <a:xfrm>
+            <a:off x="7074397" y="2679032"/>
+            <a:ext cx="1513791" cy="2646694"/>
+          </a:xfrm>
+          <a:prstGeom prst="rect">
+            <a:avLst/>
+          </a:prstGeom>
+        </p:spPr>
+      </p:pic>
+    </p:spTree>
+    <p:extLst>
+      <p:ext uri="{BB962C8B-B14F-4D97-AF65-F5344CB8AC3E}">
+        <p14:creationId xmlns:p14="http://schemas.microsoft.com/office/powerpoint/2010/main" val="2673539700"/>
+      </p:ext>
+    </p:extLst>
+  </p:cSld>
+  <p:clrMapOvr>
+    <a:masterClrMapping/>
+  </p:clrMapOvr>
+</p:sld>
+</file>
+
+<file path=ppt/slides/slide38.xml><?xml version="1.0" encoding="utf-8"?>
+<p:sld xmlns:a="http://schemas.openxmlformats.org/drawingml/2006/main" xmlns:r="http://schemas.openxmlformats.org/officeDocument/2006/relationships" xmlns:p="http://schemas.openxmlformats.org/presentationml/2006/main">
+  <p:cSld>
+    <p:spTree>
+      <p:nvGrpSpPr>
+        <p:cNvPr id="1" name="">
+          <a:extLst>
+            <a:ext uri="{FF2B5EF4-FFF2-40B4-BE49-F238E27FC236}">
+              <a16:creationId xmlns:a16="http://schemas.microsoft.com/office/drawing/2014/main" id="{292DA8C8-BCDE-3567-C977-E9CB262FE520}"/>
+            </a:ext>
+          </a:extLst>
+        </p:cNvPr>
+        <p:cNvGrpSpPr/>
+        <p:nvPr/>
+      </p:nvGrpSpPr>
+      <p:grpSpPr>
+        <a:xfrm>
+          <a:off x="0" y="0"/>
+          <a:ext cx="0" cy="0"/>
+          <a:chOff x="0" y="0"/>
+          <a:chExt cx="0" cy="0"/>
+        </a:xfrm>
+      </p:grpSpPr>
+      <p:sp>
+        <p:nvSpPr>
+          <p:cNvPr id="5" name="Retângulo 4">
+            <a:extLst>
+              <a:ext uri="{FF2B5EF4-FFF2-40B4-BE49-F238E27FC236}">
+                <a16:creationId xmlns:a16="http://schemas.microsoft.com/office/drawing/2014/main" id="{7DEC1879-36C3-847A-7DBB-1BF6762FE091}"/>
+              </a:ext>
+            </a:extLst>
+          </p:cNvPr>
+          <p:cNvSpPr/>
+          <p:nvPr/>
+        </p:nvSpPr>
+        <p:spPr>
+          <a:xfrm>
+            <a:off x="0" y="-2"/>
+            <a:ext cx="12192000" cy="1325563"/>
+          </a:xfrm>
+          <a:prstGeom prst="rect">
+            <a:avLst/>
+          </a:prstGeom>
+          <a:solidFill>
+            <a:srgbClr val="418AB3"/>
+          </a:solidFill>
+          <a:ln>
+            <a:solidFill>
+              <a:srgbClr val="418AB3"/>
+            </a:solidFill>
+          </a:ln>
+        </p:spPr>
+        <p:style>
+          <a:lnRef idx="2">
+            <a:schemeClr val="accent1">
+              <a:shade val="15000"/>
+            </a:schemeClr>
+          </a:lnRef>
+          <a:fillRef idx="1">
+            <a:schemeClr val="accent1"/>
+          </a:fillRef>
+          <a:effectRef idx="0">
+            <a:schemeClr val="accent1"/>
+          </a:effectRef>
+          <a:fontRef idx="minor">
+            <a:schemeClr val="lt1"/>
+          </a:fontRef>
+        </p:style>
+        <p:txBody>
+          <a:bodyPr rtlCol="0" anchor="ctr"/>
+          <a:lstStyle/>
+          <a:p>
+            <a:pPr algn="ctr"/>
+            <a:endParaRPr lang="pt-BR" dirty="0"/>
+          </a:p>
+        </p:txBody>
+      </p:sp>
+      <p:sp>
+        <p:nvSpPr>
+          <p:cNvPr id="2" name="Título 1">
+            <a:extLst>
+              <a:ext uri="{FF2B5EF4-FFF2-40B4-BE49-F238E27FC236}">
+                <a16:creationId xmlns:a16="http://schemas.microsoft.com/office/drawing/2014/main" id="{72EB4E15-419C-B189-CF8F-419848AAE93F}"/>
+              </a:ext>
+            </a:extLst>
+          </p:cNvPr>
+          <p:cNvSpPr>
+            <a:spLocks noGrp="1"/>
+          </p:cNvSpPr>
+          <p:nvPr>
+            <p:ph type="title"/>
+          </p:nvPr>
+        </p:nvSpPr>
+        <p:spPr>
+          <a:xfrm>
+            <a:off x="0" y="-1"/>
+            <a:ext cx="12192000" cy="1325563"/>
+          </a:xfrm>
+        </p:spPr>
+        <p:txBody>
+          <a:bodyPr/>
+          <a:lstStyle/>
+          <a:p>
+            <a:pPr algn="ctr"/>
+            <a:r>
+              <a:rPr lang="pt-BR" dirty="0">
+                <a:solidFill>
+                  <a:schemeClr val="bg1"/>
+                </a:solidFill>
+              </a:rPr>
+              <a:t>Operadores Relacionais (Comparadores)</a:t>
+            </a:r>
+          </a:p>
+        </p:txBody>
+      </p:sp>
+      <p:sp>
+        <p:nvSpPr>
+          <p:cNvPr id="12" name="AutoShape 6" descr="Lógica Proposicional x Lógica de Argumento ⋆ Colaborae">
+            <a:extLst>
+              <a:ext uri="{FF2B5EF4-FFF2-40B4-BE49-F238E27FC236}">
+                <a16:creationId xmlns:a16="http://schemas.microsoft.com/office/drawing/2014/main" id="{182CA9A1-1EEA-1FF0-C2A8-87B07E539920}"/>
+              </a:ext>
+            </a:extLst>
+          </p:cNvPr>
+          <p:cNvSpPr>
+            <a:spLocks noChangeAspect="1" noChangeArrowheads="1"/>
+          </p:cNvSpPr>
+          <p:nvPr/>
+        </p:nvSpPr>
+        <p:spPr bwMode="auto">
+          <a:xfrm>
+            <a:off x="5943600" y="-1707776"/>
+            <a:ext cx="5289176" cy="5289176"/>
+          </a:xfrm>
+          <a:prstGeom prst="rect">
+            <a:avLst/>
+          </a:prstGeom>
+          <a:noFill/>
+          <a:extLst>
+            <a:ext uri="{909E8E84-426E-40DD-AFC4-6F175D3DCCD1}">
+              <a14:hiddenFill xmlns:a14="http://schemas.microsoft.com/office/drawing/2010/main">
+                <a:solidFill>
+                  <a:srgbClr val="FFFFFF"/>
+                </a:solidFill>
+              </a14:hiddenFill>
+            </a:ext>
+          </a:extLst>
+        </p:spPr>
+        <p:txBody>
+          <a:bodyPr vert="horz" wrap="square" lIns="91440" tIns="45720" rIns="91440" bIns="45720" numCol="1" anchor="t" anchorCtr="0" compatLnSpc="1">
+            <a:prstTxWarp prst="textNoShape">
+              <a:avLst/>
+            </a:prstTxWarp>
+          </a:bodyPr>
+          <a:lstStyle/>
+          <a:p>
+            <a:endParaRPr lang="pt-BR"/>
+          </a:p>
+        </p:txBody>
+      </p:sp>
+      <p:sp>
+        <p:nvSpPr>
+          <p:cNvPr id="6" name="Espaço Reservado para Conteúdo 5">
+            <a:extLst>
+              <a:ext uri="{FF2B5EF4-FFF2-40B4-BE49-F238E27FC236}">
+                <a16:creationId xmlns:a16="http://schemas.microsoft.com/office/drawing/2014/main" id="{14BDDD11-391F-5052-1C48-67A648ABC437}"/>
+              </a:ext>
+            </a:extLst>
+          </p:cNvPr>
+          <p:cNvSpPr>
+            <a:spLocks noGrp="1"/>
+          </p:cNvSpPr>
+          <p:nvPr>
+            <p:ph idx="1"/>
+          </p:nvPr>
+        </p:nvSpPr>
+        <p:spPr>
+          <a:xfrm>
+            <a:off x="959224" y="1435443"/>
+            <a:ext cx="8698832" cy="5345114"/>
+          </a:xfrm>
+        </p:spPr>
+        <p:txBody>
+          <a:bodyPr>
+            <a:normAutofit/>
+          </a:bodyPr>
+          <a:lstStyle/>
+          <a:p>
+            <a:r>
+              <a:rPr lang="pt-BR" sz="2400" b="1" dirty="0"/>
+              <a:t>Servem para comparar valores, retornando “1” para verdadeiro e “0” para falso. São comumente utilizados em condicionais:</a:t>
+            </a:r>
+          </a:p>
+          <a:p>
+            <a:endParaRPr lang="pt-BR" sz="2400" b="1" dirty="0"/>
+          </a:p>
+          <a:p>
+            <a:pPr lvl="1"/>
+            <a:r>
+              <a:rPr lang="pt-BR" sz="2100" b="1" dirty="0"/>
+              <a:t>==</a:t>
+            </a:r>
+            <a:r>
+              <a:rPr lang="pt-BR" sz="2100" dirty="0"/>
+              <a:t> </a:t>
+            </a:r>
+            <a:r>
+              <a:rPr lang="pt-BR" sz="2100" dirty="0">
+                <a:latin typeface="Calibri" panose="020F0502020204030204" pitchFamily="34" charset="0"/>
+                <a:ea typeface="Calibri" panose="020F0502020204030204" pitchFamily="34" charset="0"/>
+                <a:cs typeface="Calibri" panose="020F0502020204030204" pitchFamily="34" charset="0"/>
+              </a:rPr>
+              <a:t>→</a:t>
+            </a:r>
+            <a:r>
+              <a:rPr lang="pt-BR" sz="2100" dirty="0"/>
+              <a:t> Igual a</a:t>
+            </a:r>
+          </a:p>
+          <a:p>
+            <a:pPr marL="457200" lvl="1" indent="0">
+              <a:buNone/>
+            </a:pPr>
+            <a:endParaRPr lang="pt-BR" sz="2100" b="1" dirty="0"/>
+          </a:p>
+          <a:p>
+            <a:pPr lvl="1"/>
+            <a:r>
+              <a:rPr lang="pt-BR" sz="2100" b="1" dirty="0"/>
+              <a:t>!=</a:t>
+            </a:r>
+            <a:r>
+              <a:rPr lang="pt-BR" sz="2100" dirty="0"/>
+              <a:t> </a:t>
+            </a:r>
+            <a:r>
+              <a:rPr lang="pt-BR" sz="2100" dirty="0">
+                <a:latin typeface="Calibri" panose="020F0502020204030204" pitchFamily="34" charset="0"/>
+                <a:ea typeface="Calibri" panose="020F0502020204030204" pitchFamily="34" charset="0"/>
+                <a:cs typeface="Calibri" panose="020F0502020204030204" pitchFamily="34" charset="0"/>
+              </a:rPr>
+              <a:t>→</a:t>
+            </a:r>
+            <a:r>
+              <a:rPr lang="pt-BR" sz="2100" dirty="0"/>
+              <a:t> Diferente de</a:t>
+            </a:r>
+          </a:p>
+          <a:p>
+            <a:pPr lvl="1"/>
+            <a:endParaRPr lang="pt-BR" sz="2100" b="1" dirty="0"/>
+          </a:p>
+          <a:p>
+            <a:pPr lvl="1"/>
+            <a:r>
+              <a:rPr lang="pt-BR" sz="2100" b="1" dirty="0"/>
+              <a:t>&gt;</a:t>
+            </a:r>
+            <a:r>
+              <a:rPr lang="pt-BR" sz="2100" dirty="0"/>
+              <a:t> </a:t>
+            </a:r>
+            <a:r>
+              <a:rPr lang="pt-BR" sz="2100" dirty="0">
+                <a:latin typeface="Calibri" panose="020F0502020204030204" pitchFamily="34" charset="0"/>
+                <a:ea typeface="Calibri" panose="020F0502020204030204" pitchFamily="34" charset="0"/>
+                <a:cs typeface="Calibri" panose="020F0502020204030204" pitchFamily="34" charset="0"/>
+              </a:rPr>
+              <a:t>→</a:t>
+            </a:r>
+            <a:r>
+              <a:rPr lang="pt-BR" sz="2100" dirty="0"/>
+              <a:t> Maior que</a:t>
+            </a:r>
+          </a:p>
+          <a:p>
+            <a:pPr lvl="1"/>
+            <a:endParaRPr lang="pt-BR" sz="2100" b="1" dirty="0"/>
+          </a:p>
+          <a:p>
+            <a:pPr lvl="1"/>
+            <a:r>
+              <a:rPr lang="pt-BR" sz="2100" b="1" dirty="0"/>
+              <a:t>&lt;</a:t>
+            </a:r>
+            <a:r>
+              <a:rPr lang="pt-BR" sz="2100" dirty="0"/>
+              <a:t> </a:t>
+            </a:r>
+            <a:r>
+              <a:rPr lang="pt-BR" sz="2100" dirty="0">
+                <a:latin typeface="Calibri" panose="020F0502020204030204" pitchFamily="34" charset="0"/>
+                <a:ea typeface="Calibri" panose="020F0502020204030204" pitchFamily="34" charset="0"/>
+                <a:cs typeface="Calibri" panose="020F0502020204030204" pitchFamily="34" charset="0"/>
+              </a:rPr>
+              <a:t>→</a:t>
+            </a:r>
+            <a:r>
+              <a:rPr lang="pt-BR" sz="2100" dirty="0"/>
+              <a:t> Menor que</a:t>
+            </a:r>
+          </a:p>
+          <a:p>
+            <a:pPr lvl="1"/>
+            <a:endParaRPr lang="pt-BR" sz="2100" b="1" dirty="0"/>
+          </a:p>
+          <a:p>
+            <a:pPr lvl="1"/>
+            <a:r>
+              <a:rPr lang="pt-BR" sz="2100" b="1" dirty="0"/>
+              <a:t>&gt;=</a:t>
+            </a:r>
+            <a:r>
+              <a:rPr lang="pt-BR" sz="2100" dirty="0"/>
+              <a:t> </a:t>
+            </a:r>
+            <a:r>
+              <a:rPr lang="pt-BR" sz="2100" dirty="0">
+                <a:latin typeface="Calibri" panose="020F0502020204030204" pitchFamily="34" charset="0"/>
+                <a:ea typeface="Calibri" panose="020F0502020204030204" pitchFamily="34" charset="0"/>
+                <a:cs typeface="Calibri" panose="020F0502020204030204" pitchFamily="34" charset="0"/>
+              </a:rPr>
+              <a:t>→</a:t>
+            </a:r>
+            <a:r>
+              <a:rPr lang="pt-BR" sz="2100" dirty="0"/>
+              <a:t> Maior ou igual a</a:t>
+            </a:r>
+          </a:p>
+          <a:p>
+            <a:pPr lvl="1"/>
+            <a:endParaRPr lang="pt-BR" sz="2100" b="1" dirty="0"/>
+          </a:p>
+          <a:p>
+            <a:pPr lvl="1"/>
+            <a:r>
+              <a:rPr lang="pt-BR" sz="2100" b="1" dirty="0"/>
+              <a:t>&lt;=</a:t>
+            </a:r>
+            <a:r>
+              <a:rPr lang="pt-BR" sz="2100" dirty="0"/>
+              <a:t> </a:t>
+            </a:r>
+            <a:r>
+              <a:rPr lang="pt-BR" sz="2100" dirty="0">
+                <a:latin typeface="Calibri" panose="020F0502020204030204" pitchFamily="34" charset="0"/>
+                <a:ea typeface="Calibri" panose="020F0502020204030204" pitchFamily="34" charset="0"/>
+                <a:cs typeface="Calibri" panose="020F0502020204030204" pitchFamily="34" charset="0"/>
+              </a:rPr>
+              <a:t>→</a:t>
+            </a:r>
+            <a:r>
+              <a:rPr lang="pt-BR" sz="2100" dirty="0"/>
+              <a:t> Menor ou igual a</a:t>
+            </a:r>
+          </a:p>
+        </p:txBody>
+      </p:sp>
+      <p:pic>
+        <p:nvPicPr>
+          <p:cNvPr id="10" name="Imagem 9">
+            <a:extLst>
+              <a:ext uri="{FF2B5EF4-FFF2-40B4-BE49-F238E27FC236}">
+                <a16:creationId xmlns:a16="http://schemas.microsoft.com/office/drawing/2014/main" id="{B6218045-6185-5E77-AA39-5D1E58AA3625}"/>
+              </a:ext>
+            </a:extLst>
+          </p:cNvPr>
+          <p:cNvPicPr>
+            <a:picLocks noChangeAspect="1"/>
+          </p:cNvPicPr>
+          <p:nvPr/>
+        </p:nvPicPr>
+        <p:blipFill>
+          <a:blip r:embed="rId3"/>
+          <a:stretch>
+            <a:fillRect/>
+          </a:stretch>
+        </p:blipFill>
+        <p:spPr>
+          <a:xfrm>
+            <a:off x="5175230" y="3691281"/>
+            <a:ext cx="6825916" cy="1709489"/>
+          </a:xfrm>
+          <a:prstGeom prst="rect">
+            <a:avLst/>
+          </a:prstGeom>
+        </p:spPr>
+      </p:pic>
+      <p:sp>
+        <p:nvSpPr>
+          <p:cNvPr id="11" name="CaixaDeTexto 10">
+            <a:extLst>
+              <a:ext uri="{FF2B5EF4-FFF2-40B4-BE49-F238E27FC236}">
+                <a16:creationId xmlns:a16="http://schemas.microsoft.com/office/drawing/2014/main" id="{4B20583E-B890-F281-3E24-0443B060D6EB}"/>
+              </a:ext>
+            </a:extLst>
+          </p:cNvPr>
+          <p:cNvSpPr txBox="1"/>
+          <p:nvPr/>
+        </p:nvSpPr>
+        <p:spPr>
+          <a:xfrm>
+            <a:off x="5175231" y="3396733"/>
+            <a:ext cx="6825915" cy="369332"/>
+          </a:xfrm>
+          <a:prstGeom prst="rect">
+            <a:avLst/>
+          </a:prstGeom>
+          <a:noFill/>
+        </p:spPr>
+        <p:txBody>
+          <a:bodyPr wrap="square" rtlCol="0">
+            <a:spAutoFit/>
+          </a:bodyPr>
+          <a:lstStyle/>
+          <a:p>
+            <a:pPr algn="ctr"/>
+            <a:r>
+              <a:rPr lang="pt-BR" dirty="0"/>
+              <a:t>Exemplos:</a:t>
+            </a:r>
+          </a:p>
+        </p:txBody>
+      </p:sp>
+    </p:spTree>
+    <p:extLst>
+      <p:ext uri="{BB962C8B-B14F-4D97-AF65-F5344CB8AC3E}">
+        <p14:creationId xmlns:p14="http://schemas.microsoft.com/office/powerpoint/2010/main" val="1660373033"/>
+      </p:ext>
+    </p:extLst>
+  </p:cSld>
+  <p:clrMapOvr>
+    <a:masterClrMapping/>
+  </p:clrMapOvr>
+</p:sld>
+</file>
+
+<file path=ppt/slides/slide39.xml><?xml version="1.0" encoding="utf-8"?>
+<p:sld xmlns:a="http://schemas.openxmlformats.org/drawingml/2006/main" xmlns:r="http://schemas.openxmlformats.org/officeDocument/2006/relationships" xmlns:p="http://schemas.openxmlformats.org/presentationml/2006/main">
+  <p:cSld>
+    <p:spTree>
+      <p:nvGrpSpPr>
+        <p:cNvPr id="1" name="">
+          <a:extLst>
+            <a:ext uri="{FF2B5EF4-FFF2-40B4-BE49-F238E27FC236}">
+              <a16:creationId xmlns:a16="http://schemas.microsoft.com/office/drawing/2014/main" id="{CF34A5F4-CEBA-9290-32C3-26A9D48AF5A0}"/>
+            </a:ext>
+          </a:extLst>
+        </p:cNvPr>
+        <p:cNvGrpSpPr/>
+        <p:nvPr/>
+      </p:nvGrpSpPr>
+      <p:grpSpPr>
+        <a:xfrm>
+          <a:off x="0" y="0"/>
+          <a:ext cx="0" cy="0"/>
+          <a:chOff x="0" y="0"/>
+          <a:chExt cx="0" cy="0"/>
+        </a:xfrm>
+      </p:grpSpPr>
+      <p:sp>
+        <p:nvSpPr>
+          <p:cNvPr id="5" name="Retângulo 4">
+            <a:extLst>
+              <a:ext uri="{FF2B5EF4-FFF2-40B4-BE49-F238E27FC236}">
+                <a16:creationId xmlns:a16="http://schemas.microsoft.com/office/drawing/2014/main" id="{016FC4CB-4375-E203-508B-2130FF2610A6}"/>
+              </a:ext>
+            </a:extLst>
+          </p:cNvPr>
+          <p:cNvSpPr/>
+          <p:nvPr/>
+        </p:nvSpPr>
+        <p:spPr>
+          <a:xfrm>
+            <a:off x="0" y="-2"/>
+            <a:ext cx="12192000" cy="1325563"/>
+          </a:xfrm>
+          <a:prstGeom prst="rect">
+            <a:avLst/>
+          </a:prstGeom>
+          <a:solidFill>
+            <a:srgbClr val="418AB3"/>
+          </a:solidFill>
+          <a:ln>
+            <a:solidFill>
+              <a:srgbClr val="418AB3"/>
+            </a:solidFill>
+          </a:ln>
+        </p:spPr>
+        <p:style>
+          <a:lnRef idx="2">
+            <a:schemeClr val="accent1">
+              <a:shade val="15000"/>
+            </a:schemeClr>
+          </a:lnRef>
+          <a:fillRef idx="1">
+            <a:schemeClr val="accent1"/>
+          </a:fillRef>
+          <a:effectRef idx="0">
+            <a:schemeClr val="accent1"/>
+          </a:effectRef>
+          <a:fontRef idx="minor">
+            <a:schemeClr val="lt1"/>
+          </a:fontRef>
+        </p:style>
+        <p:txBody>
+          <a:bodyPr rtlCol="0" anchor="ctr"/>
+          <a:lstStyle/>
+          <a:p>
+            <a:pPr algn="ctr"/>
+            <a:endParaRPr lang="pt-BR" dirty="0"/>
+          </a:p>
+        </p:txBody>
+      </p:sp>
+      <p:sp>
+        <p:nvSpPr>
+          <p:cNvPr id="2" name="Título 1">
+            <a:extLst>
+              <a:ext uri="{FF2B5EF4-FFF2-40B4-BE49-F238E27FC236}">
+                <a16:creationId xmlns:a16="http://schemas.microsoft.com/office/drawing/2014/main" id="{C6FD98CE-BD7F-3841-4F6F-7DA2F45A7A40}"/>
+              </a:ext>
+            </a:extLst>
+          </p:cNvPr>
+          <p:cNvSpPr>
+            <a:spLocks noGrp="1"/>
+          </p:cNvSpPr>
+          <p:nvPr>
+            <p:ph type="title"/>
+          </p:nvPr>
+        </p:nvSpPr>
+        <p:spPr>
+          <a:xfrm>
+            <a:off x="0" y="-1"/>
+            <a:ext cx="12192000" cy="1325563"/>
+          </a:xfrm>
+        </p:spPr>
+        <p:txBody>
+          <a:bodyPr/>
+          <a:lstStyle/>
+          <a:p>
+            <a:pPr algn="ctr"/>
+            <a:r>
+              <a:rPr lang="pt-BR" dirty="0">
+                <a:solidFill>
+                  <a:schemeClr val="bg1"/>
+                </a:solidFill>
+              </a:rPr>
+              <a:t>Conversão de Tipos</a:t>
+            </a:r>
+          </a:p>
+        </p:txBody>
+      </p:sp>
+      <p:sp>
+        <p:nvSpPr>
+          <p:cNvPr id="12" name="AutoShape 6" descr="Lógica Proposicional x Lógica de Argumento ⋆ Colaborae">
+            <a:extLst>
+              <a:ext uri="{FF2B5EF4-FFF2-40B4-BE49-F238E27FC236}">
+                <a16:creationId xmlns:a16="http://schemas.microsoft.com/office/drawing/2014/main" id="{09851253-B82B-0176-2AF9-0CC3BFA75FDE}"/>
+              </a:ext>
+            </a:extLst>
+          </p:cNvPr>
+          <p:cNvSpPr>
+            <a:spLocks noChangeAspect="1" noChangeArrowheads="1"/>
+          </p:cNvSpPr>
+          <p:nvPr/>
+        </p:nvSpPr>
+        <p:spPr bwMode="auto">
+          <a:xfrm>
+            <a:off x="5943600" y="-1707776"/>
+            <a:ext cx="5289176" cy="5289176"/>
+          </a:xfrm>
+          <a:prstGeom prst="rect">
+            <a:avLst/>
+          </a:prstGeom>
+          <a:noFill/>
+          <a:extLst>
+            <a:ext uri="{909E8E84-426E-40DD-AFC4-6F175D3DCCD1}">
+              <a14:hiddenFill xmlns:a14="http://schemas.microsoft.com/office/drawing/2010/main">
+                <a:solidFill>
+                  <a:srgbClr val="FFFFFF"/>
+                </a:solidFill>
+              </a14:hiddenFill>
+            </a:ext>
+          </a:extLst>
+        </p:spPr>
+        <p:txBody>
+          <a:bodyPr vert="horz" wrap="square" lIns="91440" tIns="45720" rIns="91440" bIns="45720" numCol="1" anchor="t" anchorCtr="0" compatLnSpc="1">
+            <a:prstTxWarp prst="textNoShape">
+              <a:avLst/>
+            </a:prstTxWarp>
+          </a:bodyPr>
+          <a:lstStyle/>
+          <a:p>
+            <a:endParaRPr lang="pt-BR"/>
+          </a:p>
+        </p:txBody>
+      </p:sp>
+      <mc:AlternateContent xmlns:mc="http://schemas.openxmlformats.org/markup-compatibility/2006">
+        <mc:Choice xmlns:a14="http://schemas.microsoft.com/office/drawing/2010/main" Requires="a14">
+          <p:sp>
+            <p:nvSpPr>
+              <p:cNvPr id="6" name="Espaço Reservado para Conteúdo 5">
+                <a:extLst>
+                  <a:ext uri="{FF2B5EF4-FFF2-40B4-BE49-F238E27FC236}">
+                    <a16:creationId xmlns:a16="http://schemas.microsoft.com/office/drawing/2014/main" id="{AE5D1ED6-03F0-830E-1A45-131AEA811139}"/>
+                  </a:ext>
+                </a:extLst>
+              </p:cNvPr>
+              <p:cNvSpPr>
+                <a:spLocks noGrp="1"/>
+              </p:cNvSpPr>
+              <p:nvPr>
+                <p:ph idx="1"/>
+              </p:nvPr>
+            </p:nvSpPr>
+            <p:spPr>
+              <a:xfrm>
+                <a:off x="1746584" y="1552074"/>
+                <a:ext cx="8698832" cy="5173578"/>
+              </a:xfrm>
+            </p:spPr>
+            <p:txBody>
+              <a:bodyPr>
+                <a:normAutofit/>
+              </a:bodyPr>
+              <a:lstStyle/>
+              <a:p>
+                <a:r>
+                  <a:rPr lang="pt-BR" sz="2400" dirty="0"/>
+                  <a:t>A operação de </a:t>
+                </a:r>
+                <a:r>
+                  <a:rPr lang="pt-BR" sz="2400" i="1" dirty="0"/>
+                  <a:t>casting </a:t>
+                </a:r>
+                <a:r>
+                  <a:rPr lang="pt-BR" sz="2400" dirty="0"/>
+                  <a:t>forçar o computador a mudar o tipo de dado de uma variável ou valor.</a:t>
+                </a:r>
+              </a:p>
+              <a:p>
+                <a:pPr marL="0" indent="0">
+                  <a:buNone/>
+                </a:pPr>
+                <a:endParaRPr lang="pt-BR" sz="2400" dirty="0"/>
+              </a:p>
+              <a:p>
+                <a:r>
+                  <a:rPr lang="pt-BR" sz="2400" dirty="0"/>
+                  <a:t>A operação é feita colocando o novo tipo entre parênteses </a:t>
+                </a:r>
+                <a:r>
+                  <a:rPr lang="pt-BR" b="1" i="1" u="sng" dirty="0"/>
+                  <a:t>(</a:t>
+                </a:r>
+                <a:r>
+                  <a:rPr lang="pt-BR" sz="2400" b="1" i="1" u="sng" dirty="0"/>
+                  <a:t>tipo</a:t>
+                </a:r>
+                <a:r>
+                  <a:rPr lang="pt-BR" b="1" i="1" u="sng" dirty="0"/>
+                  <a:t>)</a:t>
+                </a:r>
+                <a:r>
+                  <a:rPr lang="pt-BR" sz="2400" b="1" i="1" u="sng" dirty="0"/>
+                  <a:t> </a:t>
+                </a:r>
+                <a:r>
+                  <a:rPr lang="pt-BR" sz="2400" dirty="0"/>
+                  <a:t>logo antes do valor, por exemplo:</a:t>
+                </a:r>
+              </a:p>
+              <a:p>
+                <a:endParaRPr lang="pt-BR" sz="2400" dirty="0"/>
+              </a:p>
+              <a:p>
+                <a:pPr lvl="1">
+                  <a:buFont typeface="Courier New" panose="02070309020205020404" pitchFamily="49" charset="0"/>
+                  <a:buChar char="o"/>
+                </a:pPr>
+                <a14:m>
+                  <m:oMath xmlns:m="http://schemas.openxmlformats.org/officeDocument/2006/math">
+                    <m:r>
+                      <a:rPr lang="pt-BR" sz="2000" b="0" i="1" smtClean="0">
+                        <a:latin typeface="Cambria Math" panose="02040503050406030204" pitchFamily="18" charset="0"/>
+                      </a:rPr>
+                      <m:t>𝑖</m:t>
+                    </m:r>
+                    <m:r>
+                      <a:rPr lang="pt-BR" sz="2000" i="1">
+                        <a:latin typeface="Cambria Math" panose="02040503050406030204" pitchFamily="18" charset="0"/>
+                      </a:rPr>
+                      <m:t>𝑛𝑡</m:t>
+                    </m:r>
+                    <m:r>
+                      <a:rPr lang="pt-BR" sz="2000" i="1">
+                        <a:latin typeface="Cambria Math" panose="02040503050406030204" pitchFamily="18" charset="0"/>
+                      </a:rPr>
+                      <m:t> </m:t>
+                    </m:r>
+                    <m:r>
+                      <a:rPr lang="pt-BR" sz="2000" i="1">
+                        <a:latin typeface="Cambria Math" panose="02040503050406030204" pitchFamily="18" charset="0"/>
+                      </a:rPr>
+                      <m:t>𝑎</m:t>
+                    </m:r>
+                    <m:r>
+                      <a:rPr lang="pt-BR" sz="2000" i="1">
+                        <a:latin typeface="Cambria Math" panose="02040503050406030204" pitchFamily="18" charset="0"/>
+                      </a:rPr>
+                      <m:t> = 5;</m:t>
+                    </m:r>
+                  </m:oMath>
+                </a14:m>
+                <a:endParaRPr lang="pt-BR" sz="2000" b="0" i="1" dirty="0">
+                  <a:latin typeface="Cambria Math" panose="02040503050406030204" pitchFamily="18" charset="0"/>
+                </a:endParaRPr>
+              </a:p>
+              <a:p>
+                <a:pPr lvl="1">
+                  <a:buFont typeface="Courier New" panose="02070309020205020404" pitchFamily="49" charset="0"/>
+                  <a:buChar char="o"/>
+                </a:pPr>
+                <a14:m>
+                  <m:oMath xmlns:m="http://schemas.openxmlformats.org/officeDocument/2006/math">
+                    <m:r>
+                      <a:rPr lang="pt-BR" sz="2000" b="0" i="1" smtClean="0">
+                        <a:latin typeface="Cambria Math" panose="02040503050406030204" pitchFamily="18" charset="0"/>
+                      </a:rPr>
+                      <m:t>𝑖𝑛𝑡</m:t>
+                    </m:r>
+                    <m:r>
+                      <a:rPr lang="pt-BR" sz="2000" b="0" i="1" smtClean="0">
+                        <a:latin typeface="Cambria Math" panose="02040503050406030204" pitchFamily="18" charset="0"/>
+                      </a:rPr>
+                      <m:t> </m:t>
+                    </m:r>
+                    <m:r>
+                      <a:rPr lang="pt-BR" sz="2000" i="1">
+                        <a:latin typeface="Cambria Math" panose="02040503050406030204" pitchFamily="18" charset="0"/>
+                      </a:rPr>
+                      <m:t>𝑏</m:t>
+                    </m:r>
+                    <m:r>
+                      <a:rPr lang="pt-BR" sz="2000" i="1">
+                        <a:latin typeface="Cambria Math" panose="02040503050406030204" pitchFamily="18" charset="0"/>
+                      </a:rPr>
+                      <m:t> = 2;</m:t>
+                    </m:r>
+                  </m:oMath>
+                </a14:m>
+                <a:endParaRPr lang="pt-BR" sz="2000" i="1" dirty="0">
+                  <a:latin typeface="Cambria Math" panose="02040503050406030204" pitchFamily="18" charset="0"/>
+                </a:endParaRPr>
+              </a:p>
+              <a:p>
+                <a:pPr lvl="1">
+                  <a:buFont typeface="Courier New" panose="02070309020205020404" pitchFamily="49" charset="0"/>
+                  <a:buChar char="o"/>
+                </a:pPr>
+                <a14:m>
+                  <m:oMath xmlns:m="http://schemas.openxmlformats.org/officeDocument/2006/math">
+                    <m:r>
+                      <a:rPr lang="pt-BR" sz="2000" i="1">
+                        <a:latin typeface="Cambria Math" panose="02040503050406030204" pitchFamily="18" charset="0"/>
+                      </a:rPr>
+                      <m:t>𝑓𝑙𝑜𝑎𝑡</m:t>
+                    </m:r>
+                    <m:r>
+                      <a:rPr lang="pt-BR" sz="2000" i="1">
+                        <a:latin typeface="Cambria Math" panose="02040503050406030204" pitchFamily="18" charset="0"/>
+                      </a:rPr>
+                      <m:t> </m:t>
+                    </m:r>
+                    <m:r>
+                      <a:rPr lang="pt-BR" sz="2000" i="1">
+                        <a:latin typeface="Cambria Math" panose="02040503050406030204" pitchFamily="18" charset="0"/>
+                      </a:rPr>
+                      <m:t>𝑟𝑒𝑠𝑢𝑙𝑡𝑎𝑑𝑜</m:t>
+                    </m:r>
+                    <m:r>
+                      <a:rPr lang="pt-BR" sz="2000" i="1">
+                        <a:latin typeface="Cambria Math" panose="02040503050406030204" pitchFamily="18" charset="0"/>
+                      </a:rPr>
+                      <m:t> = (</m:t>
+                    </m:r>
+                    <m:r>
+                      <a:rPr lang="pt-BR" sz="2000" i="1">
+                        <a:latin typeface="Cambria Math" panose="02040503050406030204" pitchFamily="18" charset="0"/>
+                      </a:rPr>
+                      <m:t>𝑓𝑙𝑜𝑎𝑡</m:t>
+                    </m:r>
+                    <m:r>
+                      <a:rPr lang="pt-BR" sz="2000" i="1">
+                        <a:latin typeface="Cambria Math" panose="02040503050406030204" pitchFamily="18" charset="0"/>
+                      </a:rPr>
+                      <m:t>) </m:t>
+                    </m:r>
+                    <m:r>
+                      <a:rPr lang="pt-BR" sz="2000" i="1">
+                        <a:latin typeface="Cambria Math" panose="02040503050406030204" pitchFamily="18" charset="0"/>
+                      </a:rPr>
+                      <m:t>𝑎</m:t>
+                    </m:r>
+                    <m:r>
+                      <a:rPr lang="pt-BR" sz="2000" i="1">
+                        <a:latin typeface="Cambria Math" panose="02040503050406030204" pitchFamily="18" charset="0"/>
+                      </a:rPr>
+                      <m:t> / </m:t>
+                    </m:r>
+                    <m:r>
+                      <a:rPr lang="pt-BR" sz="2000" i="1">
+                        <a:latin typeface="Cambria Math" panose="02040503050406030204" pitchFamily="18" charset="0"/>
+                      </a:rPr>
+                      <m:t>𝑏</m:t>
+                    </m:r>
+                    <m:r>
+                      <a:rPr lang="pt-BR" sz="2000" i="1">
+                        <a:latin typeface="Cambria Math" panose="02040503050406030204" pitchFamily="18" charset="0"/>
+                      </a:rPr>
+                      <m:t>;</m:t>
+                    </m:r>
+                  </m:oMath>
+                </a14:m>
+                <a:endParaRPr lang="pt-BR" sz="2000" dirty="0"/>
+              </a:p>
+              <a:p>
+                <a:pPr lvl="1">
+                  <a:buFont typeface="Courier New" panose="02070309020205020404" pitchFamily="49" charset="0"/>
+                  <a:buChar char="o"/>
+                </a:pPr>
+                <a:r>
+                  <a:rPr lang="pt-BR" sz="2000" dirty="0"/>
+                  <a:t>“</a:t>
+                </a:r>
+                <a:r>
+                  <a:rPr lang="pt-BR" sz="2000" dirty="0">
+                    <a:solidFill>
+                      <a:srgbClr val="FF0000"/>
+                    </a:solidFill>
+                  </a:rPr>
+                  <a:t>resultado” armazena o valor 2.5, ao invés de 2</a:t>
+                </a:r>
+              </a:p>
+              <a:p>
+                <a:pPr lvl="1">
+                  <a:buFont typeface="Courier New" panose="02070309020205020404" pitchFamily="49" charset="0"/>
+                  <a:buChar char="o"/>
+                </a:pPr>
+                <a:endParaRPr lang="pt-BR" sz="2000" dirty="0"/>
+              </a:p>
+              <a:p>
+                <a:r>
+                  <a:rPr lang="pt-BR" sz="2400" b="1" dirty="0"/>
+                  <a:t>Observação: </a:t>
+                </a:r>
+                <a:r>
+                  <a:rPr lang="pt-BR" sz="2400" dirty="0"/>
+                  <a:t>A conversão  de </a:t>
+                </a:r>
+                <a:r>
+                  <a:rPr lang="pt-BR" sz="2400" b="1" i="1" dirty="0" err="1"/>
+                  <a:t>float</a:t>
+                </a:r>
+                <a:r>
+                  <a:rPr lang="pt-BR" sz="2400" dirty="0"/>
+                  <a:t> para </a:t>
+                </a:r>
+                <a:r>
+                  <a:rPr lang="pt-BR" sz="2400" b="1" i="1" dirty="0" err="1"/>
+                  <a:t>int</a:t>
+                </a:r>
+                <a:r>
+                  <a:rPr lang="pt-BR" sz="2400" dirty="0"/>
+                  <a:t> resulta na perda de todas as casas decimais.</a:t>
+                </a:r>
+              </a:p>
+              <a:p>
+                <a:endParaRPr lang="pt-BR" sz="2400" b="1" i="1" u="sng" dirty="0"/>
+              </a:p>
+              <a:p>
+                <a:pPr marL="457200" lvl="1" indent="0">
+                  <a:buNone/>
+                </a:pPr>
+                <a:endParaRPr lang="pt-BR" sz="2100" b="1" dirty="0"/>
+              </a:p>
+            </p:txBody>
+          </p:sp>
+        </mc:Choice>
+        <mc:Fallback>
+          <p:sp>
+            <p:nvSpPr>
+              <p:cNvPr id="6" name="Espaço Reservado para Conteúdo 5">
+                <a:extLst>
+                  <a:ext uri="{FF2B5EF4-FFF2-40B4-BE49-F238E27FC236}">
+                    <a16:creationId xmlns:a16="http://schemas.microsoft.com/office/drawing/2014/main" id="{AE5D1ED6-03F0-830E-1A45-131AEA811139}"/>
+                  </a:ext>
+                </a:extLst>
+              </p:cNvPr>
+              <p:cNvSpPr>
+                <a:spLocks noGrp="1" noRot="1" noChangeAspect="1" noMove="1" noResize="1" noEditPoints="1" noAdjustHandles="1" noChangeArrowheads="1" noChangeShapeType="1" noTextEdit="1"/>
+              </p:cNvSpPr>
+              <p:nvPr>
+                <p:ph idx="1"/>
+              </p:nvPr>
+            </p:nvSpPr>
+            <p:spPr>
+              <a:xfrm>
+                <a:off x="1746584" y="1552074"/>
+                <a:ext cx="8698832" cy="5173578"/>
+              </a:xfrm>
+              <a:blipFill>
+                <a:blip r:embed="rId3"/>
+                <a:stretch>
+                  <a:fillRect l="-982" t="-1651"/>
+                </a:stretch>
+              </a:blipFill>
+            </p:spPr>
+            <p:txBody>
+              <a:bodyPr/>
+              <a:lstStyle/>
+              <a:p>
+                <a:r>
+                  <a:rPr lang="pt-BR">
+                    <a:noFill/>
+                  </a:rPr>
+                  <a:t> </a:t>
+                </a:r>
+              </a:p>
+            </p:txBody>
+          </p:sp>
+        </mc:Fallback>
+      </mc:AlternateContent>
+    </p:spTree>
+    <p:extLst>
+      <p:ext uri="{BB962C8B-B14F-4D97-AF65-F5344CB8AC3E}">
+        <p14:creationId xmlns:p14="http://schemas.microsoft.com/office/powerpoint/2010/main" val="349085640"/>
+      </p:ext>
+    </p:extLst>
+  </p:cSld>
+  <p:clrMapOvr>
+    <a:masterClrMapping/>
+  </p:clrMapOvr>
+</p:sld>
+</file>
+
+<file path=ppt/slides/slide4.xml><?xml version="1.0" encoding="utf-8"?>
+<p:sld xmlns:a="http://schemas.openxmlformats.org/drawingml/2006/main" xmlns:r="http://schemas.openxmlformats.org/officeDocument/2006/relationships" xmlns:p="http://schemas.openxmlformats.org/presentationml/2006/main">
+  <p:cSld>
+    <p:spTree>
+      <p:nvGrpSpPr>
+        <p:cNvPr id="1" name="">
+          <a:extLst>
+            <a:ext uri="{FF2B5EF4-FFF2-40B4-BE49-F238E27FC236}">
+              <a16:creationId xmlns:a16="http://schemas.microsoft.com/office/drawing/2014/main" id="{3E98EFC3-284D-D3E8-E50A-9E8782F149E5}"/>
+            </a:ext>
+          </a:extLst>
+        </p:cNvPr>
+        <p:cNvGrpSpPr/>
+        <p:nvPr/>
+      </p:nvGrpSpPr>
+      <p:grpSpPr>
+        <a:xfrm>
+          <a:off x="0" y="0"/>
+          <a:ext cx="0" cy="0"/>
+          <a:chOff x="0" y="0"/>
+          <a:chExt cx="0" cy="0"/>
+        </a:xfrm>
+      </p:grpSpPr>
+      <p:sp>
+        <p:nvSpPr>
+          <p:cNvPr id="5" name="Retângulo 4">
+            <a:extLst>
+              <a:ext uri="{FF2B5EF4-FFF2-40B4-BE49-F238E27FC236}">
+                <a16:creationId xmlns:a16="http://schemas.microsoft.com/office/drawing/2014/main" id="{B1CC91A5-617B-F614-3886-EF59D2171B4E}"/>
+              </a:ext>
+            </a:extLst>
+          </p:cNvPr>
+          <p:cNvSpPr/>
+          <p:nvPr/>
+        </p:nvSpPr>
+        <p:spPr>
+          <a:xfrm>
+            <a:off x="0" y="-2"/>
+            <a:ext cx="12192000" cy="1325563"/>
+          </a:xfrm>
+          <a:prstGeom prst="rect">
+            <a:avLst/>
+          </a:prstGeom>
+          <a:solidFill>
+            <a:srgbClr val="418AB3"/>
+          </a:solidFill>
+          <a:ln>
+            <a:solidFill>
+              <a:srgbClr val="418AB3"/>
+            </a:solidFill>
+          </a:ln>
+        </p:spPr>
+        <p:style>
+          <a:lnRef idx="2">
+            <a:schemeClr val="accent1">
+              <a:shade val="15000"/>
+            </a:schemeClr>
+          </a:lnRef>
+          <a:fillRef idx="1">
+            <a:schemeClr val="accent1"/>
+          </a:fillRef>
+          <a:effectRef idx="0">
+            <a:schemeClr val="accent1"/>
+          </a:effectRef>
+          <a:fontRef idx="minor">
+            <a:schemeClr val="lt1"/>
+          </a:fontRef>
+        </p:style>
+        <p:txBody>
+          <a:bodyPr rtlCol="0" anchor="ctr"/>
+          <a:lstStyle/>
+          <a:p>
+            <a:pPr algn="ctr"/>
+            <a:endParaRPr lang="pt-BR" dirty="0"/>
+          </a:p>
+        </p:txBody>
+      </p:sp>
+      <p:sp>
+        <p:nvSpPr>
+          <p:cNvPr id="2" name="Título 1">
+            <a:extLst>
+              <a:ext uri="{FF2B5EF4-FFF2-40B4-BE49-F238E27FC236}">
+                <a16:creationId xmlns:a16="http://schemas.microsoft.com/office/drawing/2014/main" id="{D778D71A-5EF8-AADA-8ACC-9C2D89EE5258}"/>
+              </a:ext>
+            </a:extLst>
+          </p:cNvPr>
+          <p:cNvSpPr>
+            <a:spLocks noGrp="1"/>
+          </p:cNvSpPr>
+          <p:nvPr>
+            <p:ph type="title"/>
+          </p:nvPr>
+        </p:nvSpPr>
+        <p:spPr>
+          <a:xfrm>
+            <a:off x="0" y="-1"/>
+            <a:ext cx="12192000" cy="1325563"/>
+          </a:xfrm>
+        </p:spPr>
+        <p:txBody>
+          <a:bodyPr/>
+          <a:lstStyle/>
+          <a:p>
+            <a:pPr algn="ctr"/>
+            <a:r>
+              <a:rPr lang="pt-BR" dirty="0">
+                <a:solidFill>
+                  <a:schemeClr val="bg1"/>
+                </a:solidFill>
+              </a:rPr>
+              <a:t>Bibliografia</a:t>
+            </a:r>
+          </a:p>
+        </p:txBody>
+      </p:sp>
+      <p:sp>
+        <p:nvSpPr>
+          <p:cNvPr id="12" name="AutoShape 6" descr="Lógica Proposicional x Lógica de Argumento ⋆ Colaborae">
+            <a:extLst>
+              <a:ext uri="{FF2B5EF4-FFF2-40B4-BE49-F238E27FC236}">
+                <a16:creationId xmlns:a16="http://schemas.microsoft.com/office/drawing/2014/main" id="{ED9276FC-2835-8FCA-9E06-6FEFA248BD66}"/>
+              </a:ext>
+            </a:extLst>
+          </p:cNvPr>
+          <p:cNvSpPr>
+            <a:spLocks noChangeAspect="1" noChangeArrowheads="1"/>
+          </p:cNvSpPr>
+          <p:nvPr/>
+        </p:nvSpPr>
+        <p:spPr bwMode="auto">
+          <a:xfrm>
+            <a:off x="5943600" y="-1707776"/>
+            <a:ext cx="5289176" cy="5289176"/>
+          </a:xfrm>
+          <a:prstGeom prst="rect">
+            <a:avLst/>
+          </a:prstGeom>
+          <a:noFill/>
+          <a:extLst>
+            <a:ext uri="{909E8E84-426E-40DD-AFC4-6F175D3DCCD1}">
+              <a14:hiddenFill xmlns:a14="http://schemas.microsoft.com/office/drawing/2010/main">
+                <a:solidFill>
+                  <a:srgbClr val="FFFFFF"/>
+                </a:solidFill>
+              </a14:hiddenFill>
+            </a:ext>
+          </a:extLst>
+        </p:spPr>
+        <p:txBody>
+          <a:bodyPr vert="horz" wrap="square" lIns="91440" tIns="45720" rIns="91440" bIns="45720" numCol="1" anchor="t" anchorCtr="0" compatLnSpc="1">
+            <a:prstTxWarp prst="textNoShape">
+              <a:avLst/>
+            </a:prstTxWarp>
+          </a:bodyPr>
+          <a:lstStyle/>
+          <a:p>
+            <a:endParaRPr lang="pt-BR"/>
+          </a:p>
+        </p:txBody>
+      </p:sp>
+      <p:sp>
+        <p:nvSpPr>
+          <p:cNvPr id="6" name="Espaço Reservado para Conteúdo 5">
+            <a:extLst>
+              <a:ext uri="{FF2B5EF4-FFF2-40B4-BE49-F238E27FC236}">
+                <a16:creationId xmlns:a16="http://schemas.microsoft.com/office/drawing/2014/main" id="{E0EE607F-D9F4-7951-D428-ABA18E81EE79}"/>
+              </a:ext>
+            </a:extLst>
+          </p:cNvPr>
+          <p:cNvSpPr>
+            <a:spLocks noGrp="1"/>
+          </p:cNvSpPr>
+          <p:nvPr>
+            <p:ph idx="1"/>
+          </p:nvPr>
+        </p:nvSpPr>
+        <p:spPr>
+          <a:xfrm>
+            <a:off x="1486540" y="1804575"/>
+            <a:ext cx="8670280" cy="4746632"/>
+          </a:xfrm>
+        </p:spPr>
+        <p:txBody>
+          <a:bodyPr/>
+          <a:lstStyle/>
+          <a:p>
+            <a:r>
               <a:rPr lang="pt-BR" sz="2400" b="1" dirty="0"/>
               <a:t>Básica</a:t>
             </a:r>
@@ -21971,6 +27746,1528 @@
     <p:extLst>
       <p:ext uri="{BB962C8B-B14F-4D97-AF65-F5344CB8AC3E}">
         <p14:creationId xmlns:p14="http://schemas.microsoft.com/office/powerpoint/2010/main" val="1994978664"/>
+      </p:ext>
+    </p:extLst>
+  </p:cSld>
+  <p:clrMapOvr>
+    <a:masterClrMapping/>
+  </p:clrMapOvr>
+</p:sld>
+</file>
+
+<file path=ppt/slides/slide40.xml><?xml version="1.0" encoding="utf-8"?>
+<p:sld xmlns:a="http://schemas.openxmlformats.org/drawingml/2006/main" xmlns:r="http://schemas.openxmlformats.org/officeDocument/2006/relationships" xmlns:p="http://schemas.openxmlformats.org/presentationml/2006/main">
+  <p:cSld>
+    <p:spTree>
+      <p:nvGrpSpPr>
+        <p:cNvPr id="1" name="">
+          <a:extLst>
+            <a:ext uri="{FF2B5EF4-FFF2-40B4-BE49-F238E27FC236}">
+              <a16:creationId xmlns:a16="http://schemas.microsoft.com/office/drawing/2014/main" id="{F1444B57-9809-B8EF-0C7F-AE6472120B7F}"/>
+            </a:ext>
+          </a:extLst>
+        </p:cNvPr>
+        <p:cNvGrpSpPr/>
+        <p:nvPr/>
+      </p:nvGrpSpPr>
+      <p:grpSpPr>
+        <a:xfrm>
+          <a:off x="0" y="0"/>
+          <a:ext cx="0" cy="0"/>
+          <a:chOff x="0" y="0"/>
+          <a:chExt cx="0" cy="0"/>
+        </a:xfrm>
+      </p:grpSpPr>
+      <p:sp>
+        <p:nvSpPr>
+          <p:cNvPr id="5" name="Retângulo 4">
+            <a:extLst>
+              <a:ext uri="{FF2B5EF4-FFF2-40B4-BE49-F238E27FC236}">
+                <a16:creationId xmlns:a16="http://schemas.microsoft.com/office/drawing/2014/main" id="{E6077B58-1486-08CA-BCC5-A2E484F1859C}"/>
+              </a:ext>
+            </a:extLst>
+          </p:cNvPr>
+          <p:cNvSpPr/>
+          <p:nvPr/>
+        </p:nvSpPr>
+        <p:spPr>
+          <a:xfrm>
+            <a:off x="0" y="-2"/>
+            <a:ext cx="12192000" cy="1325563"/>
+          </a:xfrm>
+          <a:prstGeom prst="rect">
+            <a:avLst/>
+          </a:prstGeom>
+          <a:solidFill>
+            <a:srgbClr val="418AB3"/>
+          </a:solidFill>
+          <a:ln>
+            <a:solidFill>
+              <a:srgbClr val="418AB3"/>
+            </a:solidFill>
+          </a:ln>
+        </p:spPr>
+        <p:style>
+          <a:lnRef idx="2">
+            <a:schemeClr val="accent1">
+              <a:shade val="15000"/>
+            </a:schemeClr>
+          </a:lnRef>
+          <a:fillRef idx="1">
+            <a:schemeClr val="accent1"/>
+          </a:fillRef>
+          <a:effectRef idx="0">
+            <a:schemeClr val="accent1"/>
+          </a:effectRef>
+          <a:fontRef idx="minor">
+            <a:schemeClr val="lt1"/>
+          </a:fontRef>
+        </p:style>
+        <p:txBody>
+          <a:bodyPr rtlCol="0" anchor="ctr"/>
+          <a:lstStyle/>
+          <a:p>
+            <a:pPr algn="ctr"/>
+            <a:endParaRPr lang="pt-BR" dirty="0"/>
+          </a:p>
+        </p:txBody>
+      </p:sp>
+      <p:sp>
+        <p:nvSpPr>
+          <p:cNvPr id="2" name="Título 1">
+            <a:extLst>
+              <a:ext uri="{FF2B5EF4-FFF2-40B4-BE49-F238E27FC236}">
+                <a16:creationId xmlns:a16="http://schemas.microsoft.com/office/drawing/2014/main" id="{A795C159-1A8A-6D6A-5F80-5E350E84088C}"/>
+              </a:ext>
+            </a:extLst>
+          </p:cNvPr>
+          <p:cNvSpPr>
+            <a:spLocks noGrp="1"/>
+          </p:cNvSpPr>
+          <p:nvPr>
+            <p:ph type="title"/>
+          </p:nvPr>
+        </p:nvSpPr>
+        <p:spPr>
+          <a:xfrm>
+            <a:off x="0" y="-1"/>
+            <a:ext cx="12192000" cy="1325563"/>
+          </a:xfrm>
+        </p:spPr>
+        <p:txBody>
+          <a:bodyPr/>
+          <a:lstStyle/>
+          <a:p>
+            <a:pPr algn="ctr"/>
+            <a:r>
+              <a:rPr lang="pt-BR" dirty="0">
+                <a:solidFill>
+                  <a:schemeClr val="bg1"/>
+                </a:solidFill>
+              </a:rPr>
+              <a:t>Conversão de Tipos</a:t>
+            </a:r>
+          </a:p>
+        </p:txBody>
+      </p:sp>
+      <p:sp>
+        <p:nvSpPr>
+          <p:cNvPr id="12" name="AutoShape 6" descr="Lógica Proposicional x Lógica de Argumento ⋆ Colaborae">
+            <a:extLst>
+              <a:ext uri="{FF2B5EF4-FFF2-40B4-BE49-F238E27FC236}">
+                <a16:creationId xmlns:a16="http://schemas.microsoft.com/office/drawing/2014/main" id="{495727F2-01D1-9623-4246-E33ECC52CC66}"/>
+              </a:ext>
+            </a:extLst>
+          </p:cNvPr>
+          <p:cNvSpPr>
+            <a:spLocks noChangeAspect="1" noChangeArrowheads="1"/>
+          </p:cNvSpPr>
+          <p:nvPr/>
+        </p:nvSpPr>
+        <p:spPr bwMode="auto">
+          <a:xfrm>
+            <a:off x="5943600" y="-1707776"/>
+            <a:ext cx="5289176" cy="5289176"/>
+          </a:xfrm>
+          <a:prstGeom prst="rect">
+            <a:avLst/>
+          </a:prstGeom>
+          <a:noFill/>
+          <a:extLst>
+            <a:ext uri="{909E8E84-426E-40DD-AFC4-6F175D3DCCD1}">
+              <a14:hiddenFill xmlns:a14="http://schemas.microsoft.com/office/drawing/2010/main">
+                <a:solidFill>
+                  <a:srgbClr val="FFFFFF"/>
+                </a:solidFill>
+              </a14:hiddenFill>
+            </a:ext>
+          </a:extLst>
+        </p:spPr>
+        <p:txBody>
+          <a:bodyPr vert="horz" wrap="square" lIns="91440" tIns="45720" rIns="91440" bIns="45720" numCol="1" anchor="t" anchorCtr="0" compatLnSpc="1">
+            <a:prstTxWarp prst="textNoShape">
+              <a:avLst/>
+            </a:prstTxWarp>
+          </a:bodyPr>
+          <a:lstStyle/>
+          <a:p>
+            <a:endParaRPr lang="pt-BR"/>
+          </a:p>
+        </p:txBody>
+      </p:sp>
+      <p:sp>
+        <p:nvSpPr>
+          <p:cNvPr id="6" name="Espaço Reservado para Conteúdo 5">
+            <a:extLst>
+              <a:ext uri="{FF2B5EF4-FFF2-40B4-BE49-F238E27FC236}">
+                <a16:creationId xmlns:a16="http://schemas.microsoft.com/office/drawing/2014/main" id="{48A7C7E3-4743-59FF-8FE8-886B0E6DAF13}"/>
+              </a:ext>
+            </a:extLst>
+          </p:cNvPr>
+          <p:cNvSpPr>
+            <a:spLocks noGrp="1"/>
+          </p:cNvSpPr>
+          <p:nvPr>
+            <p:ph idx="1"/>
+          </p:nvPr>
+        </p:nvSpPr>
+        <p:spPr>
+          <a:xfrm>
+            <a:off x="858001" y="1576135"/>
+            <a:ext cx="10475997" cy="5132231"/>
+          </a:xfrm>
+        </p:spPr>
+        <p:txBody>
+          <a:bodyPr>
+            <a:normAutofit/>
+          </a:bodyPr>
+          <a:lstStyle/>
+          <a:p>
+            <a:pPr marL="457200" indent="-457200">
+              <a:buFont typeface="+mj-lt"/>
+              <a:buAutoNum type="arabicPeriod"/>
+            </a:pPr>
+            <a:r>
+              <a:rPr lang="pt-BR" sz="2400" dirty="0"/>
+              <a:t>É possível fazer o casting entre os tipos primitivos, como:</a:t>
+            </a:r>
+          </a:p>
+          <a:p>
+            <a:pPr lvl="1">
+              <a:buFont typeface="Courier New" panose="02070309020205020404" pitchFamily="49" charset="0"/>
+              <a:buChar char="o"/>
+            </a:pPr>
+            <a:endParaRPr lang="pt-BR" sz="2000" dirty="0"/>
+          </a:p>
+          <a:p>
+            <a:pPr lvl="1">
+              <a:buFont typeface="Courier New" panose="02070309020205020404" pitchFamily="49" charset="0"/>
+              <a:buChar char="o"/>
+            </a:pPr>
+            <a:r>
+              <a:rPr lang="pt-BR" sz="2200" dirty="0"/>
+              <a:t>Entre Inteiros e Reais (vice-versa)</a:t>
+            </a:r>
+          </a:p>
+          <a:p>
+            <a:pPr lvl="1">
+              <a:buFont typeface="Courier New" panose="02070309020205020404" pitchFamily="49" charset="0"/>
+              <a:buChar char="o"/>
+            </a:pPr>
+            <a:r>
+              <a:rPr lang="pt-BR" sz="2200" dirty="0"/>
+              <a:t>Entre Inteiros de Tamanhos Diferentes (</a:t>
+            </a:r>
+            <a:r>
+              <a:rPr lang="pt-BR" sz="2200" b="1" i="1" dirty="0"/>
+              <a:t>short/</a:t>
+            </a:r>
+            <a:r>
+              <a:rPr lang="pt-BR" sz="2200" b="1" i="1" dirty="0" err="1"/>
+              <a:t>long</a:t>
+            </a:r>
+            <a:r>
+              <a:rPr lang="pt-BR" sz="2200" dirty="0"/>
+              <a:t>)</a:t>
+            </a:r>
+          </a:p>
+          <a:p>
+            <a:pPr lvl="1">
+              <a:buFont typeface="Courier New" panose="02070309020205020404" pitchFamily="49" charset="0"/>
+              <a:buChar char="o"/>
+            </a:pPr>
+            <a:r>
+              <a:rPr lang="pt-BR" sz="2200" dirty="0"/>
+              <a:t>Caracteres e Números (</a:t>
+            </a:r>
+            <a:r>
+              <a:rPr lang="pt-BR" sz="2200" b="1" i="1" dirty="0"/>
+              <a:t>char</a:t>
+            </a:r>
+            <a:r>
+              <a:rPr lang="pt-BR" sz="2200" dirty="0"/>
+              <a:t> pode passar para </a:t>
+            </a:r>
+            <a:r>
+              <a:rPr lang="pt-BR" sz="2200" b="1" i="1" dirty="0" err="1"/>
+              <a:t>int</a:t>
+            </a:r>
+            <a:r>
+              <a:rPr lang="pt-BR" sz="2200" dirty="0"/>
+              <a:t> usando o valor da tabela ASCII)</a:t>
+            </a:r>
+          </a:p>
+          <a:p>
+            <a:pPr marL="800100" lvl="1" indent="-342900">
+              <a:buFont typeface="+mj-lt"/>
+              <a:buAutoNum type="arabicPeriod"/>
+            </a:pPr>
+            <a:endParaRPr lang="pt-BR" sz="2200" dirty="0"/>
+          </a:p>
+          <a:p>
+            <a:pPr marL="342900" indent="-342900">
+              <a:buFont typeface="+mj-lt"/>
+              <a:buAutoNum type="arabicPeriod"/>
+            </a:pPr>
+            <a:r>
+              <a:rPr lang="pt-BR" sz="2600" dirty="0"/>
+              <a:t>Também é permitido fazer casting entre </a:t>
+            </a:r>
+            <a:r>
+              <a:rPr lang="pt-BR" sz="2400" dirty="0"/>
+              <a:t>Ponteiros como:</a:t>
+            </a:r>
+          </a:p>
+          <a:p>
+            <a:pPr lvl="1">
+              <a:buFont typeface="Courier New" panose="02070309020205020404" pitchFamily="49" charset="0"/>
+              <a:buChar char="o"/>
+            </a:pPr>
+            <a:endParaRPr lang="pt-BR" sz="2200" dirty="0"/>
+          </a:p>
+          <a:p>
+            <a:pPr lvl="1">
+              <a:buFont typeface="Courier New" panose="02070309020205020404" pitchFamily="49" charset="0"/>
+              <a:buChar char="o"/>
+            </a:pPr>
+            <a:r>
+              <a:rPr lang="pt-BR" sz="2200" i="1" dirty="0" err="1"/>
+              <a:t>int</a:t>
+            </a:r>
+            <a:r>
+              <a:rPr lang="pt-BR" sz="2200" i="1" dirty="0"/>
+              <a:t>*</a:t>
+            </a:r>
+            <a:r>
+              <a:rPr lang="pt-BR" sz="2200" dirty="0"/>
+              <a:t> para </a:t>
+            </a:r>
+            <a:r>
+              <a:rPr lang="pt-BR" sz="2200" i="1" dirty="0"/>
+              <a:t>char*</a:t>
+            </a:r>
+            <a:r>
+              <a:rPr lang="pt-BR" sz="2200" dirty="0"/>
+              <a:t>  (</a:t>
+            </a:r>
+            <a:r>
+              <a:rPr lang="pt-BR" sz="2200" dirty="0" err="1"/>
+              <a:t>exije</a:t>
+            </a:r>
+            <a:r>
+              <a:rPr lang="pt-BR" sz="2200" dirty="0"/>
+              <a:t> cuidado para evitar erros de acesso à memória)</a:t>
+            </a:r>
+          </a:p>
+          <a:p>
+            <a:pPr lvl="1">
+              <a:buFont typeface="Courier New" panose="02070309020205020404" pitchFamily="49" charset="0"/>
+              <a:buChar char="o"/>
+            </a:pPr>
+            <a:endParaRPr lang="pt-BR" sz="2200" dirty="0"/>
+          </a:p>
+          <a:p>
+            <a:pPr marL="514350" indent="-514350">
+              <a:buFont typeface="+mj-lt"/>
+              <a:buAutoNum type="arabicPeriod"/>
+            </a:pPr>
+            <a:r>
+              <a:rPr lang="pt-BR" sz="2600" dirty="0"/>
+              <a:t>Não é permitido o casting entre tipos primitivos e tipos complexos (como o </a:t>
+            </a:r>
+            <a:r>
+              <a:rPr lang="pt-BR" sz="2600" dirty="0" err="1"/>
+              <a:t>struct</a:t>
+            </a:r>
+            <a:r>
+              <a:rPr lang="pt-BR" sz="2600" dirty="0"/>
+              <a:t>), nem a conversão de </a:t>
+            </a:r>
+            <a:r>
+              <a:rPr lang="pt-BR" sz="2600" dirty="0" err="1"/>
+              <a:t>strings</a:t>
+            </a:r>
+            <a:r>
+              <a:rPr lang="pt-BR" sz="2600" dirty="0"/>
+              <a:t>  para valores numéricos </a:t>
+            </a:r>
+          </a:p>
+          <a:p>
+            <a:pPr marL="800100" lvl="1" indent="-342900">
+              <a:buFont typeface="+mj-lt"/>
+              <a:buAutoNum type="arabicPeriod"/>
+            </a:pPr>
+            <a:endParaRPr lang="pt-BR" sz="1700" b="1" dirty="0"/>
+          </a:p>
+        </p:txBody>
+      </p:sp>
+    </p:spTree>
+    <p:extLst>
+      <p:ext uri="{BB962C8B-B14F-4D97-AF65-F5344CB8AC3E}">
+        <p14:creationId xmlns:p14="http://schemas.microsoft.com/office/powerpoint/2010/main" val="3165639426"/>
+      </p:ext>
+    </p:extLst>
+  </p:cSld>
+  <p:clrMapOvr>
+    <a:masterClrMapping/>
+  </p:clrMapOvr>
+</p:sld>
+</file>
+
+<file path=ppt/slides/slide41.xml><?xml version="1.0" encoding="utf-8"?>
+<p:sld xmlns:a="http://schemas.openxmlformats.org/drawingml/2006/main" xmlns:r="http://schemas.openxmlformats.org/officeDocument/2006/relationships" xmlns:p="http://schemas.openxmlformats.org/presentationml/2006/main">
+  <p:cSld>
+    <p:spTree>
+      <p:nvGrpSpPr>
+        <p:cNvPr id="1" name="">
+          <a:extLst>
+            <a:ext uri="{FF2B5EF4-FFF2-40B4-BE49-F238E27FC236}">
+              <a16:creationId xmlns:a16="http://schemas.microsoft.com/office/drawing/2014/main" id="{2671E60E-ABD9-D32E-5264-751299B3A702}"/>
+            </a:ext>
+          </a:extLst>
+        </p:cNvPr>
+        <p:cNvGrpSpPr/>
+        <p:nvPr/>
+      </p:nvGrpSpPr>
+      <p:grpSpPr>
+        <a:xfrm>
+          <a:off x="0" y="0"/>
+          <a:ext cx="0" cy="0"/>
+          <a:chOff x="0" y="0"/>
+          <a:chExt cx="0" cy="0"/>
+        </a:xfrm>
+      </p:grpSpPr>
+      <p:sp>
+        <p:nvSpPr>
+          <p:cNvPr id="5" name="Retângulo 4">
+            <a:extLst>
+              <a:ext uri="{FF2B5EF4-FFF2-40B4-BE49-F238E27FC236}">
+                <a16:creationId xmlns:a16="http://schemas.microsoft.com/office/drawing/2014/main" id="{4077D9FB-4DD9-3E7A-4A5C-8F654CD64D2A}"/>
+              </a:ext>
+            </a:extLst>
+          </p:cNvPr>
+          <p:cNvSpPr/>
+          <p:nvPr/>
+        </p:nvSpPr>
+        <p:spPr>
+          <a:xfrm>
+            <a:off x="0" y="-2"/>
+            <a:ext cx="12192000" cy="1325563"/>
+          </a:xfrm>
+          <a:prstGeom prst="rect">
+            <a:avLst/>
+          </a:prstGeom>
+          <a:solidFill>
+            <a:srgbClr val="418AB3"/>
+          </a:solidFill>
+          <a:ln>
+            <a:solidFill>
+              <a:srgbClr val="418AB3"/>
+            </a:solidFill>
+          </a:ln>
+        </p:spPr>
+        <p:style>
+          <a:lnRef idx="2">
+            <a:schemeClr val="accent1">
+              <a:shade val="15000"/>
+            </a:schemeClr>
+          </a:lnRef>
+          <a:fillRef idx="1">
+            <a:schemeClr val="accent1"/>
+          </a:fillRef>
+          <a:effectRef idx="0">
+            <a:schemeClr val="accent1"/>
+          </a:effectRef>
+          <a:fontRef idx="minor">
+            <a:schemeClr val="lt1"/>
+          </a:fontRef>
+        </p:style>
+        <p:txBody>
+          <a:bodyPr rtlCol="0" anchor="ctr"/>
+          <a:lstStyle/>
+          <a:p>
+            <a:pPr algn="ctr"/>
+            <a:endParaRPr lang="pt-BR" dirty="0"/>
+          </a:p>
+        </p:txBody>
+      </p:sp>
+      <p:sp>
+        <p:nvSpPr>
+          <p:cNvPr id="2" name="Título 1">
+            <a:extLst>
+              <a:ext uri="{FF2B5EF4-FFF2-40B4-BE49-F238E27FC236}">
+                <a16:creationId xmlns:a16="http://schemas.microsoft.com/office/drawing/2014/main" id="{3A44C01A-1C31-EE76-5753-99FB3CE59B5A}"/>
+              </a:ext>
+            </a:extLst>
+          </p:cNvPr>
+          <p:cNvSpPr>
+            <a:spLocks noGrp="1"/>
+          </p:cNvSpPr>
+          <p:nvPr>
+            <p:ph type="title"/>
+          </p:nvPr>
+        </p:nvSpPr>
+        <p:spPr>
+          <a:xfrm>
+            <a:off x="0" y="-1"/>
+            <a:ext cx="12192000" cy="1325563"/>
+          </a:xfrm>
+        </p:spPr>
+        <p:txBody>
+          <a:bodyPr/>
+          <a:lstStyle/>
+          <a:p>
+            <a:pPr algn="ctr"/>
+            <a:r>
+              <a:rPr lang="pt-BR" dirty="0">
+                <a:solidFill>
+                  <a:schemeClr val="bg1"/>
+                </a:solidFill>
+              </a:rPr>
+              <a:t>Operações de Entrada e Saída</a:t>
+            </a:r>
+          </a:p>
+        </p:txBody>
+      </p:sp>
+      <p:sp>
+        <p:nvSpPr>
+          <p:cNvPr id="12" name="AutoShape 6" descr="Lógica Proposicional x Lógica de Argumento ⋆ Colaborae">
+            <a:extLst>
+              <a:ext uri="{FF2B5EF4-FFF2-40B4-BE49-F238E27FC236}">
+                <a16:creationId xmlns:a16="http://schemas.microsoft.com/office/drawing/2014/main" id="{872043A7-9CC2-8022-2E96-1F1463062CD6}"/>
+              </a:ext>
+            </a:extLst>
+          </p:cNvPr>
+          <p:cNvSpPr>
+            <a:spLocks noChangeAspect="1" noChangeArrowheads="1"/>
+          </p:cNvSpPr>
+          <p:nvPr/>
+        </p:nvSpPr>
+        <p:spPr bwMode="auto">
+          <a:xfrm>
+            <a:off x="5943600" y="-1707776"/>
+            <a:ext cx="5289176" cy="5289176"/>
+          </a:xfrm>
+          <a:prstGeom prst="rect">
+            <a:avLst/>
+          </a:prstGeom>
+          <a:noFill/>
+          <a:extLst>
+            <a:ext uri="{909E8E84-426E-40DD-AFC4-6F175D3DCCD1}">
+              <a14:hiddenFill xmlns:a14="http://schemas.microsoft.com/office/drawing/2010/main">
+                <a:solidFill>
+                  <a:srgbClr val="FFFFFF"/>
+                </a:solidFill>
+              </a14:hiddenFill>
+            </a:ext>
+          </a:extLst>
+        </p:spPr>
+        <p:txBody>
+          <a:bodyPr vert="horz" wrap="square" lIns="91440" tIns="45720" rIns="91440" bIns="45720" numCol="1" anchor="t" anchorCtr="0" compatLnSpc="1">
+            <a:prstTxWarp prst="textNoShape">
+              <a:avLst/>
+            </a:prstTxWarp>
+          </a:bodyPr>
+          <a:lstStyle/>
+          <a:p>
+            <a:endParaRPr lang="pt-BR"/>
+          </a:p>
+        </p:txBody>
+      </p:sp>
+      <p:sp>
+        <p:nvSpPr>
+          <p:cNvPr id="6" name="Espaço Reservado para Conteúdo 5">
+            <a:extLst>
+              <a:ext uri="{FF2B5EF4-FFF2-40B4-BE49-F238E27FC236}">
+                <a16:creationId xmlns:a16="http://schemas.microsoft.com/office/drawing/2014/main" id="{DC9319CF-7399-E27E-5AC4-1D6548DC1A91}"/>
+              </a:ext>
+            </a:extLst>
+          </p:cNvPr>
+          <p:cNvSpPr>
+            <a:spLocks noGrp="1"/>
+          </p:cNvSpPr>
+          <p:nvPr>
+            <p:ph idx="1"/>
+          </p:nvPr>
+        </p:nvSpPr>
+        <p:spPr>
+          <a:xfrm>
+            <a:off x="858001" y="1744579"/>
+            <a:ext cx="10547936" cy="4963787"/>
+          </a:xfrm>
+        </p:spPr>
+        <p:txBody>
+          <a:bodyPr>
+            <a:normAutofit/>
+          </a:bodyPr>
+          <a:lstStyle/>
+          <a:p>
+            <a:r>
+              <a:rPr lang="pt-BR" sz="2400" dirty="0"/>
+              <a:t>As operações de entrada e saída (E/S) em C utilizam a biblioteca padrão &lt;</a:t>
+            </a:r>
+            <a:r>
+              <a:rPr lang="pt-BR" sz="2400" dirty="0" err="1"/>
+              <a:t>stdio.h</a:t>
+            </a:r>
+            <a:r>
+              <a:rPr lang="pt-BR" sz="2400" dirty="0"/>
+              <a:t>&gt;</a:t>
+            </a:r>
+          </a:p>
+          <a:p>
+            <a:r>
+              <a:rPr lang="pt-BR" sz="2400" dirty="0"/>
+              <a:t>A saída de dados na tela é feita com a função </a:t>
+            </a:r>
+            <a:r>
+              <a:rPr lang="pt-BR" sz="2400" b="1" i="1" dirty="0" err="1"/>
+              <a:t>printf</a:t>
+            </a:r>
+            <a:r>
+              <a:rPr lang="pt-BR" sz="2400" b="1" i="1" dirty="0"/>
+              <a:t>():</a:t>
+            </a:r>
+          </a:p>
+          <a:p>
+            <a:endParaRPr lang="pt-BR" sz="2400" b="1" i="1" dirty="0"/>
+          </a:p>
+          <a:p>
+            <a:endParaRPr lang="pt-BR" sz="2400" b="1" i="1" dirty="0"/>
+          </a:p>
+          <a:p>
+            <a:endParaRPr lang="pt-BR" sz="2400" b="1" i="1" dirty="0"/>
+          </a:p>
+          <a:p>
+            <a:endParaRPr lang="pt-BR" sz="2400" b="1" i="1" dirty="0"/>
+          </a:p>
+          <a:p>
+            <a:endParaRPr lang="pt-BR" sz="2400" b="1" i="1" dirty="0"/>
+          </a:p>
+          <a:p>
+            <a:endParaRPr lang="pt-BR" sz="2400" dirty="0"/>
+          </a:p>
+          <a:p>
+            <a:r>
+              <a:rPr lang="pt-BR" sz="2400" dirty="0"/>
+              <a:t>Especificadores de formato são utilizados na função para definir onde o valor de uma variável deve ser inserido e como essa variável será exibida em uma </a:t>
+            </a:r>
+            <a:r>
+              <a:rPr lang="pt-BR" sz="2400" b="1" dirty="0" err="1"/>
+              <a:t>String</a:t>
+            </a:r>
+            <a:r>
+              <a:rPr lang="pt-BR" sz="2400" dirty="0"/>
+              <a:t> (de acordo com o tipo)</a:t>
+            </a:r>
+          </a:p>
+          <a:p>
+            <a:pPr marL="0" indent="0">
+              <a:buNone/>
+            </a:pPr>
+            <a:endParaRPr lang="pt-BR" sz="2400" dirty="0"/>
+          </a:p>
+          <a:p>
+            <a:pPr marL="0" indent="0">
+              <a:buNone/>
+            </a:pPr>
+            <a:endParaRPr lang="pt-BR" sz="2400" dirty="0"/>
+          </a:p>
+          <a:p>
+            <a:pPr lvl="1"/>
+            <a:endParaRPr lang="pt-BR" sz="2000" b="1" i="1" dirty="0"/>
+          </a:p>
+          <a:p>
+            <a:pPr lvl="1"/>
+            <a:endParaRPr lang="pt-BR" sz="2000" b="1" i="1" dirty="0"/>
+          </a:p>
+          <a:p>
+            <a:pPr lvl="1"/>
+            <a:endParaRPr lang="pt-BR" sz="1800" b="1" i="1" dirty="0"/>
+          </a:p>
+          <a:p>
+            <a:pPr lvl="1"/>
+            <a:endParaRPr lang="pt-BR" sz="1800" b="1" i="1" dirty="0"/>
+          </a:p>
+        </p:txBody>
+      </p:sp>
+      <p:pic>
+        <p:nvPicPr>
+          <p:cNvPr id="3" name="Imagem 2">
+            <a:extLst>
+              <a:ext uri="{FF2B5EF4-FFF2-40B4-BE49-F238E27FC236}">
+                <a16:creationId xmlns:a16="http://schemas.microsoft.com/office/drawing/2014/main" id="{46CF86BA-CD15-4345-C3F4-FA6E2ED3F9FC}"/>
+              </a:ext>
+            </a:extLst>
+          </p:cNvPr>
+          <p:cNvPicPr>
+            <a:picLocks noChangeAspect="1"/>
+          </p:cNvPicPr>
+          <p:nvPr/>
+        </p:nvPicPr>
+        <p:blipFill>
+          <a:blip r:embed="rId3"/>
+          <a:srcRect t="12454" b="31625"/>
+          <a:stretch>
+            <a:fillRect/>
+          </a:stretch>
+        </p:blipFill>
+        <p:spPr>
+          <a:xfrm>
+            <a:off x="1397418" y="3128127"/>
+            <a:ext cx="5541324" cy="1744579"/>
+          </a:xfrm>
+          <a:prstGeom prst="rect">
+            <a:avLst/>
+          </a:prstGeom>
+        </p:spPr>
+      </p:pic>
+    </p:spTree>
+    <p:extLst>
+      <p:ext uri="{BB962C8B-B14F-4D97-AF65-F5344CB8AC3E}">
+        <p14:creationId xmlns:p14="http://schemas.microsoft.com/office/powerpoint/2010/main" val="3365522591"/>
+      </p:ext>
+    </p:extLst>
+  </p:cSld>
+  <p:clrMapOvr>
+    <a:masterClrMapping/>
+  </p:clrMapOvr>
+</p:sld>
+</file>
+
+<file path=ppt/slides/slide42.xml><?xml version="1.0" encoding="utf-8"?>
+<p:sld xmlns:a="http://schemas.openxmlformats.org/drawingml/2006/main" xmlns:r="http://schemas.openxmlformats.org/officeDocument/2006/relationships" xmlns:p="http://schemas.openxmlformats.org/presentationml/2006/main">
+  <p:cSld>
+    <p:spTree>
+      <p:nvGrpSpPr>
+        <p:cNvPr id="1" name="">
+          <a:extLst>
+            <a:ext uri="{FF2B5EF4-FFF2-40B4-BE49-F238E27FC236}">
+              <a16:creationId xmlns:a16="http://schemas.microsoft.com/office/drawing/2014/main" id="{6672A8DB-5FF5-3D71-5511-7B7F6B99CCD5}"/>
+            </a:ext>
+          </a:extLst>
+        </p:cNvPr>
+        <p:cNvGrpSpPr/>
+        <p:nvPr/>
+      </p:nvGrpSpPr>
+      <p:grpSpPr>
+        <a:xfrm>
+          <a:off x="0" y="0"/>
+          <a:ext cx="0" cy="0"/>
+          <a:chOff x="0" y="0"/>
+          <a:chExt cx="0" cy="0"/>
+        </a:xfrm>
+      </p:grpSpPr>
+      <p:sp>
+        <p:nvSpPr>
+          <p:cNvPr id="5" name="Retângulo 4">
+            <a:extLst>
+              <a:ext uri="{FF2B5EF4-FFF2-40B4-BE49-F238E27FC236}">
+                <a16:creationId xmlns:a16="http://schemas.microsoft.com/office/drawing/2014/main" id="{FA23D10D-F0FE-961D-EC87-23B3F963DA68}"/>
+              </a:ext>
+            </a:extLst>
+          </p:cNvPr>
+          <p:cNvSpPr/>
+          <p:nvPr/>
+        </p:nvSpPr>
+        <p:spPr>
+          <a:xfrm>
+            <a:off x="0" y="-2"/>
+            <a:ext cx="12192000" cy="1325563"/>
+          </a:xfrm>
+          <a:prstGeom prst="rect">
+            <a:avLst/>
+          </a:prstGeom>
+          <a:solidFill>
+            <a:srgbClr val="418AB3"/>
+          </a:solidFill>
+          <a:ln>
+            <a:solidFill>
+              <a:srgbClr val="418AB3"/>
+            </a:solidFill>
+          </a:ln>
+        </p:spPr>
+        <p:style>
+          <a:lnRef idx="2">
+            <a:schemeClr val="accent1">
+              <a:shade val="15000"/>
+            </a:schemeClr>
+          </a:lnRef>
+          <a:fillRef idx="1">
+            <a:schemeClr val="accent1"/>
+          </a:fillRef>
+          <a:effectRef idx="0">
+            <a:schemeClr val="accent1"/>
+          </a:effectRef>
+          <a:fontRef idx="minor">
+            <a:schemeClr val="lt1"/>
+          </a:fontRef>
+        </p:style>
+        <p:txBody>
+          <a:bodyPr rtlCol="0" anchor="ctr"/>
+          <a:lstStyle/>
+          <a:p>
+            <a:pPr algn="ctr"/>
+            <a:endParaRPr lang="pt-BR" dirty="0"/>
+          </a:p>
+        </p:txBody>
+      </p:sp>
+      <p:sp>
+        <p:nvSpPr>
+          <p:cNvPr id="2" name="Título 1">
+            <a:extLst>
+              <a:ext uri="{FF2B5EF4-FFF2-40B4-BE49-F238E27FC236}">
+                <a16:creationId xmlns:a16="http://schemas.microsoft.com/office/drawing/2014/main" id="{5C33DA47-FB95-ECBD-3DD7-D5CD0D5F5B9D}"/>
+              </a:ext>
+            </a:extLst>
+          </p:cNvPr>
+          <p:cNvSpPr>
+            <a:spLocks noGrp="1"/>
+          </p:cNvSpPr>
+          <p:nvPr>
+            <p:ph type="title"/>
+          </p:nvPr>
+        </p:nvSpPr>
+        <p:spPr>
+          <a:xfrm>
+            <a:off x="0" y="-1"/>
+            <a:ext cx="12192000" cy="1325563"/>
+          </a:xfrm>
+        </p:spPr>
+        <p:txBody>
+          <a:bodyPr/>
+          <a:lstStyle/>
+          <a:p>
+            <a:pPr algn="ctr"/>
+            <a:r>
+              <a:rPr lang="pt-BR" dirty="0">
+                <a:solidFill>
+                  <a:schemeClr val="bg1"/>
+                </a:solidFill>
+              </a:rPr>
+              <a:t>Operações de Entrada e Saída</a:t>
+            </a:r>
+          </a:p>
+        </p:txBody>
+      </p:sp>
+      <p:sp>
+        <p:nvSpPr>
+          <p:cNvPr id="12" name="AutoShape 6" descr="Lógica Proposicional x Lógica de Argumento ⋆ Colaborae">
+            <a:extLst>
+              <a:ext uri="{FF2B5EF4-FFF2-40B4-BE49-F238E27FC236}">
+                <a16:creationId xmlns:a16="http://schemas.microsoft.com/office/drawing/2014/main" id="{5F934E71-5F6F-BD04-A7A3-C169F9464C4E}"/>
+              </a:ext>
+            </a:extLst>
+          </p:cNvPr>
+          <p:cNvSpPr>
+            <a:spLocks noChangeAspect="1" noChangeArrowheads="1"/>
+          </p:cNvSpPr>
+          <p:nvPr/>
+        </p:nvSpPr>
+        <p:spPr bwMode="auto">
+          <a:xfrm>
+            <a:off x="5943600" y="-1707776"/>
+            <a:ext cx="5289176" cy="5289176"/>
+          </a:xfrm>
+          <a:prstGeom prst="rect">
+            <a:avLst/>
+          </a:prstGeom>
+          <a:noFill/>
+          <a:extLst>
+            <a:ext uri="{909E8E84-426E-40DD-AFC4-6F175D3DCCD1}">
+              <a14:hiddenFill xmlns:a14="http://schemas.microsoft.com/office/drawing/2010/main">
+                <a:solidFill>
+                  <a:srgbClr val="FFFFFF"/>
+                </a:solidFill>
+              </a14:hiddenFill>
+            </a:ext>
+          </a:extLst>
+        </p:spPr>
+        <p:txBody>
+          <a:bodyPr vert="horz" wrap="square" lIns="91440" tIns="45720" rIns="91440" bIns="45720" numCol="1" anchor="t" anchorCtr="0" compatLnSpc="1">
+            <a:prstTxWarp prst="textNoShape">
+              <a:avLst/>
+            </a:prstTxWarp>
+          </a:bodyPr>
+          <a:lstStyle/>
+          <a:p>
+            <a:endParaRPr lang="pt-BR"/>
+          </a:p>
+        </p:txBody>
+      </p:sp>
+      <p:sp>
+        <p:nvSpPr>
+          <p:cNvPr id="6" name="Espaço Reservado para Conteúdo 5">
+            <a:extLst>
+              <a:ext uri="{FF2B5EF4-FFF2-40B4-BE49-F238E27FC236}">
+                <a16:creationId xmlns:a16="http://schemas.microsoft.com/office/drawing/2014/main" id="{9512E6CA-54CC-049C-CCB8-A961DE780FE8}"/>
+              </a:ext>
+            </a:extLst>
+          </p:cNvPr>
+          <p:cNvSpPr>
+            <a:spLocks noGrp="1"/>
+          </p:cNvSpPr>
+          <p:nvPr>
+            <p:ph idx="1"/>
+          </p:nvPr>
+        </p:nvSpPr>
+        <p:spPr>
+          <a:xfrm>
+            <a:off x="858001" y="1744579"/>
+            <a:ext cx="10547936" cy="4963787"/>
+          </a:xfrm>
+        </p:spPr>
+        <p:txBody>
+          <a:bodyPr>
+            <a:normAutofit/>
+          </a:bodyPr>
+          <a:lstStyle/>
+          <a:p>
+            <a:r>
+              <a:rPr lang="pt-BR" sz="2400" b="1" dirty="0"/>
+              <a:t>Especificadores de formato: </a:t>
+            </a:r>
+            <a:r>
+              <a:rPr lang="pt-BR" sz="2400" dirty="0"/>
+              <a:t>são códigos iniciados por % usados para indicar o tipo de dado que o programa vai ler ou mostrar na tela. São eles:</a:t>
+            </a:r>
+          </a:p>
+          <a:p>
+            <a:endParaRPr lang="pt-BR" sz="2200" b="1" i="1" dirty="0"/>
+          </a:p>
+          <a:p>
+            <a:pPr lvl="1"/>
+            <a:r>
+              <a:rPr lang="pt-BR" sz="2200" b="1" dirty="0"/>
+              <a:t>%d (ou %i) </a:t>
+            </a:r>
+            <a:r>
+              <a:rPr lang="pt-BR" sz="2200" dirty="0">
+                <a:latin typeface="Calibri" panose="020F0502020204030204" pitchFamily="34" charset="0"/>
+                <a:ea typeface="Calibri" panose="020F0502020204030204" pitchFamily="34" charset="0"/>
+                <a:cs typeface="Calibri" panose="020F0502020204030204" pitchFamily="34" charset="0"/>
+              </a:rPr>
+              <a:t>→</a:t>
+            </a:r>
+            <a:r>
+              <a:rPr lang="pt-BR" sz="2200" b="1" dirty="0">
+                <a:latin typeface="Calibri" panose="020F0502020204030204" pitchFamily="34" charset="0"/>
+                <a:ea typeface="Calibri" panose="020F0502020204030204" pitchFamily="34" charset="0"/>
+                <a:cs typeface="Calibri" panose="020F0502020204030204" pitchFamily="34" charset="0"/>
+              </a:rPr>
+              <a:t> </a:t>
+            </a:r>
+            <a:r>
+              <a:rPr lang="pt-BR" sz="2200" dirty="0"/>
+              <a:t>Número inteiro decimal</a:t>
+            </a:r>
+            <a:endParaRPr lang="pt-BR" sz="2200" b="1" dirty="0"/>
+          </a:p>
+          <a:p>
+            <a:pPr lvl="1"/>
+            <a:r>
+              <a:rPr lang="pt-BR" sz="2200" b="1" dirty="0"/>
+              <a:t>%f </a:t>
+            </a:r>
+            <a:r>
+              <a:rPr lang="pt-BR" sz="2200" dirty="0">
+                <a:latin typeface="Calibri" panose="020F0502020204030204" pitchFamily="34" charset="0"/>
+                <a:ea typeface="Calibri" panose="020F0502020204030204" pitchFamily="34" charset="0"/>
+                <a:cs typeface="Calibri" panose="020F0502020204030204" pitchFamily="34" charset="0"/>
+              </a:rPr>
+              <a:t>→</a:t>
+            </a:r>
+            <a:r>
+              <a:rPr lang="pt-BR" sz="2200" b="1" dirty="0">
+                <a:latin typeface="Calibri" panose="020F0502020204030204" pitchFamily="34" charset="0"/>
+                <a:ea typeface="Calibri" panose="020F0502020204030204" pitchFamily="34" charset="0"/>
+                <a:cs typeface="Calibri" panose="020F0502020204030204" pitchFamily="34" charset="0"/>
+              </a:rPr>
+              <a:t> </a:t>
+            </a:r>
+            <a:r>
+              <a:rPr lang="pt-BR" sz="2200" dirty="0"/>
+              <a:t>Número real de ponto flutuante</a:t>
+            </a:r>
+            <a:endParaRPr lang="pt-BR" sz="2200" b="1" dirty="0"/>
+          </a:p>
+          <a:p>
+            <a:pPr lvl="1"/>
+            <a:r>
+              <a:rPr lang="pt-BR" sz="2200" b="1" dirty="0"/>
+              <a:t>%</a:t>
+            </a:r>
+            <a:r>
+              <a:rPr lang="pt-BR" sz="2200" b="1" dirty="0" err="1"/>
+              <a:t>lf</a:t>
+            </a:r>
+            <a:r>
+              <a:rPr lang="pt-BR" sz="2200" b="1" dirty="0"/>
+              <a:t> </a:t>
+            </a:r>
+            <a:r>
+              <a:rPr lang="pt-BR" sz="2200" dirty="0">
+                <a:latin typeface="Calibri" panose="020F0502020204030204" pitchFamily="34" charset="0"/>
+                <a:ea typeface="Calibri" panose="020F0502020204030204" pitchFamily="34" charset="0"/>
+                <a:cs typeface="Calibri" panose="020F0502020204030204" pitchFamily="34" charset="0"/>
+              </a:rPr>
+              <a:t>→</a:t>
+            </a:r>
+            <a:r>
+              <a:rPr lang="pt-BR" sz="2200" b="1" dirty="0">
+                <a:latin typeface="Calibri" panose="020F0502020204030204" pitchFamily="34" charset="0"/>
+                <a:ea typeface="Calibri" panose="020F0502020204030204" pitchFamily="34" charset="0"/>
+                <a:cs typeface="Calibri" panose="020F0502020204030204" pitchFamily="34" charset="0"/>
+              </a:rPr>
+              <a:t> </a:t>
+            </a:r>
+            <a:r>
+              <a:rPr lang="pt-BR" sz="2200" dirty="0"/>
+              <a:t>Número real de dupla precisão (</a:t>
+            </a:r>
+            <a:r>
+              <a:rPr lang="pt-BR" sz="2200" dirty="0" err="1"/>
+              <a:t>double</a:t>
+            </a:r>
+            <a:r>
+              <a:rPr lang="pt-BR" sz="2200" dirty="0"/>
+              <a:t>)</a:t>
+            </a:r>
+            <a:endParaRPr lang="pt-BR" sz="2200" b="1" dirty="0"/>
+          </a:p>
+          <a:p>
+            <a:pPr lvl="1"/>
+            <a:r>
+              <a:rPr lang="pt-BR" sz="2200" b="1" dirty="0"/>
+              <a:t>%c </a:t>
+            </a:r>
+            <a:r>
+              <a:rPr lang="pt-BR" sz="2200" dirty="0">
+                <a:latin typeface="Calibri" panose="020F0502020204030204" pitchFamily="34" charset="0"/>
+                <a:ea typeface="Calibri" panose="020F0502020204030204" pitchFamily="34" charset="0"/>
+                <a:cs typeface="Calibri" panose="020F0502020204030204" pitchFamily="34" charset="0"/>
+              </a:rPr>
+              <a:t>→</a:t>
+            </a:r>
+            <a:r>
+              <a:rPr lang="pt-BR" sz="2200" b="1" dirty="0">
+                <a:latin typeface="Calibri" panose="020F0502020204030204" pitchFamily="34" charset="0"/>
+                <a:ea typeface="Calibri" panose="020F0502020204030204" pitchFamily="34" charset="0"/>
+                <a:cs typeface="Calibri" panose="020F0502020204030204" pitchFamily="34" charset="0"/>
+              </a:rPr>
+              <a:t> </a:t>
+            </a:r>
+            <a:r>
+              <a:rPr lang="pt-BR" sz="2200" dirty="0"/>
+              <a:t>Um único caractere</a:t>
+            </a:r>
+            <a:endParaRPr lang="pt-BR" sz="2200" b="1" dirty="0"/>
+          </a:p>
+          <a:p>
+            <a:pPr lvl="1"/>
+            <a:r>
+              <a:rPr lang="pt-BR" sz="2200" b="1" dirty="0"/>
+              <a:t>%s </a:t>
+            </a:r>
+            <a:r>
+              <a:rPr lang="pt-BR" sz="2200" dirty="0">
+                <a:latin typeface="Calibri" panose="020F0502020204030204" pitchFamily="34" charset="0"/>
+                <a:ea typeface="Calibri" panose="020F0502020204030204" pitchFamily="34" charset="0"/>
+                <a:cs typeface="Calibri" panose="020F0502020204030204" pitchFamily="34" charset="0"/>
+              </a:rPr>
+              <a:t>→</a:t>
+            </a:r>
+            <a:r>
+              <a:rPr lang="pt-BR" sz="2200" b="1" dirty="0">
+                <a:latin typeface="Calibri" panose="020F0502020204030204" pitchFamily="34" charset="0"/>
+                <a:ea typeface="Calibri" panose="020F0502020204030204" pitchFamily="34" charset="0"/>
+                <a:cs typeface="Calibri" panose="020F0502020204030204" pitchFamily="34" charset="0"/>
+              </a:rPr>
+              <a:t> </a:t>
+            </a:r>
+            <a:r>
+              <a:rPr lang="pt-BR" sz="2200" dirty="0"/>
+              <a:t>Cadeia de caracteres</a:t>
+            </a:r>
+            <a:endParaRPr lang="pt-BR" sz="2200" b="1" dirty="0"/>
+          </a:p>
+          <a:p>
+            <a:pPr lvl="1"/>
+            <a:r>
+              <a:rPr lang="pt-BR" sz="2200" b="1" dirty="0"/>
+              <a:t>%u </a:t>
+            </a:r>
+            <a:r>
+              <a:rPr lang="pt-BR" sz="2200" dirty="0">
+                <a:latin typeface="Calibri" panose="020F0502020204030204" pitchFamily="34" charset="0"/>
+                <a:ea typeface="Calibri" panose="020F0502020204030204" pitchFamily="34" charset="0"/>
+                <a:cs typeface="Calibri" panose="020F0502020204030204" pitchFamily="34" charset="0"/>
+              </a:rPr>
+              <a:t>→</a:t>
+            </a:r>
+            <a:r>
+              <a:rPr lang="pt-BR" sz="2200" b="1" dirty="0">
+                <a:latin typeface="Calibri" panose="020F0502020204030204" pitchFamily="34" charset="0"/>
+                <a:ea typeface="Calibri" panose="020F0502020204030204" pitchFamily="34" charset="0"/>
+                <a:cs typeface="Calibri" panose="020F0502020204030204" pitchFamily="34" charset="0"/>
+              </a:rPr>
+              <a:t> </a:t>
+            </a:r>
+            <a:r>
+              <a:rPr lang="pt-BR" sz="2200" dirty="0"/>
+              <a:t>Número decimal sem sinal</a:t>
+            </a:r>
+            <a:endParaRPr lang="pt-BR" sz="2200" b="1" dirty="0"/>
+          </a:p>
+          <a:p>
+            <a:pPr lvl="1"/>
+            <a:r>
+              <a:rPr lang="pt-BR" sz="2200" b="1" dirty="0"/>
+              <a:t>%o </a:t>
+            </a:r>
+            <a:r>
+              <a:rPr lang="pt-BR" sz="2200" dirty="0">
+                <a:latin typeface="Calibri" panose="020F0502020204030204" pitchFamily="34" charset="0"/>
+                <a:ea typeface="Calibri" panose="020F0502020204030204" pitchFamily="34" charset="0"/>
+                <a:cs typeface="Calibri" panose="020F0502020204030204" pitchFamily="34" charset="0"/>
+              </a:rPr>
+              <a:t>→</a:t>
+            </a:r>
+            <a:r>
+              <a:rPr lang="pt-BR" sz="2200" b="1" dirty="0">
+                <a:latin typeface="Calibri" panose="020F0502020204030204" pitchFamily="34" charset="0"/>
+                <a:ea typeface="Calibri" panose="020F0502020204030204" pitchFamily="34" charset="0"/>
+                <a:cs typeface="Calibri" panose="020F0502020204030204" pitchFamily="34" charset="0"/>
+              </a:rPr>
+              <a:t> </a:t>
+            </a:r>
+            <a:r>
+              <a:rPr lang="pt-BR" sz="2200" dirty="0"/>
+              <a:t>Número em formato octal</a:t>
+            </a:r>
+            <a:endParaRPr lang="pt-BR" sz="2200" b="1" dirty="0"/>
+          </a:p>
+          <a:p>
+            <a:pPr lvl="1"/>
+            <a:r>
+              <a:rPr lang="pt-BR" sz="2200" b="1" dirty="0"/>
+              <a:t>%x </a:t>
+            </a:r>
+            <a:r>
+              <a:rPr lang="pt-BR" sz="2200" dirty="0">
+                <a:latin typeface="Calibri" panose="020F0502020204030204" pitchFamily="34" charset="0"/>
+                <a:ea typeface="Calibri" panose="020F0502020204030204" pitchFamily="34" charset="0"/>
+                <a:cs typeface="Calibri" panose="020F0502020204030204" pitchFamily="34" charset="0"/>
+              </a:rPr>
+              <a:t>→ </a:t>
+            </a:r>
+            <a:r>
+              <a:rPr lang="pt-BR" sz="2200" dirty="0"/>
+              <a:t>Número em formato hexadecimal</a:t>
+            </a:r>
+          </a:p>
+          <a:p>
+            <a:pPr lvl="1"/>
+            <a:r>
+              <a:rPr lang="pt-BR" sz="2200" b="1" dirty="0"/>
+              <a:t>%p </a:t>
+            </a:r>
+            <a:r>
+              <a:rPr lang="pt-BR" sz="2200" dirty="0">
+                <a:latin typeface="Calibri" panose="020F0502020204030204" pitchFamily="34" charset="0"/>
+                <a:ea typeface="Calibri" panose="020F0502020204030204" pitchFamily="34" charset="0"/>
+                <a:cs typeface="Calibri" panose="020F0502020204030204" pitchFamily="34" charset="0"/>
+              </a:rPr>
+              <a:t>→ </a:t>
+            </a:r>
+            <a:r>
+              <a:rPr lang="pt-BR" sz="2200" dirty="0"/>
+              <a:t>Endereço de memória de um ponteiro</a:t>
+            </a:r>
+          </a:p>
+          <a:p>
+            <a:pPr lvl="1"/>
+            <a:endParaRPr lang="pt-BR" sz="2000" b="1" i="1" dirty="0"/>
+          </a:p>
+          <a:p>
+            <a:endParaRPr lang="pt-BR" sz="2400" b="1" i="1" dirty="0"/>
+          </a:p>
+          <a:p>
+            <a:endParaRPr lang="pt-BR" sz="2400" b="1" i="1" dirty="0"/>
+          </a:p>
+          <a:p>
+            <a:endParaRPr lang="pt-BR" sz="2400" b="1" i="1" dirty="0"/>
+          </a:p>
+          <a:p>
+            <a:endParaRPr lang="pt-BR" sz="2400" dirty="0"/>
+          </a:p>
+          <a:p>
+            <a:pPr marL="0" indent="0">
+              <a:buNone/>
+            </a:pPr>
+            <a:endParaRPr lang="pt-BR" sz="2400" dirty="0"/>
+          </a:p>
+          <a:p>
+            <a:pPr marL="0" indent="0">
+              <a:buNone/>
+            </a:pPr>
+            <a:endParaRPr lang="pt-BR" sz="2400" dirty="0"/>
+          </a:p>
+          <a:p>
+            <a:pPr lvl="1"/>
+            <a:endParaRPr lang="pt-BR" sz="2000" b="1" i="1" dirty="0"/>
+          </a:p>
+          <a:p>
+            <a:pPr lvl="1"/>
+            <a:endParaRPr lang="pt-BR" sz="2000" b="1" i="1" dirty="0"/>
+          </a:p>
+          <a:p>
+            <a:pPr lvl="1"/>
+            <a:endParaRPr lang="pt-BR" sz="1800" b="1" i="1" dirty="0"/>
+          </a:p>
+          <a:p>
+            <a:pPr lvl="1"/>
+            <a:endParaRPr lang="pt-BR" sz="1800" b="1" i="1" dirty="0"/>
+          </a:p>
+        </p:txBody>
+      </p:sp>
+    </p:spTree>
+    <p:extLst>
+      <p:ext uri="{BB962C8B-B14F-4D97-AF65-F5344CB8AC3E}">
+        <p14:creationId xmlns:p14="http://schemas.microsoft.com/office/powerpoint/2010/main" val="554264467"/>
+      </p:ext>
+    </p:extLst>
+  </p:cSld>
+  <p:clrMapOvr>
+    <a:masterClrMapping/>
+  </p:clrMapOvr>
+</p:sld>
+</file>
+
+<file path=ppt/slides/slide43.xml><?xml version="1.0" encoding="utf-8"?>
+<p:sld xmlns:a="http://schemas.openxmlformats.org/drawingml/2006/main" xmlns:r="http://schemas.openxmlformats.org/officeDocument/2006/relationships" xmlns:p="http://schemas.openxmlformats.org/presentationml/2006/main">
+  <p:cSld>
+    <p:spTree>
+      <p:nvGrpSpPr>
+        <p:cNvPr id="1" name="">
+          <a:extLst>
+            <a:ext uri="{FF2B5EF4-FFF2-40B4-BE49-F238E27FC236}">
+              <a16:creationId xmlns:a16="http://schemas.microsoft.com/office/drawing/2014/main" id="{135BAEB4-E3B3-8F6F-F6ED-9AD32EA3127D}"/>
+            </a:ext>
+          </a:extLst>
+        </p:cNvPr>
+        <p:cNvGrpSpPr/>
+        <p:nvPr/>
+      </p:nvGrpSpPr>
+      <p:grpSpPr>
+        <a:xfrm>
+          <a:off x="0" y="0"/>
+          <a:ext cx="0" cy="0"/>
+          <a:chOff x="0" y="0"/>
+          <a:chExt cx="0" cy="0"/>
+        </a:xfrm>
+      </p:grpSpPr>
+      <p:sp>
+        <p:nvSpPr>
+          <p:cNvPr id="5" name="Retângulo 4">
+            <a:extLst>
+              <a:ext uri="{FF2B5EF4-FFF2-40B4-BE49-F238E27FC236}">
+                <a16:creationId xmlns:a16="http://schemas.microsoft.com/office/drawing/2014/main" id="{3AC75E49-528F-F290-E926-463B8EE07549}"/>
+              </a:ext>
+            </a:extLst>
+          </p:cNvPr>
+          <p:cNvSpPr/>
+          <p:nvPr/>
+        </p:nvSpPr>
+        <p:spPr>
+          <a:xfrm>
+            <a:off x="0" y="-2"/>
+            <a:ext cx="12192000" cy="1325563"/>
+          </a:xfrm>
+          <a:prstGeom prst="rect">
+            <a:avLst/>
+          </a:prstGeom>
+          <a:solidFill>
+            <a:srgbClr val="418AB3"/>
+          </a:solidFill>
+          <a:ln>
+            <a:solidFill>
+              <a:srgbClr val="418AB3"/>
+            </a:solidFill>
+          </a:ln>
+        </p:spPr>
+        <p:style>
+          <a:lnRef idx="2">
+            <a:schemeClr val="accent1">
+              <a:shade val="15000"/>
+            </a:schemeClr>
+          </a:lnRef>
+          <a:fillRef idx="1">
+            <a:schemeClr val="accent1"/>
+          </a:fillRef>
+          <a:effectRef idx="0">
+            <a:schemeClr val="accent1"/>
+          </a:effectRef>
+          <a:fontRef idx="minor">
+            <a:schemeClr val="lt1"/>
+          </a:fontRef>
+        </p:style>
+        <p:txBody>
+          <a:bodyPr rtlCol="0" anchor="ctr"/>
+          <a:lstStyle/>
+          <a:p>
+            <a:pPr algn="ctr"/>
+            <a:endParaRPr lang="pt-BR" dirty="0"/>
+          </a:p>
+        </p:txBody>
+      </p:sp>
+      <p:sp>
+        <p:nvSpPr>
+          <p:cNvPr id="2" name="Título 1">
+            <a:extLst>
+              <a:ext uri="{FF2B5EF4-FFF2-40B4-BE49-F238E27FC236}">
+                <a16:creationId xmlns:a16="http://schemas.microsoft.com/office/drawing/2014/main" id="{7A072A52-DADE-14B4-BE31-BFEEC72E9528}"/>
+              </a:ext>
+            </a:extLst>
+          </p:cNvPr>
+          <p:cNvSpPr>
+            <a:spLocks noGrp="1"/>
+          </p:cNvSpPr>
+          <p:nvPr>
+            <p:ph type="title"/>
+          </p:nvPr>
+        </p:nvSpPr>
+        <p:spPr>
+          <a:xfrm>
+            <a:off x="0" y="-1"/>
+            <a:ext cx="12192000" cy="1325563"/>
+          </a:xfrm>
+        </p:spPr>
+        <p:txBody>
+          <a:bodyPr/>
+          <a:lstStyle/>
+          <a:p>
+            <a:pPr algn="ctr"/>
+            <a:r>
+              <a:rPr lang="pt-BR" dirty="0">
+                <a:solidFill>
+                  <a:schemeClr val="bg1"/>
+                </a:solidFill>
+              </a:rPr>
+              <a:t>Operações de Entrada e Saída</a:t>
+            </a:r>
+          </a:p>
+        </p:txBody>
+      </p:sp>
+      <p:sp>
+        <p:nvSpPr>
+          <p:cNvPr id="12" name="AutoShape 6" descr="Lógica Proposicional x Lógica de Argumento ⋆ Colaborae">
+            <a:extLst>
+              <a:ext uri="{FF2B5EF4-FFF2-40B4-BE49-F238E27FC236}">
+                <a16:creationId xmlns:a16="http://schemas.microsoft.com/office/drawing/2014/main" id="{26B6617B-8F7B-A04E-715D-B35CB3F60B71}"/>
+              </a:ext>
+            </a:extLst>
+          </p:cNvPr>
+          <p:cNvSpPr>
+            <a:spLocks noChangeAspect="1" noChangeArrowheads="1"/>
+          </p:cNvSpPr>
+          <p:nvPr/>
+        </p:nvSpPr>
+        <p:spPr bwMode="auto">
+          <a:xfrm>
+            <a:off x="5943600" y="-1707776"/>
+            <a:ext cx="5289176" cy="5289176"/>
+          </a:xfrm>
+          <a:prstGeom prst="rect">
+            <a:avLst/>
+          </a:prstGeom>
+          <a:noFill/>
+          <a:extLst>
+            <a:ext uri="{909E8E84-426E-40DD-AFC4-6F175D3DCCD1}">
+              <a14:hiddenFill xmlns:a14="http://schemas.microsoft.com/office/drawing/2010/main">
+                <a:solidFill>
+                  <a:srgbClr val="FFFFFF"/>
+                </a:solidFill>
+              </a14:hiddenFill>
+            </a:ext>
+          </a:extLst>
+        </p:spPr>
+        <p:txBody>
+          <a:bodyPr vert="horz" wrap="square" lIns="91440" tIns="45720" rIns="91440" bIns="45720" numCol="1" anchor="t" anchorCtr="0" compatLnSpc="1">
+            <a:prstTxWarp prst="textNoShape">
+              <a:avLst/>
+            </a:prstTxWarp>
+          </a:bodyPr>
+          <a:lstStyle/>
+          <a:p>
+            <a:endParaRPr lang="pt-BR"/>
+          </a:p>
+        </p:txBody>
+      </p:sp>
+      <p:sp>
+        <p:nvSpPr>
+          <p:cNvPr id="6" name="Espaço Reservado para Conteúdo 5">
+            <a:extLst>
+              <a:ext uri="{FF2B5EF4-FFF2-40B4-BE49-F238E27FC236}">
+                <a16:creationId xmlns:a16="http://schemas.microsoft.com/office/drawing/2014/main" id="{066640E8-C00D-FF14-9248-9BFAE856196A}"/>
+              </a:ext>
+            </a:extLst>
+          </p:cNvPr>
+          <p:cNvSpPr>
+            <a:spLocks noGrp="1"/>
+          </p:cNvSpPr>
+          <p:nvPr>
+            <p:ph idx="1"/>
+          </p:nvPr>
+        </p:nvSpPr>
+        <p:spPr>
+          <a:xfrm>
+            <a:off x="858001" y="1744579"/>
+            <a:ext cx="10547936" cy="4963787"/>
+          </a:xfrm>
+        </p:spPr>
+        <p:txBody>
+          <a:bodyPr>
+            <a:normAutofit/>
+          </a:bodyPr>
+          <a:lstStyle/>
+          <a:p>
+            <a:r>
+              <a:rPr lang="pt-BR" sz="2400" dirty="0"/>
+              <a:t>A entrada de dados no teclado é feita com a função </a:t>
+            </a:r>
+            <a:r>
+              <a:rPr lang="pt-BR" sz="2400" b="1" i="1" dirty="0" err="1"/>
+              <a:t>scanf</a:t>
+            </a:r>
+            <a:r>
+              <a:rPr lang="pt-BR" sz="2400" b="1" i="1" dirty="0"/>
+              <a:t>():</a:t>
+            </a:r>
+          </a:p>
+          <a:p>
+            <a:endParaRPr lang="pt-BR" sz="2400" b="1" i="1" dirty="0"/>
+          </a:p>
+          <a:p>
+            <a:endParaRPr lang="pt-BR" sz="2400" b="1" i="1" dirty="0"/>
+          </a:p>
+          <a:p>
+            <a:endParaRPr lang="pt-BR" sz="2400" b="1" i="1" dirty="0"/>
+          </a:p>
+          <a:p>
+            <a:endParaRPr lang="pt-BR" sz="2400" b="1" i="1" dirty="0"/>
+          </a:p>
+          <a:p>
+            <a:endParaRPr lang="pt-BR" sz="2400" b="1" i="1" dirty="0"/>
+          </a:p>
+          <a:p>
+            <a:endParaRPr lang="pt-BR" sz="2400" dirty="0"/>
+          </a:p>
+          <a:p>
+            <a:r>
+              <a:rPr lang="pt-BR" sz="2400" dirty="0"/>
+              <a:t>A função utiliza o especificador de formato para definir como tratar o valor de entrada.</a:t>
+            </a:r>
+          </a:p>
+          <a:p>
+            <a:r>
+              <a:rPr lang="pt-BR" sz="2400" dirty="0"/>
+              <a:t>Em sequencia, a função armazena a entrada na variável definida, utilizando a referência ao </a:t>
+            </a:r>
+            <a:r>
+              <a:rPr lang="pt-BR" sz="2400" b="1" dirty="0"/>
+              <a:t>endereço de memória </a:t>
+            </a:r>
+            <a:r>
+              <a:rPr lang="pt-BR" sz="2400" dirty="0"/>
+              <a:t>associado à variável (&amp;a).</a:t>
+            </a:r>
+            <a:endParaRPr lang="pt-BR" sz="2400" b="1" dirty="0"/>
+          </a:p>
+          <a:p>
+            <a:pPr marL="0" indent="0">
+              <a:buNone/>
+            </a:pPr>
+            <a:endParaRPr lang="pt-BR" sz="2400" dirty="0"/>
+          </a:p>
+          <a:p>
+            <a:pPr marL="0" indent="0">
+              <a:buNone/>
+            </a:pPr>
+            <a:endParaRPr lang="pt-BR" sz="2400" dirty="0"/>
+          </a:p>
+          <a:p>
+            <a:pPr lvl="1"/>
+            <a:endParaRPr lang="pt-BR" sz="2000" b="1" i="1" dirty="0"/>
+          </a:p>
+          <a:p>
+            <a:pPr lvl="1"/>
+            <a:endParaRPr lang="pt-BR" sz="2000" b="1" i="1" dirty="0"/>
+          </a:p>
+          <a:p>
+            <a:pPr lvl="1"/>
+            <a:endParaRPr lang="pt-BR" sz="1800" b="1" i="1" dirty="0"/>
+          </a:p>
+          <a:p>
+            <a:pPr lvl="1"/>
+            <a:endParaRPr lang="pt-BR" sz="1800" b="1" i="1" dirty="0"/>
+          </a:p>
+        </p:txBody>
+      </p:sp>
+      <p:pic>
+        <p:nvPicPr>
+          <p:cNvPr id="4" name="Imagem 3">
+            <a:extLst>
+              <a:ext uri="{FF2B5EF4-FFF2-40B4-BE49-F238E27FC236}">
+                <a16:creationId xmlns:a16="http://schemas.microsoft.com/office/drawing/2014/main" id="{C767E36F-01FF-4000-BBB2-1DA0DE9AEBF0}"/>
+              </a:ext>
+            </a:extLst>
+          </p:cNvPr>
+          <p:cNvPicPr>
+            <a:picLocks noChangeAspect="1"/>
+          </p:cNvPicPr>
+          <p:nvPr/>
+        </p:nvPicPr>
+        <p:blipFill>
+          <a:blip r:embed="rId3"/>
+          <a:stretch>
+            <a:fillRect/>
+          </a:stretch>
+        </p:blipFill>
+        <p:spPr>
+          <a:xfrm>
+            <a:off x="1575636" y="2649956"/>
+            <a:ext cx="5238750" cy="1790700"/>
+          </a:xfrm>
+          <a:prstGeom prst="rect">
+            <a:avLst/>
+          </a:prstGeom>
+        </p:spPr>
+      </p:pic>
+    </p:spTree>
+    <p:extLst>
+      <p:ext uri="{BB962C8B-B14F-4D97-AF65-F5344CB8AC3E}">
+        <p14:creationId xmlns:p14="http://schemas.microsoft.com/office/powerpoint/2010/main" val="4275093067"/>
       </p:ext>
     </p:extLst>
   </p:cSld>

--- a/UNIUBE-LP/Teoria_LP.pptx
+++ b/UNIUBE-LP/Teoria_LP.pptx
@@ -240,7 +240,7 @@
           <a:p>
             <a:fld id="{6ED03497-8374-466E-85FA-95E1138D8F6E}" type="datetimeFigureOut">
               <a:rPr lang="pt-BR" smtClean="0"/>
-              <a:t>05/08/2026</a:t>
+              <a:t>10/08/2026</a:t>
             </a:fld>
             <a:endParaRPr lang="pt-BR"/>
           </a:p>
@@ -9775,7 +9775,7 @@
           <a:p>
             <a:fld id="{A87E3B6E-8316-4A1C-BADA-DB7F3456EEF1}" type="datetimeFigureOut">
               <a:rPr lang="pt-BR" smtClean="0"/>
-              <a:t>05/08/2026</a:t>
+              <a:t>10/08/2026</a:t>
             </a:fld>
             <a:endParaRPr lang="pt-BR"/>
           </a:p>
@@ -9973,7 +9973,7 @@
           <a:p>
             <a:fld id="{A87E3B6E-8316-4A1C-BADA-DB7F3456EEF1}" type="datetimeFigureOut">
               <a:rPr lang="pt-BR" smtClean="0"/>
-              <a:t>05/08/2026</a:t>
+              <a:t>10/08/2026</a:t>
             </a:fld>
             <a:endParaRPr lang="pt-BR"/>
           </a:p>
@@ -10181,7 +10181,7 @@
           <a:p>
             <a:fld id="{A87E3B6E-8316-4A1C-BADA-DB7F3456EEF1}" type="datetimeFigureOut">
               <a:rPr lang="pt-BR" smtClean="0"/>
-              <a:t>05/08/2026</a:t>
+              <a:t>10/08/2026</a:t>
             </a:fld>
             <a:endParaRPr lang="pt-BR"/>
           </a:p>
@@ -10417,7 +10417,7 @@
           <a:p>
             <a:fld id="{A87E3B6E-8316-4A1C-BADA-DB7F3456EEF1}" type="datetimeFigureOut">
               <a:rPr lang="pt-BR" smtClean="0"/>
-              <a:t>05/08/2026</a:t>
+              <a:t>10/08/2026</a:t>
             </a:fld>
             <a:endParaRPr lang="pt-BR"/>
           </a:p>
@@ -10587,7 +10587,7 @@
           <a:p>
             <a:fld id="{A87E3B6E-8316-4A1C-BADA-DB7F3456EEF1}" type="datetimeFigureOut">
               <a:rPr lang="pt-BR" smtClean="0"/>
-              <a:t>05/08/2026</a:t>
+              <a:t>10/08/2026</a:t>
             </a:fld>
             <a:endParaRPr lang="pt-BR"/>
           </a:p>
@@ -10855,7 +10855,7 @@
           <a:p>
             <a:fld id="{A87E3B6E-8316-4A1C-BADA-DB7F3456EEF1}" type="datetimeFigureOut">
               <a:rPr lang="pt-BR" smtClean="0"/>
-              <a:t>05/08/2026</a:t>
+              <a:t>10/08/2026</a:t>
             </a:fld>
             <a:endParaRPr lang="pt-BR"/>
           </a:p>
@@ -11087,7 +11087,7 @@
           <a:p>
             <a:fld id="{A87E3B6E-8316-4A1C-BADA-DB7F3456EEF1}" type="datetimeFigureOut">
               <a:rPr lang="pt-BR" smtClean="0"/>
-              <a:t>05/08/2026</a:t>
+              <a:t>10/08/2026</a:t>
             </a:fld>
             <a:endParaRPr lang="pt-BR"/>
           </a:p>
@@ -11442,7 +11442,7 @@
           <a:p>
             <a:fld id="{A87E3B6E-8316-4A1C-BADA-DB7F3456EEF1}" type="datetimeFigureOut">
               <a:rPr lang="pt-BR" smtClean="0"/>
-              <a:t>05/08/2026</a:t>
+              <a:t>10/08/2026</a:t>
             </a:fld>
             <a:endParaRPr lang="pt-BR"/>
           </a:p>
@@ -11583,7 +11583,7 @@
           <a:p>
             <a:fld id="{A87E3B6E-8316-4A1C-BADA-DB7F3456EEF1}" type="datetimeFigureOut">
               <a:rPr lang="pt-BR" smtClean="0"/>
-              <a:t>05/08/2026</a:t>
+              <a:t>10/08/2026</a:t>
             </a:fld>
             <a:endParaRPr lang="pt-BR"/>
           </a:p>
@@ -11678,7 +11678,7 @@
           <a:p>
             <a:fld id="{A87E3B6E-8316-4A1C-BADA-DB7F3456EEF1}" type="datetimeFigureOut">
               <a:rPr lang="pt-BR" smtClean="0"/>
-              <a:t>05/08/2026</a:t>
+              <a:t>10/08/2026</a:t>
             </a:fld>
             <a:endParaRPr lang="pt-BR"/>
           </a:p>
@@ -12035,7 +12035,7 @@
           <a:p>
             <a:fld id="{A87E3B6E-8316-4A1C-BADA-DB7F3456EEF1}" type="datetimeFigureOut">
               <a:rPr lang="pt-BR" smtClean="0"/>
-              <a:t>05/08/2026</a:t>
+              <a:t>10/08/2026</a:t>
             </a:fld>
             <a:endParaRPr lang="pt-BR"/>
           </a:p>
@@ -12236,7 +12236,7 @@
           <a:p>
             <a:fld id="{A87E3B6E-8316-4A1C-BADA-DB7F3456EEF1}" type="datetimeFigureOut">
               <a:rPr lang="pt-BR" smtClean="0"/>
-              <a:t>05/08/2026</a:t>
+              <a:t>10/08/2026</a:t>
             </a:fld>
             <a:endParaRPr lang="pt-BR"/>
           </a:p>
@@ -12589,7 +12589,7 @@
           <a:p>
             <a:fld id="{A87E3B6E-8316-4A1C-BADA-DB7F3456EEF1}" type="datetimeFigureOut">
               <a:rPr lang="pt-BR" smtClean="0"/>
-              <a:t>05/08/2026</a:t>
+              <a:t>10/08/2026</a:t>
             </a:fld>
             <a:endParaRPr lang="pt-BR"/>
           </a:p>
@@ -12774,7 +12774,7 @@
           <a:p>
             <a:fld id="{A87E3B6E-8316-4A1C-BADA-DB7F3456EEF1}" type="datetimeFigureOut">
               <a:rPr lang="pt-BR" smtClean="0"/>
-              <a:t>05/08/2026</a:t>
+              <a:t>10/08/2026</a:t>
             </a:fld>
             <a:endParaRPr lang="pt-BR"/>
           </a:p>
@@ -12954,7 +12954,7 @@
           <a:p>
             <a:fld id="{A87E3B6E-8316-4A1C-BADA-DB7F3456EEF1}" type="datetimeFigureOut">
               <a:rPr lang="pt-BR" smtClean="0"/>
-              <a:t>05/08/2026</a:t>
+              <a:t>10/08/2026</a:t>
             </a:fld>
             <a:endParaRPr lang="pt-BR"/>
           </a:p>
@@ -13217,7 +13217,7 @@
           <a:p>
             <a:fld id="{A87E3B6E-8316-4A1C-BADA-DB7F3456EEF1}" type="datetimeFigureOut">
               <a:rPr lang="pt-BR" smtClean="0"/>
-              <a:t>05/08/2026</a:t>
+              <a:t>10/08/2026</a:t>
             </a:fld>
             <a:endParaRPr lang="pt-BR"/>
           </a:p>
@@ -13482,7 +13482,7 @@
           <a:p>
             <a:fld id="{A87E3B6E-8316-4A1C-BADA-DB7F3456EEF1}" type="datetimeFigureOut">
               <a:rPr lang="pt-BR" smtClean="0"/>
-              <a:t>05/08/2026</a:t>
+              <a:t>10/08/2026</a:t>
             </a:fld>
             <a:endParaRPr lang="pt-BR"/>
           </a:p>
@@ -13894,7 +13894,7 @@
           <a:p>
             <a:fld id="{A87E3B6E-8316-4A1C-BADA-DB7F3456EEF1}" type="datetimeFigureOut">
               <a:rPr lang="pt-BR" smtClean="0"/>
-              <a:t>05/08/2026</a:t>
+              <a:t>10/08/2026</a:t>
             </a:fld>
             <a:endParaRPr lang="pt-BR"/>
           </a:p>
@@ -14035,7 +14035,7 @@
           <a:p>
             <a:fld id="{A87E3B6E-8316-4A1C-BADA-DB7F3456EEF1}" type="datetimeFigureOut">
               <a:rPr lang="pt-BR" smtClean="0"/>
-              <a:t>05/08/2026</a:t>
+              <a:t>10/08/2026</a:t>
             </a:fld>
             <a:endParaRPr lang="pt-BR"/>
           </a:p>
@@ -14148,7 +14148,7 @@
           <a:p>
             <a:fld id="{A87E3B6E-8316-4A1C-BADA-DB7F3456EEF1}" type="datetimeFigureOut">
               <a:rPr lang="pt-BR" smtClean="0"/>
-              <a:t>05/08/2026</a:t>
+              <a:t>10/08/2026</a:t>
             </a:fld>
             <a:endParaRPr lang="pt-BR"/>
           </a:p>
@@ -14459,7 +14459,7 @@
           <a:p>
             <a:fld id="{A87E3B6E-8316-4A1C-BADA-DB7F3456EEF1}" type="datetimeFigureOut">
               <a:rPr lang="pt-BR" smtClean="0"/>
-              <a:t>05/08/2026</a:t>
+              <a:t>10/08/2026</a:t>
             </a:fld>
             <a:endParaRPr lang="pt-BR"/>
           </a:p>
@@ -14747,7 +14747,7 @@
           <a:p>
             <a:fld id="{A87E3B6E-8316-4A1C-BADA-DB7F3456EEF1}" type="datetimeFigureOut">
               <a:rPr lang="pt-BR" smtClean="0"/>
-              <a:t>05/08/2026</a:t>
+              <a:t>10/08/2026</a:t>
             </a:fld>
             <a:endParaRPr lang="pt-BR"/>
           </a:p>
@@ -14988,7 +14988,7 @@
           <a:p>
             <a:fld id="{A87E3B6E-8316-4A1C-BADA-DB7F3456EEF1}" type="datetimeFigureOut">
               <a:rPr lang="pt-BR" smtClean="0"/>
-              <a:t>05/08/2026</a:t>
+              <a:t>10/08/2026</a:t>
             </a:fld>
             <a:endParaRPr lang="pt-BR"/>
           </a:p>
@@ -15552,7 +15552,7 @@
           <a:p>
             <a:fld id="{A87E3B6E-8316-4A1C-BADA-DB7F3456EEF1}" type="datetimeFigureOut">
               <a:rPr lang="pt-BR" smtClean="0"/>
-              <a:t>05/08/2026</a:t>
+              <a:t>10/08/2026</a:t>
             </a:fld>
             <a:endParaRPr lang="pt-BR"/>
           </a:p>
@@ -27087,8 +27087,8 @@
           </a:p>
         </p:txBody>
       </p:sp>
-      <mc:AlternateContent xmlns:mc="http://schemas.openxmlformats.org/markup-compatibility/2006">
-        <mc:Choice xmlns:a14="http://schemas.microsoft.com/office/drawing/2010/main" Requires="a14">
+      <mc:AlternateContent xmlns:mc="http://schemas.openxmlformats.org/markup-compatibility/2006" xmlns:a14="http://schemas.microsoft.com/office/drawing/2010/main">
+        <mc:Choice Requires="a14">
           <p:sp>
             <p:nvSpPr>
               <p:cNvPr id="6" name="Espaço Reservado para Conteúdo 5">
@@ -27379,7 +27379,7 @@
             </p:txBody>
           </p:sp>
         </mc:Choice>
-        <mc:Fallback>
+        <mc:Fallback xmlns="">
           <p:sp>
             <p:nvSpPr>
               <p:cNvPr id="6" name="Espaço Reservado para Conteúdo 5">
@@ -28030,12 +28030,8 @@
               <a:buAutoNum type="arabicPeriod"/>
             </a:pPr>
             <a:r>
-              <a:rPr lang="pt-BR" sz="2600" dirty="0"/>
-              <a:t>Também é permitido fazer casting entre </a:t>
-            </a:r>
-            <a:r>
               <a:rPr lang="pt-BR" sz="2400" dirty="0"/>
-              <a:t>Ponteiros como:</a:t>
+              <a:t>Também é permitido fazer casting entre Ponteiros como:</a:t>
             </a:r>
           </a:p>
           <a:p>
@@ -28068,15 +28064,7 @@
             </a:r>
             <a:r>
               <a:rPr lang="pt-BR" sz="2200" dirty="0"/>
-              <a:t>  (</a:t>
-            </a:r>
-            <a:r>
-              <a:rPr lang="pt-BR" sz="2200" dirty="0" err="1"/>
-              <a:t>exije</a:t>
-            </a:r>
-            <a:r>
-              <a:rPr lang="pt-BR" sz="2200" dirty="0"/>
-              <a:t> cuidado para evitar erros de acesso à memória)</a:t>
+              <a:t>  (exige cuidado para evitar erros de acesso à memória)</a:t>
             </a:r>
           </a:p>
           <a:p>
@@ -28092,23 +28080,23 @@
               <a:buAutoNum type="arabicPeriod"/>
             </a:pPr>
             <a:r>
-              <a:rPr lang="pt-BR" sz="2600" dirty="0"/>
+              <a:rPr lang="pt-BR" sz="2400" dirty="0"/>
               <a:t>Não é permitido o casting entre tipos primitivos e tipos complexos (como o </a:t>
             </a:r>
             <a:r>
-              <a:rPr lang="pt-BR" sz="2600" dirty="0" err="1"/>
+              <a:rPr lang="pt-BR" sz="2400" dirty="0" err="1"/>
               <a:t>struct</a:t>
             </a:r>
             <a:r>
-              <a:rPr lang="pt-BR" sz="2600" dirty="0"/>
+              <a:rPr lang="pt-BR" sz="2400" dirty="0"/>
               <a:t>), nem a conversão de </a:t>
             </a:r>
             <a:r>
-              <a:rPr lang="pt-BR" sz="2600" dirty="0" err="1"/>
+              <a:rPr lang="pt-BR" sz="2400" dirty="0" err="1"/>
               <a:t>strings</a:t>
             </a:r>
             <a:r>
-              <a:rPr lang="pt-BR" sz="2600" dirty="0"/>
+              <a:rPr lang="pt-BR" sz="2400" dirty="0"/>
               <a:t>  para valores numéricos </a:t>
             </a:r>
           </a:p>

--- a/UNIUBE-LP/Teoria_LP.pptx
+++ b/UNIUBE-LP/Teoria_LP.pptx
@@ -6,52 +6,48 @@
     <p:sldMasterId id="2147483684" r:id="rId2"/>
   </p:sldMasterIdLst>
   <p:notesMasterIdLst>
-    <p:notesMasterId r:id="rId46"/>
+    <p:notesMasterId r:id="rId42"/>
   </p:notesMasterIdLst>
   <p:sldIdLst>
-    <p:sldId id="276" r:id="rId3"/>
-    <p:sldId id="277" r:id="rId4"/>
-    <p:sldId id="278" r:id="rId5"/>
-    <p:sldId id="279" r:id="rId6"/>
-    <p:sldId id="256" r:id="rId7"/>
-    <p:sldId id="257" r:id="rId8"/>
-    <p:sldId id="261" r:id="rId9"/>
-    <p:sldId id="259" r:id="rId10"/>
-    <p:sldId id="262" r:id="rId11"/>
-    <p:sldId id="264" r:id="rId12"/>
-    <p:sldId id="265" r:id="rId13"/>
-    <p:sldId id="267" r:id="rId14"/>
-    <p:sldId id="273" r:id="rId15"/>
-    <p:sldId id="268" r:id="rId16"/>
-    <p:sldId id="275" r:id="rId17"/>
-    <p:sldId id="269" r:id="rId18"/>
-    <p:sldId id="270" r:id="rId19"/>
-    <p:sldId id="271" r:id="rId20"/>
-    <p:sldId id="280" r:id="rId21"/>
-    <p:sldId id="281" r:id="rId22"/>
-    <p:sldId id="282" r:id="rId23"/>
-    <p:sldId id="283" r:id="rId24"/>
-    <p:sldId id="285" r:id="rId25"/>
-    <p:sldId id="286" r:id="rId26"/>
-    <p:sldId id="287" r:id="rId27"/>
-    <p:sldId id="288" r:id="rId28"/>
-    <p:sldId id="289" r:id="rId29"/>
-    <p:sldId id="290" r:id="rId30"/>
-    <p:sldId id="294" r:id="rId31"/>
-    <p:sldId id="292" r:id="rId32"/>
-    <p:sldId id="293" r:id="rId33"/>
-    <p:sldId id="291" r:id="rId34"/>
-    <p:sldId id="298" r:id="rId35"/>
-    <p:sldId id="296" r:id="rId36"/>
-    <p:sldId id="295" r:id="rId37"/>
-    <p:sldId id="299" r:id="rId38"/>
-    <p:sldId id="300" r:id="rId39"/>
-    <p:sldId id="301" r:id="rId40"/>
-    <p:sldId id="302" r:id="rId41"/>
-    <p:sldId id="303" r:id="rId42"/>
-    <p:sldId id="304" r:id="rId43"/>
-    <p:sldId id="305" r:id="rId44"/>
-    <p:sldId id="306" r:id="rId45"/>
+    <p:sldId id="256" r:id="rId3"/>
+    <p:sldId id="257" r:id="rId4"/>
+    <p:sldId id="261" r:id="rId5"/>
+    <p:sldId id="259" r:id="rId6"/>
+    <p:sldId id="262" r:id="rId7"/>
+    <p:sldId id="264" r:id="rId8"/>
+    <p:sldId id="265" r:id="rId9"/>
+    <p:sldId id="267" r:id="rId10"/>
+    <p:sldId id="273" r:id="rId11"/>
+    <p:sldId id="268" r:id="rId12"/>
+    <p:sldId id="275" r:id="rId13"/>
+    <p:sldId id="269" r:id="rId14"/>
+    <p:sldId id="270" r:id="rId15"/>
+    <p:sldId id="271" r:id="rId16"/>
+    <p:sldId id="280" r:id="rId17"/>
+    <p:sldId id="281" r:id="rId18"/>
+    <p:sldId id="282" r:id="rId19"/>
+    <p:sldId id="283" r:id="rId20"/>
+    <p:sldId id="285" r:id="rId21"/>
+    <p:sldId id="286" r:id="rId22"/>
+    <p:sldId id="287" r:id="rId23"/>
+    <p:sldId id="288" r:id="rId24"/>
+    <p:sldId id="289" r:id="rId25"/>
+    <p:sldId id="290" r:id="rId26"/>
+    <p:sldId id="294" r:id="rId27"/>
+    <p:sldId id="292" r:id="rId28"/>
+    <p:sldId id="293" r:id="rId29"/>
+    <p:sldId id="291" r:id="rId30"/>
+    <p:sldId id="298" r:id="rId31"/>
+    <p:sldId id="296" r:id="rId32"/>
+    <p:sldId id="295" r:id="rId33"/>
+    <p:sldId id="299" r:id="rId34"/>
+    <p:sldId id="300" r:id="rId35"/>
+    <p:sldId id="301" r:id="rId36"/>
+    <p:sldId id="302" r:id="rId37"/>
+    <p:sldId id="303" r:id="rId38"/>
+    <p:sldId id="304" r:id="rId39"/>
+    <p:sldId id="305" r:id="rId40"/>
+    <p:sldId id="306" r:id="rId41"/>
   </p:sldIdLst>
   <p:sldSz cx="12192000" cy="6858000"/>
   <p:notesSz cx="6858000" cy="9144000"/>
@@ -240,7 +236,7 @@
           <a:p>
             <a:fld id="{6ED03497-8374-466E-85FA-95E1138D8F6E}" type="datetimeFigureOut">
               <a:rPr lang="pt-BR" smtClean="0"/>
-              <a:t>10/08/2026</a:t>
+              <a:t>11/08/2026</a:t>
             </a:fld>
             <a:endParaRPr lang="pt-BR"/>
           </a:p>
@@ -512,13 +508,7 @@
   <p:cSld>
     <p:spTree>
       <p:nvGrpSpPr>
-        <p:cNvPr id="1" name="">
-          <a:extLst>
-            <a:ext uri="{FF2B5EF4-FFF2-40B4-BE49-F238E27FC236}">
-              <a16:creationId xmlns:a16="http://schemas.microsoft.com/office/drawing/2014/main" id="{8F471A39-F6AA-E07D-1DE7-88B3686AF22A}"/>
-            </a:ext>
-          </a:extLst>
-        </p:cNvPr>
+        <p:cNvPr id="1" name=""/>
         <p:cNvGrpSpPr/>
         <p:nvPr/>
       </p:nvGrpSpPr>
@@ -532,13 +522,7 @@
       </p:grpSpPr>
       <p:sp>
         <p:nvSpPr>
-          <p:cNvPr id="2" name="Espaço Reservado para Imagem de Slide 1">
-            <a:extLst>
-              <a:ext uri="{FF2B5EF4-FFF2-40B4-BE49-F238E27FC236}">
-                <a16:creationId xmlns:a16="http://schemas.microsoft.com/office/drawing/2014/main" id="{D2C1B8A8-4E05-2EF9-A649-DFF004BCFD3C}"/>
-              </a:ext>
-            </a:extLst>
-          </p:cNvPr>
+          <p:cNvPr id="2" name="Espaço Reservado para Imagem de Slide 1"/>
           <p:cNvSpPr>
             <a:spLocks noGrp="1" noRot="1" noChangeAspect="1"/>
           </p:cNvSpPr>
@@ -550,13 +534,7 @@
       </p:sp>
       <p:sp>
         <p:nvSpPr>
-          <p:cNvPr id="3" name="Espaço Reservado para Anotações 2">
-            <a:extLst>
-              <a:ext uri="{FF2B5EF4-FFF2-40B4-BE49-F238E27FC236}">
-                <a16:creationId xmlns:a16="http://schemas.microsoft.com/office/drawing/2014/main" id="{A2B0F470-7202-A201-1AD1-9C1760C1C93D}"/>
-              </a:ext>
-            </a:extLst>
-          </p:cNvPr>
+          <p:cNvPr id="3" name="Espaço Reservado para Anotações 2"/>
           <p:cNvSpPr>
             <a:spLocks noGrp="1"/>
           </p:cNvSpPr>
@@ -575,13 +553,7 @@
       </p:sp>
       <p:sp>
         <p:nvSpPr>
-          <p:cNvPr id="4" name="Espaço Reservado para Número de Slide 3">
-            <a:extLst>
-              <a:ext uri="{FF2B5EF4-FFF2-40B4-BE49-F238E27FC236}">
-                <a16:creationId xmlns:a16="http://schemas.microsoft.com/office/drawing/2014/main" id="{930E76AC-5DA0-6118-D4F3-63E6EC0DC1A8}"/>
-              </a:ext>
-            </a:extLst>
-          </p:cNvPr>
+          <p:cNvPr id="4" name="Espaço Reservado para Número de Slide 3"/>
           <p:cNvSpPr>
             <a:spLocks noGrp="1"/>
           </p:cNvSpPr>
@@ -605,7 +577,7 @@
     </p:spTree>
     <p:extLst>
       <p:ext uri="{BB962C8B-B14F-4D97-AF65-F5344CB8AC3E}">
-        <p14:creationId xmlns:p14="http://schemas.microsoft.com/office/powerpoint/2010/main" val="1640450201"/>
+        <p14:creationId xmlns:p14="http://schemas.microsoft.com/office/powerpoint/2010/main" val="1106096561"/>
       </p:ext>
     </p:extLst>
   </p:cSld>
@@ -616,1329 +588,6 @@
 </file>
 
 <file path=ppt/notesSlides/notesSlide10.xml><?xml version="1.0" encoding="utf-8"?>
-<p:notes xmlns:a="http://schemas.openxmlformats.org/drawingml/2006/main" xmlns:r="http://schemas.openxmlformats.org/officeDocument/2006/relationships" xmlns:p="http://schemas.openxmlformats.org/presentationml/2006/main">
-  <p:cSld>
-    <p:spTree>
-      <p:nvGrpSpPr>
-        <p:cNvPr id="1" name="">
-          <a:extLst>
-            <a:ext uri="{FF2B5EF4-FFF2-40B4-BE49-F238E27FC236}">
-              <a16:creationId xmlns:a16="http://schemas.microsoft.com/office/drawing/2014/main" id="{3E9EB377-559E-8593-32F4-69B1B87A2718}"/>
-            </a:ext>
-          </a:extLst>
-        </p:cNvPr>
-        <p:cNvGrpSpPr/>
-        <p:nvPr/>
-      </p:nvGrpSpPr>
-      <p:grpSpPr>
-        <a:xfrm>
-          <a:off x="0" y="0"/>
-          <a:ext cx="0" cy="0"/>
-          <a:chOff x="0" y="0"/>
-          <a:chExt cx="0" cy="0"/>
-        </a:xfrm>
-      </p:grpSpPr>
-      <p:sp>
-        <p:nvSpPr>
-          <p:cNvPr id="2" name="Espaço Reservado para Imagem de Slide 1">
-            <a:extLst>
-              <a:ext uri="{FF2B5EF4-FFF2-40B4-BE49-F238E27FC236}">
-                <a16:creationId xmlns:a16="http://schemas.microsoft.com/office/drawing/2014/main" id="{6B9343CE-6DBE-D912-4E15-15583EEAAF2D}"/>
-              </a:ext>
-            </a:extLst>
-          </p:cNvPr>
-          <p:cNvSpPr>
-            <a:spLocks noGrp="1" noRot="1" noChangeAspect="1"/>
-          </p:cNvSpPr>
-          <p:nvPr>
-            <p:ph type="sldImg"/>
-          </p:nvPr>
-        </p:nvSpPr>
-        <p:spPr/>
-      </p:sp>
-      <p:sp>
-        <p:nvSpPr>
-          <p:cNvPr id="3" name="Espaço Reservado para Anotações 2">
-            <a:extLst>
-              <a:ext uri="{FF2B5EF4-FFF2-40B4-BE49-F238E27FC236}">
-                <a16:creationId xmlns:a16="http://schemas.microsoft.com/office/drawing/2014/main" id="{5DDD4AA0-3B61-D158-399C-06F757EF84C9}"/>
-              </a:ext>
-            </a:extLst>
-          </p:cNvPr>
-          <p:cNvSpPr>
-            <a:spLocks noGrp="1"/>
-          </p:cNvSpPr>
-          <p:nvPr>
-            <p:ph type="body" idx="1"/>
-          </p:nvPr>
-        </p:nvSpPr>
-        <p:spPr/>
-        <p:txBody>
-          <a:bodyPr/>
-          <a:lstStyle/>
-          <a:p>
-            <a:r>
-              <a:rPr lang="pt-BR" sz="1200" b="1" kern="1200" dirty="0">
-                <a:solidFill>
-                  <a:schemeClr val="tx1"/>
-                </a:solidFill>
-                <a:effectLst/>
-                <a:latin typeface="+mn-lt"/>
-                <a:ea typeface="+mn-ea"/>
-                <a:cs typeface="+mn-cs"/>
-              </a:rPr>
-              <a:t>Sistemas Embarcados</a:t>
-            </a:r>
-            <a:r>
-              <a:rPr lang="pt-BR" sz="1200" b="0" kern="1200" dirty="0">
-                <a:solidFill>
-                  <a:schemeClr val="tx1"/>
-                </a:solidFill>
-                <a:effectLst/>
-                <a:latin typeface="+mn-lt"/>
-                <a:ea typeface="+mn-ea"/>
-                <a:cs typeface="+mn-cs"/>
-              </a:rPr>
-              <a:t>: Controle direto de microcontroladores em eletrodomésticos e automóveis.</a:t>
-            </a:r>
-          </a:p>
-          <a:p>
-            <a:r>
-              <a:rPr lang="pt-BR" sz="1200" b="1" kern="1200" dirty="0">
-                <a:solidFill>
-                  <a:schemeClr val="tx1"/>
-                </a:solidFill>
-                <a:effectLst/>
-                <a:latin typeface="+mn-lt"/>
-                <a:ea typeface="+mn-ea"/>
-                <a:cs typeface="+mn-cs"/>
-              </a:rPr>
-              <a:t>Desempenho Crítico</a:t>
-            </a:r>
-            <a:r>
-              <a:rPr lang="pt-BR" sz="1200" b="0" kern="1200" dirty="0">
-                <a:solidFill>
-                  <a:schemeClr val="tx1"/>
-                </a:solidFill>
-                <a:effectLst/>
-                <a:latin typeface="+mn-lt"/>
-                <a:ea typeface="+mn-ea"/>
-                <a:cs typeface="+mn-cs"/>
-              </a:rPr>
-              <a:t>: Otimização extrema de partes de código em sistemas operacionais ou drivers de dispositivos.</a:t>
-            </a:r>
-          </a:p>
-          <a:p>
-            <a:r>
-              <a:rPr lang="pt-BR" sz="1200" b="1" kern="1200" dirty="0">
-                <a:solidFill>
-                  <a:schemeClr val="tx1"/>
-                </a:solidFill>
-                <a:effectLst/>
-                <a:latin typeface="+mn-lt"/>
-                <a:ea typeface="+mn-ea"/>
-                <a:cs typeface="+mn-cs"/>
-              </a:rPr>
-              <a:t>Estudo de Hardware</a:t>
-            </a:r>
-            <a:r>
-              <a:rPr lang="pt-BR" sz="1200" b="0" kern="1200" dirty="0">
-                <a:solidFill>
-                  <a:schemeClr val="tx1"/>
-                </a:solidFill>
-                <a:effectLst/>
-                <a:latin typeface="+mn-lt"/>
-                <a:ea typeface="+mn-ea"/>
-                <a:cs typeface="+mn-cs"/>
-              </a:rPr>
-              <a:t>: Ajuda a compreender profundamente como a CPU executa instruções e gerencia a memória.</a:t>
-            </a:r>
-          </a:p>
-          <a:p>
-            <a:endParaRPr lang="pt-BR" dirty="0"/>
-          </a:p>
-        </p:txBody>
-      </p:sp>
-      <p:sp>
-        <p:nvSpPr>
-          <p:cNvPr id="4" name="Espaço Reservado para Número de Slide 3">
-            <a:extLst>
-              <a:ext uri="{FF2B5EF4-FFF2-40B4-BE49-F238E27FC236}">
-                <a16:creationId xmlns:a16="http://schemas.microsoft.com/office/drawing/2014/main" id="{CFF05C5D-FB7F-167A-C57D-BFD232655AEB}"/>
-              </a:ext>
-            </a:extLst>
-          </p:cNvPr>
-          <p:cNvSpPr>
-            <a:spLocks noGrp="1"/>
-          </p:cNvSpPr>
-          <p:nvPr>
-            <p:ph type="sldNum" sz="quarter" idx="5"/>
-          </p:nvPr>
-        </p:nvSpPr>
-        <p:spPr/>
-        <p:txBody>
-          <a:bodyPr/>
-          <a:lstStyle/>
-          <a:p>
-            <a:fld id="{80F36A49-A1DD-40F8-B8AD-E6F5365256CB}" type="slidenum">
-              <a:rPr lang="pt-BR" smtClean="0"/>
-              <a:t>10</a:t>
-            </a:fld>
-            <a:endParaRPr lang="pt-BR"/>
-          </a:p>
-        </p:txBody>
-      </p:sp>
-    </p:spTree>
-    <p:extLst>
-      <p:ext uri="{BB962C8B-B14F-4D97-AF65-F5344CB8AC3E}">
-        <p14:creationId xmlns:p14="http://schemas.microsoft.com/office/powerpoint/2010/main" val="1390350425"/>
-      </p:ext>
-    </p:extLst>
-  </p:cSld>
-  <p:clrMapOvr>
-    <a:masterClrMapping/>
-  </p:clrMapOvr>
-</p:notes>
-</file>
-
-<file path=ppt/notesSlides/notesSlide11.xml><?xml version="1.0" encoding="utf-8"?>
-<p:notes xmlns:a="http://schemas.openxmlformats.org/drawingml/2006/main" xmlns:r="http://schemas.openxmlformats.org/officeDocument/2006/relationships" xmlns:p="http://schemas.openxmlformats.org/presentationml/2006/main">
-  <p:cSld>
-    <p:spTree>
-      <p:nvGrpSpPr>
-        <p:cNvPr id="1" name="">
-          <a:extLst>
-            <a:ext uri="{FF2B5EF4-FFF2-40B4-BE49-F238E27FC236}">
-              <a16:creationId xmlns:a16="http://schemas.microsoft.com/office/drawing/2014/main" id="{76E2B2D9-6146-7106-DBA4-40073748A3C8}"/>
-            </a:ext>
-          </a:extLst>
-        </p:cNvPr>
-        <p:cNvGrpSpPr/>
-        <p:nvPr/>
-      </p:nvGrpSpPr>
-      <p:grpSpPr>
-        <a:xfrm>
-          <a:off x="0" y="0"/>
-          <a:ext cx="0" cy="0"/>
-          <a:chOff x="0" y="0"/>
-          <a:chExt cx="0" cy="0"/>
-        </a:xfrm>
-      </p:grpSpPr>
-      <p:sp>
-        <p:nvSpPr>
-          <p:cNvPr id="2" name="Espaço Reservado para Imagem de Slide 1">
-            <a:extLst>
-              <a:ext uri="{FF2B5EF4-FFF2-40B4-BE49-F238E27FC236}">
-                <a16:creationId xmlns:a16="http://schemas.microsoft.com/office/drawing/2014/main" id="{144BB465-009B-BDC8-D694-CAA715C172B6}"/>
-              </a:ext>
-            </a:extLst>
-          </p:cNvPr>
-          <p:cNvSpPr>
-            <a:spLocks noGrp="1" noRot="1" noChangeAspect="1"/>
-          </p:cNvSpPr>
-          <p:nvPr>
-            <p:ph type="sldImg"/>
-          </p:nvPr>
-        </p:nvSpPr>
-        <p:spPr/>
-      </p:sp>
-      <p:sp>
-        <p:nvSpPr>
-          <p:cNvPr id="3" name="Espaço Reservado para Anotações 2">
-            <a:extLst>
-              <a:ext uri="{FF2B5EF4-FFF2-40B4-BE49-F238E27FC236}">
-                <a16:creationId xmlns:a16="http://schemas.microsoft.com/office/drawing/2014/main" id="{05D45F14-6F12-7068-0C5F-A405B1E25FF3}"/>
-              </a:ext>
-            </a:extLst>
-          </p:cNvPr>
-          <p:cNvSpPr>
-            <a:spLocks noGrp="1"/>
-          </p:cNvSpPr>
-          <p:nvPr>
-            <p:ph type="body" idx="1"/>
-          </p:nvPr>
-        </p:nvSpPr>
-        <p:spPr/>
-        <p:txBody>
-          <a:bodyPr/>
-          <a:lstStyle/>
-          <a:p>
-            <a:r>
-              <a:rPr lang="pt-BR" dirty="0" err="1"/>
-              <a:t>Speedcoding</a:t>
-            </a:r>
-            <a:r>
-              <a:rPr lang="pt-BR" dirty="0"/>
-              <a:t> ou </a:t>
-            </a:r>
-            <a:r>
-              <a:rPr lang="pt-BR" dirty="0" err="1"/>
-              <a:t>Speedcode</a:t>
-            </a:r>
-            <a:r>
-              <a:rPr lang="pt-BR" dirty="0"/>
-              <a:t> foi a primeira linguagens de programação de alto nível criada para um computador IBM. </a:t>
-            </a:r>
-          </a:p>
-          <a:p>
-            <a:r>
-              <a:rPr lang="pt-BR" dirty="0"/>
-              <a:t>A linguagem foi desenvolvida por John </a:t>
-            </a:r>
-            <a:r>
-              <a:rPr lang="pt-BR" dirty="0" err="1"/>
-              <a:t>Backus</a:t>
-            </a:r>
-            <a:r>
-              <a:rPr lang="pt-BR" dirty="0"/>
-              <a:t> em 1953 para o IBM 701. </a:t>
-            </a:r>
-          </a:p>
-          <a:p>
-            <a:r>
-              <a:rPr lang="pt-BR" dirty="0"/>
-              <a:t>A ideia surgiu da dificuldade de programação da máquina IBM SSEC, quando </a:t>
-            </a:r>
-            <a:r>
-              <a:rPr lang="pt-BR" dirty="0" err="1"/>
-              <a:t>Backus</a:t>
-            </a:r>
-            <a:r>
-              <a:rPr lang="pt-BR" dirty="0"/>
-              <a:t> foi contratado para calcular posições astronômicas no início dos anos 1950.</a:t>
-            </a:r>
-          </a:p>
-          <a:p>
-            <a:r>
-              <a:rPr lang="pt-BR" dirty="0"/>
-              <a:t>Em sequência, veio o Fortran em 1957 </a:t>
-            </a:r>
-            <a:r>
-              <a:rPr lang="pt-BR" sz="1200" b="0" i="0" kern="1200" dirty="0">
-                <a:solidFill>
-                  <a:schemeClr val="tx1"/>
-                </a:solidFill>
-                <a:effectLst/>
-                <a:latin typeface="+mn-lt"/>
-                <a:ea typeface="+mn-ea"/>
-                <a:cs typeface="+mn-cs"/>
-              </a:rPr>
-              <a:t>uma linguagem de programação voltada para computação científica e técnica, especialmente projetada para executar cálculos complexos com eficiência numa ampla variedade de </a:t>
-            </a:r>
-            <a:r>
-              <a:rPr lang="pt-BR" sz="1200" b="0" i="0" u="none" strike="noStrike" kern="1200" dirty="0">
-                <a:solidFill>
-                  <a:schemeClr val="tx1"/>
-                </a:solidFill>
-                <a:effectLst/>
-                <a:latin typeface="+mn-lt"/>
-                <a:ea typeface="+mn-ea"/>
-                <a:cs typeface="+mn-cs"/>
-              </a:rPr>
-              <a:t>processadores.</a:t>
-            </a:r>
-            <a:endParaRPr lang="pt-BR" dirty="0"/>
-          </a:p>
-        </p:txBody>
-      </p:sp>
-      <p:sp>
-        <p:nvSpPr>
-          <p:cNvPr id="4" name="Espaço Reservado para Número de Slide 3">
-            <a:extLst>
-              <a:ext uri="{FF2B5EF4-FFF2-40B4-BE49-F238E27FC236}">
-                <a16:creationId xmlns:a16="http://schemas.microsoft.com/office/drawing/2014/main" id="{F99CAB7A-E1AF-74E8-7503-53AE44956C1A}"/>
-              </a:ext>
-            </a:extLst>
-          </p:cNvPr>
-          <p:cNvSpPr>
-            <a:spLocks noGrp="1"/>
-          </p:cNvSpPr>
-          <p:nvPr>
-            <p:ph type="sldNum" sz="quarter" idx="5"/>
-          </p:nvPr>
-        </p:nvSpPr>
-        <p:spPr/>
-        <p:txBody>
-          <a:bodyPr/>
-          <a:lstStyle/>
-          <a:p>
-            <a:fld id="{80F36A49-A1DD-40F8-B8AD-E6F5365256CB}" type="slidenum">
-              <a:rPr lang="pt-BR" smtClean="0"/>
-              <a:t>11</a:t>
-            </a:fld>
-            <a:endParaRPr lang="pt-BR"/>
-          </a:p>
-        </p:txBody>
-      </p:sp>
-    </p:spTree>
-    <p:extLst>
-      <p:ext uri="{BB962C8B-B14F-4D97-AF65-F5344CB8AC3E}">
-        <p14:creationId xmlns:p14="http://schemas.microsoft.com/office/powerpoint/2010/main" val="3368363588"/>
-      </p:ext>
-    </p:extLst>
-  </p:cSld>
-  <p:clrMapOvr>
-    <a:masterClrMapping/>
-  </p:clrMapOvr>
-</p:notes>
-</file>
-
-<file path=ppt/notesSlides/notesSlide12.xml><?xml version="1.0" encoding="utf-8"?>
-<p:notes xmlns:a="http://schemas.openxmlformats.org/drawingml/2006/main" xmlns:r="http://schemas.openxmlformats.org/officeDocument/2006/relationships" xmlns:p="http://schemas.openxmlformats.org/presentationml/2006/main">
-  <p:cSld>
-    <p:spTree>
-      <p:nvGrpSpPr>
-        <p:cNvPr id="1" name="">
-          <a:extLst>
-            <a:ext uri="{FF2B5EF4-FFF2-40B4-BE49-F238E27FC236}">
-              <a16:creationId xmlns:a16="http://schemas.microsoft.com/office/drawing/2014/main" id="{B28CE740-9816-ADD0-2F6E-6B0C1CCB2384}"/>
-            </a:ext>
-          </a:extLst>
-        </p:cNvPr>
-        <p:cNvGrpSpPr/>
-        <p:nvPr/>
-      </p:nvGrpSpPr>
-      <p:grpSpPr>
-        <a:xfrm>
-          <a:off x="0" y="0"/>
-          <a:ext cx="0" cy="0"/>
-          <a:chOff x="0" y="0"/>
-          <a:chExt cx="0" cy="0"/>
-        </a:xfrm>
-      </p:grpSpPr>
-      <p:sp>
-        <p:nvSpPr>
-          <p:cNvPr id="2" name="Espaço Reservado para Imagem de Slide 1">
-            <a:extLst>
-              <a:ext uri="{FF2B5EF4-FFF2-40B4-BE49-F238E27FC236}">
-                <a16:creationId xmlns:a16="http://schemas.microsoft.com/office/drawing/2014/main" id="{0AEC6E79-8DEE-9C98-C309-452A8B193C1A}"/>
-              </a:ext>
-            </a:extLst>
-          </p:cNvPr>
-          <p:cNvSpPr>
-            <a:spLocks noGrp="1" noRot="1" noChangeAspect="1"/>
-          </p:cNvSpPr>
-          <p:nvPr>
-            <p:ph type="sldImg"/>
-          </p:nvPr>
-        </p:nvSpPr>
-        <p:spPr/>
-      </p:sp>
-      <p:sp>
-        <p:nvSpPr>
-          <p:cNvPr id="3" name="Espaço Reservado para Anotações 2">
-            <a:extLst>
-              <a:ext uri="{FF2B5EF4-FFF2-40B4-BE49-F238E27FC236}">
-                <a16:creationId xmlns:a16="http://schemas.microsoft.com/office/drawing/2014/main" id="{6817813F-4315-97F3-57D4-0F5D6E82071E}"/>
-              </a:ext>
-            </a:extLst>
-          </p:cNvPr>
-          <p:cNvSpPr>
-            <a:spLocks noGrp="1"/>
-          </p:cNvSpPr>
-          <p:nvPr>
-            <p:ph type="body" idx="1"/>
-          </p:nvPr>
-        </p:nvSpPr>
-        <p:spPr/>
-        <p:txBody>
-          <a:bodyPr/>
-          <a:lstStyle/>
-          <a:p>
-            <a:r>
-              <a:rPr lang="pt-BR" sz="1200" b="0" kern="1200" dirty="0">
-                <a:solidFill>
-                  <a:schemeClr val="tx1"/>
-                </a:solidFill>
-                <a:effectLst/>
-                <a:latin typeface="+mn-lt"/>
-                <a:ea typeface="+mn-ea"/>
-                <a:cs typeface="+mn-cs"/>
-              </a:rPr>
-              <a:t>Um compilador lê o código-fonte inteiro de uma só vez. </a:t>
-            </a:r>
-          </a:p>
-          <a:p>
-            <a:r>
-              <a:rPr lang="pt-BR" sz="1200" b="0" kern="1200" dirty="0">
-                <a:solidFill>
-                  <a:schemeClr val="tx1"/>
-                </a:solidFill>
-                <a:effectLst/>
-                <a:latin typeface="+mn-lt"/>
-                <a:ea typeface="+mn-ea"/>
-                <a:cs typeface="+mn-cs"/>
-              </a:rPr>
-              <a:t>Ele procura por erros de sintaxe na estrutura geral do programa e, se estiver tudo correto, </a:t>
-            </a:r>
-          </a:p>
-          <a:p>
-            <a:r>
-              <a:rPr lang="pt-BR" sz="1200" b="0" kern="1200" dirty="0">
-                <a:solidFill>
-                  <a:schemeClr val="tx1"/>
-                </a:solidFill>
-                <a:effectLst/>
-                <a:latin typeface="+mn-lt"/>
-                <a:ea typeface="+mn-ea"/>
-                <a:cs typeface="+mn-cs"/>
-              </a:rPr>
-              <a:t>traduz o código inteiro para uma linguagem de baixo nível ou linguagem de máquina, criando um arquivo binário autônomo</a:t>
-            </a:r>
-          </a:p>
-          <a:p>
-            <a:endParaRPr lang="pt-BR" sz="1200" b="1" kern="1200" dirty="0">
-              <a:solidFill>
-                <a:schemeClr val="tx1"/>
-              </a:solidFill>
-              <a:effectLst/>
-              <a:latin typeface="+mn-lt"/>
-              <a:ea typeface="+mn-ea"/>
-              <a:cs typeface="+mn-cs"/>
-            </a:endParaRPr>
-          </a:p>
-          <a:p>
-            <a:r>
-              <a:rPr lang="pt-BR" sz="1200" b="1" kern="1200" dirty="0">
-                <a:solidFill>
-                  <a:schemeClr val="tx1"/>
-                </a:solidFill>
-                <a:effectLst/>
-                <a:latin typeface="+mn-lt"/>
-                <a:ea typeface="+mn-ea"/>
-                <a:cs typeface="+mn-cs"/>
-              </a:rPr>
-              <a:t>Vantagens:</a:t>
-            </a:r>
-            <a:r>
-              <a:rPr lang="pt-BR" sz="1200" b="0" kern="1200" dirty="0">
-                <a:solidFill>
-                  <a:schemeClr val="tx1"/>
-                </a:solidFill>
-                <a:effectLst/>
-                <a:latin typeface="+mn-lt"/>
-                <a:ea typeface="+mn-ea"/>
-                <a:cs typeface="+mn-cs"/>
-              </a:rPr>
-              <a:t> </a:t>
-            </a:r>
-          </a:p>
-          <a:p>
-            <a:pPr marL="171450" indent="-171450">
-              <a:buFont typeface="Arial" panose="020B0604020202020204" pitchFamily="34" charset="0"/>
-              <a:buChar char="•"/>
-            </a:pPr>
-            <a:r>
-              <a:rPr lang="pt-BR" sz="1200" b="0" kern="1200" dirty="0">
-                <a:solidFill>
-                  <a:schemeClr val="tx1"/>
-                </a:solidFill>
-                <a:effectLst/>
-                <a:latin typeface="+mn-lt"/>
-                <a:ea typeface="+mn-ea"/>
-                <a:cs typeface="+mn-cs"/>
-              </a:rPr>
-              <a:t>O código já foi traduzido previamente, o que torna a execução muito mais rápida e otimizada. </a:t>
-            </a:r>
-          </a:p>
-          <a:p>
-            <a:pPr marL="171450" indent="-171450">
-              <a:buFont typeface="Arial" panose="020B0604020202020204" pitchFamily="34" charset="0"/>
-              <a:buChar char="•"/>
-            </a:pPr>
-            <a:r>
-              <a:rPr lang="pt-BR" sz="1200" b="0" kern="1200" dirty="0">
-                <a:solidFill>
-                  <a:schemeClr val="tx1"/>
-                </a:solidFill>
-                <a:effectLst/>
-                <a:latin typeface="+mn-lt"/>
-                <a:ea typeface="+mn-ea"/>
-                <a:cs typeface="+mn-cs"/>
-              </a:rPr>
-              <a:t>O programa compilado pode ser distribuído e executado sem a necessidade do compilador original ou do código-fonte. </a:t>
-            </a:r>
-          </a:p>
-          <a:p>
-            <a:pPr marL="171450" indent="-171450">
-              <a:buFont typeface="Arial" panose="020B0604020202020204" pitchFamily="34" charset="0"/>
-              <a:buChar char="•"/>
-            </a:pPr>
-            <a:r>
-              <a:rPr lang="pt-BR" sz="1200" b="1" kern="1200" dirty="0">
-                <a:solidFill>
-                  <a:schemeClr val="tx1"/>
-                </a:solidFill>
-                <a:effectLst/>
-                <a:latin typeface="+mn-lt"/>
-                <a:ea typeface="+mn-ea"/>
-                <a:cs typeface="+mn-cs"/>
-              </a:rPr>
-              <a:t>alta Performance:</a:t>
-            </a:r>
-            <a:r>
-              <a:rPr lang="pt-BR" sz="1200" b="0" kern="1200" dirty="0">
-                <a:solidFill>
-                  <a:schemeClr val="tx1"/>
-                </a:solidFill>
-                <a:effectLst/>
-                <a:latin typeface="+mn-lt"/>
-                <a:ea typeface="+mn-ea"/>
-                <a:cs typeface="+mn-cs"/>
-              </a:rPr>
-              <a:t> Como o código já está traduzido e otimizado para o hardware antes da execução, os programas rodam muito mais rápido. </a:t>
-            </a:r>
-          </a:p>
-          <a:p>
-            <a:pPr marL="171450" indent="-171450">
-              <a:buFont typeface="Arial" panose="020B0604020202020204" pitchFamily="34" charset="0"/>
-              <a:buChar char="•"/>
-            </a:pPr>
-            <a:r>
-              <a:rPr lang="pt-BR" sz="1200" b="1" kern="1200" dirty="0">
-                <a:solidFill>
-                  <a:schemeClr val="tx1"/>
-                </a:solidFill>
-                <a:effectLst/>
-                <a:latin typeface="+mn-lt"/>
-                <a:ea typeface="+mn-ea"/>
-                <a:cs typeface="+mn-cs"/>
-              </a:rPr>
-              <a:t>Detecção de Erros:</a:t>
-            </a:r>
-            <a:r>
-              <a:rPr lang="pt-BR" sz="1200" b="0" kern="1200" dirty="0">
-                <a:solidFill>
-                  <a:schemeClr val="tx1"/>
-                </a:solidFill>
-                <a:effectLst/>
-                <a:latin typeface="+mn-lt"/>
-                <a:ea typeface="+mn-ea"/>
-                <a:cs typeface="+mn-cs"/>
-              </a:rPr>
-              <a:t> O compilador checa todo o código em busca de erros de sintaxe e estrutura antes de gerar o arquivo final, impedindo que o programa seja criado caso haja falhas críticas. </a:t>
-            </a:r>
-          </a:p>
-          <a:p>
-            <a:pPr marL="171450" indent="-171450">
-              <a:buFont typeface="Arial" panose="020B0604020202020204" pitchFamily="34" charset="0"/>
-              <a:buChar char="•"/>
-            </a:pPr>
-            <a:r>
-              <a:rPr lang="pt-BR" sz="1200" b="1" kern="1200" dirty="0">
-                <a:solidFill>
-                  <a:schemeClr val="tx1"/>
-                </a:solidFill>
-                <a:effectLst/>
-                <a:latin typeface="+mn-lt"/>
-                <a:ea typeface="+mn-ea"/>
-                <a:cs typeface="+mn-cs"/>
-              </a:rPr>
-              <a:t>Menor Portabilidade:</a:t>
-            </a:r>
-            <a:r>
-              <a:rPr lang="pt-BR" sz="1200" b="0" kern="1200" dirty="0">
-                <a:solidFill>
-                  <a:schemeClr val="tx1"/>
-                </a:solidFill>
-                <a:effectLst/>
-                <a:latin typeface="+mn-lt"/>
-                <a:ea typeface="+mn-ea"/>
-                <a:cs typeface="+mn-cs"/>
-              </a:rPr>
-              <a:t> Um arquivo compilado costuma ser específico para um sistema operacional ou arquitetura de processador (um executável do Windows não roda nativamente no Linux, por exemplo). </a:t>
-            </a:r>
-          </a:p>
-          <a:p>
-            <a:endParaRPr lang="pt-BR" sz="1200" b="1" kern="1200" dirty="0">
-              <a:solidFill>
-                <a:schemeClr val="tx1"/>
-              </a:solidFill>
-              <a:effectLst/>
-              <a:latin typeface="+mn-lt"/>
-              <a:ea typeface="+mn-ea"/>
-              <a:cs typeface="+mn-cs"/>
-            </a:endParaRPr>
-          </a:p>
-          <a:p>
-            <a:r>
-              <a:rPr lang="pt-BR" sz="1200" b="1" kern="1200" dirty="0">
-                <a:solidFill>
-                  <a:schemeClr val="tx1"/>
-                </a:solidFill>
-                <a:effectLst/>
-                <a:latin typeface="+mn-lt"/>
-                <a:ea typeface="+mn-ea"/>
-                <a:cs typeface="+mn-cs"/>
-              </a:rPr>
-              <a:t>Desvantagens:</a:t>
-            </a:r>
-            <a:r>
-              <a:rPr lang="pt-BR" sz="1200" b="0" kern="1200" dirty="0">
-                <a:solidFill>
-                  <a:schemeClr val="tx1"/>
-                </a:solidFill>
-                <a:effectLst/>
-                <a:latin typeface="+mn-lt"/>
-                <a:ea typeface="+mn-ea"/>
-                <a:cs typeface="+mn-cs"/>
-              </a:rPr>
-              <a:t> </a:t>
-            </a:r>
-          </a:p>
-          <a:p>
-            <a:pPr marL="171450" indent="-171450">
-              <a:buFont typeface="Arial" panose="020B0604020202020204" pitchFamily="34" charset="0"/>
-              <a:buChar char="•"/>
-            </a:pPr>
-            <a:r>
-              <a:rPr lang="pt-BR" sz="1200" b="0" kern="1200" dirty="0">
-                <a:solidFill>
-                  <a:schemeClr val="tx1"/>
-                </a:solidFill>
-                <a:effectLst/>
-                <a:latin typeface="+mn-lt"/>
-                <a:ea typeface="+mn-ea"/>
-                <a:cs typeface="+mn-cs"/>
-              </a:rPr>
-              <a:t>O processo de compilação pode demorar, e caso o código precise ser alterado, o programa inteiro (ou parte dele) precisa ser compilado novamente. </a:t>
-            </a:r>
-          </a:p>
-          <a:p>
-            <a:pPr marL="171450" indent="-171450">
-              <a:buFont typeface="Arial" panose="020B0604020202020204" pitchFamily="34" charset="0"/>
-              <a:buChar char="•"/>
-            </a:pPr>
-            <a:r>
-              <a:rPr lang="pt-BR" sz="1200" b="0" kern="1200" dirty="0">
-                <a:solidFill>
-                  <a:schemeClr val="tx1"/>
-                </a:solidFill>
-                <a:effectLst/>
-                <a:latin typeface="+mn-lt"/>
-                <a:ea typeface="+mn-ea"/>
-                <a:cs typeface="+mn-cs"/>
-              </a:rPr>
-              <a:t>O arquivo binário gerado depende da arquitetura do sistema operacional (um executável de Windows não roda nativamente no Mac).</a:t>
-            </a:r>
-          </a:p>
-          <a:p>
-            <a:endParaRPr lang="pt-BR" dirty="0"/>
-          </a:p>
-        </p:txBody>
-      </p:sp>
-      <p:sp>
-        <p:nvSpPr>
-          <p:cNvPr id="4" name="Espaço Reservado para Número de Slide 3">
-            <a:extLst>
-              <a:ext uri="{FF2B5EF4-FFF2-40B4-BE49-F238E27FC236}">
-                <a16:creationId xmlns:a16="http://schemas.microsoft.com/office/drawing/2014/main" id="{CFF3F0FB-B732-D6AC-D3CC-5BE62E14877F}"/>
-              </a:ext>
-            </a:extLst>
-          </p:cNvPr>
-          <p:cNvSpPr>
-            <a:spLocks noGrp="1"/>
-          </p:cNvSpPr>
-          <p:nvPr>
-            <p:ph type="sldNum" sz="quarter" idx="5"/>
-          </p:nvPr>
-        </p:nvSpPr>
-        <p:spPr/>
-        <p:txBody>
-          <a:bodyPr/>
-          <a:lstStyle/>
-          <a:p>
-            <a:fld id="{80F36A49-A1DD-40F8-B8AD-E6F5365256CB}" type="slidenum">
-              <a:rPr lang="pt-BR" smtClean="0"/>
-              <a:t>12</a:t>
-            </a:fld>
-            <a:endParaRPr lang="pt-BR"/>
-          </a:p>
-        </p:txBody>
-      </p:sp>
-    </p:spTree>
-    <p:extLst>
-      <p:ext uri="{BB962C8B-B14F-4D97-AF65-F5344CB8AC3E}">
-        <p14:creationId xmlns:p14="http://schemas.microsoft.com/office/powerpoint/2010/main" val="809513175"/>
-      </p:ext>
-    </p:extLst>
-  </p:cSld>
-  <p:clrMapOvr>
-    <a:masterClrMapping/>
-  </p:clrMapOvr>
-</p:notes>
-</file>
-
-<file path=ppt/notesSlides/notesSlide13.xml><?xml version="1.0" encoding="utf-8"?>
-<p:notes xmlns:a="http://schemas.openxmlformats.org/drawingml/2006/main" xmlns:r="http://schemas.openxmlformats.org/officeDocument/2006/relationships" xmlns:p="http://schemas.openxmlformats.org/presentationml/2006/main">
-  <p:cSld>
-    <p:spTree>
-      <p:nvGrpSpPr>
-        <p:cNvPr id="1" name="">
-          <a:extLst>
-            <a:ext uri="{FF2B5EF4-FFF2-40B4-BE49-F238E27FC236}">
-              <a16:creationId xmlns:a16="http://schemas.microsoft.com/office/drawing/2014/main" id="{B28F065B-D111-684E-D90B-0BBB70ABAEAE}"/>
-            </a:ext>
-          </a:extLst>
-        </p:cNvPr>
-        <p:cNvGrpSpPr/>
-        <p:nvPr/>
-      </p:nvGrpSpPr>
-      <p:grpSpPr>
-        <a:xfrm>
-          <a:off x="0" y="0"/>
-          <a:ext cx="0" cy="0"/>
-          <a:chOff x="0" y="0"/>
-          <a:chExt cx="0" cy="0"/>
-        </a:xfrm>
-      </p:grpSpPr>
-      <p:sp>
-        <p:nvSpPr>
-          <p:cNvPr id="2" name="Espaço Reservado para Imagem de Slide 1">
-            <a:extLst>
-              <a:ext uri="{FF2B5EF4-FFF2-40B4-BE49-F238E27FC236}">
-                <a16:creationId xmlns:a16="http://schemas.microsoft.com/office/drawing/2014/main" id="{D70CCC18-33EB-50D6-AA19-32A3AD9881CD}"/>
-              </a:ext>
-            </a:extLst>
-          </p:cNvPr>
-          <p:cNvSpPr>
-            <a:spLocks noGrp="1" noRot="1" noChangeAspect="1"/>
-          </p:cNvSpPr>
-          <p:nvPr>
-            <p:ph type="sldImg"/>
-          </p:nvPr>
-        </p:nvSpPr>
-        <p:spPr/>
-      </p:sp>
-      <p:sp>
-        <p:nvSpPr>
-          <p:cNvPr id="3" name="Espaço Reservado para Anotações 2">
-            <a:extLst>
-              <a:ext uri="{FF2B5EF4-FFF2-40B4-BE49-F238E27FC236}">
-                <a16:creationId xmlns:a16="http://schemas.microsoft.com/office/drawing/2014/main" id="{B5B5E38F-3B61-3341-584A-BF17E3BE3A47}"/>
-              </a:ext>
-            </a:extLst>
-          </p:cNvPr>
-          <p:cNvSpPr>
-            <a:spLocks noGrp="1"/>
-          </p:cNvSpPr>
-          <p:nvPr>
-            <p:ph type="body" idx="1"/>
-          </p:nvPr>
-        </p:nvSpPr>
-        <p:spPr/>
-        <p:txBody>
-          <a:bodyPr/>
-          <a:lstStyle/>
-          <a:p>
-            <a:r>
-              <a:rPr lang="pt-BR" sz="1200" b="0" kern="1200" dirty="0">
-                <a:solidFill>
-                  <a:schemeClr val="tx1"/>
-                </a:solidFill>
-                <a:effectLst/>
-                <a:latin typeface="+mn-lt"/>
-                <a:ea typeface="+mn-ea"/>
-                <a:cs typeface="+mn-cs"/>
-              </a:rPr>
-              <a:t>A API de um sistema operacional </a:t>
-            </a:r>
-            <a:r>
-              <a:rPr lang="pt-BR" dirty="0"/>
-              <a:t>é um conjunto de regras e ferramentas que permite aos programas conversarem com o sistema. </a:t>
-            </a:r>
-          </a:p>
-          <a:p>
-            <a:r>
-              <a:rPr lang="pt-BR" dirty="0"/>
-              <a:t>Ela funciona como uma ponte ou um tradutor, facilitando o acesso a recursos essenciais como </a:t>
-            </a:r>
-            <a:r>
-              <a:rPr lang="pt-BR" sz="1200" b="1" kern="1200" dirty="0">
-                <a:solidFill>
-                  <a:schemeClr val="tx1"/>
-                </a:solidFill>
-                <a:effectLst/>
-                <a:latin typeface="+mn-lt"/>
-                <a:ea typeface="+mn-ea"/>
-                <a:cs typeface="+mn-cs"/>
-              </a:rPr>
-              <a:t>gerenciamento de arquivos</a:t>
-            </a:r>
-            <a:r>
-              <a:rPr lang="pt-BR" dirty="0"/>
-              <a:t>, </a:t>
-            </a:r>
-            <a:r>
-              <a:rPr lang="pt-BR" sz="1200" b="1" kern="1200" dirty="0">
-                <a:solidFill>
-                  <a:schemeClr val="tx1"/>
-                </a:solidFill>
-                <a:effectLst/>
-                <a:latin typeface="+mn-lt"/>
-                <a:ea typeface="+mn-ea"/>
-                <a:cs typeface="+mn-cs"/>
-              </a:rPr>
-              <a:t>uso de memória</a:t>
-            </a:r>
-            <a:r>
-              <a:rPr lang="pt-BR" dirty="0"/>
-              <a:t> e </a:t>
-            </a:r>
-            <a:r>
-              <a:rPr lang="pt-BR" sz="1200" b="1" kern="1200" dirty="0">
-                <a:solidFill>
-                  <a:schemeClr val="tx1"/>
-                </a:solidFill>
-                <a:effectLst/>
-                <a:latin typeface="+mn-lt"/>
-                <a:ea typeface="+mn-ea"/>
-                <a:cs typeface="+mn-cs"/>
-              </a:rPr>
-              <a:t>controle de hardware.</a:t>
-            </a:r>
-          </a:p>
-          <a:p>
-            <a:endParaRPr lang="pt-BR" sz="1200" b="1" kern="1200" dirty="0">
-              <a:solidFill>
-                <a:schemeClr val="tx1"/>
-              </a:solidFill>
-              <a:effectLst/>
-              <a:latin typeface="+mn-lt"/>
-              <a:ea typeface="+mn-ea"/>
-              <a:cs typeface="+mn-cs"/>
-            </a:endParaRPr>
-          </a:p>
-          <a:p>
-            <a:r>
-              <a:rPr lang="pt-BR" dirty="0"/>
-              <a:t>Algumas linguagens modernas combinam os dois métodos.  No Java, o código é primeiro compilado para uma linguagem intermediária chamada </a:t>
-            </a:r>
-          </a:p>
-          <a:p>
-            <a:r>
-              <a:rPr lang="pt-BR" sz="1200" b="0" i="1" kern="1200" dirty="0" err="1">
-                <a:solidFill>
-                  <a:schemeClr val="tx1"/>
-                </a:solidFill>
-                <a:effectLst/>
-                <a:latin typeface="+mn-lt"/>
-                <a:ea typeface="+mn-ea"/>
-                <a:cs typeface="+mn-cs"/>
-              </a:rPr>
-              <a:t>bytecode</a:t>
-            </a:r>
-            <a:r>
-              <a:rPr lang="pt-BR" dirty="0"/>
-              <a:t> (que não é o código de máquina final).  Durante a execução do programa, um interpretador do sistema (JVM) </a:t>
-            </a:r>
-          </a:p>
-          <a:p>
-            <a:r>
-              <a:rPr lang="pt-BR" dirty="0"/>
-              <a:t>lê esse </a:t>
-            </a:r>
-            <a:r>
-              <a:rPr lang="pt-BR" sz="1200" b="0" i="1" kern="1200" dirty="0" err="1">
-                <a:solidFill>
-                  <a:schemeClr val="tx1"/>
-                </a:solidFill>
-                <a:effectLst/>
-                <a:latin typeface="+mn-lt"/>
-                <a:ea typeface="+mn-ea"/>
-                <a:cs typeface="+mn-cs"/>
-              </a:rPr>
-              <a:t>bytecode</a:t>
-            </a:r>
-            <a:r>
-              <a:rPr lang="pt-BR" dirty="0"/>
-              <a:t> e usa um compilador </a:t>
-            </a:r>
-            <a:r>
-              <a:rPr lang="pt-BR" sz="1200" b="1" kern="1200" dirty="0">
-                <a:solidFill>
-                  <a:schemeClr val="tx1"/>
-                </a:solidFill>
-                <a:effectLst/>
-                <a:latin typeface="+mn-lt"/>
-                <a:ea typeface="+mn-ea"/>
-                <a:cs typeface="+mn-cs"/>
-              </a:rPr>
-              <a:t>JIT </a:t>
-            </a:r>
-            <a:r>
-              <a:rPr lang="pt-BR" sz="1200" b="0" i="1" kern="1200" dirty="0">
-                <a:solidFill>
-                  <a:schemeClr val="tx1"/>
-                </a:solidFill>
-                <a:effectLst/>
-                <a:latin typeface="+mn-lt"/>
-                <a:ea typeface="+mn-ea"/>
-                <a:cs typeface="+mn-cs"/>
-              </a:rPr>
-              <a:t>Just-In-Time</a:t>
-            </a:r>
-          </a:p>
-          <a:p>
-            <a:pPr rtl="0"/>
-            <a:endParaRPr lang="pt-BR" sz="1200" b="0" kern="1200" dirty="0">
-              <a:solidFill>
-                <a:schemeClr val="tx1"/>
-              </a:solidFill>
-              <a:effectLst/>
-              <a:latin typeface="+mn-lt"/>
-              <a:ea typeface="+mn-ea"/>
-              <a:cs typeface="+mn-cs"/>
-            </a:endParaRPr>
-          </a:p>
-          <a:p>
-            <a:pPr rtl="0"/>
-            <a:r>
-              <a:rPr lang="pt-BR" sz="1200" b="0" kern="1200" dirty="0">
-                <a:solidFill>
-                  <a:schemeClr val="tx1"/>
-                </a:solidFill>
-                <a:effectLst/>
-                <a:latin typeface="+mn-lt"/>
-                <a:ea typeface="+mn-ea"/>
-                <a:cs typeface="+mn-cs"/>
-              </a:rPr>
-              <a:t>Um compilador JIT (</a:t>
-            </a:r>
-            <a:r>
-              <a:rPr lang="pt-BR" sz="1200" b="0" i="1" kern="1200" dirty="0">
-                <a:solidFill>
-                  <a:schemeClr val="tx1"/>
-                </a:solidFill>
-                <a:effectLst/>
-                <a:latin typeface="+mn-lt"/>
-                <a:ea typeface="+mn-ea"/>
-                <a:cs typeface="+mn-cs"/>
-              </a:rPr>
-              <a:t>Just-In-Time</a:t>
-            </a:r>
-            <a:r>
-              <a:rPr lang="pt-BR" sz="1200" b="0" kern="1200" dirty="0">
-                <a:solidFill>
-                  <a:schemeClr val="tx1"/>
-                </a:solidFill>
-                <a:effectLst/>
-                <a:latin typeface="+mn-lt"/>
-                <a:ea typeface="+mn-ea"/>
-                <a:cs typeface="+mn-cs"/>
-              </a:rPr>
-              <a:t> ou "em tempo de execução") é uma tecnologia que traduz código de programa </a:t>
-            </a:r>
-          </a:p>
-          <a:p>
-            <a:pPr rtl="0"/>
-            <a:r>
-              <a:rPr lang="pt-BR" sz="1200" b="0" kern="1200" dirty="0">
-                <a:solidFill>
-                  <a:schemeClr val="tx1"/>
-                </a:solidFill>
-                <a:effectLst/>
-                <a:latin typeface="+mn-lt"/>
-                <a:ea typeface="+mn-ea"/>
-                <a:cs typeface="+mn-cs"/>
-              </a:rPr>
-              <a:t>(</a:t>
-            </a:r>
-            <a:r>
-              <a:rPr lang="pt-BR" sz="1200" b="0" i="1" kern="1200" dirty="0" err="1">
-                <a:solidFill>
-                  <a:schemeClr val="tx1"/>
-                </a:solidFill>
-                <a:effectLst/>
-                <a:latin typeface="+mn-lt"/>
-                <a:ea typeface="+mn-ea"/>
-                <a:cs typeface="+mn-cs"/>
-              </a:rPr>
-              <a:t>bytecode</a:t>
-            </a:r>
-            <a:r>
-              <a:rPr lang="pt-BR" sz="1200" b="0" kern="1200" dirty="0">
-                <a:solidFill>
-                  <a:schemeClr val="tx1"/>
-                </a:solidFill>
-                <a:effectLst/>
-                <a:latin typeface="+mn-lt"/>
-                <a:ea typeface="+mn-ea"/>
-                <a:cs typeface="+mn-cs"/>
-              </a:rPr>
-              <a:t> ou código intermediário) em instruções nativas de máquina diretamente durante a execução do software</a:t>
-            </a:r>
-          </a:p>
-          <a:p>
-            <a:pPr rtl="0"/>
-            <a:endParaRPr lang="pt-BR" sz="1200" b="0" kern="1200" dirty="0">
-              <a:solidFill>
-                <a:schemeClr val="tx1"/>
-              </a:solidFill>
-              <a:effectLst/>
-              <a:latin typeface="+mn-lt"/>
-              <a:ea typeface="+mn-ea"/>
-              <a:cs typeface="+mn-cs"/>
-            </a:endParaRPr>
-          </a:p>
-          <a:p>
-            <a:r>
-              <a:rPr lang="pt-BR" sz="1200" b="1" kern="1200" dirty="0">
-                <a:solidFill>
-                  <a:schemeClr val="tx1"/>
-                </a:solidFill>
-                <a:effectLst/>
-                <a:latin typeface="+mn-lt"/>
-                <a:ea typeface="+mn-ea"/>
-                <a:cs typeface="+mn-cs"/>
-              </a:rPr>
-              <a:t>Java:</a:t>
-            </a:r>
-            <a:r>
-              <a:rPr lang="pt-BR" sz="1200" b="0" kern="1200" dirty="0">
-                <a:solidFill>
-                  <a:schemeClr val="tx1"/>
-                </a:solidFill>
-                <a:effectLst/>
-                <a:latin typeface="+mn-lt"/>
-                <a:ea typeface="+mn-ea"/>
-                <a:cs typeface="+mn-cs"/>
-              </a:rPr>
-              <a:t> Compila para </a:t>
-            </a:r>
-            <a:r>
-              <a:rPr lang="pt-BR" sz="1200" b="0" i="1" kern="1200" dirty="0" err="1">
-                <a:solidFill>
-                  <a:schemeClr val="tx1"/>
-                </a:solidFill>
-                <a:effectLst/>
-                <a:latin typeface="+mn-lt"/>
-                <a:ea typeface="+mn-ea"/>
-                <a:cs typeface="+mn-cs"/>
-              </a:rPr>
-              <a:t>bytecode</a:t>
-            </a:r>
-            <a:r>
-              <a:rPr lang="pt-BR" sz="1200" b="0" kern="1200" dirty="0">
-                <a:solidFill>
-                  <a:schemeClr val="tx1"/>
-                </a:solidFill>
-                <a:effectLst/>
-                <a:latin typeface="+mn-lt"/>
-                <a:ea typeface="+mn-ea"/>
-                <a:cs typeface="+mn-cs"/>
-              </a:rPr>
-              <a:t> e roda na Máquina Virtual Java (JVM).</a:t>
-            </a:r>
-          </a:p>
-          <a:p>
-            <a:r>
-              <a:rPr lang="pt-BR" sz="1200" b="1" kern="1200" dirty="0">
-                <a:solidFill>
-                  <a:schemeClr val="tx1"/>
-                </a:solidFill>
-                <a:effectLst/>
-                <a:latin typeface="+mn-lt"/>
-                <a:ea typeface="+mn-ea"/>
-                <a:cs typeface="+mn-cs"/>
-              </a:rPr>
-              <a:t>C#:</a:t>
-            </a:r>
-            <a:r>
-              <a:rPr lang="pt-BR" sz="1200" b="0" kern="1200" dirty="0">
-                <a:solidFill>
-                  <a:schemeClr val="tx1"/>
-                </a:solidFill>
-                <a:effectLst/>
-                <a:latin typeface="+mn-lt"/>
-                <a:ea typeface="+mn-ea"/>
-                <a:cs typeface="+mn-cs"/>
-              </a:rPr>
-              <a:t> Transforma o código em </a:t>
-            </a:r>
-            <a:r>
-              <a:rPr lang="pt-BR" sz="1200" b="0" i="1" kern="1200" dirty="0">
-                <a:solidFill>
-                  <a:schemeClr val="tx1"/>
-                </a:solidFill>
-                <a:effectLst/>
-                <a:latin typeface="+mn-lt"/>
-                <a:ea typeface="+mn-ea"/>
-                <a:cs typeface="+mn-cs"/>
-              </a:rPr>
-              <a:t>IL (</a:t>
-            </a:r>
-            <a:r>
-              <a:rPr lang="pt-BR" sz="1200" b="0" i="1" kern="1200" dirty="0" err="1">
-                <a:solidFill>
-                  <a:schemeClr val="tx1"/>
-                </a:solidFill>
-                <a:effectLst/>
-                <a:latin typeface="+mn-lt"/>
-                <a:ea typeface="+mn-ea"/>
-                <a:cs typeface="+mn-cs"/>
-              </a:rPr>
-              <a:t>Intermediate</a:t>
-            </a:r>
-            <a:r>
-              <a:rPr lang="pt-BR" sz="1200" b="0" i="1" kern="1200" dirty="0">
-                <a:solidFill>
-                  <a:schemeClr val="tx1"/>
-                </a:solidFill>
-                <a:effectLst/>
-                <a:latin typeface="+mn-lt"/>
-                <a:ea typeface="+mn-ea"/>
-                <a:cs typeface="+mn-cs"/>
-              </a:rPr>
-              <a:t> </a:t>
-            </a:r>
-            <a:r>
-              <a:rPr lang="pt-BR" sz="1200" b="0" i="1" kern="1200" dirty="0" err="1">
-                <a:solidFill>
-                  <a:schemeClr val="tx1"/>
-                </a:solidFill>
-                <a:effectLst/>
-                <a:latin typeface="+mn-lt"/>
-                <a:ea typeface="+mn-ea"/>
-                <a:cs typeface="+mn-cs"/>
-              </a:rPr>
-              <a:t>Language</a:t>
-            </a:r>
-            <a:r>
-              <a:rPr lang="pt-BR" sz="1200" b="0" i="1" kern="1200" dirty="0">
-                <a:solidFill>
-                  <a:schemeClr val="tx1"/>
-                </a:solidFill>
-                <a:effectLst/>
-                <a:latin typeface="+mn-lt"/>
-                <a:ea typeface="+mn-ea"/>
-                <a:cs typeface="+mn-cs"/>
-              </a:rPr>
-              <a:t>)</a:t>
-            </a:r>
-            <a:r>
-              <a:rPr lang="pt-BR" sz="1200" b="0" kern="1200" dirty="0">
-                <a:solidFill>
-                  <a:schemeClr val="tx1"/>
-                </a:solidFill>
-                <a:effectLst/>
-                <a:latin typeface="+mn-lt"/>
-                <a:ea typeface="+mn-ea"/>
-                <a:cs typeface="+mn-cs"/>
-              </a:rPr>
-              <a:t> para rodar no ambiente do .NET.</a:t>
-            </a:r>
-          </a:p>
-          <a:p>
-            <a:r>
-              <a:rPr lang="pt-BR" sz="1200" b="1" kern="1200" dirty="0">
-                <a:solidFill>
-                  <a:schemeClr val="tx1"/>
-                </a:solidFill>
-                <a:effectLst/>
-                <a:latin typeface="+mn-lt"/>
-                <a:ea typeface="+mn-ea"/>
-                <a:cs typeface="+mn-cs"/>
-              </a:rPr>
-              <a:t>Python:</a:t>
-            </a:r>
-            <a:r>
-              <a:rPr lang="pt-BR" sz="1200" b="0" kern="1200" dirty="0">
-                <a:solidFill>
-                  <a:schemeClr val="tx1"/>
-                </a:solidFill>
-                <a:effectLst/>
-                <a:latin typeface="+mn-lt"/>
-                <a:ea typeface="+mn-ea"/>
-                <a:cs typeface="+mn-cs"/>
-              </a:rPr>
-              <a:t> Traduz o arquivo de texto para arquivos binários intermediários (.</a:t>
-            </a:r>
-            <a:r>
-              <a:rPr lang="pt-BR" sz="1200" b="0" kern="1200" dirty="0" err="1">
-                <a:solidFill>
-                  <a:schemeClr val="tx1"/>
-                </a:solidFill>
-                <a:effectLst/>
-                <a:latin typeface="+mn-lt"/>
-                <a:ea typeface="+mn-ea"/>
-                <a:cs typeface="+mn-cs"/>
-              </a:rPr>
-              <a:t>pyc</a:t>
-            </a:r>
-            <a:r>
-              <a:rPr lang="pt-BR" sz="1200" b="0" kern="1200" dirty="0">
-                <a:solidFill>
-                  <a:schemeClr val="tx1"/>
-                </a:solidFill>
-                <a:effectLst/>
-                <a:latin typeface="+mn-lt"/>
-                <a:ea typeface="+mn-ea"/>
-                <a:cs typeface="+mn-cs"/>
-              </a:rPr>
-              <a:t>) antes da execução interna.</a:t>
-            </a:r>
-          </a:p>
-          <a:p>
-            <a:pPr rtl="0"/>
-            <a:endParaRPr lang="pt-BR" sz="1200" b="0" kern="1200" dirty="0">
-              <a:solidFill>
-                <a:schemeClr val="tx1"/>
-              </a:solidFill>
-              <a:effectLst/>
-              <a:latin typeface="+mn-lt"/>
-              <a:ea typeface="+mn-ea"/>
-              <a:cs typeface="+mn-cs"/>
-            </a:endParaRPr>
-          </a:p>
-          <a:p>
-            <a:endParaRPr lang="pt-BR" dirty="0"/>
-          </a:p>
-        </p:txBody>
-      </p:sp>
-      <p:sp>
-        <p:nvSpPr>
-          <p:cNvPr id="4" name="Espaço Reservado para Número de Slide 3">
-            <a:extLst>
-              <a:ext uri="{FF2B5EF4-FFF2-40B4-BE49-F238E27FC236}">
-                <a16:creationId xmlns:a16="http://schemas.microsoft.com/office/drawing/2014/main" id="{DCF0F6C3-1900-E55A-CAAA-8B9CE43FE862}"/>
-              </a:ext>
-            </a:extLst>
-          </p:cNvPr>
-          <p:cNvSpPr>
-            <a:spLocks noGrp="1"/>
-          </p:cNvSpPr>
-          <p:nvPr>
-            <p:ph type="sldNum" sz="quarter" idx="5"/>
-          </p:nvPr>
-        </p:nvSpPr>
-        <p:spPr/>
-        <p:txBody>
-          <a:bodyPr/>
-          <a:lstStyle/>
-          <a:p>
-            <a:fld id="{80F36A49-A1DD-40F8-B8AD-E6F5365256CB}" type="slidenum">
-              <a:rPr lang="pt-BR" smtClean="0"/>
-              <a:t>13</a:t>
-            </a:fld>
-            <a:endParaRPr lang="pt-BR"/>
-          </a:p>
-        </p:txBody>
-      </p:sp>
-    </p:spTree>
-    <p:extLst>
-      <p:ext uri="{BB962C8B-B14F-4D97-AF65-F5344CB8AC3E}">
-        <p14:creationId xmlns:p14="http://schemas.microsoft.com/office/powerpoint/2010/main" val="2318908242"/>
-      </p:ext>
-    </p:extLst>
-  </p:cSld>
-  <p:clrMapOvr>
-    <a:masterClrMapping/>
-  </p:clrMapOvr>
-</p:notes>
-</file>
-
-<file path=ppt/notesSlides/notesSlide14.xml><?xml version="1.0" encoding="utf-8"?>
 <p:notes xmlns:a="http://schemas.openxmlformats.org/drawingml/2006/main" xmlns:r="http://schemas.openxmlformats.org/officeDocument/2006/relationships" xmlns:p="http://schemas.openxmlformats.org/presentationml/2006/main">
   <p:cSld>
     <p:spTree>
@@ -2388,7 +1037,7 @@
           <a:p>
             <a:fld id="{80F36A49-A1DD-40F8-B8AD-E6F5365256CB}" type="slidenum">
               <a:rPr lang="pt-BR" smtClean="0"/>
-              <a:t>14</a:t>
+              <a:t>10</a:t>
             </a:fld>
             <a:endParaRPr lang="pt-BR"/>
           </a:p>
@@ -2407,7 +1056,7 @@
 </p:notes>
 </file>
 
-<file path=ppt/notesSlides/notesSlide15.xml><?xml version="1.0" encoding="utf-8"?>
+<file path=ppt/notesSlides/notesSlide11.xml><?xml version="1.0" encoding="utf-8"?>
 <p:notes xmlns:a="http://schemas.openxmlformats.org/drawingml/2006/main" xmlns:r="http://schemas.openxmlformats.org/officeDocument/2006/relationships" xmlns:p="http://schemas.openxmlformats.org/presentationml/2006/main">
   <p:cSld>
     <p:spTree>
@@ -2875,7 +1524,7 @@
           <a:p>
             <a:fld id="{80F36A49-A1DD-40F8-B8AD-E6F5365256CB}" type="slidenum">
               <a:rPr lang="pt-BR" smtClean="0"/>
-              <a:t>16</a:t>
+              <a:t>12</a:t>
             </a:fld>
             <a:endParaRPr lang="pt-BR"/>
           </a:p>
@@ -2894,7 +1543,7 @@
 </p:notes>
 </file>
 
-<file path=ppt/notesSlides/notesSlide16.xml><?xml version="1.0" encoding="utf-8"?>
+<file path=ppt/notesSlides/notesSlide12.xml><?xml version="1.0" encoding="utf-8"?>
 <p:notes xmlns:a="http://schemas.openxmlformats.org/drawingml/2006/main" xmlns:r="http://schemas.openxmlformats.org/officeDocument/2006/relationships" xmlns:p="http://schemas.openxmlformats.org/presentationml/2006/main">
   <p:cSld>
     <p:spTree>
@@ -3011,7 +1660,7 @@
           <a:p>
             <a:fld id="{80F36A49-A1DD-40F8-B8AD-E6F5365256CB}" type="slidenum">
               <a:rPr lang="pt-BR" smtClean="0"/>
-              <a:t>17</a:t>
+              <a:t>13</a:t>
             </a:fld>
             <a:endParaRPr lang="pt-BR"/>
           </a:p>
@@ -3030,7 +1679,7 @@
 </p:notes>
 </file>
 
-<file path=ppt/notesSlides/notesSlide17.xml><?xml version="1.0" encoding="utf-8"?>
+<file path=ppt/notesSlides/notesSlide13.xml><?xml version="1.0" encoding="utf-8"?>
 <p:notes xmlns:a="http://schemas.openxmlformats.org/drawingml/2006/main" xmlns:r="http://schemas.openxmlformats.org/officeDocument/2006/relationships" xmlns:p="http://schemas.openxmlformats.org/presentationml/2006/main">
   <p:cSld>
     <p:spTree>
@@ -3712,7 +2361,7 @@
           <a:p>
             <a:fld id="{80F36A49-A1DD-40F8-B8AD-E6F5365256CB}" type="slidenum">
               <a:rPr lang="pt-BR" smtClean="0"/>
-              <a:t>18</a:t>
+              <a:t>14</a:t>
             </a:fld>
             <a:endParaRPr lang="pt-BR"/>
           </a:p>
@@ -3731,7 +2380,7 @@
 </p:notes>
 </file>
 
-<file path=ppt/notesSlides/notesSlide18.xml><?xml version="1.0" encoding="utf-8"?>
+<file path=ppt/notesSlides/notesSlide14.xml><?xml version="1.0" encoding="utf-8"?>
 <p:notes xmlns:a="http://schemas.openxmlformats.org/drawingml/2006/main" xmlns:r="http://schemas.openxmlformats.org/officeDocument/2006/relationships" xmlns:p="http://schemas.openxmlformats.org/presentationml/2006/main">
   <p:cSld>
     <p:spTree>
@@ -4183,7 +2832,7 @@
           <a:p>
             <a:fld id="{80F36A49-A1DD-40F8-B8AD-E6F5365256CB}" type="slidenum">
               <a:rPr lang="pt-BR" smtClean="0"/>
-              <a:t>19</a:t>
+              <a:t>15</a:t>
             </a:fld>
             <a:endParaRPr lang="pt-BR"/>
           </a:p>
@@ -4202,7 +2851,7 @@
 </p:notes>
 </file>
 
-<file path=ppt/notesSlides/notesSlide19.xml><?xml version="1.0" encoding="utf-8"?>
+<file path=ppt/notesSlides/notesSlide15.xml><?xml version="1.0" encoding="utf-8"?>
 <p:notes xmlns:a="http://schemas.openxmlformats.org/drawingml/2006/main" xmlns:r="http://schemas.openxmlformats.org/officeDocument/2006/relationships" xmlns:p="http://schemas.openxmlformats.org/presentationml/2006/main">
   <p:cSld>
     <p:spTree>
@@ -4804,7 +3453,7 @@
           <a:p>
             <a:fld id="{80F36A49-A1DD-40F8-B8AD-E6F5365256CB}" type="slidenum">
               <a:rPr lang="pt-BR" smtClean="0"/>
-              <a:t>20</a:t>
+              <a:t>16</a:t>
             </a:fld>
             <a:endParaRPr lang="pt-BR"/>
           </a:p>
@@ -4823,115 +3472,7 @@
 </p:notes>
 </file>
 
-<file path=ppt/notesSlides/notesSlide2.xml><?xml version="1.0" encoding="utf-8"?>
-<p:notes xmlns:a="http://schemas.openxmlformats.org/drawingml/2006/main" xmlns:r="http://schemas.openxmlformats.org/officeDocument/2006/relationships" xmlns:p="http://schemas.openxmlformats.org/presentationml/2006/main">
-  <p:cSld>
-    <p:spTree>
-      <p:nvGrpSpPr>
-        <p:cNvPr id="1" name="">
-          <a:extLst>
-            <a:ext uri="{FF2B5EF4-FFF2-40B4-BE49-F238E27FC236}">
-              <a16:creationId xmlns:a16="http://schemas.microsoft.com/office/drawing/2014/main" id="{2EAA7B2A-BF0C-6DE5-D7D4-EB437BE824FF}"/>
-            </a:ext>
-          </a:extLst>
-        </p:cNvPr>
-        <p:cNvGrpSpPr/>
-        <p:nvPr/>
-      </p:nvGrpSpPr>
-      <p:grpSpPr>
-        <a:xfrm>
-          <a:off x="0" y="0"/>
-          <a:ext cx="0" cy="0"/>
-          <a:chOff x="0" y="0"/>
-          <a:chExt cx="0" cy="0"/>
-        </a:xfrm>
-      </p:grpSpPr>
-      <p:sp>
-        <p:nvSpPr>
-          <p:cNvPr id="2" name="Espaço Reservado para Imagem de Slide 1">
-            <a:extLst>
-              <a:ext uri="{FF2B5EF4-FFF2-40B4-BE49-F238E27FC236}">
-                <a16:creationId xmlns:a16="http://schemas.microsoft.com/office/drawing/2014/main" id="{E4C9A454-78DF-0441-D12F-F57B1DCF91AF}"/>
-              </a:ext>
-            </a:extLst>
-          </p:cNvPr>
-          <p:cNvSpPr>
-            <a:spLocks noGrp="1" noRot="1" noChangeAspect="1"/>
-          </p:cNvSpPr>
-          <p:nvPr>
-            <p:ph type="sldImg"/>
-          </p:nvPr>
-        </p:nvSpPr>
-        <p:spPr/>
-      </p:sp>
-      <p:sp>
-        <p:nvSpPr>
-          <p:cNvPr id="3" name="Espaço Reservado para Anotações 2">
-            <a:extLst>
-              <a:ext uri="{FF2B5EF4-FFF2-40B4-BE49-F238E27FC236}">
-                <a16:creationId xmlns:a16="http://schemas.microsoft.com/office/drawing/2014/main" id="{3BADED7D-9228-27C3-F085-8AD77D99378C}"/>
-              </a:ext>
-            </a:extLst>
-          </p:cNvPr>
-          <p:cNvSpPr>
-            <a:spLocks noGrp="1"/>
-          </p:cNvSpPr>
-          <p:nvPr>
-            <p:ph type="body" idx="1"/>
-          </p:nvPr>
-        </p:nvSpPr>
-        <p:spPr/>
-        <p:txBody>
-          <a:bodyPr/>
-          <a:lstStyle/>
-          <a:p>
-            <a:endParaRPr lang="pt-BR" dirty="0"/>
-          </a:p>
-        </p:txBody>
-      </p:sp>
-      <p:sp>
-        <p:nvSpPr>
-          <p:cNvPr id="4" name="Espaço Reservado para Número de Slide 3">
-            <a:extLst>
-              <a:ext uri="{FF2B5EF4-FFF2-40B4-BE49-F238E27FC236}">
-                <a16:creationId xmlns:a16="http://schemas.microsoft.com/office/drawing/2014/main" id="{A8F76711-7864-16B2-2D1A-140BF30DEF2B}"/>
-              </a:ext>
-            </a:extLst>
-          </p:cNvPr>
-          <p:cNvSpPr>
-            <a:spLocks noGrp="1"/>
-          </p:cNvSpPr>
-          <p:nvPr>
-            <p:ph type="sldNum" sz="quarter" idx="5"/>
-          </p:nvPr>
-        </p:nvSpPr>
-        <p:spPr/>
-        <p:txBody>
-          <a:bodyPr/>
-          <a:lstStyle/>
-          <a:p>
-            <a:fld id="{80F36A49-A1DD-40F8-B8AD-E6F5365256CB}" type="slidenum">
-              <a:rPr lang="pt-BR" smtClean="0"/>
-              <a:t>2</a:t>
-            </a:fld>
-            <a:endParaRPr lang="pt-BR"/>
-          </a:p>
-        </p:txBody>
-      </p:sp>
-    </p:spTree>
-    <p:extLst>
-      <p:ext uri="{BB962C8B-B14F-4D97-AF65-F5344CB8AC3E}">
-        <p14:creationId xmlns:p14="http://schemas.microsoft.com/office/powerpoint/2010/main" val="2135703317"/>
-      </p:ext>
-    </p:extLst>
-  </p:cSld>
-  <p:clrMapOvr>
-    <a:masterClrMapping/>
-  </p:clrMapOvr>
-</p:notes>
-</file>
-
-<file path=ppt/notesSlides/notesSlide20.xml><?xml version="1.0" encoding="utf-8"?>
+<file path=ppt/notesSlides/notesSlide16.xml><?xml version="1.0" encoding="utf-8"?>
 <p:notes xmlns:a="http://schemas.openxmlformats.org/drawingml/2006/main" xmlns:r="http://schemas.openxmlformats.org/officeDocument/2006/relationships" xmlns:p="http://schemas.openxmlformats.org/presentationml/2006/main">
   <p:cSld>
     <p:spTree>
@@ -5316,7 +3857,7 @@
           <a:p>
             <a:fld id="{80F36A49-A1DD-40F8-B8AD-E6F5365256CB}" type="slidenum">
               <a:rPr lang="pt-BR" smtClean="0"/>
-              <a:t>21</a:t>
+              <a:t>17</a:t>
             </a:fld>
             <a:endParaRPr lang="pt-BR"/>
           </a:p>
@@ -5335,7 +3876,7 @@
 </p:notes>
 </file>
 
-<file path=ppt/notesSlides/notesSlide21.xml><?xml version="1.0" encoding="utf-8"?>
+<file path=ppt/notesSlides/notesSlide17.xml><?xml version="1.0" encoding="utf-8"?>
 <p:notes xmlns:a="http://schemas.openxmlformats.org/drawingml/2006/main" xmlns:r="http://schemas.openxmlformats.org/officeDocument/2006/relationships" xmlns:p="http://schemas.openxmlformats.org/presentationml/2006/main">
   <p:cSld>
     <p:spTree>
@@ -5432,7 +3973,7 @@
           <a:p>
             <a:fld id="{80F36A49-A1DD-40F8-B8AD-E6F5365256CB}" type="slidenum">
               <a:rPr lang="pt-BR" smtClean="0"/>
-              <a:t>22</a:t>
+              <a:t>18</a:t>
             </a:fld>
             <a:endParaRPr lang="pt-BR"/>
           </a:p>
@@ -5451,7 +3992,7 @@
 </p:notes>
 </file>
 
-<file path=ppt/notesSlides/notesSlide22.xml><?xml version="1.0" encoding="utf-8"?>
+<file path=ppt/notesSlides/notesSlide18.xml><?xml version="1.0" encoding="utf-8"?>
 <p:notes xmlns:a="http://schemas.openxmlformats.org/drawingml/2006/main" xmlns:r="http://schemas.openxmlformats.org/officeDocument/2006/relationships" xmlns:p="http://schemas.openxmlformats.org/presentationml/2006/main">
   <p:cSld>
     <p:spTree>
@@ -5548,7 +4089,7 @@
           <a:p>
             <a:fld id="{80F36A49-A1DD-40F8-B8AD-E6F5365256CB}" type="slidenum">
               <a:rPr lang="pt-BR" smtClean="0"/>
-              <a:t>23</a:t>
+              <a:t>19</a:t>
             </a:fld>
             <a:endParaRPr lang="pt-BR"/>
           </a:p>
@@ -5567,7 +4108,7 @@
 </p:notes>
 </file>
 
-<file path=ppt/notesSlides/notesSlide23.xml><?xml version="1.0" encoding="utf-8"?>
+<file path=ppt/notesSlides/notesSlide19.xml><?xml version="1.0" encoding="utf-8"?>
 <p:notes xmlns:a="http://schemas.openxmlformats.org/drawingml/2006/main" xmlns:r="http://schemas.openxmlformats.org/officeDocument/2006/relationships" xmlns:p="http://schemas.openxmlformats.org/presentationml/2006/main">
   <p:cSld>
     <p:spTree>
@@ -6017,7 +4558,7 @@
           <a:p>
             <a:fld id="{80F36A49-A1DD-40F8-B8AD-E6F5365256CB}" type="slidenum">
               <a:rPr lang="pt-BR" smtClean="0"/>
-              <a:t>24</a:t>
+              <a:t>20</a:t>
             </a:fld>
             <a:endParaRPr lang="pt-BR"/>
           </a:p>
@@ -6036,7 +4577,91 @@
 </p:notes>
 </file>
 
-<file path=ppt/notesSlides/notesSlide24.xml><?xml version="1.0" encoding="utf-8"?>
+<file path=ppt/notesSlides/notesSlide2.xml><?xml version="1.0" encoding="utf-8"?>
+<p:notes xmlns:a="http://schemas.openxmlformats.org/drawingml/2006/main" xmlns:r="http://schemas.openxmlformats.org/officeDocument/2006/relationships" xmlns:p="http://schemas.openxmlformats.org/presentationml/2006/main">
+  <p:cSld>
+    <p:spTree>
+      <p:nvGrpSpPr>
+        <p:cNvPr id="1" name=""/>
+        <p:cNvGrpSpPr/>
+        <p:nvPr/>
+      </p:nvGrpSpPr>
+      <p:grpSpPr>
+        <a:xfrm>
+          <a:off x="0" y="0"/>
+          <a:ext cx="0" cy="0"/>
+          <a:chOff x="0" y="0"/>
+          <a:chExt cx="0" cy="0"/>
+        </a:xfrm>
+      </p:grpSpPr>
+      <p:sp>
+        <p:nvSpPr>
+          <p:cNvPr id="2" name="Espaço Reservado para Imagem de Slide 1"/>
+          <p:cNvSpPr>
+            <a:spLocks noGrp="1" noRot="1" noChangeAspect="1"/>
+          </p:cNvSpPr>
+          <p:nvPr>
+            <p:ph type="sldImg"/>
+          </p:nvPr>
+        </p:nvSpPr>
+        <p:spPr/>
+      </p:sp>
+      <p:sp>
+        <p:nvSpPr>
+          <p:cNvPr id="3" name="Espaço Reservado para Anotações 2"/>
+          <p:cNvSpPr>
+            <a:spLocks noGrp="1"/>
+          </p:cNvSpPr>
+          <p:nvPr>
+            <p:ph type="body" idx="1"/>
+          </p:nvPr>
+        </p:nvSpPr>
+        <p:spPr/>
+        <p:txBody>
+          <a:bodyPr/>
+          <a:lstStyle/>
+          <a:p>
+            <a:endParaRPr lang="pt-BR" dirty="0"/>
+          </a:p>
+        </p:txBody>
+      </p:sp>
+      <p:sp>
+        <p:nvSpPr>
+          <p:cNvPr id="4" name="Espaço Reservado para Número de Slide 3"/>
+          <p:cNvSpPr>
+            <a:spLocks noGrp="1"/>
+          </p:cNvSpPr>
+          <p:nvPr>
+            <p:ph type="sldNum" sz="quarter" idx="5"/>
+          </p:nvPr>
+        </p:nvSpPr>
+        <p:spPr/>
+        <p:txBody>
+          <a:bodyPr/>
+          <a:lstStyle/>
+          <a:p>
+            <a:fld id="{80F36A49-A1DD-40F8-B8AD-E6F5365256CB}" type="slidenum">
+              <a:rPr lang="pt-BR" smtClean="0"/>
+              <a:t>2</a:t>
+            </a:fld>
+            <a:endParaRPr lang="pt-BR"/>
+          </a:p>
+        </p:txBody>
+      </p:sp>
+    </p:spTree>
+    <p:extLst>
+      <p:ext uri="{BB962C8B-B14F-4D97-AF65-F5344CB8AC3E}">
+        <p14:creationId xmlns:p14="http://schemas.microsoft.com/office/powerpoint/2010/main" val="784023116"/>
+      </p:ext>
+    </p:extLst>
+  </p:cSld>
+  <p:clrMapOvr>
+    <a:masterClrMapping/>
+  </p:clrMapOvr>
+</p:notes>
+</file>
+
+<file path=ppt/notesSlides/notesSlide20.xml><?xml version="1.0" encoding="utf-8"?>
 <p:notes xmlns:a="http://schemas.openxmlformats.org/drawingml/2006/main" xmlns:r="http://schemas.openxmlformats.org/officeDocument/2006/relationships" xmlns:p="http://schemas.openxmlformats.org/presentationml/2006/main">
   <p:cSld>
     <p:spTree>
@@ -6246,7 +4871,7 @@
           <a:p>
             <a:fld id="{80F36A49-A1DD-40F8-B8AD-E6F5365256CB}" type="slidenum">
               <a:rPr lang="pt-BR" smtClean="0"/>
-              <a:t>25</a:t>
+              <a:t>21</a:t>
             </a:fld>
             <a:endParaRPr lang="pt-BR"/>
           </a:p>
@@ -6265,7 +4890,7 @@
 </p:notes>
 </file>
 
-<file path=ppt/notesSlides/notesSlide25.xml><?xml version="1.0" encoding="utf-8"?>
+<file path=ppt/notesSlides/notesSlide21.xml><?xml version="1.0" encoding="utf-8"?>
 <p:notes xmlns:a="http://schemas.openxmlformats.org/drawingml/2006/main" xmlns:r="http://schemas.openxmlformats.org/officeDocument/2006/relationships" xmlns:p="http://schemas.openxmlformats.org/presentationml/2006/main">
   <p:cSld>
     <p:spTree>
@@ -6478,7 +5103,7 @@
           <a:p>
             <a:fld id="{80F36A49-A1DD-40F8-B8AD-E6F5365256CB}" type="slidenum">
               <a:rPr lang="pt-BR" smtClean="0"/>
-              <a:t>26</a:t>
+              <a:t>22</a:t>
             </a:fld>
             <a:endParaRPr lang="pt-BR"/>
           </a:p>
@@ -6497,7 +5122,7 @@
 </p:notes>
 </file>
 
-<file path=ppt/notesSlides/notesSlide26.xml><?xml version="1.0" encoding="utf-8"?>
+<file path=ppt/notesSlides/notesSlide22.xml><?xml version="1.0" encoding="utf-8"?>
 <p:notes xmlns:a="http://schemas.openxmlformats.org/drawingml/2006/main" xmlns:r="http://schemas.openxmlformats.org/officeDocument/2006/relationships" xmlns:p="http://schemas.openxmlformats.org/presentationml/2006/main">
   <p:cSld>
     <p:spTree>
@@ -6611,7 +5236,7 @@
           <a:p>
             <a:fld id="{80F36A49-A1DD-40F8-B8AD-E6F5365256CB}" type="slidenum">
               <a:rPr lang="pt-BR" smtClean="0"/>
-              <a:t>27</a:t>
+              <a:t>23</a:t>
             </a:fld>
             <a:endParaRPr lang="pt-BR"/>
           </a:p>
@@ -6630,7 +5255,7 @@
 </p:notes>
 </file>
 
-<file path=ppt/notesSlides/notesSlide27.xml><?xml version="1.0" encoding="utf-8"?>
+<file path=ppt/notesSlides/notesSlide23.xml><?xml version="1.0" encoding="utf-8"?>
 <p:notes xmlns:a="http://schemas.openxmlformats.org/drawingml/2006/main" xmlns:r="http://schemas.openxmlformats.org/officeDocument/2006/relationships" xmlns:p="http://schemas.openxmlformats.org/presentationml/2006/main">
   <p:cSld>
     <p:spTree>
@@ -6808,7 +5433,7 @@
           <a:p>
             <a:fld id="{80F36A49-A1DD-40F8-B8AD-E6F5365256CB}" type="slidenum">
               <a:rPr lang="pt-BR" smtClean="0"/>
-              <a:t>28</a:t>
+              <a:t>24</a:t>
             </a:fld>
             <a:endParaRPr lang="pt-BR"/>
           </a:p>
@@ -6827,7 +5452,7 @@
 </p:notes>
 </file>
 
-<file path=ppt/notesSlides/notesSlide28.xml><?xml version="1.0" encoding="utf-8"?>
+<file path=ppt/notesSlides/notesSlide24.xml><?xml version="1.0" encoding="utf-8"?>
 <p:notes xmlns:a="http://schemas.openxmlformats.org/drawingml/2006/main" xmlns:r="http://schemas.openxmlformats.org/officeDocument/2006/relationships" xmlns:p="http://schemas.openxmlformats.org/presentationml/2006/main">
   <p:cSld>
     <p:spTree>
@@ -7005,7 +5630,7 @@
           <a:p>
             <a:fld id="{80F36A49-A1DD-40F8-B8AD-E6F5365256CB}" type="slidenum">
               <a:rPr lang="pt-BR" smtClean="0"/>
-              <a:t>29</a:t>
+              <a:t>25</a:t>
             </a:fld>
             <a:endParaRPr lang="pt-BR"/>
           </a:p>
@@ -7024,7 +5649,7 @@
 </p:notes>
 </file>
 
-<file path=ppt/notesSlides/notesSlide29.xml><?xml version="1.0" encoding="utf-8"?>
+<file path=ppt/notesSlides/notesSlide25.xml><?xml version="1.0" encoding="utf-8"?>
 <p:notes xmlns:a="http://schemas.openxmlformats.org/drawingml/2006/main" xmlns:r="http://schemas.openxmlformats.org/officeDocument/2006/relationships" xmlns:p="http://schemas.openxmlformats.org/presentationml/2006/main">
   <p:cSld>
     <p:spTree>
@@ -7125,7 +5750,7 @@
           <a:p>
             <a:fld id="{80F36A49-A1DD-40F8-B8AD-E6F5365256CB}" type="slidenum">
               <a:rPr lang="pt-BR" smtClean="0"/>
-              <a:t>30</a:t>
+              <a:t>26</a:t>
             </a:fld>
             <a:endParaRPr lang="pt-BR"/>
           </a:p>
@@ -7144,115 +5769,7 @@
 </p:notes>
 </file>
 
-<file path=ppt/notesSlides/notesSlide3.xml><?xml version="1.0" encoding="utf-8"?>
-<p:notes xmlns:a="http://schemas.openxmlformats.org/drawingml/2006/main" xmlns:r="http://schemas.openxmlformats.org/officeDocument/2006/relationships" xmlns:p="http://schemas.openxmlformats.org/presentationml/2006/main">
-  <p:cSld>
-    <p:spTree>
-      <p:nvGrpSpPr>
-        <p:cNvPr id="1" name="">
-          <a:extLst>
-            <a:ext uri="{FF2B5EF4-FFF2-40B4-BE49-F238E27FC236}">
-              <a16:creationId xmlns:a16="http://schemas.microsoft.com/office/drawing/2014/main" id="{D172EBE6-8028-CFB1-9724-36EFE5A09A23}"/>
-            </a:ext>
-          </a:extLst>
-        </p:cNvPr>
-        <p:cNvGrpSpPr/>
-        <p:nvPr/>
-      </p:nvGrpSpPr>
-      <p:grpSpPr>
-        <a:xfrm>
-          <a:off x="0" y="0"/>
-          <a:ext cx="0" cy="0"/>
-          <a:chOff x="0" y="0"/>
-          <a:chExt cx="0" cy="0"/>
-        </a:xfrm>
-      </p:grpSpPr>
-      <p:sp>
-        <p:nvSpPr>
-          <p:cNvPr id="2" name="Espaço Reservado para Imagem de Slide 1">
-            <a:extLst>
-              <a:ext uri="{FF2B5EF4-FFF2-40B4-BE49-F238E27FC236}">
-                <a16:creationId xmlns:a16="http://schemas.microsoft.com/office/drawing/2014/main" id="{9069B76E-CD7C-F176-E30C-1FF6CBC78BCC}"/>
-              </a:ext>
-            </a:extLst>
-          </p:cNvPr>
-          <p:cNvSpPr>
-            <a:spLocks noGrp="1" noRot="1" noChangeAspect="1"/>
-          </p:cNvSpPr>
-          <p:nvPr>
-            <p:ph type="sldImg"/>
-          </p:nvPr>
-        </p:nvSpPr>
-        <p:spPr/>
-      </p:sp>
-      <p:sp>
-        <p:nvSpPr>
-          <p:cNvPr id="3" name="Espaço Reservado para Anotações 2">
-            <a:extLst>
-              <a:ext uri="{FF2B5EF4-FFF2-40B4-BE49-F238E27FC236}">
-                <a16:creationId xmlns:a16="http://schemas.microsoft.com/office/drawing/2014/main" id="{DDF1F636-8DE6-4496-60E4-309D236B156D}"/>
-              </a:ext>
-            </a:extLst>
-          </p:cNvPr>
-          <p:cNvSpPr>
-            <a:spLocks noGrp="1"/>
-          </p:cNvSpPr>
-          <p:nvPr>
-            <p:ph type="body" idx="1"/>
-          </p:nvPr>
-        </p:nvSpPr>
-        <p:spPr/>
-        <p:txBody>
-          <a:bodyPr/>
-          <a:lstStyle/>
-          <a:p>
-            <a:endParaRPr lang="pt-BR" dirty="0"/>
-          </a:p>
-        </p:txBody>
-      </p:sp>
-      <p:sp>
-        <p:nvSpPr>
-          <p:cNvPr id="4" name="Espaço Reservado para Número de Slide 3">
-            <a:extLst>
-              <a:ext uri="{FF2B5EF4-FFF2-40B4-BE49-F238E27FC236}">
-                <a16:creationId xmlns:a16="http://schemas.microsoft.com/office/drawing/2014/main" id="{BE5E1AEC-CF40-C324-4374-28168748E2DF}"/>
-              </a:ext>
-            </a:extLst>
-          </p:cNvPr>
-          <p:cNvSpPr>
-            <a:spLocks noGrp="1"/>
-          </p:cNvSpPr>
-          <p:nvPr>
-            <p:ph type="sldNum" sz="quarter" idx="5"/>
-          </p:nvPr>
-        </p:nvSpPr>
-        <p:spPr/>
-        <p:txBody>
-          <a:bodyPr/>
-          <a:lstStyle/>
-          <a:p>
-            <a:fld id="{80F36A49-A1DD-40F8-B8AD-E6F5365256CB}" type="slidenum">
-              <a:rPr lang="pt-BR" smtClean="0"/>
-              <a:t>3</a:t>
-            </a:fld>
-            <a:endParaRPr lang="pt-BR"/>
-          </a:p>
-        </p:txBody>
-      </p:sp>
-    </p:spTree>
-    <p:extLst>
-      <p:ext uri="{BB962C8B-B14F-4D97-AF65-F5344CB8AC3E}">
-        <p14:creationId xmlns:p14="http://schemas.microsoft.com/office/powerpoint/2010/main" val="3172261313"/>
-      </p:ext>
-    </p:extLst>
-  </p:cSld>
-  <p:clrMapOvr>
-    <a:masterClrMapping/>
-  </p:clrMapOvr>
-</p:notes>
-</file>
-
-<file path=ppt/notesSlides/notesSlide30.xml><?xml version="1.0" encoding="utf-8"?>
+<file path=ppt/notesSlides/notesSlide26.xml><?xml version="1.0" encoding="utf-8"?>
 <p:notes xmlns:a="http://schemas.openxmlformats.org/drawingml/2006/main" xmlns:r="http://schemas.openxmlformats.org/officeDocument/2006/relationships" xmlns:p="http://schemas.openxmlformats.org/presentationml/2006/main">
   <p:cSld>
     <p:spTree>
@@ -7353,7 +5870,7 @@
           <a:p>
             <a:fld id="{80F36A49-A1DD-40F8-B8AD-E6F5365256CB}" type="slidenum">
               <a:rPr lang="pt-BR" smtClean="0"/>
-              <a:t>31</a:t>
+              <a:t>27</a:t>
             </a:fld>
             <a:endParaRPr lang="pt-BR"/>
           </a:p>
@@ -7372,7 +5889,7 @@
 </p:notes>
 </file>
 
-<file path=ppt/notesSlides/notesSlide31.xml><?xml version="1.0" encoding="utf-8"?>
+<file path=ppt/notesSlides/notesSlide27.xml><?xml version="1.0" encoding="utf-8"?>
 <p:notes xmlns:a="http://schemas.openxmlformats.org/drawingml/2006/main" xmlns:r="http://schemas.openxmlformats.org/officeDocument/2006/relationships" xmlns:p="http://schemas.openxmlformats.org/presentationml/2006/main">
   <p:cSld>
     <p:spTree>
@@ -7473,7 +5990,7 @@
           <a:p>
             <a:fld id="{80F36A49-A1DD-40F8-B8AD-E6F5365256CB}" type="slidenum">
               <a:rPr lang="pt-BR" smtClean="0"/>
-              <a:t>32</a:t>
+              <a:t>28</a:t>
             </a:fld>
             <a:endParaRPr lang="pt-BR"/>
           </a:p>
@@ -7492,7 +6009,7 @@
 </p:notes>
 </file>
 
-<file path=ppt/notesSlides/notesSlide32.xml><?xml version="1.0" encoding="utf-8"?>
+<file path=ppt/notesSlides/notesSlide28.xml><?xml version="1.0" encoding="utf-8"?>
 <p:notes xmlns:a="http://schemas.openxmlformats.org/drawingml/2006/main" xmlns:r="http://schemas.openxmlformats.org/officeDocument/2006/relationships" xmlns:p="http://schemas.openxmlformats.org/presentationml/2006/main">
   <p:cSld>
     <p:spTree>
@@ -7593,7 +6110,7 @@
           <a:p>
             <a:fld id="{80F36A49-A1DD-40F8-B8AD-E6F5365256CB}" type="slidenum">
               <a:rPr lang="pt-BR" smtClean="0"/>
-              <a:t>33</a:t>
+              <a:t>29</a:t>
             </a:fld>
             <a:endParaRPr lang="pt-BR"/>
           </a:p>
@@ -7612,7 +6129,7 @@
 </p:notes>
 </file>
 
-<file path=ppt/notesSlides/notesSlide33.xml><?xml version="1.0" encoding="utf-8"?>
+<file path=ppt/notesSlides/notesSlide29.xml><?xml version="1.0" encoding="utf-8"?>
 <p:notes xmlns:a="http://schemas.openxmlformats.org/drawingml/2006/main" xmlns:r="http://schemas.openxmlformats.org/officeDocument/2006/relationships" xmlns:p="http://schemas.openxmlformats.org/presentationml/2006/main">
   <p:cSld>
     <p:spTree>
@@ -7713,7 +6230,7 @@
           <a:p>
             <a:fld id="{80F36A49-A1DD-40F8-B8AD-E6F5365256CB}" type="slidenum">
               <a:rPr lang="pt-BR" smtClean="0"/>
-              <a:t>34</a:t>
+              <a:t>30</a:t>
             </a:fld>
             <a:endParaRPr lang="pt-BR"/>
           </a:p>
@@ -7732,7 +6249,115 @@
 </p:notes>
 </file>
 
-<file path=ppt/notesSlides/notesSlide34.xml><?xml version="1.0" encoding="utf-8"?>
+<file path=ppt/notesSlides/notesSlide3.xml><?xml version="1.0" encoding="utf-8"?>
+<p:notes xmlns:a="http://schemas.openxmlformats.org/drawingml/2006/main" xmlns:r="http://schemas.openxmlformats.org/officeDocument/2006/relationships" xmlns:p="http://schemas.openxmlformats.org/presentationml/2006/main">
+  <p:cSld>
+    <p:spTree>
+      <p:nvGrpSpPr>
+        <p:cNvPr id="1" name="">
+          <a:extLst>
+            <a:ext uri="{FF2B5EF4-FFF2-40B4-BE49-F238E27FC236}">
+              <a16:creationId xmlns:a16="http://schemas.microsoft.com/office/drawing/2014/main" id="{DB6EB011-7176-5A7D-A2EA-0C754678F9BF}"/>
+            </a:ext>
+          </a:extLst>
+        </p:cNvPr>
+        <p:cNvGrpSpPr/>
+        <p:nvPr/>
+      </p:nvGrpSpPr>
+      <p:grpSpPr>
+        <a:xfrm>
+          <a:off x="0" y="0"/>
+          <a:ext cx="0" cy="0"/>
+          <a:chOff x="0" y="0"/>
+          <a:chExt cx="0" cy="0"/>
+        </a:xfrm>
+      </p:grpSpPr>
+      <p:sp>
+        <p:nvSpPr>
+          <p:cNvPr id="2" name="Espaço Reservado para Imagem de Slide 1">
+            <a:extLst>
+              <a:ext uri="{FF2B5EF4-FFF2-40B4-BE49-F238E27FC236}">
+                <a16:creationId xmlns:a16="http://schemas.microsoft.com/office/drawing/2014/main" id="{C2828F5C-42D4-B833-940B-876A1289937E}"/>
+              </a:ext>
+            </a:extLst>
+          </p:cNvPr>
+          <p:cNvSpPr>
+            <a:spLocks noGrp="1" noRot="1" noChangeAspect="1"/>
+          </p:cNvSpPr>
+          <p:nvPr>
+            <p:ph type="sldImg"/>
+          </p:nvPr>
+        </p:nvSpPr>
+        <p:spPr/>
+      </p:sp>
+      <p:sp>
+        <p:nvSpPr>
+          <p:cNvPr id="3" name="Espaço Reservado para Anotações 2">
+            <a:extLst>
+              <a:ext uri="{FF2B5EF4-FFF2-40B4-BE49-F238E27FC236}">
+                <a16:creationId xmlns:a16="http://schemas.microsoft.com/office/drawing/2014/main" id="{945B40F1-CB45-2F7C-EB01-737BEE44EED5}"/>
+              </a:ext>
+            </a:extLst>
+          </p:cNvPr>
+          <p:cNvSpPr>
+            <a:spLocks noGrp="1"/>
+          </p:cNvSpPr>
+          <p:nvPr>
+            <p:ph type="body" idx="1"/>
+          </p:nvPr>
+        </p:nvSpPr>
+        <p:spPr/>
+        <p:txBody>
+          <a:bodyPr/>
+          <a:lstStyle/>
+          <a:p>
+            <a:endParaRPr lang="pt-BR" dirty="0"/>
+          </a:p>
+        </p:txBody>
+      </p:sp>
+      <p:sp>
+        <p:nvSpPr>
+          <p:cNvPr id="4" name="Espaço Reservado para Número de Slide 3">
+            <a:extLst>
+              <a:ext uri="{FF2B5EF4-FFF2-40B4-BE49-F238E27FC236}">
+                <a16:creationId xmlns:a16="http://schemas.microsoft.com/office/drawing/2014/main" id="{C537E7EA-4D4D-166C-DE43-EB39174807E6}"/>
+              </a:ext>
+            </a:extLst>
+          </p:cNvPr>
+          <p:cNvSpPr>
+            <a:spLocks noGrp="1"/>
+          </p:cNvSpPr>
+          <p:nvPr>
+            <p:ph type="sldNum" sz="quarter" idx="5"/>
+          </p:nvPr>
+        </p:nvSpPr>
+        <p:spPr/>
+        <p:txBody>
+          <a:bodyPr/>
+          <a:lstStyle/>
+          <a:p>
+            <a:fld id="{80F36A49-A1DD-40F8-B8AD-E6F5365256CB}" type="slidenum">
+              <a:rPr lang="pt-BR" smtClean="0"/>
+              <a:t>3</a:t>
+            </a:fld>
+            <a:endParaRPr lang="pt-BR"/>
+          </a:p>
+        </p:txBody>
+      </p:sp>
+    </p:spTree>
+    <p:extLst>
+      <p:ext uri="{BB962C8B-B14F-4D97-AF65-F5344CB8AC3E}">
+        <p14:creationId xmlns:p14="http://schemas.microsoft.com/office/powerpoint/2010/main" val="3072862982"/>
+      </p:ext>
+    </p:extLst>
+  </p:cSld>
+  <p:clrMapOvr>
+    <a:masterClrMapping/>
+  </p:clrMapOvr>
+</p:notes>
+</file>
+
+<file path=ppt/notesSlides/notesSlide30.xml><?xml version="1.0" encoding="utf-8"?>
 <p:notes xmlns:a="http://schemas.openxmlformats.org/drawingml/2006/main" xmlns:r="http://schemas.openxmlformats.org/officeDocument/2006/relationships" xmlns:p="http://schemas.openxmlformats.org/presentationml/2006/main">
   <p:cSld>
     <p:spTree>
@@ -7833,7 +6458,7 @@
           <a:p>
             <a:fld id="{80F36A49-A1DD-40F8-B8AD-E6F5365256CB}" type="slidenum">
               <a:rPr lang="pt-BR" smtClean="0"/>
-              <a:t>35</a:t>
+              <a:t>31</a:t>
             </a:fld>
             <a:endParaRPr lang="pt-BR"/>
           </a:p>
@@ -7852,7 +6477,7 @@
 </p:notes>
 </file>
 
-<file path=ppt/notesSlides/notesSlide35.xml><?xml version="1.0" encoding="utf-8"?>
+<file path=ppt/notesSlides/notesSlide31.xml><?xml version="1.0" encoding="utf-8"?>
 <p:notes xmlns:a="http://schemas.openxmlformats.org/drawingml/2006/main" xmlns:r="http://schemas.openxmlformats.org/officeDocument/2006/relationships" xmlns:p="http://schemas.openxmlformats.org/presentationml/2006/main">
   <p:cSld>
     <p:spTree>
@@ -7980,7 +6605,7 @@
           <a:p>
             <a:fld id="{80F36A49-A1DD-40F8-B8AD-E6F5365256CB}" type="slidenum">
               <a:rPr lang="pt-BR" smtClean="0"/>
-              <a:t>36</a:t>
+              <a:t>32</a:t>
             </a:fld>
             <a:endParaRPr lang="pt-BR"/>
           </a:p>
@@ -7999,7 +6624,7 @@
 </p:notes>
 </file>
 
-<file path=ppt/notesSlides/notesSlide36.xml><?xml version="1.0" encoding="utf-8"?>
+<file path=ppt/notesSlides/notesSlide32.xml><?xml version="1.0" encoding="utf-8"?>
 <p:notes xmlns:a="http://schemas.openxmlformats.org/drawingml/2006/main" xmlns:r="http://schemas.openxmlformats.org/officeDocument/2006/relationships" xmlns:p="http://schemas.openxmlformats.org/presentationml/2006/main">
   <p:cSld>
     <p:spTree>
@@ -8127,7 +6752,7 @@
           <a:p>
             <a:fld id="{80F36A49-A1DD-40F8-B8AD-E6F5365256CB}" type="slidenum">
               <a:rPr lang="pt-BR" smtClean="0"/>
-              <a:t>37</a:t>
+              <a:t>33</a:t>
             </a:fld>
             <a:endParaRPr lang="pt-BR"/>
           </a:p>
@@ -8146,7 +6771,7 @@
 </p:notes>
 </file>
 
-<file path=ppt/notesSlides/notesSlide37.xml><?xml version="1.0" encoding="utf-8"?>
+<file path=ppt/notesSlides/notesSlide33.xml><?xml version="1.0" encoding="utf-8"?>
 <p:notes xmlns:a="http://schemas.openxmlformats.org/drawingml/2006/main" xmlns:r="http://schemas.openxmlformats.org/officeDocument/2006/relationships" xmlns:p="http://schemas.openxmlformats.org/presentationml/2006/main">
   <p:cSld>
     <p:spTree>
@@ -8274,7 +6899,7 @@
           <a:p>
             <a:fld id="{80F36A49-A1DD-40F8-B8AD-E6F5365256CB}" type="slidenum">
               <a:rPr lang="pt-BR" smtClean="0"/>
-              <a:t>38</a:t>
+              <a:t>34</a:t>
             </a:fld>
             <a:endParaRPr lang="pt-BR"/>
           </a:p>
@@ -8293,7 +6918,7 @@
 </p:notes>
 </file>
 
-<file path=ppt/notesSlides/notesSlide38.xml><?xml version="1.0" encoding="utf-8"?>
+<file path=ppt/notesSlides/notesSlide34.xml><?xml version="1.0" encoding="utf-8"?>
 <p:notes xmlns:a="http://schemas.openxmlformats.org/drawingml/2006/main" xmlns:r="http://schemas.openxmlformats.org/officeDocument/2006/relationships" xmlns:p="http://schemas.openxmlformats.org/presentationml/2006/main">
   <p:cSld>
     <p:spTree>
@@ -8421,7 +7046,7 @@
           <a:p>
             <a:fld id="{80F36A49-A1DD-40F8-B8AD-E6F5365256CB}" type="slidenum">
               <a:rPr lang="pt-BR" smtClean="0"/>
-              <a:t>39</a:t>
+              <a:t>35</a:t>
             </a:fld>
             <a:endParaRPr lang="pt-BR"/>
           </a:p>
@@ -8440,7 +7065,7 @@
 </p:notes>
 </file>
 
-<file path=ppt/notesSlides/notesSlide39.xml><?xml version="1.0" encoding="utf-8"?>
+<file path=ppt/notesSlides/notesSlide35.xml><?xml version="1.0" encoding="utf-8"?>
 <p:notes xmlns:a="http://schemas.openxmlformats.org/drawingml/2006/main" xmlns:r="http://schemas.openxmlformats.org/officeDocument/2006/relationships" xmlns:p="http://schemas.openxmlformats.org/presentationml/2006/main">
   <p:cSld>
     <p:spTree>
@@ -8568,7 +7193,7 @@
           <a:p>
             <a:fld id="{80F36A49-A1DD-40F8-B8AD-E6F5365256CB}" type="slidenum">
               <a:rPr lang="pt-BR" smtClean="0"/>
-              <a:t>40</a:t>
+              <a:t>36</a:t>
             </a:fld>
             <a:endParaRPr lang="pt-BR"/>
           </a:p>
@@ -8587,115 +7212,7 @@
 </p:notes>
 </file>
 
-<file path=ppt/notesSlides/notesSlide4.xml><?xml version="1.0" encoding="utf-8"?>
-<p:notes xmlns:a="http://schemas.openxmlformats.org/drawingml/2006/main" xmlns:r="http://schemas.openxmlformats.org/officeDocument/2006/relationships" xmlns:p="http://schemas.openxmlformats.org/presentationml/2006/main">
-  <p:cSld>
-    <p:spTree>
-      <p:nvGrpSpPr>
-        <p:cNvPr id="1" name="">
-          <a:extLst>
-            <a:ext uri="{FF2B5EF4-FFF2-40B4-BE49-F238E27FC236}">
-              <a16:creationId xmlns:a16="http://schemas.microsoft.com/office/drawing/2014/main" id="{A3184A9F-4876-629F-891A-6D247B74D524}"/>
-            </a:ext>
-          </a:extLst>
-        </p:cNvPr>
-        <p:cNvGrpSpPr/>
-        <p:nvPr/>
-      </p:nvGrpSpPr>
-      <p:grpSpPr>
-        <a:xfrm>
-          <a:off x="0" y="0"/>
-          <a:ext cx="0" cy="0"/>
-          <a:chOff x="0" y="0"/>
-          <a:chExt cx="0" cy="0"/>
-        </a:xfrm>
-      </p:grpSpPr>
-      <p:sp>
-        <p:nvSpPr>
-          <p:cNvPr id="2" name="Espaço Reservado para Imagem de Slide 1">
-            <a:extLst>
-              <a:ext uri="{FF2B5EF4-FFF2-40B4-BE49-F238E27FC236}">
-                <a16:creationId xmlns:a16="http://schemas.microsoft.com/office/drawing/2014/main" id="{A7E3B4A7-5916-5A37-F86B-2CA224A7B4BB}"/>
-              </a:ext>
-            </a:extLst>
-          </p:cNvPr>
-          <p:cNvSpPr>
-            <a:spLocks noGrp="1" noRot="1" noChangeAspect="1"/>
-          </p:cNvSpPr>
-          <p:nvPr>
-            <p:ph type="sldImg"/>
-          </p:nvPr>
-        </p:nvSpPr>
-        <p:spPr/>
-      </p:sp>
-      <p:sp>
-        <p:nvSpPr>
-          <p:cNvPr id="3" name="Espaço Reservado para Anotações 2">
-            <a:extLst>
-              <a:ext uri="{FF2B5EF4-FFF2-40B4-BE49-F238E27FC236}">
-                <a16:creationId xmlns:a16="http://schemas.microsoft.com/office/drawing/2014/main" id="{C0CF73BD-08A0-6C5A-90F2-844EAE0788E1}"/>
-              </a:ext>
-            </a:extLst>
-          </p:cNvPr>
-          <p:cNvSpPr>
-            <a:spLocks noGrp="1"/>
-          </p:cNvSpPr>
-          <p:nvPr>
-            <p:ph type="body" idx="1"/>
-          </p:nvPr>
-        </p:nvSpPr>
-        <p:spPr/>
-        <p:txBody>
-          <a:bodyPr/>
-          <a:lstStyle/>
-          <a:p>
-            <a:endParaRPr lang="pt-BR" dirty="0"/>
-          </a:p>
-        </p:txBody>
-      </p:sp>
-      <p:sp>
-        <p:nvSpPr>
-          <p:cNvPr id="4" name="Espaço Reservado para Número de Slide 3">
-            <a:extLst>
-              <a:ext uri="{FF2B5EF4-FFF2-40B4-BE49-F238E27FC236}">
-                <a16:creationId xmlns:a16="http://schemas.microsoft.com/office/drawing/2014/main" id="{7FF1830E-CA2A-22E0-725D-2C8E1FF19F16}"/>
-              </a:ext>
-            </a:extLst>
-          </p:cNvPr>
-          <p:cNvSpPr>
-            <a:spLocks noGrp="1"/>
-          </p:cNvSpPr>
-          <p:nvPr>
-            <p:ph type="sldNum" sz="quarter" idx="5"/>
-          </p:nvPr>
-        </p:nvSpPr>
-        <p:spPr/>
-        <p:txBody>
-          <a:bodyPr/>
-          <a:lstStyle/>
-          <a:p>
-            <a:fld id="{80F36A49-A1DD-40F8-B8AD-E6F5365256CB}" type="slidenum">
-              <a:rPr lang="pt-BR" smtClean="0"/>
-              <a:t>4</a:t>
-            </a:fld>
-            <a:endParaRPr lang="pt-BR"/>
-          </a:p>
-        </p:txBody>
-      </p:sp>
-    </p:spTree>
-    <p:extLst>
-      <p:ext uri="{BB962C8B-B14F-4D97-AF65-F5344CB8AC3E}">
-        <p14:creationId xmlns:p14="http://schemas.microsoft.com/office/powerpoint/2010/main" val="370703049"/>
-      </p:ext>
-    </p:extLst>
-  </p:cSld>
-  <p:clrMapOvr>
-    <a:masterClrMapping/>
-  </p:clrMapOvr>
-</p:notes>
-</file>
-
-<file path=ppt/notesSlides/notesSlide40.xml><?xml version="1.0" encoding="utf-8"?>
+<file path=ppt/notesSlides/notesSlide36.xml><?xml version="1.0" encoding="utf-8"?>
 <p:notes xmlns:a="http://schemas.openxmlformats.org/drawingml/2006/main" xmlns:r="http://schemas.openxmlformats.org/officeDocument/2006/relationships" xmlns:p="http://schemas.openxmlformats.org/presentationml/2006/main">
   <p:cSld>
     <p:spTree>
@@ -8823,7 +7340,7 @@
           <a:p>
             <a:fld id="{80F36A49-A1DD-40F8-B8AD-E6F5365256CB}" type="slidenum">
               <a:rPr lang="pt-BR" smtClean="0"/>
-              <a:t>41</a:t>
+              <a:t>37</a:t>
             </a:fld>
             <a:endParaRPr lang="pt-BR"/>
           </a:p>
@@ -8842,7 +7359,7 @@
 </p:notes>
 </file>
 
-<file path=ppt/notesSlides/notesSlide41.xml><?xml version="1.0" encoding="utf-8"?>
+<file path=ppt/notesSlides/notesSlide37.xml><?xml version="1.0" encoding="utf-8"?>
 <p:notes xmlns:a="http://schemas.openxmlformats.org/drawingml/2006/main" xmlns:r="http://schemas.openxmlformats.org/officeDocument/2006/relationships" xmlns:p="http://schemas.openxmlformats.org/presentationml/2006/main">
   <p:cSld>
     <p:spTree>
@@ -8970,7 +7487,7 @@
           <a:p>
             <a:fld id="{80F36A49-A1DD-40F8-B8AD-E6F5365256CB}" type="slidenum">
               <a:rPr lang="pt-BR" smtClean="0"/>
-              <a:t>42</a:t>
+              <a:t>38</a:t>
             </a:fld>
             <a:endParaRPr lang="pt-BR"/>
           </a:p>
@@ -8989,7 +7506,7 @@
 </p:notes>
 </file>
 
-<file path=ppt/notesSlides/notesSlide42.xml><?xml version="1.0" encoding="utf-8"?>
+<file path=ppt/notesSlides/notesSlide38.xml><?xml version="1.0" encoding="utf-8"?>
 <p:notes xmlns:a="http://schemas.openxmlformats.org/drawingml/2006/main" xmlns:r="http://schemas.openxmlformats.org/officeDocument/2006/relationships" xmlns:p="http://schemas.openxmlformats.org/presentationml/2006/main">
   <p:cSld>
     <p:spTree>
@@ -9117,7 +7634,7 @@
           <a:p>
             <a:fld id="{80F36A49-A1DD-40F8-B8AD-E6F5365256CB}" type="slidenum">
               <a:rPr lang="pt-BR" smtClean="0"/>
-              <a:t>43</a:t>
+              <a:t>39</a:t>
             </a:fld>
             <a:endParaRPr lang="pt-BR"/>
           </a:p>
@@ -9136,283 +7653,7 @@
 </p:notes>
 </file>
 
-<file path=ppt/notesSlides/notesSlide5.xml><?xml version="1.0" encoding="utf-8"?>
-<p:notes xmlns:a="http://schemas.openxmlformats.org/drawingml/2006/main" xmlns:r="http://schemas.openxmlformats.org/officeDocument/2006/relationships" xmlns:p="http://schemas.openxmlformats.org/presentationml/2006/main">
-  <p:cSld>
-    <p:spTree>
-      <p:nvGrpSpPr>
-        <p:cNvPr id="1" name=""/>
-        <p:cNvGrpSpPr/>
-        <p:nvPr/>
-      </p:nvGrpSpPr>
-      <p:grpSpPr>
-        <a:xfrm>
-          <a:off x="0" y="0"/>
-          <a:ext cx="0" cy="0"/>
-          <a:chOff x="0" y="0"/>
-          <a:chExt cx="0" cy="0"/>
-        </a:xfrm>
-      </p:grpSpPr>
-      <p:sp>
-        <p:nvSpPr>
-          <p:cNvPr id="2" name="Espaço Reservado para Imagem de Slide 1"/>
-          <p:cNvSpPr>
-            <a:spLocks noGrp="1" noRot="1" noChangeAspect="1"/>
-          </p:cNvSpPr>
-          <p:nvPr>
-            <p:ph type="sldImg"/>
-          </p:nvPr>
-        </p:nvSpPr>
-        <p:spPr/>
-      </p:sp>
-      <p:sp>
-        <p:nvSpPr>
-          <p:cNvPr id="3" name="Espaço Reservado para Anotações 2"/>
-          <p:cNvSpPr>
-            <a:spLocks noGrp="1"/>
-          </p:cNvSpPr>
-          <p:nvPr>
-            <p:ph type="body" idx="1"/>
-          </p:nvPr>
-        </p:nvSpPr>
-        <p:spPr/>
-        <p:txBody>
-          <a:bodyPr/>
-          <a:lstStyle/>
-          <a:p>
-            <a:endParaRPr lang="pt-BR" dirty="0"/>
-          </a:p>
-        </p:txBody>
-      </p:sp>
-      <p:sp>
-        <p:nvSpPr>
-          <p:cNvPr id="4" name="Espaço Reservado para Número de Slide 3"/>
-          <p:cNvSpPr>
-            <a:spLocks noGrp="1"/>
-          </p:cNvSpPr>
-          <p:nvPr>
-            <p:ph type="sldNum" sz="quarter" idx="5"/>
-          </p:nvPr>
-        </p:nvSpPr>
-        <p:spPr/>
-        <p:txBody>
-          <a:bodyPr/>
-          <a:lstStyle/>
-          <a:p>
-            <a:fld id="{80F36A49-A1DD-40F8-B8AD-E6F5365256CB}" type="slidenum">
-              <a:rPr lang="pt-BR" smtClean="0"/>
-              <a:t>5</a:t>
-            </a:fld>
-            <a:endParaRPr lang="pt-BR"/>
-          </a:p>
-        </p:txBody>
-      </p:sp>
-    </p:spTree>
-    <p:extLst>
-      <p:ext uri="{BB962C8B-B14F-4D97-AF65-F5344CB8AC3E}">
-        <p14:creationId xmlns:p14="http://schemas.microsoft.com/office/powerpoint/2010/main" val="1106096561"/>
-      </p:ext>
-    </p:extLst>
-  </p:cSld>
-  <p:clrMapOvr>
-    <a:masterClrMapping/>
-  </p:clrMapOvr>
-</p:notes>
-</file>
-
-<file path=ppt/notesSlides/notesSlide6.xml><?xml version="1.0" encoding="utf-8"?>
-<p:notes xmlns:a="http://schemas.openxmlformats.org/drawingml/2006/main" xmlns:r="http://schemas.openxmlformats.org/officeDocument/2006/relationships" xmlns:p="http://schemas.openxmlformats.org/presentationml/2006/main">
-  <p:cSld>
-    <p:spTree>
-      <p:nvGrpSpPr>
-        <p:cNvPr id="1" name=""/>
-        <p:cNvGrpSpPr/>
-        <p:nvPr/>
-      </p:nvGrpSpPr>
-      <p:grpSpPr>
-        <a:xfrm>
-          <a:off x="0" y="0"/>
-          <a:ext cx="0" cy="0"/>
-          <a:chOff x="0" y="0"/>
-          <a:chExt cx="0" cy="0"/>
-        </a:xfrm>
-      </p:grpSpPr>
-      <p:sp>
-        <p:nvSpPr>
-          <p:cNvPr id="2" name="Espaço Reservado para Imagem de Slide 1"/>
-          <p:cNvSpPr>
-            <a:spLocks noGrp="1" noRot="1" noChangeAspect="1"/>
-          </p:cNvSpPr>
-          <p:nvPr>
-            <p:ph type="sldImg"/>
-          </p:nvPr>
-        </p:nvSpPr>
-        <p:spPr/>
-      </p:sp>
-      <p:sp>
-        <p:nvSpPr>
-          <p:cNvPr id="3" name="Espaço Reservado para Anotações 2"/>
-          <p:cNvSpPr>
-            <a:spLocks noGrp="1"/>
-          </p:cNvSpPr>
-          <p:nvPr>
-            <p:ph type="body" idx="1"/>
-          </p:nvPr>
-        </p:nvSpPr>
-        <p:spPr/>
-        <p:txBody>
-          <a:bodyPr/>
-          <a:lstStyle/>
-          <a:p>
-            <a:endParaRPr lang="pt-BR" dirty="0"/>
-          </a:p>
-        </p:txBody>
-      </p:sp>
-      <p:sp>
-        <p:nvSpPr>
-          <p:cNvPr id="4" name="Espaço Reservado para Número de Slide 3"/>
-          <p:cNvSpPr>
-            <a:spLocks noGrp="1"/>
-          </p:cNvSpPr>
-          <p:nvPr>
-            <p:ph type="sldNum" sz="quarter" idx="5"/>
-          </p:nvPr>
-        </p:nvSpPr>
-        <p:spPr/>
-        <p:txBody>
-          <a:bodyPr/>
-          <a:lstStyle/>
-          <a:p>
-            <a:fld id="{80F36A49-A1DD-40F8-B8AD-E6F5365256CB}" type="slidenum">
-              <a:rPr lang="pt-BR" smtClean="0"/>
-              <a:t>6</a:t>
-            </a:fld>
-            <a:endParaRPr lang="pt-BR"/>
-          </a:p>
-        </p:txBody>
-      </p:sp>
-    </p:spTree>
-    <p:extLst>
-      <p:ext uri="{BB962C8B-B14F-4D97-AF65-F5344CB8AC3E}">
-        <p14:creationId xmlns:p14="http://schemas.microsoft.com/office/powerpoint/2010/main" val="784023116"/>
-      </p:ext>
-    </p:extLst>
-  </p:cSld>
-  <p:clrMapOvr>
-    <a:masterClrMapping/>
-  </p:clrMapOvr>
-</p:notes>
-</file>
-
-<file path=ppt/notesSlides/notesSlide7.xml><?xml version="1.0" encoding="utf-8"?>
-<p:notes xmlns:a="http://schemas.openxmlformats.org/drawingml/2006/main" xmlns:r="http://schemas.openxmlformats.org/officeDocument/2006/relationships" xmlns:p="http://schemas.openxmlformats.org/presentationml/2006/main">
-  <p:cSld>
-    <p:spTree>
-      <p:nvGrpSpPr>
-        <p:cNvPr id="1" name="">
-          <a:extLst>
-            <a:ext uri="{FF2B5EF4-FFF2-40B4-BE49-F238E27FC236}">
-              <a16:creationId xmlns:a16="http://schemas.microsoft.com/office/drawing/2014/main" id="{DB6EB011-7176-5A7D-A2EA-0C754678F9BF}"/>
-            </a:ext>
-          </a:extLst>
-        </p:cNvPr>
-        <p:cNvGrpSpPr/>
-        <p:nvPr/>
-      </p:nvGrpSpPr>
-      <p:grpSpPr>
-        <a:xfrm>
-          <a:off x="0" y="0"/>
-          <a:ext cx="0" cy="0"/>
-          <a:chOff x="0" y="0"/>
-          <a:chExt cx="0" cy="0"/>
-        </a:xfrm>
-      </p:grpSpPr>
-      <p:sp>
-        <p:nvSpPr>
-          <p:cNvPr id="2" name="Espaço Reservado para Imagem de Slide 1">
-            <a:extLst>
-              <a:ext uri="{FF2B5EF4-FFF2-40B4-BE49-F238E27FC236}">
-                <a16:creationId xmlns:a16="http://schemas.microsoft.com/office/drawing/2014/main" id="{C2828F5C-42D4-B833-940B-876A1289937E}"/>
-              </a:ext>
-            </a:extLst>
-          </p:cNvPr>
-          <p:cNvSpPr>
-            <a:spLocks noGrp="1" noRot="1" noChangeAspect="1"/>
-          </p:cNvSpPr>
-          <p:nvPr>
-            <p:ph type="sldImg"/>
-          </p:nvPr>
-        </p:nvSpPr>
-        <p:spPr/>
-      </p:sp>
-      <p:sp>
-        <p:nvSpPr>
-          <p:cNvPr id="3" name="Espaço Reservado para Anotações 2">
-            <a:extLst>
-              <a:ext uri="{FF2B5EF4-FFF2-40B4-BE49-F238E27FC236}">
-                <a16:creationId xmlns:a16="http://schemas.microsoft.com/office/drawing/2014/main" id="{945B40F1-CB45-2F7C-EB01-737BEE44EED5}"/>
-              </a:ext>
-            </a:extLst>
-          </p:cNvPr>
-          <p:cNvSpPr>
-            <a:spLocks noGrp="1"/>
-          </p:cNvSpPr>
-          <p:nvPr>
-            <p:ph type="body" idx="1"/>
-          </p:nvPr>
-        </p:nvSpPr>
-        <p:spPr/>
-        <p:txBody>
-          <a:bodyPr/>
-          <a:lstStyle/>
-          <a:p>
-            <a:endParaRPr lang="pt-BR" dirty="0"/>
-          </a:p>
-        </p:txBody>
-      </p:sp>
-      <p:sp>
-        <p:nvSpPr>
-          <p:cNvPr id="4" name="Espaço Reservado para Número de Slide 3">
-            <a:extLst>
-              <a:ext uri="{FF2B5EF4-FFF2-40B4-BE49-F238E27FC236}">
-                <a16:creationId xmlns:a16="http://schemas.microsoft.com/office/drawing/2014/main" id="{C537E7EA-4D4D-166C-DE43-EB39174807E6}"/>
-              </a:ext>
-            </a:extLst>
-          </p:cNvPr>
-          <p:cNvSpPr>
-            <a:spLocks noGrp="1"/>
-          </p:cNvSpPr>
-          <p:nvPr>
-            <p:ph type="sldNum" sz="quarter" idx="5"/>
-          </p:nvPr>
-        </p:nvSpPr>
-        <p:spPr/>
-        <p:txBody>
-          <a:bodyPr/>
-          <a:lstStyle/>
-          <a:p>
-            <a:fld id="{80F36A49-A1DD-40F8-B8AD-E6F5365256CB}" type="slidenum">
-              <a:rPr lang="pt-BR" smtClean="0"/>
-              <a:t>7</a:t>
-            </a:fld>
-            <a:endParaRPr lang="pt-BR"/>
-          </a:p>
-        </p:txBody>
-      </p:sp>
-    </p:spTree>
-    <p:extLst>
-      <p:ext uri="{BB962C8B-B14F-4D97-AF65-F5344CB8AC3E}">
-        <p14:creationId xmlns:p14="http://schemas.microsoft.com/office/powerpoint/2010/main" val="3072862982"/>
-      </p:ext>
-    </p:extLst>
-  </p:cSld>
-  <p:clrMapOvr>
-    <a:masterClrMapping/>
-  </p:clrMapOvr>
-</p:notes>
-</file>
-
-<file path=ppt/notesSlides/notesSlide8.xml><?xml version="1.0" encoding="utf-8"?>
+<file path=ppt/notesSlides/notesSlide4.xml><?xml version="1.0" encoding="utf-8"?>
 <p:notes xmlns:a="http://schemas.openxmlformats.org/drawingml/2006/main" xmlns:r="http://schemas.openxmlformats.org/officeDocument/2006/relationships" xmlns:p="http://schemas.openxmlformats.org/presentationml/2006/main">
   <p:cSld>
     <p:spTree>
@@ -9501,7 +7742,7 @@
           <a:p>
             <a:fld id="{80F36A49-A1DD-40F8-B8AD-E6F5365256CB}" type="slidenum">
               <a:rPr lang="pt-BR" smtClean="0"/>
-              <a:t>8</a:t>
+              <a:t>4</a:t>
             </a:fld>
             <a:endParaRPr lang="pt-BR"/>
           </a:p>
@@ -9520,7 +7761,7 @@
 </p:notes>
 </file>
 
-<file path=ppt/notesSlides/notesSlide9.xml><?xml version="1.0" encoding="utf-8"?>
+<file path=ppt/notesSlides/notesSlide5.xml><?xml version="1.0" encoding="utf-8"?>
 <p:notes xmlns:a="http://schemas.openxmlformats.org/drawingml/2006/main" xmlns:r="http://schemas.openxmlformats.org/officeDocument/2006/relationships" xmlns:p="http://schemas.openxmlformats.org/presentationml/2006/main">
   <p:cSld>
     <p:spTree>
@@ -9609,7 +7850,7 @@
           <a:p>
             <a:fld id="{80F36A49-A1DD-40F8-B8AD-E6F5365256CB}" type="slidenum">
               <a:rPr lang="pt-BR" smtClean="0"/>
-              <a:t>9</a:t>
+              <a:t>5</a:t>
             </a:fld>
             <a:endParaRPr lang="pt-BR"/>
           </a:p>
@@ -9619,6 +7860,1329 @@
     <p:extLst>
       <p:ext uri="{BB962C8B-B14F-4D97-AF65-F5344CB8AC3E}">
         <p14:creationId xmlns:p14="http://schemas.microsoft.com/office/powerpoint/2010/main" val="4085171955"/>
+      </p:ext>
+    </p:extLst>
+  </p:cSld>
+  <p:clrMapOvr>
+    <a:masterClrMapping/>
+  </p:clrMapOvr>
+</p:notes>
+</file>
+
+<file path=ppt/notesSlides/notesSlide6.xml><?xml version="1.0" encoding="utf-8"?>
+<p:notes xmlns:a="http://schemas.openxmlformats.org/drawingml/2006/main" xmlns:r="http://schemas.openxmlformats.org/officeDocument/2006/relationships" xmlns:p="http://schemas.openxmlformats.org/presentationml/2006/main">
+  <p:cSld>
+    <p:spTree>
+      <p:nvGrpSpPr>
+        <p:cNvPr id="1" name="">
+          <a:extLst>
+            <a:ext uri="{FF2B5EF4-FFF2-40B4-BE49-F238E27FC236}">
+              <a16:creationId xmlns:a16="http://schemas.microsoft.com/office/drawing/2014/main" id="{3E9EB377-559E-8593-32F4-69B1B87A2718}"/>
+            </a:ext>
+          </a:extLst>
+        </p:cNvPr>
+        <p:cNvGrpSpPr/>
+        <p:nvPr/>
+      </p:nvGrpSpPr>
+      <p:grpSpPr>
+        <a:xfrm>
+          <a:off x="0" y="0"/>
+          <a:ext cx="0" cy="0"/>
+          <a:chOff x="0" y="0"/>
+          <a:chExt cx="0" cy="0"/>
+        </a:xfrm>
+      </p:grpSpPr>
+      <p:sp>
+        <p:nvSpPr>
+          <p:cNvPr id="2" name="Espaço Reservado para Imagem de Slide 1">
+            <a:extLst>
+              <a:ext uri="{FF2B5EF4-FFF2-40B4-BE49-F238E27FC236}">
+                <a16:creationId xmlns:a16="http://schemas.microsoft.com/office/drawing/2014/main" id="{6B9343CE-6DBE-D912-4E15-15583EEAAF2D}"/>
+              </a:ext>
+            </a:extLst>
+          </p:cNvPr>
+          <p:cNvSpPr>
+            <a:spLocks noGrp="1" noRot="1" noChangeAspect="1"/>
+          </p:cNvSpPr>
+          <p:nvPr>
+            <p:ph type="sldImg"/>
+          </p:nvPr>
+        </p:nvSpPr>
+        <p:spPr/>
+      </p:sp>
+      <p:sp>
+        <p:nvSpPr>
+          <p:cNvPr id="3" name="Espaço Reservado para Anotações 2">
+            <a:extLst>
+              <a:ext uri="{FF2B5EF4-FFF2-40B4-BE49-F238E27FC236}">
+                <a16:creationId xmlns:a16="http://schemas.microsoft.com/office/drawing/2014/main" id="{5DDD4AA0-3B61-D158-399C-06F757EF84C9}"/>
+              </a:ext>
+            </a:extLst>
+          </p:cNvPr>
+          <p:cNvSpPr>
+            <a:spLocks noGrp="1"/>
+          </p:cNvSpPr>
+          <p:nvPr>
+            <p:ph type="body" idx="1"/>
+          </p:nvPr>
+        </p:nvSpPr>
+        <p:spPr/>
+        <p:txBody>
+          <a:bodyPr/>
+          <a:lstStyle/>
+          <a:p>
+            <a:r>
+              <a:rPr lang="pt-BR" sz="1200" b="1" kern="1200" dirty="0">
+                <a:solidFill>
+                  <a:schemeClr val="tx1"/>
+                </a:solidFill>
+                <a:effectLst/>
+                <a:latin typeface="+mn-lt"/>
+                <a:ea typeface="+mn-ea"/>
+                <a:cs typeface="+mn-cs"/>
+              </a:rPr>
+              <a:t>Sistemas Embarcados</a:t>
+            </a:r>
+            <a:r>
+              <a:rPr lang="pt-BR" sz="1200" b="0" kern="1200" dirty="0">
+                <a:solidFill>
+                  <a:schemeClr val="tx1"/>
+                </a:solidFill>
+                <a:effectLst/>
+                <a:latin typeface="+mn-lt"/>
+                <a:ea typeface="+mn-ea"/>
+                <a:cs typeface="+mn-cs"/>
+              </a:rPr>
+              <a:t>: Controle direto de microcontroladores em eletrodomésticos e automóveis.</a:t>
+            </a:r>
+          </a:p>
+          <a:p>
+            <a:r>
+              <a:rPr lang="pt-BR" sz="1200" b="1" kern="1200" dirty="0">
+                <a:solidFill>
+                  <a:schemeClr val="tx1"/>
+                </a:solidFill>
+                <a:effectLst/>
+                <a:latin typeface="+mn-lt"/>
+                <a:ea typeface="+mn-ea"/>
+                <a:cs typeface="+mn-cs"/>
+              </a:rPr>
+              <a:t>Desempenho Crítico</a:t>
+            </a:r>
+            <a:r>
+              <a:rPr lang="pt-BR" sz="1200" b="0" kern="1200" dirty="0">
+                <a:solidFill>
+                  <a:schemeClr val="tx1"/>
+                </a:solidFill>
+                <a:effectLst/>
+                <a:latin typeface="+mn-lt"/>
+                <a:ea typeface="+mn-ea"/>
+                <a:cs typeface="+mn-cs"/>
+              </a:rPr>
+              <a:t>: Otimização extrema de partes de código em sistemas operacionais ou drivers de dispositivos.</a:t>
+            </a:r>
+          </a:p>
+          <a:p>
+            <a:r>
+              <a:rPr lang="pt-BR" sz="1200" b="1" kern="1200" dirty="0">
+                <a:solidFill>
+                  <a:schemeClr val="tx1"/>
+                </a:solidFill>
+                <a:effectLst/>
+                <a:latin typeface="+mn-lt"/>
+                <a:ea typeface="+mn-ea"/>
+                <a:cs typeface="+mn-cs"/>
+              </a:rPr>
+              <a:t>Estudo de Hardware</a:t>
+            </a:r>
+            <a:r>
+              <a:rPr lang="pt-BR" sz="1200" b="0" kern="1200" dirty="0">
+                <a:solidFill>
+                  <a:schemeClr val="tx1"/>
+                </a:solidFill>
+                <a:effectLst/>
+                <a:latin typeface="+mn-lt"/>
+                <a:ea typeface="+mn-ea"/>
+                <a:cs typeface="+mn-cs"/>
+              </a:rPr>
+              <a:t>: Ajuda a compreender profundamente como a CPU executa instruções e gerencia a memória.</a:t>
+            </a:r>
+          </a:p>
+          <a:p>
+            <a:endParaRPr lang="pt-BR" dirty="0"/>
+          </a:p>
+        </p:txBody>
+      </p:sp>
+      <p:sp>
+        <p:nvSpPr>
+          <p:cNvPr id="4" name="Espaço Reservado para Número de Slide 3">
+            <a:extLst>
+              <a:ext uri="{FF2B5EF4-FFF2-40B4-BE49-F238E27FC236}">
+                <a16:creationId xmlns:a16="http://schemas.microsoft.com/office/drawing/2014/main" id="{CFF05C5D-FB7F-167A-C57D-BFD232655AEB}"/>
+              </a:ext>
+            </a:extLst>
+          </p:cNvPr>
+          <p:cNvSpPr>
+            <a:spLocks noGrp="1"/>
+          </p:cNvSpPr>
+          <p:nvPr>
+            <p:ph type="sldNum" sz="quarter" idx="5"/>
+          </p:nvPr>
+        </p:nvSpPr>
+        <p:spPr/>
+        <p:txBody>
+          <a:bodyPr/>
+          <a:lstStyle/>
+          <a:p>
+            <a:fld id="{80F36A49-A1DD-40F8-B8AD-E6F5365256CB}" type="slidenum">
+              <a:rPr lang="pt-BR" smtClean="0"/>
+              <a:t>6</a:t>
+            </a:fld>
+            <a:endParaRPr lang="pt-BR"/>
+          </a:p>
+        </p:txBody>
+      </p:sp>
+    </p:spTree>
+    <p:extLst>
+      <p:ext uri="{BB962C8B-B14F-4D97-AF65-F5344CB8AC3E}">
+        <p14:creationId xmlns:p14="http://schemas.microsoft.com/office/powerpoint/2010/main" val="1390350425"/>
+      </p:ext>
+    </p:extLst>
+  </p:cSld>
+  <p:clrMapOvr>
+    <a:masterClrMapping/>
+  </p:clrMapOvr>
+</p:notes>
+</file>
+
+<file path=ppt/notesSlides/notesSlide7.xml><?xml version="1.0" encoding="utf-8"?>
+<p:notes xmlns:a="http://schemas.openxmlformats.org/drawingml/2006/main" xmlns:r="http://schemas.openxmlformats.org/officeDocument/2006/relationships" xmlns:p="http://schemas.openxmlformats.org/presentationml/2006/main">
+  <p:cSld>
+    <p:spTree>
+      <p:nvGrpSpPr>
+        <p:cNvPr id="1" name="">
+          <a:extLst>
+            <a:ext uri="{FF2B5EF4-FFF2-40B4-BE49-F238E27FC236}">
+              <a16:creationId xmlns:a16="http://schemas.microsoft.com/office/drawing/2014/main" id="{76E2B2D9-6146-7106-DBA4-40073748A3C8}"/>
+            </a:ext>
+          </a:extLst>
+        </p:cNvPr>
+        <p:cNvGrpSpPr/>
+        <p:nvPr/>
+      </p:nvGrpSpPr>
+      <p:grpSpPr>
+        <a:xfrm>
+          <a:off x="0" y="0"/>
+          <a:ext cx="0" cy="0"/>
+          <a:chOff x="0" y="0"/>
+          <a:chExt cx="0" cy="0"/>
+        </a:xfrm>
+      </p:grpSpPr>
+      <p:sp>
+        <p:nvSpPr>
+          <p:cNvPr id="2" name="Espaço Reservado para Imagem de Slide 1">
+            <a:extLst>
+              <a:ext uri="{FF2B5EF4-FFF2-40B4-BE49-F238E27FC236}">
+                <a16:creationId xmlns:a16="http://schemas.microsoft.com/office/drawing/2014/main" id="{144BB465-009B-BDC8-D694-CAA715C172B6}"/>
+              </a:ext>
+            </a:extLst>
+          </p:cNvPr>
+          <p:cNvSpPr>
+            <a:spLocks noGrp="1" noRot="1" noChangeAspect="1"/>
+          </p:cNvSpPr>
+          <p:nvPr>
+            <p:ph type="sldImg"/>
+          </p:nvPr>
+        </p:nvSpPr>
+        <p:spPr/>
+      </p:sp>
+      <p:sp>
+        <p:nvSpPr>
+          <p:cNvPr id="3" name="Espaço Reservado para Anotações 2">
+            <a:extLst>
+              <a:ext uri="{FF2B5EF4-FFF2-40B4-BE49-F238E27FC236}">
+                <a16:creationId xmlns:a16="http://schemas.microsoft.com/office/drawing/2014/main" id="{05D45F14-6F12-7068-0C5F-A405B1E25FF3}"/>
+              </a:ext>
+            </a:extLst>
+          </p:cNvPr>
+          <p:cNvSpPr>
+            <a:spLocks noGrp="1"/>
+          </p:cNvSpPr>
+          <p:nvPr>
+            <p:ph type="body" idx="1"/>
+          </p:nvPr>
+        </p:nvSpPr>
+        <p:spPr/>
+        <p:txBody>
+          <a:bodyPr/>
+          <a:lstStyle/>
+          <a:p>
+            <a:r>
+              <a:rPr lang="pt-BR" dirty="0" err="1"/>
+              <a:t>Speedcoding</a:t>
+            </a:r>
+            <a:r>
+              <a:rPr lang="pt-BR" dirty="0"/>
+              <a:t> ou </a:t>
+            </a:r>
+            <a:r>
+              <a:rPr lang="pt-BR" dirty="0" err="1"/>
+              <a:t>Speedcode</a:t>
+            </a:r>
+            <a:r>
+              <a:rPr lang="pt-BR" dirty="0"/>
+              <a:t> foi a primeira linguagens de programação de alto nível criada para um computador IBM. </a:t>
+            </a:r>
+          </a:p>
+          <a:p>
+            <a:r>
+              <a:rPr lang="pt-BR" dirty="0"/>
+              <a:t>A linguagem foi desenvolvida por John </a:t>
+            </a:r>
+            <a:r>
+              <a:rPr lang="pt-BR" dirty="0" err="1"/>
+              <a:t>Backus</a:t>
+            </a:r>
+            <a:r>
+              <a:rPr lang="pt-BR" dirty="0"/>
+              <a:t> em 1953 para o IBM 701. </a:t>
+            </a:r>
+          </a:p>
+          <a:p>
+            <a:r>
+              <a:rPr lang="pt-BR" dirty="0"/>
+              <a:t>A ideia surgiu da dificuldade de programação da máquina IBM SSEC, quando </a:t>
+            </a:r>
+            <a:r>
+              <a:rPr lang="pt-BR" dirty="0" err="1"/>
+              <a:t>Backus</a:t>
+            </a:r>
+            <a:r>
+              <a:rPr lang="pt-BR" dirty="0"/>
+              <a:t> foi contratado para calcular posições astronômicas no início dos anos 1950.</a:t>
+            </a:r>
+          </a:p>
+          <a:p>
+            <a:r>
+              <a:rPr lang="pt-BR" dirty="0"/>
+              <a:t>Em sequência, veio o Fortran em 1957 </a:t>
+            </a:r>
+            <a:r>
+              <a:rPr lang="pt-BR" sz="1200" b="0" i="0" kern="1200" dirty="0">
+                <a:solidFill>
+                  <a:schemeClr val="tx1"/>
+                </a:solidFill>
+                <a:effectLst/>
+                <a:latin typeface="+mn-lt"/>
+                <a:ea typeface="+mn-ea"/>
+                <a:cs typeface="+mn-cs"/>
+              </a:rPr>
+              <a:t>uma linguagem de programação voltada para computação científica e técnica, especialmente projetada para executar cálculos complexos com eficiência numa ampla variedade de </a:t>
+            </a:r>
+            <a:r>
+              <a:rPr lang="pt-BR" sz="1200" b="0" i="0" u="none" strike="noStrike" kern="1200" dirty="0">
+                <a:solidFill>
+                  <a:schemeClr val="tx1"/>
+                </a:solidFill>
+                <a:effectLst/>
+                <a:latin typeface="+mn-lt"/>
+                <a:ea typeface="+mn-ea"/>
+                <a:cs typeface="+mn-cs"/>
+              </a:rPr>
+              <a:t>processadores.</a:t>
+            </a:r>
+            <a:endParaRPr lang="pt-BR" dirty="0"/>
+          </a:p>
+        </p:txBody>
+      </p:sp>
+      <p:sp>
+        <p:nvSpPr>
+          <p:cNvPr id="4" name="Espaço Reservado para Número de Slide 3">
+            <a:extLst>
+              <a:ext uri="{FF2B5EF4-FFF2-40B4-BE49-F238E27FC236}">
+                <a16:creationId xmlns:a16="http://schemas.microsoft.com/office/drawing/2014/main" id="{F99CAB7A-E1AF-74E8-7503-53AE44956C1A}"/>
+              </a:ext>
+            </a:extLst>
+          </p:cNvPr>
+          <p:cNvSpPr>
+            <a:spLocks noGrp="1"/>
+          </p:cNvSpPr>
+          <p:nvPr>
+            <p:ph type="sldNum" sz="quarter" idx="5"/>
+          </p:nvPr>
+        </p:nvSpPr>
+        <p:spPr/>
+        <p:txBody>
+          <a:bodyPr/>
+          <a:lstStyle/>
+          <a:p>
+            <a:fld id="{80F36A49-A1DD-40F8-B8AD-E6F5365256CB}" type="slidenum">
+              <a:rPr lang="pt-BR" smtClean="0"/>
+              <a:t>7</a:t>
+            </a:fld>
+            <a:endParaRPr lang="pt-BR"/>
+          </a:p>
+        </p:txBody>
+      </p:sp>
+    </p:spTree>
+    <p:extLst>
+      <p:ext uri="{BB962C8B-B14F-4D97-AF65-F5344CB8AC3E}">
+        <p14:creationId xmlns:p14="http://schemas.microsoft.com/office/powerpoint/2010/main" val="3368363588"/>
+      </p:ext>
+    </p:extLst>
+  </p:cSld>
+  <p:clrMapOvr>
+    <a:masterClrMapping/>
+  </p:clrMapOvr>
+</p:notes>
+</file>
+
+<file path=ppt/notesSlides/notesSlide8.xml><?xml version="1.0" encoding="utf-8"?>
+<p:notes xmlns:a="http://schemas.openxmlformats.org/drawingml/2006/main" xmlns:r="http://schemas.openxmlformats.org/officeDocument/2006/relationships" xmlns:p="http://schemas.openxmlformats.org/presentationml/2006/main">
+  <p:cSld>
+    <p:spTree>
+      <p:nvGrpSpPr>
+        <p:cNvPr id="1" name="">
+          <a:extLst>
+            <a:ext uri="{FF2B5EF4-FFF2-40B4-BE49-F238E27FC236}">
+              <a16:creationId xmlns:a16="http://schemas.microsoft.com/office/drawing/2014/main" id="{B28CE740-9816-ADD0-2F6E-6B0C1CCB2384}"/>
+            </a:ext>
+          </a:extLst>
+        </p:cNvPr>
+        <p:cNvGrpSpPr/>
+        <p:nvPr/>
+      </p:nvGrpSpPr>
+      <p:grpSpPr>
+        <a:xfrm>
+          <a:off x="0" y="0"/>
+          <a:ext cx="0" cy="0"/>
+          <a:chOff x="0" y="0"/>
+          <a:chExt cx="0" cy="0"/>
+        </a:xfrm>
+      </p:grpSpPr>
+      <p:sp>
+        <p:nvSpPr>
+          <p:cNvPr id="2" name="Espaço Reservado para Imagem de Slide 1">
+            <a:extLst>
+              <a:ext uri="{FF2B5EF4-FFF2-40B4-BE49-F238E27FC236}">
+                <a16:creationId xmlns:a16="http://schemas.microsoft.com/office/drawing/2014/main" id="{0AEC6E79-8DEE-9C98-C309-452A8B193C1A}"/>
+              </a:ext>
+            </a:extLst>
+          </p:cNvPr>
+          <p:cNvSpPr>
+            <a:spLocks noGrp="1" noRot="1" noChangeAspect="1"/>
+          </p:cNvSpPr>
+          <p:nvPr>
+            <p:ph type="sldImg"/>
+          </p:nvPr>
+        </p:nvSpPr>
+        <p:spPr/>
+      </p:sp>
+      <p:sp>
+        <p:nvSpPr>
+          <p:cNvPr id="3" name="Espaço Reservado para Anotações 2">
+            <a:extLst>
+              <a:ext uri="{FF2B5EF4-FFF2-40B4-BE49-F238E27FC236}">
+                <a16:creationId xmlns:a16="http://schemas.microsoft.com/office/drawing/2014/main" id="{6817813F-4315-97F3-57D4-0F5D6E82071E}"/>
+              </a:ext>
+            </a:extLst>
+          </p:cNvPr>
+          <p:cNvSpPr>
+            <a:spLocks noGrp="1"/>
+          </p:cNvSpPr>
+          <p:nvPr>
+            <p:ph type="body" idx="1"/>
+          </p:nvPr>
+        </p:nvSpPr>
+        <p:spPr/>
+        <p:txBody>
+          <a:bodyPr/>
+          <a:lstStyle/>
+          <a:p>
+            <a:r>
+              <a:rPr lang="pt-BR" sz="1200" b="0" kern="1200" dirty="0">
+                <a:solidFill>
+                  <a:schemeClr val="tx1"/>
+                </a:solidFill>
+                <a:effectLst/>
+                <a:latin typeface="+mn-lt"/>
+                <a:ea typeface="+mn-ea"/>
+                <a:cs typeface="+mn-cs"/>
+              </a:rPr>
+              <a:t>Um compilador lê o código-fonte inteiro de uma só vez. </a:t>
+            </a:r>
+          </a:p>
+          <a:p>
+            <a:r>
+              <a:rPr lang="pt-BR" sz="1200" b="0" kern="1200" dirty="0">
+                <a:solidFill>
+                  <a:schemeClr val="tx1"/>
+                </a:solidFill>
+                <a:effectLst/>
+                <a:latin typeface="+mn-lt"/>
+                <a:ea typeface="+mn-ea"/>
+                <a:cs typeface="+mn-cs"/>
+              </a:rPr>
+              <a:t>Ele procura por erros de sintaxe na estrutura geral do programa e, se estiver tudo correto, </a:t>
+            </a:r>
+          </a:p>
+          <a:p>
+            <a:r>
+              <a:rPr lang="pt-BR" sz="1200" b="0" kern="1200" dirty="0">
+                <a:solidFill>
+                  <a:schemeClr val="tx1"/>
+                </a:solidFill>
+                <a:effectLst/>
+                <a:latin typeface="+mn-lt"/>
+                <a:ea typeface="+mn-ea"/>
+                <a:cs typeface="+mn-cs"/>
+              </a:rPr>
+              <a:t>traduz o código inteiro para uma linguagem de baixo nível ou linguagem de máquina, criando um arquivo binário autônomo</a:t>
+            </a:r>
+          </a:p>
+          <a:p>
+            <a:endParaRPr lang="pt-BR" sz="1200" b="1" kern="1200" dirty="0">
+              <a:solidFill>
+                <a:schemeClr val="tx1"/>
+              </a:solidFill>
+              <a:effectLst/>
+              <a:latin typeface="+mn-lt"/>
+              <a:ea typeface="+mn-ea"/>
+              <a:cs typeface="+mn-cs"/>
+            </a:endParaRPr>
+          </a:p>
+          <a:p>
+            <a:r>
+              <a:rPr lang="pt-BR" sz="1200" b="1" kern="1200" dirty="0">
+                <a:solidFill>
+                  <a:schemeClr val="tx1"/>
+                </a:solidFill>
+                <a:effectLst/>
+                <a:latin typeface="+mn-lt"/>
+                <a:ea typeface="+mn-ea"/>
+                <a:cs typeface="+mn-cs"/>
+              </a:rPr>
+              <a:t>Vantagens:</a:t>
+            </a:r>
+            <a:r>
+              <a:rPr lang="pt-BR" sz="1200" b="0" kern="1200" dirty="0">
+                <a:solidFill>
+                  <a:schemeClr val="tx1"/>
+                </a:solidFill>
+                <a:effectLst/>
+                <a:latin typeface="+mn-lt"/>
+                <a:ea typeface="+mn-ea"/>
+                <a:cs typeface="+mn-cs"/>
+              </a:rPr>
+              <a:t> </a:t>
+            </a:r>
+          </a:p>
+          <a:p>
+            <a:pPr marL="171450" indent="-171450">
+              <a:buFont typeface="Arial" panose="020B0604020202020204" pitchFamily="34" charset="0"/>
+              <a:buChar char="•"/>
+            </a:pPr>
+            <a:r>
+              <a:rPr lang="pt-BR" sz="1200" b="0" kern="1200" dirty="0">
+                <a:solidFill>
+                  <a:schemeClr val="tx1"/>
+                </a:solidFill>
+                <a:effectLst/>
+                <a:latin typeface="+mn-lt"/>
+                <a:ea typeface="+mn-ea"/>
+                <a:cs typeface="+mn-cs"/>
+              </a:rPr>
+              <a:t>O código já foi traduzido previamente, o que torna a execução muito mais rápida e otimizada. </a:t>
+            </a:r>
+          </a:p>
+          <a:p>
+            <a:pPr marL="171450" indent="-171450">
+              <a:buFont typeface="Arial" panose="020B0604020202020204" pitchFamily="34" charset="0"/>
+              <a:buChar char="•"/>
+            </a:pPr>
+            <a:r>
+              <a:rPr lang="pt-BR" sz="1200" b="0" kern="1200" dirty="0">
+                <a:solidFill>
+                  <a:schemeClr val="tx1"/>
+                </a:solidFill>
+                <a:effectLst/>
+                <a:latin typeface="+mn-lt"/>
+                <a:ea typeface="+mn-ea"/>
+                <a:cs typeface="+mn-cs"/>
+              </a:rPr>
+              <a:t>O programa compilado pode ser distribuído e executado sem a necessidade do compilador original ou do código-fonte. </a:t>
+            </a:r>
+          </a:p>
+          <a:p>
+            <a:pPr marL="171450" indent="-171450">
+              <a:buFont typeface="Arial" panose="020B0604020202020204" pitchFamily="34" charset="0"/>
+              <a:buChar char="•"/>
+            </a:pPr>
+            <a:r>
+              <a:rPr lang="pt-BR" sz="1200" b="1" kern="1200" dirty="0">
+                <a:solidFill>
+                  <a:schemeClr val="tx1"/>
+                </a:solidFill>
+                <a:effectLst/>
+                <a:latin typeface="+mn-lt"/>
+                <a:ea typeface="+mn-ea"/>
+                <a:cs typeface="+mn-cs"/>
+              </a:rPr>
+              <a:t>alta Performance:</a:t>
+            </a:r>
+            <a:r>
+              <a:rPr lang="pt-BR" sz="1200" b="0" kern="1200" dirty="0">
+                <a:solidFill>
+                  <a:schemeClr val="tx1"/>
+                </a:solidFill>
+                <a:effectLst/>
+                <a:latin typeface="+mn-lt"/>
+                <a:ea typeface="+mn-ea"/>
+                <a:cs typeface="+mn-cs"/>
+              </a:rPr>
+              <a:t> Como o código já está traduzido e otimizado para o hardware antes da execução, os programas rodam muito mais rápido. </a:t>
+            </a:r>
+          </a:p>
+          <a:p>
+            <a:pPr marL="171450" indent="-171450">
+              <a:buFont typeface="Arial" panose="020B0604020202020204" pitchFamily="34" charset="0"/>
+              <a:buChar char="•"/>
+            </a:pPr>
+            <a:r>
+              <a:rPr lang="pt-BR" sz="1200" b="1" kern="1200" dirty="0">
+                <a:solidFill>
+                  <a:schemeClr val="tx1"/>
+                </a:solidFill>
+                <a:effectLst/>
+                <a:latin typeface="+mn-lt"/>
+                <a:ea typeface="+mn-ea"/>
+                <a:cs typeface="+mn-cs"/>
+              </a:rPr>
+              <a:t>Detecção de Erros:</a:t>
+            </a:r>
+            <a:r>
+              <a:rPr lang="pt-BR" sz="1200" b="0" kern="1200" dirty="0">
+                <a:solidFill>
+                  <a:schemeClr val="tx1"/>
+                </a:solidFill>
+                <a:effectLst/>
+                <a:latin typeface="+mn-lt"/>
+                <a:ea typeface="+mn-ea"/>
+                <a:cs typeface="+mn-cs"/>
+              </a:rPr>
+              <a:t> O compilador checa todo o código em busca de erros de sintaxe e estrutura antes de gerar o arquivo final, impedindo que o programa seja criado caso haja falhas críticas. </a:t>
+            </a:r>
+          </a:p>
+          <a:p>
+            <a:pPr marL="171450" indent="-171450">
+              <a:buFont typeface="Arial" panose="020B0604020202020204" pitchFamily="34" charset="0"/>
+              <a:buChar char="•"/>
+            </a:pPr>
+            <a:r>
+              <a:rPr lang="pt-BR" sz="1200" b="1" kern="1200" dirty="0">
+                <a:solidFill>
+                  <a:schemeClr val="tx1"/>
+                </a:solidFill>
+                <a:effectLst/>
+                <a:latin typeface="+mn-lt"/>
+                <a:ea typeface="+mn-ea"/>
+                <a:cs typeface="+mn-cs"/>
+              </a:rPr>
+              <a:t>Menor Portabilidade:</a:t>
+            </a:r>
+            <a:r>
+              <a:rPr lang="pt-BR" sz="1200" b="0" kern="1200" dirty="0">
+                <a:solidFill>
+                  <a:schemeClr val="tx1"/>
+                </a:solidFill>
+                <a:effectLst/>
+                <a:latin typeface="+mn-lt"/>
+                <a:ea typeface="+mn-ea"/>
+                <a:cs typeface="+mn-cs"/>
+              </a:rPr>
+              <a:t> Um arquivo compilado costuma ser específico para um sistema operacional ou arquitetura de processador (um executável do Windows não roda nativamente no Linux, por exemplo). </a:t>
+            </a:r>
+          </a:p>
+          <a:p>
+            <a:endParaRPr lang="pt-BR" sz="1200" b="1" kern="1200" dirty="0">
+              <a:solidFill>
+                <a:schemeClr val="tx1"/>
+              </a:solidFill>
+              <a:effectLst/>
+              <a:latin typeface="+mn-lt"/>
+              <a:ea typeface="+mn-ea"/>
+              <a:cs typeface="+mn-cs"/>
+            </a:endParaRPr>
+          </a:p>
+          <a:p>
+            <a:r>
+              <a:rPr lang="pt-BR" sz="1200" b="1" kern="1200" dirty="0">
+                <a:solidFill>
+                  <a:schemeClr val="tx1"/>
+                </a:solidFill>
+                <a:effectLst/>
+                <a:latin typeface="+mn-lt"/>
+                <a:ea typeface="+mn-ea"/>
+                <a:cs typeface="+mn-cs"/>
+              </a:rPr>
+              <a:t>Desvantagens:</a:t>
+            </a:r>
+            <a:r>
+              <a:rPr lang="pt-BR" sz="1200" b="0" kern="1200" dirty="0">
+                <a:solidFill>
+                  <a:schemeClr val="tx1"/>
+                </a:solidFill>
+                <a:effectLst/>
+                <a:latin typeface="+mn-lt"/>
+                <a:ea typeface="+mn-ea"/>
+                <a:cs typeface="+mn-cs"/>
+              </a:rPr>
+              <a:t> </a:t>
+            </a:r>
+          </a:p>
+          <a:p>
+            <a:pPr marL="171450" indent="-171450">
+              <a:buFont typeface="Arial" panose="020B0604020202020204" pitchFamily="34" charset="0"/>
+              <a:buChar char="•"/>
+            </a:pPr>
+            <a:r>
+              <a:rPr lang="pt-BR" sz="1200" b="0" kern="1200" dirty="0">
+                <a:solidFill>
+                  <a:schemeClr val="tx1"/>
+                </a:solidFill>
+                <a:effectLst/>
+                <a:latin typeface="+mn-lt"/>
+                <a:ea typeface="+mn-ea"/>
+                <a:cs typeface="+mn-cs"/>
+              </a:rPr>
+              <a:t>O processo de compilação pode demorar, e caso o código precise ser alterado, o programa inteiro (ou parte dele) precisa ser compilado novamente. </a:t>
+            </a:r>
+          </a:p>
+          <a:p>
+            <a:pPr marL="171450" indent="-171450">
+              <a:buFont typeface="Arial" panose="020B0604020202020204" pitchFamily="34" charset="0"/>
+              <a:buChar char="•"/>
+            </a:pPr>
+            <a:r>
+              <a:rPr lang="pt-BR" sz="1200" b="0" kern="1200" dirty="0">
+                <a:solidFill>
+                  <a:schemeClr val="tx1"/>
+                </a:solidFill>
+                <a:effectLst/>
+                <a:latin typeface="+mn-lt"/>
+                <a:ea typeface="+mn-ea"/>
+                <a:cs typeface="+mn-cs"/>
+              </a:rPr>
+              <a:t>O arquivo binário gerado depende da arquitetura do sistema operacional (um executável de Windows não roda nativamente no Mac).</a:t>
+            </a:r>
+          </a:p>
+          <a:p>
+            <a:endParaRPr lang="pt-BR" dirty="0"/>
+          </a:p>
+        </p:txBody>
+      </p:sp>
+      <p:sp>
+        <p:nvSpPr>
+          <p:cNvPr id="4" name="Espaço Reservado para Número de Slide 3">
+            <a:extLst>
+              <a:ext uri="{FF2B5EF4-FFF2-40B4-BE49-F238E27FC236}">
+                <a16:creationId xmlns:a16="http://schemas.microsoft.com/office/drawing/2014/main" id="{CFF3F0FB-B732-D6AC-D3CC-5BE62E14877F}"/>
+              </a:ext>
+            </a:extLst>
+          </p:cNvPr>
+          <p:cNvSpPr>
+            <a:spLocks noGrp="1"/>
+          </p:cNvSpPr>
+          <p:nvPr>
+            <p:ph type="sldNum" sz="quarter" idx="5"/>
+          </p:nvPr>
+        </p:nvSpPr>
+        <p:spPr/>
+        <p:txBody>
+          <a:bodyPr/>
+          <a:lstStyle/>
+          <a:p>
+            <a:fld id="{80F36A49-A1DD-40F8-B8AD-E6F5365256CB}" type="slidenum">
+              <a:rPr lang="pt-BR" smtClean="0"/>
+              <a:t>8</a:t>
+            </a:fld>
+            <a:endParaRPr lang="pt-BR"/>
+          </a:p>
+        </p:txBody>
+      </p:sp>
+    </p:spTree>
+    <p:extLst>
+      <p:ext uri="{BB962C8B-B14F-4D97-AF65-F5344CB8AC3E}">
+        <p14:creationId xmlns:p14="http://schemas.microsoft.com/office/powerpoint/2010/main" val="809513175"/>
+      </p:ext>
+    </p:extLst>
+  </p:cSld>
+  <p:clrMapOvr>
+    <a:masterClrMapping/>
+  </p:clrMapOvr>
+</p:notes>
+</file>
+
+<file path=ppt/notesSlides/notesSlide9.xml><?xml version="1.0" encoding="utf-8"?>
+<p:notes xmlns:a="http://schemas.openxmlformats.org/drawingml/2006/main" xmlns:r="http://schemas.openxmlformats.org/officeDocument/2006/relationships" xmlns:p="http://schemas.openxmlformats.org/presentationml/2006/main">
+  <p:cSld>
+    <p:spTree>
+      <p:nvGrpSpPr>
+        <p:cNvPr id="1" name="">
+          <a:extLst>
+            <a:ext uri="{FF2B5EF4-FFF2-40B4-BE49-F238E27FC236}">
+              <a16:creationId xmlns:a16="http://schemas.microsoft.com/office/drawing/2014/main" id="{B28F065B-D111-684E-D90B-0BBB70ABAEAE}"/>
+            </a:ext>
+          </a:extLst>
+        </p:cNvPr>
+        <p:cNvGrpSpPr/>
+        <p:nvPr/>
+      </p:nvGrpSpPr>
+      <p:grpSpPr>
+        <a:xfrm>
+          <a:off x="0" y="0"/>
+          <a:ext cx="0" cy="0"/>
+          <a:chOff x="0" y="0"/>
+          <a:chExt cx="0" cy="0"/>
+        </a:xfrm>
+      </p:grpSpPr>
+      <p:sp>
+        <p:nvSpPr>
+          <p:cNvPr id="2" name="Espaço Reservado para Imagem de Slide 1">
+            <a:extLst>
+              <a:ext uri="{FF2B5EF4-FFF2-40B4-BE49-F238E27FC236}">
+                <a16:creationId xmlns:a16="http://schemas.microsoft.com/office/drawing/2014/main" id="{D70CCC18-33EB-50D6-AA19-32A3AD9881CD}"/>
+              </a:ext>
+            </a:extLst>
+          </p:cNvPr>
+          <p:cNvSpPr>
+            <a:spLocks noGrp="1" noRot="1" noChangeAspect="1"/>
+          </p:cNvSpPr>
+          <p:nvPr>
+            <p:ph type="sldImg"/>
+          </p:nvPr>
+        </p:nvSpPr>
+        <p:spPr/>
+      </p:sp>
+      <p:sp>
+        <p:nvSpPr>
+          <p:cNvPr id="3" name="Espaço Reservado para Anotações 2">
+            <a:extLst>
+              <a:ext uri="{FF2B5EF4-FFF2-40B4-BE49-F238E27FC236}">
+                <a16:creationId xmlns:a16="http://schemas.microsoft.com/office/drawing/2014/main" id="{B5B5E38F-3B61-3341-584A-BF17E3BE3A47}"/>
+              </a:ext>
+            </a:extLst>
+          </p:cNvPr>
+          <p:cNvSpPr>
+            <a:spLocks noGrp="1"/>
+          </p:cNvSpPr>
+          <p:nvPr>
+            <p:ph type="body" idx="1"/>
+          </p:nvPr>
+        </p:nvSpPr>
+        <p:spPr/>
+        <p:txBody>
+          <a:bodyPr/>
+          <a:lstStyle/>
+          <a:p>
+            <a:r>
+              <a:rPr lang="pt-BR" sz="1200" b="0" kern="1200" dirty="0">
+                <a:solidFill>
+                  <a:schemeClr val="tx1"/>
+                </a:solidFill>
+                <a:effectLst/>
+                <a:latin typeface="+mn-lt"/>
+                <a:ea typeface="+mn-ea"/>
+                <a:cs typeface="+mn-cs"/>
+              </a:rPr>
+              <a:t>A API de um sistema operacional </a:t>
+            </a:r>
+            <a:r>
+              <a:rPr lang="pt-BR" dirty="0"/>
+              <a:t>é um conjunto de regras e ferramentas que permite aos programas conversarem com o sistema. </a:t>
+            </a:r>
+          </a:p>
+          <a:p>
+            <a:r>
+              <a:rPr lang="pt-BR" dirty="0"/>
+              <a:t>Ela funciona como uma ponte ou um tradutor, facilitando o acesso a recursos essenciais como </a:t>
+            </a:r>
+            <a:r>
+              <a:rPr lang="pt-BR" sz="1200" b="1" kern="1200" dirty="0">
+                <a:solidFill>
+                  <a:schemeClr val="tx1"/>
+                </a:solidFill>
+                <a:effectLst/>
+                <a:latin typeface="+mn-lt"/>
+                <a:ea typeface="+mn-ea"/>
+                <a:cs typeface="+mn-cs"/>
+              </a:rPr>
+              <a:t>gerenciamento de arquivos</a:t>
+            </a:r>
+            <a:r>
+              <a:rPr lang="pt-BR" dirty="0"/>
+              <a:t>, </a:t>
+            </a:r>
+            <a:r>
+              <a:rPr lang="pt-BR" sz="1200" b="1" kern="1200" dirty="0">
+                <a:solidFill>
+                  <a:schemeClr val="tx1"/>
+                </a:solidFill>
+                <a:effectLst/>
+                <a:latin typeface="+mn-lt"/>
+                <a:ea typeface="+mn-ea"/>
+                <a:cs typeface="+mn-cs"/>
+              </a:rPr>
+              <a:t>uso de memória</a:t>
+            </a:r>
+            <a:r>
+              <a:rPr lang="pt-BR" dirty="0"/>
+              <a:t> e </a:t>
+            </a:r>
+            <a:r>
+              <a:rPr lang="pt-BR" sz="1200" b="1" kern="1200" dirty="0">
+                <a:solidFill>
+                  <a:schemeClr val="tx1"/>
+                </a:solidFill>
+                <a:effectLst/>
+                <a:latin typeface="+mn-lt"/>
+                <a:ea typeface="+mn-ea"/>
+                <a:cs typeface="+mn-cs"/>
+              </a:rPr>
+              <a:t>controle de hardware.</a:t>
+            </a:r>
+          </a:p>
+          <a:p>
+            <a:endParaRPr lang="pt-BR" sz="1200" b="1" kern="1200" dirty="0">
+              <a:solidFill>
+                <a:schemeClr val="tx1"/>
+              </a:solidFill>
+              <a:effectLst/>
+              <a:latin typeface="+mn-lt"/>
+              <a:ea typeface="+mn-ea"/>
+              <a:cs typeface="+mn-cs"/>
+            </a:endParaRPr>
+          </a:p>
+          <a:p>
+            <a:r>
+              <a:rPr lang="pt-BR" dirty="0"/>
+              <a:t>Algumas linguagens modernas combinam os dois métodos.  No Java, o código é primeiro compilado para uma linguagem intermediária chamada </a:t>
+            </a:r>
+          </a:p>
+          <a:p>
+            <a:r>
+              <a:rPr lang="pt-BR" sz="1200" b="0" i="1" kern="1200" dirty="0" err="1">
+                <a:solidFill>
+                  <a:schemeClr val="tx1"/>
+                </a:solidFill>
+                <a:effectLst/>
+                <a:latin typeface="+mn-lt"/>
+                <a:ea typeface="+mn-ea"/>
+                <a:cs typeface="+mn-cs"/>
+              </a:rPr>
+              <a:t>bytecode</a:t>
+            </a:r>
+            <a:r>
+              <a:rPr lang="pt-BR" dirty="0"/>
+              <a:t> (que não é o código de máquina final).  Durante a execução do programa, um interpretador do sistema (JVM) </a:t>
+            </a:r>
+          </a:p>
+          <a:p>
+            <a:r>
+              <a:rPr lang="pt-BR" dirty="0"/>
+              <a:t>lê esse </a:t>
+            </a:r>
+            <a:r>
+              <a:rPr lang="pt-BR" sz="1200" b="0" i="1" kern="1200" dirty="0" err="1">
+                <a:solidFill>
+                  <a:schemeClr val="tx1"/>
+                </a:solidFill>
+                <a:effectLst/>
+                <a:latin typeface="+mn-lt"/>
+                <a:ea typeface="+mn-ea"/>
+                <a:cs typeface="+mn-cs"/>
+              </a:rPr>
+              <a:t>bytecode</a:t>
+            </a:r>
+            <a:r>
+              <a:rPr lang="pt-BR" dirty="0"/>
+              <a:t> e usa um compilador </a:t>
+            </a:r>
+            <a:r>
+              <a:rPr lang="pt-BR" sz="1200" b="1" kern="1200" dirty="0">
+                <a:solidFill>
+                  <a:schemeClr val="tx1"/>
+                </a:solidFill>
+                <a:effectLst/>
+                <a:latin typeface="+mn-lt"/>
+                <a:ea typeface="+mn-ea"/>
+                <a:cs typeface="+mn-cs"/>
+              </a:rPr>
+              <a:t>JIT </a:t>
+            </a:r>
+            <a:r>
+              <a:rPr lang="pt-BR" sz="1200" b="0" i="1" kern="1200" dirty="0">
+                <a:solidFill>
+                  <a:schemeClr val="tx1"/>
+                </a:solidFill>
+                <a:effectLst/>
+                <a:latin typeface="+mn-lt"/>
+                <a:ea typeface="+mn-ea"/>
+                <a:cs typeface="+mn-cs"/>
+              </a:rPr>
+              <a:t>Just-In-Time</a:t>
+            </a:r>
+          </a:p>
+          <a:p>
+            <a:pPr rtl="0"/>
+            <a:endParaRPr lang="pt-BR" sz="1200" b="0" kern="1200" dirty="0">
+              <a:solidFill>
+                <a:schemeClr val="tx1"/>
+              </a:solidFill>
+              <a:effectLst/>
+              <a:latin typeface="+mn-lt"/>
+              <a:ea typeface="+mn-ea"/>
+              <a:cs typeface="+mn-cs"/>
+            </a:endParaRPr>
+          </a:p>
+          <a:p>
+            <a:pPr rtl="0"/>
+            <a:r>
+              <a:rPr lang="pt-BR" sz="1200" b="0" kern="1200" dirty="0">
+                <a:solidFill>
+                  <a:schemeClr val="tx1"/>
+                </a:solidFill>
+                <a:effectLst/>
+                <a:latin typeface="+mn-lt"/>
+                <a:ea typeface="+mn-ea"/>
+                <a:cs typeface="+mn-cs"/>
+              </a:rPr>
+              <a:t>Um compilador JIT (</a:t>
+            </a:r>
+            <a:r>
+              <a:rPr lang="pt-BR" sz="1200" b="0" i="1" kern="1200" dirty="0">
+                <a:solidFill>
+                  <a:schemeClr val="tx1"/>
+                </a:solidFill>
+                <a:effectLst/>
+                <a:latin typeface="+mn-lt"/>
+                <a:ea typeface="+mn-ea"/>
+                <a:cs typeface="+mn-cs"/>
+              </a:rPr>
+              <a:t>Just-In-Time</a:t>
+            </a:r>
+            <a:r>
+              <a:rPr lang="pt-BR" sz="1200" b="0" kern="1200" dirty="0">
+                <a:solidFill>
+                  <a:schemeClr val="tx1"/>
+                </a:solidFill>
+                <a:effectLst/>
+                <a:latin typeface="+mn-lt"/>
+                <a:ea typeface="+mn-ea"/>
+                <a:cs typeface="+mn-cs"/>
+              </a:rPr>
+              <a:t> ou "em tempo de execução") é uma tecnologia que traduz código de programa </a:t>
+            </a:r>
+          </a:p>
+          <a:p>
+            <a:pPr rtl="0"/>
+            <a:r>
+              <a:rPr lang="pt-BR" sz="1200" b="0" kern="1200" dirty="0">
+                <a:solidFill>
+                  <a:schemeClr val="tx1"/>
+                </a:solidFill>
+                <a:effectLst/>
+                <a:latin typeface="+mn-lt"/>
+                <a:ea typeface="+mn-ea"/>
+                <a:cs typeface="+mn-cs"/>
+              </a:rPr>
+              <a:t>(</a:t>
+            </a:r>
+            <a:r>
+              <a:rPr lang="pt-BR" sz="1200" b="0" i="1" kern="1200" dirty="0" err="1">
+                <a:solidFill>
+                  <a:schemeClr val="tx1"/>
+                </a:solidFill>
+                <a:effectLst/>
+                <a:latin typeface="+mn-lt"/>
+                <a:ea typeface="+mn-ea"/>
+                <a:cs typeface="+mn-cs"/>
+              </a:rPr>
+              <a:t>bytecode</a:t>
+            </a:r>
+            <a:r>
+              <a:rPr lang="pt-BR" sz="1200" b="0" kern="1200" dirty="0">
+                <a:solidFill>
+                  <a:schemeClr val="tx1"/>
+                </a:solidFill>
+                <a:effectLst/>
+                <a:latin typeface="+mn-lt"/>
+                <a:ea typeface="+mn-ea"/>
+                <a:cs typeface="+mn-cs"/>
+              </a:rPr>
+              <a:t> ou código intermediário) em instruções nativas de máquina diretamente durante a execução do software</a:t>
+            </a:r>
+          </a:p>
+          <a:p>
+            <a:pPr rtl="0"/>
+            <a:endParaRPr lang="pt-BR" sz="1200" b="0" kern="1200" dirty="0">
+              <a:solidFill>
+                <a:schemeClr val="tx1"/>
+              </a:solidFill>
+              <a:effectLst/>
+              <a:latin typeface="+mn-lt"/>
+              <a:ea typeface="+mn-ea"/>
+              <a:cs typeface="+mn-cs"/>
+            </a:endParaRPr>
+          </a:p>
+          <a:p>
+            <a:r>
+              <a:rPr lang="pt-BR" sz="1200" b="1" kern="1200" dirty="0">
+                <a:solidFill>
+                  <a:schemeClr val="tx1"/>
+                </a:solidFill>
+                <a:effectLst/>
+                <a:latin typeface="+mn-lt"/>
+                <a:ea typeface="+mn-ea"/>
+                <a:cs typeface="+mn-cs"/>
+              </a:rPr>
+              <a:t>Java:</a:t>
+            </a:r>
+            <a:r>
+              <a:rPr lang="pt-BR" sz="1200" b="0" kern="1200" dirty="0">
+                <a:solidFill>
+                  <a:schemeClr val="tx1"/>
+                </a:solidFill>
+                <a:effectLst/>
+                <a:latin typeface="+mn-lt"/>
+                <a:ea typeface="+mn-ea"/>
+                <a:cs typeface="+mn-cs"/>
+              </a:rPr>
+              <a:t> Compila para </a:t>
+            </a:r>
+            <a:r>
+              <a:rPr lang="pt-BR" sz="1200" b="0" i="1" kern="1200" dirty="0" err="1">
+                <a:solidFill>
+                  <a:schemeClr val="tx1"/>
+                </a:solidFill>
+                <a:effectLst/>
+                <a:latin typeface="+mn-lt"/>
+                <a:ea typeface="+mn-ea"/>
+                <a:cs typeface="+mn-cs"/>
+              </a:rPr>
+              <a:t>bytecode</a:t>
+            </a:r>
+            <a:r>
+              <a:rPr lang="pt-BR" sz="1200" b="0" kern="1200" dirty="0">
+                <a:solidFill>
+                  <a:schemeClr val="tx1"/>
+                </a:solidFill>
+                <a:effectLst/>
+                <a:latin typeface="+mn-lt"/>
+                <a:ea typeface="+mn-ea"/>
+                <a:cs typeface="+mn-cs"/>
+              </a:rPr>
+              <a:t> e roda na Máquina Virtual Java (JVM).</a:t>
+            </a:r>
+          </a:p>
+          <a:p>
+            <a:r>
+              <a:rPr lang="pt-BR" sz="1200" b="1" kern="1200" dirty="0">
+                <a:solidFill>
+                  <a:schemeClr val="tx1"/>
+                </a:solidFill>
+                <a:effectLst/>
+                <a:latin typeface="+mn-lt"/>
+                <a:ea typeface="+mn-ea"/>
+                <a:cs typeface="+mn-cs"/>
+              </a:rPr>
+              <a:t>C#:</a:t>
+            </a:r>
+            <a:r>
+              <a:rPr lang="pt-BR" sz="1200" b="0" kern="1200" dirty="0">
+                <a:solidFill>
+                  <a:schemeClr val="tx1"/>
+                </a:solidFill>
+                <a:effectLst/>
+                <a:latin typeface="+mn-lt"/>
+                <a:ea typeface="+mn-ea"/>
+                <a:cs typeface="+mn-cs"/>
+              </a:rPr>
+              <a:t> Transforma o código em </a:t>
+            </a:r>
+            <a:r>
+              <a:rPr lang="pt-BR" sz="1200" b="0" i="1" kern="1200" dirty="0">
+                <a:solidFill>
+                  <a:schemeClr val="tx1"/>
+                </a:solidFill>
+                <a:effectLst/>
+                <a:latin typeface="+mn-lt"/>
+                <a:ea typeface="+mn-ea"/>
+                <a:cs typeface="+mn-cs"/>
+              </a:rPr>
+              <a:t>IL (</a:t>
+            </a:r>
+            <a:r>
+              <a:rPr lang="pt-BR" sz="1200" b="0" i="1" kern="1200" dirty="0" err="1">
+                <a:solidFill>
+                  <a:schemeClr val="tx1"/>
+                </a:solidFill>
+                <a:effectLst/>
+                <a:latin typeface="+mn-lt"/>
+                <a:ea typeface="+mn-ea"/>
+                <a:cs typeface="+mn-cs"/>
+              </a:rPr>
+              <a:t>Intermediate</a:t>
+            </a:r>
+            <a:r>
+              <a:rPr lang="pt-BR" sz="1200" b="0" i="1" kern="1200" dirty="0">
+                <a:solidFill>
+                  <a:schemeClr val="tx1"/>
+                </a:solidFill>
+                <a:effectLst/>
+                <a:latin typeface="+mn-lt"/>
+                <a:ea typeface="+mn-ea"/>
+                <a:cs typeface="+mn-cs"/>
+              </a:rPr>
+              <a:t> </a:t>
+            </a:r>
+            <a:r>
+              <a:rPr lang="pt-BR" sz="1200" b="0" i="1" kern="1200" dirty="0" err="1">
+                <a:solidFill>
+                  <a:schemeClr val="tx1"/>
+                </a:solidFill>
+                <a:effectLst/>
+                <a:latin typeface="+mn-lt"/>
+                <a:ea typeface="+mn-ea"/>
+                <a:cs typeface="+mn-cs"/>
+              </a:rPr>
+              <a:t>Language</a:t>
+            </a:r>
+            <a:r>
+              <a:rPr lang="pt-BR" sz="1200" b="0" i="1" kern="1200" dirty="0">
+                <a:solidFill>
+                  <a:schemeClr val="tx1"/>
+                </a:solidFill>
+                <a:effectLst/>
+                <a:latin typeface="+mn-lt"/>
+                <a:ea typeface="+mn-ea"/>
+                <a:cs typeface="+mn-cs"/>
+              </a:rPr>
+              <a:t>)</a:t>
+            </a:r>
+            <a:r>
+              <a:rPr lang="pt-BR" sz="1200" b="0" kern="1200" dirty="0">
+                <a:solidFill>
+                  <a:schemeClr val="tx1"/>
+                </a:solidFill>
+                <a:effectLst/>
+                <a:latin typeface="+mn-lt"/>
+                <a:ea typeface="+mn-ea"/>
+                <a:cs typeface="+mn-cs"/>
+              </a:rPr>
+              <a:t> para rodar no ambiente do .NET.</a:t>
+            </a:r>
+          </a:p>
+          <a:p>
+            <a:r>
+              <a:rPr lang="pt-BR" sz="1200" b="1" kern="1200" dirty="0">
+                <a:solidFill>
+                  <a:schemeClr val="tx1"/>
+                </a:solidFill>
+                <a:effectLst/>
+                <a:latin typeface="+mn-lt"/>
+                <a:ea typeface="+mn-ea"/>
+                <a:cs typeface="+mn-cs"/>
+              </a:rPr>
+              <a:t>Python:</a:t>
+            </a:r>
+            <a:r>
+              <a:rPr lang="pt-BR" sz="1200" b="0" kern="1200" dirty="0">
+                <a:solidFill>
+                  <a:schemeClr val="tx1"/>
+                </a:solidFill>
+                <a:effectLst/>
+                <a:latin typeface="+mn-lt"/>
+                <a:ea typeface="+mn-ea"/>
+                <a:cs typeface="+mn-cs"/>
+              </a:rPr>
+              <a:t> Traduz o arquivo de texto para arquivos binários intermediários (.</a:t>
+            </a:r>
+            <a:r>
+              <a:rPr lang="pt-BR" sz="1200" b="0" kern="1200" dirty="0" err="1">
+                <a:solidFill>
+                  <a:schemeClr val="tx1"/>
+                </a:solidFill>
+                <a:effectLst/>
+                <a:latin typeface="+mn-lt"/>
+                <a:ea typeface="+mn-ea"/>
+                <a:cs typeface="+mn-cs"/>
+              </a:rPr>
+              <a:t>pyc</a:t>
+            </a:r>
+            <a:r>
+              <a:rPr lang="pt-BR" sz="1200" b="0" kern="1200" dirty="0">
+                <a:solidFill>
+                  <a:schemeClr val="tx1"/>
+                </a:solidFill>
+                <a:effectLst/>
+                <a:latin typeface="+mn-lt"/>
+                <a:ea typeface="+mn-ea"/>
+                <a:cs typeface="+mn-cs"/>
+              </a:rPr>
+              <a:t>) antes da execução interna.</a:t>
+            </a:r>
+          </a:p>
+          <a:p>
+            <a:pPr rtl="0"/>
+            <a:endParaRPr lang="pt-BR" sz="1200" b="0" kern="1200" dirty="0">
+              <a:solidFill>
+                <a:schemeClr val="tx1"/>
+              </a:solidFill>
+              <a:effectLst/>
+              <a:latin typeface="+mn-lt"/>
+              <a:ea typeface="+mn-ea"/>
+              <a:cs typeface="+mn-cs"/>
+            </a:endParaRPr>
+          </a:p>
+          <a:p>
+            <a:endParaRPr lang="pt-BR" dirty="0"/>
+          </a:p>
+        </p:txBody>
+      </p:sp>
+      <p:sp>
+        <p:nvSpPr>
+          <p:cNvPr id="4" name="Espaço Reservado para Número de Slide 3">
+            <a:extLst>
+              <a:ext uri="{FF2B5EF4-FFF2-40B4-BE49-F238E27FC236}">
+                <a16:creationId xmlns:a16="http://schemas.microsoft.com/office/drawing/2014/main" id="{DCF0F6C3-1900-E55A-CAAA-8B9CE43FE862}"/>
+              </a:ext>
+            </a:extLst>
+          </p:cNvPr>
+          <p:cNvSpPr>
+            <a:spLocks noGrp="1"/>
+          </p:cNvSpPr>
+          <p:nvPr>
+            <p:ph type="sldNum" sz="quarter" idx="5"/>
+          </p:nvPr>
+        </p:nvSpPr>
+        <p:spPr/>
+        <p:txBody>
+          <a:bodyPr/>
+          <a:lstStyle/>
+          <a:p>
+            <a:fld id="{80F36A49-A1DD-40F8-B8AD-E6F5365256CB}" type="slidenum">
+              <a:rPr lang="pt-BR" smtClean="0"/>
+              <a:t>9</a:t>
+            </a:fld>
+            <a:endParaRPr lang="pt-BR"/>
+          </a:p>
+        </p:txBody>
+      </p:sp>
+    </p:spTree>
+    <p:extLst>
+      <p:ext uri="{BB962C8B-B14F-4D97-AF65-F5344CB8AC3E}">
+        <p14:creationId xmlns:p14="http://schemas.microsoft.com/office/powerpoint/2010/main" val="2318908242"/>
       </p:ext>
     </p:extLst>
   </p:cSld>
@@ -9775,7 +9339,7 @@
           <a:p>
             <a:fld id="{A87E3B6E-8316-4A1C-BADA-DB7F3456EEF1}" type="datetimeFigureOut">
               <a:rPr lang="pt-BR" smtClean="0"/>
-              <a:t>10/08/2026</a:t>
+              <a:t>11/08/2026</a:t>
             </a:fld>
             <a:endParaRPr lang="pt-BR"/>
           </a:p>
@@ -9973,7 +9537,7 @@
           <a:p>
             <a:fld id="{A87E3B6E-8316-4A1C-BADA-DB7F3456EEF1}" type="datetimeFigureOut">
               <a:rPr lang="pt-BR" smtClean="0"/>
-              <a:t>10/08/2026</a:t>
+              <a:t>11/08/2026</a:t>
             </a:fld>
             <a:endParaRPr lang="pt-BR"/>
           </a:p>
@@ -10181,7 +9745,7 @@
           <a:p>
             <a:fld id="{A87E3B6E-8316-4A1C-BADA-DB7F3456EEF1}" type="datetimeFigureOut">
               <a:rPr lang="pt-BR" smtClean="0"/>
-              <a:t>10/08/2026</a:t>
+              <a:t>11/08/2026</a:t>
             </a:fld>
             <a:endParaRPr lang="pt-BR"/>
           </a:p>
@@ -10417,7 +9981,7 @@
           <a:p>
             <a:fld id="{A87E3B6E-8316-4A1C-BADA-DB7F3456EEF1}" type="datetimeFigureOut">
               <a:rPr lang="pt-BR" smtClean="0"/>
-              <a:t>10/08/2026</a:t>
+              <a:t>11/08/2026</a:t>
             </a:fld>
             <a:endParaRPr lang="pt-BR"/>
           </a:p>
@@ -10587,7 +10151,7 @@
           <a:p>
             <a:fld id="{A87E3B6E-8316-4A1C-BADA-DB7F3456EEF1}" type="datetimeFigureOut">
               <a:rPr lang="pt-BR" smtClean="0"/>
-              <a:t>10/08/2026</a:t>
+              <a:t>11/08/2026</a:t>
             </a:fld>
             <a:endParaRPr lang="pt-BR"/>
           </a:p>
@@ -10855,7 +10419,7 @@
           <a:p>
             <a:fld id="{A87E3B6E-8316-4A1C-BADA-DB7F3456EEF1}" type="datetimeFigureOut">
               <a:rPr lang="pt-BR" smtClean="0"/>
-              <a:t>10/08/2026</a:t>
+              <a:t>11/08/2026</a:t>
             </a:fld>
             <a:endParaRPr lang="pt-BR"/>
           </a:p>
@@ -11087,7 +10651,7 @@
           <a:p>
             <a:fld id="{A87E3B6E-8316-4A1C-BADA-DB7F3456EEF1}" type="datetimeFigureOut">
               <a:rPr lang="pt-BR" smtClean="0"/>
-              <a:t>10/08/2026</a:t>
+              <a:t>11/08/2026</a:t>
             </a:fld>
             <a:endParaRPr lang="pt-BR"/>
           </a:p>
@@ -11442,7 +11006,7 @@
           <a:p>
             <a:fld id="{A87E3B6E-8316-4A1C-BADA-DB7F3456EEF1}" type="datetimeFigureOut">
               <a:rPr lang="pt-BR" smtClean="0"/>
-              <a:t>10/08/2026</a:t>
+              <a:t>11/08/2026</a:t>
             </a:fld>
             <a:endParaRPr lang="pt-BR"/>
           </a:p>
@@ -11583,7 +11147,7 @@
           <a:p>
             <a:fld id="{A87E3B6E-8316-4A1C-BADA-DB7F3456EEF1}" type="datetimeFigureOut">
               <a:rPr lang="pt-BR" smtClean="0"/>
-              <a:t>10/08/2026</a:t>
+              <a:t>11/08/2026</a:t>
             </a:fld>
             <a:endParaRPr lang="pt-BR"/>
           </a:p>
@@ -11678,7 +11242,7 @@
           <a:p>
             <a:fld id="{A87E3B6E-8316-4A1C-BADA-DB7F3456EEF1}" type="datetimeFigureOut">
               <a:rPr lang="pt-BR" smtClean="0"/>
-              <a:t>10/08/2026</a:t>
+              <a:t>11/08/2026</a:t>
             </a:fld>
             <a:endParaRPr lang="pt-BR"/>
           </a:p>
@@ -12035,7 +11599,7 @@
           <a:p>
             <a:fld id="{A87E3B6E-8316-4A1C-BADA-DB7F3456EEF1}" type="datetimeFigureOut">
               <a:rPr lang="pt-BR" smtClean="0"/>
-              <a:t>10/08/2026</a:t>
+              <a:t>11/08/2026</a:t>
             </a:fld>
             <a:endParaRPr lang="pt-BR"/>
           </a:p>
@@ -12236,7 +11800,7 @@
           <a:p>
             <a:fld id="{A87E3B6E-8316-4A1C-BADA-DB7F3456EEF1}" type="datetimeFigureOut">
               <a:rPr lang="pt-BR" smtClean="0"/>
-              <a:t>10/08/2026</a:t>
+              <a:t>11/08/2026</a:t>
             </a:fld>
             <a:endParaRPr lang="pt-BR"/>
           </a:p>
@@ -12589,7 +12153,7 @@
           <a:p>
             <a:fld id="{A87E3B6E-8316-4A1C-BADA-DB7F3456EEF1}" type="datetimeFigureOut">
               <a:rPr lang="pt-BR" smtClean="0"/>
-              <a:t>10/08/2026</a:t>
+              <a:t>11/08/2026</a:t>
             </a:fld>
             <a:endParaRPr lang="pt-BR"/>
           </a:p>
@@ -12774,7 +12338,7 @@
           <a:p>
             <a:fld id="{A87E3B6E-8316-4A1C-BADA-DB7F3456EEF1}" type="datetimeFigureOut">
               <a:rPr lang="pt-BR" smtClean="0"/>
-              <a:t>10/08/2026</a:t>
+              <a:t>11/08/2026</a:t>
             </a:fld>
             <a:endParaRPr lang="pt-BR"/>
           </a:p>
@@ -12954,7 +12518,7 @@
           <a:p>
             <a:fld id="{A87E3B6E-8316-4A1C-BADA-DB7F3456EEF1}" type="datetimeFigureOut">
               <a:rPr lang="pt-BR" smtClean="0"/>
-              <a:t>10/08/2026</a:t>
+              <a:t>11/08/2026</a:t>
             </a:fld>
             <a:endParaRPr lang="pt-BR"/>
           </a:p>
@@ -13217,7 +12781,7 @@
           <a:p>
             <a:fld id="{A87E3B6E-8316-4A1C-BADA-DB7F3456EEF1}" type="datetimeFigureOut">
               <a:rPr lang="pt-BR" smtClean="0"/>
-              <a:t>10/08/2026</a:t>
+              <a:t>11/08/2026</a:t>
             </a:fld>
             <a:endParaRPr lang="pt-BR"/>
           </a:p>
@@ -13482,7 +13046,7 @@
           <a:p>
             <a:fld id="{A87E3B6E-8316-4A1C-BADA-DB7F3456EEF1}" type="datetimeFigureOut">
               <a:rPr lang="pt-BR" smtClean="0"/>
-              <a:t>10/08/2026</a:t>
+              <a:t>11/08/2026</a:t>
             </a:fld>
             <a:endParaRPr lang="pt-BR"/>
           </a:p>
@@ -13894,7 +13458,7 @@
           <a:p>
             <a:fld id="{A87E3B6E-8316-4A1C-BADA-DB7F3456EEF1}" type="datetimeFigureOut">
               <a:rPr lang="pt-BR" smtClean="0"/>
-              <a:t>10/08/2026</a:t>
+              <a:t>11/08/2026</a:t>
             </a:fld>
             <a:endParaRPr lang="pt-BR"/>
           </a:p>
@@ -14035,7 +13599,7 @@
           <a:p>
             <a:fld id="{A87E3B6E-8316-4A1C-BADA-DB7F3456EEF1}" type="datetimeFigureOut">
               <a:rPr lang="pt-BR" smtClean="0"/>
-              <a:t>10/08/2026</a:t>
+              <a:t>11/08/2026</a:t>
             </a:fld>
             <a:endParaRPr lang="pt-BR"/>
           </a:p>
@@ -14148,7 +13712,7 @@
           <a:p>
             <a:fld id="{A87E3B6E-8316-4A1C-BADA-DB7F3456EEF1}" type="datetimeFigureOut">
               <a:rPr lang="pt-BR" smtClean="0"/>
-              <a:t>10/08/2026</a:t>
+              <a:t>11/08/2026</a:t>
             </a:fld>
             <a:endParaRPr lang="pt-BR"/>
           </a:p>
@@ -14459,7 +14023,7 @@
           <a:p>
             <a:fld id="{A87E3B6E-8316-4A1C-BADA-DB7F3456EEF1}" type="datetimeFigureOut">
               <a:rPr lang="pt-BR" smtClean="0"/>
-              <a:t>10/08/2026</a:t>
+              <a:t>11/08/2026</a:t>
             </a:fld>
             <a:endParaRPr lang="pt-BR"/>
           </a:p>
@@ -14747,7 +14311,7 @@
           <a:p>
             <a:fld id="{A87E3B6E-8316-4A1C-BADA-DB7F3456EEF1}" type="datetimeFigureOut">
               <a:rPr lang="pt-BR" smtClean="0"/>
-              <a:t>10/08/2026</a:t>
+              <a:t>11/08/2026</a:t>
             </a:fld>
             <a:endParaRPr lang="pt-BR"/>
           </a:p>
@@ -14988,7 +14552,7 @@
           <a:p>
             <a:fld id="{A87E3B6E-8316-4A1C-BADA-DB7F3456EEF1}" type="datetimeFigureOut">
               <a:rPr lang="pt-BR" smtClean="0"/>
-              <a:t>10/08/2026</a:t>
+              <a:t>11/08/2026</a:t>
             </a:fld>
             <a:endParaRPr lang="pt-BR"/>
           </a:p>
@@ -15552,7 +15116,7 @@
           <a:p>
             <a:fld id="{A87E3B6E-8316-4A1C-BADA-DB7F3456EEF1}" type="datetimeFigureOut">
               <a:rPr lang="pt-BR" smtClean="0"/>
-              <a:t>10/08/2026</a:t>
+              <a:t>11/08/2026</a:t>
             </a:fld>
             <a:endParaRPr lang="pt-BR"/>
           </a:p>
@@ -15995,13 +15559,7 @@
   <p:cSld>
     <p:spTree>
       <p:nvGrpSpPr>
-        <p:cNvPr id="1" name="">
-          <a:extLst>
-            <a:ext uri="{FF2B5EF4-FFF2-40B4-BE49-F238E27FC236}">
-              <a16:creationId xmlns:a16="http://schemas.microsoft.com/office/drawing/2014/main" id="{E176A538-0ED9-B233-81F6-495BFBCB645A}"/>
-            </a:ext>
-          </a:extLst>
-        </p:cNvPr>
+        <p:cNvPr id="1" name=""/>
         <p:cNvGrpSpPr/>
         <p:nvPr/>
       </p:nvGrpSpPr>
@@ -16018,7 +15576,7 @@
           <p:cNvPr id="2" name="Título 1">
             <a:extLst>
               <a:ext uri="{FF2B5EF4-FFF2-40B4-BE49-F238E27FC236}">
-                <a16:creationId xmlns:a16="http://schemas.microsoft.com/office/drawing/2014/main" id="{927C6E84-14A0-D43A-A22B-DC45B1CD8270}"/>
+                <a16:creationId xmlns:a16="http://schemas.microsoft.com/office/drawing/2014/main" id="{92E9326E-3499-D287-DA5A-8AED2AD3A4D6}"/>
               </a:ext>
             </a:extLst>
           </p:cNvPr>
@@ -16044,8 +15602,13 @@
           <a:p>
             <a:r>
               <a:rPr lang="pt-BR" dirty="0"/>
-              <a:t>plano DE ENSINO</a:t>
-            </a:r>
+              <a:t>módulo 1 - Introdução à </a:t>
+            </a:r>
+            <a:r>
+              <a:rPr lang="pt-BR" dirty="0" err="1"/>
+              <a:t>lp</a:t>
+            </a:r>
+            <a:endParaRPr lang="pt-BR" dirty="0"/>
           </a:p>
         </p:txBody>
       </p:sp>
@@ -16054,7 +15617,7 @@
           <p:cNvPr id="3" name="Subtítulo 2">
             <a:extLst>
               <a:ext uri="{FF2B5EF4-FFF2-40B4-BE49-F238E27FC236}">
-                <a16:creationId xmlns:a16="http://schemas.microsoft.com/office/drawing/2014/main" id="{30DBD6D9-B141-9711-5103-EE62F47F9F57}"/>
+                <a16:creationId xmlns:a16="http://schemas.microsoft.com/office/drawing/2014/main" id="{7F2C7C20-5716-4992-8451-F28A3F0EB999}"/>
               </a:ext>
             </a:extLst>
           </p:cNvPr>
@@ -16093,7 +15656,7 @@
           <p:cNvPr id="8194" name="Picture 2">
             <a:extLst>
               <a:ext uri="{FF2B5EF4-FFF2-40B4-BE49-F238E27FC236}">
-                <a16:creationId xmlns:a16="http://schemas.microsoft.com/office/drawing/2014/main" id="{70C721EB-FF62-0C37-62FF-575B79432CAC}"/>
+                <a16:creationId xmlns:a16="http://schemas.microsoft.com/office/drawing/2014/main" id="{739C2285-BBDC-FB8D-BB73-A95AC19BC977}"/>
               </a:ext>
             </a:extLst>
           </p:cNvPr>
@@ -16138,7 +15701,7 @@
     </p:spTree>
     <p:extLst>
       <p:ext uri="{BB962C8B-B14F-4D97-AF65-F5344CB8AC3E}">
-        <p14:creationId xmlns:p14="http://schemas.microsoft.com/office/powerpoint/2010/main" val="1464189378"/>
+        <p14:creationId xmlns:p14="http://schemas.microsoft.com/office/powerpoint/2010/main" val="521462439"/>
       </p:ext>
     </p:extLst>
   </p:cSld>
@@ -16156,7 +15719,7 @@
         <p:cNvPr id="1" name="">
           <a:extLst>
             <a:ext uri="{FF2B5EF4-FFF2-40B4-BE49-F238E27FC236}">
-              <a16:creationId xmlns:a16="http://schemas.microsoft.com/office/drawing/2014/main" id="{9825C57C-4AC3-DF5A-D004-04DB875A0EED}"/>
+              <a16:creationId xmlns:a16="http://schemas.microsoft.com/office/drawing/2014/main" id="{063087AC-5D75-90DD-6E28-D5F1BDDF3059}"/>
             </a:ext>
           </a:extLst>
         </p:cNvPr>
@@ -16176,7 +15739,7 @@
           <p:cNvPr id="5" name="Retângulo 4">
             <a:extLst>
               <a:ext uri="{FF2B5EF4-FFF2-40B4-BE49-F238E27FC236}">
-                <a16:creationId xmlns:a16="http://schemas.microsoft.com/office/drawing/2014/main" id="{E3FC9A9B-8E88-FEA5-7D07-53A05DB749B3}"/>
+                <a16:creationId xmlns:a16="http://schemas.microsoft.com/office/drawing/2014/main" id="{569B5857-8044-CD22-9F41-F40D6B63243F}"/>
               </a:ext>
             </a:extLst>
           </p:cNvPr>
@@ -16230,1324 +15793,6 @@
           <p:cNvPr id="2" name="Título 1">
             <a:extLst>
               <a:ext uri="{FF2B5EF4-FFF2-40B4-BE49-F238E27FC236}">
-                <a16:creationId xmlns:a16="http://schemas.microsoft.com/office/drawing/2014/main" id="{B7226DD1-2C9F-E5DD-5255-F8955046DC72}"/>
-              </a:ext>
-            </a:extLst>
-          </p:cNvPr>
-          <p:cNvSpPr>
-            <a:spLocks noGrp="1"/>
-          </p:cNvSpPr>
-          <p:nvPr>
-            <p:ph type="title"/>
-          </p:nvPr>
-        </p:nvSpPr>
-        <p:spPr>
-          <a:xfrm>
-            <a:off x="0" y="-1"/>
-            <a:ext cx="12192000" cy="1325563"/>
-          </a:xfrm>
-        </p:spPr>
-        <p:txBody>
-          <a:bodyPr/>
-          <a:lstStyle/>
-          <a:p>
-            <a:pPr algn="ctr"/>
-            <a:r>
-              <a:rPr lang="pt-BR" dirty="0">
-                <a:solidFill>
-                  <a:schemeClr val="bg1"/>
-                </a:solidFill>
-              </a:rPr>
-              <a:t>Linguagem Assembly</a:t>
-            </a:r>
-          </a:p>
-        </p:txBody>
-      </p:sp>
-      <p:sp>
-        <p:nvSpPr>
-          <p:cNvPr id="12" name="AutoShape 6" descr="Lógica Proposicional x Lógica de Argumento ⋆ Colaborae">
-            <a:extLst>
-              <a:ext uri="{FF2B5EF4-FFF2-40B4-BE49-F238E27FC236}">
-                <a16:creationId xmlns:a16="http://schemas.microsoft.com/office/drawing/2014/main" id="{58CD5F2B-3F4B-1170-1A3A-4C958128A9FC}"/>
-              </a:ext>
-            </a:extLst>
-          </p:cNvPr>
-          <p:cNvSpPr>
-            <a:spLocks noChangeAspect="1" noChangeArrowheads="1"/>
-          </p:cNvSpPr>
-          <p:nvPr/>
-        </p:nvSpPr>
-        <p:spPr bwMode="auto">
-          <a:xfrm>
-            <a:off x="5943600" y="-1707776"/>
-            <a:ext cx="5289176" cy="5289176"/>
-          </a:xfrm>
-          <a:prstGeom prst="rect">
-            <a:avLst/>
-          </a:prstGeom>
-          <a:noFill/>
-          <a:extLst>
-            <a:ext uri="{909E8E84-426E-40DD-AFC4-6F175D3DCCD1}">
-              <a14:hiddenFill xmlns:a14="http://schemas.microsoft.com/office/drawing/2010/main">
-                <a:solidFill>
-                  <a:srgbClr val="FFFFFF"/>
-                </a:solidFill>
-              </a14:hiddenFill>
-            </a:ext>
-          </a:extLst>
-        </p:spPr>
-        <p:txBody>
-          <a:bodyPr vert="horz" wrap="square" lIns="91440" tIns="45720" rIns="91440" bIns="45720" numCol="1" anchor="t" anchorCtr="0" compatLnSpc="1">
-            <a:prstTxWarp prst="textNoShape">
-              <a:avLst/>
-            </a:prstTxWarp>
-          </a:bodyPr>
-          <a:lstStyle/>
-          <a:p>
-            <a:endParaRPr lang="pt-BR"/>
-          </a:p>
-        </p:txBody>
-      </p:sp>
-      <p:sp>
-        <p:nvSpPr>
-          <p:cNvPr id="6" name="Espaço Reservado para Conteúdo 5">
-            <a:extLst>
-              <a:ext uri="{FF2B5EF4-FFF2-40B4-BE49-F238E27FC236}">
-                <a16:creationId xmlns:a16="http://schemas.microsoft.com/office/drawing/2014/main" id="{4E9CDBE0-1F00-547B-C4DA-F12EE2721406}"/>
-              </a:ext>
-            </a:extLst>
-          </p:cNvPr>
-          <p:cNvSpPr>
-            <a:spLocks noGrp="1"/>
-          </p:cNvSpPr>
-          <p:nvPr>
-            <p:ph idx="1"/>
-          </p:nvPr>
-        </p:nvSpPr>
-        <p:spPr>
-          <a:xfrm>
-            <a:off x="520861" y="1640492"/>
-            <a:ext cx="7338349" cy="4413067"/>
-          </a:xfrm>
-        </p:spPr>
-        <p:txBody>
-          <a:bodyPr>
-            <a:normAutofit/>
-          </a:bodyPr>
-          <a:lstStyle/>
-          <a:p>
-            <a:r>
-              <a:rPr lang="pt-BR" sz="2400" dirty="0"/>
-              <a:t>Uso de abreviações textuais que representam instruções de código de máquina – Mnemônicos.</a:t>
-            </a:r>
-            <a:endParaRPr lang="pt-BR" sz="2000" dirty="0"/>
-          </a:p>
-          <a:p>
-            <a:endParaRPr lang="pt-BR" sz="2400" dirty="0"/>
-          </a:p>
-          <a:p>
-            <a:r>
-              <a:rPr lang="pt-BR" sz="2400" dirty="0"/>
-              <a:t>Dependem de programas tradutores (</a:t>
-            </a:r>
-            <a:r>
-              <a:rPr lang="pt-BR" sz="2400" dirty="0" err="1"/>
-              <a:t>assemblers</a:t>
-            </a:r>
-            <a:r>
-              <a:rPr lang="pt-BR" sz="2400" dirty="0"/>
-              <a:t>) para converter o código para linguagem de máquina.</a:t>
-            </a:r>
-          </a:p>
-          <a:p>
-            <a:endParaRPr lang="pt-BR" sz="2400" dirty="0"/>
-          </a:p>
-          <a:p>
-            <a:r>
-              <a:rPr lang="pt-BR" sz="2400" dirty="0"/>
-              <a:t>Seu uso ainda se justifica em casos onde o desempenho é critico ou sistemas embarcados</a:t>
-            </a:r>
-          </a:p>
-          <a:p>
-            <a:endParaRPr lang="pt-BR" sz="2400" dirty="0"/>
-          </a:p>
-          <a:p>
-            <a:r>
-              <a:rPr lang="pt-BR" sz="2400" dirty="0"/>
-              <a:t>A conversão de suas instruções é  ‘1 pra 1’</a:t>
-            </a:r>
-            <a:endParaRPr lang="pt-BR" dirty="0"/>
-          </a:p>
-          <a:p>
-            <a:endParaRPr lang="pt-BR" sz="2400" dirty="0"/>
-          </a:p>
-        </p:txBody>
-      </p:sp>
-      <p:pic>
-        <p:nvPicPr>
-          <p:cNvPr id="5122" name="Picture 2" descr="Importância da linguem de Programação de Baixo Nível">
-            <a:extLst>
-              <a:ext uri="{FF2B5EF4-FFF2-40B4-BE49-F238E27FC236}">
-                <a16:creationId xmlns:a16="http://schemas.microsoft.com/office/drawing/2014/main" id="{EADFA9B8-4F3A-682A-1578-30B5339E88A2}"/>
-              </a:ext>
-            </a:extLst>
-          </p:cNvPr>
-          <p:cNvPicPr>
-            <a:picLocks noChangeAspect="1" noChangeArrowheads="1"/>
-          </p:cNvPicPr>
-          <p:nvPr/>
-        </p:nvPicPr>
-        <p:blipFill rotWithShape="1">
-          <a:blip r:embed="rId3">
-            <a:extLst>
-              <a:ext uri="{28A0092B-C50C-407E-A947-70E740481C1C}">
-                <a14:useLocalDpi xmlns:a14="http://schemas.microsoft.com/office/drawing/2010/main" val="0"/>
-              </a:ext>
-            </a:extLst>
-          </a:blip>
-          <a:srcRect l="1230" r="58769" b="57292"/>
-          <a:stretch>
-            <a:fillRect/>
-          </a:stretch>
-        </p:blipFill>
-        <p:spPr bwMode="auto">
-          <a:xfrm>
-            <a:off x="8588188" y="1842207"/>
-            <a:ext cx="2990126" cy="2439003"/>
-          </a:xfrm>
-          <a:prstGeom prst="rect">
-            <a:avLst/>
-          </a:prstGeom>
-          <a:noFill/>
-          <a:extLst>
-            <a:ext uri="{909E8E84-426E-40DD-AFC4-6F175D3DCCD1}">
-              <a14:hiddenFill xmlns:a14="http://schemas.microsoft.com/office/drawing/2010/main">
-                <a:solidFill>
-                  <a:srgbClr val="FFFFFF"/>
-                </a:solidFill>
-              </a14:hiddenFill>
-            </a:ext>
-          </a:extLst>
-        </p:spPr>
-      </p:pic>
-      <p:pic>
-        <p:nvPicPr>
-          <p:cNvPr id="10" name="Imagem 9">
-            <a:extLst>
-              <a:ext uri="{FF2B5EF4-FFF2-40B4-BE49-F238E27FC236}">
-                <a16:creationId xmlns:a16="http://schemas.microsoft.com/office/drawing/2014/main" id="{EAF9DFF1-4300-C177-C5B9-0FE8BD01CBE9}"/>
-              </a:ext>
-            </a:extLst>
-          </p:cNvPr>
-          <p:cNvPicPr>
-            <a:picLocks noChangeAspect="1"/>
-          </p:cNvPicPr>
-          <p:nvPr/>
-        </p:nvPicPr>
-        <p:blipFill>
-          <a:blip r:embed="rId4">
-            <a:extLst>
-              <a:ext uri="{28A0092B-C50C-407E-A947-70E740481C1C}">
-                <a14:useLocalDpi xmlns:a14="http://schemas.microsoft.com/office/drawing/2010/main" val="0"/>
-              </a:ext>
-            </a:extLst>
-          </a:blip>
-          <a:srcRect l="5742"/>
-          <a:stretch>
-            <a:fillRect/>
-          </a:stretch>
-        </p:blipFill>
-        <p:spPr>
-          <a:xfrm>
-            <a:off x="7967428" y="4281211"/>
-            <a:ext cx="4224572" cy="1772348"/>
-          </a:xfrm>
-          <a:prstGeom prst="rect">
-            <a:avLst/>
-          </a:prstGeom>
-        </p:spPr>
-      </p:pic>
-    </p:spTree>
-    <p:extLst>
-      <p:ext uri="{BB962C8B-B14F-4D97-AF65-F5344CB8AC3E}">
-        <p14:creationId xmlns:p14="http://schemas.microsoft.com/office/powerpoint/2010/main" val="1155213387"/>
-      </p:ext>
-    </p:extLst>
-  </p:cSld>
-  <p:clrMapOvr>
-    <a:masterClrMapping/>
-  </p:clrMapOvr>
-</p:sld>
-</file>
-
-<file path=ppt/slides/slide11.xml><?xml version="1.0" encoding="utf-8"?>
-<p:sld xmlns:a="http://schemas.openxmlformats.org/drawingml/2006/main" xmlns:r="http://schemas.openxmlformats.org/officeDocument/2006/relationships" xmlns:p="http://schemas.openxmlformats.org/presentationml/2006/main">
-  <p:cSld>
-    <p:spTree>
-      <p:nvGrpSpPr>
-        <p:cNvPr id="1" name="">
-          <a:extLst>
-            <a:ext uri="{FF2B5EF4-FFF2-40B4-BE49-F238E27FC236}">
-              <a16:creationId xmlns:a16="http://schemas.microsoft.com/office/drawing/2014/main" id="{76ACF2CA-646F-A51B-B8DE-0DFCB3301746}"/>
-            </a:ext>
-          </a:extLst>
-        </p:cNvPr>
-        <p:cNvGrpSpPr/>
-        <p:nvPr/>
-      </p:nvGrpSpPr>
-      <p:grpSpPr>
-        <a:xfrm>
-          <a:off x="0" y="0"/>
-          <a:ext cx="0" cy="0"/>
-          <a:chOff x="0" y="0"/>
-          <a:chExt cx="0" cy="0"/>
-        </a:xfrm>
-      </p:grpSpPr>
-      <p:sp>
-        <p:nvSpPr>
-          <p:cNvPr id="5" name="Retângulo 4">
-            <a:extLst>
-              <a:ext uri="{FF2B5EF4-FFF2-40B4-BE49-F238E27FC236}">
-                <a16:creationId xmlns:a16="http://schemas.microsoft.com/office/drawing/2014/main" id="{861DE212-0D89-D41F-7CA0-11865FFE7931}"/>
-              </a:ext>
-            </a:extLst>
-          </p:cNvPr>
-          <p:cNvSpPr/>
-          <p:nvPr/>
-        </p:nvSpPr>
-        <p:spPr>
-          <a:xfrm>
-            <a:off x="0" y="-2"/>
-            <a:ext cx="12192000" cy="1325563"/>
-          </a:xfrm>
-          <a:prstGeom prst="rect">
-            <a:avLst/>
-          </a:prstGeom>
-          <a:solidFill>
-            <a:srgbClr val="418AB3"/>
-          </a:solidFill>
-          <a:ln>
-            <a:solidFill>
-              <a:srgbClr val="418AB3"/>
-            </a:solidFill>
-          </a:ln>
-        </p:spPr>
-        <p:style>
-          <a:lnRef idx="2">
-            <a:schemeClr val="accent1">
-              <a:shade val="15000"/>
-            </a:schemeClr>
-          </a:lnRef>
-          <a:fillRef idx="1">
-            <a:schemeClr val="accent1"/>
-          </a:fillRef>
-          <a:effectRef idx="0">
-            <a:schemeClr val="accent1"/>
-          </a:effectRef>
-          <a:fontRef idx="minor">
-            <a:schemeClr val="lt1"/>
-          </a:fontRef>
-        </p:style>
-        <p:txBody>
-          <a:bodyPr rtlCol="0" anchor="ctr"/>
-          <a:lstStyle/>
-          <a:p>
-            <a:pPr algn="ctr"/>
-            <a:endParaRPr lang="pt-BR" dirty="0"/>
-          </a:p>
-        </p:txBody>
-      </p:sp>
-      <p:sp>
-        <p:nvSpPr>
-          <p:cNvPr id="2" name="Título 1">
-            <a:extLst>
-              <a:ext uri="{FF2B5EF4-FFF2-40B4-BE49-F238E27FC236}">
-                <a16:creationId xmlns:a16="http://schemas.microsoft.com/office/drawing/2014/main" id="{DA0709C0-24AC-5BB1-9932-E41B1C3C3871}"/>
-              </a:ext>
-            </a:extLst>
-          </p:cNvPr>
-          <p:cNvSpPr>
-            <a:spLocks noGrp="1"/>
-          </p:cNvSpPr>
-          <p:nvPr>
-            <p:ph type="title"/>
-          </p:nvPr>
-        </p:nvSpPr>
-        <p:spPr>
-          <a:xfrm>
-            <a:off x="0" y="-1"/>
-            <a:ext cx="12192000" cy="1325563"/>
-          </a:xfrm>
-        </p:spPr>
-        <p:txBody>
-          <a:bodyPr/>
-          <a:lstStyle/>
-          <a:p>
-            <a:pPr algn="ctr"/>
-            <a:r>
-              <a:rPr lang="pt-BR" dirty="0">
-                <a:solidFill>
-                  <a:schemeClr val="bg1"/>
-                </a:solidFill>
-              </a:rPr>
-              <a:t>Linguagens de Alto Nível</a:t>
-            </a:r>
-          </a:p>
-        </p:txBody>
-      </p:sp>
-      <p:sp>
-        <p:nvSpPr>
-          <p:cNvPr id="12" name="AutoShape 6" descr="Lógica Proposicional x Lógica de Argumento ⋆ Colaborae">
-            <a:extLst>
-              <a:ext uri="{FF2B5EF4-FFF2-40B4-BE49-F238E27FC236}">
-                <a16:creationId xmlns:a16="http://schemas.microsoft.com/office/drawing/2014/main" id="{8314CDC7-5B3B-0DFD-59D5-5142BB8A8537}"/>
-              </a:ext>
-            </a:extLst>
-          </p:cNvPr>
-          <p:cNvSpPr>
-            <a:spLocks noChangeAspect="1" noChangeArrowheads="1"/>
-          </p:cNvSpPr>
-          <p:nvPr/>
-        </p:nvSpPr>
-        <p:spPr bwMode="auto">
-          <a:xfrm>
-            <a:off x="5943600" y="-1707776"/>
-            <a:ext cx="5289176" cy="5289176"/>
-          </a:xfrm>
-          <a:prstGeom prst="rect">
-            <a:avLst/>
-          </a:prstGeom>
-          <a:noFill/>
-          <a:extLst>
-            <a:ext uri="{909E8E84-426E-40DD-AFC4-6F175D3DCCD1}">
-              <a14:hiddenFill xmlns:a14="http://schemas.microsoft.com/office/drawing/2010/main">
-                <a:solidFill>
-                  <a:srgbClr val="FFFFFF"/>
-                </a:solidFill>
-              </a14:hiddenFill>
-            </a:ext>
-          </a:extLst>
-        </p:spPr>
-        <p:txBody>
-          <a:bodyPr vert="horz" wrap="square" lIns="91440" tIns="45720" rIns="91440" bIns="45720" numCol="1" anchor="t" anchorCtr="0" compatLnSpc="1">
-            <a:prstTxWarp prst="textNoShape">
-              <a:avLst/>
-            </a:prstTxWarp>
-          </a:bodyPr>
-          <a:lstStyle/>
-          <a:p>
-            <a:endParaRPr lang="pt-BR"/>
-          </a:p>
-        </p:txBody>
-      </p:sp>
-      <p:sp>
-        <p:nvSpPr>
-          <p:cNvPr id="6" name="Espaço Reservado para Conteúdo 5">
-            <a:extLst>
-              <a:ext uri="{FF2B5EF4-FFF2-40B4-BE49-F238E27FC236}">
-                <a16:creationId xmlns:a16="http://schemas.microsoft.com/office/drawing/2014/main" id="{62A0ED64-1BC3-1627-470A-DB92ADD5D1BA}"/>
-              </a:ext>
-            </a:extLst>
-          </p:cNvPr>
-          <p:cNvSpPr>
-            <a:spLocks noGrp="1"/>
-          </p:cNvSpPr>
-          <p:nvPr>
-            <p:ph idx="1"/>
-          </p:nvPr>
-        </p:nvSpPr>
-        <p:spPr>
-          <a:xfrm>
-            <a:off x="302474" y="1640492"/>
-            <a:ext cx="7765080" cy="4413067"/>
-          </a:xfrm>
-        </p:spPr>
-        <p:txBody>
-          <a:bodyPr>
-            <a:normAutofit/>
-          </a:bodyPr>
-          <a:lstStyle/>
-          <a:p>
-            <a:r>
-              <a:rPr lang="pt-BR" sz="2400" dirty="0"/>
-              <a:t>Possui uma leitura mais próxima da linguagem humana</a:t>
-            </a:r>
-            <a:endParaRPr lang="pt-BR" sz="2000" dirty="0"/>
-          </a:p>
-          <a:p>
-            <a:endParaRPr lang="pt-BR" sz="2400" dirty="0"/>
-          </a:p>
-          <a:p>
-            <a:r>
-              <a:rPr lang="pt-BR" sz="2400" dirty="0"/>
-              <a:t>O próprio computador faz o trabalho duro de traduzir o código para a máquina (Compiladores ou Interpretadores).</a:t>
-            </a:r>
-          </a:p>
-          <a:p>
-            <a:endParaRPr lang="pt-BR" sz="2400" dirty="0"/>
-          </a:p>
-          <a:p>
-            <a:r>
-              <a:rPr lang="pt-BR" sz="2400" dirty="0"/>
-              <a:t>Introduz a portabilidade, podendo ser executado em diferentes arquiteturas. </a:t>
-            </a:r>
-          </a:p>
-          <a:p>
-            <a:endParaRPr lang="pt-BR" sz="2400" dirty="0"/>
-          </a:p>
-        </p:txBody>
-      </p:sp>
-      <p:pic>
-        <p:nvPicPr>
-          <p:cNvPr id="6146" name="Picture 2" descr="PPT - MIPS Assembly Language PowerPoint Presentation, free download -  ID:144403">
-            <a:extLst>
-              <a:ext uri="{FF2B5EF4-FFF2-40B4-BE49-F238E27FC236}">
-                <a16:creationId xmlns:a16="http://schemas.microsoft.com/office/drawing/2014/main" id="{C5D593F8-7C4C-0C3A-F2E3-D18ACE26910C}"/>
-              </a:ext>
-            </a:extLst>
-          </p:cNvPr>
-          <p:cNvPicPr>
-            <a:picLocks noChangeAspect="1" noChangeArrowheads="1"/>
-          </p:cNvPicPr>
-          <p:nvPr/>
-        </p:nvPicPr>
-        <p:blipFill rotWithShape="1">
-          <a:blip r:embed="rId3">
-            <a:extLst>
-              <a:ext uri="{28A0092B-C50C-407E-A947-70E740481C1C}">
-                <a14:useLocalDpi xmlns:a14="http://schemas.microsoft.com/office/drawing/2010/main" val="0"/>
-              </a:ext>
-            </a:extLst>
-          </a:blip>
-          <a:srcRect l="4853" t="29874" r="10702" b="10042"/>
-          <a:stretch>
-            <a:fillRect/>
-          </a:stretch>
-        </p:blipFill>
-        <p:spPr bwMode="auto">
-          <a:xfrm>
-            <a:off x="7307483" y="4251469"/>
-            <a:ext cx="4884517" cy="2606531"/>
-          </a:xfrm>
-          <a:prstGeom prst="rect">
-            <a:avLst/>
-          </a:prstGeom>
-          <a:noFill/>
-          <a:extLst>
-            <a:ext uri="{909E8E84-426E-40DD-AFC4-6F175D3DCCD1}">
-              <a14:hiddenFill xmlns:a14="http://schemas.microsoft.com/office/drawing/2010/main">
-                <a:solidFill>
-                  <a:srgbClr val="FFFFFF"/>
-                </a:solidFill>
-              </a14:hiddenFill>
-            </a:ext>
-          </a:extLst>
-        </p:spPr>
-      </p:pic>
-      <p:pic>
-        <p:nvPicPr>
-          <p:cNvPr id="3" name="Imagem 2">
-            <a:extLst>
-              <a:ext uri="{FF2B5EF4-FFF2-40B4-BE49-F238E27FC236}">
-                <a16:creationId xmlns:a16="http://schemas.microsoft.com/office/drawing/2014/main" id="{0B46C71D-772A-A08A-3F6B-202564571EFA}"/>
-              </a:ext>
-            </a:extLst>
-          </p:cNvPr>
-          <p:cNvPicPr>
-            <a:picLocks noChangeAspect="1"/>
-          </p:cNvPicPr>
-          <p:nvPr/>
-        </p:nvPicPr>
-        <p:blipFill>
-          <a:blip r:embed="rId4"/>
-          <a:srcRect l="21265" t="20112" r="40751" b="50000"/>
-          <a:stretch>
-            <a:fillRect/>
-          </a:stretch>
-        </p:blipFill>
-        <p:spPr>
-          <a:xfrm>
-            <a:off x="2406584" y="5381764"/>
-            <a:ext cx="3556860" cy="1476236"/>
-          </a:xfrm>
-          <a:prstGeom prst="rect">
-            <a:avLst/>
-          </a:prstGeom>
-        </p:spPr>
-      </p:pic>
-      <p:sp>
-        <p:nvSpPr>
-          <p:cNvPr id="4" name="CaixaDeTexto 3">
-            <a:extLst>
-              <a:ext uri="{FF2B5EF4-FFF2-40B4-BE49-F238E27FC236}">
-                <a16:creationId xmlns:a16="http://schemas.microsoft.com/office/drawing/2014/main" id="{7CC8EC65-FBA8-A4F1-283D-3A1379045304}"/>
-              </a:ext>
-            </a:extLst>
-          </p:cNvPr>
-          <p:cNvSpPr txBox="1"/>
-          <p:nvPr/>
-        </p:nvSpPr>
-        <p:spPr>
-          <a:xfrm>
-            <a:off x="2827302" y="5012432"/>
-            <a:ext cx="2715423" cy="369332"/>
-          </a:xfrm>
-          <a:prstGeom prst="rect">
-            <a:avLst/>
-          </a:prstGeom>
-          <a:noFill/>
-        </p:spPr>
-        <p:txBody>
-          <a:bodyPr wrap="none" rtlCol="0">
-            <a:spAutoFit/>
-          </a:bodyPr>
-          <a:lstStyle/>
-          <a:p>
-            <a:r>
-              <a:rPr lang="pt-BR" dirty="0" err="1"/>
-              <a:t>Hello</a:t>
-            </a:r>
-            <a:r>
-              <a:rPr lang="pt-BR" dirty="0"/>
-              <a:t> World – Linguagem C</a:t>
-            </a:r>
-          </a:p>
-        </p:txBody>
-      </p:sp>
-      <p:sp>
-        <p:nvSpPr>
-          <p:cNvPr id="7" name="CaixaDeTexto 6">
-            <a:extLst>
-              <a:ext uri="{FF2B5EF4-FFF2-40B4-BE49-F238E27FC236}">
-                <a16:creationId xmlns:a16="http://schemas.microsoft.com/office/drawing/2014/main" id="{D10F9228-07B1-731A-9990-D3A20EC7A3C4}"/>
-              </a:ext>
-            </a:extLst>
-          </p:cNvPr>
-          <p:cNvSpPr txBox="1"/>
-          <p:nvPr/>
-        </p:nvSpPr>
-        <p:spPr>
-          <a:xfrm>
-            <a:off x="8392029" y="3731768"/>
-            <a:ext cx="2941767" cy="369332"/>
-          </a:xfrm>
-          <a:prstGeom prst="rect">
-            <a:avLst/>
-          </a:prstGeom>
-          <a:noFill/>
-        </p:spPr>
-        <p:txBody>
-          <a:bodyPr wrap="none" rtlCol="0">
-            <a:spAutoFit/>
-          </a:bodyPr>
-          <a:lstStyle/>
-          <a:p>
-            <a:r>
-              <a:rPr lang="pt-BR" dirty="0" err="1"/>
-              <a:t>Hello</a:t>
-            </a:r>
-            <a:r>
-              <a:rPr lang="pt-BR" dirty="0"/>
-              <a:t> World – Assembly MIPS</a:t>
-            </a:r>
-          </a:p>
-        </p:txBody>
-      </p:sp>
-    </p:spTree>
-    <p:extLst>
-      <p:ext uri="{BB962C8B-B14F-4D97-AF65-F5344CB8AC3E}">
-        <p14:creationId xmlns:p14="http://schemas.microsoft.com/office/powerpoint/2010/main" val="3188463983"/>
-      </p:ext>
-    </p:extLst>
-  </p:cSld>
-  <p:clrMapOvr>
-    <a:masterClrMapping/>
-  </p:clrMapOvr>
-</p:sld>
-</file>
-
-<file path=ppt/slides/slide12.xml><?xml version="1.0" encoding="utf-8"?>
-<p:sld xmlns:a="http://schemas.openxmlformats.org/drawingml/2006/main" xmlns:r="http://schemas.openxmlformats.org/officeDocument/2006/relationships" xmlns:p="http://schemas.openxmlformats.org/presentationml/2006/main">
-  <p:cSld>
-    <p:spTree>
-      <p:nvGrpSpPr>
-        <p:cNvPr id="1" name="">
-          <a:extLst>
-            <a:ext uri="{FF2B5EF4-FFF2-40B4-BE49-F238E27FC236}">
-              <a16:creationId xmlns:a16="http://schemas.microsoft.com/office/drawing/2014/main" id="{F161A393-562A-D38D-3A66-DFE4E0368F34}"/>
-            </a:ext>
-          </a:extLst>
-        </p:cNvPr>
-        <p:cNvGrpSpPr/>
-        <p:nvPr/>
-      </p:nvGrpSpPr>
-      <p:grpSpPr>
-        <a:xfrm>
-          <a:off x="0" y="0"/>
-          <a:ext cx="0" cy="0"/>
-          <a:chOff x="0" y="0"/>
-          <a:chExt cx="0" cy="0"/>
-        </a:xfrm>
-      </p:grpSpPr>
-      <p:sp>
-        <p:nvSpPr>
-          <p:cNvPr id="5" name="Retângulo 4">
-            <a:extLst>
-              <a:ext uri="{FF2B5EF4-FFF2-40B4-BE49-F238E27FC236}">
-                <a16:creationId xmlns:a16="http://schemas.microsoft.com/office/drawing/2014/main" id="{E8190D0D-CA3E-D15D-4D00-A1096CC5EE58}"/>
-              </a:ext>
-            </a:extLst>
-          </p:cNvPr>
-          <p:cNvSpPr/>
-          <p:nvPr/>
-        </p:nvSpPr>
-        <p:spPr>
-          <a:xfrm>
-            <a:off x="0" y="-2"/>
-            <a:ext cx="12192000" cy="1325563"/>
-          </a:xfrm>
-          <a:prstGeom prst="rect">
-            <a:avLst/>
-          </a:prstGeom>
-          <a:solidFill>
-            <a:srgbClr val="418AB3"/>
-          </a:solidFill>
-          <a:ln>
-            <a:solidFill>
-              <a:srgbClr val="418AB3"/>
-            </a:solidFill>
-          </a:ln>
-        </p:spPr>
-        <p:style>
-          <a:lnRef idx="2">
-            <a:schemeClr val="accent1">
-              <a:shade val="15000"/>
-            </a:schemeClr>
-          </a:lnRef>
-          <a:fillRef idx="1">
-            <a:schemeClr val="accent1"/>
-          </a:fillRef>
-          <a:effectRef idx="0">
-            <a:schemeClr val="accent1"/>
-          </a:effectRef>
-          <a:fontRef idx="minor">
-            <a:schemeClr val="lt1"/>
-          </a:fontRef>
-        </p:style>
-        <p:txBody>
-          <a:bodyPr rtlCol="0" anchor="ctr"/>
-          <a:lstStyle/>
-          <a:p>
-            <a:pPr algn="ctr"/>
-            <a:endParaRPr lang="pt-BR" dirty="0"/>
-          </a:p>
-        </p:txBody>
-      </p:sp>
-      <p:sp>
-        <p:nvSpPr>
-          <p:cNvPr id="2" name="Título 1">
-            <a:extLst>
-              <a:ext uri="{FF2B5EF4-FFF2-40B4-BE49-F238E27FC236}">
-                <a16:creationId xmlns:a16="http://schemas.microsoft.com/office/drawing/2014/main" id="{F2B6E970-839C-6C5D-119D-0592249D3AE9}"/>
-              </a:ext>
-            </a:extLst>
-          </p:cNvPr>
-          <p:cNvSpPr>
-            <a:spLocks noGrp="1"/>
-          </p:cNvSpPr>
-          <p:nvPr>
-            <p:ph type="title"/>
-          </p:nvPr>
-        </p:nvSpPr>
-        <p:spPr>
-          <a:xfrm>
-            <a:off x="0" y="-1"/>
-            <a:ext cx="12192000" cy="1325563"/>
-          </a:xfrm>
-        </p:spPr>
-        <p:txBody>
-          <a:bodyPr/>
-          <a:lstStyle/>
-          <a:p>
-            <a:pPr algn="ctr"/>
-            <a:r>
-              <a:rPr lang="pt-BR" dirty="0">
-                <a:solidFill>
-                  <a:schemeClr val="bg1"/>
-                </a:solidFill>
-              </a:rPr>
-              <a:t>Compiladores X Interpretadores</a:t>
-            </a:r>
-          </a:p>
-        </p:txBody>
-      </p:sp>
-      <p:sp>
-        <p:nvSpPr>
-          <p:cNvPr id="12" name="AutoShape 6" descr="Lógica Proposicional x Lógica de Argumento ⋆ Colaborae">
-            <a:extLst>
-              <a:ext uri="{FF2B5EF4-FFF2-40B4-BE49-F238E27FC236}">
-                <a16:creationId xmlns:a16="http://schemas.microsoft.com/office/drawing/2014/main" id="{622A0E1D-F25B-D357-14BD-AC24AF147287}"/>
-              </a:ext>
-            </a:extLst>
-          </p:cNvPr>
-          <p:cNvSpPr>
-            <a:spLocks noChangeAspect="1" noChangeArrowheads="1"/>
-          </p:cNvSpPr>
-          <p:nvPr/>
-        </p:nvSpPr>
-        <p:spPr bwMode="auto">
-          <a:xfrm>
-            <a:off x="5943600" y="-1707776"/>
-            <a:ext cx="5289176" cy="5289176"/>
-          </a:xfrm>
-          <a:prstGeom prst="rect">
-            <a:avLst/>
-          </a:prstGeom>
-          <a:noFill/>
-          <a:extLst>
-            <a:ext uri="{909E8E84-426E-40DD-AFC4-6F175D3DCCD1}">
-              <a14:hiddenFill xmlns:a14="http://schemas.microsoft.com/office/drawing/2010/main">
-                <a:solidFill>
-                  <a:srgbClr val="FFFFFF"/>
-                </a:solidFill>
-              </a14:hiddenFill>
-            </a:ext>
-          </a:extLst>
-        </p:spPr>
-        <p:txBody>
-          <a:bodyPr vert="horz" wrap="square" lIns="91440" tIns="45720" rIns="91440" bIns="45720" numCol="1" anchor="t" anchorCtr="0" compatLnSpc="1">
-            <a:prstTxWarp prst="textNoShape">
-              <a:avLst/>
-            </a:prstTxWarp>
-          </a:bodyPr>
-          <a:lstStyle/>
-          <a:p>
-            <a:endParaRPr lang="pt-BR"/>
-          </a:p>
-        </p:txBody>
-      </p:sp>
-      <p:sp>
-        <p:nvSpPr>
-          <p:cNvPr id="6" name="Espaço Reservado para Conteúdo 5">
-            <a:extLst>
-              <a:ext uri="{FF2B5EF4-FFF2-40B4-BE49-F238E27FC236}">
-                <a16:creationId xmlns:a16="http://schemas.microsoft.com/office/drawing/2014/main" id="{C49D0839-B4EA-C211-5150-2BC91CB530D1}"/>
-              </a:ext>
-            </a:extLst>
-          </p:cNvPr>
-          <p:cNvSpPr>
-            <a:spLocks noGrp="1"/>
-          </p:cNvSpPr>
-          <p:nvPr>
-            <p:ph idx="1"/>
-          </p:nvPr>
-        </p:nvSpPr>
-        <p:spPr>
-          <a:xfrm>
-            <a:off x="302474" y="1640492"/>
-            <a:ext cx="8585494" cy="4711540"/>
-          </a:xfrm>
-        </p:spPr>
-        <p:txBody>
-          <a:bodyPr>
-            <a:normAutofit/>
-          </a:bodyPr>
-          <a:lstStyle/>
-          <a:p>
-            <a:r>
-              <a:rPr lang="pt-BR" sz="2400" b="1" dirty="0"/>
-              <a:t>Compilador </a:t>
-            </a:r>
-          </a:p>
-          <a:p>
-            <a:pPr lvl="1"/>
-            <a:endParaRPr lang="pt-BR" sz="2000" dirty="0"/>
-          </a:p>
-          <a:p>
-            <a:pPr lvl="1"/>
-            <a:r>
-              <a:rPr lang="pt-BR" sz="2200" dirty="0"/>
-              <a:t>traduz todo o código-fonte para linguagem de máquina antes da execução.</a:t>
-            </a:r>
-          </a:p>
-          <a:p>
-            <a:pPr lvl="1"/>
-            <a:endParaRPr lang="pt-BR" sz="2200" dirty="0"/>
-          </a:p>
-          <a:p>
-            <a:pPr lvl="1"/>
-            <a:r>
-              <a:rPr lang="pt-BR" sz="2200" dirty="0"/>
-              <a:t>O resultado da compilação é um arquivo executável independente. (</a:t>
-            </a:r>
-            <a:r>
-              <a:rPr lang="pt-BR" sz="2000" dirty="0"/>
-              <a:t>Dispensa a necessidade do compilador original ou do código-fonte.</a:t>
-            </a:r>
-            <a:r>
-              <a:rPr lang="pt-BR" sz="2200" dirty="0"/>
-              <a:t>)</a:t>
-            </a:r>
-          </a:p>
-          <a:p>
-            <a:pPr marL="457200" lvl="1" indent="0">
-              <a:buNone/>
-            </a:pPr>
-            <a:endParaRPr lang="pt-BR" sz="2200" dirty="0"/>
-          </a:p>
-          <a:p>
-            <a:pPr lvl="1"/>
-            <a:r>
-              <a:rPr lang="pt-BR" sz="2200" dirty="0"/>
-              <a:t>A tradução prévia da compilação permite uma execução mais otimizada, mas a compilação em si pode ser demorado.</a:t>
-            </a:r>
-          </a:p>
-          <a:p>
-            <a:pPr lvl="1"/>
-            <a:endParaRPr lang="pt-BR" sz="2200" dirty="0"/>
-          </a:p>
-          <a:p>
-            <a:pPr lvl="1"/>
-            <a:r>
-              <a:rPr lang="pt-BR" sz="2200" dirty="0"/>
-              <a:t>Exemplo: C, C++, Swift, Delphi</a:t>
-            </a:r>
-          </a:p>
-          <a:p>
-            <a:endParaRPr lang="pt-BR" sz="2400" dirty="0"/>
-          </a:p>
-          <a:p>
-            <a:endParaRPr lang="pt-BR" sz="2400" dirty="0"/>
-          </a:p>
-        </p:txBody>
-      </p:sp>
-      <p:pic>
-        <p:nvPicPr>
-          <p:cNvPr id="4" name="Imagem 3">
-            <a:extLst>
-              <a:ext uri="{FF2B5EF4-FFF2-40B4-BE49-F238E27FC236}">
-                <a16:creationId xmlns:a16="http://schemas.microsoft.com/office/drawing/2014/main" id="{C6D5AA5D-DDBE-45EA-302E-9A838F852781}"/>
-              </a:ext>
-            </a:extLst>
-          </p:cNvPr>
-          <p:cNvPicPr>
-            <a:picLocks noChangeAspect="1"/>
-          </p:cNvPicPr>
-          <p:nvPr/>
-        </p:nvPicPr>
-        <p:blipFill>
-          <a:blip r:embed="rId3"/>
-          <a:stretch>
-            <a:fillRect/>
-          </a:stretch>
-        </p:blipFill>
-        <p:spPr>
-          <a:xfrm>
-            <a:off x="9702375" y="1468337"/>
-            <a:ext cx="1530401" cy="5217508"/>
-          </a:xfrm>
-          <a:prstGeom prst="rect">
-            <a:avLst/>
-          </a:prstGeom>
-        </p:spPr>
-      </p:pic>
-    </p:spTree>
-    <p:extLst>
-      <p:ext uri="{BB962C8B-B14F-4D97-AF65-F5344CB8AC3E}">
-        <p14:creationId xmlns:p14="http://schemas.microsoft.com/office/powerpoint/2010/main" val="3875185796"/>
-      </p:ext>
-    </p:extLst>
-  </p:cSld>
-  <p:clrMapOvr>
-    <a:masterClrMapping/>
-  </p:clrMapOvr>
-</p:sld>
-</file>
-
-<file path=ppt/slides/slide13.xml><?xml version="1.0" encoding="utf-8"?>
-<p:sld xmlns:a="http://schemas.openxmlformats.org/drawingml/2006/main" xmlns:r="http://schemas.openxmlformats.org/officeDocument/2006/relationships" xmlns:p="http://schemas.openxmlformats.org/presentationml/2006/main">
-  <p:cSld>
-    <p:spTree>
-      <p:nvGrpSpPr>
-        <p:cNvPr id="1" name="">
-          <a:extLst>
-            <a:ext uri="{FF2B5EF4-FFF2-40B4-BE49-F238E27FC236}">
-              <a16:creationId xmlns:a16="http://schemas.microsoft.com/office/drawing/2014/main" id="{7CBC98AB-9FE9-6F23-E8DD-5918288BBAA1}"/>
-            </a:ext>
-          </a:extLst>
-        </p:cNvPr>
-        <p:cNvGrpSpPr/>
-        <p:nvPr/>
-      </p:nvGrpSpPr>
-      <p:grpSpPr>
-        <a:xfrm>
-          <a:off x="0" y="0"/>
-          <a:ext cx="0" cy="0"/>
-          <a:chOff x="0" y="0"/>
-          <a:chExt cx="0" cy="0"/>
-        </a:xfrm>
-      </p:grpSpPr>
-      <p:sp>
-        <p:nvSpPr>
-          <p:cNvPr id="5" name="Retângulo 4">
-            <a:extLst>
-              <a:ext uri="{FF2B5EF4-FFF2-40B4-BE49-F238E27FC236}">
-                <a16:creationId xmlns:a16="http://schemas.microsoft.com/office/drawing/2014/main" id="{DC60625C-76BF-117E-9D77-44541679F3C7}"/>
-              </a:ext>
-            </a:extLst>
-          </p:cNvPr>
-          <p:cNvSpPr/>
-          <p:nvPr/>
-        </p:nvSpPr>
-        <p:spPr>
-          <a:xfrm>
-            <a:off x="0" y="-2"/>
-            <a:ext cx="12192000" cy="1325563"/>
-          </a:xfrm>
-          <a:prstGeom prst="rect">
-            <a:avLst/>
-          </a:prstGeom>
-          <a:solidFill>
-            <a:srgbClr val="418AB3"/>
-          </a:solidFill>
-          <a:ln>
-            <a:solidFill>
-              <a:srgbClr val="418AB3"/>
-            </a:solidFill>
-          </a:ln>
-        </p:spPr>
-        <p:style>
-          <a:lnRef idx="2">
-            <a:schemeClr val="accent1">
-              <a:shade val="15000"/>
-            </a:schemeClr>
-          </a:lnRef>
-          <a:fillRef idx="1">
-            <a:schemeClr val="accent1"/>
-          </a:fillRef>
-          <a:effectRef idx="0">
-            <a:schemeClr val="accent1"/>
-          </a:effectRef>
-          <a:fontRef idx="minor">
-            <a:schemeClr val="lt1"/>
-          </a:fontRef>
-        </p:style>
-        <p:txBody>
-          <a:bodyPr rtlCol="0" anchor="ctr"/>
-          <a:lstStyle/>
-          <a:p>
-            <a:pPr algn="ctr"/>
-            <a:endParaRPr lang="pt-BR" dirty="0"/>
-          </a:p>
-        </p:txBody>
-      </p:sp>
-      <p:sp>
-        <p:nvSpPr>
-          <p:cNvPr id="2" name="Título 1">
-            <a:extLst>
-              <a:ext uri="{FF2B5EF4-FFF2-40B4-BE49-F238E27FC236}">
-                <a16:creationId xmlns:a16="http://schemas.microsoft.com/office/drawing/2014/main" id="{7E6E38D8-A826-6E2A-88B7-58CE6D56E14C}"/>
-              </a:ext>
-            </a:extLst>
-          </p:cNvPr>
-          <p:cNvSpPr>
-            <a:spLocks noGrp="1"/>
-          </p:cNvSpPr>
-          <p:nvPr>
-            <p:ph type="title"/>
-          </p:nvPr>
-        </p:nvSpPr>
-        <p:spPr>
-          <a:xfrm>
-            <a:off x="0" y="-1"/>
-            <a:ext cx="12192000" cy="1325563"/>
-          </a:xfrm>
-        </p:spPr>
-        <p:txBody>
-          <a:bodyPr/>
-          <a:lstStyle/>
-          <a:p>
-            <a:pPr algn="ctr"/>
-            <a:r>
-              <a:rPr lang="pt-BR" dirty="0">
-                <a:solidFill>
-                  <a:schemeClr val="bg1"/>
-                </a:solidFill>
-              </a:rPr>
-              <a:t>Compiladores X Interpretadores</a:t>
-            </a:r>
-          </a:p>
-        </p:txBody>
-      </p:sp>
-      <p:sp>
-        <p:nvSpPr>
-          <p:cNvPr id="12" name="AutoShape 6" descr="Lógica Proposicional x Lógica de Argumento ⋆ Colaborae">
-            <a:extLst>
-              <a:ext uri="{FF2B5EF4-FFF2-40B4-BE49-F238E27FC236}">
-                <a16:creationId xmlns:a16="http://schemas.microsoft.com/office/drawing/2014/main" id="{971EC516-EE04-2521-BF07-71312E65BFA9}"/>
-              </a:ext>
-            </a:extLst>
-          </p:cNvPr>
-          <p:cNvSpPr>
-            <a:spLocks noChangeAspect="1" noChangeArrowheads="1"/>
-          </p:cNvSpPr>
-          <p:nvPr/>
-        </p:nvSpPr>
-        <p:spPr bwMode="auto">
-          <a:xfrm>
-            <a:off x="5943600" y="-1707776"/>
-            <a:ext cx="5289176" cy="5289176"/>
-          </a:xfrm>
-          <a:prstGeom prst="rect">
-            <a:avLst/>
-          </a:prstGeom>
-          <a:noFill/>
-          <a:extLst>
-            <a:ext uri="{909E8E84-426E-40DD-AFC4-6F175D3DCCD1}">
-              <a14:hiddenFill xmlns:a14="http://schemas.microsoft.com/office/drawing/2010/main">
-                <a:solidFill>
-                  <a:srgbClr val="FFFFFF"/>
-                </a:solidFill>
-              </a14:hiddenFill>
-            </a:ext>
-          </a:extLst>
-        </p:spPr>
-        <p:txBody>
-          <a:bodyPr vert="horz" wrap="square" lIns="91440" tIns="45720" rIns="91440" bIns="45720" numCol="1" anchor="t" anchorCtr="0" compatLnSpc="1">
-            <a:prstTxWarp prst="textNoShape">
-              <a:avLst/>
-            </a:prstTxWarp>
-          </a:bodyPr>
-          <a:lstStyle/>
-          <a:p>
-            <a:endParaRPr lang="pt-BR"/>
-          </a:p>
-        </p:txBody>
-      </p:sp>
-      <p:sp>
-        <p:nvSpPr>
-          <p:cNvPr id="6" name="Espaço Reservado para Conteúdo 5">
-            <a:extLst>
-              <a:ext uri="{FF2B5EF4-FFF2-40B4-BE49-F238E27FC236}">
-                <a16:creationId xmlns:a16="http://schemas.microsoft.com/office/drawing/2014/main" id="{F71189A5-4D8C-810B-1954-668AFE0BA0F3}"/>
-              </a:ext>
-            </a:extLst>
-          </p:cNvPr>
-          <p:cNvSpPr>
-            <a:spLocks noGrp="1"/>
-          </p:cNvSpPr>
-          <p:nvPr>
-            <p:ph idx="1"/>
-          </p:nvPr>
-        </p:nvSpPr>
-        <p:spPr>
-          <a:xfrm>
-            <a:off x="214488" y="1439002"/>
-            <a:ext cx="8017437" cy="5289176"/>
-          </a:xfrm>
-        </p:spPr>
-        <p:txBody>
-          <a:bodyPr>
-            <a:normAutofit/>
-          </a:bodyPr>
-          <a:lstStyle/>
-          <a:p>
-            <a:r>
-              <a:rPr lang="pt-BR" sz="2400" b="1" dirty="0"/>
-              <a:t>Interpretador</a:t>
-            </a:r>
-          </a:p>
-          <a:p>
-            <a:pPr lvl="1"/>
-            <a:endParaRPr lang="pt-BR" sz="2000" dirty="0"/>
-          </a:p>
-          <a:p>
-            <a:pPr lvl="1"/>
-            <a:r>
-              <a:rPr lang="pt-BR" sz="2200" dirty="0"/>
-              <a:t>Lê o código-fonte linha a linha e o executa imediatamente, utilizando a API do S.O para comunicar com o hardware</a:t>
-            </a:r>
-          </a:p>
-          <a:p>
-            <a:pPr marL="457200" lvl="1" indent="0">
-              <a:buNone/>
-            </a:pPr>
-            <a:endParaRPr lang="pt-BR" sz="2200" dirty="0"/>
-          </a:p>
-          <a:p>
-            <a:pPr lvl="1"/>
-            <a:r>
-              <a:rPr lang="pt-BR" sz="2200" dirty="0"/>
-              <a:t>Permite um desenvolvimento mais interativo e facilita o processo de detecção de erros.</a:t>
-            </a:r>
-          </a:p>
-          <a:p>
-            <a:pPr lvl="1"/>
-            <a:endParaRPr lang="pt-BR" sz="2200" dirty="0"/>
-          </a:p>
-          <a:p>
-            <a:pPr lvl="1"/>
-            <a:r>
-              <a:rPr lang="pt-BR" sz="2200" dirty="0"/>
-              <a:t>Apresenta maior portabilidade em sistemas operacionais (Requisitando apenas a instalação do interpretador)</a:t>
-            </a:r>
-          </a:p>
-          <a:p>
-            <a:pPr lvl="1"/>
-            <a:endParaRPr lang="pt-BR" sz="2200" dirty="0"/>
-          </a:p>
-          <a:p>
-            <a:pPr lvl="1"/>
-            <a:r>
-              <a:rPr lang="pt-BR" sz="2200" dirty="0"/>
-              <a:t>A tradução e execução simultânea (em tempo de execução) degrada o desempenho</a:t>
-            </a:r>
-          </a:p>
-          <a:p>
-            <a:pPr lvl="1"/>
-            <a:endParaRPr lang="pt-BR" sz="2200" dirty="0"/>
-          </a:p>
-          <a:p>
-            <a:pPr lvl="1"/>
-            <a:r>
-              <a:rPr lang="pt-BR" sz="2200" dirty="0"/>
-              <a:t>Exemplos: JS, Ruby, PHP</a:t>
-            </a:r>
-          </a:p>
-          <a:p>
-            <a:endParaRPr lang="pt-BR" sz="2400" dirty="0"/>
-          </a:p>
-          <a:p>
-            <a:endParaRPr lang="pt-BR" sz="2400" dirty="0"/>
-          </a:p>
-        </p:txBody>
-      </p:sp>
-      <p:pic>
-        <p:nvPicPr>
-          <p:cNvPr id="3" name="Imagem 2">
-            <a:extLst>
-              <a:ext uri="{FF2B5EF4-FFF2-40B4-BE49-F238E27FC236}">
-                <a16:creationId xmlns:a16="http://schemas.microsoft.com/office/drawing/2014/main" id="{109D98C0-138A-AB5B-2A74-6D120957C105}"/>
-              </a:ext>
-            </a:extLst>
-          </p:cNvPr>
-          <p:cNvPicPr>
-            <a:picLocks noChangeAspect="1"/>
-          </p:cNvPicPr>
-          <p:nvPr/>
-        </p:nvPicPr>
-        <p:blipFill>
-          <a:blip r:embed="rId3"/>
-          <a:srcRect l="3891" r="6959"/>
-          <a:stretch>
-            <a:fillRect/>
-          </a:stretch>
-        </p:blipFill>
-        <p:spPr>
-          <a:xfrm>
-            <a:off x="8319911" y="2626692"/>
-            <a:ext cx="3657601" cy="3029041"/>
-          </a:xfrm>
-          <a:prstGeom prst="rect">
-            <a:avLst/>
-          </a:prstGeom>
-        </p:spPr>
-      </p:pic>
-    </p:spTree>
-    <p:extLst>
-      <p:ext uri="{BB962C8B-B14F-4D97-AF65-F5344CB8AC3E}">
-        <p14:creationId xmlns:p14="http://schemas.microsoft.com/office/powerpoint/2010/main" val="3048739928"/>
-      </p:ext>
-    </p:extLst>
-  </p:cSld>
-  <p:clrMapOvr>
-    <a:masterClrMapping/>
-  </p:clrMapOvr>
-</p:sld>
-</file>
-
-<file path=ppt/slides/slide14.xml><?xml version="1.0" encoding="utf-8"?>
-<p:sld xmlns:a="http://schemas.openxmlformats.org/drawingml/2006/main" xmlns:r="http://schemas.openxmlformats.org/officeDocument/2006/relationships" xmlns:p="http://schemas.openxmlformats.org/presentationml/2006/main">
-  <p:cSld>
-    <p:spTree>
-      <p:nvGrpSpPr>
-        <p:cNvPr id="1" name="">
-          <a:extLst>
-            <a:ext uri="{FF2B5EF4-FFF2-40B4-BE49-F238E27FC236}">
-              <a16:creationId xmlns:a16="http://schemas.microsoft.com/office/drawing/2014/main" id="{063087AC-5D75-90DD-6E28-D5F1BDDF3059}"/>
-            </a:ext>
-          </a:extLst>
-        </p:cNvPr>
-        <p:cNvGrpSpPr/>
-        <p:nvPr/>
-      </p:nvGrpSpPr>
-      <p:grpSpPr>
-        <a:xfrm>
-          <a:off x="0" y="0"/>
-          <a:ext cx="0" cy="0"/>
-          <a:chOff x="0" y="0"/>
-          <a:chExt cx="0" cy="0"/>
-        </a:xfrm>
-      </p:grpSpPr>
-      <p:sp>
-        <p:nvSpPr>
-          <p:cNvPr id="5" name="Retângulo 4">
-            <a:extLst>
-              <a:ext uri="{FF2B5EF4-FFF2-40B4-BE49-F238E27FC236}">
-                <a16:creationId xmlns:a16="http://schemas.microsoft.com/office/drawing/2014/main" id="{569B5857-8044-CD22-9F41-F40D6B63243F}"/>
-              </a:ext>
-            </a:extLst>
-          </p:cNvPr>
-          <p:cNvSpPr/>
-          <p:nvPr/>
-        </p:nvSpPr>
-        <p:spPr>
-          <a:xfrm>
-            <a:off x="0" y="-2"/>
-            <a:ext cx="12192000" cy="1325563"/>
-          </a:xfrm>
-          <a:prstGeom prst="rect">
-            <a:avLst/>
-          </a:prstGeom>
-          <a:solidFill>
-            <a:srgbClr val="418AB3"/>
-          </a:solidFill>
-          <a:ln>
-            <a:solidFill>
-              <a:srgbClr val="418AB3"/>
-            </a:solidFill>
-          </a:ln>
-        </p:spPr>
-        <p:style>
-          <a:lnRef idx="2">
-            <a:schemeClr val="accent1">
-              <a:shade val="15000"/>
-            </a:schemeClr>
-          </a:lnRef>
-          <a:fillRef idx="1">
-            <a:schemeClr val="accent1"/>
-          </a:fillRef>
-          <a:effectRef idx="0">
-            <a:schemeClr val="accent1"/>
-          </a:effectRef>
-          <a:fontRef idx="minor">
-            <a:schemeClr val="lt1"/>
-          </a:fontRef>
-        </p:style>
-        <p:txBody>
-          <a:bodyPr rtlCol="0" anchor="ctr"/>
-          <a:lstStyle/>
-          <a:p>
-            <a:pPr algn="ctr"/>
-            <a:endParaRPr lang="pt-BR" dirty="0"/>
-          </a:p>
-        </p:txBody>
-      </p:sp>
-      <p:sp>
-        <p:nvSpPr>
-          <p:cNvPr id="2" name="Título 1">
-            <a:extLst>
-              <a:ext uri="{FF2B5EF4-FFF2-40B4-BE49-F238E27FC236}">
                 <a16:creationId xmlns:a16="http://schemas.microsoft.com/office/drawing/2014/main" id="{6E3EE325-983A-9EEC-F3DD-F8CDD5397217}"/>
               </a:ext>
             </a:extLst>
@@ -17757,7 +16002,7 @@
 </p:sld>
 </file>
 
-<file path=ppt/slides/slide15.xml><?xml version="1.0" encoding="utf-8"?>
+<file path=ppt/slides/slide11.xml><?xml version="1.0" encoding="utf-8"?>
 <p:sld xmlns:a="http://schemas.openxmlformats.org/drawingml/2006/main" xmlns:r="http://schemas.openxmlformats.org/officeDocument/2006/relationships" xmlns:p="http://schemas.openxmlformats.org/presentationml/2006/main">
   <p:cSld>
     <p:spTree>
@@ -17921,7 +16166,7 @@
 </p:sld>
 </file>
 
-<file path=ppt/slides/slide16.xml><?xml version="1.0" encoding="utf-8"?>
+<file path=ppt/slides/slide12.xml><?xml version="1.0" encoding="utf-8"?>
 <p:sld xmlns:a="http://schemas.openxmlformats.org/drawingml/2006/main" xmlns:r="http://schemas.openxmlformats.org/officeDocument/2006/relationships" xmlns:p="http://schemas.openxmlformats.org/presentationml/2006/main">
   <p:cSld>
     <p:spTree>
@@ -18296,7 +16541,7 @@
 </p:sld>
 </file>
 
-<file path=ppt/slides/slide17.xml><?xml version="1.0" encoding="utf-8"?>
+<file path=ppt/slides/slide13.xml><?xml version="1.0" encoding="utf-8"?>
 <p:sld xmlns:a="http://schemas.openxmlformats.org/drawingml/2006/main" xmlns:r="http://schemas.openxmlformats.org/officeDocument/2006/relationships" xmlns:p="http://schemas.openxmlformats.org/presentationml/2006/main">
   <p:cSld>
     <p:spTree>
@@ -18593,7 +16838,7 @@
 </p:sld>
 </file>
 
-<file path=ppt/slides/slide18.xml><?xml version="1.0" encoding="utf-8"?>
+<file path=ppt/slides/slide14.xml><?xml version="1.0" encoding="utf-8"?>
 <p:sld xmlns:a="http://schemas.openxmlformats.org/drawingml/2006/main" xmlns:r="http://schemas.openxmlformats.org/officeDocument/2006/relationships" xmlns:p="http://schemas.openxmlformats.org/presentationml/2006/main">
   <p:cSld>
     <p:spTree>
@@ -19034,7 +17279,7 @@
 </p:sld>
 </file>
 
-<file path=ppt/slides/slide19.xml><?xml version="1.0" encoding="utf-8"?>
+<file path=ppt/slides/slide15.xml><?xml version="1.0" encoding="utf-8"?>
 <p:sld xmlns:a="http://schemas.openxmlformats.org/drawingml/2006/main" xmlns:r="http://schemas.openxmlformats.org/officeDocument/2006/relationships" xmlns:p="http://schemas.openxmlformats.org/presentationml/2006/main">
   <p:cSld>
     <p:spTree>
@@ -19513,240 +17758,7 @@
 </p:sld>
 </file>
 
-<file path=ppt/slides/slide2.xml><?xml version="1.0" encoding="utf-8"?>
-<p:sld xmlns:a="http://schemas.openxmlformats.org/drawingml/2006/main" xmlns:r="http://schemas.openxmlformats.org/officeDocument/2006/relationships" xmlns:p="http://schemas.openxmlformats.org/presentationml/2006/main">
-  <p:cSld>
-    <p:spTree>
-      <p:nvGrpSpPr>
-        <p:cNvPr id="1" name="">
-          <a:extLst>
-            <a:ext uri="{FF2B5EF4-FFF2-40B4-BE49-F238E27FC236}">
-              <a16:creationId xmlns:a16="http://schemas.microsoft.com/office/drawing/2014/main" id="{6A5B1F24-3A37-BE5E-87E6-8DFD228F40CA}"/>
-            </a:ext>
-          </a:extLst>
-        </p:cNvPr>
-        <p:cNvGrpSpPr/>
-        <p:nvPr/>
-      </p:nvGrpSpPr>
-      <p:grpSpPr>
-        <a:xfrm>
-          <a:off x="0" y="0"/>
-          <a:ext cx="0" cy="0"/>
-          <a:chOff x="0" y="0"/>
-          <a:chExt cx="0" cy="0"/>
-        </a:xfrm>
-      </p:grpSpPr>
-      <p:sp>
-        <p:nvSpPr>
-          <p:cNvPr id="5" name="Retângulo 4">
-            <a:extLst>
-              <a:ext uri="{FF2B5EF4-FFF2-40B4-BE49-F238E27FC236}">
-                <a16:creationId xmlns:a16="http://schemas.microsoft.com/office/drawing/2014/main" id="{20E9C820-C403-81DA-4458-0F826AB9D6E5}"/>
-              </a:ext>
-            </a:extLst>
-          </p:cNvPr>
-          <p:cNvSpPr/>
-          <p:nvPr/>
-        </p:nvSpPr>
-        <p:spPr>
-          <a:xfrm>
-            <a:off x="0" y="-2"/>
-            <a:ext cx="12192000" cy="1325563"/>
-          </a:xfrm>
-          <a:prstGeom prst="rect">
-            <a:avLst/>
-          </a:prstGeom>
-          <a:solidFill>
-            <a:srgbClr val="418AB3"/>
-          </a:solidFill>
-          <a:ln>
-            <a:solidFill>
-              <a:srgbClr val="418AB3"/>
-            </a:solidFill>
-          </a:ln>
-        </p:spPr>
-        <p:style>
-          <a:lnRef idx="2">
-            <a:schemeClr val="accent1">
-              <a:shade val="15000"/>
-            </a:schemeClr>
-          </a:lnRef>
-          <a:fillRef idx="1">
-            <a:schemeClr val="accent1"/>
-          </a:fillRef>
-          <a:effectRef idx="0">
-            <a:schemeClr val="accent1"/>
-          </a:effectRef>
-          <a:fontRef idx="minor">
-            <a:schemeClr val="lt1"/>
-          </a:fontRef>
-        </p:style>
-        <p:txBody>
-          <a:bodyPr rtlCol="0" anchor="ctr"/>
-          <a:lstStyle/>
-          <a:p>
-            <a:pPr algn="ctr"/>
-            <a:endParaRPr lang="pt-BR" dirty="0"/>
-          </a:p>
-        </p:txBody>
-      </p:sp>
-      <p:sp>
-        <p:nvSpPr>
-          <p:cNvPr id="2" name="Título 1">
-            <a:extLst>
-              <a:ext uri="{FF2B5EF4-FFF2-40B4-BE49-F238E27FC236}">
-                <a16:creationId xmlns:a16="http://schemas.microsoft.com/office/drawing/2014/main" id="{37DBEF96-5BB9-10F9-BA9C-FDE0A19F6FBD}"/>
-              </a:ext>
-            </a:extLst>
-          </p:cNvPr>
-          <p:cNvSpPr>
-            <a:spLocks noGrp="1"/>
-          </p:cNvSpPr>
-          <p:nvPr>
-            <p:ph type="title"/>
-          </p:nvPr>
-        </p:nvSpPr>
-        <p:spPr>
-          <a:xfrm>
-            <a:off x="0" y="-1"/>
-            <a:ext cx="12192000" cy="1325563"/>
-          </a:xfrm>
-        </p:spPr>
-        <p:txBody>
-          <a:bodyPr/>
-          <a:lstStyle/>
-          <a:p>
-            <a:pPr algn="ctr"/>
-            <a:r>
-              <a:rPr lang="pt-BR" dirty="0">
-                <a:solidFill>
-                  <a:schemeClr val="bg1"/>
-                </a:solidFill>
-              </a:rPr>
-              <a:t>Sistema de avaliação</a:t>
-            </a:r>
-          </a:p>
-        </p:txBody>
-      </p:sp>
-      <p:sp>
-        <p:nvSpPr>
-          <p:cNvPr id="12" name="AutoShape 6" descr="Lógica Proposicional x Lógica de Argumento ⋆ Colaborae">
-            <a:extLst>
-              <a:ext uri="{FF2B5EF4-FFF2-40B4-BE49-F238E27FC236}">
-                <a16:creationId xmlns:a16="http://schemas.microsoft.com/office/drawing/2014/main" id="{B6D3F682-1904-6B9C-FB31-DC217F584E48}"/>
-              </a:ext>
-            </a:extLst>
-          </p:cNvPr>
-          <p:cNvSpPr>
-            <a:spLocks noChangeAspect="1" noChangeArrowheads="1"/>
-          </p:cNvSpPr>
-          <p:nvPr/>
-        </p:nvSpPr>
-        <p:spPr bwMode="auto">
-          <a:xfrm>
-            <a:off x="5943600" y="-1707776"/>
-            <a:ext cx="5289176" cy="5289176"/>
-          </a:xfrm>
-          <a:prstGeom prst="rect">
-            <a:avLst/>
-          </a:prstGeom>
-          <a:noFill/>
-          <a:extLst>
-            <a:ext uri="{909E8E84-426E-40DD-AFC4-6F175D3DCCD1}">
-              <a14:hiddenFill xmlns:a14="http://schemas.microsoft.com/office/drawing/2010/main">
-                <a:solidFill>
-                  <a:srgbClr val="FFFFFF"/>
-                </a:solidFill>
-              </a14:hiddenFill>
-            </a:ext>
-          </a:extLst>
-        </p:spPr>
-        <p:txBody>
-          <a:bodyPr vert="horz" wrap="square" lIns="91440" tIns="45720" rIns="91440" bIns="45720" numCol="1" anchor="t" anchorCtr="0" compatLnSpc="1">
-            <a:prstTxWarp prst="textNoShape">
-              <a:avLst/>
-            </a:prstTxWarp>
-          </a:bodyPr>
-          <a:lstStyle/>
-          <a:p>
-            <a:endParaRPr lang="pt-BR"/>
-          </a:p>
-        </p:txBody>
-      </p:sp>
-      <p:sp>
-        <p:nvSpPr>
-          <p:cNvPr id="6" name="Espaço Reservado para Conteúdo 5">
-            <a:extLst>
-              <a:ext uri="{FF2B5EF4-FFF2-40B4-BE49-F238E27FC236}">
-                <a16:creationId xmlns:a16="http://schemas.microsoft.com/office/drawing/2014/main" id="{56728EE4-B88D-A8C9-80CD-CA18D0C7F3D0}"/>
-              </a:ext>
-            </a:extLst>
-          </p:cNvPr>
-          <p:cNvSpPr>
-            <a:spLocks noGrp="1"/>
-          </p:cNvSpPr>
-          <p:nvPr>
-            <p:ph idx="1"/>
-          </p:nvPr>
-        </p:nvSpPr>
-        <p:spPr>
-          <a:xfrm>
-            <a:off x="1760860" y="2245646"/>
-            <a:ext cx="8670280" cy="3657600"/>
-          </a:xfrm>
-        </p:spPr>
-        <p:txBody>
-          <a:bodyPr/>
-          <a:lstStyle/>
-          <a:p>
-            <a:r>
-              <a:rPr lang="pt-BR" sz="2400" dirty="0"/>
-              <a:t>Pontuação semestral total do componente curricular, no valor de 100 (cem pontos).</a:t>
-            </a:r>
-          </a:p>
-          <a:p>
-            <a:endParaRPr lang="pt-BR" sz="2400" dirty="0"/>
-          </a:p>
-          <a:p>
-            <a:r>
-              <a:rPr lang="pt-BR" sz="2400" dirty="0"/>
-              <a:t>Pontuação necessária para aprovação: 60% (sessenta por cento) da pontuação semestral do componente.</a:t>
-            </a:r>
-          </a:p>
-          <a:p>
-            <a:endParaRPr lang="pt-BR" sz="2400" dirty="0"/>
-          </a:p>
-          <a:p>
-            <a:r>
-              <a:rPr lang="pt-BR" sz="2400" dirty="0"/>
-              <a:t>Frequência necessária para aprovação: 75% (setenta e cinco por cento) no componente curricular.</a:t>
-            </a:r>
-          </a:p>
-          <a:p>
-            <a:endParaRPr lang="pt-BR" sz="2400" dirty="0"/>
-          </a:p>
-          <a:p>
-            <a:endParaRPr lang="pt-BR" sz="2400" dirty="0"/>
-          </a:p>
-          <a:p>
-            <a:endParaRPr lang="pt-BR" dirty="0"/>
-          </a:p>
-        </p:txBody>
-      </p:sp>
-    </p:spTree>
-    <p:extLst>
-      <p:ext uri="{BB962C8B-B14F-4D97-AF65-F5344CB8AC3E}">
-        <p14:creationId xmlns:p14="http://schemas.microsoft.com/office/powerpoint/2010/main" val="3395529234"/>
-      </p:ext>
-    </p:extLst>
-  </p:cSld>
-  <p:clrMapOvr>
-    <a:masterClrMapping/>
-  </p:clrMapOvr>
-</p:sld>
-</file>
-
-<file path=ppt/slides/slide20.xml><?xml version="1.0" encoding="utf-8"?>
+<file path=ppt/slides/slide16.xml><?xml version="1.0" encoding="utf-8"?>
 <p:sld xmlns:a="http://schemas.openxmlformats.org/drawingml/2006/main" xmlns:r="http://schemas.openxmlformats.org/officeDocument/2006/relationships" xmlns:p="http://schemas.openxmlformats.org/presentationml/2006/main">
   <p:cSld>
     <p:spTree>
@@ -20273,7 +18285,7 @@
 </p:sld>
 </file>
 
-<file path=ppt/slides/slide21.xml><?xml version="1.0" encoding="utf-8"?>
+<file path=ppt/slides/slide17.xml><?xml version="1.0" encoding="utf-8"?>
 <p:sld xmlns:a="http://schemas.openxmlformats.org/drawingml/2006/main" xmlns:r="http://schemas.openxmlformats.org/officeDocument/2006/relationships" xmlns:p="http://schemas.openxmlformats.org/presentationml/2006/main">
   <p:cSld>
     <p:spTree>
@@ -20716,7 +18728,7 @@
 </p:sld>
 </file>
 
-<file path=ppt/slides/slide22.xml><?xml version="1.0" encoding="utf-8"?>
+<file path=ppt/slides/slide18.xml><?xml version="1.0" encoding="utf-8"?>
 <p:sld xmlns:a="http://schemas.openxmlformats.org/drawingml/2006/main" xmlns:r="http://schemas.openxmlformats.org/officeDocument/2006/relationships" xmlns:p="http://schemas.openxmlformats.org/presentationml/2006/main">
   <p:cSld>
     <p:spTree>
@@ -21181,7 +19193,7 @@
 </p:sld>
 </file>
 
-<file path=ppt/slides/slide23.xml><?xml version="1.0" encoding="utf-8"?>
+<file path=ppt/slides/slide19.xml><?xml version="1.0" encoding="utf-8"?>
 <p:sld xmlns:a="http://schemas.openxmlformats.org/drawingml/2006/main" xmlns:r="http://schemas.openxmlformats.org/officeDocument/2006/relationships" xmlns:p="http://schemas.openxmlformats.org/presentationml/2006/main">
   <p:cSld>
     <p:spTree>
@@ -21490,7 +19502,278 @@
 </p:sld>
 </file>
 
-<file path=ppt/slides/slide24.xml><?xml version="1.0" encoding="utf-8"?>
+<file path=ppt/slides/slide2.xml><?xml version="1.0" encoding="utf-8"?>
+<p:sld xmlns:a="http://schemas.openxmlformats.org/drawingml/2006/main" xmlns:r="http://schemas.openxmlformats.org/officeDocument/2006/relationships" xmlns:p="http://schemas.openxmlformats.org/presentationml/2006/main">
+  <p:cSld>
+    <p:spTree>
+      <p:nvGrpSpPr>
+        <p:cNvPr id="1" name=""/>
+        <p:cNvGrpSpPr/>
+        <p:nvPr/>
+      </p:nvGrpSpPr>
+      <p:grpSpPr>
+        <a:xfrm>
+          <a:off x="0" y="0"/>
+          <a:ext cx="0" cy="0"/>
+          <a:chOff x="0" y="0"/>
+          <a:chExt cx="0" cy="0"/>
+        </a:xfrm>
+      </p:grpSpPr>
+      <p:sp>
+        <p:nvSpPr>
+          <p:cNvPr id="5" name="Retângulo 4">
+            <a:extLst>
+              <a:ext uri="{FF2B5EF4-FFF2-40B4-BE49-F238E27FC236}">
+                <a16:creationId xmlns:a16="http://schemas.microsoft.com/office/drawing/2014/main" id="{10CD15DF-178C-8225-DC27-A997E1995551}"/>
+              </a:ext>
+            </a:extLst>
+          </p:cNvPr>
+          <p:cNvSpPr/>
+          <p:nvPr/>
+        </p:nvSpPr>
+        <p:spPr>
+          <a:xfrm>
+            <a:off x="0" y="-2"/>
+            <a:ext cx="12192000" cy="1325563"/>
+          </a:xfrm>
+          <a:prstGeom prst="rect">
+            <a:avLst/>
+          </a:prstGeom>
+          <a:solidFill>
+            <a:srgbClr val="418AB3"/>
+          </a:solidFill>
+          <a:ln>
+            <a:solidFill>
+              <a:srgbClr val="418AB3"/>
+            </a:solidFill>
+          </a:ln>
+        </p:spPr>
+        <p:style>
+          <a:lnRef idx="2">
+            <a:schemeClr val="accent1">
+              <a:shade val="15000"/>
+            </a:schemeClr>
+          </a:lnRef>
+          <a:fillRef idx="1">
+            <a:schemeClr val="accent1"/>
+          </a:fillRef>
+          <a:effectRef idx="0">
+            <a:schemeClr val="accent1"/>
+          </a:effectRef>
+          <a:fontRef idx="minor">
+            <a:schemeClr val="lt1"/>
+          </a:fontRef>
+        </p:style>
+        <p:txBody>
+          <a:bodyPr rtlCol="0" anchor="ctr"/>
+          <a:lstStyle/>
+          <a:p>
+            <a:pPr algn="ctr"/>
+            <a:endParaRPr lang="pt-BR" dirty="0"/>
+          </a:p>
+        </p:txBody>
+      </p:sp>
+      <p:sp>
+        <p:nvSpPr>
+          <p:cNvPr id="2" name="Título 1">
+            <a:extLst>
+              <a:ext uri="{FF2B5EF4-FFF2-40B4-BE49-F238E27FC236}">
+                <a16:creationId xmlns:a16="http://schemas.microsoft.com/office/drawing/2014/main" id="{20CFDDE8-0849-DCD6-CFFE-909EF72466EA}"/>
+              </a:ext>
+            </a:extLst>
+          </p:cNvPr>
+          <p:cNvSpPr>
+            <a:spLocks noGrp="1"/>
+          </p:cNvSpPr>
+          <p:nvPr>
+            <p:ph type="title"/>
+          </p:nvPr>
+        </p:nvSpPr>
+        <p:spPr>
+          <a:xfrm>
+            <a:off x="0" y="-1"/>
+            <a:ext cx="12192000" cy="1325563"/>
+          </a:xfrm>
+        </p:spPr>
+        <p:txBody>
+          <a:bodyPr/>
+          <a:lstStyle/>
+          <a:p>
+            <a:pPr algn="ctr"/>
+            <a:r>
+              <a:rPr lang="pt-BR" dirty="0">
+                <a:solidFill>
+                  <a:schemeClr val="bg1"/>
+                </a:solidFill>
+              </a:rPr>
+              <a:t>Conceitos Introdutórios</a:t>
+            </a:r>
+          </a:p>
+        </p:txBody>
+      </p:sp>
+      <p:sp>
+        <p:nvSpPr>
+          <p:cNvPr id="12" name="AutoShape 6" descr="Lógica Proposicional x Lógica de Argumento ⋆ Colaborae">
+            <a:extLst>
+              <a:ext uri="{FF2B5EF4-FFF2-40B4-BE49-F238E27FC236}">
+                <a16:creationId xmlns:a16="http://schemas.microsoft.com/office/drawing/2014/main" id="{A38EF95E-E786-0234-E618-70938A65AA12}"/>
+              </a:ext>
+            </a:extLst>
+          </p:cNvPr>
+          <p:cNvSpPr>
+            <a:spLocks noChangeAspect="1" noChangeArrowheads="1"/>
+          </p:cNvSpPr>
+          <p:nvPr/>
+        </p:nvSpPr>
+        <p:spPr bwMode="auto">
+          <a:xfrm>
+            <a:off x="5943600" y="-1707776"/>
+            <a:ext cx="5289176" cy="5289176"/>
+          </a:xfrm>
+          <a:prstGeom prst="rect">
+            <a:avLst/>
+          </a:prstGeom>
+          <a:noFill/>
+          <a:extLst>
+            <a:ext uri="{909E8E84-426E-40DD-AFC4-6F175D3DCCD1}">
+              <a14:hiddenFill xmlns:a14="http://schemas.microsoft.com/office/drawing/2010/main">
+                <a:solidFill>
+                  <a:srgbClr val="FFFFFF"/>
+                </a:solidFill>
+              </a14:hiddenFill>
+            </a:ext>
+          </a:extLst>
+        </p:spPr>
+        <p:txBody>
+          <a:bodyPr vert="horz" wrap="square" lIns="91440" tIns="45720" rIns="91440" bIns="45720" numCol="1" anchor="t" anchorCtr="0" compatLnSpc="1">
+            <a:prstTxWarp prst="textNoShape">
+              <a:avLst/>
+            </a:prstTxWarp>
+          </a:bodyPr>
+          <a:lstStyle/>
+          <a:p>
+            <a:endParaRPr lang="pt-BR"/>
+          </a:p>
+        </p:txBody>
+      </p:sp>
+      <p:sp>
+        <p:nvSpPr>
+          <p:cNvPr id="6" name="Espaço Reservado para Conteúdo 5">
+            <a:extLst>
+              <a:ext uri="{FF2B5EF4-FFF2-40B4-BE49-F238E27FC236}">
+                <a16:creationId xmlns:a16="http://schemas.microsoft.com/office/drawing/2014/main" id="{0B58FF2C-8CDD-0E09-7F6D-242B2C7C03ED}"/>
+              </a:ext>
+            </a:extLst>
+          </p:cNvPr>
+          <p:cNvSpPr>
+            <a:spLocks noGrp="1"/>
+          </p:cNvSpPr>
+          <p:nvPr>
+            <p:ph idx="1"/>
+          </p:nvPr>
+        </p:nvSpPr>
+        <p:spPr>
+          <a:xfrm>
+            <a:off x="473720" y="2172494"/>
+            <a:ext cx="6019558" cy="3657600"/>
+          </a:xfrm>
+        </p:spPr>
+        <p:txBody>
+          <a:bodyPr/>
+          <a:lstStyle/>
+          <a:p>
+            <a:r>
+              <a:rPr lang="pt-BR" sz="2400" dirty="0"/>
+              <a:t>A linguagem de programação é o meio formal de comunicação com o computador</a:t>
+            </a:r>
+          </a:p>
+          <a:p>
+            <a:endParaRPr lang="pt-BR" sz="2400" dirty="0"/>
+          </a:p>
+          <a:p>
+            <a:r>
+              <a:rPr lang="pt-BR" sz="2400" dirty="0"/>
+              <a:t>As diferentes linguagens buscam atender à alguma necessidade em específico</a:t>
+            </a:r>
+          </a:p>
+          <a:p>
+            <a:endParaRPr lang="pt-BR" sz="2400" dirty="0"/>
+          </a:p>
+          <a:p>
+            <a:r>
+              <a:rPr lang="pt-BR" sz="2400" dirty="0"/>
+              <a:t>Cada uma possui um conjunto formal de regras sintáticas e semânticas</a:t>
+            </a:r>
+          </a:p>
+          <a:p>
+            <a:endParaRPr lang="pt-BR" sz="2400" dirty="0"/>
+          </a:p>
+          <a:p>
+            <a:endParaRPr lang="pt-BR" dirty="0"/>
+          </a:p>
+        </p:txBody>
+      </p:sp>
+      <p:pic>
+        <p:nvPicPr>
+          <p:cNvPr id="1026" name="Picture 2" descr="Nenhuma descrição de foto disponível.">
+            <a:extLst>
+              <a:ext uri="{FF2B5EF4-FFF2-40B4-BE49-F238E27FC236}">
+                <a16:creationId xmlns:a16="http://schemas.microsoft.com/office/drawing/2014/main" id="{767076CD-9084-F479-B0B8-384F0E2B5407}"/>
+              </a:ext>
+            </a:extLst>
+          </p:cNvPr>
+          <p:cNvPicPr>
+            <a:picLocks noChangeAspect="1" noChangeArrowheads="1"/>
+          </p:cNvPicPr>
+          <p:nvPr/>
+        </p:nvPicPr>
+        <p:blipFill rotWithShape="1">
+          <a:blip r:embed="rId3">
+            <a:extLst>
+              <a:ext uri="{28A0092B-C50C-407E-A947-70E740481C1C}">
+                <a14:useLocalDpi xmlns:a14="http://schemas.microsoft.com/office/drawing/2010/main" val="0"/>
+              </a:ext>
+            </a:extLst>
+          </a:blip>
+          <a:srcRect t="15647" b="4352"/>
+          <a:stretch>
+            <a:fillRect/>
+          </a:stretch>
+        </p:blipFill>
+        <p:spPr bwMode="auto">
+          <a:xfrm>
+            <a:off x="6667378" y="2172494"/>
+            <a:ext cx="5143500" cy="3657600"/>
+          </a:xfrm>
+          <a:prstGeom prst="rect">
+            <a:avLst/>
+          </a:prstGeom>
+          <a:noFill/>
+          <a:extLst>
+            <a:ext uri="{909E8E84-426E-40DD-AFC4-6F175D3DCCD1}">
+              <a14:hiddenFill xmlns:a14="http://schemas.microsoft.com/office/drawing/2010/main">
+                <a:solidFill>
+                  <a:srgbClr val="FFFFFF"/>
+                </a:solidFill>
+              </a14:hiddenFill>
+            </a:ext>
+          </a:extLst>
+        </p:spPr>
+      </p:pic>
+    </p:spTree>
+    <p:extLst>
+      <p:ext uri="{BB962C8B-B14F-4D97-AF65-F5344CB8AC3E}">
+        <p14:creationId xmlns:p14="http://schemas.microsoft.com/office/powerpoint/2010/main" val="3149977511"/>
+      </p:ext>
+    </p:extLst>
+  </p:cSld>
+  <p:clrMapOvr>
+    <a:masterClrMapping/>
+  </p:clrMapOvr>
+</p:sld>
+</file>
+
+<file path=ppt/slides/slide20.xml><?xml version="1.0" encoding="utf-8"?>
 <p:sld xmlns:a="http://schemas.openxmlformats.org/drawingml/2006/main" xmlns:r="http://schemas.openxmlformats.org/officeDocument/2006/relationships" xmlns:p="http://schemas.openxmlformats.org/presentationml/2006/main">
   <p:cSld>
     <p:spTree>
@@ -21997,7 +20280,7 @@
 </p:sld>
 </file>
 
-<file path=ppt/slides/slide25.xml><?xml version="1.0" encoding="utf-8"?>
+<file path=ppt/slides/slide21.xml><?xml version="1.0" encoding="utf-8"?>
 <p:sld xmlns:a="http://schemas.openxmlformats.org/drawingml/2006/main" xmlns:r="http://schemas.openxmlformats.org/officeDocument/2006/relationships" xmlns:p="http://schemas.openxmlformats.org/presentationml/2006/main">
   <p:cSld>
     <p:spTree>
@@ -22341,7 +20624,7 @@
 </p:sld>
 </file>
 
-<file path=ppt/slides/slide26.xml><?xml version="1.0" encoding="utf-8"?>
+<file path=ppt/slides/slide22.xml><?xml version="1.0" encoding="utf-8"?>
 <p:sld xmlns:a="http://schemas.openxmlformats.org/drawingml/2006/main" xmlns:r="http://schemas.openxmlformats.org/officeDocument/2006/relationships" xmlns:p="http://schemas.openxmlformats.org/presentationml/2006/main">
   <p:cSld>
     <p:spTree>
@@ -22643,7 +20926,7 @@
 </p:sld>
 </file>
 
-<file path=ppt/slides/slide27.xml><?xml version="1.0" encoding="utf-8"?>
+<file path=ppt/slides/slide23.xml><?xml version="1.0" encoding="utf-8"?>
 <p:sld xmlns:a="http://schemas.openxmlformats.org/drawingml/2006/main" xmlns:r="http://schemas.openxmlformats.org/officeDocument/2006/relationships" xmlns:p="http://schemas.openxmlformats.org/presentationml/2006/main">
   <p:cSld>
     <p:spTree>
@@ -23079,7 +21362,7 @@
 </p:sld>
 </file>
 
-<file path=ppt/slides/slide28.xml><?xml version="1.0" encoding="utf-8"?>
+<file path=ppt/slides/slide24.xml><?xml version="1.0" encoding="utf-8"?>
 <p:sld xmlns:a="http://schemas.openxmlformats.org/drawingml/2006/main" xmlns:r="http://schemas.openxmlformats.org/officeDocument/2006/relationships" xmlns:p="http://schemas.openxmlformats.org/presentationml/2006/main">
   <p:cSld>
     <p:spTree>
@@ -23401,7 +21684,7 @@
 </p:sld>
 </file>
 
-<file path=ppt/slides/slide29.xml><?xml version="1.0" encoding="utf-8"?>
+<file path=ppt/slides/slide25.xml><?xml version="1.0" encoding="utf-8"?>
 <p:sld xmlns:a="http://schemas.openxmlformats.org/drawingml/2006/main" xmlns:r="http://schemas.openxmlformats.org/officeDocument/2006/relationships" xmlns:p="http://schemas.openxmlformats.org/presentationml/2006/main">
   <p:cSld>
     <p:spTree>
@@ -23682,375 +21965,7 @@
 </p:sld>
 </file>
 
-<file path=ppt/slides/slide3.xml><?xml version="1.0" encoding="utf-8"?>
-<p:sld xmlns:a="http://schemas.openxmlformats.org/drawingml/2006/main" xmlns:r="http://schemas.openxmlformats.org/officeDocument/2006/relationships" xmlns:p="http://schemas.openxmlformats.org/presentationml/2006/main">
-  <p:cSld>
-    <p:spTree>
-      <p:nvGrpSpPr>
-        <p:cNvPr id="1" name="">
-          <a:extLst>
-            <a:ext uri="{FF2B5EF4-FFF2-40B4-BE49-F238E27FC236}">
-              <a16:creationId xmlns:a16="http://schemas.microsoft.com/office/drawing/2014/main" id="{75DC6F12-CB60-EC12-334D-A843F4105EF9}"/>
-            </a:ext>
-          </a:extLst>
-        </p:cNvPr>
-        <p:cNvGrpSpPr/>
-        <p:nvPr/>
-      </p:nvGrpSpPr>
-      <p:grpSpPr>
-        <a:xfrm>
-          <a:off x="0" y="0"/>
-          <a:ext cx="0" cy="0"/>
-          <a:chOff x="0" y="0"/>
-          <a:chExt cx="0" cy="0"/>
-        </a:xfrm>
-      </p:grpSpPr>
-      <p:sp>
-        <p:nvSpPr>
-          <p:cNvPr id="5" name="Retângulo 4">
-            <a:extLst>
-              <a:ext uri="{FF2B5EF4-FFF2-40B4-BE49-F238E27FC236}">
-                <a16:creationId xmlns:a16="http://schemas.microsoft.com/office/drawing/2014/main" id="{3522B2D8-67D3-186B-9646-B4F2E93DCAD4}"/>
-              </a:ext>
-            </a:extLst>
-          </p:cNvPr>
-          <p:cNvSpPr/>
-          <p:nvPr/>
-        </p:nvSpPr>
-        <p:spPr>
-          <a:xfrm>
-            <a:off x="0" y="-2"/>
-            <a:ext cx="12192000" cy="1325563"/>
-          </a:xfrm>
-          <a:prstGeom prst="rect">
-            <a:avLst/>
-          </a:prstGeom>
-          <a:solidFill>
-            <a:srgbClr val="418AB3"/>
-          </a:solidFill>
-          <a:ln>
-            <a:solidFill>
-              <a:srgbClr val="418AB3"/>
-            </a:solidFill>
-          </a:ln>
-        </p:spPr>
-        <p:style>
-          <a:lnRef idx="2">
-            <a:schemeClr val="accent1">
-              <a:shade val="15000"/>
-            </a:schemeClr>
-          </a:lnRef>
-          <a:fillRef idx="1">
-            <a:schemeClr val="accent1"/>
-          </a:fillRef>
-          <a:effectRef idx="0">
-            <a:schemeClr val="accent1"/>
-          </a:effectRef>
-          <a:fontRef idx="minor">
-            <a:schemeClr val="lt1"/>
-          </a:fontRef>
-        </p:style>
-        <p:txBody>
-          <a:bodyPr rtlCol="0" anchor="ctr"/>
-          <a:lstStyle/>
-          <a:p>
-            <a:pPr algn="ctr"/>
-            <a:endParaRPr lang="pt-BR" dirty="0"/>
-          </a:p>
-        </p:txBody>
-      </p:sp>
-      <p:sp>
-        <p:nvSpPr>
-          <p:cNvPr id="2" name="Título 1">
-            <a:extLst>
-              <a:ext uri="{FF2B5EF4-FFF2-40B4-BE49-F238E27FC236}">
-                <a16:creationId xmlns:a16="http://schemas.microsoft.com/office/drawing/2014/main" id="{F627AF45-4965-F2EA-4785-9BD925E69BCA}"/>
-              </a:ext>
-            </a:extLst>
-          </p:cNvPr>
-          <p:cNvSpPr>
-            <a:spLocks noGrp="1"/>
-          </p:cNvSpPr>
-          <p:nvPr>
-            <p:ph type="title"/>
-          </p:nvPr>
-        </p:nvSpPr>
-        <p:spPr>
-          <a:xfrm>
-            <a:off x="0" y="-1"/>
-            <a:ext cx="12192000" cy="1325563"/>
-          </a:xfrm>
-        </p:spPr>
-        <p:txBody>
-          <a:bodyPr/>
-          <a:lstStyle/>
-          <a:p>
-            <a:pPr algn="ctr"/>
-            <a:r>
-              <a:rPr lang="pt-BR" dirty="0">
-                <a:solidFill>
-                  <a:schemeClr val="bg1"/>
-                </a:solidFill>
-              </a:rPr>
-              <a:t>Distribuição de Notas</a:t>
-            </a:r>
-          </a:p>
-        </p:txBody>
-      </p:sp>
-      <p:sp>
-        <p:nvSpPr>
-          <p:cNvPr id="12" name="AutoShape 6" descr="Lógica Proposicional x Lógica de Argumento ⋆ Colaborae">
-            <a:extLst>
-              <a:ext uri="{FF2B5EF4-FFF2-40B4-BE49-F238E27FC236}">
-                <a16:creationId xmlns:a16="http://schemas.microsoft.com/office/drawing/2014/main" id="{F1C6C694-907B-4090-64BD-AEE83CCF19C5}"/>
-              </a:ext>
-            </a:extLst>
-          </p:cNvPr>
-          <p:cNvSpPr>
-            <a:spLocks noChangeAspect="1" noChangeArrowheads="1"/>
-          </p:cNvSpPr>
-          <p:nvPr/>
-        </p:nvSpPr>
-        <p:spPr bwMode="auto">
-          <a:xfrm>
-            <a:off x="5943600" y="-1707776"/>
-            <a:ext cx="5289176" cy="5289176"/>
-          </a:xfrm>
-          <a:prstGeom prst="rect">
-            <a:avLst/>
-          </a:prstGeom>
-          <a:noFill/>
-          <a:extLst>
-            <a:ext uri="{909E8E84-426E-40DD-AFC4-6F175D3DCCD1}">
-              <a14:hiddenFill xmlns:a14="http://schemas.microsoft.com/office/drawing/2010/main">
-                <a:solidFill>
-                  <a:srgbClr val="FFFFFF"/>
-                </a:solidFill>
-              </a14:hiddenFill>
-            </a:ext>
-          </a:extLst>
-        </p:spPr>
-        <p:txBody>
-          <a:bodyPr vert="horz" wrap="square" lIns="91440" tIns="45720" rIns="91440" bIns="45720" numCol="1" anchor="t" anchorCtr="0" compatLnSpc="1">
-            <a:prstTxWarp prst="textNoShape">
-              <a:avLst/>
-            </a:prstTxWarp>
-          </a:bodyPr>
-          <a:lstStyle/>
-          <a:p>
-            <a:endParaRPr lang="pt-BR"/>
-          </a:p>
-        </p:txBody>
-      </p:sp>
-      <p:sp>
-        <p:nvSpPr>
-          <p:cNvPr id="6" name="Espaço Reservado para Conteúdo 5">
-            <a:extLst>
-              <a:ext uri="{FF2B5EF4-FFF2-40B4-BE49-F238E27FC236}">
-                <a16:creationId xmlns:a16="http://schemas.microsoft.com/office/drawing/2014/main" id="{7EBA44CF-0249-2FC7-5D35-8CE4AAB5D1FE}"/>
-              </a:ext>
-            </a:extLst>
-          </p:cNvPr>
-          <p:cNvSpPr>
-            <a:spLocks noGrp="1"/>
-          </p:cNvSpPr>
-          <p:nvPr>
-            <p:ph idx="1"/>
-          </p:nvPr>
-        </p:nvSpPr>
-        <p:spPr>
-          <a:xfrm>
-            <a:off x="1486540" y="1804575"/>
-            <a:ext cx="8670280" cy="4746632"/>
-          </a:xfrm>
-        </p:spPr>
-        <p:txBody>
-          <a:bodyPr/>
-          <a:lstStyle/>
-          <a:p>
-            <a:r>
-              <a:rPr lang="pt-BR" sz="2400" dirty="0"/>
-              <a:t>Atividades Complementares 1 – </a:t>
-            </a:r>
-            <a:r>
-              <a:rPr lang="pt-BR" sz="2400" b="1" dirty="0"/>
-              <a:t>5pts</a:t>
-            </a:r>
-          </a:p>
-          <a:p>
-            <a:r>
-              <a:rPr lang="pt-BR" sz="2400" dirty="0" err="1"/>
-              <a:t>Uniube</a:t>
-            </a:r>
-            <a:r>
-              <a:rPr lang="pt-BR" sz="2400" dirty="0"/>
-              <a:t>+ – </a:t>
-            </a:r>
-            <a:r>
-              <a:rPr lang="pt-BR" sz="2400" b="1" dirty="0"/>
-              <a:t>5pts</a:t>
-            </a:r>
-            <a:endParaRPr lang="pt-BR" sz="2400" dirty="0"/>
-          </a:p>
-          <a:p>
-            <a:r>
-              <a:rPr lang="pt-BR" sz="2400" dirty="0"/>
-              <a:t>Avaliação 1 – </a:t>
-            </a:r>
-            <a:r>
-              <a:rPr lang="pt-BR" sz="2400" b="1" dirty="0"/>
-              <a:t>25pts</a:t>
-            </a:r>
-            <a:r>
-              <a:rPr lang="pt-BR" sz="2400" dirty="0"/>
-              <a:t> – Data prevista: </a:t>
-            </a:r>
-          </a:p>
-          <a:p>
-            <a:pPr marL="0" indent="0">
-              <a:buNone/>
-            </a:pPr>
-            <a:endParaRPr lang="pt-BR" sz="2400" dirty="0"/>
-          </a:p>
-          <a:p>
-            <a:r>
-              <a:rPr lang="pt-BR" sz="2400" dirty="0"/>
-              <a:t>Atividades Complementares 2 – </a:t>
-            </a:r>
-            <a:r>
-              <a:rPr lang="pt-BR" sz="2400" b="1" dirty="0"/>
-              <a:t>10pts</a:t>
-            </a:r>
-          </a:p>
-          <a:p>
-            <a:r>
-              <a:rPr lang="pt-BR" sz="2400" dirty="0" err="1"/>
-              <a:t>Uniube</a:t>
-            </a:r>
-            <a:r>
-              <a:rPr lang="pt-BR" sz="2400" dirty="0"/>
-              <a:t>+ – </a:t>
-            </a:r>
-            <a:r>
-              <a:rPr lang="pt-BR" sz="2400" b="1" dirty="0"/>
-              <a:t>10pts</a:t>
-            </a:r>
-            <a:endParaRPr lang="pt-BR" sz="2400" dirty="0"/>
-          </a:p>
-          <a:p>
-            <a:r>
-              <a:rPr lang="pt-BR" sz="2400" dirty="0"/>
-              <a:t>Avaliação 2 – </a:t>
-            </a:r>
-            <a:r>
-              <a:rPr lang="pt-BR" sz="2400" b="1" dirty="0"/>
-              <a:t>30pts</a:t>
-            </a:r>
-            <a:r>
-              <a:rPr lang="pt-BR" sz="2400" dirty="0"/>
-              <a:t> – Data prevista: </a:t>
-            </a:r>
-          </a:p>
-          <a:p>
-            <a:endParaRPr lang="pt-BR" sz="2400" dirty="0"/>
-          </a:p>
-          <a:p>
-            <a:r>
-              <a:rPr lang="pt-BR" sz="2400" dirty="0"/>
-              <a:t>Avaliação Institucional – </a:t>
-            </a:r>
-            <a:r>
-              <a:rPr lang="pt-BR" sz="2400" b="1" dirty="0"/>
-              <a:t>15pts</a:t>
-            </a:r>
-            <a:endParaRPr lang="pt-BR" sz="2400" dirty="0"/>
-          </a:p>
-          <a:p>
-            <a:r>
-              <a:rPr lang="pt-BR" sz="2400" dirty="0"/>
-              <a:t>Soma total de pontos: </a:t>
-            </a:r>
-            <a:r>
-              <a:rPr lang="pt-BR" sz="2400" b="1" dirty="0"/>
-              <a:t>100pts</a:t>
-            </a:r>
-            <a:endParaRPr lang="pt-BR" sz="2400" dirty="0"/>
-          </a:p>
-          <a:p>
-            <a:endParaRPr lang="pt-BR" sz="2400" dirty="0"/>
-          </a:p>
-          <a:p>
-            <a:endParaRPr lang="pt-BR" sz="2400" dirty="0"/>
-          </a:p>
-          <a:p>
-            <a:endParaRPr lang="pt-BR" sz="2400" dirty="0"/>
-          </a:p>
-          <a:p>
-            <a:endParaRPr lang="pt-BR" dirty="0"/>
-          </a:p>
-        </p:txBody>
-      </p:sp>
-      <p:pic>
-        <p:nvPicPr>
-          <p:cNvPr id="1026" name="Picture 2" descr="Teste - ícones de educação grátis">
-            <a:extLst>
-              <a:ext uri="{FF2B5EF4-FFF2-40B4-BE49-F238E27FC236}">
-                <a16:creationId xmlns:a16="http://schemas.microsoft.com/office/drawing/2014/main" id="{5C4BB763-0221-5AB3-8665-67367B488F54}"/>
-              </a:ext>
-            </a:extLst>
-          </p:cNvPr>
-          <p:cNvPicPr>
-            <a:picLocks noChangeAspect="1" noChangeArrowheads="1"/>
-          </p:cNvPicPr>
-          <p:nvPr/>
-        </p:nvPicPr>
-        <p:blipFill>
-          <a:blip r:embed="rId3">
-            <a:extLst>
-              <a:ext uri="{28A0092B-C50C-407E-A947-70E740481C1C}">
-                <a14:useLocalDpi xmlns:a14="http://schemas.microsoft.com/office/drawing/2010/main" val="0"/>
-              </a:ext>
-            </a:extLst>
-          </a:blip>
-          <a:srcRect/>
-          <a:stretch>
-            <a:fillRect/>
-          </a:stretch>
-        </p:blipFill>
-        <p:spPr bwMode="auto">
-          <a:xfrm>
-            <a:off x="7985126" y="2518544"/>
-            <a:ext cx="3150736" cy="3150736"/>
-          </a:xfrm>
-          <a:prstGeom prst="rect">
-            <a:avLst/>
-          </a:prstGeom>
-          <a:noFill/>
-          <a:extLst>
-            <a:ext uri="{909E8E84-426E-40DD-AFC4-6F175D3DCCD1}">
-              <a14:hiddenFill xmlns:a14="http://schemas.microsoft.com/office/drawing/2010/main">
-                <a:solidFill>
-                  <a:srgbClr val="FFFFFF"/>
-                </a:solidFill>
-              </a14:hiddenFill>
-            </a:ext>
-          </a:extLst>
-        </p:spPr>
-      </p:pic>
-    </p:spTree>
-    <p:extLst>
-      <p:ext uri="{BB962C8B-B14F-4D97-AF65-F5344CB8AC3E}">
-        <p14:creationId xmlns:p14="http://schemas.microsoft.com/office/powerpoint/2010/main" val="2230451584"/>
-      </p:ext>
-    </p:extLst>
-  </p:cSld>
-  <p:clrMapOvr>
-    <a:masterClrMapping/>
-  </p:clrMapOvr>
-</p:sld>
-</file>
-
-<file path=ppt/slides/slide30.xml><?xml version="1.0" encoding="utf-8"?>
+<file path=ppt/slides/slide26.xml><?xml version="1.0" encoding="utf-8"?>
 <p:sld xmlns:a="http://schemas.openxmlformats.org/drawingml/2006/main" xmlns:r="http://schemas.openxmlformats.org/officeDocument/2006/relationships" xmlns:p="http://schemas.openxmlformats.org/presentationml/2006/main">
   <p:cSld>
     <p:spTree>
@@ -24382,7 +22297,7 @@
 </p:sld>
 </file>
 
-<file path=ppt/slides/slide31.xml><?xml version="1.0" encoding="utf-8"?>
+<file path=ppt/slides/slide27.xml><?xml version="1.0" encoding="utf-8"?>
 <p:sld xmlns:a="http://schemas.openxmlformats.org/drawingml/2006/main" xmlns:r="http://schemas.openxmlformats.org/officeDocument/2006/relationships" xmlns:p="http://schemas.openxmlformats.org/presentationml/2006/main">
   <p:cSld>
     <p:spTree>
@@ -24687,7 +22602,7 @@
 </p:sld>
 </file>
 
-<file path=ppt/slides/slide32.xml><?xml version="1.0" encoding="utf-8"?>
+<file path=ppt/slides/slide28.xml><?xml version="1.0" encoding="utf-8"?>
 <p:sld xmlns:a="http://schemas.openxmlformats.org/drawingml/2006/main" xmlns:r="http://schemas.openxmlformats.org/officeDocument/2006/relationships" xmlns:p="http://schemas.openxmlformats.org/presentationml/2006/main">
   <p:cSld>
     <p:spTree>
@@ -24978,7 +22893,7 @@
 </p:sld>
 </file>
 
-<file path=ppt/slides/slide33.xml><?xml version="1.0" encoding="utf-8"?>
+<file path=ppt/slides/slide29.xml><?xml version="1.0" encoding="utf-8"?>
 <p:sld xmlns:a="http://schemas.openxmlformats.org/drawingml/2006/main" xmlns:r="http://schemas.openxmlformats.org/officeDocument/2006/relationships" xmlns:p="http://schemas.openxmlformats.org/presentationml/2006/main">
   <p:cSld>
     <p:spTree>
@@ -25274,7 +23189,7 @@
 </p:sld>
 </file>
 
-<file path=ppt/slides/slide34.xml><?xml version="1.0" encoding="utf-8"?>
+<file path=ppt/slides/slide3.xml><?xml version="1.0" encoding="utf-8"?>
 <p:sld xmlns:a="http://schemas.openxmlformats.org/drawingml/2006/main" xmlns:r="http://schemas.openxmlformats.org/officeDocument/2006/relationships" xmlns:p="http://schemas.openxmlformats.org/presentationml/2006/main">
   <p:cSld>
     <p:spTree>
@@ -25282,7 +23197,7 @@
         <p:cNvPr id="1" name="">
           <a:extLst>
             <a:ext uri="{FF2B5EF4-FFF2-40B4-BE49-F238E27FC236}">
-              <a16:creationId xmlns:a16="http://schemas.microsoft.com/office/drawing/2014/main" id="{DCCA690B-E8BF-5851-00C0-854E731E36EB}"/>
+              <a16:creationId xmlns:a16="http://schemas.microsoft.com/office/drawing/2014/main" id="{7A1E17AB-793B-33ED-F53D-DFF1D00E91DD}"/>
             </a:ext>
           </a:extLst>
         </p:cNvPr>
@@ -25302,7 +23217,7 @@
           <p:cNvPr id="5" name="Retângulo 4">
             <a:extLst>
               <a:ext uri="{FF2B5EF4-FFF2-40B4-BE49-F238E27FC236}">
-                <a16:creationId xmlns:a16="http://schemas.microsoft.com/office/drawing/2014/main" id="{9F6B7979-ECDF-D961-EBC5-9C2A63EF3715}"/>
+                <a16:creationId xmlns:a16="http://schemas.microsoft.com/office/drawing/2014/main" id="{9B5381A2-21D3-988B-6C4F-1A5A0E3E4792}"/>
               </a:ext>
             </a:extLst>
           </p:cNvPr>
@@ -25356,7 +23271,7 @@
           <p:cNvPr id="2" name="Título 1">
             <a:extLst>
               <a:ext uri="{FF2B5EF4-FFF2-40B4-BE49-F238E27FC236}">
-                <a16:creationId xmlns:a16="http://schemas.microsoft.com/office/drawing/2014/main" id="{29435752-6267-61E4-4139-D813C4633ACC}"/>
+                <a16:creationId xmlns:a16="http://schemas.microsoft.com/office/drawing/2014/main" id="{BD8FE61A-0CEC-FC31-6387-C133DC1882B1}"/>
               </a:ext>
             </a:extLst>
           </p:cNvPr>
@@ -25384,8 +23299,21 @@
                   <a:schemeClr val="bg1"/>
                 </a:solidFill>
               </a:rPr>
-              <a:t>Faixa de valores para os tipos de dados</a:t>
-            </a:r>
+              <a:t>LP X Algoritmo X </a:t>
+            </a:r>
+            <a:r>
+              <a:rPr lang="pt-BR" dirty="0" err="1">
+                <a:solidFill>
+                  <a:schemeClr val="bg1"/>
+                </a:solidFill>
+              </a:rPr>
+              <a:t>Pseudo-código</a:t>
+            </a:r>
+            <a:endParaRPr lang="pt-BR" dirty="0">
+              <a:solidFill>
+                <a:schemeClr val="bg1"/>
+              </a:solidFill>
+            </a:endParaRPr>
           </a:p>
         </p:txBody>
       </p:sp>
@@ -25394,7 +23322,7 @@
           <p:cNvPr id="12" name="AutoShape 6" descr="Lógica Proposicional x Lógica de Argumento ⋆ Colaborae">
             <a:extLst>
               <a:ext uri="{FF2B5EF4-FFF2-40B4-BE49-F238E27FC236}">
-                <a16:creationId xmlns:a16="http://schemas.microsoft.com/office/drawing/2014/main" id="{42F2AB88-1306-9195-2B9F-2707AEE066FF}"/>
+                <a16:creationId xmlns:a16="http://schemas.microsoft.com/office/drawing/2014/main" id="{F0C2298D-D8FC-A002-D482-14EA1BD148C9}"/>
               </a:ext>
             </a:extLst>
           </p:cNvPr>
@@ -25434,23 +23362,97 @@
           </a:p>
         </p:txBody>
       </p:sp>
+      <p:sp>
+        <p:nvSpPr>
+          <p:cNvPr id="6" name="Espaço Reservado para Conteúdo 5">
+            <a:extLst>
+              <a:ext uri="{FF2B5EF4-FFF2-40B4-BE49-F238E27FC236}">
+                <a16:creationId xmlns:a16="http://schemas.microsoft.com/office/drawing/2014/main" id="{603F71DD-09FA-DB12-8FA3-33D5EC43D2D1}"/>
+              </a:ext>
+            </a:extLst>
+          </p:cNvPr>
+          <p:cNvSpPr>
+            <a:spLocks noGrp="1"/>
+          </p:cNvSpPr>
+          <p:nvPr>
+            <p:ph idx="1"/>
+          </p:nvPr>
+        </p:nvSpPr>
+        <p:spPr>
+          <a:xfrm>
+            <a:off x="276952" y="1987298"/>
+            <a:ext cx="6413216" cy="4494524"/>
+          </a:xfrm>
+        </p:spPr>
+        <p:txBody>
+          <a:bodyPr>
+            <a:normAutofit/>
+          </a:bodyPr>
+          <a:lstStyle/>
+          <a:p>
+            <a:r>
+              <a:rPr lang="pt-BR" sz="2400" b="1" dirty="0"/>
+              <a:t>O </a:t>
+            </a:r>
+            <a:r>
+              <a:rPr lang="pt-BR" sz="2400" b="1" dirty="0" err="1"/>
+              <a:t>pseudo-código</a:t>
+            </a:r>
+            <a:r>
+              <a:rPr lang="pt-BR" sz="2400" b="1" dirty="0"/>
+              <a:t> </a:t>
+            </a:r>
+            <a:r>
+              <a:rPr lang="pt-BR" sz="2400" dirty="0"/>
+              <a:t>é a forma simples e direta de escrever a lógica de um programa usando a língua nativa</a:t>
+            </a:r>
+          </a:p>
+          <a:p>
+            <a:endParaRPr lang="pt-BR" sz="2400" dirty="0"/>
+          </a:p>
+          <a:p>
+            <a:r>
+              <a:rPr lang="pt-BR" sz="2400" b="1" dirty="0"/>
+              <a:t>O algoritmo</a:t>
+            </a:r>
+            <a:r>
+              <a:rPr lang="pt-BR" sz="2400" dirty="0"/>
+              <a:t> é uma sequência de instruções ou regras bem definidas para realizar uma tarefa.</a:t>
+            </a:r>
+          </a:p>
+          <a:p>
+            <a:endParaRPr lang="pt-BR" sz="2400" dirty="0"/>
+          </a:p>
+          <a:p>
+            <a:r>
+              <a:rPr lang="pt-BR" sz="2400" b="1" dirty="0"/>
+              <a:t>A LP </a:t>
+            </a:r>
+            <a:r>
+              <a:rPr lang="pt-BR" sz="2400" dirty="0"/>
+              <a:t>é um conjunto de regras sintáticas e semânticas para comunicação com a máquina.</a:t>
+            </a:r>
+          </a:p>
+          <a:p>
+            <a:endParaRPr lang="pt-BR" dirty="0"/>
+          </a:p>
+        </p:txBody>
+      </p:sp>
       <p:pic>
         <p:nvPicPr>
-          <p:cNvPr id="3074" name="Picture 2" descr="Tipo de Dados de C :: Linguagens C e C++">
-            <a:extLst>
-              <a:ext uri="{FF2B5EF4-FFF2-40B4-BE49-F238E27FC236}">
-                <a16:creationId xmlns:a16="http://schemas.microsoft.com/office/drawing/2014/main" id="{435FCCD6-3657-B92C-FF6E-F5CC7BBAE9CF}"/>
+          <p:cNvPr id="3074" name="Picture 2" descr="Sobre pseudocódigo, leia as alternativas e assinale a opção correta: I - O  pseudocódigo é uma linguagem - brainly.com.br">
+            <a:extLst>
+              <a:ext uri="{FF2B5EF4-FFF2-40B4-BE49-F238E27FC236}">
+                <a16:creationId xmlns:a16="http://schemas.microsoft.com/office/drawing/2014/main" id="{519457E3-8DE1-752D-1393-96E1E3708608}"/>
               </a:ext>
             </a:extLst>
           </p:cNvPr>
           <p:cNvPicPr>
-            <a:picLocks noGrp="1" noChangeAspect="1" noChangeArrowheads="1"/>
+            <a:picLocks noChangeAspect="1" noChangeArrowheads="1"/>
           </p:cNvPicPr>
-          <p:nvPr>
-            <p:ph idx="1"/>
-          </p:nvPr>
+          <p:nvPr/>
         </p:nvPicPr>
-        <p:blipFill>
+        <p:blipFill rotWithShape="1">
           <a:blip r:embed="rId3">
             <a:extLst>
               <a:ext uri="{28A0092B-C50C-407E-A947-70E740481C1C}">
@@ -25458,15 +23460,15 @@
               </a:ext>
             </a:extLst>
           </a:blip>
-          <a:srcRect/>
+          <a:srcRect l="846" r="2476" b="4286"/>
           <a:stretch>
             <a:fillRect/>
           </a:stretch>
         </p:blipFill>
         <p:spPr bwMode="auto">
           <a:xfrm>
-            <a:off x="2614829" y="1410039"/>
-            <a:ext cx="6657541" cy="5351242"/>
+            <a:off x="6690168" y="1896499"/>
+            <a:ext cx="5429470" cy="4031538"/>
           </a:xfrm>
           <a:prstGeom prst="rect">
             <a:avLst/>
@@ -25486,7 +23488,7 @@
     </p:spTree>
     <p:extLst>
       <p:ext uri="{BB962C8B-B14F-4D97-AF65-F5344CB8AC3E}">
-        <p14:creationId xmlns:p14="http://schemas.microsoft.com/office/powerpoint/2010/main" val="2026795101"/>
+        <p14:creationId xmlns:p14="http://schemas.microsoft.com/office/powerpoint/2010/main" val="4142721531"/>
       </p:ext>
     </p:extLst>
   </p:cSld>
@@ -25496,7 +23498,7 @@
 </p:sld>
 </file>
 
-<file path=ppt/slides/slide35.xml><?xml version="1.0" encoding="utf-8"?>
+<file path=ppt/slides/slide30.xml><?xml version="1.0" encoding="utf-8"?>
 <p:sld xmlns:a="http://schemas.openxmlformats.org/drawingml/2006/main" xmlns:r="http://schemas.openxmlformats.org/officeDocument/2006/relationships" xmlns:p="http://schemas.openxmlformats.org/presentationml/2006/main">
   <p:cSld>
     <p:spTree>
@@ -25504,7 +23506,7 @@
         <p:cNvPr id="1" name="">
           <a:extLst>
             <a:ext uri="{FF2B5EF4-FFF2-40B4-BE49-F238E27FC236}">
-              <a16:creationId xmlns:a16="http://schemas.microsoft.com/office/drawing/2014/main" id="{29EFA6E3-041D-B09A-01FD-D67190F3C62C}"/>
+              <a16:creationId xmlns:a16="http://schemas.microsoft.com/office/drawing/2014/main" id="{DCCA690B-E8BF-5851-00C0-854E731E36EB}"/>
             </a:ext>
           </a:extLst>
         </p:cNvPr>
@@ -25524,7 +23526,7 @@
           <p:cNvPr id="5" name="Retângulo 4">
             <a:extLst>
               <a:ext uri="{FF2B5EF4-FFF2-40B4-BE49-F238E27FC236}">
-                <a16:creationId xmlns:a16="http://schemas.microsoft.com/office/drawing/2014/main" id="{BAB1AB49-13C9-DA56-AAD1-AE5EC7C6BCF7}"/>
+                <a16:creationId xmlns:a16="http://schemas.microsoft.com/office/drawing/2014/main" id="{9F6B7979-ECDF-D961-EBC5-9C2A63EF3715}"/>
               </a:ext>
             </a:extLst>
           </p:cNvPr>
@@ -25578,6 +23580,228 @@
           <p:cNvPr id="2" name="Título 1">
             <a:extLst>
               <a:ext uri="{FF2B5EF4-FFF2-40B4-BE49-F238E27FC236}">
+                <a16:creationId xmlns:a16="http://schemas.microsoft.com/office/drawing/2014/main" id="{29435752-6267-61E4-4139-D813C4633ACC}"/>
+              </a:ext>
+            </a:extLst>
+          </p:cNvPr>
+          <p:cNvSpPr>
+            <a:spLocks noGrp="1"/>
+          </p:cNvSpPr>
+          <p:nvPr>
+            <p:ph type="title"/>
+          </p:nvPr>
+        </p:nvSpPr>
+        <p:spPr>
+          <a:xfrm>
+            <a:off x="0" y="-1"/>
+            <a:ext cx="12192000" cy="1325563"/>
+          </a:xfrm>
+        </p:spPr>
+        <p:txBody>
+          <a:bodyPr/>
+          <a:lstStyle/>
+          <a:p>
+            <a:pPr algn="ctr"/>
+            <a:r>
+              <a:rPr lang="pt-BR" dirty="0">
+                <a:solidFill>
+                  <a:schemeClr val="bg1"/>
+                </a:solidFill>
+              </a:rPr>
+              <a:t>Faixa de valores para os tipos de dados</a:t>
+            </a:r>
+          </a:p>
+        </p:txBody>
+      </p:sp>
+      <p:sp>
+        <p:nvSpPr>
+          <p:cNvPr id="12" name="AutoShape 6" descr="Lógica Proposicional x Lógica de Argumento ⋆ Colaborae">
+            <a:extLst>
+              <a:ext uri="{FF2B5EF4-FFF2-40B4-BE49-F238E27FC236}">
+                <a16:creationId xmlns:a16="http://schemas.microsoft.com/office/drawing/2014/main" id="{42F2AB88-1306-9195-2B9F-2707AEE066FF}"/>
+              </a:ext>
+            </a:extLst>
+          </p:cNvPr>
+          <p:cNvSpPr>
+            <a:spLocks noChangeAspect="1" noChangeArrowheads="1"/>
+          </p:cNvSpPr>
+          <p:nvPr/>
+        </p:nvSpPr>
+        <p:spPr bwMode="auto">
+          <a:xfrm>
+            <a:off x="5943600" y="-1707776"/>
+            <a:ext cx="5289176" cy="5289176"/>
+          </a:xfrm>
+          <a:prstGeom prst="rect">
+            <a:avLst/>
+          </a:prstGeom>
+          <a:noFill/>
+          <a:extLst>
+            <a:ext uri="{909E8E84-426E-40DD-AFC4-6F175D3DCCD1}">
+              <a14:hiddenFill xmlns:a14="http://schemas.microsoft.com/office/drawing/2010/main">
+                <a:solidFill>
+                  <a:srgbClr val="FFFFFF"/>
+                </a:solidFill>
+              </a14:hiddenFill>
+            </a:ext>
+          </a:extLst>
+        </p:spPr>
+        <p:txBody>
+          <a:bodyPr vert="horz" wrap="square" lIns="91440" tIns="45720" rIns="91440" bIns="45720" numCol="1" anchor="t" anchorCtr="0" compatLnSpc="1">
+            <a:prstTxWarp prst="textNoShape">
+              <a:avLst/>
+            </a:prstTxWarp>
+          </a:bodyPr>
+          <a:lstStyle/>
+          <a:p>
+            <a:endParaRPr lang="pt-BR"/>
+          </a:p>
+        </p:txBody>
+      </p:sp>
+      <p:pic>
+        <p:nvPicPr>
+          <p:cNvPr id="3074" name="Picture 2" descr="Tipo de Dados de C :: Linguagens C e C++">
+            <a:extLst>
+              <a:ext uri="{FF2B5EF4-FFF2-40B4-BE49-F238E27FC236}">
+                <a16:creationId xmlns:a16="http://schemas.microsoft.com/office/drawing/2014/main" id="{435FCCD6-3657-B92C-FF6E-F5CC7BBAE9CF}"/>
+              </a:ext>
+            </a:extLst>
+          </p:cNvPr>
+          <p:cNvPicPr>
+            <a:picLocks noGrp="1" noChangeAspect="1" noChangeArrowheads="1"/>
+          </p:cNvPicPr>
+          <p:nvPr>
+            <p:ph idx="1"/>
+          </p:nvPr>
+        </p:nvPicPr>
+        <p:blipFill>
+          <a:blip r:embed="rId3">
+            <a:extLst>
+              <a:ext uri="{28A0092B-C50C-407E-A947-70E740481C1C}">
+                <a14:useLocalDpi xmlns:a14="http://schemas.microsoft.com/office/drawing/2010/main" val="0"/>
+              </a:ext>
+            </a:extLst>
+          </a:blip>
+          <a:srcRect/>
+          <a:stretch>
+            <a:fillRect/>
+          </a:stretch>
+        </p:blipFill>
+        <p:spPr bwMode="auto">
+          <a:xfrm>
+            <a:off x="2614829" y="1410039"/>
+            <a:ext cx="6657541" cy="5351242"/>
+          </a:xfrm>
+          <a:prstGeom prst="rect">
+            <a:avLst/>
+          </a:prstGeom>
+          <a:noFill/>
+          <a:extLst>
+            <a:ext uri="{909E8E84-426E-40DD-AFC4-6F175D3DCCD1}">
+              <a14:hiddenFill xmlns:a14="http://schemas.microsoft.com/office/drawing/2010/main">
+                <a:solidFill>
+                  <a:srgbClr val="FFFFFF"/>
+                </a:solidFill>
+              </a14:hiddenFill>
+            </a:ext>
+          </a:extLst>
+        </p:spPr>
+      </p:pic>
+    </p:spTree>
+    <p:extLst>
+      <p:ext uri="{BB962C8B-B14F-4D97-AF65-F5344CB8AC3E}">
+        <p14:creationId xmlns:p14="http://schemas.microsoft.com/office/powerpoint/2010/main" val="2026795101"/>
+      </p:ext>
+    </p:extLst>
+  </p:cSld>
+  <p:clrMapOvr>
+    <a:masterClrMapping/>
+  </p:clrMapOvr>
+</p:sld>
+</file>
+
+<file path=ppt/slides/slide31.xml><?xml version="1.0" encoding="utf-8"?>
+<p:sld xmlns:a="http://schemas.openxmlformats.org/drawingml/2006/main" xmlns:r="http://schemas.openxmlformats.org/officeDocument/2006/relationships" xmlns:p="http://schemas.openxmlformats.org/presentationml/2006/main">
+  <p:cSld>
+    <p:spTree>
+      <p:nvGrpSpPr>
+        <p:cNvPr id="1" name="">
+          <a:extLst>
+            <a:ext uri="{FF2B5EF4-FFF2-40B4-BE49-F238E27FC236}">
+              <a16:creationId xmlns:a16="http://schemas.microsoft.com/office/drawing/2014/main" id="{29EFA6E3-041D-B09A-01FD-D67190F3C62C}"/>
+            </a:ext>
+          </a:extLst>
+        </p:cNvPr>
+        <p:cNvGrpSpPr/>
+        <p:nvPr/>
+      </p:nvGrpSpPr>
+      <p:grpSpPr>
+        <a:xfrm>
+          <a:off x="0" y="0"/>
+          <a:ext cx="0" cy="0"/>
+          <a:chOff x="0" y="0"/>
+          <a:chExt cx="0" cy="0"/>
+        </a:xfrm>
+      </p:grpSpPr>
+      <p:sp>
+        <p:nvSpPr>
+          <p:cNvPr id="5" name="Retângulo 4">
+            <a:extLst>
+              <a:ext uri="{FF2B5EF4-FFF2-40B4-BE49-F238E27FC236}">
+                <a16:creationId xmlns:a16="http://schemas.microsoft.com/office/drawing/2014/main" id="{BAB1AB49-13C9-DA56-AAD1-AE5EC7C6BCF7}"/>
+              </a:ext>
+            </a:extLst>
+          </p:cNvPr>
+          <p:cNvSpPr/>
+          <p:nvPr/>
+        </p:nvSpPr>
+        <p:spPr>
+          <a:xfrm>
+            <a:off x="0" y="-2"/>
+            <a:ext cx="12192000" cy="1325563"/>
+          </a:xfrm>
+          <a:prstGeom prst="rect">
+            <a:avLst/>
+          </a:prstGeom>
+          <a:solidFill>
+            <a:srgbClr val="418AB3"/>
+          </a:solidFill>
+          <a:ln>
+            <a:solidFill>
+              <a:srgbClr val="418AB3"/>
+            </a:solidFill>
+          </a:ln>
+        </p:spPr>
+        <p:style>
+          <a:lnRef idx="2">
+            <a:schemeClr val="accent1">
+              <a:shade val="15000"/>
+            </a:schemeClr>
+          </a:lnRef>
+          <a:fillRef idx="1">
+            <a:schemeClr val="accent1"/>
+          </a:fillRef>
+          <a:effectRef idx="0">
+            <a:schemeClr val="accent1"/>
+          </a:effectRef>
+          <a:fontRef idx="minor">
+            <a:schemeClr val="lt1"/>
+          </a:fontRef>
+        </p:style>
+        <p:txBody>
+          <a:bodyPr rtlCol="0" anchor="ctr"/>
+          <a:lstStyle/>
+          <a:p>
+            <a:pPr algn="ctr"/>
+            <a:endParaRPr lang="pt-BR" dirty="0"/>
+          </a:p>
+        </p:txBody>
+      </p:sp>
+      <p:sp>
+        <p:nvSpPr>
+          <p:cNvPr id="2" name="Título 1">
+            <a:extLst>
+              <a:ext uri="{FF2B5EF4-FFF2-40B4-BE49-F238E27FC236}">
                 <a16:creationId xmlns:a16="http://schemas.microsoft.com/office/drawing/2014/main" id="{89151EAB-5A01-EB06-CDE7-EEEFC3FE0586}"/>
               </a:ext>
             </a:extLst>
@@ -25749,7 +23973,7 @@
 </p:sld>
 </file>
 
-<file path=ppt/slides/slide36.xml><?xml version="1.0" encoding="utf-8"?>
+<file path=ppt/slides/slide32.xml><?xml version="1.0" encoding="utf-8"?>
 <p:sld xmlns:a="http://schemas.openxmlformats.org/drawingml/2006/main" xmlns:r="http://schemas.openxmlformats.org/officeDocument/2006/relationships" xmlns:p="http://schemas.openxmlformats.org/presentationml/2006/main">
   <p:cSld>
     <p:spTree>
@@ -26172,7 +24396,7 @@
 </p:sld>
 </file>
 
-<file path=ppt/slides/slide37.xml><?xml version="1.0" encoding="utf-8"?>
+<file path=ppt/slides/slide33.xml><?xml version="1.0" encoding="utf-8"?>
 <p:sld xmlns:a="http://schemas.openxmlformats.org/drawingml/2006/main" xmlns:r="http://schemas.openxmlformats.org/officeDocument/2006/relationships" xmlns:p="http://schemas.openxmlformats.org/presentationml/2006/main">
   <p:cSld>
     <p:spTree>
@@ -26490,7 +24714,7 @@
 </p:sld>
 </file>
 
-<file path=ppt/slides/slide38.xml><?xml version="1.0" encoding="utf-8"?>
+<file path=ppt/slides/slide34.xml><?xml version="1.0" encoding="utf-8"?>
 <p:sld xmlns:a="http://schemas.openxmlformats.org/drawingml/2006/main" xmlns:r="http://schemas.openxmlformats.org/officeDocument/2006/relationships" xmlns:p="http://schemas.openxmlformats.org/presentationml/2006/main">
   <p:cSld>
     <p:spTree>
@@ -26927,7 +25151,7 @@
 </p:sld>
 </file>
 
-<file path=ppt/slides/slide39.xml><?xml version="1.0" encoding="utf-8"?>
+<file path=ppt/slides/slide35.xml><?xml version="1.0" encoding="utf-8"?>
 <p:sld xmlns:a="http://schemas.openxmlformats.org/drawingml/2006/main" xmlns:r="http://schemas.openxmlformats.org/officeDocument/2006/relationships" xmlns:p="http://schemas.openxmlformats.org/presentationml/2006/main">
   <p:cSld>
     <p:spTree>
@@ -27436,7 +25660,7 @@
 </p:sld>
 </file>
 
-<file path=ppt/slides/slide4.xml><?xml version="1.0" encoding="utf-8"?>
+<file path=ppt/slides/slide36.xml><?xml version="1.0" encoding="utf-8"?>
 <p:sld xmlns:a="http://schemas.openxmlformats.org/drawingml/2006/main" xmlns:r="http://schemas.openxmlformats.org/officeDocument/2006/relationships" xmlns:p="http://schemas.openxmlformats.org/presentationml/2006/main">
   <p:cSld>
     <p:spTree>
@@ -27444,7 +25668,7 @@
         <p:cNvPr id="1" name="">
           <a:extLst>
             <a:ext uri="{FF2B5EF4-FFF2-40B4-BE49-F238E27FC236}">
-              <a16:creationId xmlns:a16="http://schemas.microsoft.com/office/drawing/2014/main" id="{3E98EFC3-284D-D3E8-E50A-9E8782F149E5}"/>
+              <a16:creationId xmlns:a16="http://schemas.microsoft.com/office/drawing/2014/main" id="{F1444B57-9809-B8EF-0C7F-AE6472120B7F}"/>
             </a:ext>
           </a:extLst>
         </p:cNvPr>
@@ -27464,7 +25688,7 @@
           <p:cNvPr id="5" name="Retângulo 4">
             <a:extLst>
               <a:ext uri="{FF2B5EF4-FFF2-40B4-BE49-F238E27FC236}">
-                <a16:creationId xmlns:a16="http://schemas.microsoft.com/office/drawing/2014/main" id="{B1CC91A5-617B-F614-3886-EF59D2171B4E}"/>
+                <a16:creationId xmlns:a16="http://schemas.microsoft.com/office/drawing/2014/main" id="{E6077B58-1486-08CA-BCC5-A2E484F1859C}"/>
               </a:ext>
             </a:extLst>
           </p:cNvPr>
@@ -27518,325 +25742,6 @@
           <p:cNvPr id="2" name="Título 1">
             <a:extLst>
               <a:ext uri="{FF2B5EF4-FFF2-40B4-BE49-F238E27FC236}">
-                <a16:creationId xmlns:a16="http://schemas.microsoft.com/office/drawing/2014/main" id="{D778D71A-5EF8-AADA-8ACC-9C2D89EE5258}"/>
-              </a:ext>
-            </a:extLst>
-          </p:cNvPr>
-          <p:cNvSpPr>
-            <a:spLocks noGrp="1"/>
-          </p:cNvSpPr>
-          <p:nvPr>
-            <p:ph type="title"/>
-          </p:nvPr>
-        </p:nvSpPr>
-        <p:spPr>
-          <a:xfrm>
-            <a:off x="0" y="-1"/>
-            <a:ext cx="12192000" cy="1325563"/>
-          </a:xfrm>
-        </p:spPr>
-        <p:txBody>
-          <a:bodyPr/>
-          <a:lstStyle/>
-          <a:p>
-            <a:pPr algn="ctr"/>
-            <a:r>
-              <a:rPr lang="pt-BR" dirty="0">
-                <a:solidFill>
-                  <a:schemeClr val="bg1"/>
-                </a:solidFill>
-              </a:rPr>
-              <a:t>Bibliografia</a:t>
-            </a:r>
-          </a:p>
-        </p:txBody>
-      </p:sp>
-      <p:sp>
-        <p:nvSpPr>
-          <p:cNvPr id="12" name="AutoShape 6" descr="Lógica Proposicional x Lógica de Argumento ⋆ Colaborae">
-            <a:extLst>
-              <a:ext uri="{FF2B5EF4-FFF2-40B4-BE49-F238E27FC236}">
-                <a16:creationId xmlns:a16="http://schemas.microsoft.com/office/drawing/2014/main" id="{ED9276FC-2835-8FCA-9E06-6FEFA248BD66}"/>
-              </a:ext>
-            </a:extLst>
-          </p:cNvPr>
-          <p:cNvSpPr>
-            <a:spLocks noChangeAspect="1" noChangeArrowheads="1"/>
-          </p:cNvSpPr>
-          <p:nvPr/>
-        </p:nvSpPr>
-        <p:spPr bwMode="auto">
-          <a:xfrm>
-            <a:off x="5943600" y="-1707776"/>
-            <a:ext cx="5289176" cy="5289176"/>
-          </a:xfrm>
-          <a:prstGeom prst="rect">
-            <a:avLst/>
-          </a:prstGeom>
-          <a:noFill/>
-          <a:extLst>
-            <a:ext uri="{909E8E84-426E-40DD-AFC4-6F175D3DCCD1}">
-              <a14:hiddenFill xmlns:a14="http://schemas.microsoft.com/office/drawing/2010/main">
-                <a:solidFill>
-                  <a:srgbClr val="FFFFFF"/>
-                </a:solidFill>
-              </a14:hiddenFill>
-            </a:ext>
-          </a:extLst>
-        </p:spPr>
-        <p:txBody>
-          <a:bodyPr vert="horz" wrap="square" lIns="91440" tIns="45720" rIns="91440" bIns="45720" numCol="1" anchor="t" anchorCtr="0" compatLnSpc="1">
-            <a:prstTxWarp prst="textNoShape">
-              <a:avLst/>
-            </a:prstTxWarp>
-          </a:bodyPr>
-          <a:lstStyle/>
-          <a:p>
-            <a:endParaRPr lang="pt-BR"/>
-          </a:p>
-        </p:txBody>
-      </p:sp>
-      <p:sp>
-        <p:nvSpPr>
-          <p:cNvPr id="6" name="Espaço Reservado para Conteúdo 5">
-            <a:extLst>
-              <a:ext uri="{FF2B5EF4-FFF2-40B4-BE49-F238E27FC236}">
-                <a16:creationId xmlns:a16="http://schemas.microsoft.com/office/drawing/2014/main" id="{E0EE607F-D9F4-7951-D428-ABA18E81EE79}"/>
-              </a:ext>
-            </a:extLst>
-          </p:cNvPr>
-          <p:cNvSpPr>
-            <a:spLocks noGrp="1"/>
-          </p:cNvSpPr>
-          <p:nvPr>
-            <p:ph idx="1"/>
-          </p:nvPr>
-        </p:nvSpPr>
-        <p:spPr>
-          <a:xfrm>
-            <a:off x="1486540" y="1804575"/>
-            <a:ext cx="8670280" cy="4746632"/>
-          </a:xfrm>
-        </p:spPr>
-        <p:txBody>
-          <a:bodyPr/>
-          <a:lstStyle/>
-          <a:p>
-            <a:r>
-              <a:rPr lang="pt-BR" sz="2400" b="1" dirty="0"/>
-              <a:t>Básica</a:t>
-            </a:r>
-          </a:p>
-          <a:p>
-            <a:pPr lvl="1"/>
-            <a:r>
-              <a:rPr lang="pt-BR" sz="2000" dirty="0"/>
-              <a:t>Lógica de Programação e algoritmos – Sandro de Araújo</a:t>
-            </a:r>
-          </a:p>
-          <a:p>
-            <a:pPr lvl="1"/>
-            <a:r>
-              <a:rPr lang="pt-BR" sz="2000" dirty="0"/>
-              <a:t>Fundamentos da programação de computadores: algoritmos, pascal e C/C++ – Ana Fernanda </a:t>
-            </a:r>
-            <a:r>
-              <a:rPr lang="pt-BR" sz="2000" dirty="0" err="1"/>
-              <a:t>Ascenio</a:t>
-            </a:r>
-            <a:endParaRPr lang="pt-BR" sz="2000" dirty="0"/>
-          </a:p>
-          <a:p>
-            <a:pPr lvl="1"/>
-            <a:r>
-              <a:rPr lang="pt-BR" dirty="0"/>
-              <a:t>Treinamento em linguagem C – </a:t>
-            </a:r>
-            <a:r>
-              <a:rPr lang="pt-BR" dirty="0" err="1"/>
-              <a:t>Victorine</a:t>
-            </a:r>
-            <a:r>
-              <a:rPr lang="pt-BR" dirty="0"/>
-              <a:t> </a:t>
-            </a:r>
-            <a:r>
-              <a:rPr lang="pt-BR" dirty="0" err="1"/>
-              <a:t>Mizrahi</a:t>
-            </a:r>
-            <a:endParaRPr lang="pt-BR"/>
-          </a:p>
-          <a:p>
-            <a:pPr marL="457200" lvl="1" indent="0">
-              <a:buNone/>
-            </a:pPr>
-            <a:endParaRPr lang="pt-BR" sz="2400" dirty="0"/>
-          </a:p>
-          <a:p>
-            <a:r>
-              <a:rPr lang="pt-BR" sz="2400" b="1" dirty="0"/>
-              <a:t>Complementar</a:t>
-            </a:r>
-          </a:p>
-          <a:p>
-            <a:pPr lvl="1"/>
-            <a:r>
-              <a:rPr lang="pt-BR" sz="2000" dirty="0"/>
-              <a:t>Como programar em C – </a:t>
-            </a:r>
-            <a:r>
-              <a:rPr lang="pt-BR" sz="2000" dirty="0" err="1"/>
-              <a:t>Deitel</a:t>
-            </a:r>
-            <a:r>
-              <a:rPr lang="pt-BR" sz="2000" dirty="0"/>
-              <a:t> &amp; </a:t>
-            </a:r>
-            <a:r>
-              <a:rPr lang="pt-BR" sz="2000" dirty="0" err="1"/>
-              <a:t>Deitel</a:t>
-            </a:r>
-            <a:endParaRPr lang="pt-BR" sz="2000" dirty="0"/>
-          </a:p>
-          <a:p>
-            <a:pPr lvl="1"/>
-            <a:r>
-              <a:rPr lang="pt-BR" sz="2000" dirty="0"/>
-              <a:t>Conceitos de Linguagem de Programação – Robert </a:t>
-            </a:r>
-            <a:r>
-              <a:rPr lang="pt-BR" sz="2000" dirty="0" err="1"/>
-              <a:t>Sebesta</a:t>
-            </a:r>
-            <a:endParaRPr lang="pt-BR" sz="2000" dirty="0"/>
-          </a:p>
-          <a:p>
-            <a:pPr lvl="1"/>
-            <a:r>
-              <a:rPr lang="pt-BR" sz="2000" dirty="0"/>
-              <a:t>Linguagem C – </a:t>
-            </a:r>
-            <a:r>
-              <a:rPr lang="pt-BR" sz="2000" dirty="0" err="1"/>
-              <a:t>Luis</a:t>
-            </a:r>
-            <a:r>
-              <a:rPr lang="pt-BR" sz="2000" dirty="0"/>
-              <a:t> Damas</a:t>
-            </a:r>
-          </a:p>
-          <a:p>
-            <a:pPr marL="457200" lvl="1" indent="0">
-              <a:buNone/>
-            </a:pPr>
-            <a:endParaRPr lang="pt-BR" sz="2000" dirty="0"/>
-          </a:p>
-          <a:p>
-            <a:endParaRPr lang="pt-BR" sz="2400" dirty="0"/>
-          </a:p>
-          <a:p>
-            <a:endParaRPr lang="pt-BR" sz="2400" dirty="0"/>
-          </a:p>
-          <a:p>
-            <a:endParaRPr lang="pt-BR" dirty="0"/>
-          </a:p>
-        </p:txBody>
-      </p:sp>
-    </p:spTree>
-    <p:extLst>
-      <p:ext uri="{BB962C8B-B14F-4D97-AF65-F5344CB8AC3E}">
-        <p14:creationId xmlns:p14="http://schemas.microsoft.com/office/powerpoint/2010/main" val="1994978664"/>
-      </p:ext>
-    </p:extLst>
-  </p:cSld>
-  <p:clrMapOvr>
-    <a:masterClrMapping/>
-  </p:clrMapOvr>
-</p:sld>
-</file>
-
-<file path=ppt/slides/slide40.xml><?xml version="1.0" encoding="utf-8"?>
-<p:sld xmlns:a="http://schemas.openxmlformats.org/drawingml/2006/main" xmlns:r="http://schemas.openxmlformats.org/officeDocument/2006/relationships" xmlns:p="http://schemas.openxmlformats.org/presentationml/2006/main">
-  <p:cSld>
-    <p:spTree>
-      <p:nvGrpSpPr>
-        <p:cNvPr id="1" name="">
-          <a:extLst>
-            <a:ext uri="{FF2B5EF4-FFF2-40B4-BE49-F238E27FC236}">
-              <a16:creationId xmlns:a16="http://schemas.microsoft.com/office/drawing/2014/main" id="{F1444B57-9809-B8EF-0C7F-AE6472120B7F}"/>
-            </a:ext>
-          </a:extLst>
-        </p:cNvPr>
-        <p:cNvGrpSpPr/>
-        <p:nvPr/>
-      </p:nvGrpSpPr>
-      <p:grpSpPr>
-        <a:xfrm>
-          <a:off x="0" y="0"/>
-          <a:ext cx="0" cy="0"/>
-          <a:chOff x="0" y="0"/>
-          <a:chExt cx="0" cy="0"/>
-        </a:xfrm>
-      </p:grpSpPr>
-      <p:sp>
-        <p:nvSpPr>
-          <p:cNvPr id="5" name="Retângulo 4">
-            <a:extLst>
-              <a:ext uri="{FF2B5EF4-FFF2-40B4-BE49-F238E27FC236}">
-                <a16:creationId xmlns:a16="http://schemas.microsoft.com/office/drawing/2014/main" id="{E6077B58-1486-08CA-BCC5-A2E484F1859C}"/>
-              </a:ext>
-            </a:extLst>
-          </p:cNvPr>
-          <p:cNvSpPr/>
-          <p:nvPr/>
-        </p:nvSpPr>
-        <p:spPr>
-          <a:xfrm>
-            <a:off x="0" y="-2"/>
-            <a:ext cx="12192000" cy="1325563"/>
-          </a:xfrm>
-          <a:prstGeom prst="rect">
-            <a:avLst/>
-          </a:prstGeom>
-          <a:solidFill>
-            <a:srgbClr val="418AB3"/>
-          </a:solidFill>
-          <a:ln>
-            <a:solidFill>
-              <a:srgbClr val="418AB3"/>
-            </a:solidFill>
-          </a:ln>
-        </p:spPr>
-        <p:style>
-          <a:lnRef idx="2">
-            <a:schemeClr val="accent1">
-              <a:shade val="15000"/>
-            </a:schemeClr>
-          </a:lnRef>
-          <a:fillRef idx="1">
-            <a:schemeClr val="accent1"/>
-          </a:fillRef>
-          <a:effectRef idx="0">
-            <a:schemeClr val="accent1"/>
-          </a:effectRef>
-          <a:fontRef idx="minor">
-            <a:schemeClr val="lt1"/>
-          </a:fontRef>
-        </p:style>
-        <p:txBody>
-          <a:bodyPr rtlCol="0" anchor="ctr"/>
-          <a:lstStyle/>
-          <a:p>
-            <a:pPr algn="ctr"/>
-            <a:endParaRPr lang="pt-BR" dirty="0"/>
-          </a:p>
-        </p:txBody>
-      </p:sp>
-      <p:sp>
-        <p:nvSpPr>
-          <p:cNvPr id="2" name="Título 1">
-            <a:extLst>
-              <a:ext uri="{FF2B5EF4-FFF2-40B4-BE49-F238E27FC236}">
                 <a16:creationId xmlns:a16="http://schemas.microsoft.com/office/drawing/2014/main" id="{A795C159-1A8A-6D6A-5F80-5E350E84088C}"/>
               </a:ext>
             </a:extLst>
@@ -28122,7 +26027,7 @@
 </p:sld>
 </file>
 
-<file path=ppt/slides/slide41.xml><?xml version="1.0" encoding="utf-8"?>
+<file path=ppt/slides/slide37.xml><?xml version="1.0" encoding="utf-8"?>
 <p:sld xmlns:a="http://schemas.openxmlformats.org/drawingml/2006/main" xmlns:r="http://schemas.openxmlformats.org/officeDocument/2006/relationships" xmlns:p="http://schemas.openxmlformats.org/presentationml/2006/main">
   <p:cSld>
     <p:spTree>
@@ -28443,7 +26348,7 @@
 </p:sld>
 </file>
 
-<file path=ppt/slides/slide42.xml><?xml version="1.0" encoding="utf-8"?>
+<file path=ppt/slides/slide38.xml><?xml version="1.0" encoding="utf-8"?>
 <p:sld xmlns:a="http://schemas.openxmlformats.org/drawingml/2006/main" xmlns:r="http://schemas.openxmlformats.org/officeDocument/2006/relationships" xmlns:p="http://schemas.openxmlformats.org/presentationml/2006/main">
   <p:cSld>
     <p:spTree>
@@ -28952,7 +26857,7 @@
 </p:sld>
 </file>
 
-<file path=ppt/slides/slide43.xml><?xml version="1.0" encoding="utf-8"?>
+<file path=ppt/slides/slide39.xml><?xml version="1.0" encoding="utf-8"?>
 <p:sld xmlns:a="http://schemas.openxmlformats.org/drawingml/2006/main" xmlns:r="http://schemas.openxmlformats.org/officeDocument/2006/relationships" xmlns:p="http://schemas.openxmlformats.org/presentationml/2006/main">
   <p:cSld>
     <p:spTree>
@@ -29265,12 +27170,18 @@
 </p:sld>
 </file>
 
-<file path=ppt/slides/slide5.xml><?xml version="1.0" encoding="utf-8"?>
+<file path=ppt/slides/slide4.xml><?xml version="1.0" encoding="utf-8"?>
 <p:sld xmlns:a="http://schemas.openxmlformats.org/drawingml/2006/main" xmlns:r="http://schemas.openxmlformats.org/officeDocument/2006/relationships" xmlns:p="http://schemas.openxmlformats.org/presentationml/2006/main">
   <p:cSld>
     <p:spTree>
       <p:nvGrpSpPr>
-        <p:cNvPr id="1" name=""/>
+        <p:cNvPr id="1" name="">
+          <a:extLst>
+            <a:ext uri="{FF2B5EF4-FFF2-40B4-BE49-F238E27FC236}">
+              <a16:creationId xmlns:a16="http://schemas.microsoft.com/office/drawing/2014/main" id="{9429E4F4-2171-A611-20A4-E0BEBA08C22D}"/>
+            </a:ext>
+          </a:extLst>
+        </p:cNvPr>
         <p:cNvGrpSpPr/>
         <p:nvPr/>
       </p:nvGrpSpPr>
@@ -29284,167 +27195,10 @@
       </p:grpSpPr>
       <p:sp>
         <p:nvSpPr>
-          <p:cNvPr id="2" name="Título 1">
-            <a:extLst>
-              <a:ext uri="{FF2B5EF4-FFF2-40B4-BE49-F238E27FC236}">
-                <a16:creationId xmlns:a16="http://schemas.microsoft.com/office/drawing/2014/main" id="{92E9326E-3499-D287-DA5A-8AED2AD3A4D6}"/>
-              </a:ext>
-            </a:extLst>
-          </p:cNvPr>
-          <p:cNvSpPr>
-            <a:spLocks noGrp="1"/>
-          </p:cNvSpPr>
-          <p:nvPr>
-            <p:ph type="ctrTitle"/>
-          </p:nvPr>
-        </p:nvSpPr>
-        <p:spPr>
-          <a:xfrm>
-            <a:off x="0" y="2524919"/>
-            <a:ext cx="12192000" cy="1808162"/>
-          </a:xfrm>
-          <a:ln>
-            <a:noFill/>
-          </a:ln>
-        </p:spPr>
-        <p:txBody>
-          <a:bodyPr/>
-          <a:lstStyle/>
-          <a:p>
-            <a:r>
-              <a:rPr lang="pt-BR" dirty="0"/>
-              <a:t>módulo 1 - Introdução à </a:t>
-            </a:r>
-            <a:r>
-              <a:rPr lang="pt-BR" dirty="0" err="1"/>
-              <a:t>lp</a:t>
-            </a:r>
-            <a:endParaRPr lang="pt-BR" dirty="0"/>
-          </a:p>
-        </p:txBody>
-      </p:sp>
-      <p:sp>
-        <p:nvSpPr>
-          <p:cNvPr id="3" name="Subtítulo 2">
-            <a:extLst>
-              <a:ext uri="{FF2B5EF4-FFF2-40B4-BE49-F238E27FC236}">
-                <a16:creationId xmlns:a16="http://schemas.microsoft.com/office/drawing/2014/main" id="{7F2C7C20-5716-4992-8451-F28A3F0EB999}"/>
-              </a:ext>
-            </a:extLst>
-          </p:cNvPr>
-          <p:cNvSpPr>
-            <a:spLocks noGrp="1"/>
-          </p:cNvSpPr>
-          <p:nvPr>
-            <p:ph type="subTitle" idx="1"/>
-          </p:nvPr>
-        </p:nvSpPr>
-        <p:spPr>
-          <a:xfrm>
-            <a:off x="2695192" y="5207000"/>
-            <a:ext cx="6801612" cy="1651000"/>
-          </a:xfrm>
-        </p:spPr>
-        <p:txBody>
-          <a:bodyPr/>
-          <a:lstStyle/>
-          <a:p>
-            <a:r>
-              <a:rPr lang="pt-BR" dirty="0"/>
-              <a:t>Universidade de Uberaba</a:t>
-            </a:r>
-          </a:p>
-          <a:p>
-            <a:r>
-              <a:rPr lang="pt-BR" dirty="0"/>
-              <a:t>Marcio Salmazo Ramos</a:t>
-            </a:r>
-          </a:p>
-        </p:txBody>
-      </p:sp>
-      <p:pic>
-        <p:nvPicPr>
-          <p:cNvPr id="8194" name="Picture 2">
-            <a:extLst>
-              <a:ext uri="{FF2B5EF4-FFF2-40B4-BE49-F238E27FC236}">
-                <a16:creationId xmlns:a16="http://schemas.microsoft.com/office/drawing/2014/main" id="{739C2285-BBDC-FB8D-BB73-A95AC19BC977}"/>
-              </a:ext>
-            </a:extLst>
-          </p:cNvPr>
-          <p:cNvPicPr>
-            <a:picLocks noChangeAspect="1" noChangeArrowheads="1"/>
-          </p:cNvPicPr>
-          <p:nvPr/>
-        </p:nvPicPr>
-        <p:blipFill>
-          <a:blip r:embed="rId3">
-            <a:extLst>
-              <a:ext uri="{28A0092B-C50C-407E-A947-70E740481C1C}">
-                <a14:useLocalDpi xmlns:a14="http://schemas.microsoft.com/office/drawing/2010/main" val="0"/>
-              </a:ext>
-            </a:extLst>
-          </a:blip>
-          <a:srcRect/>
-          <a:stretch>
-            <a:fillRect/>
-          </a:stretch>
-        </p:blipFill>
-        <p:spPr bwMode="auto">
-          <a:xfrm>
-            <a:off x="4337048" y="447153"/>
-            <a:ext cx="3517900" cy="972919"/>
-          </a:xfrm>
-          <a:prstGeom prst="rect">
-            <a:avLst/>
-          </a:prstGeom>
-          <a:noFill/>
-          <a:extLst>
-            <a:ext uri="{909E8E84-426E-40DD-AFC4-6F175D3DCCD1}">
-              <a14:hiddenFill xmlns:a14="http://schemas.microsoft.com/office/drawing/2010/main">
-                <a:solidFill>
-                  <a:srgbClr val="FFFFFF"/>
-                </a:solidFill>
-              </a14:hiddenFill>
-            </a:ext>
-          </a:extLst>
-        </p:spPr>
-      </p:pic>
-    </p:spTree>
-    <p:extLst>
-      <p:ext uri="{BB962C8B-B14F-4D97-AF65-F5344CB8AC3E}">
-        <p14:creationId xmlns:p14="http://schemas.microsoft.com/office/powerpoint/2010/main" val="521462439"/>
-      </p:ext>
-    </p:extLst>
-  </p:cSld>
-  <p:clrMapOvr>
-    <a:masterClrMapping/>
-  </p:clrMapOvr>
-</p:sld>
-</file>
-
-<file path=ppt/slides/slide6.xml><?xml version="1.0" encoding="utf-8"?>
-<p:sld xmlns:a="http://schemas.openxmlformats.org/drawingml/2006/main" xmlns:r="http://schemas.openxmlformats.org/officeDocument/2006/relationships" xmlns:p="http://schemas.openxmlformats.org/presentationml/2006/main">
-  <p:cSld>
-    <p:spTree>
-      <p:nvGrpSpPr>
-        <p:cNvPr id="1" name=""/>
-        <p:cNvGrpSpPr/>
-        <p:nvPr/>
-      </p:nvGrpSpPr>
-      <p:grpSpPr>
-        <a:xfrm>
-          <a:off x="0" y="0"/>
-          <a:ext cx="0" cy="0"/>
-          <a:chOff x="0" y="0"/>
-          <a:chExt cx="0" cy="0"/>
-        </a:xfrm>
-      </p:grpSpPr>
-      <p:sp>
-        <p:nvSpPr>
           <p:cNvPr id="5" name="Retângulo 4">
             <a:extLst>
               <a:ext uri="{FF2B5EF4-FFF2-40B4-BE49-F238E27FC236}">
-                <a16:creationId xmlns:a16="http://schemas.microsoft.com/office/drawing/2014/main" id="{10CD15DF-178C-8225-DC27-A997E1995551}"/>
+                <a16:creationId xmlns:a16="http://schemas.microsoft.com/office/drawing/2014/main" id="{7E3F869F-C534-FD4D-1148-C594EFCBA687}"/>
               </a:ext>
             </a:extLst>
           </p:cNvPr>
@@ -29498,7 +27252,7 @@
           <p:cNvPr id="2" name="Título 1">
             <a:extLst>
               <a:ext uri="{FF2B5EF4-FFF2-40B4-BE49-F238E27FC236}">
-                <a16:creationId xmlns:a16="http://schemas.microsoft.com/office/drawing/2014/main" id="{20CFDDE8-0849-DCD6-CFFE-909EF72466EA}"/>
+                <a16:creationId xmlns:a16="http://schemas.microsoft.com/office/drawing/2014/main" id="{EAB1BBAC-EA12-CF1A-4608-331438103249}"/>
               </a:ext>
             </a:extLst>
           </p:cNvPr>
@@ -29526,7 +27280,7 @@
                   <a:schemeClr val="bg1"/>
                 </a:solidFill>
               </a:rPr>
-              <a:t>Conceitos Introdutórios</a:t>
+              <a:t>Níveis de Linguagem</a:t>
             </a:r>
           </a:p>
         </p:txBody>
@@ -29536,7 +27290,7 @@
           <p:cNvPr id="12" name="AutoShape 6" descr="Lógica Proposicional x Lógica de Argumento ⋆ Colaborae">
             <a:extLst>
               <a:ext uri="{FF2B5EF4-FFF2-40B4-BE49-F238E27FC236}">
-                <a16:creationId xmlns:a16="http://schemas.microsoft.com/office/drawing/2014/main" id="{A38EF95E-E786-0234-E618-70938A65AA12}"/>
+                <a16:creationId xmlns:a16="http://schemas.microsoft.com/office/drawing/2014/main" id="{73A2E345-1650-BAC8-2E96-616F1C30B02D}"/>
               </a:ext>
             </a:extLst>
           </p:cNvPr>
@@ -29581,7 +27335,7 @@
           <p:cNvPr id="6" name="Espaço Reservado para Conteúdo 5">
             <a:extLst>
               <a:ext uri="{FF2B5EF4-FFF2-40B4-BE49-F238E27FC236}">
-                <a16:creationId xmlns:a16="http://schemas.microsoft.com/office/drawing/2014/main" id="{0B58FF2C-8CDD-0E09-7F6D-242B2C7C03ED}"/>
+                <a16:creationId xmlns:a16="http://schemas.microsoft.com/office/drawing/2014/main" id="{BC7B0C34-EF3C-0168-9FC4-0838347B5D9E}"/>
               </a:ext>
             </a:extLst>
           </p:cNvPr>
@@ -29594,8 +27348,8 @@
         </p:nvSpPr>
         <p:spPr>
           <a:xfrm>
-            <a:off x="473720" y="2172494"/>
-            <a:ext cx="6019558" cy="3657600"/>
+            <a:off x="838202" y="1825625"/>
+            <a:ext cx="6019558" cy="4351338"/>
           </a:xfrm>
         </p:spPr>
         <p:txBody>
@@ -29604,25 +27358,49 @@
           <a:p>
             <a:r>
               <a:rPr lang="pt-BR" sz="2400" dirty="0"/>
-              <a:t>A linguagem de programação é o meio formal de comunicação com o computador</a:t>
-            </a:r>
-          </a:p>
-          <a:p>
-            <a:endParaRPr lang="pt-BR" sz="2400" dirty="0"/>
-          </a:p>
-          <a:p>
+              <a:t>As linguagens são </a:t>
+            </a:r>
+            <a:r>
+              <a:rPr lang="pt-BR" sz="2400"/>
+              <a:t>subdivididas em 3 </a:t>
+            </a:r>
             <a:r>
               <a:rPr lang="pt-BR" sz="2400" dirty="0"/>
-              <a:t>As diferentes linguagens buscam atender à alguma necessidade em específico</a:t>
-            </a:r>
-          </a:p>
-          <a:p>
-            <a:endParaRPr lang="pt-BR" sz="2400" dirty="0"/>
-          </a:p>
-          <a:p>
-            <a:r>
-              <a:rPr lang="pt-BR" sz="2400" dirty="0"/>
-              <a:t>Cada uma possui um conjunto formal de regras sintáticas e semânticas</a:t>
+              <a:t>categorias distintas:</a:t>
+            </a:r>
+          </a:p>
+          <a:p>
+            <a:pPr lvl="1"/>
+            <a:endParaRPr lang="pt-BR" sz="2000" dirty="0"/>
+          </a:p>
+          <a:p>
+            <a:pPr marL="914400" lvl="1" indent="-457200">
+              <a:buFont typeface="+mj-lt"/>
+              <a:buAutoNum type="arabicPeriod"/>
+            </a:pPr>
+            <a:r>
+              <a:rPr lang="pt-BR" sz="2000" dirty="0"/>
+              <a:t>Linguagem de Máquina</a:t>
+            </a:r>
+          </a:p>
+          <a:p>
+            <a:pPr marL="914400" lvl="1" indent="-457200">
+              <a:buFont typeface="+mj-lt"/>
+              <a:buAutoNum type="arabicPeriod"/>
+            </a:pPr>
+            <a:r>
+              <a:rPr lang="pt-BR" sz="2000" dirty="0"/>
+              <a:t>Linguagem Assembly</a:t>
+            </a:r>
+          </a:p>
+          <a:p>
+            <a:pPr marL="914400" lvl="1" indent="-457200">
+              <a:buFont typeface="+mj-lt"/>
+              <a:buAutoNum type="arabicPeriod"/>
+            </a:pPr>
+            <a:r>
+              <a:rPr lang="pt-BR" sz="2000" dirty="0"/>
+              <a:t>Linguagem de Alto Nível</a:t>
             </a:r>
           </a:p>
           <a:p>
@@ -29635,10 +27413,10 @@
       </p:sp>
       <p:pic>
         <p:nvPicPr>
-          <p:cNvPr id="1026" name="Picture 2" descr="Nenhuma descrição de foto disponível.">
-            <a:extLst>
-              <a:ext uri="{FF2B5EF4-FFF2-40B4-BE49-F238E27FC236}">
-                <a16:creationId xmlns:a16="http://schemas.microsoft.com/office/drawing/2014/main" id="{767076CD-9084-F479-B0B8-384F0E2B5407}"/>
+          <p:cNvPr id="2050" name="Picture 2" descr="Linguagens de Programação">
+            <a:extLst>
+              <a:ext uri="{FF2B5EF4-FFF2-40B4-BE49-F238E27FC236}">
+                <a16:creationId xmlns:a16="http://schemas.microsoft.com/office/drawing/2014/main" id="{54F43681-4BA0-DF66-CBC8-A717009398E5}"/>
               </a:ext>
             </a:extLst>
           </p:cNvPr>
@@ -29647,7 +27425,7 @@
           </p:cNvPicPr>
           <p:nvPr/>
         </p:nvPicPr>
-        <p:blipFill rotWithShape="1">
+        <p:blipFill>
           <a:blip r:embed="rId3">
             <a:extLst>
               <a:ext uri="{28A0092B-C50C-407E-A947-70E740481C1C}">
@@ -29655,15 +27433,15 @@
               </a:ext>
             </a:extLst>
           </a:blip>
-          <a:srcRect t="15647" b="4352"/>
+          <a:srcRect/>
           <a:stretch>
             <a:fillRect/>
           </a:stretch>
         </p:blipFill>
         <p:spPr bwMode="auto">
           <a:xfrm>
-            <a:off x="6667378" y="2172494"/>
-            <a:ext cx="5143500" cy="3657600"/>
+            <a:off x="5072425" y="3429000"/>
+            <a:ext cx="6677025" cy="2714625"/>
           </a:xfrm>
           <a:prstGeom prst="rect">
             <a:avLst/>
@@ -29683,7 +27461,7 @@
     </p:spTree>
     <p:extLst>
       <p:ext uri="{BB962C8B-B14F-4D97-AF65-F5344CB8AC3E}">
-        <p14:creationId xmlns:p14="http://schemas.microsoft.com/office/powerpoint/2010/main" val="3149977511"/>
+        <p14:creationId xmlns:p14="http://schemas.microsoft.com/office/powerpoint/2010/main" val="3304878716"/>
       </p:ext>
     </p:extLst>
   </p:cSld>
@@ -29693,7 +27471,7 @@
 </p:sld>
 </file>
 
-<file path=ppt/slides/slide7.xml><?xml version="1.0" encoding="utf-8"?>
+<file path=ppt/slides/slide5.xml><?xml version="1.0" encoding="utf-8"?>
 <p:sld xmlns:a="http://schemas.openxmlformats.org/drawingml/2006/main" xmlns:r="http://schemas.openxmlformats.org/officeDocument/2006/relationships" xmlns:p="http://schemas.openxmlformats.org/presentationml/2006/main">
   <p:cSld>
     <p:spTree>
@@ -29701,7 +27479,7 @@
         <p:cNvPr id="1" name="">
           <a:extLst>
             <a:ext uri="{FF2B5EF4-FFF2-40B4-BE49-F238E27FC236}">
-              <a16:creationId xmlns:a16="http://schemas.microsoft.com/office/drawing/2014/main" id="{7A1E17AB-793B-33ED-F53D-DFF1D00E91DD}"/>
+              <a16:creationId xmlns:a16="http://schemas.microsoft.com/office/drawing/2014/main" id="{699BD736-CEF0-B6C0-28BC-774DA5F6E1A8}"/>
             </a:ext>
           </a:extLst>
         </p:cNvPr>
@@ -29721,7 +27499,7 @@
           <p:cNvPr id="5" name="Retângulo 4">
             <a:extLst>
               <a:ext uri="{FF2B5EF4-FFF2-40B4-BE49-F238E27FC236}">
-                <a16:creationId xmlns:a16="http://schemas.microsoft.com/office/drawing/2014/main" id="{9B5381A2-21D3-988B-6C4F-1A5A0E3E4792}"/>
+                <a16:creationId xmlns:a16="http://schemas.microsoft.com/office/drawing/2014/main" id="{717F9DE4-EB99-5874-7C93-C50756B60B56}"/>
               </a:ext>
             </a:extLst>
           </p:cNvPr>
@@ -29775,7 +27553,7 @@
           <p:cNvPr id="2" name="Título 1">
             <a:extLst>
               <a:ext uri="{FF2B5EF4-FFF2-40B4-BE49-F238E27FC236}">
-                <a16:creationId xmlns:a16="http://schemas.microsoft.com/office/drawing/2014/main" id="{BD8FE61A-0CEC-FC31-6387-C133DC1882B1}"/>
+                <a16:creationId xmlns:a16="http://schemas.microsoft.com/office/drawing/2014/main" id="{BECB663B-29B6-EF3E-539D-7287CF4F6231}"/>
               </a:ext>
             </a:extLst>
           </p:cNvPr>
@@ -29803,21 +27581,8 @@
                   <a:schemeClr val="bg1"/>
                 </a:solidFill>
               </a:rPr>
-              <a:t>LP X Algoritmo X </a:t>
-            </a:r>
-            <a:r>
-              <a:rPr lang="pt-BR" dirty="0" err="1">
-                <a:solidFill>
-                  <a:schemeClr val="bg1"/>
-                </a:solidFill>
-              </a:rPr>
-              <a:t>Pseudo-código</a:t>
-            </a:r>
-            <a:endParaRPr lang="pt-BR" dirty="0">
-              <a:solidFill>
-                <a:schemeClr val="bg1"/>
-              </a:solidFill>
-            </a:endParaRPr>
+              <a:t>Linguagem de Máquina</a:t>
+            </a:r>
           </a:p>
         </p:txBody>
       </p:sp>
@@ -29826,7 +27591,7 @@
           <p:cNvPr id="12" name="AutoShape 6" descr="Lógica Proposicional x Lógica de Argumento ⋆ Colaborae">
             <a:extLst>
               <a:ext uri="{FF2B5EF4-FFF2-40B4-BE49-F238E27FC236}">
-                <a16:creationId xmlns:a16="http://schemas.microsoft.com/office/drawing/2014/main" id="{F0C2298D-D8FC-A002-D482-14EA1BD148C9}"/>
+                <a16:creationId xmlns:a16="http://schemas.microsoft.com/office/drawing/2014/main" id="{3965B379-0BB9-05F4-129D-B28D07BD1ACC}"/>
               </a:ext>
             </a:extLst>
           </p:cNvPr>
@@ -29871,7 +27636,7 @@
           <p:cNvPr id="6" name="Espaço Reservado para Conteúdo 5">
             <a:extLst>
               <a:ext uri="{FF2B5EF4-FFF2-40B4-BE49-F238E27FC236}">
-                <a16:creationId xmlns:a16="http://schemas.microsoft.com/office/drawing/2014/main" id="{603F71DD-09FA-DB12-8FA3-33D5EC43D2D1}"/>
+                <a16:creationId xmlns:a16="http://schemas.microsoft.com/office/drawing/2014/main" id="{B400FDEC-E1C9-8037-38E3-62ED4ADC7A3F}"/>
               </a:ext>
             </a:extLst>
           </p:cNvPr>
@@ -29884,8 +27649,8 @@
         </p:nvSpPr>
         <p:spPr>
           <a:xfrm>
-            <a:off x="276952" y="1987298"/>
-            <a:ext cx="6413216" cy="4494524"/>
+            <a:off x="742377" y="1640958"/>
+            <a:ext cx="5527874" cy="4887691"/>
           </a:xfrm>
         </p:spPr>
         <p:txBody>
@@ -29895,20 +27660,21 @@
           <a:lstStyle/>
           <a:p>
             <a:r>
-              <a:rPr lang="pt-BR" sz="2400" b="1" dirty="0"/>
-              <a:t>O </a:t>
-            </a:r>
-            <a:r>
-              <a:rPr lang="pt-BR" sz="2400" b="1" dirty="0" err="1"/>
-              <a:t>pseudo-código</a:t>
-            </a:r>
-            <a:r>
-              <a:rPr lang="pt-BR" sz="2400" b="1" dirty="0"/>
-              <a:t> </a:t>
-            </a:r>
-            <a:r>
               <a:rPr lang="pt-BR" sz="2400" dirty="0"/>
-              <a:t>é a forma simples e direta de escrever a lógica de um programa usando a língua nativa</a:t>
+              <a:t>Forma básica de instrução compreendida pelo computador</a:t>
+            </a:r>
+            <a:endParaRPr lang="pt-BR" sz="2000" dirty="0"/>
+          </a:p>
+          <a:p>
+            <a:pPr marL="0" indent="0">
+              <a:buNone/>
+            </a:pPr>
+            <a:endParaRPr lang="pt-BR" sz="2000" dirty="0"/>
+          </a:p>
+          <a:p>
+            <a:r>
+              <a:rPr lang="pt-BR" sz="2400" dirty="0"/>
+              <a:t>Caracterizada por ser uma sequências de 0 e 1, ou de valores Hexadecimais </a:t>
             </a:r>
           </a:p>
           <a:p>
@@ -29916,12 +27682,8 @@
           </a:p>
           <a:p>
             <a:r>
-              <a:rPr lang="pt-BR" sz="2400" b="1" dirty="0"/>
-              <a:t>O algoritmo</a:t>
-            </a:r>
-            <a:r>
               <a:rPr lang="pt-BR" sz="2400" dirty="0"/>
-              <a:t> é uma sequência de instruções ou regras bem definidas para realizar uma tarefa.</a:t>
+              <a:t>Cada arquitetura compreende sua própria linguagem de máquina</a:t>
             </a:r>
           </a:p>
           <a:p>
@@ -29929,25 +27691,22 @@
           </a:p>
           <a:p>
             <a:r>
-              <a:rPr lang="pt-BR" sz="2400" b="1" dirty="0"/>
-              <a:t>A LP </a:t>
-            </a:r>
-            <a:r>
               <a:rPr lang="pt-BR" sz="2400" dirty="0"/>
-              <a:t>é um conjunto de regras sintáticas e semânticas para comunicação com a máquina.</a:t>
-            </a:r>
-          </a:p>
-          <a:p>
+              <a:t>Opera de acordo com o projeto de Hardware do processador</a:t>
+            </a:r>
             <a:endParaRPr lang="pt-BR" dirty="0"/>
+          </a:p>
+          <a:p>
+            <a:endParaRPr lang="pt-BR" sz="2400" dirty="0"/>
           </a:p>
         </p:txBody>
       </p:sp>
       <p:pic>
         <p:nvPicPr>
-          <p:cNvPr id="3074" name="Picture 2" descr="Sobre pseudocódigo, leia as alternativas e assinale a opção correta: I - O  pseudocódigo é uma linguagem - brainly.com.br">
-            <a:extLst>
-              <a:ext uri="{FF2B5EF4-FFF2-40B4-BE49-F238E27FC236}">
-                <a16:creationId xmlns:a16="http://schemas.microsoft.com/office/drawing/2014/main" id="{519457E3-8DE1-752D-1393-96E1E3708608}"/>
+          <p:cNvPr id="4098" name="Picture 2" descr="Importância da linguem de Programação de Baixo Nível">
+            <a:extLst>
+              <a:ext uri="{FF2B5EF4-FFF2-40B4-BE49-F238E27FC236}">
+                <a16:creationId xmlns:a16="http://schemas.microsoft.com/office/drawing/2014/main" id="{36D343F2-A8DE-A76F-F763-075091475246}"/>
               </a:ext>
             </a:extLst>
           </p:cNvPr>
@@ -29964,15 +27723,15 @@
               </a:ext>
             </a:extLst>
           </a:blip>
-          <a:srcRect l="846" r="2476" b="4286"/>
+          <a:srcRect l="40928" r="1050" b="68373"/>
           <a:stretch>
             <a:fillRect/>
           </a:stretch>
         </p:blipFill>
         <p:spPr bwMode="auto">
           <a:xfrm>
-            <a:off x="6690168" y="1896499"/>
-            <a:ext cx="5429470" cy="4031538"/>
+            <a:off x="7909790" y="1814843"/>
+            <a:ext cx="3067291" cy="1277273"/>
           </a:xfrm>
           <a:prstGeom prst="rect">
             <a:avLst/>
@@ -29989,10 +27748,104 @@
           </a:extLst>
         </p:spPr>
       </p:pic>
+      <p:pic>
+        <p:nvPicPr>
+          <p:cNvPr id="4100" name="Picture 4" descr="Organization of Computer Systems: ISA, Machine Language, Number Systems">
+            <a:extLst>
+              <a:ext uri="{FF2B5EF4-FFF2-40B4-BE49-F238E27FC236}">
+                <a16:creationId xmlns:a16="http://schemas.microsoft.com/office/drawing/2014/main" id="{103232D8-49E8-B066-4C6A-8F3AF74E3720}"/>
+              </a:ext>
+            </a:extLst>
+          </p:cNvPr>
+          <p:cNvPicPr>
+            <a:picLocks noChangeAspect="1" noChangeArrowheads="1"/>
+          </p:cNvPicPr>
+          <p:nvPr/>
+        </p:nvPicPr>
+        <p:blipFill>
+          <a:blip r:embed="rId4">
+            <a:extLst>
+              <a:ext uri="{28A0092B-C50C-407E-A947-70E740481C1C}">
+                <a14:useLocalDpi xmlns:a14="http://schemas.microsoft.com/office/drawing/2010/main" val="0"/>
+              </a:ext>
+            </a:extLst>
+          </a:blip>
+          <a:srcRect/>
+          <a:stretch>
+            <a:fillRect/>
+          </a:stretch>
+        </p:blipFill>
+        <p:spPr bwMode="auto">
+          <a:xfrm>
+            <a:off x="6749863" y="3339436"/>
+            <a:ext cx="4962525" cy="3028950"/>
+          </a:xfrm>
+          <a:prstGeom prst="rect">
+            <a:avLst/>
+          </a:prstGeom>
+          <a:noFill/>
+          <a:extLst>
+            <a:ext uri="{909E8E84-426E-40DD-AFC4-6F175D3DCCD1}">
+              <a14:hiddenFill xmlns:a14="http://schemas.microsoft.com/office/drawing/2010/main">
+                <a:solidFill>
+                  <a:srgbClr val="FFFFFF"/>
+                </a:solidFill>
+              </a14:hiddenFill>
+            </a:ext>
+          </a:extLst>
+        </p:spPr>
+      </p:pic>
+      <p:sp>
+        <p:nvSpPr>
+          <p:cNvPr id="4" name="CaixaDeTexto 3">
+            <a:extLst>
+              <a:ext uri="{FF2B5EF4-FFF2-40B4-BE49-F238E27FC236}">
+                <a16:creationId xmlns:a16="http://schemas.microsoft.com/office/drawing/2014/main" id="{3B9E8019-D6C5-3D11-235D-94FE651B5926}"/>
+              </a:ext>
+            </a:extLst>
+          </p:cNvPr>
+          <p:cNvSpPr txBox="1"/>
+          <p:nvPr/>
+        </p:nvSpPr>
+        <p:spPr>
+          <a:xfrm>
+            <a:off x="7498054" y="6343983"/>
+            <a:ext cx="3466142" cy="369332"/>
+          </a:xfrm>
+          <a:prstGeom prst="rect">
+            <a:avLst/>
+          </a:prstGeom>
+          <a:noFill/>
+        </p:spPr>
+        <p:txBody>
+          <a:bodyPr wrap="none" rtlCol="0">
+            <a:spAutoFit/>
+          </a:bodyPr>
+          <a:lstStyle/>
+          <a:p>
+            <a:r>
+              <a:rPr lang="pt-BR" dirty="0" err="1"/>
+              <a:t>Instruction</a:t>
+            </a:r>
+            <a:r>
+              <a:rPr lang="pt-BR" dirty="0"/>
+              <a:t> Set </a:t>
+            </a:r>
+            <a:r>
+              <a:rPr lang="pt-BR" dirty="0" err="1"/>
+              <a:t>Architecture</a:t>
+            </a:r>
+            <a:r>
+              <a:rPr lang="pt-BR" dirty="0"/>
+              <a:t> – MIPS</a:t>
+            </a:r>
+          </a:p>
+        </p:txBody>
+      </p:sp>
     </p:spTree>
     <p:extLst>
       <p:ext uri="{BB962C8B-B14F-4D97-AF65-F5344CB8AC3E}">
-        <p14:creationId xmlns:p14="http://schemas.microsoft.com/office/powerpoint/2010/main" val="4142721531"/>
+        <p14:creationId xmlns:p14="http://schemas.microsoft.com/office/powerpoint/2010/main" val="4102101521"/>
       </p:ext>
     </p:extLst>
   </p:cSld>
@@ -30002,7 +27855,7 @@
 </p:sld>
 </file>
 
-<file path=ppt/slides/slide8.xml><?xml version="1.0" encoding="utf-8"?>
+<file path=ppt/slides/slide6.xml><?xml version="1.0" encoding="utf-8"?>
 <p:sld xmlns:a="http://schemas.openxmlformats.org/drawingml/2006/main" xmlns:r="http://schemas.openxmlformats.org/officeDocument/2006/relationships" xmlns:p="http://schemas.openxmlformats.org/presentationml/2006/main">
   <p:cSld>
     <p:spTree>
@@ -30010,7 +27863,7 @@
         <p:cNvPr id="1" name="">
           <a:extLst>
             <a:ext uri="{FF2B5EF4-FFF2-40B4-BE49-F238E27FC236}">
-              <a16:creationId xmlns:a16="http://schemas.microsoft.com/office/drawing/2014/main" id="{9429E4F4-2171-A611-20A4-E0BEBA08C22D}"/>
+              <a16:creationId xmlns:a16="http://schemas.microsoft.com/office/drawing/2014/main" id="{9825C57C-4AC3-DF5A-D004-04DB875A0EED}"/>
             </a:ext>
           </a:extLst>
         </p:cNvPr>
@@ -30030,7 +27883,7 @@
           <p:cNvPr id="5" name="Retângulo 4">
             <a:extLst>
               <a:ext uri="{FF2B5EF4-FFF2-40B4-BE49-F238E27FC236}">
-                <a16:creationId xmlns:a16="http://schemas.microsoft.com/office/drawing/2014/main" id="{7E3F869F-C534-FD4D-1148-C594EFCBA687}"/>
+                <a16:creationId xmlns:a16="http://schemas.microsoft.com/office/drawing/2014/main" id="{E3FC9A9B-8E88-FEA5-7D07-53A05DB749B3}"/>
               </a:ext>
             </a:extLst>
           </p:cNvPr>
@@ -30084,7 +27937,7 @@
           <p:cNvPr id="2" name="Título 1">
             <a:extLst>
               <a:ext uri="{FF2B5EF4-FFF2-40B4-BE49-F238E27FC236}">
-                <a16:creationId xmlns:a16="http://schemas.microsoft.com/office/drawing/2014/main" id="{EAB1BBAC-EA12-CF1A-4608-331438103249}"/>
+                <a16:creationId xmlns:a16="http://schemas.microsoft.com/office/drawing/2014/main" id="{B7226DD1-2C9F-E5DD-5255-F8955046DC72}"/>
               </a:ext>
             </a:extLst>
           </p:cNvPr>
@@ -30112,7 +27965,7 @@
                   <a:schemeClr val="bg1"/>
                 </a:solidFill>
               </a:rPr>
-              <a:t>Níveis de Linguagem</a:t>
+              <a:t>Linguagem Assembly</a:t>
             </a:r>
           </a:p>
         </p:txBody>
@@ -30122,7 +27975,7 @@
           <p:cNvPr id="12" name="AutoShape 6" descr="Lógica Proposicional x Lógica de Argumento ⋆ Colaborae">
             <a:extLst>
               <a:ext uri="{FF2B5EF4-FFF2-40B4-BE49-F238E27FC236}">
-                <a16:creationId xmlns:a16="http://schemas.microsoft.com/office/drawing/2014/main" id="{73A2E345-1650-BAC8-2E96-616F1C30B02D}"/>
+                <a16:creationId xmlns:a16="http://schemas.microsoft.com/office/drawing/2014/main" id="{58CD5F2B-3F4B-1170-1A3A-4C958128A9FC}"/>
               </a:ext>
             </a:extLst>
           </p:cNvPr>
@@ -30167,7 +28020,7 @@
           <p:cNvPr id="6" name="Espaço Reservado para Conteúdo 5">
             <a:extLst>
               <a:ext uri="{FF2B5EF4-FFF2-40B4-BE49-F238E27FC236}">
-                <a16:creationId xmlns:a16="http://schemas.microsoft.com/office/drawing/2014/main" id="{BC7B0C34-EF3C-0168-9FC4-0838347B5D9E}"/>
+                <a16:creationId xmlns:a16="http://schemas.microsoft.com/office/drawing/2014/main" id="{4E9CDBE0-1F00-547B-C4DA-F12EE2721406}"/>
               </a:ext>
             </a:extLst>
           </p:cNvPr>
@@ -30180,75 +28033,69 @@
         </p:nvSpPr>
         <p:spPr>
           <a:xfrm>
-            <a:off x="838202" y="1825625"/>
-            <a:ext cx="6019558" cy="4351338"/>
+            <a:off x="520861" y="1640492"/>
+            <a:ext cx="7338349" cy="4413067"/>
           </a:xfrm>
         </p:spPr>
         <p:txBody>
-          <a:bodyPr/>
+          <a:bodyPr>
+            <a:normAutofit/>
+          </a:bodyPr>
           <a:lstStyle/>
           <a:p>
             <a:r>
               <a:rPr lang="pt-BR" sz="2400" dirty="0"/>
-              <a:t>As linguagens são </a:t>
-            </a:r>
-            <a:r>
-              <a:rPr lang="pt-BR" sz="2400"/>
-              <a:t>subdivididas em 3 </a:t>
-            </a:r>
+              <a:t>Uso de abreviações textuais que representam instruções de código de máquina – Mnemônicos.</a:t>
+            </a:r>
+            <a:endParaRPr lang="pt-BR" sz="2000" dirty="0"/>
+          </a:p>
+          <a:p>
+            <a:endParaRPr lang="pt-BR" sz="2400" dirty="0"/>
+          </a:p>
+          <a:p>
             <a:r>
               <a:rPr lang="pt-BR" sz="2400" dirty="0"/>
-              <a:t>categorias distintas:</a:t>
-            </a:r>
-          </a:p>
-          <a:p>
-            <a:pPr lvl="1"/>
-            <a:endParaRPr lang="pt-BR" sz="2000" dirty="0"/>
-          </a:p>
-          <a:p>
-            <a:pPr marL="914400" lvl="1" indent="-457200">
-              <a:buFont typeface="+mj-lt"/>
-              <a:buAutoNum type="arabicPeriod"/>
-            </a:pPr>
-            <a:r>
-              <a:rPr lang="pt-BR" sz="2000" dirty="0"/>
-              <a:t>Linguagem de Máquina</a:t>
-            </a:r>
-          </a:p>
-          <a:p>
-            <a:pPr marL="914400" lvl="1" indent="-457200">
-              <a:buFont typeface="+mj-lt"/>
-              <a:buAutoNum type="arabicPeriod"/>
-            </a:pPr>
-            <a:r>
-              <a:rPr lang="pt-BR" sz="2000" dirty="0"/>
-              <a:t>Linguagem Assembly</a:t>
-            </a:r>
-          </a:p>
-          <a:p>
-            <a:pPr marL="914400" lvl="1" indent="-457200">
-              <a:buFont typeface="+mj-lt"/>
-              <a:buAutoNum type="arabicPeriod"/>
-            </a:pPr>
-            <a:r>
-              <a:rPr lang="pt-BR" sz="2000" dirty="0"/>
-              <a:t>Linguagem de Alto Nível</a:t>
+              <a:t>Dependem de programas tradutores (</a:t>
+            </a:r>
+            <a:r>
+              <a:rPr lang="pt-BR" sz="2400" dirty="0" err="1"/>
+              <a:t>assemblers</a:t>
+            </a:r>
+            <a:r>
+              <a:rPr lang="pt-BR" sz="2400" dirty="0"/>
+              <a:t>) para converter o código para linguagem de máquina.</a:t>
             </a:r>
           </a:p>
           <a:p>
             <a:endParaRPr lang="pt-BR" sz="2400" dirty="0"/>
           </a:p>
           <a:p>
+            <a:r>
+              <a:rPr lang="pt-BR" sz="2400" dirty="0"/>
+              <a:t>Seu uso ainda se justifica em casos onde o desempenho é critico ou sistemas embarcados</a:t>
+            </a:r>
+          </a:p>
+          <a:p>
+            <a:endParaRPr lang="pt-BR" sz="2400" dirty="0"/>
+          </a:p>
+          <a:p>
+            <a:r>
+              <a:rPr lang="pt-BR" sz="2400" dirty="0"/>
+              <a:t>A conversão de suas instruções é  ‘1 pra 1’</a:t>
+            </a:r>
             <a:endParaRPr lang="pt-BR" dirty="0"/>
+          </a:p>
+          <a:p>
+            <a:endParaRPr lang="pt-BR" sz="2400" dirty="0"/>
           </a:p>
         </p:txBody>
       </p:sp>
       <p:pic>
         <p:nvPicPr>
-          <p:cNvPr id="2050" name="Picture 2" descr="Linguagens de Programação">
-            <a:extLst>
-              <a:ext uri="{FF2B5EF4-FFF2-40B4-BE49-F238E27FC236}">
-                <a16:creationId xmlns:a16="http://schemas.microsoft.com/office/drawing/2014/main" id="{54F43681-4BA0-DF66-CBC8-A717009398E5}"/>
+          <p:cNvPr id="5122" name="Picture 2" descr="Importância da linguem de Programação de Baixo Nível">
+            <a:extLst>
+              <a:ext uri="{FF2B5EF4-FFF2-40B4-BE49-F238E27FC236}">
+                <a16:creationId xmlns:a16="http://schemas.microsoft.com/office/drawing/2014/main" id="{EADFA9B8-4F3A-682A-1578-30B5339E88A2}"/>
               </a:ext>
             </a:extLst>
           </p:cNvPr>
@@ -30257,7 +28104,7 @@
           </p:cNvPicPr>
           <p:nvPr/>
         </p:nvPicPr>
-        <p:blipFill>
+        <p:blipFill rotWithShape="1">
           <a:blip r:embed="rId3">
             <a:extLst>
               <a:ext uri="{28A0092B-C50C-407E-A947-70E740481C1C}">
@@ -30265,15 +28112,15 @@
               </a:ext>
             </a:extLst>
           </a:blip>
-          <a:srcRect/>
+          <a:srcRect l="1230" r="58769" b="57292"/>
           <a:stretch>
             <a:fillRect/>
           </a:stretch>
         </p:blipFill>
         <p:spPr bwMode="auto">
           <a:xfrm>
-            <a:off x="5072425" y="3429000"/>
-            <a:ext cx="6677025" cy="2714625"/>
+            <a:off x="8588188" y="1842207"/>
+            <a:ext cx="2990126" cy="2439003"/>
           </a:xfrm>
           <a:prstGeom prst="rect">
             <a:avLst/>
@@ -30290,10 +28137,47 @@
           </a:extLst>
         </p:spPr>
       </p:pic>
+      <p:pic>
+        <p:nvPicPr>
+          <p:cNvPr id="10" name="Imagem 9">
+            <a:extLst>
+              <a:ext uri="{FF2B5EF4-FFF2-40B4-BE49-F238E27FC236}">
+                <a16:creationId xmlns:a16="http://schemas.microsoft.com/office/drawing/2014/main" id="{EAF9DFF1-4300-C177-C5B9-0FE8BD01CBE9}"/>
+              </a:ext>
+            </a:extLst>
+          </p:cNvPr>
+          <p:cNvPicPr>
+            <a:picLocks noChangeAspect="1"/>
+          </p:cNvPicPr>
+          <p:nvPr/>
+        </p:nvPicPr>
+        <p:blipFill>
+          <a:blip r:embed="rId4">
+            <a:extLst>
+              <a:ext uri="{28A0092B-C50C-407E-A947-70E740481C1C}">
+                <a14:useLocalDpi xmlns:a14="http://schemas.microsoft.com/office/drawing/2010/main" val="0"/>
+              </a:ext>
+            </a:extLst>
+          </a:blip>
+          <a:srcRect l="5742"/>
+          <a:stretch>
+            <a:fillRect/>
+          </a:stretch>
+        </p:blipFill>
+        <p:spPr>
+          <a:xfrm>
+            <a:off x="7967428" y="4281211"/>
+            <a:ext cx="4224572" cy="1772348"/>
+          </a:xfrm>
+          <a:prstGeom prst="rect">
+            <a:avLst/>
+          </a:prstGeom>
+        </p:spPr>
+      </p:pic>
     </p:spTree>
     <p:extLst>
       <p:ext uri="{BB962C8B-B14F-4D97-AF65-F5344CB8AC3E}">
-        <p14:creationId xmlns:p14="http://schemas.microsoft.com/office/powerpoint/2010/main" val="3304878716"/>
+        <p14:creationId xmlns:p14="http://schemas.microsoft.com/office/powerpoint/2010/main" val="1155213387"/>
       </p:ext>
     </p:extLst>
   </p:cSld>
@@ -30303,7 +28187,7 @@
 </p:sld>
 </file>
 
-<file path=ppt/slides/slide9.xml><?xml version="1.0" encoding="utf-8"?>
+<file path=ppt/slides/slide7.xml><?xml version="1.0" encoding="utf-8"?>
 <p:sld xmlns:a="http://schemas.openxmlformats.org/drawingml/2006/main" xmlns:r="http://schemas.openxmlformats.org/officeDocument/2006/relationships" xmlns:p="http://schemas.openxmlformats.org/presentationml/2006/main">
   <p:cSld>
     <p:spTree>
@@ -30311,7 +28195,7 @@
         <p:cNvPr id="1" name="">
           <a:extLst>
             <a:ext uri="{FF2B5EF4-FFF2-40B4-BE49-F238E27FC236}">
-              <a16:creationId xmlns:a16="http://schemas.microsoft.com/office/drawing/2014/main" id="{699BD736-CEF0-B6C0-28BC-774DA5F6E1A8}"/>
+              <a16:creationId xmlns:a16="http://schemas.microsoft.com/office/drawing/2014/main" id="{76ACF2CA-646F-A51B-B8DE-0DFCB3301746}"/>
             </a:ext>
           </a:extLst>
         </p:cNvPr>
@@ -30331,7 +28215,7 @@
           <p:cNvPr id="5" name="Retângulo 4">
             <a:extLst>
               <a:ext uri="{FF2B5EF4-FFF2-40B4-BE49-F238E27FC236}">
-                <a16:creationId xmlns:a16="http://schemas.microsoft.com/office/drawing/2014/main" id="{717F9DE4-EB99-5874-7C93-C50756B60B56}"/>
+                <a16:creationId xmlns:a16="http://schemas.microsoft.com/office/drawing/2014/main" id="{861DE212-0D89-D41F-7CA0-11865FFE7931}"/>
               </a:ext>
             </a:extLst>
           </p:cNvPr>
@@ -30385,7 +28269,7 @@
           <p:cNvPr id="2" name="Título 1">
             <a:extLst>
               <a:ext uri="{FF2B5EF4-FFF2-40B4-BE49-F238E27FC236}">
-                <a16:creationId xmlns:a16="http://schemas.microsoft.com/office/drawing/2014/main" id="{BECB663B-29B6-EF3E-539D-7287CF4F6231}"/>
+                <a16:creationId xmlns:a16="http://schemas.microsoft.com/office/drawing/2014/main" id="{DA0709C0-24AC-5BB1-9932-E41B1C3C3871}"/>
               </a:ext>
             </a:extLst>
           </p:cNvPr>
@@ -30413,7 +28297,7 @@
                   <a:schemeClr val="bg1"/>
                 </a:solidFill>
               </a:rPr>
-              <a:t>Linguagem de Máquina</a:t>
+              <a:t>Linguagens de Alto Nível</a:t>
             </a:r>
           </a:p>
         </p:txBody>
@@ -30423,7 +28307,7 @@
           <p:cNvPr id="12" name="AutoShape 6" descr="Lógica Proposicional x Lógica de Argumento ⋆ Colaborae">
             <a:extLst>
               <a:ext uri="{FF2B5EF4-FFF2-40B4-BE49-F238E27FC236}">
-                <a16:creationId xmlns:a16="http://schemas.microsoft.com/office/drawing/2014/main" id="{3965B379-0BB9-05F4-129D-B28D07BD1ACC}"/>
+                <a16:creationId xmlns:a16="http://schemas.microsoft.com/office/drawing/2014/main" id="{8314CDC7-5B3B-0DFD-59D5-5142BB8A8537}"/>
               </a:ext>
             </a:extLst>
           </p:cNvPr>
@@ -30468,7 +28352,7 @@
           <p:cNvPr id="6" name="Espaço Reservado para Conteúdo 5">
             <a:extLst>
               <a:ext uri="{FF2B5EF4-FFF2-40B4-BE49-F238E27FC236}">
-                <a16:creationId xmlns:a16="http://schemas.microsoft.com/office/drawing/2014/main" id="{B400FDEC-E1C9-8037-38E3-62ED4ADC7A3F}"/>
+                <a16:creationId xmlns:a16="http://schemas.microsoft.com/office/drawing/2014/main" id="{62A0ED64-1BC3-1627-470A-DB92ADD5D1BA}"/>
               </a:ext>
             </a:extLst>
           </p:cNvPr>
@@ -30481,8 +28365,8 @@
         </p:nvSpPr>
         <p:spPr>
           <a:xfrm>
-            <a:off x="742377" y="1640958"/>
-            <a:ext cx="5527874" cy="4887691"/>
+            <a:off x="302474" y="1640492"/>
+            <a:ext cx="7765080" cy="4413067"/>
           </a:xfrm>
         </p:spPr>
         <p:txBody>
@@ -30493,20 +28377,17 @@
           <a:p>
             <a:r>
               <a:rPr lang="pt-BR" sz="2400" dirty="0"/>
-              <a:t>Forma básica de instrução compreendida pelo computador</a:t>
+              <a:t>Possui uma leitura mais próxima da linguagem humana</a:t>
             </a:r>
             <a:endParaRPr lang="pt-BR" sz="2000" dirty="0"/>
           </a:p>
           <a:p>
-            <a:pPr marL="0" indent="0">
-              <a:buNone/>
-            </a:pPr>
-            <a:endParaRPr lang="pt-BR" sz="2000" dirty="0"/>
+            <a:endParaRPr lang="pt-BR" sz="2400" dirty="0"/>
           </a:p>
           <a:p>
             <a:r>
               <a:rPr lang="pt-BR" sz="2400" dirty="0"/>
-              <a:t>Caracterizada por ser uma sequências de 0 e 1, ou de valores Hexadecimais </a:t>
+              <a:t>O próprio computador faz o trabalho duro de traduzir o código para a máquina (Compiladores ou Interpretadores).</a:t>
             </a:r>
           </a:p>
           <a:p>
@@ -30515,18 +28396,8 @@
           <a:p>
             <a:r>
               <a:rPr lang="pt-BR" sz="2400" dirty="0"/>
-              <a:t>Cada arquitetura compreende sua própria linguagem de máquina</a:t>
-            </a:r>
-          </a:p>
-          <a:p>
-            <a:endParaRPr lang="pt-BR" sz="2400" dirty="0"/>
-          </a:p>
-          <a:p>
-            <a:r>
-              <a:rPr lang="pt-BR" sz="2400" dirty="0"/>
-              <a:t>Opera de acordo com o projeto de Hardware do processador</a:t>
-            </a:r>
-            <a:endParaRPr lang="pt-BR" dirty="0"/>
+              <a:t>Introduz a portabilidade, podendo ser executado em diferentes arquiteturas. </a:t>
+            </a:r>
           </a:p>
           <a:p>
             <a:endParaRPr lang="pt-BR" sz="2400" dirty="0"/>
@@ -30535,10 +28406,10 @@
       </p:sp>
       <p:pic>
         <p:nvPicPr>
-          <p:cNvPr id="4098" name="Picture 2" descr="Importância da linguem de Programação de Baixo Nível">
-            <a:extLst>
-              <a:ext uri="{FF2B5EF4-FFF2-40B4-BE49-F238E27FC236}">
-                <a16:creationId xmlns:a16="http://schemas.microsoft.com/office/drawing/2014/main" id="{36D343F2-A8DE-A76F-F763-075091475246}"/>
+          <p:cNvPr id="6146" name="Picture 2" descr="PPT - MIPS Assembly Language PowerPoint Presentation, free download -  ID:144403">
+            <a:extLst>
+              <a:ext uri="{FF2B5EF4-FFF2-40B4-BE49-F238E27FC236}">
+                <a16:creationId xmlns:a16="http://schemas.microsoft.com/office/drawing/2014/main" id="{C5D593F8-7C4C-0C3A-F2E3-D18ACE26910C}"/>
               </a:ext>
             </a:extLst>
           </p:cNvPr>
@@ -30555,15 +28426,15 @@
               </a:ext>
             </a:extLst>
           </a:blip>
-          <a:srcRect l="40928" r="1050" b="68373"/>
+          <a:srcRect l="4853" t="29874" r="10702" b="10042"/>
           <a:stretch>
             <a:fillRect/>
           </a:stretch>
         </p:blipFill>
         <p:spPr bwMode="auto">
           <a:xfrm>
-            <a:off x="7909790" y="1814843"/>
-            <a:ext cx="3067291" cy="1277273"/>
+            <a:off x="7307483" y="4251469"/>
+            <a:ext cx="4884517" cy="2606531"/>
           </a:xfrm>
           <a:prstGeom prst="rect">
             <a:avLst/>
@@ -30582,35 +28453,259 @@
       </p:pic>
       <p:pic>
         <p:nvPicPr>
-          <p:cNvPr id="4100" name="Picture 4" descr="Organization of Computer Systems: ISA, Machine Language, Number Systems">
-            <a:extLst>
-              <a:ext uri="{FF2B5EF4-FFF2-40B4-BE49-F238E27FC236}">
-                <a16:creationId xmlns:a16="http://schemas.microsoft.com/office/drawing/2014/main" id="{103232D8-49E8-B066-4C6A-8F3AF74E3720}"/>
+          <p:cNvPr id="3" name="Imagem 2">
+            <a:extLst>
+              <a:ext uri="{FF2B5EF4-FFF2-40B4-BE49-F238E27FC236}">
+                <a16:creationId xmlns:a16="http://schemas.microsoft.com/office/drawing/2014/main" id="{0B46C71D-772A-A08A-3F6B-202564571EFA}"/>
               </a:ext>
             </a:extLst>
           </p:cNvPr>
           <p:cNvPicPr>
-            <a:picLocks noChangeAspect="1" noChangeArrowheads="1"/>
+            <a:picLocks noChangeAspect="1"/>
           </p:cNvPicPr>
           <p:nvPr/>
         </p:nvPicPr>
         <p:blipFill>
-          <a:blip r:embed="rId4">
-            <a:extLst>
-              <a:ext uri="{28A0092B-C50C-407E-A947-70E740481C1C}">
-                <a14:useLocalDpi xmlns:a14="http://schemas.microsoft.com/office/drawing/2010/main" val="0"/>
-              </a:ext>
-            </a:extLst>
-          </a:blip>
-          <a:srcRect/>
+          <a:blip r:embed="rId4"/>
+          <a:srcRect l="21265" t="20112" r="40751" b="50000"/>
           <a:stretch>
             <a:fillRect/>
           </a:stretch>
         </p:blipFill>
+        <p:spPr>
+          <a:xfrm>
+            <a:off x="2406584" y="5381764"/>
+            <a:ext cx="3556860" cy="1476236"/>
+          </a:xfrm>
+          <a:prstGeom prst="rect">
+            <a:avLst/>
+          </a:prstGeom>
+        </p:spPr>
+      </p:pic>
+      <p:sp>
+        <p:nvSpPr>
+          <p:cNvPr id="4" name="CaixaDeTexto 3">
+            <a:extLst>
+              <a:ext uri="{FF2B5EF4-FFF2-40B4-BE49-F238E27FC236}">
+                <a16:creationId xmlns:a16="http://schemas.microsoft.com/office/drawing/2014/main" id="{7CC8EC65-FBA8-A4F1-283D-3A1379045304}"/>
+              </a:ext>
+            </a:extLst>
+          </p:cNvPr>
+          <p:cNvSpPr txBox="1"/>
+          <p:nvPr/>
+        </p:nvSpPr>
+        <p:spPr>
+          <a:xfrm>
+            <a:off x="2827302" y="5012432"/>
+            <a:ext cx="2715423" cy="369332"/>
+          </a:xfrm>
+          <a:prstGeom prst="rect">
+            <a:avLst/>
+          </a:prstGeom>
+          <a:noFill/>
+        </p:spPr>
+        <p:txBody>
+          <a:bodyPr wrap="none" rtlCol="0">
+            <a:spAutoFit/>
+          </a:bodyPr>
+          <a:lstStyle/>
+          <a:p>
+            <a:r>
+              <a:rPr lang="pt-BR" dirty="0" err="1"/>
+              <a:t>Hello</a:t>
+            </a:r>
+            <a:r>
+              <a:rPr lang="pt-BR" dirty="0"/>
+              <a:t> World – Linguagem C</a:t>
+            </a:r>
+          </a:p>
+        </p:txBody>
+      </p:sp>
+      <p:sp>
+        <p:nvSpPr>
+          <p:cNvPr id="7" name="CaixaDeTexto 6">
+            <a:extLst>
+              <a:ext uri="{FF2B5EF4-FFF2-40B4-BE49-F238E27FC236}">
+                <a16:creationId xmlns:a16="http://schemas.microsoft.com/office/drawing/2014/main" id="{D10F9228-07B1-731A-9990-D3A20EC7A3C4}"/>
+              </a:ext>
+            </a:extLst>
+          </p:cNvPr>
+          <p:cNvSpPr txBox="1"/>
+          <p:nvPr/>
+        </p:nvSpPr>
+        <p:spPr>
+          <a:xfrm>
+            <a:off x="8392029" y="3731768"/>
+            <a:ext cx="2941767" cy="369332"/>
+          </a:xfrm>
+          <a:prstGeom prst="rect">
+            <a:avLst/>
+          </a:prstGeom>
+          <a:noFill/>
+        </p:spPr>
+        <p:txBody>
+          <a:bodyPr wrap="none" rtlCol="0">
+            <a:spAutoFit/>
+          </a:bodyPr>
+          <a:lstStyle/>
+          <a:p>
+            <a:r>
+              <a:rPr lang="pt-BR" dirty="0" err="1"/>
+              <a:t>Hello</a:t>
+            </a:r>
+            <a:r>
+              <a:rPr lang="pt-BR" dirty="0"/>
+              <a:t> World – Assembly MIPS</a:t>
+            </a:r>
+          </a:p>
+        </p:txBody>
+      </p:sp>
+    </p:spTree>
+    <p:extLst>
+      <p:ext uri="{BB962C8B-B14F-4D97-AF65-F5344CB8AC3E}">
+        <p14:creationId xmlns:p14="http://schemas.microsoft.com/office/powerpoint/2010/main" val="3188463983"/>
+      </p:ext>
+    </p:extLst>
+  </p:cSld>
+  <p:clrMapOvr>
+    <a:masterClrMapping/>
+  </p:clrMapOvr>
+</p:sld>
+</file>
+
+<file path=ppt/slides/slide8.xml><?xml version="1.0" encoding="utf-8"?>
+<p:sld xmlns:a="http://schemas.openxmlformats.org/drawingml/2006/main" xmlns:r="http://schemas.openxmlformats.org/officeDocument/2006/relationships" xmlns:p="http://schemas.openxmlformats.org/presentationml/2006/main">
+  <p:cSld>
+    <p:spTree>
+      <p:nvGrpSpPr>
+        <p:cNvPr id="1" name="">
+          <a:extLst>
+            <a:ext uri="{FF2B5EF4-FFF2-40B4-BE49-F238E27FC236}">
+              <a16:creationId xmlns:a16="http://schemas.microsoft.com/office/drawing/2014/main" id="{F161A393-562A-D38D-3A66-DFE4E0368F34}"/>
+            </a:ext>
+          </a:extLst>
+        </p:cNvPr>
+        <p:cNvGrpSpPr/>
+        <p:nvPr/>
+      </p:nvGrpSpPr>
+      <p:grpSpPr>
+        <a:xfrm>
+          <a:off x="0" y="0"/>
+          <a:ext cx="0" cy="0"/>
+          <a:chOff x="0" y="0"/>
+          <a:chExt cx="0" cy="0"/>
+        </a:xfrm>
+      </p:grpSpPr>
+      <p:sp>
+        <p:nvSpPr>
+          <p:cNvPr id="5" name="Retângulo 4">
+            <a:extLst>
+              <a:ext uri="{FF2B5EF4-FFF2-40B4-BE49-F238E27FC236}">
+                <a16:creationId xmlns:a16="http://schemas.microsoft.com/office/drawing/2014/main" id="{E8190D0D-CA3E-D15D-4D00-A1096CC5EE58}"/>
+              </a:ext>
+            </a:extLst>
+          </p:cNvPr>
+          <p:cNvSpPr/>
+          <p:nvPr/>
+        </p:nvSpPr>
+        <p:spPr>
+          <a:xfrm>
+            <a:off x="0" y="-2"/>
+            <a:ext cx="12192000" cy="1325563"/>
+          </a:xfrm>
+          <a:prstGeom prst="rect">
+            <a:avLst/>
+          </a:prstGeom>
+          <a:solidFill>
+            <a:srgbClr val="418AB3"/>
+          </a:solidFill>
+          <a:ln>
+            <a:solidFill>
+              <a:srgbClr val="418AB3"/>
+            </a:solidFill>
+          </a:ln>
+        </p:spPr>
+        <p:style>
+          <a:lnRef idx="2">
+            <a:schemeClr val="accent1">
+              <a:shade val="15000"/>
+            </a:schemeClr>
+          </a:lnRef>
+          <a:fillRef idx="1">
+            <a:schemeClr val="accent1"/>
+          </a:fillRef>
+          <a:effectRef idx="0">
+            <a:schemeClr val="accent1"/>
+          </a:effectRef>
+          <a:fontRef idx="minor">
+            <a:schemeClr val="lt1"/>
+          </a:fontRef>
+        </p:style>
+        <p:txBody>
+          <a:bodyPr rtlCol="0" anchor="ctr"/>
+          <a:lstStyle/>
+          <a:p>
+            <a:pPr algn="ctr"/>
+            <a:endParaRPr lang="pt-BR" dirty="0"/>
+          </a:p>
+        </p:txBody>
+      </p:sp>
+      <p:sp>
+        <p:nvSpPr>
+          <p:cNvPr id="2" name="Título 1">
+            <a:extLst>
+              <a:ext uri="{FF2B5EF4-FFF2-40B4-BE49-F238E27FC236}">
+                <a16:creationId xmlns:a16="http://schemas.microsoft.com/office/drawing/2014/main" id="{F2B6E970-839C-6C5D-119D-0592249D3AE9}"/>
+              </a:ext>
+            </a:extLst>
+          </p:cNvPr>
+          <p:cNvSpPr>
+            <a:spLocks noGrp="1"/>
+          </p:cNvSpPr>
+          <p:nvPr>
+            <p:ph type="title"/>
+          </p:nvPr>
+        </p:nvSpPr>
+        <p:spPr>
+          <a:xfrm>
+            <a:off x="0" y="-1"/>
+            <a:ext cx="12192000" cy="1325563"/>
+          </a:xfrm>
+        </p:spPr>
+        <p:txBody>
+          <a:bodyPr/>
+          <a:lstStyle/>
+          <a:p>
+            <a:pPr algn="ctr"/>
+            <a:r>
+              <a:rPr lang="pt-BR" dirty="0">
+                <a:solidFill>
+                  <a:schemeClr val="bg1"/>
+                </a:solidFill>
+              </a:rPr>
+              <a:t>Compiladores X Interpretadores</a:t>
+            </a:r>
+          </a:p>
+        </p:txBody>
+      </p:sp>
+      <p:sp>
+        <p:nvSpPr>
+          <p:cNvPr id="12" name="AutoShape 6" descr="Lógica Proposicional x Lógica de Argumento ⋆ Colaborae">
+            <a:extLst>
+              <a:ext uri="{FF2B5EF4-FFF2-40B4-BE49-F238E27FC236}">
+                <a16:creationId xmlns:a16="http://schemas.microsoft.com/office/drawing/2014/main" id="{622A0E1D-F25B-D357-14BD-AC24AF147287}"/>
+              </a:ext>
+            </a:extLst>
+          </p:cNvPr>
+          <p:cNvSpPr>
+            <a:spLocks noChangeAspect="1" noChangeArrowheads="1"/>
+          </p:cNvSpPr>
+          <p:nvPr/>
+        </p:nvSpPr>
         <p:spPr bwMode="auto">
           <a:xfrm>
-            <a:off x="6749863" y="3339436"/>
-            <a:ext cx="4962525" cy="3028950"/>
+            <a:off x="5943600" y="-1707776"/>
+            <a:ext cx="5289176" cy="5289176"/>
           </a:xfrm>
           <a:prstGeom prst="rect">
             <a:avLst/>
@@ -30626,58 +28721,449 @@
             </a:ext>
           </a:extLst>
         </p:spPr>
-      </p:pic>
-      <p:sp>
-        <p:nvSpPr>
-          <p:cNvPr id="4" name="CaixaDeTexto 3">
-            <a:extLst>
-              <a:ext uri="{FF2B5EF4-FFF2-40B4-BE49-F238E27FC236}">
-                <a16:creationId xmlns:a16="http://schemas.microsoft.com/office/drawing/2014/main" id="{3B9E8019-D6C5-3D11-235D-94FE651B5926}"/>
-              </a:ext>
-            </a:extLst>
-          </p:cNvPr>
-          <p:cNvSpPr txBox="1"/>
-          <p:nvPr/>
+        <p:txBody>
+          <a:bodyPr vert="horz" wrap="square" lIns="91440" tIns="45720" rIns="91440" bIns="45720" numCol="1" anchor="t" anchorCtr="0" compatLnSpc="1">
+            <a:prstTxWarp prst="textNoShape">
+              <a:avLst/>
+            </a:prstTxWarp>
+          </a:bodyPr>
+          <a:lstStyle/>
+          <a:p>
+            <a:endParaRPr lang="pt-BR"/>
+          </a:p>
+        </p:txBody>
+      </p:sp>
+      <p:sp>
+        <p:nvSpPr>
+          <p:cNvPr id="6" name="Espaço Reservado para Conteúdo 5">
+            <a:extLst>
+              <a:ext uri="{FF2B5EF4-FFF2-40B4-BE49-F238E27FC236}">
+                <a16:creationId xmlns:a16="http://schemas.microsoft.com/office/drawing/2014/main" id="{C49D0839-B4EA-C211-5150-2BC91CB530D1}"/>
+              </a:ext>
+            </a:extLst>
+          </p:cNvPr>
+          <p:cNvSpPr>
+            <a:spLocks noGrp="1"/>
+          </p:cNvSpPr>
+          <p:nvPr>
+            <p:ph idx="1"/>
+          </p:nvPr>
         </p:nvSpPr>
         <p:spPr>
           <a:xfrm>
-            <a:off x="7498054" y="6343983"/>
-            <a:ext cx="3466142" cy="369332"/>
+            <a:off x="302474" y="1640492"/>
+            <a:ext cx="8585494" cy="4711540"/>
+          </a:xfrm>
+        </p:spPr>
+        <p:txBody>
+          <a:bodyPr>
+            <a:normAutofit/>
+          </a:bodyPr>
+          <a:lstStyle/>
+          <a:p>
+            <a:r>
+              <a:rPr lang="pt-BR" sz="2400" b="1" dirty="0"/>
+              <a:t>Compilador </a:t>
+            </a:r>
+          </a:p>
+          <a:p>
+            <a:pPr lvl="1"/>
+            <a:endParaRPr lang="pt-BR" sz="2000" dirty="0"/>
+          </a:p>
+          <a:p>
+            <a:pPr lvl="1"/>
+            <a:r>
+              <a:rPr lang="pt-BR" sz="2200" dirty="0"/>
+              <a:t>traduz todo o código-fonte para linguagem de máquina antes da execução.</a:t>
+            </a:r>
+          </a:p>
+          <a:p>
+            <a:pPr lvl="1"/>
+            <a:endParaRPr lang="pt-BR" sz="2200" dirty="0"/>
+          </a:p>
+          <a:p>
+            <a:pPr lvl="1"/>
+            <a:r>
+              <a:rPr lang="pt-BR" sz="2200" dirty="0"/>
+              <a:t>O resultado da compilação é um arquivo executável independente. (</a:t>
+            </a:r>
+            <a:r>
+              <a:rPr lang="pt-BR" sz="2000" dirty="0"/>
+              <a:t>Dispensa a necessidade do compilador original ou do código-fonte.</a:t>
+            </a:r>
+            <a:r>
+              <a:rPr lang="pt-BR" sz="2200" dirty="0"/>
+              <a:t>)</a:t>
+            </a:r>
+          </a:p>
+          <a:p>
+            <a:pPr marL="457200" lvl="1" indent="0">
+              <a:buNone/>
+            </a:pPr>
+            <a:endParaRPr lang="pt-BR" sz="2200" dirty="0"/>
+          </a:p>
+          <a:p>
+            <a:pPr lvl="1"/>
+            <a:r>
+              <a:rPr lang="pt-BR" sz="2200" dirty="0"/>
+              <a:t>A tradução prévia da compilação permite uma execução mais otimizada, mas a compilação em si pode ser demorado.</a:t>
+            </a:r>
+          </a:p>
+          <a:p>
+            <a:pPr lvl="1"/>
+            <a:endParaRPr lang="pt-BR" sz="2200" dirty="0"/>
+          </a:p>
+          <a:p>
+            <a:pPr lvl="1"/>
+            <a:r>
+              <a:rPr lang="pt-BR" sz="2200" dirty="0"/>
+              <a:t>Exemplo: C, C++, Swift, Delphi</a:t>
+            </a:r>
+          </a:p>
+          <a:p>
+            <a:endParaRPr lang="pt-BR" sz="2400" dirty="0"/>
+          </a:p>
+          <a:p>
+            <a:endParaRPr lang="pt-BR" sz="2400" dirty="0"/>
+          </a:p>
+        </p:txBody>
+      </p:sp>
+      <p:pic>
+        <p:nvPicPr>
+          <p:cNvPr id="4" name="Imagem 3">
+            <a:extLst>
+              <a:ext uri="{FF2B5EF4-FFF2-40B4-BE49-F238E27FC236}">
+                <a16:creationId xmlns:a16="http://schemas.microsoft.com/office/drawing/2014/main" id="{C6D5AA5D-DDBE-45EA-302E-9A838F852781}"/>
+              </a:ext>
+            </a:extLst>
+          </p:cNvPr>
+          <p:cNvPicPr>
+            <a:picLocks noChangeAspect="1"/>
+          </p:cNvPicPr>
+          <p:nvPr/>
+        </p:nvPicPr>
+        <p:blipFill>
+          <a:blip r:embed="rId3"/>
+          <a:stretch>
+            <a:fillRect/>
+          </a:stretch>
+        </p:blipFill>
+        <p:spPr>
+          <a:xfrm>
+            <a:off x="9702375" y="1468337"/>
+            <a:ext cx="1530401" cy="5217508"/>
+          </a:xfrm>
+          <a:prstGeom prst="rect">
+            <a:avLst/>
+          </a:prstGeom>
+        </p:spPr>
+      </p:pic>
+    </p:spTree>
+    <p:extLst>
+      <p:ext uri="{BB962C8B-B14F-4D97-AF65-F5344CB8AC3E}">
+        <p14:creationId xmlns:p14="http://schemas.microsoft.com/office/powerpoint/2010/main" val="3875185796"/>
+      </p:ext>
+    </p:extLst>
+  </p:cSld>
+  <p:clrMapOvr>
+    <a:masterClrMapping/>
+  </p:clrMapOvr>
+</p:sld>
+</file>
+
+<file path=ppt/slides/slide9.xml><?xml version="1.0" encoding="utf-8"?>
+<p:sld xmlns:a="http://schemas.openxmlformats.org/drawingml/2006/main" xmlns:r="http://schemas.openxmlformats.org/officeDocument/2006/relationships" xmlns:p="http://schemas.openxmlformats.org/presentationml/2006/main">
+  <p:cSld>
+    <p:spTree>
+      <p:nvGrpSpPr>
+        <p:cNvPr id="1" name="">
+          <a:extLst>
+            <a:ext uri="{FF2B5EF4-FFF2-40B4-BE49-F238E27FC236}">
+              <a16:creationId xmlns:a16="http://schemas.microsoft.com/office/drawing/2014/main" id="{7CBC98AB-9FE9-6F23-E8DD-5918288BBAA1}"/>
+            </a:ext>
+          </a:extLst>
+        </p:cNvPr>
+        <p:cNvGrpSpPr/>
+        <p:nvPr/>
+      </p:nvGrpSpPr>
+      <p:grpSpPr>
+        <a:xfrm>
+          <a:off x="0" y="0"/>
+          <a:ext cx="0" cy="0"/>
+          <a:chOff x="0" y="0"/>
+          <a:chExt cx="0" cy="0"/>
+        </a:xfrm>
+      </p:grpSpPr>
+      <p:sp>
+        <p:nvSpPr>
+          <p:cNvPr id="5" name="Retângulo 4">
+            <a:extLst>
+              <a:ext uri="{FF2B5EF4-FFF2-40B4-BE49-F238E27FC236}">
+                <a16:creationId xmlns:a16="http://schemas.microsoft.com/office/drawing/2014/main" id="{DC60625C-76BF-117E-9D77-44541679F3C7}"/>
+              </a:ext>
+            </a:extLst>
+          </p:cNvPr>
+          <p:cNvSpPr/>
+          <p:nvPr/>
+        </p:nvSpPr>
+        <p:spPr>
+          <a:xfrm>
+            <a:off x="0" y="-2"/>
+            <a:ext cx="12192000" cy="1325563"/>
+          </a:xfrm>
+          <a:prstGeom prst="rect">
+            <a:avLst/>
+          </a:prstGeom>
+          <a:solidFill>
+            <a:srgbClr val="418AB3"/>
+          </a:solidFill>
+          <a:ln>
+            <a:solidFill>
+              <a:srgbClr val="418AB3"/>
+            </a:solidFill>
+          </a:ln>
+        </p:spPr>
+        <p:style>
+          <a:lnRef idx="2">
+            <a:schemeClr val="accent1">
+              <a:shade val="15000"/>
+            </a:schemeClr>
+          </a:lnRef>
+          <a:fillRef idx="1">
+            <a:schemeClr val="accent1"/>
+          </a:fillRef>
+          <a:effectRef idx="0">
+            <a:schemeClr val="accent1"/>
+          </a:effectRef>
+          <a:fontRef idx="minor">
+            <a:schemeClr val="lt1"/>
+          </a:fontRef>
+        </p:style>
+        <p:txBody>
+          <a:bodyPr rtlCol="0" anchor="ctr"/>
+          <a:lstStyle/>
+          <a:p>
+            <a:pPr algn="ctr"/>
+            <a:endParaRPr lang="pt-BR" dirty="0"/>
+          </a:p>
+        </p:txBody>
+      </p:sp>
+      <p:sp>
+        <p:nvSpPr>
+          <p:cNvPr id="2" name="Título 1">
+            <a:extLst>
+              <a:ext uri="{FF2B5EF4-FFF2-40B4-BE49-F238E27FC236}">
+                <a16:creationId xmlns:a16="http://schemas.microsoft.com/office/drawing/2014/main" id="{7E6E38D8-A826-6E2A-88B7-58CE6D56E14C}"/>
+              </a:ext>
+            </a:extLst>
+          </p:cNvPr>
+          <p:cNvSpPr>
+            <a:spLocks noGrp="1"/>
+          </p:cNvSpPr>
+          <p:nvPr>
+            <p:ph type="title"/>
+          </p:nvPr>
+        </p:nvSpPr>
+        <p:spPr>
+          <a:xfrm>
+            <a:off x="0" y="-1"/>
+            <a:ext cx="12192000" cy="1325563"/>
+          </a:xfrm>
+        </p:spPr>
+        <p:txBody>
+          <a:bodyPr/>
+          <a:lstStyle/>
+          <a:p>
+            <a:pPr algn="ctr"/>
+            <a:r>
+              <a:rPr lang="pt-BR" dirty="0">
+                <a:solidFill>
+                  <a:schemeClr val="bg1"/>
+                </a:solidFill>
+              </a:rPr>
+              <a:t>Compiladores X Interpretadores</a:t>
+            </a:r>
+          </a:p>
+        </p:txBody>
+      </p:sp>
+      <p:sp>
+        <p:nvSpPr>
+          <p:cNvPr id="12" name="AutoShape 6" descr="Lógica Proposicional x Lógica de Argumento ⋆ Colaborae">
+            <a:extLst>
+              <a:ext uri="{FF2B5EF4-FFF2-40B4-BE49-F238E27FC236}">
+                <a16:creationId xmlns:a16="http://schemas.microsoft.com/office/drawing/2014/main" id="{971EC516-EE04-2521-BF07-71312E65BFA9}"/>
+              </a:ext>
+            </a:extLst>
+          </p:cNvPr>
+          <p:cNvSpPr>
+            <a:spLocks noChangeAspect="1" noChangeArrowheads="1"/>
+          </p:cNvSpPr>
+          <p:nvPr/>
+        </p:nvSpPr>
+        <p:spPr bwMode="auto">
+          <a:xfrm>
+            <a:off x="5943600" y="-1707776"/>
+            <a:ext cx="5289176" cy="5289176"/>
           </a:xfrm>
           <a:prstGeom prst="rect">
             <a:avLst/>
           </a:prstGeom>
           <a:noFill/>
+          <a:extLst>
+            <a:ext uri="{909E8E84-426E-40DD-AFC4-6F175D3DCCD1}">
+              <a14:hiddenFill xmlns:a14="http://schemas.microsoft.com/office/drawing/2010/main">
+                <a:solidFill>
+                  <a:srgbClr val="FFFFFF"/>
+                </a:solidFill>
+              </a14:hiddenFill>
+            </a:ext>
+          </a:extLst>
         </p:spPr>
         <p:txBody>
-          <a:bodyPr wrap="none" rtlCol="0">
-            <a:spAutoFit/>
+          <a:bodyPr vert="horz" wrap="square" lIns="91440" tIns="45720" rIns="91440" bIns="45720" numCol="1" anchor="t" anchorCtr="0" compatLnSpc="1">
+            <a:prstTxWarp prst="textNoShape">
+              <a:avLst/>
+            </a:prstTxWarp>
           </a:bodyPr>
           <a:lstStyle/>
           <a:p>
-            <a:r>
-              <a:rPr lang="pt-BR" dirty="0" err="1"/>
-              <a:t>Instruction</a:t>
-            </a:r>
-            <a:r>
-              <a:rPr lang="pt-BR" dirty="0"/>
-              <a:t> Set </a:t>
-            </a:r>
-            <a:r>
-              <a:rPr lang="pt-BR" dirty="0" err="1"/>
-              <a:t>Architecture</a:t>
-            </a:r>
-            <a:r>
-              <a:rPr lang="pt-BR" dirty="0"/>
-              <a:t> – MIPS</a:t>
-            </a:r>
-          </a:p>
-        </p:txBody>
-      </p:sp>
+            <a:endParaRPr lang="pt-BR"/>
+          </a:p>
+        </p:txBody>
+      </p:sp>
+      <p:sp>
+        <p:nvSpPr>
+          <p:cNvPr id="6" name="Espaço Reservado para Conteúdo 5">
+            <a:extLst>
+              <a:ext uri="{FF2B5EF4-FFF2-40B4-BE49-F238E27FC236}">
+                <a16:creationId xmlns:a16="http://schemas.microsoft.com/office/drawing/2014/main" id="{F71189A5-4D8C-810B-1954-668AFE0BA0F3}"/>
+              </a:ext>
+            </a:extLst>
+          </p:cNvPr>
+          <p:cNvSpPr>
+            <a:spLocks noGrp="1"/>
+          </p:cNvSpPr>
+          <p:nvPr>
+            <p:ph idx="1"/>
+          </p:nvPr>
+        </p:nvSpPr>
+        <p:spPr>
+          <a:xfrm>
+            <a:off x="214488" y="1439002"/>
+            <a:ext cx="8017437" cy="5289176"/>
+          </a:xfrm>
+        </p:spPr>
+        <p:txBody>
+          <a:bodyPr>
+            <a:normAutofit/>
+          </a:bodyPr>
+          <a:lstStyle/>
+          <a:p>
+            <a:r>
+              <a:rPr lang="pt-BR" sz="2400" b="1" dirty="0"/>
+              <a:t>Interpretador</a:t>
+            </a:r>
+          </a:p>
+          <a:p>
+            <a:pPr lvl="1"/>
+            <a:endParaRPr lang="pt-BR" sz="2000" dirty="0"/>
+          </a:p>
+          <a:p>
+            <a:pPr lvl="1"/>
+            <a:r>
+              <a:rPr lang="pt-BR" sz="2200" dirty="0"/>
+              <a:t>Lê o código-fonte linha a linha e o executa imediatamente, utilizando a API do S.O para comunicar com o hardware</a:t>
+            </a:r>
+          </a:p>
+          <a:p>
+            <a:pPr marL="457200" lvl="1" indent="0">
+              <a:buNone/>
+            </a:pPr>
+            <a:endParaRPr lang="pt-BR" sz="2200" dirty="0"/>
+          </a:p>
+          <a:p>
+            <a:pPr lvl="1"/>
+            <a:r>
+              <a:rPr lang="pt-BR" sz="2200" dirty="0"/>
+              <a:t>Permite um desenvolvimento mais interativo e facilita o processo de detecção de erros.</a:t>
+            </a:r>
+          </a:p>
+          <a:p>
+            <a:pPr lvl="1"/>
+            <a:endParaRPr lang="pt-BR" sz="2200" dirty="0"/>
+          </a:p>
+          <a:p>
+            <a:pPr lvl="1"/>
+            <a:r>
+              <a:rPr lang="pt-BR" sz="2200" dirty="0"/>
+              <a:t>Apresenta maior portabilidade em sistemas operacionais (Requisitando apenas a instalação do interpretador)</a:t>
+            </a:r>
+          </a:p>
+          <a:p>
+            <a:pPr lvl="1"/>
+            <a:endParaRPr lang="pt-BR" sz="2200" dirty="0"/>
+          </a:p>
+          <a:p>
+            <a:pPr lvl="1"/>
+            <a:r>
+              <a:rPr lang="pt-BR" sz="2200" dirty="0"/>
+              <a:t>A tradução e execução simultânea (em tempo de execução) degrada o desempenho</a:t>
+            </a:r>
+          </a:p>
+          <a:p>
+            <a:pPr lvl="1"/>
+            <a:endParaRPr lang="pt-BR" sz="2200" dirty="0"/>
+          </a:p>
+          <a:p>
+            <a:pPr lvl="1"/>
+            <a:r>
+              <a:rPr lang="pt-BR" sz="2200" dirty="0"/>
+              <a:t>Exemplos: JS, Ruby, PHP</a:t>
+            </a:r>
+          </a:p>
+          <a:p>
+            <a:endParaRPr lang="pt-BR" sz="2400" dirty="0"/>
+          </a:p>
+          <a:p>
+            <a:endParaRPr lang="pt-BR" sz="2400" dirty="0"/>
+          </a:p>
+        </p:txBody>
+      </p:sp>
+      <p:pic>
+        <p:nvPicPr>
+          <p:cNvPr id="3" name="Imagem 2">
+            <a:extLst>
+              <a:ext uri="{FF2B5EF4-FFF2-40B4-BE49-F238E27FC236}">
+                <a16:creationId xmlns:a16="http://schemas.microsoft.com/office/drawing/2014/main" id="{109D98C0-138A-AB5B-2A74-6D120957C105}"/>
+              </a:ext>
+            </a:extLst>
+          </p:cNvPr>
+          <p:cNvPicPr>
+            <a:picLocks noChangeAspect="1"/>
+          </p:cNvPicPr>
+          <p:nvPr/>
+        </p:nvPicPr>
+        <p:blipFill>
+          <a:blip r:embed="rId3"/>
+          <a:srcRect l="3891" r="6959"/>
+          <a:stretch>
+            <a:fillRect/>
+          </a:stretch>
+        </p:blipFill>
+        <p:spPr>
+          <a:xfrm>
+            <a:off x="8319911" y="2626692"/>
+            <a:ext cx="3657601" cy="3029041"/>
+          </a:xfrm>
+          <a:prstGeom prst="rect">
+            <a:avLst/>
+          </a:prstGeom>
+        </p:spPr>
+      </p:pic>
     </p:spTree>
     <p:extLst>
       <p:ext uri="{BB962C8B-B14F-4D97-AF65-F5344CB8AC3E}">
-        <p14:creationId xmlns:p14="http://schemas.microsoft.com/office/powerpoint/2010/main" val="4102101521"/>
+        <p14:creationId xmlns:p14="http://schemas.microsoft.com/office/powerpoint/2010/main" val="3048739928"/>
       </p:ext>
     </p:extLst>
   </p:cSld>

--- a/UNIUBE-LP/Teoria_LP.pptx
+++ b/UNIUBE-LP/Teoria_LP.pptx
@@ -6,7 +6,7 @@
     <p:sldMasterId id="2147483684" r:id="rId2"/>
   </p:sldMasterIdLst>
   <p:notesMasterIdLst>
-    <p:notesMasterId r:id="rId57"/>
+    <p:notesMasterId r:id="rId56"/>
   </p:notesMasterIdLst>
   <p:sldIdLst>
     <p:sldId id="256" r:id="rId3"/>
@@ -54,15 +54,14 @@
     <p:sldId id="310" r:id="rId45"/>
     <p:sldId id="311" r:id="rId46"/>
     <p:sldId id="312" r:id="rId47"/>
-    <p:sldId id="314" r:id="rId48"/>
-    <p:sldId id="313" r:id="rId49"/>
-    <p:sldId id="316" r:id="rId50"/>
-    <p:sldId id="315" r:id="rId51"/>
-    <p:sldId id="319" r:id="rId52"/>
-    <p:sldId id="317" r:id="rId53"/>
-    <p:sldId id="320" r:id="rId54"/>
-    <p:sldId id="318" r:id="rId55"/>
-    <p:sldId id="321" r:id="rId56"/>
+    <p:sldId id="313" r:id="rId48"/>
+    <p:sldId id="316" r:id="rId49"/>
+    <p:sldId id="315" r:id="rId50"/>
+    <p:sldId id="319" r:id="rId51"/>
+    <p:sldId id="317" r:id="rId52"/>
+    <p:sldId id="320" r:id="rId53"/>
+    <p:sldId id="318" r:id="rId54"/>
+    <p:sldId id="321" r:id="rId55"/>
   </p:sldIdLst>
   <p:sldSz cx="12192000" cy="6858000"/>
   <p:notesSz cx="6858000" cy="9144000"/>
@@ -8519,153 +8518,6 @@
         <p:cNvPr id="1" name="">
           <a:extLst>
             <a:ext uri="{FF2B5EF4-FFF2-40B4-BE49-F238E27FC236}">
-              <a16:creationId xmlns:a16="http://schemas.microsoft.com/office/drawing/2014/main" id="{EBA41F87-106A-8328-8861-88768D8175AA}"/>
-            </a:ext>
-          </a:extLst>
-        </p:cNvPr>
-        <p:cNvGrpSpPr/>
-        <p:nvPr/>
-      </p:nvGrpSpPr>
-      <p:grpSpPr>
-        <a:xfrm>
-          <a:off x="0" y="0"/>
-          <a:ext cx="0" cy="0"/>
-          <a:chOff x="0" y="0"/>
-          <a:chExt cx="0" cy="0"/>
-        </a:xfrm>
-      </p:grpSpPr>
-      <p:sp>
-        <p:nvSpPr>
-          <p:cNvPr id="2" name="Espaço Reservado para Imagem de Slide 1">
-            <a:extLst>
-              <a:ext uri="{FF2B5EF4-FFF2-40B4-BE49-F238E27FC236}">
-                <a16:creationId xmlns:a16="http://schemas.microsoft.com/office/drawing/2014/main" id="{B938D9B5-420E-638D-EB91-26BCDB028281}"/>
-              </a:ext>
-            </a:extLst>
-          </p:cNvPr>
-          <p:cNvSpPr>
-            <a:spLocks noGrp="1" noRot="1" noChangeAspect="1"/>
-          </p:cNvSpPr>
-          <p:nvPr>
-            <p:ph type="sldImg"/>
-          </p:nvPr>
-        </p:nvSpPr>
-        <p:spPr/>
-      </p:sp>
-      <p:sp>
-        <p:nvSpPr>
-          <p:cNvPr id="3" name="Espaço Reservado para Anotações 2">
-            <a:extLst>
-              <a:ext uri="{FF2B5EF4-FFF2-40B4-BE49-F238E27FC236}">
-                <a16:creationId xmlns:a16="http://schemas.microsoft.com/office/drawing/2014/main" id="{42979F52-83AF-F822-9579-854129FB8F59}"/>
-              </a:ext>
-            </a:extLst>
-          </p:cNvPr>
-          <p:cNvSpPr>
-            <a:spLocks noGrp="1"/>
-          </p:cNvSpPr>
-          <p:nvPr>
-            <p:ph type="body" idx="1"/>
-          </p:nvPr>
-        </p:nvSpPr>
-        <p:spPr/>
-        <p:txBody>
-          <a:bodyPr/>
-          <a:lstStyle/>
-          <a:p>
-            <a:pPr marL="171450" indent="-171450">
-              <a:buFont typeface="Arial" panose="020B0604020202020204" pitchFamily="34" charset="0"/>
-              <a:buChar char="•"/>
-            </a:pPr>
-            <a:r>
-              <a:rPr lang="pt-BR" sz="1200" b="0" kern="1200" dirty="0">
-                <a:solidFill>
-                  <a:schemeClr val="tx1"/>
-                </a:solidFill>
-                <a:effectLst/>
-                <a:latin typeface="+mn-lt"/>
-                <a:ea typeface="+mn-ea"/>
-                <a:cs typeface="+mn-cs"/>
-              </a:rPr>
-              <a:t>Observação:  </a:t>
-            </a:r>
-            <a:r>
-              <a:rPr lang="pt-BR" sz="1200" dirty="0"/>
-              <a:t>5 % 2=1</a:t>
-            </a:r>
-            <a:r>
-              <a:rPr lang="pt-BR" sz="1200" dirty="0">
-                <a:latin typeface="Calibri" panose="020F0502020204030204" pitchFamily="34" charset="0"/>
-                <a:ea typeface="Calibri" panose="020F0502020204030204" pitchFamily="34" charset="0"/>
-                <a:cs typeface="Calibri" panose="020F0502020204030204" pitchFamily="34" charset="0"/>
-              </a:rPr>
-              <a:t>  porque 2*2=4 (sobrando 1)</a:t>
-            </a:r>
-            <a:r>
-              <a:rPr lang="pt-BR" sz="1200" b="0" kern="1200" dirty="0">
-                <a:solidFill>
-                  <a:schemeClr val="tx1"/>
-                </a:solidFill>
-                <a:effectLst/>
-                <a:latin typeface="+mn-lt"/>
-                <a:ea typeface="+mn-ea"/>
-                <a:cs typeface="+mn-cs"/>
-              </a:rPr>
-              <a:t> </a:t>
-            </a:r>
-          </a:p>
-        </p:txBody>
-      </p:sp>
-      <p:sp>
-        <p:nvSpPr>
-          <p:cNvPr id="4" name="Espaço Reservado para Número de Slide 3">
-            <a:extLst>
-              <a:ext uri="{FF2B5EF4-FFF2-40B4-BE49-F238E27FC236}">
-                <a16:creationId xmlns:a16="http://schemas.microsoft.com/office/drawing/2014/main" id="{EB709A17-C652-CF3A-1C16-828CA83A71AB}"/>
-              </a:ext>
-            </a:extLst>
-          </p:cNvPr>
-          <p:cNvSpPr>
-            <a:spLocks noGrp="1"/>
-          </p:cNvSpPr>
-          <p:nvPr>
-            <p:ph type="sldNum" sz="quarter" idx="5"/>
-          </p:nvPr>
-        </p:nvSpPr>
-        <p:spPr/>
-        <p:txBody>
-          <a:bodyPr/>
-          <a:lstStyle/>
-          <a:p>
-            <a:fld id="{80F36A49-A1DD-40F8-B8AD-E6F5365256CB}" type="slidenum">
-              <a:rPr lang="pt-BR" smtClean="0"/>
-              <a:t>46</a:t>
-            </a:fld>
-            <a:endParaRPr lang="pt-BR"/>
-          </a:p>
-        </p:txBody>
-      </p:sp>
-    </p:spTree>
-    <p:extLst>
-      <p:ext uri="{BB962C8B-B14F-4D97-AF65-F5344CB8AC3E}">
-        <p14:creationId xmlns:p14="http://schemas.microsoft.com/office/powerpoint/2010/main" val="3036492755"/>
-      </p:ext>
-    </p:extLst>
-  </p:cSld>
-  <p:clrMapOvr>
-    <a:masterClrMapping/>
-  </p:clrMapOvr>
-</p:notes>
-</file>
-
-<file path=ppt/notesSlides/notesSlide45.xml><?xml version="1.0" encoding="utf-8"?>
-<p:notes xmlns:a="http://schemas.openxmlformats.org/drawingml/2006/main" xmlns:r="http://schemas.openxmlformats.org/officeDocument/2006/relationships" xmlns:p="http://schemas.openxmlformats.org/presentationml/2006/main">
-  <p:cSld>
-    <p:spTree>
-      <p:nvGrpSpPr>
-        <p:cNvPr id="1" name="">
-          <a:extLst>
-            <a:ext uri="{FF2B5EF4-FFF2-40B4-BE49-F238E27FC236}">
               <a16:creationId xmlns:a16="http://schemas.microsoft.com/office/drawing/2014/main" id="{5B75D978-E0E2-5129-3B2C-00F642E08BE6}"/>
             </a:ext>
           </a:extLst>
@@ -8786,7 +8638,7 @@
           <a:p>
             <a:fld id="{80F36A49-A1DD-40F8-B8AD-E6F5365256CB}" type="slidenum">
               <a:rPr lang="pt-BR" smtClean="0"/>
-              <a:t>48</a:t>
+              <a:t>47</a:t>
             </a:fld>
             <a:endParaRPr lang="pt-BR"/>
           </a:p>
@@ -8805,7 +8657,7 @@
 </p:notes>
 </file>
 
-<file path=ppt/notesSlides/notesSlide46.xml><?xml version="1.0" encoding="utf-8"?>
+<file path=ppt/notesSlides/notesSlide45.xml><?xml version="1.0" encoding="utf-8"?>
 <p:notes xmlns:a="http://schemas.openxmlformats.org/drawingml/2006/main" xmlns:r="http://schemas.openxmlformats.org/officeDocument/2006/relationships" xmlns:p="http://schemas.openxmlformats.org/presentationml/2006/main">
   <p:cSld>
     <p:spTree>
@@ -8933,7 +8785,7 @@
           <a:p>
             <a:fld id="{80F36A49-A1DD-40F8-B8AD-E6F5365256CB}" type="slidenum">
               <a:rPr lang="pt-BR" smtClean="0"/>
-              <a:t>49</a:t>
+              <a:t>48</a:t>
             </a:fld>
             <a:endParaRPr lang="pt-BR"/>
           </a:p>
@@ -8952,7 +8804,7 @@
 </p:notes>
 </file>
 
-<file path=ppt/notesSlides/notesSlide47.xml><?xml version="1.0" encoding="utf-8"?>
+<file path=ppt/notesSlides/notesSlide46.xml><?xml version="1.0" encoding="utf-8"?>
 <p:notes xmlns:a="http://schemas.openxmlformats.org/drawingml/2006/main" xmlns:r="http://schemas.openxmlformats.org/officeDocument/2006/relationships" xmlns:p="http://schemas.openxmlformats.org/presentationml/2006/main">
   <p:cSld>
     <p:spTree>
@@ -9080,7 +8932,7 @@
           <a:p>
             <a:fld id="{80F36A49-A1DD-40F8-B8AD-E6F5365256CB}" type="slidenum">
               <a:rPr lang="pt-BR" smtClean="0"/>
-              <a:t>50</a:t>
+              <a:t>49</a:t>
             </a:fld>
             <a:endParaRPr lang="pt-BR"/>
           </a:p>
@@ -9099,7 +8951,7 @@
 </p:notes>
 </file>
 
-<file path=ppt/notesSlides/notesSlide48.xml><?xml version="1.0" encoding="utf-8"?>
+<file path=ppt/notesSlides/notesSlide47.xml><?xml version="1.0" encoding="utf-8"?>
 <p:notes xmlns:a="http://schemas.openxmlformats.org/drawingml/2006/main" xmlns:r="http://schemas.openxmlformats.org/officeDocument/2006/relationships" xmlns:p="http://schemas.openxmlformats.org/presentationml/2006/main">
   <p:cSld>
     <p:spTree>
@@ -9227,7 +9079,7 @@
           <a:p>
             <a:fld id="{80F36A49-A1DD-40F8-B8AD-E6F5365256CB}" type="slidenum">
               <a:rPr lang="pt-BR" smtClean="0"/>
-              <a:t>51</a:t>
+              <a:t>50</a:t>
             </a:fld>
             <a:endParaRPr lang="pt-BR"/>
           </a:p>
@@ -9246,7 +9098,7 @@
 </p:notes>
 </file>
 
-<file path=ppt/notesSlides/notesSlide49.xml><?xml version="1.0" encoding="utf-8"?>
+<file path=ppt/notesSlides/notesSlide48.xml><?xml version="1.0" encoding="utf-8"?>
 <p:notes xmlns:a="http://schemas.openxmlformats.org/drawingml/2006/main" xmlns:r="http://schemas.openxmlformats.org/officeDocument/2006/relationships" xmlns:p="http://schemas.openxmlformats.org/presentationml/2006/main">
   <p:cSld>
     <p:spTree>
@@ -9374,7 +9226,7 @@
           <a:p>
             <a:fld id="{80F36A49-A1DD-40F8-B8AD-E6F5365256CB}" type="slidenum">
               <a:rPr lang="pt-BR" smtClean="0"/>
-              <a:t>52</a:t>
+              <a:t>51</a:t>
             </a:fld>
             <a:endParaRPr lang="pt-BR"/>
           </a:p>
@@ -9384,6 +9236,165 @@
     <p:extLst>
       <p:ext uri="{BB962C8B-B14F-4D97-AF65-F5344CB8AC3E}">
         <p14:creationId xmlns:p14="http://schemas.microsoft.com/office/powerpoint/2010/main" val="1355024193"/>
+      </p:ext>
+    </p:extLst>
+  </p:cSld>
+  <p:clrMapOvr>
+    <a:masterClrMapping/>
+  </p:clrMapOvr>
+</p:notes>
+</file>
+
+<file path=ppt/notesSlides/notesSlide49.xml><?xml version="1.0" encoding="utf-8"?>
+<p:notes xmlns:a="http://schemas.openxmlformats.org/drawingml/2006/main" xmlns:r="http://schemas.openxmlformats.org/officeDocument/2006/relationships" xmlns:p="http://schemas.openxmlformats.org/presentationml/2006/main">
+  <p:cSld>
+    <p:spTree>
+      <p:nvGrpSpPr>
+        <p:cNvPr id="1" name="">
+          <a:extLst>
+            <a:ext uri="{FF2B5EF4-FFF2-40B4-BE49-F238E27FC236}">
+              <a16:creationId xmlns:a16="http://schemas.microsoft.com/office/drawing/2014/main" id="{EB1E513E-2B81-48E5-AD93-5FBA5C2E5B7D}"/>
+            </a:ext>
+          </a:extLst>
+        </p:cNvPr>
+        <p:cNvGrpSpPr/>
+        <p:nvPr/>
+      </p:nvGrpSpPr>
+      <p:grpSpPr>
+        <a:xfrm>
+          <a:off x="0" y="0"/>
+          <a:ext cx="0" cy="0"/>
+          <a:chOff x="0" y="0"/>
+          <a:chExt cx="0" cy="0"/>
+        </a:xfrm>
+      </p:grpSpPr>
+      <p:sp>
+        <p:nvSpPr>
+          <p:cNvPr id="2" name="Espaço Reservado para Imagem de Slide 1">
+            <a:extLst>
+              <a:ext uri="{FF2B5EF4-FFF2-40B4-BE49-F238E27FC236}">
+                <a16:creationId xmlns:a16="http://schemas.microsoft.com/office/drawing/2014/main" id="{6002FD15-ED4B-8A4B-77A0-07E09B201A3A}"/>
+              </a:ext>
+            </a:extLst>
+          </p:cNvPr>
+          <p:cNvSpPr>
+            <a:spLocks noGrp="1" noRot="1" noChangeAspect="1"/>
+          </p:cNvSpPr>
+          <p:nvPr>
+            <p:ph type="sldImg"/>
+          </p:nvPr>
+        </p:nvSpPr>
+        <p:spPr/>
+      </p:sp>
+      <p:sp>
+        <p:nvSpPr>
+          <p:cNvPr id="3" name="Espaço Reservado para Anotações 2">
+            <a:extLst>
+              <a:ext uri="{FF2B5EF4-FFF2-40B4-BE49-F238E27FC236}">
+                <a16:creationId xmlns:a16="http://schemas.microsoft.com/office/drawing/2014/main" id="{0F03CCAE-E479-E18B-C26A-62DE055088ED}"/>
+              </a:ext>
+            </a:extLst>
+          </p:cNvPr>
+          <p:cNvSpPr>
+            <a:spLocks noGrp="1"/>
+          </p:cNvSpPr>
+          <p:nvPr>
+            <p:ph type="body" idx="1"/>
+          </p:nvPr>
+        </p:nvSpPr>
+        <p:spPr/>
+        <p:txBody>
+          <a:bodyPr/>
+          <a:lstStyle/>
+          <a:p>
+            <a:pPr marL="171450" indent="-171450">
+              <a:buFont typeface="Arial" panose="020B0604020202020204" pitchFamily="34" charset="0"/>
+              <a:buChar char="•"/>
+            </a:pPr>
+            <a:r>
+              <a:rPr lang="pt-BR" sz="1200" b="0" kern="1200" dirty="0">
+                <a:solidFill>
+                  <a:schemeClr val="tx1"/>
+                </a:solidFill>
+                <a:effectLst/>
+                <a:latin typeface="+mn-lt"/>
+                <a:ea typeface="+mn-ea"/>
+                <a:cs typeface="+mn-cs"/>
+              </a:rPr>
+              <a:t>Inicialização: i=10</a:t>
+            </a:r>
+          </a:p>
+          <a:p>
+            <a:pPr marL="171450" indent="-171450">
+              <a:buFont typeface="Arial" panose="020B0604020202020204" pitchFamily="34" charset="0"/>
+              <a:buChar char="•"/>
+            </a:pPr>
+            <a:r>
+              <a:rPr lang="pt-BR" sz="1200" b="0" kern="1200" dirty="0">
+                <a:solidFill>
+                  <a:schemeClr val="tx1"/>
+                </a:solidFill>
+                <a:effectLst/>
+                <a:latin typeface="+mn-lt"/>
+                <a:ea typeface="+mn-ea"/>
+                <a:cs typeface="+mn-cs"/>
+              </a:rPr>
+              <a:t>Condição de parada: i&gt;=10</a:t>
+            </a:r>
+          </a:p>
+          <a:p>
+            <a:pPr marL="171450" indent="-171450">
+              <a:buFont typeface="Arial" panose="020B0604020202020204" pitchFamily="34" charset="0"/>
+              <a:buChar char="•"/>
+            </a:pPr>
+            <a:r>
+              <a:rPr lang="pt-BR" sz="1200" b="0" kern="1200" dirty="0">
+                <a:solidFill>
+                  <a:schemeClr val="tx1"/>
+                </a:solidFill>
+                <a:effectLst/>
+                <a:latin typeface="+mn-lt"/>
+                <a:ea typeface="+mn-ea"/>
+                <a:cs typeface="+mn-cs"/>
+              </a:rPr>
+              <a:t>Passo de decremento: i--</a:t>
+            </a:r>
+          </a:p>
+        </p:txBody>
+      </p:sp>
+      <p:sp>
+        <p:nvSpPr>
+          <p:cNvPr id="4" name="Espaço Reservado para Número de Slide 3">
+            <a:extLst>
+              <a:ext uri="{FF2B5EF4-FFF2-40B4-BE49-F238E27FC236}">
+                <a16:creationId xmlns:a16="http://schemas.microsoft.com/office/drawing/2014/main" id="{8FBB05D6-9F41-4702-E3E9-53063DD91803}"/>
+              </a:ext>
+            </a:extLst>
+          </p:cNvPr>
+          <p:cNvSpPr>
+            <a:spLocks noGrp="1"/>
+          </p:cNvSpPr>
+          <p:nvPr>
+            <p:ph type="sldNum" sz="quarter" idx="5"/>
+          </p:nvPr>
+        </p:nvSpPr>
+        <p:spPr/>
+        <p:txBody>
+          <a:bodyPr/>
+          <a:lstStyle/>
+          <a:p>
+            <a:fld id="{80F36A49-A1DD-40F8-B8AD-E6F5365256CB}" type="slidenum">
+              <a:rPr lang="pt-BR" smtClean="0"/>
+              <a:t>52</a:t>
+            </a:fld>
+            <a:endParaRPr lang="pt-BR"/>
+          </a:p>
+        </p:txBody>
+      </p:sp>
+    </p:spTree>
+    <p:extLst>
+      <p:ext uri="{BB962C8B-B14F-4D97-AF65-F5344CB8AC3E}">
+        <p14:creationId xmlns:p14="http://schemas.microsoft.com/office/powerpoint/2010/main" val="1320522639"/>
       </p:ext>
     </p:extLst>
   </p:cSld>
@@ -9509,165 +9520,6 @@
         <p:cNvPr id="1" name="">
           <a:extLst>
             <a:ext uri="{FF2B5EF4-FFF2-40B4-BE49-F238E27FC236}">
-              <a16:creationId xmlns:a16="http://schemas.microsoft.com/office/drawing/2014/main" id="{EB1E513E-2B81-48E5-AD93-5FBA5C2E5B7D}"/>
-            </a:ext>
-          </a:extLst>
-        </p:cNvPr>
-        <p:cNvGrpSpPr/>
-        <p:nvPr/>
-      </p:nvGrpSpPr>
-      <p:grpSpPr>
-        <a:xfrm>
-          <a:off x="0" y="0"/>
-          <a:ext cx="0" cy="0"/>
-          <a:chOff x="0" y="0"/>
-          <a:chExt cx="0" cy="0"/>
-        </a:xfrm>
-      </p:grpSpPr>
-      <p:sp>
-        <p:nvSpPr>
-          <p:cNvPr id="2" name="Espaço Reservado para Imagem de Slide 1">
-            <a:extLst>
-              <a:ext uri="{FF2B5EF4-FFF2-40B4-BE49-F238E27FC236}">
-                <a16:creationId xmlns:a16="http://schemas.microsoft.com/office/drawing/2014/main" id="{6002FD15-ED4B-8A4B-77A0-07E09B201A3A}"/>
-              </a:ext>
-            </a:extLst>
-          </p:cNvPr>
-          <p:cNvSpPr>
-            <a:spLocks noGrp="1" noRot="1" noChangeAspect="1"/>
-          </p:cNvSpPr>
-          <p:nvPr>
-            <p:ph type="sldImg"/>
-          </p:nvPr>
-        </p:nvSpPr>
-        <p:spPr/>
-      </p:sp>
-      <p:sp>
-        <p:nvSpPr>
-          <p:cNvPr id="3" name="Espaço Reservado para Anotações 2">
-            <a:extLst>
-              <a:ext uri="{FF2B5EF4-FFF2-40B4-BE49-F238E27FC236}">
-                <a16:creationId xmlns:a16="http://schemas.microsoft.com/office/drawing/2014/main" id="{0F03CCAE-E479-E18B-C26A-62DE055088ED}"/>
-              </a:ext>
-            </a:extLst>
-          </p:cNvPr>
-          <p:cNvSpPr>
-            <a:spLocks noGrp="1"/>
-          </p:cNvSpPr>
-          <p:nvPr>
-            <p:ph type="body" idx="1"/>
-          </p:nvPr>
-        </p:nvSpPr>
-        <p:spPr/>
-        <p:txBody>
-          <a:bodyPr/>
-          <a:lstStyle/>
-          <a:p>
-            <a:pPr marL="171450" indent="-171450">
-              <a:buFont typeface="Arial" panose="020B0604020202020204" pitchFamily="34" charset="0"/>
-              <a:buChar char="•"/>
-            </a:pPr>
-            <a:r>
-              <a:rPr lang="pt-BR" sz="1200" b="0" kern="1200" dirty="0">
-                <a:solidFill>
-                  <a:schemeClr val="tx1"/>
-                </a:solidFill>
-                <a:effectLst/>
-                <a:latin typeface="+mn-lt"/>
-                <a:ea typeface="+mn-ea"/>
-                <a:cs typeface="+mn-cs"/>
-              </a:rPr>
-              <a:t>Inicialização: i=10</a:t>
-            </a:r>
-          </a:p>
-          <a:p>
-            <a:pPr marL="171450" indent="-171450">
-              <a:buFont typeface="Arial" panose="020B0604020202020204" pitchFamily="34" charset="0"/>
-              <a:buChar char="•"/>
-            </a:pPr>
-            <a:r>
-              <a:rPr lang="pt-BR" sz="1200" b="0" kern="1200" dirty="0">
-                <a:solidFill>
-                  <a:schemeClr val="tx1"/>
-                </a:solidFill>
-                <a:effectLst/>
-                <a:latin typeface="+mn-lt"/>
-                <a:ea typeface="+mn-ea"/>
-                <a:cs typeface="+mn-cs"/>
-              </a:rPr>
-              <a:t>Condição de parada: i&gt;=10</a:t>
-            </a:r>
-          </a:p>
-          <a:p>
-            <a:pPr marL="171450" indent="-171450">
-              <a:buFont typeface="Arial" panose="020B0604020202020204" pitchFamily="34" charset="0"/>
-              <a:buChar char="•"/>
-            </a:pPr>
-            <a:r>
-              <a:rPr lang="pt-BR" sz="1200" b="0" kern="1200" dirty="0">
-                <a:solidFill>
-                  <a:schemeClr val="tx1"/>
-                </a:solidFill>
-                <a:effectLst/>
-                <a:latin typeface="+mn-lt"/>
-                <a:ea typeface="+mn-ea"/>
-                <a:cs typeface="+mn-cs"/>
-              </a:rPr>
-              <a:t>Passo de decremento: i--</a:t>
-            </a:r>
-          </a:p>
-        </p:txBody>
-      </p:sp>
-      <p:sp>
-        <p:nvSpPr>
-          <p:cNvPr id="4" name="Espaço Reservado para Número de Slide 3">
-            <a:extLst>
-              <a:ext uri="{FF2B5EF4-FFF2-40B4-BE49-F238E27FC236}">
-                <a16:creationId xmlns:a16="http://schemas.microsoft.com/office/drawing/2014/main" id="{8FBB05D6-9F41-4702-E3E9-53063DD91803}"/>
-              </a:ext>
-            </a:extLst>
-          </p:cNvPr>
-          <p:cNvSpPr>
-            <a:spLocks noGrp="1"/>
-          </p:cNvSpPr>
-          <p:nvPr>
-            <p:ph type="sldNum" sz="quarter" idx="5"/>
-          </p:nvPr>
-        </p:nvSpPr>
-        <p:spPr/>
-        <p:txBody>
-          <a:bodyPr/>
-          <a:lstStyle/>
-          <a:p>
-            <a:fld id="{80F36A49-A1DD-40F8-B8AD-E6F5365256CB}" type="slidenum">
-              <a:rPr lang="pt-BR" smtClean="0"/>
-              <a:t>53</a:t>
-            </a:fld>
-            <a:endParaRPr lang="pt-BR"/>
-          </a:p>
-        </p:txBody>
-      </p:sp>
-    </p:spTree>
-    <p:extLst>
-      <p:ext uri="{BB962C8B-B14F-4D97-AF65-F5344CB8AC3E}">
-        <p14:creationId xmlns:p14="http://schemas.microsoft.com/office/powerpoint/2010/main" val="1320522639"/>
-      </p:ext>
-    </p:extLst>
-  </p:cSld>
-  <p:clrMapOvr>
-    <a:masterClrMapping/>
-  </p:clrMapOvr>
-</p:notes>
-</file>
-
-<file path=ppt/notesSlides/notesSlide51.xml><?xml version="1.0" encoding="utf-8"?>
-<p:notes xmlns:a="http://schemas.openxmlformats.org/drawingml/2006/main" xmlns:r="http://schemas.openxmlformats.org/officeDocument/2006/relationships" xmlns:p="http://schemas.openxmlformats.org/presentationml/2006/main">
-  <p:cSld>
-    <p:spTree>
-      <p:nvGrpSpPr>
-        <p:cNvPr id="1" name="">
-          <a:extLst>
-            <a:ext uri="{FF2B5EF4-FFF2-40B4-BE49-F238E27FC236}">
               <a16:creationId xmlns:a16="http://schemas.microsoft.com/office/drawing/2014/main" id="{2EF5E35E-2986-D614-CECC-AF822E0763F8}"/>
             </a:ext>
           </a:extLst>
@@ -9788,7 +9640,7 @@
           <a:p>
             <a:fld id="{80F36A49-A1DD-40F8-B8AD-E6F5365256CB}" type="slidenum">
               <a:rPr lang="pt-BR" smtClean="0"/>
-              <a:t>54</a:t>
+              <a:t>53</a:t>
             </a:fld>
             <a:endParaRPr lang="pt-BR"/>
           </a:p>
@@ -30123,280 +29975,132 @@
           </a:p>
         </p:txBody>
       </p:sp>
-      <mc:AlternateContent xmlns:mc="http://schemas.openxmlformats.org/markup-compatibility/2006">
-        <mc:Choice xmlns:a14="http://schemas.microsoft.com/office/drawing/2010/main" Requires="a14">
-          <p:sp>
-            <p:nvSpPr>
-              <p:cNvPr id="6" name="Espaço Reservado para Conteúdo 5">
-                <a:extLst>
-                  <a:ext uri="{FF2B5EF4-FFF2-40B4-BE49-F238E27FC236}">
-                    <a16:creationId xmlns:a16="http://schemas.microsoft.com/office/drawing/2014/main" id="{D77D6796-5BC6-76EA-C684-B51E7AF258F0}"/>
-                  </a:ext>
-                </a:extLst>
-              </p:cNvPr>
-              <p:cNvSpPr>
-                <a:spLocks noGrp="1"/>
-              </p:cNvSpPr>
-              <p:nvPr>
-                <p:ph idx="1"/>
-              </p:nvPr>
-            </p:nvSpPr>
-            <p:spPr>
-              <a:xfrm>
-                <a:off x="1692363" y="1552668"/>
-                <a:ext cx="9664259" cy="4963787"/>
-              </a:xfrm>
-            </p:spPr>
-            <p:txBody>
-              <a:bodyPr>
-                <a:normAutofit/>
-              </a:bodyPr>
-              <a:lstStyle/>
-              <a:p>
-                <a:r>
-                  <a:rPr lang="pt-BR" sz="2400" dirty="0"/>
-                  <a:t>Análogo ao SE-ENTÃO do Visual G.</a:t>
-                </a:r>
-              </a:p>
-              <a:p>
-                <a:r>
-                  <a:rPr lang="pt-BR" sz="2400" dirty="0"/>
-                  <a:t>A execução de um determinado bloco de comando é executada somente se uma condição for satisfeita.</a:t>
-                </a:r>
-              </a:p>
-              <a:p>
-                <a:r>
-                  <a:rPr lang="pt-BR" sz="2400" dirty="0"/>
-                  <a:t>Caso a condição não seja satisfeita, o programa apenas segue a execução, ignorando o IF.</a:t>
-                </a:r>
-              </a:p>
-              <a:p>
-                <a:endParaRPr lang="pt-BR" sz="2400" dirty="0"/>
-              </a:p>
-              <a:p>
-                <a:r>
-                  <a:rPr lang="pt-BR" sz="2400" dirty="0"/>
-                  <a:t> Sintaxe do IF:</a:t>
-                </a:r>
-              </a:p>
-              <a:p>
-                <a:endParaRPr lang="pt-BR" sz="2400" dirty="0"/>
-              </a:p>
-              <a:p>
-                <a:pPr marL="457200" lvl="1" indent="0">
-                  <a:buNone/>
-                </a:pPr>
-                <a14:m>
-                  <m:oMathPara xmlns:m="http://schemas.openxmlformats.org/officeDocument/2006/math">
-                    <m:oMathParaPr>
-                      <m:jc m:val="left"/>
-                    </m:oMathParaPr>
-                    <m:oMath xmlns:m="http://schemas.openxmlformats.org/officeDocument/2006/math">
-                      <m:r>
-                        <a:rPr lang="pt-BR" sz="2200" i="1" dirty="0" smtClean="0">
-                          <a:latin typeface="Cambria Math" panose="02040503050406030204" pitchFamily="18" charset="0"/>
-                        </a:rPr>
-                        <m:t>𝐼𝑓</m:t>
-                      </m:r>
-                      <m:r>
-                        <a:rPr lang="pt-BR" sz="2200" i="1" dirty="0" smtClean="0">
-                          <a:latin typeface="Cambria Math" panose="02040503050406030204" pitchFamily="18" charset="0"/>
-                        </a:rPr>
-                        <m:t>(</m:t>
-                      </m:r>
-                      <m:r>
-                        <a:rPr lang="pt-BR" sz="2200" i="1" dirty="0" smtClean="0">
-                          <a:latin typeface="Cambria Math" panose="02040503050406030204" pitchFamily="18" charset="0"/>
-                        </a:rPr>
-                        <m:t>𝑐𝑜𝑛𝑑𝑖</m:t>
-                      </m:r>
-                      <m:r>
-                        <a:rPr lang="pt-BR" sz="2200" i="1" dirty="0" smtClean="0">
-                          <a:latin typeface="Cambria Math" panose="02040503050406030204" pitchFamily="18" charset="0"/>
-                        </a:rPr>
-                        <m:t>çã</m:t>
-                      </m:r>
-                      <m:r>
-                        <a:rPr lang="pt-BR" sz="2200" i="1" dirty="0" smtClean="0">
-                          <a:latin typeface="Cambria Math" panose="02040503050406030204" pitchFamily="18" charset="0"/>
-                        </a:rPr>
-                        <m:t>𝑜</m:t>
-                      </m:r>
-                      <m:r>
-                        <a:rPr lang="pt-BR" sz="2200" i="1" dirty="0" smtClean="0">
-                          <a:latin typeface="Cambria Math" panose="02040503050406030204" pitchFamily="18" charset="0"/>
-                        </a:rPr>
-                        <m:t>)</m:t>
-                      </m:r>
-                    </m:oMath>
-                  </m:oMathPara>
-                  <m:oMathPara xmlns:m="http://schemas.openxmlformats.org/officeDocument/2006/math">
-                    <m:oMathParaPr>
-                      <m:jc m:val="left"/>
-                    </m:oMathParaPr>
-                    <m:oMath xmlns:m="http://schemas.openxmlformats.org/officeDocument/2006/math">
-                      <m:r>
-                        <a:rPr lang="pt-BR" sz="2200" i="1" dirty="0" smtClean="0">
-                          <a:latin typeface="Cambria Math" panose="02040503050406030204" pitchFamily="18" charset="0"/>
-                        </a:rPr>
-                        <m:t>{</m:t>
-                      </m:r>
-                    </m:oMath>
-                  </m:oMathPara>
-                  <m:oMathPara xmlns:m="http://schemas.openxmlformats.org/officeDocument/2006/math">
-                    <m:oMathParaPr>
-                      <m:jc m:val="left"/>
-                    </m:oMathParaPr>
-                    <m:oMath xmlns:m="http://schemas.openxmlformats.org/officeDocument/2006/math">
-                      <m:r>
-                        <a:rPr lang="pt-BR" sz="2200" i="1" dirty="0" smtClean="0">
-                          <a:latin typeface="Cambria Math" panose="02040503050406030204" pitchFamily="18" charset="0"/>
-                        </a:rPr>
-                        <m:t>	</m:t>
-                      </m:r>
-                      <m:r>
-                        <a:rPr lang="pt-BR" sz="2200" b="0" i="1" dirty="0" smtClean="0">
-                          <a:latin typeface="Cambria Math" panose="02040503050406030204" pitchFamily="18" charset="0"/>
-                        </a:rPr>
-                        <m:t>      </m:t>
-                      </m:r>
-                      <m:r>
-                        <a:rPr lang="pt-BR" sz="2200" i="1" dirty="0" smtClean="0">
-                          <a:latin typeface="Cambria Math" panose="02040503050406030204" pitchFamily="18" charset="0"/>
-                        </a:rPr>
-                        <m:t>𝑏𝑙𝑜𝑐𝑜</m:t>
-                      </m:r>
-                      <m:r>
-                        <a:rPr lang="pt-BR" sz="2200" i="1" dirty="0" smtClean="0">
-                          <a:latin typeface="Cambria Math" panose="02040503050406030204" pitchFamily="18" charset="0"/>
-                        </a:rPr>
-                        <m:t> </m:t>
-                      </m:r>
-                      <m:r>
-                        <a:rPr lang="pt-BR" sz="2200" i="1" dirty="0" smtClean="0">
-                          <a:latin typeface="Cambria Math" panose="02040503050406030204" pitchFamily="18" charset="0"/>
-                        </a:rPr>
-                        <m:t>𝑑𝑒</m:t>
-                      </m:r>
-                      <m:r>
-                        <a:rPr lang="pt-BR" sz="2200" i="1" dirty="0" smtClean="0">
-                          <a:latin typeface="Cambria Math" panose="02040503050406030204" pitchFamily="18" charset="0"/>
-                        </a:rPr>
-                        <m:t> </m:t>
-                      </m:r>
-                      <m:r>
-                        <a:rPr lang="pt-BR" sz="2200" i="1" dirty="0" smtClean="0">
-                          <a:latin typeface="Cambria Math" panose="02040503050406030204" pitchFamily="18" charset="0"/>
-                        </a:rPr>
-                        <m:t>𝑐𝑜𝑚𝑎𝑛𝑑𝑜</m:t>
-                      </m:r>
-                    </m:oMath>
-                  </m:oMathPara>
-                  <m:oMathPara xmlns:m="http://schemas.openxmlformats.org/officeDocument/2006/math">
-                    <m:oMathParaPr>
-                      <m:jc m:val="left"/>
-                    </m:oMathParaPr>
-                    <m:oMath xmlns:m="http://schemas.openxmlformats.org/officeDocument/2006/math">
-                      <m:r>
-                        <a:rPr lang="pt-BR" sz="2200" i="1" dirty="0" smtClean="0">
-                          <a:latin typeface="Cambria Math" panose="02040503050406030204" pitchFamily="18" charset="0"/>
-                        </a:rPr>
-                        <m:t>}</m:t>
-                      </m:r>
-                    </m:oMath>
-                  </m:oMathPara>
-                </a14:m>
-              </a:p>
-              <a:p>
-                <a:pPr marL="457200" lvl="1" indent="0">
-                  <a:buNone/>
-                </a:pPr>
-              </a:p>
-              <a:p>
-                <a:pPr marL="457200" lvl="1" indent="0">
-                  <a:buNone/>
-                </a:pPr>
-              </a:p>
-              <a:p>
-                <a:pPr marL="457200" lvl="1" indent="0">
-                  <a:buNone/>
-                </a:pPr>
-              </a:p>
-              <a:p>
-                <a:pPr marL="0" indent="0">
-                  <a:buNone/>
-                </a:pPr>
-                <a:endParaRPr lang="pt-BR" sz="2400" dirty="0"/>
-              </a:p>
-              <a:p>
-                <a:pPr lvl="1"/>
-                <a:endParaRPr lang="pt-BR" sz="2000" b="1" i="1" dirty="0"/>
-              </a:p>
-              <a:p>
-                <a:pPr lvl="1"/>
-                <a:endParaRPr lang="pt-BR" sz="2000" b="1" i="1" dirty="0"/>
-              </a:p>
-              <a:p>
-                <a:pPr lvl="1"/>
-                <a:endParaRPr lang="pt-BR" sz="1800" b="1" i="1" dirty="0"/>
-              </a:p>
-              <a:p>
-                <a:pPr lvl="1"/>
-                <a:endParaRPr lang="pt-BR" sz="1800" b="1" i="1" dirty="0"/>
-              </a:p>
-            </p:txBody>
-          </p:sp>
-        </mc:Choice>
-        <mc:Fallback>
-          <p:sp>
-            <p:nvSpPr>
-              <p:cNvPr id="6" name="Espaço Reservado para Conteúdo 5">
-                <a:extLst>
-                  <a:ext uri="{FF2B5EF4-FFF2-40B4-BE49-F238E27FC236}">
-                    <a16:creationId xmlns:a16="http://schemas.microsoft.com/office/drawing/2014/main" id="{D77D6796-5BC6-76EA-C684-B51E7AF258F0}"/>
-                  </a:ext>
-                </a:extLst>
-              </p:cNvPr>
-              <p:cNvSpPr>
-                <a:spLocks noGrp="1" noRot="1" noChangeAspect="1" noMove="1" noResize="1" noEditPoints="1" noAdjustHandles="1" noChangeArrowheads="1" noChangeShapeType="1" noTextEdit="1"/>
-              </p:cNvSpPr>
-              <p:nvPr>
-                <p:ph idx="1"/>
-              </p:nvPr>
-            </p:nvSpPr>
-            <p:spPr>
-              <a:xfrm>
-                <a:off x="1692363" y="1552668"/>
-                <a:ext cx="9664259" cy="4963787"/>
-              </a:xfrm>
-              <a:blipFill>
-                <a:blip r:embed="rId3"/>
-                <a:stretch>
-                  <a:fillRect l="-883" t="-1720"/>
-                </a:stretch>
-              </a:blipFill>
-            </p:spPr>
-            <p:txBody>
-              <a:bodyPr/>
-              <a:lstStyle/>
-              <a:p>
-                <a:r>
-                  <a:rPr lang="pt-BR">
-                    <a:noFill/>
-                  </a:rPr>
-                  <a:t> </a:t>
-                </a:r>
-              </a:p>
-            </p:txBody>
-          </p:sp>
-        </mc:Fallback>
-      </mc:AlternateContent>
+      <p:sp>
+        <p:nvSpPr>
+          <p:cNvPr id="6" name="Espaço Reservado para Conteúdo 5">
+            <a:extLst>
+              <a:ext uri="{FF2B5EF4-FFF2-40B4-BE49-F238E27FC236}">
+                <a16:creationId xmlns:a16="http://schemas.microsoft.com/office/drawing/2014/main" id="{D77D6796-5BC6-76EA-C684-B51E7AF258F0}"/>
+              </a:ext>
+            </a:extLst>
+          </p:cNvPr>
+          <p:cNvSpPr>
+            <a:spLocks noGrp="1"/>
+          </p:cNvSpPr>
+          <p:nvPr>
+            <p:ph idx="1"/>
+          </p:nvPr>
+        </p:nvSpPr>
+        <p:spPr>
+          <a:xfrm>
+            <a:off x="1692363" y="1552668"/>
+            <a:ext cx="9664259" cy="4963787"/>
+          </a:xfrm>
+        </p:spPr>
+        <p:txBody>
+          <a:bodyPr>
+            <a:normAutofit/>
+          </a:bodyPr>
+          <a:lstStyle/>
+          <a:p>
+            <a:r>
+              <a:rPr lang="pt-BR" sz="2400" dirty="0"/>
+              <a:t>Análogo ao SE-ENTÃO do Visual G.</a:t>
+            </a:r>
+          </a:p>
+          <a:p>
+            <a:r>
+              <a:rPr lang="pt-BR" sz="2400" dirty="0"/>
+              <a:t>A execução de um determinado bloco de comando é executada somente se uma condição for satisfeita.</a:t>
+            </a:r>
+          </a:p>
+          <a:p>
+            <a:r>
+              <a:rPr lang="pt-BR" sz="2400" dirty="0"/>
+              <a:t>Caso a condição não seja satisfeita, o programa apenas segue a execução.</a:t>
+            </a:r>
+          </a:p>
+          <a:p>
+            <a:endParaRPr lang="pt-BR" sz="2400" dirty="0"/>
+          </a:p>
+          <a:p>
+            <a:pPr marL="457200" lvl="1" indent="0">
+              <a:buNone/>
+            </a:pPr>
+            <a:endParaRPr lang="pt-BR" sz="2400" dirty="0"/>
+          </a:p>
+          <a:p>
+            <a:pPr marL="457200" lvl="1" indent="0">
+              <a:buNone/>
+            </a:pPr>
+            <a:endParaRPr lang="pt-BR" sz="2400" dirty="0"/>
+          </a:p>
+          <a:p>
+            <a:pPr marL="457200" lvl="1" indent="0">
+              <a:buNone/>
+            </a:pPr>
+            <a:endParaRPr lang="pt-BR" sz="2400" dirty="0"/>
+          </a:p>
+          <a:p>
+            <a:pPr marL="0" indent="0">
+              <a:buNone/>
+            </a:pPr>
+            <a:endParaRPr lang="pt-BR" sz="2400" dirty="0"/>
+          </a:p>
+          <a:p>
+            <a:pPr lvl="1"/>
+            <a:endParaRPr lang="pt-BR" sz="2000" b="1" i="1" dirty="0"/>
+          </a:p>
+          <a:p>
+            <a:pPr lvl="1"/>
+            <a:endParaRPr lang="pt-BR" sz="2000" b="1" i="1" dirty="0"/>
+          </a:p>
+          <a:p>
+            <a:pPr lvl="1"/>
+            <a:endParaRPr lang="pt-BR" sz="1800" b="1" i="1" dirty="0"/>
+          </a:p>
+          <a:p>
+            <a:pPr lvl="1"/>
+            <a:endParaRPr lang="pt-BR" sz="1800" b="1" i="1" dirty="0"/>
+          </a:p>
+        </p:txBody>
+      </p:sp>
       <p:pic>
         <p:nvPicPr>
           <p:cNvPr id="8" name="Imagem 7">
             <a:extLst>
               <a:ext uri="{FF2B5EF4-FFF2-40B4-BE49-F238E27FC236}">
                 <a16:creationId xmlns:a16="http://schemas.microsoft.com/office/drawing/2014/main" id="{539EE381-F776-2E97-C4A7-32D478A0A67D}"/>
+              </a:ext>
+            </a:extLst>
+          </p:cNvPr>
+          <p:cNvPicPr>
+            <a:picLocks noChangeAspect="1"/>
+          </p:cNvPicPr>
+          <p:nvPr/>
+        </p:nvPicPr>
+        <p:blipFill>
+          <a:blip r:embed="rId3"/>
+          <a:stretch>
+            <a:fillRect/>
+          </a:stretch>
+        </p:blipFill>
+        <p:spPr>
+          <a:xfrm>
+            <a:off x="5819754" y="3580955"/>
+            <a:ext cx="4541460" cy="3162606"/>
+          </a:xfrm>
+          <a:prstGeom prst="rect">
+            <a:avLst/>
+          </a:prstGeom>
+        </p:spPr>
+      </p:pic>
+      <p:pic>
+        <p:nvPicPr>
+          <p:cNvPr id="7" name="Imagem 6">
+            <a:extLst>
+              <a:ext uri="{FF2B5EF4-FFF2-40B4-BE49-F238E27FC236}">
+                <a16:creationId xmlns:a16="http://schemas.microsoft.com/office/drawing/2014/main" id="{E3AFEDF7-068B-2AC1-E2DA-8F030D42F925}"/>
               </a:ext>
             </a:extLst>
           </p:cNvPr>
@@ -30413,14 +30117,78 @@
         </p:blipFill>
         <p:spPr>
           <a:xfrm>
-            <a:off x="6096000" y="3695394"/>
-            <a:ext cx="4541460" cy="3162606"/>
+            <a:off x="1830786" y="3279597"/>
+            <a:ext cx="3414314" cy="3578403"/>
           </a:xfrm>
           <a:prstGeom prst="rect">
             <a:avLst/>
           </a:prstGeom>
         </p:spPr>
       </p:pic>
+      <p:sp>
+        <p:nvSpPr>
+          <p:cNvPr id="9" name="Retângulo 8">
+            <a:extLst>
+              <a:ext uri="{FF2B5EF4-FFF2-40B4-BE49-F238E27FC236}">
+                <a16:creationId xmlns:a16="http://schemas.microsoft.com/office/drawing/2014/main" id="{B328CE5F-6CEE-1B61-6D4E-990534E16CE0}"/>
+              </a:ext>
+            </a:extLst>
+          </p:cNvPr>
+          <p:cNvSpPr/>
+          <p:nvPr/>
+        </p:nvSpPr>
+        <p:spPr>
+          <a:xfrm>
+            <a:off x="2490788" y="5743575"/>
+            <a:ext cx="1219200" cy="319088"/>
+          </a:xfrm>
+          <a:prstGeom prst="rect">
+            <a:avLst/>
+          </a:prstGeom>
+          <a:solidFill>
+            <a:srgbClr val="E1FFE7"/>
+          </a:solidFill>
+          <a:ln>
+            <a:noFill/>
+          </a:ln>
+        </p:spPr>
+        <p:style>
+          <a:lnRef idx="2">
+            <a:schemeClr val="accent1">
+              <a:shade val="15000"/>
+            </a:schemeClr>
+          </a:lnRef>
+          <a:fillRef idx="1">
+            <a:schemeClr val="accent1"/>
+          </a:fillRef>
+          <a:effectRef idx="0">
+            <a:schemeClr val="accent1"/>
+          </a:effectRef>
+          <a:fontRef idx="minor">
+            <a:schemeClr val="lt1"/>
+          </a:fontRef>
+        </p:style>
+        <p:txBody>
+          <a:bodyPr rtlCol="0" anchor="ctr"/>
+          <a:lstStyle/>
+          <a:p>
+            <a:pPr algn="ctr"/>
+            <a:r>
+              <a:rPr lang="pt-BR" sz="1400" dirty="0" err="1">
+                <a:solidFill>
+                  <a:srgbClr val="2F8D46"/>
+                </a:solidFill>
+              </a:rPr>
+              <a:t>Code</a:t>
+            </a:r>
+            <a:endParaRPr lang="pt-BR" sz="1400" dirty="0">
+              <a:solidFill>
+                <a:srgbClr val="2F8D46"/>
+              </a:solidFill>
+            </a:endParaRPr>
+          </a:p>
+        </p:txBody>
+      </p:sp>
     </p:spTree>
     <p:extLst>
       <p:ext uri="{BB962C8B-B14F-4D97-AF65-F5344CB8AC3E}">
@@ -30594,379 +30362,114 @@
           </a:p>
         </p:txBody>
       </p:sp>
-      <mc:AlternateContent xmlns:mc="http://schemas.openxmlformats.org/markup-compatibility/2006">
-        <mc:Choice xmlns:a14="http://schemas.microsoft.com/office/drawing/2010/main" Requires="a14">
-          <p:sp>
-            <p:nvSpPr>
-              <p:cNvPr id="6" name="Espaço Reservado para Conteúdo 5">
-                <a:extLst>
-                  <a:ext uri="{FF2B5EF4-FFF2-40B4-BE49-F238E27FC236}">
-                    <a16:creationId xmlns:a16="http://schemas.microsoft.com/office/drawing/2014/main" id="{402F2442-8B72-6182-8933-F74EC87244EE}"/>
-                  </a:ext>
-                </a:extLst>
-              </p:cNvPr>
-              <p:cNvSpPr>
-                <a:spLocks noGrp="1"/>
-              </p:cNvSpPr>
-              <p:nvPr>
-                <p:ph idx="1"/>
-              </p:nvPr>
-            </p:nvSpPr>
-            <p:spPr>
-              <a:xfrm>
-                <a:off x="1692363" y="1552668"/>
-                <a:ext cx="10014215" cy="5305332"/>
-              </a:xfrm>
-            </p:spPr>
-            <p:txBody>
-              <a:bodyPr>
-                <a:normAutofit/>
-              </a:bodyPr>
-              <a:lstStyle/>
-              <a:p>
-                <a:r>
-                  <a:rPr lang="pt-BR" sz="2400" dirty="0"/>
-                  <a:t>Análogo ao SE-ENTÃO-SENÃO do Visual G.</a:t>
-                </a:r>
-              </a:p>
-              <a:p>
-                <a:r>
-                  <a:rPr lang="pt-BR" sz="2400" dirty="0"/>
-                  <a:t>A execução de um determinado trecho é executada somente se a condição for satisfeita.</a:t>
-                </a:r>
-              </a:p>
-              <a:p>
-                <a:r>
-                  <a:rPr lang="pt-BR" sz="2400" dirty="0"/>
-                  <a:t>Caso a condição não seja satisfeita, um outro bloco de comando é executado.</a:t>
-                </a:r>
-              </a:p>
-              <a:p>
-                <a:endParaRPr lang="pt-BR" sz="2400" dirty="0"/>
-              </a:p>
-              <a:p>
-                <a:r>
-                  <a:rPr lang="pt-BR" sz="2400" dirty="0"/>
-                  <a:t>Sintaxe do IF-ELSE:</a:t>
-                </a:r>
-              </a:p>
-              <a:p>
-                <a:endParaRPr lang="pt-BR" sz="2400" dirty="0"/>
-              </a:p>
-              <a:p>
-                <a:pPr marL="457200" lvl="1" indent="0">
-                  <a:buNone/>
-                </a:pPr>
-                <a14:m>
-                  <m:oMathPara xmlns:m="http://schemas.openxmlformats.org/officeDocument/2006/math">
-                    <m:oMathParaPr>
-                      <m:jc m:val="left"/>
-                    </m:oMathParaPr>
-                    <m:oMath xmlns:m="http://schemas.openxmlformats.org/officeDocument/2006/math">
-                      <m:r>
-                        <a:rPr lang="pt-BR" sz="2200" i="1" dirty="0" smtClean="0">
-                          <a:latin typeface="Cambria Math" panose="02040503050406030204" pitchFamily="18" charset="0"/>
-                        </a:rPr>
-                        <m:t>𝐼𝑓</m:t>
-                      </m:r>
-                      <m:r>
-                        <a:rPr lang="pt-BR" sz="2200" i="1" dirty="0" smtClean="0">
-                          <a:latin typeface="Cambria Math" panose="02040503050406030204" pitchFamily="18" charset="0"/>
-                        </a:rPr>
-                        <m:t>(</m:t>
-                      </m:r>
-                      <m:r>
-                        <a:rPr lang="pt-BR" sz="2200" i="1" dirty="0" smtClean="0">
-                          <a:latin typeface="Cambria Math" panose="02040503050406030204" pitchFamily="18" charset="0"/>
-                        </a:rPr>
-                        <m:t>𝑐𝑜𝑛𝑑𝑖</m:t>
-                      </m:r>
-                      <m:r>
-                        <a:rPr lang="pt-BR" sz="2200" i="1" dirty="0" smtClean="0">
-                          <a:latin typeface="Cambria Math" panose="02040503050406030204" pitchFamily="18" charset="0"/>
-                        </a:rPr>
-                        <m:t>çã</m:t>
-                      </m:r>
-                      <m:r>
-                        <a:rPr lang="pt-BR" sz="2200" i="1" dirty="0" smtClean="0">
-                          <a:latin typeface="Cambria Math" panose="02040503050406030204" pitchFamily="18" charset="0"/>
-                        </a:rPr>
-                        <m:t>𝑜</m:t>
-                      </m:r>
-                      <m:r>
-                        <a:rPr lang="pt-BR" sz="2200" i="1" dirty="0" smtClean="0">
-                          <a:latin typeface="Cambria Math" panose="02040503050406030204" pitchFamily="18" charset="0"/>
-                        </a:rPr>
-                        <m:t>)</m:t>
-                      </m:r>
-                    </m:oMath>
-                  </m:oMathPara>
-                  <m:oMathPara xmlns:m="http://schemas.openxmlformats.org/officeDocument/2006/math">
-                    <m:oMathParaPr>
-                      <m:jc m:val="left"/>
-                    </m:oMathParaPr>
-                    <m:oMath xmlns:m="http://schemas.openxmlformats.org/officeDocument/2006/math">
-                      <m:r>
-                        <a:rPr lang="pt-BR" sz="2200" i="1" dirty="0" smtClean="0">
-                          <a:latin typeface="Cambria Math" panose="02040503050406030204" pitchFamily="18" charset="0"/>
-                        </a:rPr>
-                        <m:t>{</m:t>
-                      </m:r>
-                    </m:oMath>
-                  </m:oMathPara>
-                  <m:oMathPara xmlns:m="http://schemas.openxmlformats.org/officeDocument/2006/math">
-                    <m:oMathParaPr>
-                      <m:jc m:val="left"/>
-                    </m:oMathParaPr>
-                    <m:oMath xmlns:m="http://schemas.openxmlformats.org/officeDocument/2006/math">
-                      <m:r>
-                        <a:rPr lang="pt-BR" sz="2200" i="1" dirty="0" smtClean="0">
-                          <a:latin typeface="Cambria Math" panose="02040503050406030204" pitchFamily="18" charset="0"/>
-                        </a:rPr>
-                        <m:t>	</m:t>
-                      </m:r>
-                      <m:r>
-                        <a:rPr lang="pt-BR" sz="2200" b="0" i="1" dirty="0" smtClean="0">
-                          <a:latin typeface="Cambria Math" panose="02040503050406030204" pitchFamily="18" charset="0"/>
-                        </a:rPr>
-                        <m:t>      </m:t>
-                      </m:r>
-                      <m:r>
-                        <a:rPr lang="pt-BR" sz="2200" i="1" dirty="0" smtClean="0">
-                          <a:latin typeface="Cambria Math" panose="02040503050406030204" pitchFamily="18" charset="0"/>
-                        </a:rPr>
-                        <m:t>𝑏𝑙𝑜𝑐𝑜</m:t>
-                      </m:r>
-                      <m:r>
-                        <a:rPr lang="pt-BR" sz="2200" i="1" dirty="0" smtClean="0">
-                          <a:latin typeface="Cambria Math" panose="02040503050406030204" pitchFamily="18" charset="0"/>
-                        </a:rPr>
-                        <m:t> </m:t>
-                      </m:r>
-                      <m:r>
-                        <a:rPr lang="pt-BR" sz="2200" i="1" dirty="0" smtClean="0">
-                          <a:latin typeface="Cambria Math" panose="02040503050406030204" pitchFamily="18" charset="0"/>
-                        </a:rPr>
-                        <m:t>𝑑𝑒</m:t>
-                      </m:r>
-                      <m:r>
-                        <a:rPr lang="pt-BR" sz="2200" i="1" dirty="0" smtClean="0">
-                          <a:latin typeface="Cambria Math" panose="02040503050406030204" pitchFamily="18" charset="0"/>
-                        </a:rPr>
-                        <m:t> </m:t>
-                      </m:r>
-                      <m:r>
-                        <a:rPr lang="pt-BR" sz="2200" i="1" dirty="0" smtClean="0">
-                          <a:latin typeface="Cambria Math" panose="02040503050406030204" pitchFamily="18" charset="0"/>
-                        </a:rPr>
-                        <m:t>𝑐𝑜𝑚𝑎𝑛𝑑𝑜</m:t>
-                      </m:r>
-                      <m:r>
-                        <a:rPr lang="pt-BR" sz="2200" b="0" i="1" dirty="0" smtClean="0">
-                          <a:latin typeface="Cambria Math" panose="02040503050406030204" pitchFamily="18" charset="0"/>
-                        </a:rPr>
-                        <m:t>1</m:t>
-                      </m:r>
-                    </m:oMath>
-                  </m:oMathPara>
-                  <m:oMathPara xmlns:m="http://schemas.openxmlformats.org/officeDocument/2006/math">
-                    <m:oMathParaPr>
-                      <m:jc m:val="left"/>
-                    </m:oMathParaPr>
-                    <m:oMath xmlns:m="http://schemas.openxmlformats.org/officeDocument/2006/math">
-                      <m:r>
-                        <a:rPr lang="pt-BR" sz="2200" i="1" dirty="0" smtClean="0">
-                          <a:latin typeface="Cambria Math" panose="02040503050406030204" pitchFamily="18" charset="0"/>
-                        </a:rPr>
-                        <m:t>}</m:t>
-                      </m:r>
-                      <m:r>
-                        <a:rPr lang="pt-BR" sz="2200" b="0" i="1" dirty="0" smtClean="0">
-                          <a:latin typeface="Cambria Math" panose="02040503050406030204" pitchFamily="18" charset="0"/>
-                        </a:rPr>
-                        <m:t> </m:t>
-                      </m:r>
-                      <m:r>
-                        <a:rPr lang="pt-BR" sz="2200" b="0" i="1" dirty="0" smtClean="0">
-                          <a:latin typeface="Cambria Math" panose="02040503050406030204" pitchFamily="18" charset="0"/>
-                        </a:rPr>
-                        <m:t>𝑒𝑙𝑠𝑒</m:t>
-                      </m:r>
-                      <m:r>
-                        <a:rPr lang="pt-BR" sz="2200" b="0" i="1" dirty="0" smtClean="0">
-                          <a:latin typeface="Cambria Math" panose="02040503050406030204" pitchFamily="18" charset="0"/>
-                        </a:rPr>
-                        <m:t> {</m:t>
-                      </m:r>
-                    </m:oMath>
-                  </m:oMathPara>
-                </a14:m>
-              </a:p>
-              <a:p>
-                <a:pPr marL="457200" lvl="1" indent="0">
-                  <a:buNone/>
-                </a:pPr>
-              </a:p>
-              <a:p>
-                <a:pPr marL="457200" lvl="1" indent="0">
-                  <a:buNone/>
-                </a:pPr>
-              </a:p>
-              <a:p>
-                <a:pPr marL="457200" lvl="1" indent="0">
-                  <a:buNone/>
-                </a:pPr>
-                <a:endParaRPr lang="pt-BR" sz="2200" b="0" i="1" dirty="0">
-                  <a:latin typeface="Cambria Math" panose="02040503050406030204" pitchFamily="18" charset="0"/>
-                </a:endParaRPr>
-              </a:p>
-              <a:p>
-                <a:pPr marL="457200" lvl="1" indent="0">
-                  <a:buNone/>
-                </a:pPr>
-                <a:r>
-                  <a:rPr lang="pt-BR" sz="2200" dirty="0"/>
-                  <a:t>       </a:t>
-                </a:r>
-                <a14:m>
-                  <m:oMath xmlns:m="http://schemas.openxmlformats.org/officeDocument/2006/math">
-                    <m:r>
-                      <a:rPr lang="pt-BR" sz="2200" i="1" dirty="0">
-                        <a:latin typeface="Cambria Math" panose="02040503050406030204" pitchFamily="18" charset="0"/>
-                      </a:rPr>
-                      <m:t>𝑏𝑙𝑜𝑐𝑜</m:t>
-                    </m:r>
-                    <m:r>
-                      <a:rPr lang="pt-BR" sz="2200" i="1" dirty="0">
-                        <a:latin typeface="Cambria Math" panose="02040503050406030204" pitchFamily="18" charset="0"/>
-                      </a:rPr>
-                      <m:t> </m:t>
-                    </m:r>
-                    <m:r>
-                      <a:rPr lang="pt-BR" sz="2200" i="1" dirty="0">
-                        <a:latin typeface="Cambria Math" panose="02040503050406030204" pitchFamily="18" charset="0"/>
-                      </a:rPr>
-                      <m:t>𝑑𝑒</m:t>
-                    </m:r>
-                    <m:r>
-                      <a:rPr lang="pt-BR" sz="2200" i="1" dirty="0">
-                        <a:latin typeface="Cambria Math" panose="02040503050406030204" pitchFamily="18" charset="0"/>
-                      </a:rPr>
-                      <m:t> </m:t>
-                    </m:r>
-                    <m:r>
-                      <a:rPr lang="pt-BR" sz="2200" i="1" dirty="0">
-                        <a:latin typeface="Cambria Math" panose="02040503050406030204" pitchFamily="18" charset="0"/>
-                      </a:rPr>
-                      <m:t>𝑐𝑜𝑚𝑎𝑛𝑑𝑜</m:t>
-                    </m:r>
-                    <m:r>
-                      <a:rPr lang="pt-BR" sz="2200" b="0" i="1" dirty="0" smtClean="0">
-                        <a:latin typeface="Cambria Math" panose="02040503050406030204" pitchFamily="18" charset="0"/>
-                      </a:rPr>
-                      <m:t>2</m:t>
-                    </m:r>
-                  </m:oMath>
-                </a14:m>
-                <a:endParaRPr lang="pt-BR" sz="2200" i="1" dirty="0">
-                  <a:latin typeface="Cambria Math" panose="02040503050406030204" pitchFamily="18" charset="0"/>
-                </a:endParaRPr>
-              </a:p>
-              <a:p>
-                <a:pPr marL="457200" lvl="1" indent="0">
-                  <a:buNone/>
-                </a:pPr>
-                <a14:m>
-                  <m:oMathPara xmlns:m="http://schemas.openxmlformats.org/officeDocument/2006/math">
-                    <m:oMathParaPr>
-                      <m:jc m:val="left"/>
-                    </m:oMathParaPr>
-                    <m:oMath xmlns:m="http://schemas.openxmlformats.org/officeDocument/2006/math">
-                      <m:r>
-                        <a:rPr lang="pt-BR" sz="2200" i="1" dirty="0" smtClean="0">
-                          <a:latin typeface="Cambria Math" panose="02040503050406030204" pitchFamily="18" charset="0"/>
-                        </a:rPr>
-                        <m:t>}</m:t>
-                      </m:r>
-                    </m:oMath>
-                  </m:oMathPara>
-                </a14:m>
-              </a:p>
-              <a:p>
-                <a:pPr marL="0" indent="0">
-                  <a:buNone/>
-                </a:pPr>
-                <a:endParaRPr lang="pt-BR" sz="2400" dirty="0"/>
-              </a:p>
-              <a:p>
-                <a:pPr lvl="1"/>
-                <a:endParaRPr lang="pt-BR" sz="2000" b="1" i="1" dirty="0"/>
-              </a:p>
-              <a:p>
-                <a:pPr lvl="1"/>
-                <a:endParaRPr lang="pt-BR" sz="2000" b="1" i="1" dirty="0"/>
-              </a:p>
-              <a:p>
-                <a:pPr lvl="1"/>
-                <a:endParaRPr lang="pt-BR" sz="1800" b="1" i="1" dirty="0"/>
-              </a:p>
-              <a:p>
-                <a:pPr lvl="1"/>
-                <a:endParaRPr lang="pt-BR" sz="1800" b="1" i="1" dirty="0"/>
-              </a:p>
-            </p:txBody>
-          </p:sp>
-        </mc:Choice>
-        <mc:Fallback>
-          <p:sp>
-            <p:nvSpPr>
-              <p:cNvPr id="6" name="Espaço Reservado para Conteúdo 5">
-                <a:extLst>
-                  <a:ext uri="{FF2B5EF4-FFF2-40B4-BE49-F238E27FC236}">
-                    <a16:creationId xmlns:a16="http://schemas.microsoft.com/office/drawing/2014/main" id="{402F2442-8B72-6182-8933-F74EC87244EE}"/>
-                  </a:ext>
-                </a:extLst>
-              </p:cNvPr>
-              <p:cNvSpPr>
-                <a:spLocks noGrp="1" noRot="1" noChangeAspect="1" noMove="1" noResize="1" noEditPoints="1" noAdjustHandles="1" noChangeArrowheads="1" noChangeShapeType="1" noTextEdit="1"/>
-              </p:cNvSpPr>
-              <p:nvPr>
-                <p:ph idx="1"/>
-              </p:nvPr>
-            </p:nvSpPr>
-            <p:spPr>
-              <a:xfrm>
-                <a:off x="1692363" y="1552668"/>
-                <a:ext cx="10014215" cy="5305332"/>
-              </a:xfrm>
-              <a:blipFill>
-                <a:blip r:embed="rId3"/>
-                <a:stretch>
-                  <a:fillRect l="-853" t="-1609" r="-305"/>
-                </a:stretch>
-              </a:blipFill>
-            </p:spPr>
-            <p:txBody>
-              <a:bodyPr/>
-              <a:lstStyle/>
-              <a:p>
-                <a:r>
-                  <a:rPr lang="pt-BR">
-                    <a:noFill/>
-                  </a:rPr>
-                  <a:t> </a:t>
-                </a:r>
-              </a:p>
-            </p:txBody>
-          </p:sp>
-        </mc:Fallback>
-      </mc:AlternateContent>
+      <p:sp>
+        <p:nvSpPr>
+          <p:cNvPr id="6" name="Espaço Reservado para Conteúdo 5">
+            <a:extLst>
+              <a:ext uri="{FF2B5EF4-FFF2-40B4-BE49-F238E27FC236}">
+                <a16:creationId xmlns:a16="http://schemas.microsoft.com/office/drawing/2014/main" id="{402F2442-8B72-6182-8933-F74EC87244EE}"/>
+              </a:ext>
+            </a:extLst>
+          </p:cNvPr>
+          <p:cNvSpPr>
+            <a:spLocks noGrp="1"/>
+          </p:cNvSpPr>
+          <p:nvPr>
+            <p:ph idx="1"/>
+          </p:nvPr>
+        </p:nvSpPr>
+        <p:spPr>
+          <a:xfrm>
+            <a:off x="1692363" y="1552668"/>
+            <a:ext cx="10014215" cy="5305332"/>
+          </a:xfrm>
+        </p:spPr>
+        <p:txBody>
+          <a:bodyPr>
+            <a:normAutofit/>
+          </a:bodyPr>
+          <a:lstStyle/>
+          <a:p>
+            <a:r>
+              <a:rPr lang="pt-BR" sz="2400" dirty="0"/>
+              <a:t>Análogo ao SE-ENTÃO-SENÃO do Visual G.</a:t>
+            </a:r>
+          </a:p>
+          <a:p>
+            <a:r>
+              <a:rPr lang="pt-BR" sz="2400" dirty="0"/>
+              <a:t>A execução de um determinado trecho é executada somente se a condição for satisfeita.</a:t>
+            </a:r>
+          </a:p>
+          <a:p>
+            <a:r>
+              <a:rPr lang="pt-BR" sz="2400" dirty="0"/>
+              <a:t>Caso a condição não seja satisfeita, um outro bloco de comando é executado.</a:t>
+            </a:r>
+          </a:p>
+          <a:p>
+            <a:endParaRPr lang="pt-BR" sz="2400" dirty="0"/>
+          </a:p>
+          <a:p>
+            <a:pPr marL="0" indent="0">
+              <a:buNone/>
+            </a:pPr>
+            <a:endParaRPr lang="pt-BR" sz="2400" dirty="0"/>
+          </a:p>
+          <a:p>
+            <a:pPr lvl="1"/>
+            <a:endParaRPr lang="pt-BR" sz="2000" b="1" i="1" dirty="0"/>
+          </a:p>
+          <a:p>
+            <a:pPr lvl="1"/>
+            <a:endParaRPr lang="pt-BR" sz="2000" b="1" i="1" dirty="0"/>
+          </a:p>
+          <a:p>
+            <a:pPr lvl="1"/>
+            <a:endParaRPr lang="pt-BR" sz="1800" b="1" i="1" dirty="0"/>
+          </a:p>
+          <a:p>
+            <a:pPr lvl="1"/>
+            <a:endParaRPr lang="pt-BR" sz="1800" b="1" i="1" dirty="0"/>
+          </a:p>
+        </p:txBody>
+      </p:sp>
       <p:pic>
         <p:nvPicPr>
           <p:cNvPr id="4" name="Imagem 3">
             <a:extLst>
               <a:ext uri="{FF2B5EF4-FFF2-40B4-BE49-F238E27FC236}">
                 <a16:creationId xmlns:a16="http://schemas.microsoft.com/office/drawing/2014/main" id="{08DCCD08-AE7D-C0FC-C117-533B198ED397}"/>
+              </a:ext>
+            </a:extLst>
+          </p:cNvPr>
+          <p:cNvPicPr>
+            <a:picLocks noChangeAspect="1"/>
+          </p:cNvPicPr>
+          <p:nvPr/>
+        </p:nvPicPr>
+        <p:blipFill>
+          <a:blip r:embed="rId3"/>
+          <a:stretch>
+            <a:fillRect/>
+          </a:stretch>
+        </p:blipFill>
+        <p:spPr>
+          <a:xfrm>
+            <a:off x="6824619" y="3581400"/>
+            <a:ext cx="3850481" cy="3103373"/>
+          </a:xfrm>
+          <a:prstGeom prst="rect">
+            <a:avLst/>
+          </a:prstGeom>
+        </p:spPr>
+      </p:pic>
+      <p:pic>
+        <p:nvPicPr>
+          <p:cNvPr id="7" name="Imagem 6">
+            <a:extLst>
+              <a:ext uri="{FF2B5EF4-FFF2-40B4-BE49-F238E27FC236}">
+                <a16:creationId xmlns:a16="http://schemas.microsoft.com/office/drawing/2014/main" id="{73244BE0-763F-2D6E-6265-077359D6DAE7}"/>
               </a:ext>
             </a:extLst>
           </p:cNvPr>
@@ -30983,8 +30486,8 @@
         </p:blipFill>
         <p:spPr>
           <a:xfrm>
-            <a:off x="6220817" y="3429000"/>
-            <a:ext cx="4278820" cy="3448602"/>
+            <a:off x="1990882" y="3418586"/>
+            <a:ext cx="3654200" cy="3429000"/>
           </a:xfrm>
           <a:prstGeom prst="rect">
             <a:avLst/>
@@ -31164,511 +30667,115 @@
           </a:p>
         </p:txBody>
       </p:sp>
-      <mc:AlternateContent xmlns:mc="http://schemas.openxmlformats.org/markup-compatibility/2006">
-        <mc:Choice xmlns:a14="http://schemas.microsoft.com/office/drawing/2010/main" Requires="a14">
-          <p:sp>
-            <p:nvSpPr>
-              <p:cNvPr id="6" name="Espaço Reservado para Conteúdo 5">
-                <a:extLst>
-                  <a:ext uri="{FF2B5EF4-FFF2-40B4-BE49-F238E27FC236}">
-                    <a16:creationId xmlns:a16="http://schemas.microsoft.com/office/drawing/2014/main" id="{C1F72C18-3515-7C50-83DD-9052A8D9197F}"/>
-                  </a:ext>
-                </a:extLst>
-              </p:cNvPr>
-              <p:cNvSpPr>
-                <a:spLocks noGrp="1"/>
-              </p:cNvSpPr>
-              <p:nvPr>
-                <p:ph idx="1"/>
-              </p:nvPr>
-            </p:nvSpPr>
-            <p:spPr>
-              <a:xfrm>
-                <a:off x="598266" y="1451068"/>
-                <a:ext cx="7293107" cy="5305332"/>
-              </a:xfrm>
-            </p:spPr>
-            <p:txBody>
-              <a:bodyPr>
-                <a:normAutofit/>
-              </a:bodyPr>
-              <a:lstStyle/>
-              <a:p>
-                <a:r>
-                  <a:rPr lang="pt-BR" sz="2400" dirty="0"/>
-                  <a:t>Caso existam múltiplas condições à serem analisadas, os operadores de </a:t>
-                </a:r>
-                <a:r>
-                  <a:rPr lang="pt-BR" sz="2400" b="1" i="1" dirty="0" err="1"/>
-                  <a:t>if</a:t>
-                </a:r>
-                <a:r>
-                  <a:rPr lang="pt-BR" sz="2400" dirty="0"/>
-                  <a:t> e </a:t>
-                </a:r>
-                <a:r>
-                  <a:rPr lang="pt-BR" sz="2400" b="1" i="1" dirty="0" err="1"/>
-                  <a:t>else</a:t>
-                </a:r>
-                <a:r>
-                  <a:rPr lang="pt-BR" sz="2400" dirty="0"/>
-                  <a:t> podem ser encadeados sequencialmente</a:t>
-                </a:r>
-              </a:p>
-              <a:p>
-                <a:endParaRPr lang="pt-BR" sz="2400" dirty="0"/>
-              </a:p>
-              <a:p>
-                <a:r>
-                  <a:rPr lang="pt-BR" sz="2400" dirty="0"/>
-                  <a:t>Sintaxe do encadeamento:</a:t>
-                </a:r>
-              </a:p>
-              <a:p>
-                <a:endParaRPr lang="pt-BR" sz="2400" dirty="0"/>
-              </a:p>
-              <a:p>
-                <a:pPr marL="457200" lvl="1" indent="0">
-                  <a:buNone/>
-                </a:pPr>
-                <a14:m>
-                  <m:oMathPara xmlns:m="http://schemas.openxmlformats.org/officeDocument/2006/math">
-                    <m:oMathParaPr>
-                      <m:jc m:val="left"/>
-                    </m:oMathParaPr>
-                    <m:oMath xmlns:m="http://schemas.openxmlformats.org/officeDocument/2006/math">
-                      <m:r>
-                        <a:rPr lang="pt-BR" sz="2200" i="1" dirty="0" smtClean="0">
-                          <a:latin typeface="Cambria Math" panose="02040503050406030204" pitchFamily="18" charset="0"/>
-                        </a:rPr>
-                        <m:t>𝐼𝑓</m:t>
-                      </m:r>
-                      <m:r>
-                        <a:rPr lang="pt-BR" sz="2200" i="1" dirty="0" smtClean="0">
-                          <a:latin typeface="Cambria Math" panose="02040503050406030204" pitchFamily="18" charset="0"/>
-                        </a:rPr>
-                        <m:t>(</m:t>
-                      </m:r>
-                      <m:r>
-                        <a:rPr lang="pt-BR" sz="2200" i="1" dirty="0" smtClean="0">
-                          <a:latin typeface="Cambria Math" panose="02040503050406030204" pitchFamily="18" charset="0"/>
-                        </a:rPr>
-                        <m:t>𝑐𝑜𝑛𝑑𝑖</m:t>
-                      </m:r>
-                      <m:r>
-                        <a:rPr lang="pt-BR" sz="2200" i="1" dirty="0" smtClean="0">
-                          <a:latin typeface="Cambria Math" panose="02040503050406030204" pitchFamily="18" charset="0"/>
-                        </a:rPr>
-                        <m:t>çã</m:t>
-                      </m:r>
-                      <m:r>
-                        <a:rPr lang="pt-BR" sz="2200" i="1" dirty="0" smtClean="0">
-                          <a:latin typeface="Cambria Math" panose="02040503050406030204" pitchFamily="18" charset="0"/>
-                        </a:rPr>
-                        <m:t>𝑜</m:t>
-                      </m:r>
-                      <m:r>
-                        <a:rPr lang="pt-BR" sz="2200" i="1" dirty="0" smtClean="0">
-                          <a:latin typeface="Cambria Math" panose="02040503050406030204" pitchFamily="18" charset="0"/>
-                        </a:rPr>
-                        <m:t>){</m:t>
-                      </m:r>
-                    </m:oMath>
-                  </m:oMathPara>
-                  <m:oMathPara xmlns:m="http://schemas.openxmlformats.org/officeDocument/2006/math">
-                    <m:oMathParaPr>
-                      <m:jc m:val="left"/>
-                    </m:oMathParaPr>
-                    <m:oMath xmlns:m="http://schemas.openxmlformats.org/officeDocument/2006/math">
-                      <m:r>
-                        <a:rPr lang="pt-BR" sz="2200" i="1" dirty="0" smtClean="0">
-                          <a:latin typeface="Cambria Math" panose="02040503050406030204" pitchFamily="18" charset="0"/>
-                        </a:rPr>
-                        <m:t>	</m:t>
-                      </m:r>
-                      <m:r>
-                        <a:rPr lang="pt-BR" sz="2200" b="0" i="1" dirty="0" smtClean="0">
-                          <a:latin typeface="Cambria Math" panose="02040503050406030204" pitchFamily="18" charset="0"/>
-                        </a:rPr>
-                        <m:t>      </m:t>
-                      </m:r>
-                      <m:r>
-                        <a:rPr lang="pt-BR" sz="2200" i="1" dirty="0" smtClean="0">
-                          <a:latin typeface="Cambria Math" panose="02040503050406030204" pitchFamily="18" charset="0"/>
-                        </a:rPr>
-                        <m:t>𝑏𝑙𝑜𝑐𝑜</m:t>
-                      </m:r>
-                      <m:r>
-                        <a:rPr lang="pt-BR" sz="2200" i="1" dirty="0" smtClean="0">
-                          <a:latin typeface="Cambria Math" panose="02040503050406030204" pitchFamily="18" charset="0"/>
-                        </a:rPr>
-                        <m:t> </m:t>
-                      </m:r>
-                      <m:r>
-                        <a:rPr lang="pt-BR" sz="2200" i="1" dirty="0" smtClean="0">
-                          <a:latin typeface="Cambria Math" panose="02040503050406030204" pitchFamily="18" charset="0"/>
-                        </a:rPr>
-                        <m:t>𝑑𝑒</m:t>
-                      </m:r>
-                      <m:r>
-                        <a:rPr lang="pt-BR" sz="2200" i="1" dirty="0" smtClean="0">
-                          <a:latin typeface="Cambria Math" panose="02040503050406030204" pitchFamily="18" charset="0"/>
-                        </a:rPr>
-                        <m:t> </m:t>
-                      </m:r>
-                      <m:r>
-                        <a:rPr lang="pt-BR" sz="2200" i="1" dirty="0" smtClean="0">
-                          <a:latin typeface="Cambria Math" panose="02040503050406030204" pitchFamily="18" charset="0"/>
-                        </a:rPr>
-                        <m:t>𝑐𝑜𝑚𝑎𝑛𝑑𝑜</m:t>
-                      </m:r>
-                      <m:r>
-                        <a:rPr lang="pt-BR" sz="2200" b="0" i="1" dirty="0" smtClean="0">
-                          <a:latin typeface="Cambria Math" panose="02040503050406030204" pitchFamily="18" charset="0"/>
-                        </a:rPr>
-                        <m:t> 1</m:t>
-                      </m:r>
-                    </m:oMath>
-                  </m:oMathPara>
-                  <m:oMathPara xmlns:m="http://schemas.openxmlformats.org/officeDocument/2006/math">
-                    <m:oMathParaPr>
-                      <m:jc m:val="left"/>
-                    </m:oMathParaPr>
-                    <m:oMath xmlns:m="http://schemas.openxmlformats.org/officeDocument/2006/math">
-                      <m:r>
-                        <a:rPr lang="pt-BR" sz="2200" i="1" dirty="0" smtClean="0">
-                          <a:latin typeface="Cambria Math" panose="02040503050406030204" pitchFamily="18" charset="0"/>
-                        </a:rPr>
-                        <m:t>}</m:t>
-                      </m:r>
-                      <m:r>
-                        <a:rPr lang="pt-BR" sz="2200" b="0" i="1" dirty="0" smtClean="0">
-                          <a:latin typeface="Cambria Math" panose="02040503050406030204" pitchFamily="18" charset="0"/>
-                        </a:rPr>
-                        <m:t> </m:t>
-                      </m:r>
-                      <m:r>
-                        <a:rPr lang="pt-BR" sz="2200" b="0" i="1" dirty="0" smtClean="0">
-                          <a:latin typeface="Cambria Math" panose="02040503050406030204" pitchFamily="18" charset="0"/>
-                        </a:rPr>
-                        <m:t>𝑒𝑙𝑠𝑒</m:t>
-                      </m:r>
-                      <m:r>
-                        <a:rPr lang="pt-BR" sz="2200" b="0" i="1" dirty="0" smtClean="0">
-                          <a:latin typeface="Cambria Math" panose="02040503050406030204" pitchFamily="18" charset="0"/>
-                        </a:rPr>
-                        <m:t> </m:t>
-                      </m:r>
-                      <m:r>
-                        <a:rPr lang="pt-BR" sz="2200" b="0" i="1" dirty="0" smtClean="0">
-                          <a:latin typeface="Cambria Math" panose="02040503050406030204" pitchFamily="18" charset="0"/>
-                        </a:rPr>
-                        <m:t>𝑖𝑓</m:t>
-                      </m:r>
-                      <m:r>
-                        <a:rPr lang="pt-BR" sz="2200" i="1" dirty="0">
-                          <a:latin typeface="Cambria Math" panose="02040503050406030204" pitchFamily="18" charset="0"/>
-                        </a:rPr>
-                        <m:t>(</m:t>
-                      </m:r>
-                      <m:r>
-                        <a:rPr lang="pt-BR" sz="2200" i="1" dirty="0">
-                          <a:latin typeface="Cambria Math" panose="02040503050406030204" pitchFamily="18" charset="0"/>
-                        </a:rPr>
-                        <m:t>𝑐𝑜𝑛𝑑𝑖</m:t>
-                      </m:r>
-                      <m:r>
-                        <a:rPr lang="pt-BR" sz="2200" i="1" dirty="0">
-                          <a:latin typeface="Cambria Math" panose="02040503050406030204" pitchFamily="18" charset="0"/>
-                        </a:rPr>
-                        <m:t>çã</m:t>
-                      </m:r>
-                      <m:r>
-                        <a:rPr lang="pt-BR" sz="2200" i="1" dirty="0">
-                          <a:latin typeface="Cambria Math" panose="02040503050406030204" pitchFamily="18" charset="0"/>
-                        </a:rPr>
-                        <m:t>𝑜</m:t>
-                      </m:r>
-                      <m:r>
-                        <a:rPr lang="pt-BR" sz="2200" i="1" dirty="0">
-                          <a:latin typeface="Cambria Math" panose="02040503050406030204" pitchFamily="18" charset="0"/>
-                        </a:rPr>
-                        <m:t>){</m:t>
-                      </m:r>
-                    </m:oMath>
-                  </m:oMathPara>
-                </a14:m>
-              </a:p>
-              <a:p>
-                <a:pPr marL="457200" lvl="1" indent="0">
-                  <a:buNone/>
-                </a:pPr>
-              </a:p>
-              <a:p>
-                <a:pPr marL="457200" lvl="1" indent="0">
-                  <a:buNone/>
-                </a:pPr>
-                <a:endParaRPr lang="pt-BR" sz="2200" b="0" i="1" dirty="0">
-                  <a:latin typeface="Cambria Math" panose="02040503050406030204" pitchFamily="18" charset="0"/>
-                </a:endParaRPr>
-              </a:p>
-              <a:p>
-                <a:pPr marL="457200" lvl="1" indent="0">
-                  <a:buNone/>
-                </a:pPr>
-                <a:r>
-                  <a:rPr lang="pt-BR" sz="2200" dirty="0"/>
-                  <a:t>       </a:t>
-                </a:r>
-                <a14:m>
-                  <m:oMath xmlns:m="http://schemas.openxmlformats.org/officeDocument/2006/math">
-                    <m:r>
-                      <a:rPr lang="pt-BR" sz="2200" i="1" dirty="0">
-                        <a:latin typeface="Cambria Math" panose="02040503050406030204" pitchFamily="18" charset="0"/>
-                      </a:rPr>
-                      <m:t>𝑏𝑙𝑜𝑐𝑜</m:t>
-                    </m:r>
-                    <m:r>
-                      <a:rPr lang="pt-BR" sz="2200" i="1" dirty="0">
-                        <a:latin typeface="Cambria Math" panose="02040503050406030204" pitchFamily="18" charset="0"/>
-                      </a:rPr>
-                      <m:t> </m:t>
-                    </m:r>
-                    <m:r>
-                      <a:rPr lang="pt-BR" sz="2200" i="1" dirty="0">
-                        <a:latin typeface="Cambria Math" panose="02040503050406030204" pitchFamily="18" charset="0"/>
-                      </a:rPr>
-                      <m:t>𝑑𝑒</m:t>
-                    </m:r>
-                    <m:r>
-                      <a:rPr lang="pt-BR" sz="2200" i="1" dirty="0">
-                        <a:latin typeface="Cambria Math" panose="02040503050406030204" pitchFamily="18" charset="0"/>
-                      </a:rPr>
-                      <m:t> </m:t>
-                    </m:r>
-                    <m:r>
-                      <a:rPr lang="pt-BR" sz="2200" i="1" dirty="0">
-                        <a:latin typeface="Cambria Math" panose="02040503050406030204" pitchFamily="18" charset="0"/>
-                      </a:rPr>
-                      <m:t>𝑐𝑜𝑚𝑎𝑛𝑑𝑜</m:t>
-                    </m:r>
-                    <m:r>
-                      <a:rPr lang="pt-BR" sz="2200" b="0" i="1" dirty="0" smtClean="0">
-                        <a:latin typeface="Cambria Math" panose="02040503050406030204" pitchFamily="18" charset="0"/>
-                      </a:rPr>
-                      <m:t> 2</m:t>
-                    </m:r>
-                  </m:oMath>
-                </a14:m>
-                <a:endParaRPr lang="pt-BR" sz="2200" i="1" dirty="0">
-                  <a:latin typeface="Cambria Math" panose="02040503050406030204" pitchFamily="18" charset="0"/>
-                </a:endParaRPr>
-              </a:p>
-              <a:p>
-                <a:pPr marL="457200" lvl="1" indent="0">
-                  <a:buNone/>
-                </a:pPr>
-                <a14:m>
-                  <m:oMathPara xmlns:m="http://schemas.openxmlformats.org/officeDocument/2006/math">
-                    <m:oMathParaPr>
-                      <m:jc m:val="left"/>
-                    </m:oMathParaPr>
-                    <m:oMath xmlns:m="http://schemas.openxmlformats.org/officeDocument/2006/math">
-                      <m:r>
-                        <a:rPr lang="pt-BR" sz="2200" i="1" dirty="0" smtClean="0">
-                          <a:latin typeface="Cambria Math" panose="02040503050406030204" pitchFamily="18" charset="0"/>
-                        </a:rPr>
-                        <m:t>…</m:t>
-                      </m:r>
-                    </m:oMath>
-                  </m:oMathPara>
-                </a14:m>
-                <a:endParaRPr lang="pt-BR" sz="2200" i="1" dirty="0">
-                  <a:latin typeface="Cambria Math" panose="02040503050406030204" pitchFamily="18" charset="0"/>
-                </a:endParaRPr>
-              </a:p>
-              <a:p>
-                <a:pPr marL="457200" lvl="1" indent="0">
-                  <a:buNone/>
-                </a:pPr>
-                <a14:m>
-                  <m:oMathPara xmlns:m="http://schemas.openxmlformats.org/officeDocument/2006/math">
-                    <m:oMathParaPr>
-                      <m:jc m:val="left"/>
-                    </m:oMathParaPr>
-                    <m:oMath xmlns:m="http://schemas.openxmlformats.org/officeDocument/2006/math">
-                      <m:r>
-                        <a:rPr lang="pt-BR" sz="2200" i="1" dirty="0">
-                          <a:latin typeface="Cambria Math" panose="02040503050406030204" pitchFamily="18" charset="0"/>
-                        </a:rPr>
-                        <m:t>}</m:t>
-                      </m:r>
-                      <m:r>
-                        <m:rPr>
-                          <m:sty m:val="p"/>
-                        </m:rPr>
-                        <a:rPr lang="pt-BR" sz="2200" b="0" i="0" dirty="0" smtClean="0">
-                          <a:latin typeface="Cambria Math" panose="02040503050406030204" pitchFamily="18" charset="0"/>
-                        </a:rPr>
-                        <m:t>else</m:t>
-                      </m:r>
-                      <m:r>
-                        <a:rPr lang="pt-BR" sz="2200" b="0" i="0" dirty="0" smtClean="0">
-                          <a:latin typeface="Cambria Math" panose="02040503050406030204" pitchFamily="18" charset="0"/>
-                        </a:rPr>
-                        <m:t> {</m:t>
-                      </m:r>
-                    </m:oMath>
-                  </m:oMathPara>
-                </a14:m>
-                <a:endParaRPr lang="pt-BR" sz="2200" b="0" dirty="0"/>
-              </a:p>
-              <a:p>
-                <a:pPr marL="457200" lvl="1" indent="0">
-                  <a:buNone/>
-                </a:pPr>
-                <a:r>
-                  <a:rPr lang="pt-BR" sz="2200" dirty="0"/>
-                  <a:t>      </a:t>
-                </a:r>
-                <a14:m>
-                  <m:oMath xmlns:m="http://schemas.openxmlformats.org/officeDocument/2006/math">
-                    <m:r>
-                      <a:rPr lang="pt-BR" sz="2200" i="1" dirty="0">
-                        <a:latin typeface="Cambria Math" panose="02040503050406030204" pitchFamily="18" charset="0"/>
-                      </a:rPr>
-                      <m:t>𝑏𝑙𝑜𝑐𝑜</m:t>
-                    </m:r>
-                    <m:r>
-                      <a:rPr lang="pt-BR" sz="2200" i="1" dirty="0">
-                        <a:latin typeface="Cambria Math" panose="02040503050406030204" pitchFamily="18" charset="0"/>
-                      </a:rPr>
-                      <m:t> </m:t>
-                    </m:r>
-                    <m:r>
-                      <a:rPr lang="pt-BR" sz="2200" i="1" dirty="0">
-                        <a:latin typeface="Cambria Math" panose="02040503050406030204" pitchFamily="18" charset="0"/>
-                      </a:rPr>
-                      <m:t>𝑑𝑒</m:t>
-                    </m:r>
-                    <m:r>
-                      <a:rPr lang="pt-BR" sz="2200" i="1" dirty="0">
-                        <a:latin typeface="Cambria Math" panose="02040503050406030204" pitchFamily="18" charset="0"/>
-                      </a:rPr>
-                      <m:t> </m:t>
-                    </m:r>
-                    <m:r>
-                      <a:rPr lang="pt-BR" sz="2200" i="1" dirty="0">
-                        <a:latin typeface="Cambria Math" panose="02040503050406030204" pitchFamily="18" charset="0"/>
-                      </a:rPr>
-                      <m:t>𝑐𝑜𝑚𝑎𝑛𝑑𝑜</m:t>
-                    </m:r>
-                    <m:r>
-                      <a:rPr lang="pt-BR" sz="2200" i="1" dirty="0">
-                        <a:latin typeface="Cambria Math" panose="02040503050406030204" pitchFamily="18" charset="0"/>
-                      </a:rPr>
-                      <m:t> </m:t>
-                    </m:r>
-                    <m:r>
-                      <a:rPr lang="pt-BR" sz="2200" b="0" i="1" dirty="0" smtClean="0">
-                        <a:latin typeface="Cambria Math" panose="02040503050406030204" pitchFamily="18" charset="0"/>
-                      </a:rPr>
-                      <m:t>𝑓𝑖𝑛𝑎𝑙</m:t>
-                    </m:r>
-                  </m:oMath>
-                </a14:m>
-                <a:endParaRPr lang="pt-BR" sz="2200" dirty="0"/>
-              </a:p>
-              <a:p>
-                <a:pPr marL="457200" lvl="1" indent="0">
-                  <a:buNone/>
-                </a:pPr>
-                <a:r>
-                  <a:rPr lang="pt-BR" sz="2200" dirty="0"/>
-                  <a:t>}</a:t>
-                </a:r>
-              </a:p>
-              <a:p>
-                <a:pPr marL="457200" lvl="1" indent="0">
-                  <a:buNone/>
-                </a:pPr>
-                <a14:m/>
-              </a:p>
-              <a:p>
-                <a:pPr marL="0" indent="0">
-                  <a:buNone/>
-                </a:pPr>
-                <a:endParaRPr lang="pt-BR" sz="2400" dirty="0"/>
-              </a:p>
-              <a:p>
-                <a:pPr lvl="1"/>
-                <a:endParaRPr lang="pt-BR" sz="2000" b="1" i="1" dirty="0"/>
-              </a:p>
-              <a:p>
-                <a:pPr lvl="1"/>
-                <a:endParaRPr lang="pt-BR" sz="2000" b="1" i="1" dirty="0"/>
-              </a:p>
-              <a:p>
-                <a:pPr lvl="1"/>
-                <a:endParaRPr lang="pt-BR" sz="1800" b="1" i="1" dirty="0"/>
-              </a:p>
-              <a:p>
-                <a:pPr lvl="1"/>
-                <a:endParaRPr lang="pt-BR" sz="1800" b="1" i="1" dirty="0"/>
-              </a:p>
-            </p:txBody>
-          </p:sp>
-        </mc:Choice>
-        <mc:Fallback>
-          <p:sp>
-            <p:nvSpPr>
-              <p:cNvPr id="6" name="Espaço Reservado para Conteúdo 5">
-                <a:extLst>
-                  <a:ext uri="{FF2B5EF4-FFF2-40B4-BE49-F238E27FC236}">
-                    <a16:creationId xmlns:a16="http://schemas.microsoft.com/office/drawing/2014/main" id="{C1F72C18-3515-7C50-83DD-9052A8D9197F}"/>
-                  </a:ext>
-                </a:extLst>
-              </p:cNvPr>
-              <p:cNvSpPr>
-                <a:spLocks noGrp="1" noRot="1" noChangeAspect="1" noMove="1" noResize="1" noEditPoints="1" noAdjustHandles="1" noChangeArrowheads="1" noChangeShapeType="1" noTextEdit="1"/>
-              </p:cNvSpPr>
-              <p:nvPr>
-                <p:ph idx="1"/>
-              </p:nvPr>
-            </p:nvSpPr>
-            <p:spPr>
-              <a:xfrm>
-                <a:off x="598266" y="1451068"/>
-                <a:ext cx="7293107" cy="5305332"/>
-              </a:xfrm>
-              <a:blipFill>
-                <a:blip r:embed="rId3"/>
-                <a:stretch>
-                  <a:fillRect l="-1086" t="-1609"/>
-                </a:stretch>
-              </a:blipFill>
-            </p:spPr>
-            <p:txBody>
-              <a:bodyPr/>
-              <a:lstStyle/>
-              <a:p>
-                <a:r>
-                  <a:rPr lang="pt-BR">
-                    <a:noFill/>
-                  </a:rPr>
-                  <a:t> </a:t>
-                </a:r>
-              </a:p>
-            </p:txBody>
-          </p:sp>
-        </mc:Fallback>
-      </mc:AlternateContent>
+      <p:sp>
+        <p:nvSpPr>
+          <p:cNvPr id="6" name="Espaço Reservado para Conteúdo 5">
+            <a:extLst>
+              <a:ext uri="{FF2B5EF4-FFF2-40B4-BE49-F238E27FC236}">
+                <a16:creationId xmlns:a16="http://schemas.microsoft.com/office/drawing/2014/main" id="{C1F72C18-3515-7C50-83DD-9052A8D9197F}"/>
+              </a:ext>
+            </a:extLst>
+          </p:cNvPr>
+          <p:cNvSpPr>
+            <a:spLocks noGrp="1"/>
+          </p:cNvSpPr>
+          <p:nvPr>
+            <p:ph idx="1"/>
+          </p:nvPr>
+        </p:nvSpPr>
+        <p:spPr>
+          <a:xfrm>
+            <a:off x="959224" y="1896755"/>
+            <a:ext cx="5655778" cy="4413955"/>
+          </a:xfrm>
+        </p:spPr>
+        <p:txBody>
+          <a:bodyPr>
+            <a:normAutofit/>
+          </a:bodyPr>
+          <a:lstStyle/>
+          <a:p>
+            <a:r>
+              <a:rPr lang="pt-BR" sz="2400" dirty="0"/>
+              <a:t>Caso existam múltiplas condições à serem analisadas, os operadores de </a:t>
+            </a:r>
+            <a:r>
+              <a:rPr lang="pt-BR" sz="2400" b="1" i="1" dirty="0" err="1"/>
+              <a:t>if</a:t>
+            </a:r>
+            <a:r>
+              <a:rPr lang="pt-BR" sz="2400" dirty="0"/>
+              <a:t> e </a:t>
+            </a:r>
+            <a:r>
+              <a:rPr lang="pt-BR" sz="2400" b="1" i="1" dirty="0" err="1"/>
+              <a:t>else</a:t>
+            </a:r>
+            <a:r>
+              <a:rPr lang="pt-BR" sz="2400" dirty="0"/>
+              <a:t> podem ser encadeados sequencialmente.</a:t>
+            </a:r>
+          </a:p>
+          <a:p>
+            <a:endParaRPr lang="pt-BR" sz="2400" dirty="0"/>
+          </a:p>
+          <a:p>
+            <a:endParaRPr lang="pt-BR" sz="2400" dirty="0"/>
+          </a:p>
+          <a:p>
+            <a:pPr lvl="1"/>
+            <a:endParaRPr lang="pt-BR" sz="2000" b="1" i="1" dirty="0"/>
+          </a:p>
+          <a:p>
+            <a:pPr lvl="1"/>
+            <a:endParaRPr lang="pt-BR" sz="2000" b="1" i="1" dirty="0"/>
+          </a:p>
+          <a:p>
+            <a:pPr lvl="1"/>
+            <a:endParaRPr lang="pt-BR" sz="1800" b="1" i="1" dirty="0"/>
+          </a:p>
+          <a:p>
+            <a:pPr lvl="1"/>
+            <a:endParaRPr lang="pt-BR" sz="1800" b="1" i="1" dirty="0"/>
+          </a:p>
+        </p:txBody>
+      </p:sp>
       <p:pic>
         <p:nvPicPr>
           <p:cNvPr id="9" name="Imagem 8">
             <a:extLst>
               <a:ext uri="{FF2B5EF4-FFF2-40B4-BE49-F238E27FC236}">
                 <a16:creationId xmlns:a16="http://schemas.microsoft.com/office/drawing/2014/main" id="{932AAEF5-AEDA-5984-A95D-1EA112776BE7}"/>
+              </a:ext>
+            </a:extLst>
+          </p:cNvPr>
+          <p:cNvPicPr>
+            <a:picLocks noChangeAspect="1"/>
+          </p:cNvPicPr>
+          <p:nvPr/>
+        </p:nvPicPr>
+        <p:blipFill>
+          <a:blip r:embed="rId3"/>
+          <a:stretch>
+            <a:fillRect/>
+          </a:stretch>
+        </p:blipFill>
+        <p:spPr>
+          <a:xfrm>
+            <a:off x="6880473" y="1451066"/>
+            <a:ext cx="4135580" cy="5305332"/>
+          </a:xfrm>
+          <a:prstGeom prst="rect">
+            <a:avLst/>
+          </a:prstGeom>
+        </p:spPr>
+      </p:pic>
+      <p:pic>
+        <p:nvPicPr>
+          <p:cNvPr id="3" name="Imagem 2">
+            <a:extLst>
+              <a:ext uri="{FF2B5EF4-FFF2-40B4-BE49-F238E27FC236}">
+                <a16:creationId xmlns:a16="http://schemas.microsoft.com/office/drawing/2014/main" id="{0F019E79-9DE9-561B-3CF0-648C2E8C0728}"/>
               </a:ext>
             </a:extLst>
           </p:cNvPr>
@@ -31685,14 +30792,66 @@
         </p:blipFill>
         <p:spPr>
           <a:xfrm>
-            <a:off x="7947181" y="1451068"/>
-            <a:ext cx="4135580" cy="5305332"/>
+            <a:off x="1224695" y="3176672"/>
+            <a:ext cx="5124835" cy="3538766"/>
           </a:xfrm>
           <a:prstGeom prst="rect">
             <a:avLst/>
           </a:prstGeom>
         </p:spPr>
       </p:pic>
+      <p:sp>
+        <p:nvSpPr>
+          <p:cNvPr id="4" name="Retângulo 3">
+            <a:extLst>
+              <a:ext uri="{FF2B5EF4-FFF2-40B4-BE49-F238E27FC236}">
+                <a16:creationId xmlns:a16="http://schemas.microsoft.com/office/drawing/2014/main" id="{77F2AE48-E24F-1212-3A7D-959C2235010C}"/>
+              </a:ext>
+            </a:extLst>
+          </p:cNvPr>
+          <p:cNvSpPr/>
+          <p:nvPr/>
+        </p:nvSpPr>
+        <p:spPr>
+          <a:xfrm>
+            <a:off x="4380089" y="3228622"/>
+            <a:ext cx="1896533" cy="530578"/>
+          </a:xfrm>
+          <a:prstGeom prst="rect">
+            <a:avLst/>
+          </a:prstGeom>
+          <a:solidFill>
+            <a:srgbClr val="7DA7D8"/>
+          </a:solidFill>
+          <a:ln>
+            <a:noFill/>
+          </a:ln>
+        </p:spPr>
+        <p:style>
+          <a:lnRef idx="2">
+            <a:schemeClr val="accent1">
+              <a:shade val="15000"/>
+            </a:schemeClr>
+          </a:lnRef>
+          <a:fillRef idx="1">
+            <a:schemeClr val="accent1"/>
+          </a:fillRef>
+          <a:effectRef idx="0">
+            <a:schemeClr val="accent1"/>
+          </a:effectRef>
+          <a:fontRef idx="minor">
+            <a:schemeClr val="lt1"/>
+          </a:fontRef>
+        </p:style>
+        <p:txBody>
+          <a:bodyPr rtlCol="0" anchor="ctr"/>
+          <a:lstStyle/>
+          <a:p>
+            <a:pPr algn="ctr"/>
+            <a:endParaRPr lang="pt-BR"/>
+          </a:p>
+        </p:txBody>
+      </p:sp>
     </p:spTree>
     <p:extLst>
       <p:ext uri="{BB962C8B-B14F-4D97-AF65-F5344CB8AC3E}">
@@ -31884,8 +31043,8 @@
         </p:nvSpPr>
         <p:spPr>
           <a:xfrm>
-            <a:off x="801511" y="1485097"/>
-            <a:ext cx="7231199" cy="5372903"/>
+            <a:off x="801511" y="1604345"/>
+            <a:ext cx="7231199" cy="5253655"/>
           </a:xfrm>
         </p:spPr>
         <p:txBody>
@@ -31949,23 +31108,7 @@
           <a:p>
             <a:r>
               <a:rPr lang="pt-BR" sz="2400" dirty="0"/>
-              <a:t>O último caso (</a:t>
-            </a:r>
-            <a:r>
-              <a:rPr lang="pt-BR" dirty="0"/>
-              <a:t>default</a:t>
-            </a:r>
-            <a:r>
-              <a:rPr lang="pt-BR" sz="2400" dirty="0"/>
-              <a:t>) não precisa de </a:t>
-            </a:r>
-            <a:r>
-              <a:rPr lang="pt-BR" dirty="0"/>
-              <a:t>break</a:t>
-            </a:r>
-            <a:r>
-              <a:rPr lang="pt-BR" sz="2400" dirty="0"/>
-              <a:t>, por estar no fim.</a:t>
+              <a:t>O último caso (default) não precisa de break, por estar no fim.</a:t>
             </a:r>
           </a:p>
           <a:p>
@@ -32037,329 +31180,6 @@
         <p:cNvPr id="1" name="">
           <a:extLst>
             <a:ext uri="{FF2B5EF4-FFF2-40B4-BE49-F238E27FC236}">
-              <a16:creationId xmlns:a16="http://schemas.microsoft.com/office/drawing/2014/main" id="{A80B7AEB-EDE0-14B5-6D7C-1E53C895889E}"/>
-            </a:ext>
-          </a:extLst>
-        </p:cNvPr>
-        <p:cNvGrpSpPr/>
-        <p:nvPr/>
-      </p:nvGrpSpPr>
-      <p:grpSpPr>
-        <a:xfrm>
-          <a:off x="0" y="0"/>
-          <a:ext cx="0" cy="0"/>
-          <a:chOff x="0" y="0"/>
-          <a:chExt cx="0" cy="0"/>
-        </a:xfrm>
-      </p:grpSpPr>
-      <p:sp>
-        <p:nvSpPr>
-          <p:cNvPr id="5" name="Retângulo 4">
-            <a:extLst>
-              <a:ext uri="{FF2B5EF4-FFF2-40B4-BE49-F238E27FC236}">
-                <a16:creationId xmlns:a16="http://schemas.microsoft.com/office/drawing/2014/main" id="{EB785B21-6AE2-843E-7582-FCB1F8BFBC14}"/>
-              </a:ext>
-            </a:extLst>
-          </p:cNvPr>
-          <p:cNvSpPr/>
-          <p:nvPr/>
-        </p:nvSpPr>
-        <p:spPr>
-          <a:xfrm>
-            <a:off x="0" y="-2"/>
-            <a:ext cx="12192000" cy="1325563"/>
-          </a:xfrm>
-          <a:prstGeom prst="rect">
-            <a:avLst/>
-          </a:prstGeom>
-          <a:solidFill>
-            <a:srgbClr val="418AB3"/>
-          </a:solidFill>
-          <a:ln>
-            <a:solidFill>
-              <a:srgbClr val="418AB3"/>
-            </a:solidFill>
-          </a:ln>
-        </p:spPr>
-        <p:style>
-          <a:lnRef idx="2">
-            <a:schemeClr val="accent1">
-              <a:shade val="15000"/>
-            </a:schemeClr>
-          </a:lnRef>
-          <a:fillRef idx="1">
-            <a:schemeClr val="accent1"/>
-          </a:fillRef>
-          <a:effectRef idx="0">
-            <a:schemeClr val="accent1"/>
-          </a:effectRef>
-          <a:fontRef idx="minor">
-            <a:schemeClr val="lt1"/>
-          </a:fontRef>
-        </p:style>
-        <p:txBody>
-          <a:bodyPr rtlCol="0" anchor="ctr"/>
-          <a:lstStyle/>
-          <a:p>
-            <a:pPr algn="ctr"/>
-            <a:endParaRPr lang="pt-BR" dirty="0"/>
-          </a:p>
-        </p:txBody>
-      </p:sp>
-      <p:sp>
-        <p:nvSpPr>
-          <p:cNvPr id="2" name="Título 1">
-            <a:extLst>
-              <a:ext uri="{FF2B5EF4-FFF2-40B4-BE49-F238E27FC236}">
-                <a16:creationId xmlns:a16="http://schemas.microsoft.com/office/drawing/2014/main" id="{1380F59F-E4B7-1572-CCB8-190C32788A02}"/>
-              </a:ext>
-            </a:extLst>
-          </p:cNvPr>
-          <p:cNvSpPr>
-            <a:spLocks noGrp="1"/>
-          </p:cNvSpPr>
-          <p:nvPr>
-            <p:ph type="title"/>
-          </p:nvPr>
-        </p:nvSpPr>
-        <p:spPr>
-          <a:xfrm>
-            <a:off x="0" y="-1"/>
-            <a:ext cx="12192000" cy="1325563"/>
-          </a:xfrm>
-        </p:spPr>
-        <p:txBody>
-          <a:bodyPr/>
-          <a:lstStyle/>
-          <a:p>
-            <a:pPr algn="ctr"/>
-            <a:r>
-              <a:rPr lang="pt-BR" dirty="0">
-                <a:solidFill>
-                  <a:schemeClr val="bg1"/>
-                </a:solidFill>
-              </a:rPr>
-              <a:t>Comando SWITCH-CASE</a:t>
-            </a:r>
-          </a:p>
-        </p:txBody>
-      </p:sp>
-      <p:sp>
-        <p:nvSpPr>
-          <p:cNvPr id="12" name="AutoShape 6" descr="Lógica Proposicional x Lógica de Argumento ⋆ Colaborae">
-            <a:extLst>
-              <a:ext uri="{FF2B5EF4-FFF2-40B4-BE49-F238E27FC236}">
-                <a16:creationId xmlns:a16="http://schemas.microsoft.com/office/drawing/2014/main" id="{D39FCB66-3350-FACF-C41D-200D43204E7F}"/>
-              </a:ext>
-            </a:extLst>
-          </p:cNvPr>
-          <p:cNvSpPr>
-            <a:spLocks noChangeAspect="1" noChangeArrowheads="1"/>
-          </p:cNvSpPr>
-          <p:nvPr/>
-        </p:nvSpPr>
-        <p:spPr bwMode="auto">
-          <a:xfrm>
-            <a:off x="5943600" y="-1707776"/>
-            <a:ext cx="5289176" cy="5289176"/>
-          </a:xfrm>
-          <a:prstGeom prst="rect">
-            <a:avLst/>
-          </a:prstGeom>
-          <a:noFill/>
-          <a:extLst>
-            <a:ext uri="{909E8E84-426E-40DD-AFC4-6F175D3DCCD1}">
-              <a14:hiddenFill xmlns:a14="http://schemas.microsoft.com/office/drawing/2010/main">
-                <a:solidFill>
-                  <a:srgbClr val="FFFFFF"/>
-                </a:solidFill>
-              </a14:hiddenFill>
-            </a:ext>
-          </a:extLst>
-        </p:spPr>
-        <p:txBody>
-          <a:bodyPr vert="horz" wrap="square" lIns="91440" tIns="45720" rIns="91440" bIns="45720" numCol="1" anchor="t" anchorCtr="0" compatLnSpc="1">
-            <a:prstTxWarp prst="textNoShape">
-              <a:avLst/>
-            </a:prstTxWarp>
-          </a:bodyPr>
-          <a:lstStyle/>
-          <a:p>
-            <a:endParaRPr lang="pt-BR"/>
-          </a:p>
-        </p:txBody>
-      </p:sp>
-      <p:sp>
-        <p:nvSpPr>
-          <p:cNvPr id="6" name="Espaço Reservado para Conteúdo 5">
-            <a:extLst>
-              <a:ext uri="{FF2B5EF4-FFF2-40B4-BE49-F238E27FC236}">
-                <a16:creationId xmlns:a16="http://schemas.microsoft.com/office/drawing/2014/main" id="{8DF14A40-D756-3911-7BE4-A0FCDA8299A8}"/>
-              </a:ext>
-            </a:extLst>
-          </p:cNvPr>
-          <p:cNvSpPr>
-            <a:spLocks noGrp="1"/>
-          </p:cNvSpPr>
-          <p:nvPr>
-            <p:ph idx="1"/>
-          </p:nvPr>
-        </p:nvSpPr>
-        <p:spPr>
-          <a:xfrm>
-            <a:off x="801511" y="1485097"/>
-            <a:ext cx="7231199" cy="5372903"/>
-          </a:xfrm>
-        </p:spPr>
-        <p:txBody>
-          <a:bodyPr>
-            <a:normAutofit lnSpcReduction="10000"/>
-          </a:bodyPr>
-          <a:lstStyle/>
-          <a:p>
-            <a:r>
-              <a:rPr lang="pt-BR" sz="2400" dirty="0"/>
-              <a:t>Busca simplificar o encadeamento de código do </a:t>
-            </a:r>
-            <a:r>
-              <a:rPr lang="pt-BR" sz="2400" b="1" i="1" dirty="0" err="1"/>
-              <a:t>if-else</a:t>
-            </a:r>
-            <a:endParaRPr lang="pt-BR" sz="2400" b="1" i="1" dirty="0"/>
-          </a:p>
-          <a:p>
-            <a:endParaRPr lang="pt-BR" sz="2400" dirty="0"/>
-          </a:p>
-          <a:p>
-            <a:r>
-              <a:rPr lang="pt-BR" sz="2400" dirty="0"/>
-              <a:t>Testa o valor de uma variável e o compara com constantes inteiras ou caracteres em vários blocos</a:t>
-            </a:r>
-          </a:p>
-          <a:p>
-            <a:endParaRPr lang="pt-BR" sz="2400" dirty="0"/>
-          </a:p>
-          <a:p>
-            <a:r>
-              <a:rPr lang="pt-BR" sz="2400" dirty="0"/>
-              <a:t>Se nenhum dos casos for satisfeito, o bloco </a:t>
-            </a:r>
-            <a:r>
-              <a:rPr lang="pt-BR" sz="2400" b="1" i="1" dirty="0"/>
-              <a:t>default</a:t>
-            </a:r>
-            <a:r>
-              <a:rPr lang="pt-BR" sz="2400" dirty="0"/>
-              <a:t> é executado</a:t>
-            </a:r>
-          </a:p>
-          <a:p>
-            <a:endParaRPr lang="pt-BR" sz="2400" b="1" i="1" dirty="0"/>
-          </a:p>
-          <a:p>
-            <a:r>
-              <a:rPr lang="pt-BR" sz="2400" b="1" i="1" dirty="0"/>
-              <a:t>Break</a:t>
-            </a:r>
-            <a:r>
-              <a:rPr lang="pt-BR" sz="2400" dirty="0"/>
-              <a:t> sai imediatamente do switch, continuando a execução do código</a:t>
-            </a:r>
-          </a:p>
-          <a:p>
-            <a:endParaRPr lang="pt-BR" sz="2400" dirty="0"/>
-          </a:p>
-          <a:p>
-            <a:r>
-              <a:rPr lang="pt-BR" sz="2400" dirty="0"/>
-              <a:t>O último caso (</a:t>
-            </a:r>
-            <a:r>
-              <a:rPr lang="pt-BR" dirty="0"/>
-              <a:t>default</a:t>
-            </a:r>
-            <a:r>
-              <a:rPr lang="pt-BR" sz="2400" dirty="0"/>
-              <a:t>) não precisa de </a:t>
-            </a:r>
-            <a:r>
-              <a:rPr lang="pt-BR" dirty="0"/>
-              <a:t>break</a:t>
-            </a:r>
-            <a:r>
-              <a:rPr lang="pt-BR" sz="2400" dirty="0"/>
-              <a:t>, por estar no fim.</a:t>
-            </a:r>
-          </a:p>
-          <a:p>
-            <a:pPr lvl="1"/>
-            <a:endParaRPr lang="pt-BR" sz="2000" b="1" i="1" dirty="0"/>
-          </a:p>
-          <a:p>
-            <a:pPr lvl="1"/>
-            <a:endParaRPr lang="pt-BR" sz="2000" b="1" i="1" dirty="0"/>
-          </a:p>
-          <a:p>
-            <a:pPr lvl="1"/>
-            <a:endParaRPr lang="pt-BR" sz="1800" b="1" i="1" dirty="0"/>
-          </a:p>
-          <a:p>
-            <a:pPr lvl="1"/>
-            <a:endParaRPr lang="pt-BR" sz="1800" b="1" i="1" dirty="0"/>
-          </a:p>
-        </p:txBody>
-      </p:sp>
-      <p:pic>
-        <p:nvPicPr>
-          <p:cNvPr id="7" name="Imagem 6">
-            <a:extLst>
-              <a:ext uri="{FF2B5EF4-FFF2-40B4-BE49-F238E27FC236}">
-                <a16:creationId xmlns:a16="http://schemas.microsoft.com/office/drawing/2014/main" id="{E699A2BD-DF95-A007-4C6C-BCB201AF0FD3}"/>
-              </a:ext>
-            </a:extLst>
-          </p:cNvPr>
-          <p:cNvPicPr>
-            <a:picLocks noChangeAspect="1"/>
-          </p:cNvPicPr>
-          <p:nvPr/>
-        </p:nvPicPr>
-        <p:blipFill>
-          <a:blip r:embed="rId3"/>
-          <a:stretch>
-            <a:fillRect/>
-          </a:stretch>
-        </p:blipFill>
-        <p:spPr>
-          <a:xfrm>
-            <a:off x="8128000" y="1485097"/>
-            <a:ext cx="3949700" cy="5253655"/>
-          </a:xfrm>
-          <a:prstGeom prst="rect">
-            <a:avLst/>
-          </a:prstGeom>
-        </p:spPr>
-      </p:pic>
-    </p:spTree>
-    <p:extLst>
-      <p:ext uri="{BB962C8B-B14F-4D97-AF65-F5344CB8AC3E}">
-        <p14:creationId xmlns:p14="http://schemas.microsoft.com/office/powerpoint/2010/main" val="2210190723"/>
-      </p:ext>
-    </p:extLst>
-  </p:cSld>
-  <p:clrMapOvr>
-    <a:masterClrMapping/>
-  </p:clrMapOvr>
-</p:sld>
-</file>
-
-<file path=ppt/slides/slide47.xml><?xml version="1.0" encoding="utf-8"?>
-<p:sld xmlns:a="http://schemas.openxmlformats.org/drawingml/2006/main" xmlns:r="http://schemas.openxmlformats.org/officeDocument/2006/relationships" xmlns:p="http://schemas.openxmlformats.org/presentationml/2006/main">
-  <p:cSld>
-    <p:spTree>
-      <p:nvGrpSpPr>
-        <p:cNvPr id="1" name="">
-          <a:extLst>
-            <a:ext uri="{FF2B5EF4-FFF2-40B4-BE49-F238E27FC236}">
               <a16:creationId xmlns:a16="http://schemas.microsoft.com/office/drawing/2014/main" id="{27509A80-CA2B-7F6F-AA59-054735CDAE1A}"/>
             </a:ext>
           </a:extLst>
@@ -32510,7 +31330,7 @@
 </p:sld>
 </file>
 
-<file path=ppt/slides/slide48.xml><?xml version="1.0" encoding="utf-8"?>
+<file path=ppt/slides/slide47.xml><?xml version="1.0" encoding="utf-8"?>
 <p:sld xmlns:a="http://schemas.openxmlformats.org/drawingml/2006/main" xmlns:r="http://schemas.openxmlformats.org/officeDocument/2006/relationships" xmlns:p="http://schemas.openxmlformats.org/presentationml/2006/main">
   <p:cSld>
     <p:spTree>
@@ -32859,7 +31679,7 @@
 </p:sld>
 </file>
 
-<file path=ppt/slides/slide49.xml><?xml version="1.0" encoding="utf-8"?>
+<file path=ppt/slides/slide48.xml><?xml version="1.0" encoding="utf-8"?>
 <p:sld xmlns:a="http://schemas.openxmlformats.org/drawingml/2006/main" xmlns:r="http://schemas.openxmlformats.org/officeDocument/2006/relationships" xmlns:p="http://schemas.openxmlformats.org/presentationml/2006/main">
   <p:cSld>
     <p:spTree>
@@ -33144,7 +31964,7 @@
 </p:sld>
 </file>
 
-<file path=ppt/slides/slide5.xml><?xml version="1.0" encoding="utf-8"?>
+<file path=ppt/slides/slide49.xml><?xml version="1.0" encoding="utf-8"?>
 <p:sld xmlns:a="http://schemas.openxmlformats.org/drawingml/2006/main" xmlns:r="http://schemas.openxmlformats.org/officeDocument/2006/relationships" xmlns:p="http://schemas.openxmlformats.org/presentationml/2006/main">
   <p:cSld>
     <p:spTree>
@@ -33152,7 +31972,7 @@
         <p:cNvPr id="1" name="">
           <a:extLst>
             <a:ext uri="{FF2B5EF4-FFF2-40B4-BE49-F238E27FC236}">
-              <a16:creationId xmlns:a16="http://schemas.microsoft.com/office/drawing/2014/main" id="{699BD736-CEF0-B6C0-28BC-774DA5F6E1A8}"/>
+              <a16:creationId xmlns:a16="http://schemas.microsoft.com/office/drawing/2014/main" id="{AB9EDBBA-07AE-8BFE-2904-06A5F1293D39}"/>
             </a:ext>
           </a:extLst>
         </p:cNvPr>
@@ -33172,7 +31992,7 @@
           <p:cNvPr id="5" name="Retângulo 4">
             <a:extLst>
               <a:ext uri="{FF2B5EF4-FFF2-40B4-BE49-F238E27FC236}">
-                <a16:creationId xmlns:a16="http://schemas.microsoft.com/office/drawing/2014/main" id="{717F9DE4-EB99-5874-7C93-C50756B60B56}"/>
+                <a16:creationId xmlns:a16="http://schemas.microsoft.com/office/drawing/2014/main" id="{E293AA67-D501-B974-E7A4-44370381B42A}"/>
               </a:ext>
             </a:extLst>
           </p:cNvPr>
@@ -33226,7 +32046,7 @@
           <p:cNvPr id="2" name="Título 1">
             <a:extLst>
               <a:ext uri="{FF2B5EF4-FFF2-40B4-BE49-F238E27FC236}">
-                <a16:creationId xmlns:a16="http://schemas.microsoft.com/office/drawing/2014/main" id="{BECB663B-29B6-EF3E-539D-7287CF4F6231}"/>
+                <a16:creationId xmlns:a16="http://schemas.microsoft.com/office/drawing/2014/main" id="{3F0C48E0-F262-48BF-558F-3ED89BA7AE89}"/>
               </a:ext>
             </a:extLst>
           </p:cNvPr>
@@ -33254,7 +32074,7 @@
                   <a:schemeClr val="bg1"/>
                 </a:solidFill>
               </a:rPr>
-              <a:t>Linguagem de Máquina</a:t>
+              <a:t>Comando WHILE</a:t>
             </a:r>
           </a:p>
         </p:txBody>
@@ -33264,7 +32084,7 @@
           <p:cNvPr id="12" name="AutoShape 6" descr="Lógica Proposicional x Lógica de Argumento ⋆ Colaborae">
             <a:extLst>
               <a:ext uri="{FF2B5EF4-FFF2-40B4-BE49-F238E27FC236}">
-                <a16:creationId xmlns:a16="http://schemas.microsoft.com/office/drawing/2014/main" id="{3965B379-0BB9-05F4-129D-B28D07BD1ACC}"/>
+                <a16:creationId xmlns:a16="http://schemas.microsoft.com/office/drawing/2014/main" id="{1E6388B1-C1B6-CC28-0FA4-B95A7161F3E2}"/>
               </a:ext>
             </a:extLst>
           </p:cNvPr>
@@ -33309,7 +32129,7 @@
           <p:cNvPr id="6" name="Espaço Reservado para Conteúdo 5">
             <a:extLst>
               <a:ext uri="{FF2B5EF4-FFF2-40B4-BE49-F238E27FC236}">
-                <a16:creationId xmlns:a16="http://schemas.microsoft.com/office/drawing/2014/main" id="{B400FDEC-E1C9-8037-38E3-62ED4ADC7A3F}"/>
+                <a16:creationId xmlns:a16="http://schemas.microsoft.com/office/drawing/2014/main" id="{1372D191-1AF4-F81B-5994-393CCCC35E4E}"/>
               </a:ext>
             </a:extLst>
           </p:cNvPr>
@@ -33322,8 +32142,8 @@
         </p:nvSpPr>
         <p:spPr>
           <a:xfrm>
-            <a:off x="742377" y="1640958"/>
-            <a:ext cx="5527874" cy="4887691"/>
+            <a:off x="3693280" y="1623210"/>
+            <a:ext cx="4811335" cy="550861"/>
           </a:xfrm>
         </p:spPr>
         <p:txBody>
@@ -33334,191 +32154,57 @@
           <a:p>
             <a:r>
               <a:rPr lang="pt-BR" sz="2400" dirty="0"/>
-              <a:t>Forma básica de instrução compreendida pelo computador</a:t>
-            </a:r>
-            <a:endParaRPr lang="pt-BR" sz="2000" dirty="0"/>
-          </a:p>
-          <a:p>
-            <a:pPr marL="0" indent="0">
-              <a:buNone/>
-            </a:pPr>
-            <a:endParaRPr lang="pt-BR" sz="2000" dirty="0"/>
-          </a:p>
-          <a:p>
-            <a:r>
-              <a:rPr lang="pt-BR" sz="2400" dirty="0"/>
-              <a:t>Caracterizada por ser uma sequências de 0 e 1, ou de valores Hexadecimais </a:t>
-            </a:r>
-          </a:p>
-          <a:p>
-            <a:endParaRPr lang="pt-BR" sz="2400" dirty="0"/>
-          </a:p>
-          <a:p>
-            <a:r>
-              <a:rPr lang="pt-BR" sz="2400" dirty="0"/>
-              <a:t>Cada arquitetura compreende sua própria linguagem de máquina</a:t>
-            </a:r>
-          </a:p>
-          <a:p>
-            <a:endParaRPr lang="pt-BR" sz="2400" dirty="0"/>
-          </a:p>
-          <a:p>
-            <a:r>
-              <a:rPr lang="pt-BR" sz="2400" dirty="0"/>
-              <a:t>Opera de acordo com o projeto de Hardware do processador</a:t>
-            </a:r>
-            <a:endParaRPr lang="pt-BR" dirty="0"/>
-          </a:p>
-          <a:p>
-            <a:endParaRPr lang="pt-BR" sz="2400" dirty="0"/>
+              <a:t>Exemplo e sintaxe:</a:t>
+            </a:r>
+          </a:p>
+          <a:p>
+            <a:pPr lvl="1"/>
+            <a:endParaRPr lang="pt-BR" sz="2000" b="1" i="1" dirty="0"/>
+          </a:p>
+          <a:p>
+            <a:pPr lvl="1"/>
+            <a:endParaRPr lang="pt-BR" sz="1800" b="1" i="1" dirty="0"/>
+          </a:p>
+          <a:p>
+            <a:pPr lvl="1"/>
+            <a:endParaRPr lang="pt-BR" sz="1800" b="1" i="1" dirty="0"/>
           </a:p>
         </p:txBody>
       </p:sp>
       <p:pic>
         <p:nvPicPr>
-          <p:cNvPr id="4098" name="Picture 2" descr="Importância da linguem de Programação de Baixo Nível">
-            <a:extLst>
-              <a:ext uri="{FF2B5EF4-FFF2-40B4-BE49-F238E27FC236}">
-                <a16:creationId xmlns:a16="http://schemas.microsoft.com/office/drawing/2014/main" id="{36D343F2-A8DE-A76F-F763-075091475246}"/>
+          <p:cNvPr id="9" name="Imagem 8">
+            <a:extLst>
+              <a:ext uri="{FF2B5EF4-FFF2-40B4-BE49-F238E27FC236}">
+                <a16:creationId xmlns:a16="http://schemas.microsoft.com/office/drawing/2014/main" id="{26337D16-C5EE-224A-CEFC-AD63B69C4E12}"/>
               </a:ext>
             </a:extLst>
           </p:cNvPr>
           <p:cNvPicPr>
-            <a:picLocks noChangeAspect="1" noChangeArrowheads="1"/>
+            <a:picLocks noChangeAspect="1"/>
           </p:cNvPicPr>
           <p:nvPr/>
         </p:nvPicPr>
-        <p:blipFill rotWithShape="1">
-          <a:blip r:embed="rId3">
-            <a:extLst>
-              <a:ext uri="{28A0092B-C50C-407E-A947-70E740481C1C}">
-                <a14:useLocalDpi xmlns:a14="http://schemas.microsoft.com/office/drawing/2010/main" val="0"/>
-              </a:ext>
-            </a:extLst>
-          </a:blip>
-          <a:srcRect l="40928" r="1050" b="68373"/>
+        <p:blipFill>
+          <a:blip r:embed="rId3"/>
           <a:stretch>
             <a:fillRect/>
           </a:stretch>
         </p:blipFill>
-        <p:spPr bwMode="auto">
+        <p:spPr>
           <a:xfrm>
-            <a:off x="7909790" y="1814843"/>
-            <a:ext cx="3067291" cy="1277273"/>
+            <a:off x="3703224" y="2174071"/>
+            <a:ext cx="4817231" cy="4700802"/>
           </a:xfrm>
           <a:prstGeom prst="rect">
             <a:avLst/>
           </a:prstGeom>
-          <a:noFill/>
-          <a:extLst>
-            <a:ext uri="{909E8E84-426E-40DD-AFC4-6F175D3DCCD1}">
-              <a14:hiddenFill xmlns:a14="http://schemas.microsoft.com/office/drawing/2010/main">
-                <a:solidFill>
-                  <a:srgbClr val="FFFFFF"/>
-                </a:solidFill>
-              </a14:hiddenFill>
-            </a:ext>
-          </a:extLst>
         </p:spPr>
       </p:pic>
-      <p:pic>
-        <p:nvPicPr>
-          <p:cNvPr id="4100" name="Picture 4" descr="Organization of Computer Systems: ISA, Machine Language, Number Systems">
-            <a:extLst>
-              <a:ext uri="{FF2B5EF4-FFF2-40B4-BE49-F238E27FC236}">
-                <a16:creationId xmlns:a16="http://schemas.microsoft.com/office/drawing/2014/main" id="{103232D8-49E8-B066-4C6A-8F3AF74E3720}"/>
-              </a:ext>
-            </a:extLst>
-          </p:cNvPr>
-          <p:cNvPicPr>
-            <a:picLocks noChangeAspect="1" noChangeArrowheads="1"/>
-          </p:cNvPicPr>
-          <p:nvPr/>
-        </p:nvPicPr>
-        <p:blipFill>
-          <a:blip r:embed="rId4">
-            <a:extLst>
-              <a:ext uri="{28A0092B-C50C-407E-A947-70E740481C1C}">
-                <a14:useLocalDpi xmlns:a14="http://schemas.microsoft.com/office/drawing/2010/main" val="0"/>
-              </a:ext>
-            </a:extLst>
-          </a:blip>
-          <a:srcRect/>
-          <a:stretch>
-            <a:fillRect/>
-          </a:stretch>
-        </p:blipFill>
-        <p:spPr bwMode="auto">
-          <a:xfrm>
-            <a:off x="6749863" y="3339436"/>
-            <a:ext cx="4962525" cy="3028950"/>
-          </a:xfrm>
-          <a:prstGeom prst="rect">
-            <a:avLst/>
-          </a:prstGeom>
-          <a:noFill/>
-          <a:extLst>
-            <a:ext uri="{909E8E84-426E-40DD-AFC4-6F175D3DCCD1}">
-              <a14:hiddenFill xmlns:a14="http://schemas.microsoft.com/office/drawing/2010/main">
-                <a:solidFill>
-                  <a:srgbClr val="FFFFFF"/>
-                </a:solidFill>
-              </a14:hiddenFill>
-            </a:ext>
-          </a:extLst>
-        </p:spPr>
-      </p:pic>
-      <p:sp>
-        <p:nvSpPr>
-          <p:cNvPr id="4" name="CaixaDeTexto 3">
-            <a:extLst>
-              <a:ext uri="{FF2B5EF4-FFF2-40B4-BE49-F238E27FC236}">
-                <a16:creationId xmlns:a16="http://schemas.microsoft.com/office/drawing/2014/main" id="{3B9E8019-D6C5-3D11-235D-94FE651B5926}"/>
-              </a:ext>
-            </a:extLst>
-          </p:cNvPr>
-          <p:cNvSpPr txBox="1"/>
-          <p:nvPr/>
-        </p:nvSpPr>
-        <p:spPr>
-          <a:xfrm>
-            <a:off x="7498054" y="6343983"/>
-            <a:ext cx="3466142" cy="369332"/>
-          </a:xfrm>
-          <a:prstGeom prst="rect">
-            <a:avLst/>
-          </a:prstGeom>
-          <a:noFill/>
-        </p:spPr>
-        <p:txBody>
-          <a:bodyPr wrap="none" rtlCol="0">
-            <a:spAutoFit/>
-          </a:bodyPr>
-          <a:lstStyle/>
-          <a:p>
-            <a:r>
-              <a:rPr lang="pt-BR" dirty="0" err="1"/>
-              <a:t>Instruction</a:t>
-            </a:r>
-            <a:r>
-              <a:rPr lang="pt-BR" dirty="0"/>
-              <a:t> Set </a:t>
-            </a:r>
-            <a:r>
-              <a:rPr lang="pt-BR" dirty="0" err="1"/>
-              <a:t>Architecture</a:t>
-            </a:r>
-            <a:r>
-              <a:rPr lang="pt-BR" dirty="0"/>
-              <a:t> – MIPS</a:t>
-            </a:r>
-          </a:p>
-        </p:txBody>
-      </p:sp>
     </p:spTree>
     <p:extLst>
       <p:ext uri="{BB962C8B-B14F-4D97-AF65-F5344CB8AC3E}">
-        <p14:creationId xmlns:p14="http://schemas.microsoft.com/office/powerpoint/2010/main" val="4102101521"/>
+        <p14:creationId xmlns:p14="http://schemas.microsoft.com/office/powerpoint/2010/main" val="3799537098"/>
       </p:ext>
     </p:extLst>
   </p:cSld>
@@ -33528,7 +32214,7 @@
 </p:sld>
 </file>
 
-<file path=ppt/slides/slide50.xml><?xml version="1.0" encoding="utf-8"?>
+<file path=ppt/slides/slide5.xml><?xml version="1.0" encoding="utf-8"?>
 <p:sld xmlns:a="http://schemas.openxmlformats.org/drawingml/2006/main" xmlns:r="http://schemas.openxmlformats.org/officeDocument/2006/relationships" xmlns:p="http://schemas.openxmlformats.org/presentationml/2006/main">
   <p:cSld>
     <p:spTree>
@@ -33536,7 +32222,7 @@
         <p:cNvPr id="1" name="">
           <a:extLst>
             <a:ext uri="{FF2B5EF4-FFF2-40B4-BE49-F238E27FC236}">
-              <a16:creationId xmlns:a16="http://schemas.microsoft.com/office/drawing/2014/main" id="{AB9EDBBA-07AE-8BFE-2904-06A5F1293D39}"/>
+              <a16:creationId xmlns:a16="http://schemas.microsoft.com/office/drawing/2014/main" id="{699BD736-CEF0-B6C0-28BC-774DA5F6E1A8}"/>
             </a:ext>
           </a:extLst>
         </p:cNvPr>
@@ -33556,7 +32242,7 @@
           <p:cNvPr id="5" name="Retângulo 4">
             <a:extLst>
               <a:ext uri="{FF2B5EF4-FFF2-40B4-BE49-F238E27FC236}">
-                <a16:creationId xmlns:a16="http://schemas.microsoft.com/office/drawing/2014/main" id="{E293AA67-D501-B974-E7A4-44370381B42A}"/>
+                <a16:creationId xmlns:a16="http://schemas.microsoft.com/office/drawing/2014/main" id="{717F9DE4-EB99-5874-7C93-C50756B60B56}"/>
               </a:ext>
             </a:extLst>
           </p:cNvPr>
@@ -33610,7 +32296,7 @@
           <p:cNvPr id="2" name="Título 1">
             <a:extLst>
               <a:ext uri="{FF2B5EF4-FFF2-40B4-BE49-F238E27FC236}">
-                <a16:creationId xmlns:a16="http://schemas.microsoft.com/office/drawing/2014/main" id="{3F0C48E0-F262-48BF-558F-3ED89BA7AE89}"/>
+                <a16:creationId xmlns:a16="http://schemas.microsoft.com/office/drawing/2014/main" id="{BECB663B-29B6-EF3E-539D-7287CF4F6231}"/>
               </a:ext>
             </a:extLst>
           </p:cNvPr>
@@ -33638,7 +32324,7 @@
                   <a:schemeClr val="bg1"/>
                 </a:solidFill>
               </a:rPr>
-              <a:t>Comando WHILE</a:t>
+              <a:t>Linguagem de Máquina</a:t>
             </a:r>
           </a:p>
         </p:txBody>
@@ -33648,7 +32334,7 @@
           <p:cNvPr id="12" name="AutoShape 6" descr="Lógica Proposicional x Lógica de Argumento ⋆ Colaborae">
             <a:extLst>
               <a:ext uri="{FF2B5EF4-FFF2-40B4-BE49-F238E27FC236}">
-                <a16:creationId xmlns:a16="http://schemas.microsoft.com/office/drawing/2014/main" id="{1E6388B1-C1B6-CC28-0FA4-B95A7161F3E2}"/>
+                <a16:creationId xmlns:a16="http://schemas.microsoft.com/office/drawing/2014/main" id="{3965B379-0BB9-05F4-129D-B28D07BD1ACC}"/>
               </a:ext>
             </a:extLst>
           </p:cNvPr>
@@ -33693,7 +32379,7 @@
           <p:cNvPr id="6" name="Espaço Reservado para Conteúdo 5">
             <a:extLst>
               <a:ext uri="{FF2B5EF4-FFF2-40B4-BE49-F238E27FC236}">
-                <a16:creationId xmlns:a16="http://schemas.microsoft.com/office/drawing/2014/main" id="{1372D191-1AF4-F81B-5994-393CCCC35E4E}"/>
+                <a16:creationId xmlns:a16="http://schemas.microsoft.com/office/drawing/2014/main" id="{B400FDEC-E1C9-8037-38E3-62ED4ADC7A3F}"/>
               </a:ext>
             </a:extLst>
           </p:cNvPr>
@@ -33706,8 +32392,8 @@
         </p:nvSpPr>
         <p:spPr>
           <a:xfrm>
-            <a:off x="3693280" y="1623210"/>
-            <a:ext cx="4811335" cy="550861"/>
+            <a:off x="742377" y="1640958"/>
+            <a:ext cx="5527874" cy="4887691"/>
           </a:xfrm>
         </p:spPr>
         <p:txBody>
@@ -33718,57 +32404,191 @@
           <a:p>
             <a:r>
               <a:rPr lang="pt-BR" sz="2400" dirty="0"/>
-              <a:t>Exemplo e sintaxe:</a:t>
-            </a:r>
-          </a:p>
-          <a:p>
-            <a:pPr lvl="1"/>
-            <a:endParaRPr lang="pt-BR" sz="2000" b="1" i="1" dirty="0"/>
-          </a:p>
-          <a:p>
-            <a:pPr lvl="1"/>
-            <a:endParaRPr lang="pt-BR" sz="1800" b="1" i="1" dirty="0"/>
-          </a:p>
-          <a:p>
-            <a:pPr lvl="1"/>
-            <a:endParaRPr lang="pt-BR" sz="1800" b="1" i="1" dirty="0"/>
+              <a:t>Forma básica de instrução compreendida pelo computador</a:t>
+            </a:r>
+            <a:endParaRPr lang="pt-BR" sz="2000" dirty="0"/>
+          </a:p>
+          <a:p>
+            <a:pPr marL="0" indent="0">
+              <a:buNone/>
+            </a:pPr>
+            <a:endParaRPr lang="pt-BR" sz="2000" dirty="0"/>
+          </a:p>
+          <a:p>
+            <a:r>
+              <a:rPr lang="pt-BR" sz="2400" dirty="0"/>
+              <a:t>Caracterizada por ser uma sequências de 0 e 1, ou de valores Hexadecimais </a:t>
+            </a:r>
+          </a:p>
+          <a:p>
+            <a:endParaRPr lang="pt-BR" sz="2400" dirty="0"/>
+          </a:p>
+          <a:p>
+            <a:r>
+              <a:rPr lang="pt-BR" sz="2400" dirty="0"/>
+              <a:t>Cada arquitetura compreende sua própria linguagem de máquina</a:t>
+            </a:r>
+          </a:p>
+          <a:p>
+            <a:endParaRPr lang="pt-BR" sz="2400" dirty="0"/>
+          </a:p>
+          <a:p>
+            <a:r>
+              <a:rPr lang="pt-BR" sz="2400" dirty="0"/>
+              <a:t>Opera de acordo com o projeto de Hardware do processador</a:t>
+            </a:r>
+            <a:endParaRPr lang="pt-BR" dirty="0"/>
+          </a:p>
+          <a:p>
+            <a:endParaRPr lang="pt-BR" sz="2400" dirty="0"/>
           </a:p>
         </p:txBody>
       </p:sp>
       <p:pic>
         <p:nvPicPr>
-          <p:cNvPr id="9" name="Imagem 8">
-            <a:extLst>
-              <a:ext uri="{FF2B5EF4-FFF2-40B4-BE49-F238E27FC236}">
-                <a16:creationId xmlns:a16="http://schemas.microsoft.com/office/drawing/2014/main" id="{26337D16-C5EE-224A-CEFC-AD63B69C4E12}"/>
+          <p:cNvPr id="4098" name="Picture 2" descr="Importância da linguem de Programação de Baixo Nível">
+            <a:extLst>
+              <a:ext uri="{FF2B5EF4-FFF2-40B4-BE49-F238E27FC236}">
+                <a16:creationId xmlns:a16="http://schemas.microsoft.com/office/drawing/2014/main" id="{36D343F2-A8DE-A76F-F763-075091475246}"/>
               </a:ext>
             </a:extLst>
           </p:cNvPr>
           <p:cNvPicPr>
-            <a:picLocks noChangeAspect="1"/>
+            <a:picLocks noChangeAspect="1" noChangeArrowheads="1"/>
+          </p:cNvPicPr>
+          <p:nvPr/>
+        </p:nvPicPr>
+        <p:blipFill rotWithShape="1">
+          <a:blip r:embed="rId3">
+            <a:extLst>
+              <a:ext uri="{28A0092B-C50C-407E-A947-70E740481C1C}">
+                <a14:useLocalDpi xmlns:a14="http://schemas.microsoft.com/office/drawing/2010/main" val="0"/>
+              </a:ext>
+            </a:extLst>
+          </a:blip>
+          <a:srcRect l="40928" r="1050" b="68373"/>
+          <a:stretch>
+            <a:fillRect/>
+          </a:stretch>
+        </p:blipFill>
+        <p:spPr bwMode="auto">
+          <a:xfrm>
+            <a:off x="7909790" y="1814843"/>
+            <a:ext cx="3067291" cy="1277273"/>
+          </a:xfrm>
+          <a:prstGeom prst="rect">
+            <a:avLst/>
+          </a:prstGeom>
+          <a:noFill/>
+          <a:extLst>
+            <a:ext uri="{909E8E84-426E-40DD-AFC4-6F175D3DCCD1}">
+              <a14:hiddenFill xmlns:a14="http://schemas.microsoft.com/office/drawing/2010/main">
+                <a:solidFill>
+                  <a:srgbClr val="FFFFFF"/>
+                </a:solidFill>
+              </a14:hiddenFill>
+            </a:ext>
+          </a:extLst>
+        </p:spPr>
+      </p:pic>
+      <p:pic>
+        <p:nvPicPr>
+          <p:cNvPr id="4100" name="Picture 4" descr="Organization of Computer Systems: ISA, Machine Language, Number Systems">
+            <a:extLst>
+              <a:ext uri="{FF2B5EF4-FFF2-40B4-BE49-F238E27FC236}">
+                <a16:creationId xmlns:a16="http://schemas.microsoft.com/office/drawing/2014/main" id="{103232D8-49E8-B066-4C6A-8F3AF74E3720}"/>
+              </a:ext>
+            </a:extLst>
+          </p:cNvPr>
+          <p:cNvPicPr>
+            <a:picLocks noChangeAspect="1" noChangeArrowheads="1"/>
           </p:cNvPicPr>
           <p:nvPr/>
         </p:nvPicPr>
         <p:blipFill>
-          <a:blip r:embed="rId3"/>
+          <a:blip r:embed="rId4">
+            <a:extLst>
+              <a:ext uri="{28A0092B-C50C-407E-A947-70E740481C1C}">
+                <a14:useLocalDpi xmlns:a14="http://schemas.microsoft.com/office/drawing/2010/main" val="0"/>
+              </a:ext>
+            </a:extLst>
+          </a:blip>
+          <a:srcRect/>
           <a:stretch>
             <a:fillRect/>
           </a:stretch>
         </p:blipFill>
-        <p:spPr>
+        <p:spPr bwMode="auto">
           <a:xfrm>
-            <a:off x="3687384" y="2174072"/>
-            <a:ext cx="4817231" cy="4700802"/>
+            <a:off x="6749863" y="3339436"/>
+            <a:ext cx="4962525" cy="3028950"/>
           </a:xfrm>
           <a:prstGeom prst="rect">
             <a:avLst/>
           </a:prstGeom>
+          <a:noFill/>
+          <a:extLst>
+            <a:ext uri="{909E8E84-426E-40DD-AFC4-6F175D3DCCD1}">
+              <a14:hiddenFill xmlns:a14="http://schemas.microsoft.com/office/drawing/2010/main">
+                <a:solidFill>
+                  <a:srgbClr val="FFFFFF"/>
+                </a:solidFill>
+              </a14:hiddenFill>
+            </a:ext>
+          </a:extLst>
         </p:spPr>
       </p:pic>
+      <p:sp>
+        <p:nvSpPr>
+          <p:cNvPr id="4" name="CaixaDeTexto 3">
+            <a:extLst>
+              <a:ext uri="{FF2B5EF4-FFF2-40B4-BE49-F238E27FC236}">
+                <a16:creationId xmlns:a16="http://schemas.microsoft.com/office/drawing/2014/main" id="{3B9E8019-D6C5-3D11-235D-94FE651B5926}"/>
+              </a:ext>
+            </a:extLst>
+          </p:cNvPr>
+          <p:cNvSpPr txBox="1"/>
+          <p:nvPr/>
+        </p:nvSpPr>
+        <p:spPr>
+          <a:xfrm>
+            <a:off x="7498054" y="6343983"/>
+            <a:ext cx="3466142" cy="369332"/>
+          </a:xfrm>
+          <a:prstGeom prst="rect">
+            <a:avLst/>
+          </a:prstGeom>
+          <a:noFill/>
+        </p:spPr>
+        <p:txBody>
+          <a:bodyPr wrap="none" rtlCol="0">
+            <a:spAutoFit/>
+          </a:bodyPr>
+          <a:lstStyle/>
+          <a:p>
+            <a:r>
+              <a:rPr lang="pt-BR" dirty="0" err="1"/>
+              <a:t>Instruction</a:t>
+            </a:r>
+            <a:r>
+              <a:rPr lang="pt-BR" dirty="0"/>
+              <a:t> Set </a:t>
+            </a:r>
+            <a:r>
+              <a:rPr lang="pt-BR" dirty="0" err="1"/>
+              <a:t>Architecture</a:t>
+            </a:r>
+            <a:r>
+              <a:rPr lang="pt-BR" dirty="0"/>
+              <a:t> – MIPS</a:t>
+            </a:r>
+          </a:p>
+        </p:txBody>
+      </p:sp>
     </p:spTree>
     <p:extLst>
       <p:ext uri="{BB962C8B-B14F-4D97-AF65-F5344CB8AC3E}">
-        <p14:creationId xmlns:p14="http://schemas.microsoft.com/office/powerpoint/2010/main" val="3799537098"/>
+        <p14:creationId xmlns:p14="http://schemas.microsoft.com/office/powerpoint/2010/main" val="4102101521"/>
       </p:ext>
     </p:extLst>
   </p:cSld>
@@ -33778,7 +32598,7 @@
 </p:sld>
 </file>
 
-<file path=ppt/slides/slide51.xml><?xml version="1.0" encoding="utf-8"?>
+<file path=ppt/slides/slide50.xml><?xml version="1.0" encoding="utf-8"?>
 <p:sld xmlns:a="http://schemas.openxmlformats.org/drawingml/2006/main" xmlns:r="http://schemas.openxmlformats.org/officeDocument/2006/relationships" xmlns:p="http://schemas.openxmlformats.org/presentationml/2006/main">
   <p:cSld>
     <p:spTree>
@@ -34073,7 +32893,7 @@
 </p:sld>
 </file>
 
-<file path=ppt/slides/slide52.xml><?xml version="1.0" encoding="utf-8"?>
+<file path=ppt/slides/slide51.xml><?xml version="1.0" encoding="utf-8"?>
 <p:sld xmlns:a="http://schemas.openxmlformats.org/drawingml/2006/main" xmlns:r="http://schemas.openxmlformats.org/officeDocument/2006/relationships" xmlns:p="http://schemas.openxmlformats.org/presentationml/2006/main">
   <p:cSld>
     <p:spTree>
@@ -34323,7 +33143,7 @@
 </p:sld>
 </file>
 
-<file path=ppt/slides/slide53.xml><?xml version="1.0" encoding="utf-8"?>
+<file path=ppt/slides/slide52.xml><?xml version="1.0" encoding="utf-8"?>
 <p:sld xmlns:a="http://schemas.openxmlformats.org/drawingml/2006/main" xmlns:r="http://schemas.openxmlformats.org/officeDocument/2006/relationships" xmlns:p="http://schemas.openxmlformats.org/presentationml/2006/main">
   <p:cSld>
     <p:spTree>
@@ -34654,7 +33474,7 @@
 </p:sld>
 </file>
 
-<file path=ppt/slides/slide54.xml><?xml version="1.0" encoding="utf-8"?>
+<file path=ppt/slides/slide53.xml><?xml version="1.0" encoding="utf-8"?>
 <p:sld xmlns:a="http://schemas.openxmlformats.org/drawingml/2006/main" xmlns:r="http://schemas.openxmlformats.org/officeDocument/2006/relationships" xmlns:p="http://schemas.openxmlformats.org/presentationml/2006/main">
   <p:cSld>
     <p:spTree>
@@ -34883,7 +33703,7 @@
         </p:blipFill>
         <p:spPr>
           <a:xfrm>
-            <a:off x="3451412" y="3122767"/>
+            <a:off x="3451412" y="3160867"/>
             <a:ext cx="5289176" cy="3697133"/>
           </a:xfrm>
           <a:prstGeom prst="rect">

--- a/UNIUBE-LP/Teoria_LP.pptx
+++ b/UNIUBE-LP/Teoria_LP.pptx
@@ -250,7 +250,7 @@
           <a:p>
             <a:fld id="{6ED03497-8374-466E-85FA-95E1138D8F6E}" type="datetimeFigureOut">
               <a:rPr lang="pt-BR" smtClean="0"/>
-              <a:t>13/08/2026</a:t>
+              <a:t>17/08/2026</a:t>
             </a:fld>
             <a:endParaRPr lang="pt-BR"/>
           </a:p>
@@ -11129,7 +11129,7 @@
           <a:p>
             <a:fld id="{A87E3B6E-8316-4A1C-BADA-DB7F3456EEF1}" type="datetimeFigureOut">
               <a:rPr lang="pt-BR" smtClean="0"/>
-              <a:t>13/08/2026</a:t>
+              <a:t>17/08/2026</a:t>
             </a:fld>
             <a:endParaRPr lang="pt-BR"/>
           </a:p>
@@ -11327,7 +11327,7 @@
           <a:p>
             <a:fld id="{A87E3B6E-8316-4A1C-BADA-DB7F3456EEF1}" type="datetimeFigureOut">
               <a:rPr lang="pt-BR" smtClean="0"/>
-              <a:t>13/08/2026</a:t>
+              <a:t>17/08/2026</a:t>
             </a:fld>
             <a:endParaRPr lang="pt-BR"/>
           </a:p>
@@ -11535,7 +11535,7 @@
           <a:p>
             <a:fld id="{A87E3B6E-8316-4A1C-BADA-DB7F3456EEF1}" type="datetimeFigureOut">
               <a:rPr lang="pt-BR" smtClean="0"/>
-              <a:t>13/08/2026</a:t>
+              <a:t>17/08/2026</a:t>
             </a:fld>
             <a:endParaRPr lang="pt-BR"/>
           </a:p>
@@ -11771,7 +11771,7 @@
           <a:p>
             <a:fld id="{A87E3B6E-8316-4A1C-BADA-DB7F3456EEF1}" type="datetimeFigureOut">
               <a:rPr lang="pt-BR" smtClean="0"/>
-              <a:t>13/08/2026</a:t>
+              <a:t>17/08/2026</a:t>
             </a:fld>
             <a:endParaRPr lang="pt-BR"/>
           </a:p>
@@ -11941,7 +11941,7 @@
           <a:p>
             <a:fld id="{A87E3B6E-8316-4A1C-BADA-DB7F3456EEF1}" type="datetimeFigureOut">
               <a:rPr lang="pt-BR" smtClean="0"/>
-              <a:t>13/08/2026</a:t>
+              <a:t>17/08/2026</a:t>
             </a:fld>
             <a:endParaRPr lang="pt-BR"/>
           </a:p>
@@ -12209,7 +12209,7 @@
           <a:p>
             <a:fld id="{A87E3B6E-8316-4A1C-BADA-DB7F3456EEF1}" type="datetimeFigureOut">
               <a:rPr lang="pt-BR" smtClean="0"/>
-              <a:t>13/08/2026</a:t>
+              <a:t>17/08/2026</a:t>
             </a:fld>
             <a:endParaRPr lang="pt-BR"/>
           </a:p>
@@ -12441,7 +12441,7 @@
           <a:p>
             <a:fld id="{A87E3B6E-8316-4A1C-BADA-DB7F3456EEF1}" type="datetimeFigureOut">
               <a:rPr lang="pt-BR" smtClean="0"/>
-              <a:t>13/08/2026</a:t>
+              <a:t>17/08/2026</a:t>
             </a:fld>
             <a:endParaRPr lang="pt-BR"/>
           </a:p>
@@ -12796,7 +12796,7 @@
           <a:p>
             <a:fld id="{A87E3B6E-8316-4A1C-BADA-DB7F3456EEF1}" type="datetimeFigureOut">
               <a:rPr lang="pt-BR" smtClean="0"/>
-              <a:t>13/08/2026</a:t>
+              <a:t>17/08/2026</a:t>
             </a:fld>
             <a:endParaRPr lang="pt-BR"/>
           </a:p>
@@ -12937,7 +12937,7 @@
           <a:p>
             <a:fld id="{A87E3B6E-8316-4A1C-BADA-DB7F3456EEF1}" type="datetimeFigureOut">
               <a:rPr lang="pt-BR" smtClean="0"/>
-              <a:t>13/08/2026</a:t>
+              <a:t>17/08/2026</a:t>
             </a:fld>
             <a:endParaRPr lang="pt-BR"/>
           </a:p>
@@ -13032,7 +13032,7 @@
           <a:p>
             <a:fld id="{A87E3B6E-8316-4A1C-BADA-DB7F3456EEF1}" type="datetimeFigureOut">
               <a:rPr lang="pt-BR" smtClean="0"/>
-              <a:t>13/08/2026</a:t>
+              <a:t>17/08/2026</a:t>
             </a:fld>
             <a:endParaRPr lang="pt-BR"/>
           </a:p>
@@ -13389,7 +13389,7 @@
           <a:p>
             <a:fld id="{A87E3B6E-8316-4A1C-BADA-DB7F3456EEF1}" type="datetimeFigureOut">
               <a:rPr lang="pt-BR" smtClean="0"/>
-              <a:t>13/08/2026</a:t>
+              <a:t>17/08/2026</a:t>
             </a:fld>
             <a:endParaRPr lang="pt-BR"/>
           </a:p>
@@ -13590,7 +13590,7 @@
           <a:p>
             <a:fld id="{A87E3B6E-8316-4A1C-BADA-DB7F3456EEF1}" type="datetimeFigureOut">
               <a:rPr lang="pt-BR" smtClean="0"/>
-              <a:t>13/08/2026</a:t>
+              <a:t>17/08/2026</a:t>
             </a:fld>
             <a:endParaRPr lang="pt-BR"/>
           </a:p>
@@ -13943,7 +13943,7 @@
           <a:p>
             <a:fld id="{A87E3B6E-8316-4A1C-BADA-DB7F3456EEF1}" type="datetimeFigureOut">
               <a:rPr lang="pt-BR" smtClean="0"/>
-              <a:t>13/08/2026</a:t>
+              <a:t>17/08/2026</a:t>
             </a:fld>
             <a:endParaRPr lang="pt-BR"/>
           </a:p>
@@ -14128,7 +14128,7 @@
           <a:p>
             <a:fld id="{A87E3B6E-8316-4A1C-BADA-DB7F3456EEF1}" type="datetimeFigureOut">
               <a:rPr lang="pt-BR" smtClean="0"/>
-              <a:t>13/08/2026</a:t>
+              <a:t>17/08/2026</a:t>
             </a:fld>
             <a:endParaRPr lang="pt-BR"/>
           </a:p>
@@ -14308,7 +14308,7 @@
           <a:p>
             <a:fld id="{A87E3B6E-8316-4A1C-BADA-DB7F3456EEF1}" type="datetimeFigureOut">
               <a:rPr lang="pt-BR" smtClean="0"/>
-              <a:t>13/08/2026</a:t>
+              <a:t>17/08/2026</a:t>
             </a:fld>
             <a:endParaRPr lang="pt-BR"/>
           </a:p>
@@ -14571,7 +14571,7 @@
           <a:p>
             <a:fld id="{A87E3B6E-8316-4A1C-BADA-DB7F3456EEF1}" type="datetimeFigureOut">
               <a:rPr lang="pt-BR" smtClean="0"/>
-              <a:t>13/08/2026</a:t>
+              <a:t>17/08/2026</a:t>
             </a:fld>
             <a:endParaRPr lang="pt-BR"/>
           </a:p>
@@ -14836,7 +14836,7 @@
           <a:p>
             <a:fld id="{A87E3B6E-8316-4A1C-BADA-DB7F3456EEF1}" type="datetimeFigureOut">
               <a:rPr lang="pt-BR" smtClean="0"/>
-              <a:t>13/08/2026</a:t>
+              <a:t>17/08/2026</a:t>
             </a:fld>
             <a:endParaRPr lang="pt-BR"/>
           </a:p>
@@ -15248,7 +15248,7 @@
           <a:p>
             <a:fld id="{A87E3B6E-8316-4A1C-BADA-DB7F3456EEF1}" type="datetimeFigureOut">
               <a:rPr lang="pt-BR" smtClean="0"/>
-              <a:t>13/08/2026</a:t>
+              <a:t>17/08/2026</a:t>
             </a:fld>
             <a:endParaRPr lang="pt-BR"/>
           </a:p>
@@ -15389,7 +15389,7 @@
           <a:p>
             <a:fld id="{A87E3B6E-8316-4A1C-BADA-DB7F3456EEF1}" type="datetimeFigureOut">
               <a:rPr lang="pt-BR" smtClean="0"/>
-              <a:t>13/08/2026</a:t>
+              <a:t>17/08/2026</a:t>
             </a:fld>
             <a:endParaRPr lang="pt-BR"/>
           </a:p>
@@ -15502,7 +15502,7 @@
           <a:p>
             <a:fld id="{A87E3B6E-8316-4A1C-BADA-DB7F3456EEF1}" type="datetimeFigureOut">
               <a:rPr lang="pt-BR" smtClean="0"/>
-              <a:t>13/08/2026</a:t>
+              <a:t>17/08/2026</a:t>
             </a:fld>
             <a:endParaRPr lang="pt-BR"/>
           </a:p>
@@ -15813,7 +15813,7 @@
           <a:p>
             <a:fld id="{A87E3B6E-8316-4A1C-BADA-DB7F3456EEF1}" type="datetimeFigureOut">
               <a:rPr lang="pt-BR" smtClean="0"/>
-              <a:t>13/08/2026</a:t>
+              <a:t>17/08/2026</a:t>
             </a:fld>
             <a:endParaRPr lang="pt-BR"/>
           </a:p>
@@ -16101,7 +16101,7 @@
           <a:p>
             <a:fld id="{A87E3B6E-8316-4A1C-BADA-DB7F3456EEF1}" type="datetimeFigureOut">
               <a:rPr lang="pt-BR" smtClean="0"/>
-              <a:t>13/08/2026</a:t>
+              <a:t>17/08/2026</a:t>
             </a:fld>
             <a:endParaRPr lang="pt-BR"/>
           </a:p>
@@ -16342,7 +16342,7 @@
           <a:p>
             <a:fld id="{A87E3B6E-8316-4A1C-BADA-DB7F3456EEF1}" type="datetimeFigureOut">
               <a:rPr lang="pt-BR" smtClean="0"/>
-              <a:t>13/08/2026</a:t>
+              <a:t>17/08/2026</a:t>
             </a:fld>
             <a:endParaRPr lang="pt-BR"/>
           </a:p>
@@ -16906,7 +16906,7 @@
           <a:p>
             <a:fld id="{A87E3B6E-8316-4A1C-BADA-DB7F3456EEF1}" type="datetimeFigureOut">
               <a:rPr lang="pt-BR" smtClean="0"/>
-              <a:t>13/08/2026</a:t>
+              <a:t>17/08/2026</a:t>
             </a:fld>
             <a:endParaRPr lang="pt-BR"/>
           </a:p>

--- a/UNIUBE-LP/Teoria_LP.pptx
+++ b/UNIUBE-LP/Teoria_LP.pptx
@@ -250,7 +250,7 @@
           <a:p>
             <a:fld id="{6ED03497-8374-466E-85FA-95E1138D8F6E}" type="datetimeFigureOut">
               <a:rPr lang="pt-BR" smtClean="0"/>
-              <a:t>17/08/2026</a:t>
+              <a:t>19/08/2026</a:t>
             </a:fld>
             <a:endParaRPr lang="pt-BR"/>
           </a:p>
@@ -11129,7 +11129,7 @@
           <a:p>
             <a:fld id="{A87E3B6E-8316-4A1C-BADA-DB7F3456EEF1}" type="datetimeFigureOut">
               <a:rPr lang="pt-BR" smtClean="0"/>
-              <a:t>17/08/2026</a:t>
+              <a:t>19/08/2026</a:t>
             </a:fld>
             <a:endParaRPr lang="pt-BR"/>
           </a:p>
@@ -11327,7 +11327,7 @@
           <a:p>
             <a:fld id="{A87E3B6E-8316-4A1C-BADA-DB7F3456EEF1}" type="datetimeFigureOut">
               <a:rPr lang="pt-BR" smtClean="0"/>
-              <a:t>17/08/2026</a:t>
+              <a:t>19/08/2026</a:t>
             </a:fld>
             <a:endParaRPr lang="pt-BR"/>
           </a:p>
@@ -11535,7 +11535,7 @@
           <a:p>
             <a:fld id="{A87E3B6E-8316-4A1C-BADA-DB7F3456EEF1}" type="datetimeFigureOut">
               <a:rPr lang="pt-BR" smtClean="0"/>
-              <a:t>17/08/2026</a:t>
+              <a:t>19/08/2026</a:t>
             </a:fld>
             <a:endParaRPr lang="pt-BR"/>
           </a:p>
@@ -11771,7 +11771,7 @@
           <a:p>
             <a:fld id="{A87E3B6E-8316-4A1C-BADA-DB7F3456EEF1}" type="datetimeFigureOut">
               <a:rPr lang="pt-BR" smtClean="0"/>
-              <a:t>17/08/2026</a:t>
+              <a:t>19/08/2026</a:t>
             </a:fld>
             <a:endParaRPr lang="pt-BR"/>
           </a:p>
@@ -11941,7 +11941,7 @@
           <a:p>
             <a:fld id="{A87E3B6E-8316-4A1C-BADA-DB7F3456EEF1}" type="datetimeFigureOut">
               <a:rPr lang="pt-BR" smtClean="0"/>
-              <a:t>17/08/2026</a:t>
+              <a:t>19/08/2026</a:t>
             </a:fld>
             <a:endParaRPr lang="pt-BR"/>
           </a:p>
@@ -12209,7 +12209,7 @@
           <a:p>
             <a:fld id="{A87E3B6E-8316-4A1C-BADA-DB7F3456EEF1}" type="datetimeFigureOut">
               <a:rPr lang="pt-BR" smtClean="0"/>
-              <a:t>17/08/2026</a:t>
+              <a:t>19/08/2026</a:t>
             </a:fld>
             <a:endParaRPr lang="pt-BR"/>
           </a:p>
@@ -12441,7 +12441,7 @@
           <a:p>
             <a:fld id="{A87E3B6E-8316-4A1C-BADA-DB7F3456EEF1}" type="datetimeFigureOut">
               <a:rPr lang="pt-BR" smtClean="0"/>
-              <a:t>17/08/2026</a:t>
+              <a:t>19/08/2026</a:t>
             </a:fld>
             <a:endParaRPr lang="pt-BR"/>
           </a:p>
@@ -12796,7 +12796,7 @@
           <a:p>
             <a:fld id="{A87E3B6E-8316-4A1C-BADA-DB7F3456EEF1}" type="datetimeFigureOut">
               <a:rPr lang="pt-BR" smtClean="0"/>
-              <a:t>17/08/2026</a:t>
+              <a:t>19/08/2026</a:t>
             </a:fld>
             <a:endParaRPr lang="pt-BR"/>
           </a:p>
@@ -12937,7 +12937,7 @@
           <a:p>
             <a:fld id="{A87E3B6E-8316-4A1C-BADA-DB7F3456EEF1}" type="datetimeFigureOut">
               <a:rPr lang="pt-BR" smtClean="0"/>
-              <a:t>17/08/2026</a:t>
+              <a:t>19/08/2026</a:t>
             </a:fld>
             <a:endParaRPr lang="pt-BR"/>
           </a:p>
@@ -13032,7 +13032,7 @@
           <a:p>
             <a:fld id="{A87E3B6E-8316-4A1C-BADA-DB7F3456EEF1}" type="datetimeFigureOut">
               <a:rPr lang="pt-BR" smtClean="0"/>
-              <a:t>17/08/2026</a:t>
+              <a:t>19/08/2026</a:t>
             </a:fld>
             <a:endParaRPr lang="pt-BR"/>
           </a:p>
@@ -13389,7 +13389,7 @@
           <a:p>
             <a:fld id="{A87E3B6E-8316-4A1C-BADA-DB7F3456EEF1}" type="datetimeFigureOut">
               <a:rPr lang="pt-BR" smtClean="0"/>
-              <a:t>17/08/2026</a:t>
+              <a:t>19/08/2026</a:t>
             </a:fld>
             <a:endParaRPr lang="pt-BR"/>
           </a:p>
@@ -13590,7 +13590,7 @@
           <a:p>
             <a:fld id="{A87E3B6E-8316-4A1C-BADA-DB7F3456EEF1}" type="datetimeFigureOut">
               <a:rPr lang="pt-BR" smtClean="0"/>
-              <a:t>17/08/2026</a:t>
+              <a:t>19/08/2026</a:t>
             </a:fld>
             <a:endParaRPr lang="pt-BR"/>
           </a:p>
@@ -13943,7 +13943,7 @@
           <a:p>
             <a:fld id="{A87E3B6E-8316-4A1C-BADA-DB7F3456EEF1}" type="datetimeFigureOut">
               <a:rPr lang="pt-BR" smtClean="0"/>
-              <a:t>17/08/2026</a:t>
+              <a:t>19/08/2026</a:t>
             </a:fld>
             <a:endParaRPr lang="pt-BR"/>
           </a:p>
@@ -14128,7 +14128,7 @@
           <a:p>
             <a:fld id="{A87E3B6E-8316-4A1C-BADA-DB7F3456EEF1}" type="datetimeFigureOut">
               <a:rPr lang="pt-BR" smtClean="0"/>
-              <a:t>17/08/2026</a:t>
+              <a:t>19/08/2026</a:t>
             </a:fld>
             <a:endParaRPr lang="pt-BR"/>
           </a:p>
@@ -14308,7 +14308,7 @@
           <a:p>
             <a:fld id="{A87E3B6E-8316-4A1C-BADA-DB7F3456EEF1}" type="datetimeFigureOut">
               <a:rPr lang="pt-BR" smtClean="0"/>
-              <a:t>17/08/2026</a:t>
+              <a:t>19/08/2026</a:t>
             </a:fld>
             <a:endParaRPr lang="pt-BR"/>
           </a:p>
@@ -14571,7 +14571,7 @@
           <a:p>
             <a:fld id="{A87E3B6E-8316-4A1C-BADA-DB7F3456EEF1}" type="datetimeFigureOut">
               <a:rPr lang="pt-BR" smtClean="0"/>
-              <a:t>17/08/2026</a:t>
+              <a:t>19/08/2026</a:t>
             </a:fld>
             <a:endParaRPr lang="pt-BR"/>
           </a:p>
@@ -14836,7 +14836,7 @@
           <a:p>
             <a:fld id="{A87E3B6E-8316-4A1C-BADA-DB7F3456EEF1}" type="datetimeFigureOut">
               <a:rPr lang="pt-BR" smtClean="0"/>
-              <a:t>17/08/2026</a:t>
+              <a:t>19/08/2026</a:t>
             </a:fld>
             <a:endParaRPr lang="pt-BR"/>
           </a:p>
@@ -15248,7 +15248,7 @@
           <a:p>
             <a:fld id="{A87E3B6E-8316-4A1C-BADA-DB7F3456EEF1}" type="datetimeFigureOut">
               <a:rPr lang="pt-BR" smtClean="0"/>
-              <a:t>17/08/2026</a:t>
+              <a:t>19/08/2026</a:t>
             </a:fld>
             <a:endParaRPr lang="pt-BR"/>
           </a:p>
@@ -15389,7 +15389,7 @@
           <a:p>
             <a:fld id="{A87E3B6E-8316-4A1C-BADA-DB7F3456EEF1}" type="datetimeFigureOut">
               <a:rPr lang="pt-BR" smtClean="0"/>
-              <a:t>17/08/2026</a:t>
+              <a:t>19/08/2026</a:t>
             </a:fld>
             <a:endParaRPr lang="pt-BR"/>
           </a:p>
@@ -15502,7 +15502,7 @@
           <a:p>
             <a:fld id="{A87E3B6E-8316-4A1C-BADA-DB7F3456EEF1}" type="datetimeFigureOut">
               <a:rPr lang="pt-BR" smtClean="0"/>
-              <a:t>17/08/2026</a:t>
+              <a:t>19/08/2026</a:t>
             </a:fld>
             <a:endParaRPr lang="pt-BR"/>
           </a:p>
@@ -15813,7 +15813,7 @@
           <a:p>
             <a:fld id="{A87E3B6E-8316-4A1C-BADA-DB7F3456EEF1}" type="datetimeFigureOut">
               <a:rPr lang="pt-BR" smtClean="0"/>
-              <a:t>17/08/2026</a:t>
+              <a:t>19/08/2026</a:t>
             </a:fld>
             <a:endParaRPr lang="pt-BR"/>
           </a:p>
@@ -16101,7 +16101,7 @@
           <a:p>
             <a:fld id="{A87E3B6E-8316-4A1C-BADA-DB7F3456EEF1}" type="datetimeFigureOut">
               <a:rPr lang="pt-BR" smtClean="0"/>
-              <a:t>17/08/2026</a:t>
+              <a:t>19/08/2026</a:t>
             </a:fld>
             <a:endParaRPr lang="pt-BR"/>
           </a:p>
@@ -16342,7 +16342,7 @@
           <a:p>
             <a:fld id="{A87E3B6E-8316-4A1C-BADA-DB7F3456EEF1}" type="datetimeFigureOut">
               <a:rPr lang="pt-BR" smtClean="0"/>
-              <a:t>17/08/2026</a:t>
+              <a:t>19/08/2026</a:t>
             </a:fld>
             <a:endParaRPr lang="pt-BR"/>
           </a:p>
@@ -16906,7 +16906,7 @@
           <a:p>
             <a:fld id="{A87E3B6E-8316-4A1C-BADA-DB7F3456EEF1}" type="datetimeFigureOut">
               <a:rPr lang="pt-BR" smtClean="0"/>
-              <a:t>17/08/2026</a:t>
+              <a:t>19/08/2026</a:t>
             </a:fld>
             <a:endParaRPr lang="pt-BR"/>
           </a:p>
@@ -27668,7 +27668,7 @@
               <a:t>Número real de dupla precisão (</a:t>
             </a:r>
             <a:r>
-              <a:rPr lang="pt-BR" sz="2200" dirty="0" err="1"/>
+              <a:rPr lang="pt-BR" sz="2200" i="1" dirty="0" err="1"/>
               <a:t>double</a:t>
             </a:r>
             <a:r>
